--- a/DIA 2 - APRESENTACAO - VERSAO AMPLIADA FINAL.pptx
+++ b/DIA 2 - APRESENTACAO - VERSAO AMPLIADA FINAL.pptx
@@ -5,20 +5,25 @@
     <p:sldMasterId id="2147483648" r:id="rId1"/>
   </p:sldMasterIdLst>
   <p:notesMasterIdLst>
-    <p:notesMasterId r:id="rId13"/>
+    <p:notesMasterId r:id="rId18"/>
   </p:notesMasterIdLst>
   <p:sldIdLst>
     <p:sldId id="256" r:id="rId2"/>
     <p:sldId id="266" r:id="rId3"/>
-    <p:sldId id="268" r:id="rId4"/>
+    <p:sldId id="273" r:id="rId4"/>
     <p:sldId id="269" r:id="rId5"/>
-    <p:sldId id="267" r:id="rId6"/>
-    <p:sldId id="265" r:id="rId7"/>
-    <p:sldId id="260" r:id="rId8"/>
-    <p:sldId id="262" r:id="rId9"/>
-    <p:sldId id="263" r:id="rId10"/>
-    <p:sldId id="264" r:id="rId11"/>
-    <p:sldId id="261" r:id="rId12"/>
+    <p:sldId id="274" r:id="rId6"/>
+    <p:sldId id="270" r:id="rId7"/>
+    <p:sldId id="271" r:id="rId8"/>
+    <p:sldId id="275" r:id="rId9"/>
+    <p:sldId id="272" r:id="rId10"/>
+    <p:sldId id="267" r:id="rId11"/>
+    <p:sldId id="265" r:id="rId12"/>
+    <p:sldId id="260" r:id="rId13"/>
+    <p:sldId id="262" r:id="rId14"/>
+    <p:sldId id="263" r:id="rId15"/>
+    <p:sldId id="264" r:id="rId16"/>
+    <p:sldId id="261" r:id="rId17"/>
   </p:sldIdLst>
   <p:sldSz cx="12192000" cy="6858000"/>
   <p:notesSz cx="6858000" cy="9144000"/>
@@ -2708,6 +2713,232 @@
       </pc:sldChg>
     </pc:docChg>
   </pc:docChgLst>
+  <pc:docChgLst>
+    <pc:chgData name="Renan Xavier Cortes" userId="d6af805853004405" providerId="LiveId" clId="{32CE5F03-9B31-4102-A03B-787EE1528540}"/>
+    <pc:docChg chg="undo custSel addSld delSld modSld">
+      <pc:chgData name="Renan Xavier Cortes" userId="d6af805853004405" providerId="LiveId" clId="{32CE5F03-9B31-4102-A03B-787EE1528540}" dt="2026-09-29T19:03:40.045" v="359" actId="1076"/>
+      <pc:docMkLst>
+        <pc:docMk/>
+      </pc:docMkLst>
+      <pc:sldChg chg="del">
+        <pc:chgData name="Renan Xavier Cortes" userId="d6af805853004405" providerId="LiveId" clId="{32CE5F03-9B31-4102-A03B-787EE1528540}" dt="2026-09-29T18:53:06.902" v="89" actId="47"/>
+        <pc:sldMkLst>
+          <pc:docMk/>
+          <pc:sldMk cId="1465096313" sldId="268"/>
+        </pc:sldMkLst>
+      </pc:sldChg>
+      <pc:sldChg chg="addSp delSp modSp add mod delAnim modAnim">
+        <pc:chgData name="Renan Xavier Cortes" userId="d6af805853004405" providerId="LiveId" clId="{32CE5F03-9B31-4102-A03B-787EE1528540}" dt="2026-09-29T18:45:51.497" v="87" actId="1076"/>
+        <pc:sldMkLst>
+          <pc:docMk/>
+          <pc:sldMk cId="1268954086" sldId="270"/>
+        </pc:sldMkLst>
+        <pc:spChg chg="del">
+          <ac:chgData name="Renan Xavier Cortes" userId="d6af805853004405" providerId="LiveId" clId="{32CE5F03-9B31-4102-A03B-787EE1528540}" dt="2026-09-29T18:44:29.944" v="7" actId="478"/>
+          <ac:spMkLst>
+            <pc:docMk/>
+            <pc:sldMk cId="1268954086" sldId="270"/>
+            <ac:spMk id="9" creationId="{4ADC85D4-4D6F-B41F-8D19-0C37EEA6532F}"/>
+          </ac:spMkLst>
+        </pc:spChg>
+        <pc:spChg chg="add mod">
+          <ac:chgData name="Renan Xavier Cortes" userId="d6af805853004405" providerId="LiveId" clId="{32CE5F03-9B31-4102-A03B-787EE1528540}" dt="2026-09-29T18:45:51.497" v="87" actId="1076"/>
+          <ac:spMkLst>
+            <pc:docMk/>
+            <pc:sldMk cId="1268954086" sldId="270"/>
+            <ac:spMk id="10" creationId="{439966E0-F76D-F319-6141-19CB38DC8D8B}"/>
+          </ac:spMkLst>
+        </pc:spChg>
+        <pc:spChg chg="del">
+          <ac:chgData name="Renan Xavier Cortes" userId="d6af805853004405" providerId="LiveId" clId="{32CE5F03-9B31-4102-A03B-787EE1528540}" dt="2026-09-29T18:44:29.348" v="6" actId="478"/>
+          <ac:spMkLst>
+            <pc:docMk/>
+            <pc:sldMk cId="1268954086" sldId="270"/>
+            <ac:spMk id="11" creationId="{2618659E-1058-1132-89D4-6B86F32FC853}"/>
+          </ac:spMkLst>
+        </pc:spChg>
+        <pc:spChg chg="del">
+          <ac:chgData name="Renan Xavier Cortes" userId="d6af805853004405" providerId="LiveId" clId="{32CE5F03-9B31-4102-A03B-787EE1528540}" dt="2026-09-29T18:44:27.800" v="5" actId="478"/>
+          <ac:spMkLst>
+            <pc:docMk/>
+            <pc:sldMk cId="1268954086" sldId="270"/>
+            <ac:spMk id="12" creationId="{0A11E838-7A28-D1BE-5FDC-461C62B8169E}"/>
+          </ac:spMkLst>
+        </pc:spChg>
+        <pc:spChg chg="del">
+          <ac:chgData name="Renan Xavier Cortes" userId="d6af805853004405" providerId="LiveId" clId="{32CE5F03-9B31-4102-A03B-787EE1528540}" dt="2026-09-29T18:44:26.959" v="4" actId="478"/>
+          <ac:spMkLst>
+            <pc:docMk/>
+            <pc:sldMk cId="1268954086" sldId="270"/>
+            <ac:spMk id="13" creationId="{D1F1D044-C509-E859-2F17-4F37728104EB}"/>
+          </ac:spMkLst>
+        </pc:spChg>
+        <pc:spChg chg="add mod">
+          <ac:chgData name="Renan Xavier Cortes" userId="d6af805853004405" providerId="LiveId" clId="{32CE5F03-9B31-4102-A03B-787EE1528540}" dt="2026-09-29T18:45:51.497" v="87" actId="1076"/>
+          <ac:spMkLst>
+            <pc:docMk/>
+            <pc:sldMk cId="1268954086" sldId="270"/>
+            <ac:spMk id="14" creationId="{09C2AF41-9EBC-A93B-F400-326DED611B2C}"/>
+          </ac:spMkLst>
+        </pc:spChg>
+        <pc:picChg chg="del">
+          <ac:chgData name="Renan Xavier Cortes" userId="d6af805853004405" providerId="LiveId" clId="{32CE5F03-9B31-4102-A03B-787EE1528540}" dt="2026-09-29T18:44:25.537" v="3" actId="478"/>
+          <ac:picMkLst>
+            <pc:docMk/>
+            <pc:sldMk cId="1268954086" sldId="270"/>
+            <ac:picMk id="5" creationId="{4318DFD3-3634-EC8F-4CA2-B0EB8093C36F}"/>
+          </ac:picMkLst>
+        </pc:picChg>
+        <pc:picChg chg="add mod">
+          <ac:chgData name="Renan Xavier Cortes" userId="d6af805853004405" providerId="LiveId" clId="{32CE5F03-9B31-4102-A03B-787EE1528540}" dt="2026-09-29T18:44:36.329" v="11" actId="1076"/>
+          <ac:picMkLst>
+            <pc:docMk/>
+            <pc:sldMk cId="1268954086" sldId="270"/>
+            <ac:picMk id="6" creationId="{C7CB915E-012D-A5FC-3321-870B91EF401C}"/>
+          </ac:picMkLst>
+        </pc:picChg>
+      </pc:sldChg>
+      <pc:sldChg chg="delSp add mod delAnim">
+        <pc:chgData name="Renan Xavier Cortes" userId="d6af805853004405" providerId="LiveId" clId="{32CE5F03-9B31-4102-A03B-787EE1528540}" dt="2026-09-29T18:59:53.562" v="201" actId="478"/>
+        <pc:sldMkLst>
+          <pc:docMk/>
+          <pc:sldMk cId="3832149468" sldId="271"/>
+        </pc:sldMkLst>
+        <pc:spChg chg="del">
+          <ac:chgData name="Renan Xavier Cortes" userId="d6af805853004405" providerId="LiveId" clId="{32CE5F03-9B31-4102-A03B-787EE1528540}" dt="2026-09-29T18:59:53.562" v="201" actId="478"/>
+          <ac:spMkLst>
+            <pc:docMk/>
+            <pc:sldMk cId="3832149468" sldId="271"/>
+            <ac:spMk id="9" creationId="{4ADC85D4-4D6F-B41F-8D19-0C37EEA6532F}"/>
+          </ac:spMkLst>
+        </pc:spChg>
+        <pc:spChg chg="del">
+          <ac:chgData name="Renan Xavier Cortes" userId="d6af805853004405" providerId="LiveId" clId="{32CE5F03-9B31-4102-A03B-787EE1528540}" dt="2026-09-29T18:59:48.511" v="197" actId="478"/>
+          <ac:spMkLst>
+            <pc:docMk/>
+            <pc:sldMk cId="3832149468" sldId="271"/>
+            <ac:spMk id="11" creationId="{2618659E-1058-1132-89D4-6B86F32FC853}"/>
+          </ac:spMkLst>
+        </pc:spChg>
+        <pc:spChg chg="del">
+          <ac:chgData name="Renan Xavier Cortes" userId="d6af805853004405" providerId="LiveId" clId="{32CE5F03-9B31-4102-A03B-787EE1528540}" dt="2026-09-29T18:59:50.995" v="199" actId="478"/>
+          <ac:spMkLst>
+            <pc:docMk/>
+            <pc:sldMk cId="3832149468" sldId="271"/>
+            <ac:spMk id="12" creationId="{0A11E838-7A28-D1BE-5FDC-461C62B8169E}"/>
+          </ac:spMkLst>
+        </pc:spChg>
+        <pc:spChg chg="del">
+          <ac:chgData name="Renan Xavier Cortes" userId="d6af805853004405" providerId="LiveId" clId="{32CE5F03-9B31-4102-A03B-787EE1528540}" dt="2026-09-29T18:59:49.889" v="198" actId="478"/>
+          <ac:spMkLst>
+            <pc:docMk/>
+            <pc:sldMk cId="3832149468" sldId="271"/>
+            <ac:spMk id="13" creationId="{D1F1D044-C509-E859-2F17-4F37728104EB}"/>
+          </ac:spMkLst>
+        </pc:spChg>
+        <pc:picChg chg="del">
+          <ac:chgData name="Renan Xavier Cortes" userId="d6af805853004405" providerId="LiveId" clId="{32CE5F03-9B31-4102-A03B-787EE1528540}" dt="2026-09-29T18:59:51.795" v="200" actId="478"/>
+          <ac:picMkLst>
+            <pc:docMk/>
+            <pc:sldMk cId="3832149468" sldId="271"/>
+            <ac:picMk id="5" creationId="{4318DFD3-3634-EC8F-4CA2-B0EB8093C36F}"/>
+          </ac:picMkLst>
+        </pc:picChg>
+      </pc:sldChg>
+      <pc:sldChg chg="add">
+        <pc:chgData name="Renan Xavier Cortes" userId="d6af805853004405" providerId="LiveId" clId="{32CE5F03-9B31-4102-A03B-787EE1528540}" dt="2026-09-29T18:44:16.387" v="2"/>
+        <pc:sldMkLst>
+          <pc:docMk/>
+          <pc:sldMk cId="1290076" sldId="272"/>
+        </pc:sldMkLst>
+      </pc:sldChg>
+      <pc:sldChg chg="add">
+        <pc:chgData name="Renan Xavier Cortes" userId="d6af805853004405" providerId="LiveId" clId="{32CE5F03-9B31-4102-A03B-787EE1528540}" dt="2026-09-29T18:52:42.033" v="88"/>
+        <pc:sldMkLst>
+          <pc:docMk/>
+          <pc:sldMk cId="587472357" sldId="273"/>
+        </pc:sldMkLst>
+      </pc:sldChg>
+      <pc:sldChg chg="modSp add mod">
+        <pc:chgData name="Renan Xavier Cortes" userId="d6af805853004405" providerId="LiveId" clId="{32CE5F03-9B31-4102-A03B-787EE1528540}" dt="2026-09-29T18:59:18.488" v="196" actId="20577"/>
+        <pc:sldMkLst>
+          <pc:docMk/>
+          <pc:sldMk cId="2697758197" sldId="274"/>
+        </pc:sldMkLst>
+        <pc:spChg chg="mod">
+          <ac:chgData name="Renan Xavier Cortes" userId="d6af805853004405" providerId="LiveId" clId="{32CE5F03-9B31-4102-A03B-787EE1528540}" dt="2026-09-29T18:59:18.488" v="196" actId="20577"/>
+          <ac:spMkLst>
+            <pc:docMk/>
+            <pc:sldMk cId="2697758197" sldId="274"/>
+            <ac:spMk id="4" creationId="{F9B44222-0FEB-DD8A-E65A-F10683C06A0F}"/>
+          </ac:spMkLst>
+        </pc:spChg>
+      </pc:sldChg>
+      <pc:sldChg chg="addSp delSp modSp add mod">
+        <pc:chgData name="Renan Xavier Cortes" userId="d6af805853004405" providerId="LiveId" clId="{32CE5F03-9B31-4102-A03B-787EE1528540}" dt="2026-09-29T19:03:40.045" v="359" actId="1076"/>
+        <pc:sldMkLst>
+          <pc:docMk/>
+          <pc:sldMk cId="2071889659" sldId="275"/>
+        </pc:sldMkLst>
+        <pc:spChg chg="mod">
+          <ac:chgData name="Renan Xavier Cortes" userId="d6af805853004405" providerId="LiveId" clId="{32CE5F03-9B31-4102-A03B-787EE1528540}" dt="2026-09-29T19:00:23.343" v="313" actId="20577"/>
+          <ac:spMkLst>
+            <pc:docMk/>
+            <pc:sldMk cId="2071889659" sldId="275"/>
+            <ac:spMk id="4" creationId="{F9B44222-0FEB-DD8A-E65A-F10683C06A0F}"/>
+          </ac:spMkLst>
+        </pc:spChg>
+        <pc:spChg chg="add del">
+          <ac:chgData name="Renan Xavier Cortes" userId="d6af805853004405" providerId="LiveId" clId="{32CE5F03-9B31-4102-A03B-787EE1528540}" dt="2026-09-29T19:02:05.280" v="333" actId="11529"/>
+          <ac:spMkLst>
+            <pc:docMk/>
+            <pc:sldMk cId="2071889659" sldId="275"/>
+            <ac:spMk id="11" creationId="{8BEE410F-77B2-4534-4D33-ACC5D248E82D}"/>
+          </ac:spMkLst>
+        </pc:spChg>
+        <pc:spChg chg="add mod">
+          <ac:chgData name="Renan Xavier Cortes" userId="d6af805853004405" providerId="LiveId" clId="{32CE5F03-9B31-4102-A03B-787EE1528540}" dt="2026-09-29T19:02:32.496" v="350" actId="692"/>
+          <ac:spMkLst>
+            <pc:docMk/>
+            <pc:sldMk cId="2071889659" sldId="275"/>
+            <ac:spMk id="12" creationId="{0B40F988-AD4C-F7F7-CE31-F2CDDF82E91A}"/>
+          </ac:spMkLst>
+        </pc:spChg>
+        <pc:spChg chg="add mod">
+          <ac:chgData name="Renan Xavier Cortes" userId="d6af805853004405" providerId="LiveId" clId="{32CE5F03-9B31-4102-A03B-787EE1528540}" dt="2026-09-29T19:02:49.280" v="354" actId="14100"/>
+          <ac:spMkLst>
+            <pc:docMk/>
+            <pc:sldMk cId="2071889659" sldId="275"/>
+            <ac:spMk id="13" creationId="{D34651EC-928C-45A9-FB4A-89294682FE03}"/>
+          </ac:spMkLst>
+        </pc:spChg>
+        <pc:picChg chg="add mod">
+          <ac:chgData name="Renan Xavier Cortes" userId="d6af805853004405" providerId="LiveId" clId="{32CE5F03-9B31-4102-A03B-787EE1528540}" dt="2026-09-29T19:01:30.373" v="321" actId="1076"/>
+          <ac:picMkLst>
+            <pc:docMk/>
+            <pc:sldMk cId="2071889659" sldId="275"/>
+            <ac:picMk id="6" creationId="{E0B70768-61C8-F85A-E614-A9F14CEAD950}"/>
+          </ac:picMkLst>
+        </pc:picChg>
+        <pc:picChg chg="add del mod">
+          <ac:chgData name="Renan Xavier Cortes" userId="d6af805853004405" providerId="LiveId" clId="{32CE5F03-9B31-4102-A03B-787EE1528540}" dt="2026-09-29T19:03:10.356" v="355" actId="478"/>
+          <ac:picMkLst>
+            <pc:docMk/>
+            <pc:sldMk cId="2071889659" sldId="275"/>
+            <ac:picMk id="10" creationId="{918C452C-A393-6CAA-7A87-EA606435045A}"/>
+          </ac:picMkLst>
+        </pc:picChg>
+        <pc:picChg chg="add mod">
+          <ac:chgData name="Renan Xavier Cortes" userId="d6af805853004405" providerId="LiveId" clId="{32CE5F03-9B31-4102-A03B-787EE1528540}" dt="2026-09-29T19:03:40.045" v="359" actId="1076"/>
+          <ac:picMkLst>
+            <pc:docMk/>
+            <pc:sldMk cId="2071889659" sldId="275"/>
+            <ac:picMk id="15" creationId="{AD23F083-ACAE-F3BE-99C5-AC59D9D5284D}"/>
+          </ac:picMkLst>
+        </pc:picChg>
+      </pc:sldChg>
+    </pc:docChg>
+  </pc:docChgLst>
 </pc:chgInfo>
 </file>
 
@@ -3218,6 +3449,426 @@
     </p:spTree>
     <p:extLst>
       <p:ext uri="{BB962C8B-B14F-4D97-AF65-F5344CB8AC3E}">
+        <p14:creationId xmlns:p14="http://schemas.microsoft.com/office/powerpoint/2010/main" val="592255382"/>
+      </p:ext>
+    </p:extLst>
+  </p:cSld>
+  <p:clrMapOvr>
+    <a:masterClrMapping/>
+  </p:clrMapOvr>
+</p:notes>
+</file>
+
+<file path=ppt/notesSlides/notesSlide11.xml><?xml version="1.0" encoding="utf-8"?>
+<p:notes xmlns:a="http://schemas.openxmlformats.org/drawingml/2006/main" xmlns:r="http://schemas.openxmlformats.org/officeDocument/2006/relationships" xmlns:p="http://schemas.openxmlformats.org/presentationml/2006/main">
+  <p:cSld>
+    <p:spTree>
+      <p:nvGrpSpPr>
+        <p:cNvPr id="1" name=""/>
+        <p:cNvGrpSpPr/>
+        <p:nvPr/>
+      </p:nvGrpSpPr>
+      <p:grpSpPr>
+        <a:xfrm>
+          <a:off x="0" y="0"/>
+          <a:ext cx="0" cy="0"/>
+          <a:chOff x="0" y="0"/>
+          <a:chExt cx="0" cy="0"/>
+        </a:xfrm>
+      </p:grpSpPr>
+      <p:sp>
+        <p:nvSpPr>
+          <p:cNvPr id="2" name="Espaço Reservado para Imagem de Slide 1"/>
+          <p:cNvSpPr>
+            <a:spLocks noGrp="1" noRot="1" noChangeAspect="1"/>
+          </p:cNvSpPr>
+          <p:nvPr>
+            <p:ph type="sldImg"/>
+          </p:nvPr>
+        </p:nvSpPr>
+        <p:spPr/>
+      </p:sp>
+      <p:sp>
+        <p:nvSpPr>
+          <p:cNvPr id="3" name="Espaço Reservado para Anotações 2"/>
+          <p:cNvSpPr>
+            <a:spLocks noGrp="1"/>
+          </p:cNvSpPr>
+          <p:nvPr>
+            <p:ph type="body" idx="1"/>
+          </p:nvPr>
+        </p:nvSpPr>
+        <p:spPr/>
+        <p:txBody>
+          <a:bodyPr/>
+          <a:lstStyle/>
+          <a:p>
+            <a:endParaRPr lang="pt-BR" dirty="0"/>
+          </a:p>
+        </p:txBody>
+      </p:sp>
+      <p:sp>
+        <p:nvSpPr>
+          <p:cNvPr id="4" name="Espaço Reservado para Número de Slide 3"/>
+          <p:cNvSpPr>
+            <a:spLocks noGrp="1"/>
+          </p:cNvSpPr>
+          <p:nvPr>
+            <p:ph type="sldNum" sz="quarter" idx="5"/>
+          </p:nvPr>
+        </p:nvSpPr>
+        <p:spPr/>
+        <p:txBody>
+          <a:bodyPr/>
+          <a:lstStyle/>
+          <a:p>
+            <a:fld id="{87C88D93-34D3-419D-AEF5-A26FFAFED389}" type="slidenum">
+              <a:rPr lang="pt-BR" smtClean="0"/>
+              <a:t>12</a:t>
+            </a:fld>
+            <a:endParaRPr lang="pt-BR"/>
+          </a:p>
+        </p:txBody>
+      </p:sp>
+    </p:spTree>
+    <p:extLst>
+      <p:ext uri="{BB962C8B-B14F-4D97-AF65-F5344CB8AC3E}">
+        <p14:creationId xmlns:p14="http://schemas.microsoft.com/office/powerpoint/2010/main" val="2429228612"/>
+      </p:ext>
+    </p:extLst>
+  </p:cSld>
+  <p:clrMapOvr>
+    <a:masterClrMapping/>
+  </p:clrMapOvr>
+</p:notes>
+</file>
+
+<file path=ppt/notesSlides/notesSlide12.xml><?xml version="1.0" encoding="utf-8"?>
+<p:notes xmlns:a="http://schemas.openxmlformats.org/drawingml/2006/main" xmlns:r="http://schemas.openxmlformats.org/officeDocument/2006/relationships" xmlns:p="http://schemas.openxmlformats.org/presentationml/2006/main">
+  <p:cSld>
+    <p:spTree>
+      <p:nvGrpSpPr>
+        <p:cNvPr id="1" name=""/>
+        <p:cNvGrpSpPr/>
+        <p:nvPr/>
+      </p:nvGrpSpPr>
+      <p:grpSpPr>
+        <a:xfrm>
+          <a:off x="0" y="0"/>
+          <a:ext cx="0" cy="0"/>
+          <a:chOff x="0" y="0"/>
+          <a:chExt cx="0" cy="0"/>
+        </a:xfrm>
+      </p:grpSpPr>
+      <p:sp>
+        <p:nvSpPr>
+          <p:cNvPr id="2" name="Espaço Reservado para Imagem de Slide 1"/>
+          <p:cNvSpPr>
+            <a:spLocks noGrp="1" noRot="1" noChangeAspect="1"/>
+          </p:cNvSpPr>
+          <p:nvPr>
+            <p:ph type="sldImg"/>
+          </p:nvPr>
+        </p:nvSpPr>
+        <p:spPr/>
+      </p:sp>
+      <p:sp>
+        <p:nvSpPr>
+          <p:cNvPr id="3" name="Espaço Reservado para Anotações 2"/>
+          <p:cNvSpPr>
+            <a:spLocks noGrp="1"/>
+          </p:cNvSpPr>
+          <p:nvPr>
+            <p:ph type="body" idx="1"/>
+          </p:nvPr>
+        </p:nvSpPr>
+        <p:spPr/>
+        <p:txBody>
+          <a:bodyPr/>
+          <a:lstStyle/>
+          <a:p>
+            <a:endParaRPr lang="pt-BR" dirty="0"/>
+          </a:p>
+        </p:txBody>
+      </p:sp>
+      <p:sp>
+        <p:nvSpPr>
+          <p:cNvPr id="4" name="Espaço Reservado para Número de Slide 3"/>
+          <p:cNvSpPr>
+            <a:spLocks noGrp="1"/>
+          </p:cNvSpPr>
+          <p:nvPr>
+            <p:ph type="sldNum" sz="quarter" idx="5"/>
+          </p:nvPr>
+        </p:nvSpPr>
+        <p:spPr/>
+        <p:txBody>
+          <a:bodyPr/>
+          <a:lstStyle/>
+          <a:p>
+            <a:fld id="{87C88D93-34D3-419D-AEF5-A26FFAFED389}" type="slidenum">
+              <a:rPr lang="pt-BR" smtClean="0"/>
+              <a:t>13</a:t>
+            </a:fld>
+            <a:endParaRPr lang="pt-BR"/>
+          </a:p>
+        </p:txBody>
+      </p:sp>
+    </p:spTree>
+    <p:extLst>
+      <p:ext uri="{BB962C8B-B14F-4D97-AF65-F5344CB8AC3E}">
+        <p14:creationId xmlns:p14="http://schemas.microsoft.com/office/powerpoint/2010/main" val="3517665198"/>
+      </p:ext>
+    </p:extLst>
+  </p:cSld>
+  <p:clrMapOvr>
+    <a:masterClrMapping/>
+  </p:clrMapOvr>
+</p:notes>
+</file>
+
+<file path=ppt/notesSlides/notesSlide13.xml><?xml version="1.0" encoding="utf-8"?>
+<p:notes xmlns:a="http://schemas.openxmlformats.org/drawingml/2006/main" xmlns:r="http://schemas.openxmlformats.org/officeDocument/2006/relationships" xmlns:p="http://schemas.openxmlformats.org/presentationml/2006/main">
+  <p:cSld>
+    <p:spTree>
+      <p:nvGrpSpPr>
+        <p:cNvPr id="1" name=""/>
+        <p:cNvGrpSpPr/>
+        <p:nvPr/>
+      </p:nvGrpSpPr>
+      <p:grpSpPr>
+        <a:xfrm>
+          <a:off x="0" y="0"/>
+          <a:ext cx="0" cy="0"/>
+          <a:chOff x="0" y="0"/>
+          <a:chExt cx="0" cy="0"/>
+        </a:xfrm>
+      </p:grpSpPr>
+      <p:sp>
+        <p:nvSpPr>
+          <p:cNvPr id="2" name="Espaço Reservado para Imagem de Slide 1"/>
+          <p:cNvSpPr>
+            <a:spLocks noGrp="1" noRot="1" noChangeAspect="1"/>
+          </p:cNvSpPr>
+          <p:nvPr>
+            <p:ph type="sldImg"/>
+          </p:nvPr>
+        </p:nvSpPr>
+        <p:spPr/>
+      </p:sp>
+      <p:sp>
+        <p:nvSpPr>
+          <p:cNvPr id="3" name="Espaço Reservado para Anotações 2"/>
+          <p:cNvSpPr>
+            <a:spLocks noGrp="1"/>
+          </p:cNvSpPr>
+          <p:nvPr>
+            <p:ph type="body" idx="1"/>
+          </p:nvPr>
+        </p:nvSpPr>
+        <p:spPr/>
+        <p:txBody>
+          <a:bodyPr/>
+          <a:lstStyle/>
+          <a:p>
+            <a:endParaRPr lang="pt-BR" dirty="0"/>
+          </a:p>
+        </p:txBody>
+      </p:sp>
+      <p:sp>
+        <p:nvSpPr>
+          <p:cNvPr id="4" name="Espaço Reservado para Número de Slide 3"/>
+          <p:cNvSpPr>
+            <a:spLocks noGrp="1"/>
+          </p:cNvSpPr>
+          <p:nvPr>
+            <p:ph type="sldNum" sz="quarter" idx="5"/>
+          </p:nvPr>
+        </p:nvSpPr>
+        <p:spPr/>
+        <p:txBody>
+          <a:bodyPr/>
+          <a:lstStyle/>
+          <a:p>
+            <a:fld id="{87C88D93-34D3-419D-AEF5-A26FFAFED389}" type="slidenum">
+              <a:rPr lang="pt-BR" smtClean="0"/>
+              <a:t>14</a:t>
+            </a:fld>
+            <a:endParaRPr lang="pt-BR"/>
+          </a:p>
+        </p:txBody>
+      </p:sp>
+    </p:spTree>
+    <p:extLst>
+      <p:ext uri="{BB962C8B-B14F-4D97-AF65-F5344CB8AC3E}">
+        <p14:creationId xmlns:p14="http://schemas.microsoft.com/office/powerpoint/2010/main" val="1357359887"/>
+      </p:ext>
+    </p:extLst>
+  </p:cSld>
+  <p:clrMapOvr>
+    <a:masterClrMapping/>
+  </p:clrMapOvr>
+</p:notes>
+</file>
+
+<file path=ppt/notesSlides/notesSlide14.xml><?xml version="1.0" encoding="utf-8"?>
+<p:notes xmlns:a="http://schemas.openxmlformats.org/drawingml/2006/main" xmlns:r="http://schemas.openxmlformats.org/officeDocument/2006/relationships" xmlns:p="http://schemas.openxmlformats.org/presentationml/2006/main">
+  <p:cSld>
+    <p:spTree>
+      <p:nvGrpSpPr>
+        <p:cNvPr id="1" name=""/>
+        <p:cNvGrpSpPr/>
+        <p:nvPr/>
+      </p:nvGrpSpPr>
+      <p:grpSpPr>
+        <a:xfrm>
+          <a:off x="0" y="0"/>
+          <a:ext cx="0" cy="0"/>
+          <a:chOff x="0" y="0"/>
+          <a:chExt cx="0" cy="0"/>
+        </a:xfrm>
+      </p:grpSpPr>
+      <p:sp>
+        <p:nvSpPr>
+          <p:cNvPr id="2" name="Espaço Reservado para Imagem de Slide 1"/>
+          <p:cNvSpPr>
+            <a:spLocks noGrp="1" noRot="1" noChangeAspect="1"/>
+          </p:cNvSpPr>
+          <p:nvPr>
+            <p:ph type="sldImg"/>
+          </p:nvPr>
+        </p:nvSpPr>
+        <p:spPr/>
+      </p:sp>
+      <p:sp>
+        <p:nvSpPr>
+          <p:cNvPr id="3" name="Espaço Reservado para Anotações 2"/>
+          <p:cNvSpPr>
+            <a:spLocks noGrp="1"/>
+          </p:cNvSpPr>
+          <p:nvPr>
+            <p:ph type="body" idx="1"/>
+          </p:nvPr>
+        </p:nvSpPr>
+        <p:spPr/>
+        <p:txBody>
+          <a:bodyPr/>
+          <a:lstStyle/>
+          <a:p>
+            <a:endParaRPr lang="pt-BR" dirty="0"/>
+          </a:p>
+        </p:txBody>
+      </p:sp>
+      <p:sp>
+        <p:nvSpPr>
+          <p:cNvPr id="4" name="Espaço Reservado para Número de Slide 3"/>
+          <p:cNvSpPr>
+            <a:spLocks noGrp="1"/>
+          </p:cNvSpPr>
+          <p:nvPr>
+            <p:ph type="sldNum" sz="quarter" idx="5"/>
+          </p:nvPr>
+        </p:nvSpPr>
+        <p:spPr/>
+        <p:txBody>
+          <a:bodyPr/>
+          <a:lstStyle/>
+          <a:p>
+            <a:fld id="{87C88D93-34D3-419D-AEF5-A26FFAFED389}" type="slidenum">
+              <a:rPr lang="pt-BR" smtClean="0"/>
+              <a:t>15</a:t>
+            </a:fld>
+            <a:endParaRPr lang="pt-BR"/>
+          </a:p>
+        </p:txBody>
+      </p:sp>
+    </p:spTree>
+    <p:extLst>
+      <p:ext uri="{BB962C8B-B14F-4D97-AF65-F5344CB8AC3E}">
+        <p14:creationId xmlns:p14="http://schemas.microsoft.com/office/powerpoint/2010/main" val="393282365"/>
+      </p:ext>
+    </p:extLst>
+  </p:cSld>
+  <p:clrMapOvr>
+    <a:masterClrMapping/>
+  </p:clrMapOvr>
+</p:notes>
+</file>
+
+<file path=ppt/notesSlides/notesSlide15.xml><?xml version="1.0" encoding="utf-8"?>
+<p:notes xmlns:a="http://schemas.openxmlformats.org/drawingml/2006/main" xmlns:r="http://schemas.openxmlformats.org/officeDocument/2006/relationships" xmlns:p="http://schemas.openxmlformats.org/presentationml/2006/main">
+  <p:cSld>
+    <p:spTree>
+      <p:nvGrpSpPr>
+        <p:cNvPr id="1" name=""/>
+        <p:cNvGrpSpPr/>
+        <p:nvPr/>
+      </p:nvGrpSpPr>
+      <p:grpSpPr>
+        <a:xfrm>
+          <a:off x="0" y="0"/>
+          <a:ext cx="0" cy="0"/>
+          <a:chOff x="0" y="0"/>
+          <a:chExt cx="0" cy="0"/>
+        </a:xfrm>
+      </p:grpSpPr>
+      <p:sp>
+        <p:nvSpPr>
+          <p:cNvPr id="2" name="Espaço Reservado para Imagem de Slide 1"/>
+          <p:cNvSpPr>
+            <a:spLocks noGrp="1" noRot="1" noChangeAspect="1"/>
+          </p:cNvSpPr>
+          <p:nvPr>
+            <p:ph type="sldImg"/>
+          </p:nvPr>
+        </p:nvSpPr>
+        <p:spPr/>
+      </p:sp>
+      <p:sp>
+        <p:nvSpPr>
+          <p:cNvPr id="3" name="Espaço Reservado para Anotações 2"/>
+          <p:cNvSpPr>
+            <a:spLocks noGrp="1"/>
+          </p:cNvSpPr>
+          <p:nvPr>
+            <p:ph type="body" idx="1"/>
+          </p:nvPr>
+        </p:nvSpPr>
+        <p:spPr/>
+        <p:txBody>
+          <a:bodyPr/>
+          <a:lstStyle/>
+          <a:p>
+            <a:endParaRPr lang="pt-BR" dirty="0"/>
+          </a:p>
+        </p:txBody>
+      </p:sp>
+      <p:sp>
+        <p:nvSpPr>
+          <p:cNvPr id="4" name="Espaço Reservado para Número de Slide 3"/>
+          <p:cNvSpPr>
+            <a:spLocks noGrp="1"/>
+          </p:cNvSpPr>
+          <p:nvPr>
+            <p:ph type="sldNum" sz="quarter" idx="5"/>
+          </p:nvPr>
+        </p:nvSpPr>
+        <p:spPr/>
+        <p:txBody>
+          <a:bodyPr/>
+          <a:lstStyle/>
+          <a:p>
+            <a:fld id="{87C88D93-34D3-419D-AEF5-A26FFAFED389}" type="slidenum">
+              <a:rPr lang="pt-BR" smtClean="0"/>
+              <a:t>16</a:t>
+            </a:fld>
+            <a:endParaRPr lang="pt-BR"/>
+          </a:p>
+        </p:txBody>
+      </p:sp>
+    </p:spTree>
+    <p:extLst>
+      <p:ext uri="{BB962C8B-B14F-4D97-AF65-F5344CB8AC3E}">
         <p14:creationId xmlns:p14="http://schemas.microsoft.com/office/powerpoint/2010/main" val="2981686523"/>
       </p:ext>
     </p:extLst>
@@ -3302,7 +3953,7 @@
     </p:spTree>
     <p:extLst>
       <p:ext uri="{BB962C8B-B14F-4D97-AF65-F5344CB8AC3E}">
-        <p14:creationId xmlns:p14="http://schemas.microsoft.com/office/powerpoint/2010/main" val="3324213401"/>
+        <p14:creationId xmlns:p14="http://schemas.microsoft.com/office/powerpoint/2010/main" val="1850242408"/>
       </p:ext>
     </p:extLst>
   </p:cSld>
@@ -3470,7 +4121,7 @@
     </p:spTree>
     <p:extLst>
       <p:ext uri="{BB962C8B-B14F-4D97-AF65-F5344CB8AC3E}">
-        <p14:creationId xmlns:p14="http://schemas.microsoft.com/office/powerpoint/2010/main" val="2353704698"/>
+        <p14:creationId xmlns:p14="http://schemas.microsoft.com/office/powerpoint/2010/main" val="575110526"/>
       </p:ext>
     </p:extLst>
   </p:cSld>
@@ -3554,7 +4205,7 @@
     </p:spTree>
     <p:extLst>
       <p:ext uri="{BB962C8B-B14F-4D97-AF65-F5344CB8AC3E}">
-        <p14:creationId xmlns:p14="http://schemas.microsoft.com/office/powerpoint/2010/main" val="592255382"/>
+        <p14:creationId xmlns:p14="http://schemas.microsoft.com/office/powerpoint/2010/main" val="3108953356"/>
       </p:ext>
     </p:extLst>
   </p:cSld>
@@ -3638,7 +4289,7 @@
     </p:spTree>
     <p:extLst>
       <p:ext uri="{BB962C8B-B14F-4D97-AF65-F5344CB8AC3E}">
-        <p14:creationId xmlns:p14="http://schemas.microsoft.com/office/powerpoint/2010/main" val="2429228612"/>
+        <p14:creationId xmlns:p14="http://schemas.microsoft.com/office/powerpoint/2010/main" val="1019644604"/>
       </p:ext>
     </p:extLst>
   </p:cSld>
@@ -3722,7 +4373,7 @@
     </p:spTree>
     <p:extLst>
       <p:ext uri="{BB962C8B-B14F-4D97-AF65-F5344CB8AC3E}">
-        <p14:creationId xmlns:p14="http://schemas.microsoft.com/office/powerpoint/2010/main" val="3517665198"/>
+        <p14:creationId xmlns:p14="http://schemas.microsoft.com/office/powerpoint/2010/main" val="2587457176"/>
       </p:ext>
     </p:extLst>
   </p:cSld>
@@ -3806,7 +4457,7 @@
     </p:spTree>
     <p:extLst>
       <p:ext uri="{BB962C8B-B14F-4D97-AF65-F5344CB8AC3E}">
-        <p14:creationId xmlns:p14="http://schemas.microsoft.com/office/powerpoint/2010/main" val="1357359887"/>
+        <p14:creationId xmlns:p14="http://schemas.microsoft.com/office/powerpoint/2010/main" val="3085305389"/>
       </p:ext>
     </p:extLst>
   </p:cSld>
@@ -3890,7 +4541,7 @@
     </p:spTree>
     <p:extLst>
       <p:ext uri="{BB962C8B-B14F-4D97-AF65-F5344CB8AC3E}">
-        <p14:creationId xmlns:p14="http://schemas.microsoft.com/office/powerpoint/2010/main" val="393282365"/>
+        <p14:creationId xmlns:p14="http://schemas.microsoft.com/office/powerpoint/2010/main" val="2353704698"/>
       </p:ext>
     </p:extLst>
   </p:cSld>
@@ -7502,6 +8153,1622 @@
         </p:nvSpPr>
         <p:spPr>
           <a:xfrm>
+            <a:off x="249836" y="200638"/>
+            <a:ext cx="11692327" cy="584775"/>
+          </a:xfrm>
+          <a:prstGeom prst="rect">
+            <a:avLst/>
+          </a:prstGeom>
+          <a:noFill/>
+        </p:spPr>
+        <p:txBody>
+          <a:bodyPr wrap="square" rtlCol="0">
+            <a:spAutoFit/>
+          </a:bodyPr>
+          <a:lstStyle/>
+          <a:p>
+            <a:r>
+              <a:rPr lang="pt-BR" sz="3200" b="1" dirty="0">
+                <a:solidFill>
+                  <a:srgbClr val="002060"/>
+                </a:solidFill>
+                <a:latin typeface="Cambria" panose="02040503050406030204" pitchFamily="18" charset="0"/>
+                <a:ea typeface="Cambria" panose="02040503050406030204" pitchFamily="18" charset="0"/>
+              </a:rPr>
+              <a:t>Panorama RS à Luz dos Dados públicos disponíveis da SSP-RS</a:t>
+            </a:r>
+          </a:p>
+        </p:txBody>
+      </p:sp>
+      <p:pic>
+        <p:nvPicPr>
+          <p:cNvPr id="2" name="Picture 2" descr="UFRGS na Serra | Visão de futuro e coragem para inovar">
+            <a:extLst>
+              <a:ext uri="{FF2B5EF4-FFF2-40B4-BE49-F238E27FC236}">
+                <a16:creationId xmlns:a16="http://schemas.microsoft.com/office/drawing/2014/main" id="{567C8E3D-C535-EC50-849C-270CEB4B8A04}"/>
+              </a:ext>
+            </a:extLst>
+          </p:cNvPr>
+          <p:cNvPicPr>
+            <a:picLocks noChangeAspect="1" noChangeArrowheads="1"/>
+          </p:cNvPicPr>
+          <p:nvPr/>
+        </p:nvPicPr>
+        <p:blipFill>
+          <a:blip r:embed="rId3">
+            <a:extLst>
+              <a:ext uri="{28A0092B-C50C-407E-A947-70E740481C1C}">
+                <a14:useLocalDpi xmlns:a14="http://schemas.microsoft.com/office/drawing/2010/main" val="0"/>
+              </a:ext>
+            </a:extLst>
+          </a:blip>
+          <a:srcRect/>
+          <a:stretch>
+            <a:fillRect/>
+          </a:stretch>
+        </p:blipFill>
+        <p:spPr bwMode="auto">
+          <a:xfrm>
+            <a:off x="119922" y="6346096"/>
+            <a:ext cx="683614" cy="445109"/>
+          </a:xfrm>
+          <a:prstGeom prst="rect">
+            <a:avLst/>
+          </a:prstGeom>
+          <a:noFill/>
+          <a:extLst>
+            <a:ext uri="{909E8E84-426E-40DD-AFC4-6F175D3DCCD1}">
+              <a14:hiddenFill xmlns:a14="http://schemas.microsoft.com/office/drawing/2010/main">
+                <a:solidFill>
+                  <a:srgbClr val="FFFFFF"/>
+                </a:solidFill>
+              </a14:hiddenFill>
+            </a:ext>
+          </a:extLst>
+        </p:spPr>
+      </p:pic>
+      <p:pic>
+        <p:nvPicPr>
+          <p:cNvPr id="3" name="Picture 4">
+            <a:extLst>
+              <a:ext uri="{FF2B5EF4-FFF2-40B4-BE49-F238E27FC236}">
+                <a16:creationId xmlns:a16="http://schemas.microsoft.com/office/drawing/2014/main" id="{C9663204-9A6C-C5D7-7C9B-AAF5653911D6}"/>
+              </a:ext>
+            </a:extLst>
+          </p:cNvPr>
+          <p:cNvPicPr>
+            <a:picLocks noChangeAspect="1" noChangeArrowheads="1"/>
+          </p:cNvPicPr>
+          <p:nvPr/>
+        </p:nvPicPr>
+        <p:blipFill>
+          <a:blip r:embed="rId4">
+            <a:extLst>
+              <a:ext uri="{28A0092B-C50C-407E-A947-70E740481C1C}">
+                <a14:useLocalDpi xmlns:a14="http://schemas.microsoft.com/office/drawing/2010/main" val="0"/>
+              </a:ext>
+            </a:extLst>
+          </a:blip>
+          <a:srcRect/>
+          <a:stretch>
+            <a:fillRect/>
+          </a:stretch>
+        </p:blipFill>
+        <p:spPr bwMode="auto">
+          <a:xfrm>
+            <a:off x="10802599" y="6212508"/>
+            <a:ext cx="1329440" cy="578697"/>
+          </a:xfrm>
+          <a:prstGeom prst="rect">
+            <a:avLst/>
+          </a:prstGeom>
+          <a:noFill/>
+          <a:extLst>
+            <a:ext uri="{909E8E84-426E-40DD-AFC4-6F175D3DCCD1}">
+              <a14:hiddenFill xmlns:a14="http://schemas.microsoft.com/office/drawing/2010/main">
+                <a:solidFill>
+                  <a:srgbClr val="FFFFFF"/>
+                </a:solidFill>
+              </a14:hiddenFill>
+            </a:ext>
+          </a:extLst>
+        </p:spPr>
+      </p:pic>
+      <p:sp>
+        <p:nvSpPr>
+          <p:cNvPr id="4" name="CaixaDeTexto 3">
+            <a:extLst>
+              <a:ext uri="{FF2B5EF4-FFF2-40B4-BE49-F238E27FC236}">
+                <a16:creationId xmlns:a16="http://schemas.microsoft.com/office/drawing/2014/main" id="{F9B44222-0FEB-DD8A-E65A-F10683C06A0F}"/>
+              </a:ext>
+            </a:extLst>
+          </p:cNvPr>
+          <p:cNvSpPr txBox="1"/>
+          <p:nvPr/>
+        </p:nvSpPr>
+        <p:spPr>
+          <a:xfrm>
+            <a:off x="940904" y="1276323"/>
+            <a:ext cx="10310191" cy="4763868"/>
+          </a:xfrm>
+          <a:prstGeom prst="rect">
+            <a:avLst/>
+          </a:prstGeom>
+          <a:noFill/>
+        </p:spPr>
+        <p:txBody>
+          <a:bodyPr wrap="square" rtlCol="0">
+            <a:spAutoFit/>
+          </a:bodyPr>
+          <a:lstStyle/>
+          <a:p>
+            <a:pPr marL="285750" indent="-285750">
+              <a:lnSpc>
+                <a:spcPct val="150000"/>
+              </a:lnSpc>
+              <a:spcAft>
+                <a:spcPts val="110"/>
+              </a:spcAft>
+              <a:buFont typeface="Wingdings" panose="05000000000000000000" pitchFamily="2" charset="2"/>
+              <a:buChar char="Ø"/>
+            </a:pPr>
+            <a:r>
+              <a:rPr lang="pt-BR" sz="2000" b="1" dirty="0"/>
+              <a:t>Descritivas</a:t>
+            </a:r>
+          </a:p>
+          <a:p>
+            <a:pPr marL="285750" indent="-285750">
+              <a:lnSpc>
+                <a:spcPct val="150000"/>
+              </a:lnSpc>
+              <a:spcAft>
+                <a:spcPts val="110"/>
+              </a:spcAft>
+              <a:buFont typeface="Wingdings" panose="05000000000000000000" pitchFamily="2" charset="2"/>
+              <a:buChar char="Ø"/>
+            </a:pPr>
+            <a:r>
+              <a:rPr lang="pt-BR" sz="2000" b="1" dirty="0"/>
+              <a:t>Taxas em Municípios pequenos</a:t>
+            </a:r>
+          </a:p>
+          <a:p>
+            <a:pPr marL="285750" indent="-285750">
+              <a:lnSpc>
+                <a:spcPct val="150000"/>
+              </a:lnSpc>
+              <a:spcAft>
+                <a:spcPts val="110"/>
+              </a:spcAft>
+              <a:buFont typeface="Wingdings" panose="05000000000000000000" pitchFamily="2" charset="2"/>
+              <a:buChar char="Ø"/>
+            </a:pPr>
+            <a:r>
+              <a:rPr lang="pt-BR" sz="2000" b="1" dirty="0"/>
+              <a:t>Autocorrelação espacial</a:t>
+            </a:r>
+          </a:p>
+          <a:p>
+            <a:pPr marL="285750" indent="-285750">
+              <a:lnSpc>
+                <a:spcPct val="150000"/>
+              </a:lnSpc>
+              <a:spcAft>
+                <a:spcPts val="110"/>
+              </a:spcAft>
+              <a:buFont typeface="Wingdings" panose="05000000000000000000" pitchFamily="2" charset="2"/>
+              <a:buChar char="Ø"/>
+            </a:pPr>
+            <a:r>
+              <a:rPr lang="pt-BR" sz="2000" b="1" dirty="0"/>
+              <a:t>Cadeias de Markov</a:t>
+            </a:r>
+          </a:p>
+          <a:p>
+            <a:pPr marL="285750" indent="-285750">
+              <a:lnSpc>
+                <a:spcPct val="150000"/>
+              </a:lnSpc>
+              <a:spcAft>
+                <a:spcPts val="110"/>
+              </a:spcAft>
+              <a:buFont typeface="Wingdings" panose="05000000000000000000" pitchFamily="2" charset="2"/>
+              <a:buChar char="Ø"/>
+            </a:pPr>
+            <a:r>
+              <a:rPr lang="pt-BR" sz="2000" b="1" dirty="0"/>
+              <a:t>Roubo de Veículos</a:t>
+            </a:r>
+          </a:p>
+          <a:p>
+            <a:pPr marL="285750" indent="-285750">
+              <a:lnSpc>
+                <a:spcPct val="150000"/>
+              </a:lnSpc>
+              <a:spcAft>
+                <a:spcPts val="110"/>
+              </a:spcAft>
+              <a:buFont typeface="Wingdings" panose="05000000000000000000" pitchFamily="2" charset="2"/>
+              <a:buChar char="Ø"/>
+            </a:pPr>
+            <a:r>
+              <a:rPr lang="pt-BR" sz="2000" b="1" dirty="0"/>
+              <a:t>Furto</a:t>
+            </a:r>
+          </a:p>
+          <a:p>
+            <a:pPr marL="285750" indent="-285750">
+              <a:lnSpc>
+                <a:spcPct val="150000"/>
+              </a:lnSpc>
+              <a:spcAft>
+                <a:spcPts val="110"/>
+              </a:spcAft>
+              <a:buFont typeface="Wingdings" panose="05000000000000000000" pitchFamily="2" charset="2"/>
+              <a:buChar char="Ø"/>
+            </a:pPr>
+            <a:r>
+              <a:rPr lang="pt-BR" sz="2000" b="1" dirty="0"/>
+              <a:t>Homicídio</a:t>
+            </a:r>
+          </a:p>
+          <a:p>
+            <a:pPr marL="285750" indent="-285750">
+              <a:lnSpc>
+                <a:spcPct val="150000"/>
+              </a:lnSpc>
+              <a:spcAft>
+                <a:spcPts val="110"/>
+              </a:spcAft>
+              <a:buFont typeface="Wingdings" panose="05000000000000000000" pitchFamily="2" charset="2"/>
+              <a:buChar char="Ø"/>
+            </a:pPr>
+            <a:r>
+              <a:rPr lang="pt-BR" sz="2000" b="1" dirty="0"/>
+              <a:t>Taxa de Homicídio ONU: 10 por 100.000</a:t>
+            </a:r>
+          </a:p>
+          <a:p>
+            <a:pPr marL="285750" indent="-285750">
+              <a:lnSpc>
+                <a:spcPct val="150000"/>
+              </a:lnSpc>
+              <a:spcAft>
+                <a:spcPts val="110"/>
+              </a:spcAft>
+              <a:buFont typeface="Wingdings" panose="05000000000000000000" pitchFamily="2" charset="2"/>
+              <a:buChar char="Ø"/>
+            </a:pPr>
+            <a:r>
+              <a:rPr lang="pt-BR" sz="2000" b="1" u="none" strike="noStrike" dirty="0">
+                <a:effectLst/>
+                <a:latin typeface="Google Sans"/>
+              </a:rPr>
+              <a:t>Média Global:</a:t>
+            </a:r>
+            <a:r>
+              <a:rPr lang="pt-BR" sz="2000" dirty="0"/>
+              <a:t> A taxa média no mundo gira em torno de </a:t>
+            </a:r>
+            <a:r>
+              <a:rPr lang="pt-BR" sz="2000" b="1" u="none" strike="noStrike" dirty="0">
+                <a:effectLst/>
+                <a:latin typeface="Google Sans"/>
+              </a:rPr>
+              <a:t>5,8 homicídios por 100 mil habitantes</a:t>
+            </a:r>
+            <a:r>
+              <a:rPr lang="pt-BR" sz="2000" dirty="0"/>
+              <a:t>.</a:t>
+            </a:r>
+            <a:endParaRPr lang="pt-BR" sz="2000" b="1" dirty="0"/>
+          </a:p>
+        </p:txBody>
+      </p:sp>
+    </p:spTree>
+    <p:extLst>
+      <p:ext uri="{BB962C8B-B14F-4D97-AF65-F5344CB8AC3E}">
+        <p14:creationId xmlns:p14="http://schemas.microsoft.com/office/powerpoint/2010/main" val="204840894"/>
+      </p:ext>
+    </p:extLst>
+  </p:cSld>
+  <p:clrMapOvr>
+    <a:masterClrMapping/>
+  </p:clrMapOvr>
+  <mc:AlternateContent xmlns:mc="http://schemas.openxmlformats.org/markup-compatibility/2006" xmlns:p159="http://schemas.microsoft.com/office/powerpoint/2015/09/main">
+    <mc:Choice Requires="p159">
+      <p:transition xmlns:p14="http://schemas.microsoft.com/office/powerpoint/2010/main" spd="slow" p14:dur="1250">
+        <p159:morph option="byObject"/>
+      </p:transition>
+    </mc:Choice>
+    <mc:Fallback xmlns="">
+      <p:transition spd="slow">
+        <p:fade/>
+      </p:transition>
+    </mc:Fallback>
+  </mc:AlternateContent>
+</p:sld>
+</file>
+
+<file path=ppt/slides/slide11.xml><?xml version="1.0" encoding="utf-8"?>
+<p:sld xmlns:a="http://schemas.openxmlformats.org/drawingml/2006/main" xmlns:r="http://schemas.openxmlformats.org/officeDocument/2006/relationships" xmlns:p="http://schemas.openxmlformats.org/presentationml/2006/main">
+  <p:cSld>
+    <p:spTree>
+      <p:nvGrpSpPr>
+        <p:cNvPr id="1" name=""/>
+        <p:cNvGrpSpPr/>
+        <p:nvPr/>
+      </p:nvGrpSpPr>
+      <p:grpSpPr>
+        <a:xfrm>
+          <a:off x="0" y="0"/>
+          <a:ext cx="0" cy="0"/>
+          <a:chOff x="0" y="0"/>
+          <a:chExt cx="0" cy="0"/>
+        </a:xfrm>
+      </p:grpSpPr>
+      <p:cxnSp>
+        <p:nvCxnSpPr>
+          <p:cNvPr id="7" name="Conector reto 6">
+            <a:extLst>
+              <a:ext uri="{FF2B5EF4-FFF2-40B4-BE49-F238E27FC236}">
+                <a16:creationId xmlns:a16="http://schemas.microsoft.com/office/drawing/2014/main" id="{280B8309-4572-4E27-8B6F-D29679313292}"/>
+              </a:ext>
+            </a:extLst>
+          </p:cNvPr>
+          <p:cNvCxnSpPr>
+            <a:cxnSpLocks/>
+          </p:cNvCxnSpPr>
+          <p:nvPr/>
+        </p:nvCxnSpPr>
+        <p:spPr>
+          <a:xfrm>
+            <a:off x="-112541" y="970671"/>
+            <a:ext cx="8328073" cy="0"/>
+          </a:xfrm>
+          <a:prstGeom prst="line">
+            <a:avLst/>
+          </a:prstGeom>
+          <a:ln w="38100"/>
+        </p:spPr>
+        <p:style>
+          <a:lnRef idx="1">
+            <a:schemeClr val="accent1"/>
+          </a:lnRef>
+          <a:fillRef idx="0">
+            <a:schemeClr val="accent1"/>
+          </a:fillRef>
+          <a:effectRef idx="0">
+            <a:schemeClr val="accent1"/>
+          </a:effectRef>
+          <a:fontRef idx="minor">
+            <a:schemeClr val="tx1"/>
+          </a:fontRef>
+        </p:style>
+      </p:cxnSp>
+      <p:sp>
+        <p:nvSpPr>
+          <p:cNvPr id="8" name="CaixaDeTexto 7">
+            <a:extLst>
+              <a:ext uri="{FF2B5EF4-FFF2-40B4-BE49-F238E27FC236}">
+                <a16:creationId xmlns:a16="http://schemas.microsoft.com/office/drawing/2014/main" id="{39AE06C5-34BE-4D68-97C3-4C07702C2DF6}"/>
+              </a:ext>
+            </a:extLst>
+          </p:cNvPr>
+          <p:cNvSpPr txBox="1"/>
+          <p:nvPr/>
+        </p:nvSpPr>
+        <p:spPr>
+          <a:xfrm>
+            <a:off x="249836" y="200638"/>
+            <a:ext cx="11692327" cy="584775"/>
+          </a:xfrm>
+          <a:prstGeom prst="rect">
+            <a:avLst/>
+          </a:prstGeom>
+          <a:noFill/>
+        </p:spPr>
+        <p:txBody>
+          <a:bodyPr wrap="square" rtlCol="0">
+            <a:spAutoFit/>
+          </a:bodyPr>
+          <a:lstStyle/>
+          <a:p>
+            <a:r>
+              <a:rPr lang="pt-BR" sz="3200" b="1" dirty="0">
+                <a:solidFill>
+                  <a:srgbClr val="002060"/>
+                </a:solidFill>
+                <a:latin typeface="Cambria" panose="02040503050406030204" pitchFamily="18" charset="0"/>
+                <a:ea typeface="Cambria" panose="02040503050406030204" pitchFamily="18" charset="0"/>
+              </a:rPr>
+              <a:t>Panorama RS à Luz dos Dados públicos disponíveis da SSP-RS</a:t>
+            </a:r>
+          </a:p>
+        </p:txBody>
+      </p:sp>
+      <p:pic>
+        <p:nvPicPr>
+          <p:cNvPr id="2" name="Picture 2" descr="UFRGS na Serra | Visão de futuro e coragem para inovar">
+            <a:extLst>
+              <a:ext uri="{FF2B5EF4-FFF2-40B4-BE49-F238E27FC236}">
+                <a16:creationId xmlns:a16="http://schemas.microsoft.com/office/drawing/2014/main" id="{567C8E3D-C535-EC50-849C-270CEB4B8A04}"/>
+              </a:ext>
+            </a:extLst>
+          </p:cNvPr>
+          <p:cNvPicPr>
+            <a:picLocks noChangeAspect="1" noChangeArrowheads="1"/>
+          </p:cNvPicPr>
+          <p:nvPr/>
+        </p:nvPicPr>
+        <p:blipFill>
+          <a:blip r:embed="rId3">
+            <a:extLst>
+              <a:ext uri="{28A0092B-C50C-407E-A947-70E740481C1C}">
+                <a14:useLocalDpi xmlns:a14="http://schemas.microsoft.com/office/drawing/2010/main" val="0"/>
+              </a:ext>
+            </a:extLst>
+          </a:blip>
+          <a:srcRect/>
+          <a:stretch>
+            <a:fillRect/>
+          </a:stretch>
+        </p:blipFill>
+        <p:spPr bwMode="auto">
+          <a:xfrm>
+            <a:off x="119922" y="6346096"/>
+            <a:ext cx="683614" cy="445109"/>
+          </a:xfrm>
+          <a:prstGeom prst="rect">
+            <a:avLst/>
+          </a:prstGeom>
+          <a:noFill/>
+          <a:extLst>
+            <a:ext uri="{909E8E84-426E-40DD-AFC4-6F175D3DCCD1}">
+              <a14:hiddenFill xmlns:a14="http://schemas.microsoft.com/office/drawing/2010/main">
+                <a:solidFill>
+                  <a:srgbClr val="FFFFFF"/>
+                </a:solidFill>
+              </a14:hiddenFill>
+            </a:ext>
+          </a:extLst>
+        </p:spPr>
+      </p:pic>
+      <p:pic>
+        <p:nvPicPr>
+          <p:cNvPr id="3" name="Picture 4">
+            <a:extLst>
+              <a:ext uri="{FF2B5EF4-FFF2-40B4-BE49-F238E27FC236}">
+                <a16:creationId xmlns:a16="http://schemas.microsoft.com/office/drawing/2014/main" id="{C9663204-9A6C-C5D7-7C9B-AAF5653911D6}"/>
+              </a:ext>
+            </a:extLst>
+          </p:cNvPr>
+          <p:cNvPicPr>
+            <a:picLocks noChangeAspect="1" noChangeArrowheads="1"/>
+          </p:cNvPicPr>
+          <p:nvPr/>
+        </p:nvPicPr>
+        <p:blipFill>
+          <a:blip r:embed="rId4">
+            <a:extLst>
+              <a:ext uri="{28A0092B-C50C-407E-A947-70E740481C1C}">
+                <a14:useLocalDpi xmlns:a14="http://schemas.microsoft.com/office/drawing/2010/main" val="0"/>
+              </a:ext>
+            </a:extLst>
+          </a:blip>
+          <a:srcRect/>
+          <a:stretch>
+            <a:fillRect/>
+          </a:stretch>
+        </p:blipFill>
+        <p:spPr bwMode="auto">
+          <a:xfrm>
+            <a:off x="10802599" y="6212508"/>
+            <a:ext cx="1329440" cy="578697"/>
+          </a:xfrm>
+          <a:prstGeom prst="rect">
+            <a:avLst/>
+          </a:prstGeom>
+          <a:noFill/>
+          <a:extLst>
+            <a:ext uri="{909E8E84-426E-40DD-AFC4-6F175D3DCCD1}">
+              <a14:hiddenFill xmlns:a14="http://schemas.microsoft.com/office/drawing/2010/main">
+                <a:solidFill>
+                  <a:srgbClr val="FFFFFF"/>
+                </a:solidFill>
+              </a14:hiddenFill>
+            </a:ext>
+          </a:extLst>
+        </p:spPr>
+      </p:pic>
+      <p:sp>
+        <p:nvSpPr>
+          <p:cNvPr id="4" name="CaixaDeTexto 3">
+            <a:extLst>
+              <a:ext uri="{FF2B5EF4-FFF2-40B4-BE49-F238E27FC236}">
+                <a16:creationId xmlns:a16="http://schemas.microsoft.com/office/drawing/2014/main" id="{F9B44222-0FEB-DD8A-E65A-F10683C06A0F}"/>
+              </a:ext>
+            </a:extLst>
+          </p:cNvPr>
+          <p:cNvSpPr txBox="1"/>
+          <p:nvPr/>
+        </p:nvSpPr>
+        <p:spPr>
+          <a:xfrm>
+            <a:off x="940904" y="1276323"/>
+            <a:ext cx="10310191" cy="4763868"/>
+          </a:xfrm>
+          <a:prstGeom prst="rect">
+            <a:avLst/>
+          </a:prstGeom>
+          <a:noFill/>
+        </p:spPr>
+        <p:txBody>
+          <a:bodyPr wrap="square" rtlCol="0">
+            <a:spAutoFit/>
+          </a:bodyPr>
+          <a:lstStyle/>
+          <a:p>
+            <a:pPr marL="285750" indent="-285750">
+              <a:lnSpc>
+                <a:spcPct val="150000"/>
+              </a:lnSpc>
+              <a:spcAft>
+                <a:spcPts val="110"/>
+              </a:spcAft>
+              <a:buFont typeface="Wingdings" panose="05000000000000000000" pitchFamily="2" charset="2"/>
+              <a:buChar char="Ø"/>
+            </a:pPr>
+            <a:r>
+              <a:rPr lang="pt-BR" sz="2000" b="1" dirty="0"/>
+              <a:t>Descritivas</a:t>
+            </a:r>
+          </a:p>
+          <a:p>
+            <a:pPr marL="285750" indent="-285750">
+              <a:lnSpc>
+                <a:spcPct val="150000"/>
+              </a:lnSpc>
+              <a:spcAft>
+                <a:spcPts val="110"/>
+              </a:spcAft>
+              <a:buFont typeface="Wingdings" panose="05000000000000000000" pitchFamily="2" charset="2"/>
+              <a:buChar char="Ø"/>
+            </a:pPr>
+            <a:r>
+              <a:rPr lang="pt-BR" sz="2000" b="1" dirty="0"/>
+              <a:t>Taxas em Municípios pequenos</a:t>
+            </a:r>
+          </a:p>
+          <a:p>
+            <a:pPr marL="285750" indent="-285750">
+              <a:lnSpc>
+                <a:spcPct val="150000"/>
+              </a:lnSpc>
+              <a:spcAft>
+                <a:spcPts val="110"/>
+              </a:spcAft>
+              <a:buFont typeface="Wingdings" panose="05000000000000000000" pitchFamily="2" charset="2"/>
+              <a:buChar char="Ø"/>
+            </a:pPr>
+            <a:r>
+              <a:rPr lang="pt-BR" sz="2000" b="1" dirty="0"/>
+              <a:t>Autocorrelação espacial</a:t>
+            </a:r>
+          </a:p>
+          <a:p>
+            <a:pPr marL="285750" indent="-285750">
+              <a:lnSpc>
+                <a:spcPct val="150000"/>
+              </a:lnSpc>
+              <a:spcAft>
+                <a:spcPts val="110"/>
+              </a:spcAft>
+              <a:buFont typeface="Wingdings" panose="05000000000000000000" pitchFamily="2" charset="2"/>
+              <a:buChar char="Ø"/>
+            </a:pPr>
+            <a:r>
+              <a:rPr lang="pt-BR" sz="2000" b="1" dirty="0"/>
+              <a:t>Cadeias de Markov</a:t>
+            </a:r>
+          </a:p>
+          <a:p>
+            <a:pPr marL="285750" indent="-285750">
+              <a:lnSpc>
+                <a:spcPct val="150000"/>
+              </a:lnSpc>
+              <a:spcAft>
+                <a:spcPts val="110"/>
+              </a:spcAft>
+              <a:buFont typeface="Wingdings" panose="05000000000000000000" pitchFamily="2" charset="2"/>
+              <a:buChar char="Ø"/>
+            </a:pPr>
+            <a:r>
+              <a:rPr lang="pt-BR" sz="2000" b="1" dirty="0"/>
+              <a:t>Roubo de Veículos</a:t>
+            </a:r>
+          </a:p>
+          <a:p>
+            <a:pPr marL="285750" indent="-285750">
+              <a:lnSpc>
+                <a:spcPct val="150000"/>
+              </a:lnSpc>
+              <a:spcAft>
+                <a:spcPts val="110"/>
+              </a:spcAft>
+              <a:buFont typeface="Wingdings" panose="05000000000000000000" pitchFamily="2" charset="2"/>
+              <a:buChar char="Ø"/>
+            </a:pPr>
+            <a:r>
+              <a:rPr lang="pt-BR" sz="2000" b="1" dirty="0"/>
+              <a:t>Furto</a:t>
+            </a:r>
+          </a:p>
+          <a:p>
+            <a:pPr marL="285750" indent="-285750">
+              <a:lnSpc>
+                <a:spcPct val="150000"/>
+              </a:lnSpc>
+              <a:spcAft>
+                <a:spcPts val="110"/>
+              </a:spcAft>
+              <a:buFont typeface="Wingdings" panose="05000000000000000000" pitchFamily="2" charset="2"/>
+              <a:buChar char="Ø"/>
+            </a:pPr>
+            <a:r>
+              <a:rPr lang="pt-BR" sz="2000" b="1" dirty="0"/>
+              <a:t>Homicídio</a:t>
+            </a:r>
+          </a:p>
+          <a:p>
+            <a:pPr marL="285750" indent="-285750">
+              <a:lnSpc>
+                <a:spcPct val="150000"/>
+              </a:lnSpc>
+              <a:spcAft>
+                <a:spcPts val="110"/>
+              </a:spcAft>
+              <a:buFont typeface="Wingdings" panose="05000000000000000000" pitchFamily="2" charset="2"/>
+              <a:buChar char="Ø"/>
+            </a:pPr>
+            <a:r>
+              <a:rPr lang="pt-BR" sz="2000" b="1" dirty="0"/>
+              <a:t>Taxa de Homicídio ONU: 10 por 100.000</a:t>
+            </a:r>
+          </a:p>
+          <a:p>
+            <a:pPr marL="285750" indent="-285750">
+              <a:lnSpc>
+                <a:spcPct val="150000"/>
+              </a:lnSpc>
+              <a:spcAft>
+                <a:spcPts val="110"/>
+              </a:spcAft>
+              <a:buFont typeface="Wingdings" panose="05000000000000000000" pitchFamily="2" charset="2"/>
+              <a:buChar char="Ø"/>
+            </a:pPr>
+            <a:r>
+              <a:rPr lang="pt-BR" sz="2000" b="1" u="none" strike="noStrike" dirty="0">
+                <a:effectLst/>
+                <a:latin typeface="Google Sans"/>
+              </a:rPr>
+              <a:t>Média Global:</a:t>
+            </a:r>
+            <a:r>
+              <a:rPr lang="pt-BR" sz="2000" dirty="0"/>
+              <a:t> A taxa média no mundo gira em torno de </a:t>
+            </a:r>
+            <a:r>
+              <a:rPr lang="pt-BR" sz="2000" b="1" u="none" strike="noStrike" dirty="0">
+                <a:effectLst/>
+                <a:latin typeface="Google Sans"/>
+              </a:rPr>
+              <a:t>5,8 homicídios por 100 mil habitantes</a:t>
+            </a:r>
+            <a:r>
+              <a:rPr lang="pt-BR" sz="2000" dirty="0"/>
+              <a:t>.</a:t>
+            </a:r>
+            <a:endParaRPr lang="pt-BR" sz="2000" b="1" dirty="0"/>
+          </a:p>
+        </p:txBody>
+      </p:sp>
+    </p:spTree>
+    <p:extLst>
+      <p:ext uri="{BB962C8B-B14F-4D97-AF65-F5344CB8AC3E}">
+        <p14:creationId xmlns:p14="http://schemas.microsoft.com/office/powerpoint/2010/main" val="1600642753"/>
+      </p:ext>
+    </p:extLst>
+  </p:cSld>
+  <p:clrMapOvr>
+    <a:masterClrMapping/>
+  </p:clrMapOvr>
+  <mc:AlternateContent xmlns:mc="http://schemas.openxmlformats.org/markup-compatibility/2006" xmlns:p159="http://schemas.microsoft.com/office/powerpoint/2015/09/main">
+    <mc:Choice Requires="p159">
+      <p:transition xmlns:p14="http://schemas.microsoft.com/office/powerpoint/2010/main" spd="slow" p14:dur="1250">
+        <p159:morph option="byObject"/>
+      </p:transition>
+    </mc:Choice>
+    <mc:Fallback xmlns="">
+      <p:transition spd="slow">
+        <p:fade/>
+      </p:transition>
+    </mc:Fallback>
+  </mc:AlternateContent>
+</p:sld>
+</file>
+
+<file path=ppt/slides/slide12.xml><?xml version="1.0" encoding="utf-8"?>
+<p:sld xmlns:a="http://schemas.openxmlformats.org/drawingml/2006/main" xmlns:r="http://schemas.openxmlformats.org/officeDocument/2006/relationships" xmlns:p="http://schemas.openxmlformats.org/presentationml/2006/main">
+  <p:cSld>
+    <p:spTree>
+      <p:nvGrpSpPr>
+        <p:cNvPr id="1" name=""/>
+        <p:cNvGrpSpPr/>
+        <p:nvPr/>
+      </p:nvGrpSpPr>
+      <p:grpSpPr>
+        <a:xfrm>
+          <a:off x="0" y="0"/>
+          <a:ext cx="0" cy="0"/>
+          <a:chOff x="0" y="0"/>
+          <a:chExt cx="0" cy="0"/>
+        </a:xfrm>
+      </p:grpSpPr>
+      <p:cxnSp>
+        <p:nvCxnSpPr>
+          <p:cNvPr id="7" name="Conector reto 6">
+            <a:extLst>
+              <a:ext uri="{FF2B5EF4-FFF2-40B4-BE49-F238E27FC236}">
+                <a16:creationId xmlns:a16="http://schemas.microsoft.com/office/drawing/2014/main" id="{280B8309-4572-4E27-8B6F-D29679313292}"/>
+              </a:ext>
+            </a:extLst>
+          </p:cNvPr>
+          <p:cNvCxnSpPr>
+            <a:cxnSpLocks/>
+          </p:cNvCxnSpPr>
+          <p:nvPr/>
+        </p:nvCxnSpPr>
+        <p:spPr>
+          <a:xfrm>
+            <a:off x="-112541" y="970671"/>
+            <a:ext cx="8328073" cy="0"/>
+          </a:xfrm>
+          <a:prstGeom prst="line">
+            <a:avLst/>
+          </a:prstGeom>
+          <a:ln w="38100"/>
+        </p:spPr>
+        <p:style>
+          <a:lnRef idx="1">
+            <a:schemeClr val="accent1"/>
+          </a:lnRef>
+          <a:fillRef idx="0">
+            <a:schemeClr val="accent1"/>
+          </a:fillRef>
+          <a:effectRef idx="0">
+            <a:schemeClr val="accent1"/>
+          </a:effectRef>
+          <a:fontRef idx="minor">
+            <a:schemeClr val="tx1"/>
+          </a:fontRef>
+        </p:style>
+      </p:cxnSp>
+      <p:sp>
+        <p:nvSpPr>
+          <p:cNvPr id="8" name="CaixaDeTexto 7">
+            <a:extLst>
+              <a:ext uri="{FF2B5EF4-FFF2-40B4-BE49-F238E27FC236}">
+                <a16:creationId xmlns:a16="http://schemas.microsoft.com/office/drawing/2014/main" id="{39AE06C5-34BE-4D68-97C3-4C07702C2DF6}"/>
+              </a:ext>
+            </a:extLst>
+          </p:cNvPr>
+          <p:cNvSpPr txBox="1"/>
+          <p:nvPr/>
+        </p:nvSpPr>
+        <p:spPr>
+          <a:xfrm>
+            <a:off x="1103819" y="140678"/>
+            <a:ext cx="7815329" cy="646331"/>
+          </a:xfrm>
+          <a:prstGeom prst="rect">
+            <a:avLst/>
+          </a:prstGeom>
+          <a:noFill/>
+        </p:spPr>
+        <p:txBody>
+          <a:bodyPr wrap="square" rtlCol="0">
+            <a:spAutoFit/>
+          </a:bodyPr>
+          <a:lstStyle/>
+          <a:p>
+            <a:r>
+              <a:rPr lang="pt-BR" sz="3600" b="1" dirty="0">
+                <a:solidFill>
+                  <a:srgbClr val="002060"/>
+                </a:solidFill>
+                <a:latin typeface="Cambria" panose="02040503050406030204" pitchFamily="18" charset="0"/>
+                <a:ea typeface="Cambria" panose="02040503050406030204" pitchFamily="18" charset="0"/>
+              </a:rPr>
+              <a:t>Armas x Criminalidade</a:t>
+            </a:r>
+          </a:p>
+        </p:txBody>
+      </p:sp>
+      <p:sp>
+        <p:nvSpPr>
+          <p:cNvPr id="14" name="CaixaDeTexto 13">
+            <a:extLst>
+              <a:ext uri="{FF2B5EF4-FFF2-40B4-BE49-F238E27FC236}">
+                <a16:creationId xmlns:a16="http://schemas.microsoft.com/office/drawing/2014/main" id="{427DBFEB-81BF-4CC3-A411-FBF43D295C56}"/>
+              </a:ext>
+            </a:extLst>
+          </p:cNvPr>
+          <p:cNvSpPr txBox="1"/>
+          <p:nvPr/>
+        </p:nvSpPr>
+        <p:spPr>
+          <a:xfrm>
+            <a:off x="940904" y="1276323"/>
+            <a:ext cx="10310191" cy="506292"/>
+          </a:xfrm>
+          <a:prstGeom prst="rect">
+            <a:avLst/>
+          </a:prstGeom>
+          <a:noFill/>
+        </p:spPr>
+        <p:txBody>
+          <a:bodyPr wrap="square" rtlCol="0">
+            <a:spAutoFit/>
+          </a:bodyPr>
+          <a:lstStyle/>
+          <a:p>
+            <a:pPr marL="285750" indent="-285750">
+              <a:lnSpc>
+                <a:spcPct val="150000"/>
+              </a:lnSpc>
+              <a:spcAft>
+                <a:spcPts val="110"/>
+              </a:spcAft>
+              <a:buFont typeface="Wingdings" panose="05000000000000000000" pitchFamily="2" charset="2"/>
+              <a:buChar char="Ø"/>
+            </a:pPr>
+            <a:r>
+              <a:rPr lang="pt-BR" sz="2000" b="1" dirty="0"/>
+              <a:t>Noções gerais sobre Estatística. </a:t>
+            </a:r>
+          </a:p>
+        </p:txBody>
+      </p:sp>
+      <p:pic>
+        <p:nvPicPr>
+          <p:cNvPr id="2" name="Picture 2" descr="UFRGS na Serra | Visão de futuro e coragem para inovar">
+            <a:extLst>
+              <a:ext uri="{FF2B5EF4-FFF2-40B4-BE49-F238E27FC236}">
+                <a16:creationId xmlns:a16="http://schemas.microsoft.com/office/drawing/2014/main" id="{567C8E3D-C535-EC50-849C-270CEB4B8A04}"/>
+              </a:ext>
+            </a:extLst>
+          </p:cNvPr>
+          <p:cNvPicPr>
+            <a:picLocks noChangeAspect="1" noChangeArrowheads="1"/>
+          </p:cNvPicPr>
+          <p:nvPr/>
+        </p:nvPicPr>
+        <p:blipFill>
+          <a:blip r:embed="rId3">
+            <a:extLst>
+              <a:ext uri="{28A0092B-C50C-407E-A947-70E740481C1C}">
+                <a14:useLocalDpi xmlns:a14="http://schemas.microsoft.com/office/drawing/2010/main" val="0"/>
+              </a:ext>
+            </a:extLst>
+          </a:blip>
+          <a:srcRect/>
+          <a:stretch>
+            <a:fillRect/>
+          </a:stretch>
+        </p:blipFill>
+        <p:spPr bwMode="auto">
+          <a:xfrm>
+            <a:off x="119922" y="6346096"/>
+            <a:ext cx="683614" cy="445109"/>
+          </a:xfrm>
+          <a:prstGeom prst="rect">
+            <a:avLst/>
+          </a:prstGeom>
+          <a:noFill/>
+          <a:extLst>
+            <a:ext uri="{909E8E84-426E-40DD-AFC4-6F175D3DCCD1}">
+              <a14:hiddenFill xmlns:a14="http://schemas.microsoft.com/office/drawing/2010/main">
+                <a:solidFill>
+                  <a:srgbClr val="FFFFFF"/>
+                </a:solidFill>
+              </a14:hiddenFill>
+            </a:ext>
+          </a:extLst>
+        </p:spPr>
+      </p:pic>
+      <p:pic>
+        <p:nvPicPr>
+          <p:cNvPr id="3" name="Picture 4">
+            <a:extLst>
+              <a:ext uri="{FF2B5EF4-FFF2-40B4-BE49-F238E27FC236}">
+                <a16:creationId xmlns:a16="http://schemas.microsoft.com/office/drawing/2014/main" id="{C9663204-9A6C-C5D7-7C9B-AAF5653911D6}"/>
+              </a:ext>
+            </a:extLst>
+          </p:cNvPr>
+          <p:cNvPicPr>
+            <a:picLocks noChangeAspect="1" noChangeArrowheads="1"/>
+          </p:cNvPicPr>
+          <p:nvPr/>
+        </p:nvPicPr>
+        <p:blipFill>
+          <a:blip r:embed="rId4">
+            <a:extLst>
+              <a:ext uri="{28A0092B-C50C-407E-A947-70E740481C1C}">
+                <a14:useLocalDpi xmlns:a14="http://schemas.microsoft.com/office/drawing/2010/main" val="0"/>
+              </a:ext>
+            </a:extLst>
+          </a:blip>
+          <a:srcRect/>
+          <a:stretch>
+            <a:fillRect/>
+          </a:stretch>
+        </p:blipFill>
+        <p:spPr bwMode="auto">
+          <a:xfrm>
+            <a:off x="10802599" y="6212508"/>
+            <a:ext cx="1329440" cy="578697"/>
+          </a:xfrm>
+          <a:prstGeom prst="rect">
+            <a:avLst/>
+          </a:prstGeom>
+          <a:noFill/>
+          <a:extLst>
+            <a:ext uri="{909E8E84-426E-40DD-AFC4-6F175D3DCCD1}">
+              <a14:hiddenFill xmlns:a14="http://schemas.microsoft.com/office/drawing/2010/main">
+                <a:solidFill>
+                  <a:srgbClr val="FFFFFF"/>
+                </a:solidFill>
+              </a14:hiddenFill>
+            </a:ext>
+          </a:extLst>
+        </p:spPr>
+      </p:pic>
+    </p:spTree>
+    <p:extLst>
+      <p:ext uri="{BB962C8B-B14F-4D97-AF65-F5344CB8AC3E}">
+        <p14:creationId xmlns:p14="http://schemas.microsoft.com/office/powerpoint/2010/main" val="3554767980"/>
+      </p:ext>
+    </p:extLst>
+  </p:cSld>
+  <p:clrMapOvr>
+    <a:masterClrMapping/>
+  </p:clrMapOvr>
+  <mc:AlternateContent xmlns:mc="http://schemas.openxmlformats.org/markup-compatibility/2006" xmlns:p159="http://schemas.microsoft.com/office/powerpoint/2015/09/main">
+    <mc:Choice Requires="p159">
+      <p:transition xmlns:p14="http://schemas.microsoft.com/office/powerpoint/2010/main" spd="slow" p14:dur="1250">
+        <p159:morph option="byObject"/>
+      </p:transition>
+    </mc:Choice>
+    <mc:Fallback xmlns="">
+      <p:transition spd="slow">
+        <p:fade/>
+      </p:transition>
+    </mc:Fallback>
+  </mc:AlternateContent>
+</p:sld>
+</file>
+
+<file path=ppt/slides/slide13.xml><?xml version="1.0" encoding="utf-8"?>
+<p:sld xmlns:a="http://schemas.openxmlformats.org/drawingml/2006/main" xmlns:r="http://schemas.openxmlformats.org/officeDocument/2006/relationships" xmlns:p="http://schemas.openxmlformats.org/presentationml/2006/main">
+  <p:cSld>
+    <p:spTree>
+      <p:nvGrpSpPr>
+        <p:cNvPr id="1" name=""/>
+        <p:cNvGrpSpPr/>
+        <p:nvPr/>
+      </p:nvGrpSpPr>
+      <p:grpSpPr>
+        <a:xfrm>
+          <a:off x="0" y="0"/>
+          <a:ext cx="0" cy="0"/>
+          <a:chOff x="0" y="0"/>
+          <a:chExt cx="0" cy="0"/>
+        </a:xfrm>
+      </p:grpSpPr>
+      <p:cxnSp>
+        <p:nvCxnSpPr>
+          <p:cNvPr id="7" name="Conector reto 6">
+            <a:extLst>
+              <a:ext uri="{FF2B5EF4-FFF2-40B4-BE49-F238E27FC236}">
+                <a16:creationId xmlns:a16="http://schemas.microsoft.com/office/drawing/2014/main" id="{280B8309-4572-4E27-8B6F-D29679313292}"/>
+              </a:ext>
+            </a:extLst>
+          </p:cNvPr>
+          <p:cNvCxnSpPr>
+            <a:cxnSpLocks/>
+          </p:cNvCxnSpPr>
+          <p:nvPr/>
+        </p:nvCxnSpPr>
+        <p:spPr>
+          <a:xfrm>
+            <a:off x="-112541" y="970671"/>
+            <a:ext cx="8328073" cy="0"/>
+          </a:xfrm>
+          <a:prstGeom prst="line">
+            <a:avLst/>
+          </a:prstGeom>
+          <a:ln w="38100"/>
+        </p:spPr>
+        <p:style>
+          <a:lnRef idx="1">
+            <a:schemeClr val="accent1"/>
+          </a:lnRef>
+          <a:fillRef idx="0">
+            <a:schemeClr val="accent1"/>
+          </a:fillRef>
+          <a:effectRef idx="0">
+            <a:schemeClr val="accent1"/>
+          </a:effectRef>
+          <a:fontRef idx="minor">
+            <a:schemeClr val="tx1"/>
+          </a:fontRef>
+        </p:style>
+      </p:cxnSp>
+      <p:sp>
+        <p:nvSpPr>
+          <p:cNvPr id="8" name="CaixaDeTexto 7">
+            <a:extLst>
+              <a:ext uri="{FF2B5EF4-FFF2-40B4-BE49-F238E27FC236}">
+                <a16:creationId xmlns:a16="http://schemas.microsoft.com/office/drawing/2014/main" id="{39AE06C5-34BE-4D68-97C3-4C07702C2DF6}"/>
+              </a:ext>
+            </a:extLst>
+          </p:cNvPr>
+          <p:cNvSpPr txBox="1"/>
+          <p:nvPr/>
+        </p:nvSpPr>
+        <p:spPr>
+          <a:xfrm>
+            <a:off x="1103819" y="140678"/>
+            <a:ext cx="7815329" cy="646331"/>
+          </a:xfrm>
+          <a:prstGeom prst="rect">
+            <a:avLst/>
+          </a:prstGeom>
+          <a:noFill/>
+        </p:spPr>
+        <p:txBody>
+          <a:bodyPr wrap="square" rtlCol="0">
+            <a:spAutoFit/>
+          </a:bodyPr>
+          <a:lstStyle/>
+          <a:p>
+            <a:r>
+              <a:rPr lang="pt-BR" sz="3600" b="1" dirty="0">
+                <a:solidFill>
+                  <a:srgbClr val="002060"/>
+                </a:solidFill>
+                <a:latin typeface="Cambria" panose="02040503050406030204" pitchFamily="18" charset="0"/>
+                <a:ea typeface="Cambria" panose="02040503050406030204" pitchFamily="18" charset="0"/>
+              </a:rPr>
+              <a:t>Luz x Criminalidade</a:t>
+            </a:r>
+          </a:p>
+        </p:txBody>
+      </p:sp>
+      <p:sp>
+        <p:nvSpPr>
+          <p:cNvPr id="14" name="CaixaDeTexto 13">
+            <a:extLst>
+              <a:ext uri="{FF2B5EF4-FFF2-40B4-BE49-F238E27FC236}">
+                <a16:creationId xmlns:a16="http://schemas.microsoft.com/office/drawing/2014/main" id="{427DBFEB-81BF-4CC3-A411-FBF43D295C56}"/>
+              </a:ext>
+            </a:extLst>
+          </p:cNvPr>
+          <p:cNvSpPr txBox="1"/>
+          <p:nvPr/>
+        </p:nvSpPr>
+        <p:spPr>
+          <a:xfrm>
+            <a:off x="940904" y="1276323"/>
+            <a:ext cx="10310191" cy="506292"/>
+          </a:xfrm>
+          <a:prstGeom prst="rect">
+            <a:avLst/>
+          </a:prstGeom>
+          <a:noFill/>
+        </p:spPr>
+        <p:txBody>
+          <a:bodyPr wrap="square" rtlCol="0">
+            <a:spAutoFit/>
+          </a:bodyPr>
+          <a:lstStyle/>
+          <a:p>
+            <a:pPr marL="285750" indent="-285750">
+              <a:lnSpc>
+                <a:spcPct val="150000"/>
+              </a:lnSpc>
+              <a:spcAft>
+                <a:spcPts val="110"/>
+              </a:spcAft>
+              <a:buFont typeface="Wingdings" panose="05000000000000000000" pitchFamily="2" charset="2"/>
+              <a:buChar char="Ø"/>
+            </a:pPr>
+            <a:r>
+              <a:rPr lang="pt-BR" sz="2000" b="1" dirty="0"/>
+              <a:t>Noções gerais sobre Estatística. </a:t>
+            </a:r>
+          </a:p>
+        </p:txBody>
+      </p:sp>
+      <p:pic>
+        <p:nvPicPr>
+          <p:cNvPr id="2" name="Picture 2" descr="UFRGS na Serra | Visão de futuro e coragem para inovar">
+            <a:extLst>
+              <a:ext uri="{FF2B5EF4-FFF2-40B4-BE49-F238E27FC236}">
+                <a16:creationId xmlns:a16="http://schemas.microsoft.com/office/drawing/2014/main" id="{567C8E3D-C535-EC50-849C-270CEB4B8A04}"/>
+              </a:ext>
+            </a:extLst>
+          </p:cNvPr>
+          <p:cNvPicPr>
+            <a:picLocks noChangeAspect="1" noChangeArrowheads="1"/>
+          </p:cNvPicPr>
+          <p:nvPr/>
+        </p:nvPicPr>
+        <p:blipFill>
+          <a:blip r:embed="rId3">
+            <a:extLst>
+              <a:ext uri="{28A0092B-C50C-407E-A947-70E740481C1C}">
+                <a14:useLocalDpi xmlns:a14="http://schemas.microsoft.com/office/drawing/2010/main" val="0"/>
+              </a:ext>
+            </a:extLst>
+          </a:blip>
+          <a:srcRect/>
+          <a:stretch>
+            <a:fillRect/>
+          </a:stretch>
+        </p:blipFill>
+        <p:spPr bwMode="auto">
+          <a:xfrm>
+            <a:off x="119922" y="6346096"/>
+            <a:ext cx="683614" cy="445109"/>
+          </a:xfrm>
+          <a:prstGeom prst="rect">
+            <a:avLst/>
+          </a:prstGeom>
+          <a:noFill/>
+          <a:extLst>
+            <a:ext uri="{909E8E84-426E-40DD-AFC4-6F175D3DCCD1}">
+              <a14:hiddenFill xmlns:a14="http://schemas.microsoft.com/office/drawing/2010/main">
+                <a:solidFill>
+                  <a:srgbClr val="FFFFFF"/>
+                </a:solidFill>
+              </a14:hiddenFill>
+            </a:ext>
+          </a:extLst>
+        </p:spPr>
+      </p:pic>
+      <p:pic>
+        <p:nvPicPr>
+          <p:cNvPr id="3" name="Picture 4">
+            <a:extLst>
+              <a:ext uri="{FF2B5EF4-FFF2-40B4-BE49-F238E27FC236}">
+                <a16:creationId xmlns:a16="http://schemas.microsoft.com/office/drawing/2014/main" id="{C9663204-9A6C-C5D7-7C9B-AAF5653911D6}"/>
+              </a:ext>
+            </a:extLst>
+          </p:cNvPr>
+          <p:cNvPicPr>
+            <a:picLocks noChangeAspect="1" noChangeArrowheads="1"/>
+          </p:cNvPicPr>
+          <p:nvPr/>
+        </p:nvPicPr>
+        <p:blipFill>
+          <a:blip r:embed="rId4">
+            <a:extLst>
+              <a:ext uri="{28A0092B-C50C-407E-A947-70E740481C1C}">
+                <a14:useLocalDpi xmlns:a14="http://schemas.microsoft.com/office/drawing/2010/main" val="0"/>
+              </a:ext>
+            </a:extLst>
+          </a:blip>
+          <a:srcRect/>
+          <a:stretch>
+            <a:fillRect/>
+          </a:stretch>
+        </p:blipFill>
+        <p:spPr bwMode="auto">
+          <a:xfrm>
+            <a:off x="10802599" y="6212508"/>
+            <a:ext cx="1329440" cy="578697"/>
+          </a:xfrm>
+          <a:prstGeom prst="rect">
+            <a:avLst/>
+          </a:prstGeom>
+          <a:noFill/>
+          <a:extLst>
+            <a:ext uri="{909E8E84-426E-40DD-AFC4-6F175D3DCCD1}">
+              <a14:hiddenFill xmlns:a14="http://schemas.microsoft.com/office/drawing/2010/main">
+                <a:solidFill>
+                  <a:srgbClr val="FFFFFF"/>
+                </a:solidFill>
+              </a14:hiddenFill>
+            </a:ext>
+          </a:extLst>
+        </p:spPr>
+      </p:pic>
+    </p:spTree>
+    <p:extLst>
+      <p:ext uri="{BB962C8B-B14F-4D97-AF65-F5344CB8AC3E}">
+        <p14:creationId xmlns:p14="http://schemas.microsoft.com/office/powerpoint/2010/main" val="1536836101"/>
+      </p:ext>
+    </p:extLst>
+  </p:cSld>
+  <p:clrMapOvr>
+    <a:masterClrMapping/>
+  </p:clrMapOvr>
+  <mc:AlternateContent xmlns:mc="http://schemas.openxmlformats.org/markup-compatibility/2006" xmlns:p159="http://schemas.microsoft.com/office/powerpoint/2015/09/main">
+    <mc:Choice Requires="p159">
+      <p:transition xmlns:p14="http://schemas.microsoft.com/office/powerpoint/2010/main" spd="slow" p14:dur="1250">
+        <p159:morph option="byObject"/>
+      </p:transition>
+    </mc:Choice>
+    <mc:Fallback xmlns="">
+      <p:transition spd="slow">
+        <p:fade/>
+      </p:transition>
+    </mc:Fallback>
+  </mc:AlternateContent>
+</p:sld>
+</file>
+
+<file path=ppt/slides/slide14.xml><?xml version="1.0" encoding="utf-8"?>
+<p:sld xmlns:a="http://schemas.openxmlformats.org/drawingml/2006/main" xmlns:r="http://schemas.openxmlformats.org/officeDocument/2006/relationships" xmlns:p="http://schemas.openxmlformats.org/presentationml/2006/main">
+  <p:cSld>
+    <p:spTree>
+      <p:nvGrpSpPr>
+        <p:cNvPr id="1" name=""/>
+        <p:cNvGrpSpPr/>
+        <p:nvPr/>
+      </p:nvGrpSpPr>
+      <p:grpSpPr>
+        <a:xfrm>
+          <a:off x="0" y="0"/>
+          <a:ext cx="0" cy="0"/>
+          <a:chOff x="0" y="0"/>
+          <a:chExt cx="0" cy="0"/>
+        </a:xfrm>
+      </p:grpSpPr>
+      <p:cxnSp>
+        <p:nvCxnSpPr>
+          <p:cNvPr id="7" name="Conector reto 6">
+            <a:extLst>
+              <a:ext uri="{FF2B5EF4-FFF2-40B4-BE49-F238E27FC236}">
+                <a16:creationId xmlns:a16="http://schemas.microsoft.com/office/drawing/2014/main" id="{280B8309-4572-4E27-8B6F-D29679313292}"/>
+              </a:ext>
+            </a:extLst>
+          </p:cNvPr>
+          <p:cNvCxnSpPr>
+            <a:cxnSpLocks/>
+          </p:cNvCxnSpPr>
+          <p:nvPr/>
+        </p:nvCxnSpPr>
+        <p:spPr>
+          <a:xfrm>
+            <a:off x="-112541" y="970671"/>
+            <a:ext cx="8328073" cy="0"/>
+          </a:xfrm>
+          <a:prstGeom prst="line">
+            <a:avLst/>
+          </a:prstGeom>
+          <a:ln w="38100"/>
+        </p:spPr>
+        <p:style>
+          <a:lnRef idx="1">
+            <a:schemeClr val="accent1"/>
+          </a:lnRef>
+          <a:fillRef idx="0">
+            <a:schemeClr val="accent1"/>
+          </a:fillRef>
+          <a:effectRef idx="0">
+            <a:schemeClr val="accent1"/>
+          </a:effectRef>
+          <a:fontRef idx="minor">
+            <a:schemeClr val="tx1"/>
+          </a:fontRef>
+        </p:style>
+      </p:cxnSp>
+      <p:sp>
+        <p:nvSpPr>
+          <p:cNvPr id="8" name="CaixaDeTexto 7">
+            <a:extLst>
+              <a:ext uri="{FF2B5EF4-FFF2-40B4-BE49-F238E27FC236}">
+                <a16:creationId xmlns:a16="http://schemas.microsoft.com/office/drawing/2014/main" id="{39AE06C5-34BE-4D68-97C3-4C07702C2DF6}"/>
+              </a:ext>
+            </a:extLst>
+          </p:cNvPr>
+          <p:cNvSpPr txBox="1"/>
+          <p:nvPr/>
+        </p:nvSpPr>
+        <p:spPr>
+          <a:xfrm>
+            <a:off x="779259" y="294626"/>
+            <a:ext cx="10633479" cy="523220"/>
+          </a:xfrm>
+          <a:prstGeom prst="rect">
+            <a:avLst/>
+          </a:prstGeom>
+          <a:noFill/>
+        </p:spPr>
+        <p:txBody>
+          <a:bodyPr wrap="square" rtlCol="0">
+            <a:spAutoFit/>
+          </a:bodyPr>
+          <a:lstStyle/>
+          <a:p>
+            <a:r>
+              <a:rPr lang="pt-BR" sz="2800" b="1" dirty="0">
+                <a:solidFill>
+                  <a:srgbClr val="002060"/>
+                </a:solidFill>
+                <a:latin typeface="Cambria" panose="02040503050406030204" pitchFamily="18" charset="0"/>
+                <a:ea typeface="Cambria" panose="02040503050406030204" pitchFamily="18" charset="0"/>
+              </a:rPr>
+              <a:t>Reincidência Criminal: o Efeito Estigma de </a:t>
+            </a:r>
+            <a:r>
+              <a:rPr lang="pt-BR" sz="2800" b="1" dirty="0" err="1">
+                <a:solidFill>
+                  <a:srgbClr val="002060"/>
+                </a:solidFill>
+                <a:latin typeface="Cambria" panose="02040503050406030204" pitchFamily="18" charset="0"/>
+                <a:ea typeface="Cambria" panose="02040503050406030204" pitchFamily="18" charset="0"/>
+              </a:rPr>
+              <a:t>Ex-Presidiários</a:t>
+            </a:r>
+            <a:endParaRPr lang="pt-BR" sz="2800" b="1" dirty="0">
+              <a:solidFill>
+                <a:srgbClr val="002060"/>
+              </a:solidFill>
+              <a:latin typeface="Cambria" panose="02040503050406030204" pitchFamily="18" charset="0"/>
+              <a:ea typeface="Cambria" panose="02040503050406030204" pitchFamily="18" charset="0"/>
+            </a:endParaRPr>
+          </a:p>
+        </p:txBody>
+      </p:sp>
+      <p:sp>
+        <p:nvSpPr>
+          <p:cNvPr id="14" name="CaixaDeTexto 13">
+            <a:extLst>
+              <a:ext uri="{FF2B5EF4-FFF2-40B4-BE49-F238E27FC236}">
+                <a16:creationId xmlns:a16="http://schemas.microsoft.com/office/drawing/2014/main" id="{427DBFEB-81BF-4CC3-A411-FBF43D295C56}"/>
+              </a:ext>
+            </a:extLst>
+          </p:cNvPr>
+          <p:cNvSpPr txBox="1"/>
+          <p:nvPr/>
+        </p:nvSpPr>
+        <p:spPr>
+          <a:xfrm>
+            <a:off x="940904" y="1276323"/>
+            <a:ext cx="10310191" cy="506292"/>
+          </a:xfrm>
+          <a:prstGeom prst="rect">
+            <a:avLst/>
+          </a:prstGeom>
+          <a:noFill/>
+        </p:spPr>
+        <p:txBody>
+          <a:bodyPr wrap="square" rtlCol="0">
+            <a:spAutoFit/>
+          </a:bodyPr>
+          <a:lstStyle/>
+          <a:p>
+            <a:pPr marL="285750" indent="-285750">
+              <a:lnSpc>
+                <a:spcPct val="150000"/>
+              </a:lnSpc>
+              <a:spcAft>
+                <a:spcPts val="110"/>
+              </a:spcAft>
+              <a:buFont typeface="Wingdings" panose="05000000000000000000" pitchFamily="2" charset="2"/>
+              <a:buChar char="Ø"/>
+            </a:pPr>
+            <a:r>
+              <a:rPr lang="pt-BR" sz="2000" b="1" dirty="0"/>
+              <a:t>Noções gerais sobre Estatística. </a:t>
+            </a:r>
+          </a:p>
+        </p:txBody>
+      </p:sp>
+      <p:pic>
+        <p:nvPicPr>
+          <p:cNvPr id="2" name="Picture 2" descr="UFRGS na Serra | Visão de futuro e coragem para inovar">
+            <a:extLst>
+              <a:ext uri="{FF2B5EF4-FFF2-40B4-BE49-F238E27FC236}">
+                <a16:creationId xmlns:a16="http://schemas.microsoft.com/office/drawing/2014/main" id="{567C8E3D-C535-EC50-849C-270CEB4B8A04}"/>
+              </a:ext>
+            </a:extLst>
+          </p:cNvPr>
+          <p:cNvPicPr>
+            <a:picLocks noChangeAspect="1" noChangeArrowheads="1"/>
+          </p:cNvPicPr>
+          <p:nvPr/>
+        </p:nvPicPr>
+        <p:blipFill>
+          <a:blip r:embed="rId3">
+            <a:extLst>
+              <a:ext uri="{28A0092B-C50C-407E-A947-70E740481C1C}">
+                <a14:useLocalDpi xmlns:a14="http://schemas.microsoft.com/office/drawing/2010/main" val="0"/>
+              </a:ext>
+            </a:extLst>
+          </a:blip>
+          <a:srcRect/>
+          <a:stretch>
+            <a:fillRect/>
+          </a:stretch>
+        </p:blipFill>
+        <p:spPr bwMode="auto">
+          <a:xfrm>
+            <a:off x="119922" y="6346096"/>
+            <a:ext cx="683614" cy="445109"/>
+          </a:xfrm>
+          <a:prstGeom prst="rect">
+            <a:avLst/>
+          </a:prstGeom>
+          <a:noFill/>
+          <a:extLst>
+            <a:ext uri="{909E8E84-426E-40DD-AFC4-6F175D3DCCD1}">
+              <a14:hiddenFill xmlns:a14="http://schemas.microsoft.com/office/drawing/2010/main">
+                <a:solidFill>
+                  <a:srgbClr val="FFFFFF"/>
+                </a:solidFill>
+              </a14:hiddenFill>
+            </a:ext>
+          </a:extLst>
+        </p:spPr>
+      </p:pic>
+      <p:pic>
+        <p:nvPicPr>
+          <p:cNvPr id="3" name="Picture 4">
+            <a:extLst>
+              <a:ext uri="{FF2B5EF4-FFF2-40B4-BE49-F238E27FC236}">
+                <a16:creationId xmlns:a16="http://schemas.microsoft.com/office/drawing/2014/main" id="{C9663204-9A6C-C5D7-7C9B-AAF5653911D6}"/>
+              </a:ext>
+            </a:extLst>
+          </p:cNvPr>
+          <p:cNvPicPr>
+            <a:picLocks noChangeAspect="1" noChangeArrowheads="1"/>
+          </p:cNvPicPr>
+          <p:nvPr/>
+        </p:nvPicPr>
+        <p:blipFill>
+          <a:blip r:embed="rId4">
+            <a:extLst>
+              <a:ext uri="{28A0092B-C50C-407E-A947-70E740481C1C}">
+                <a14:useLocalDpi xmlns:a14="http://schemas.microsoft.com/office/drawing/2010/main" val="0"/>
+              </a:ext>
+            </a:extLst>
+          </a:blip>
+          <a:srcRect/>
+          <a:stretch>
+            <a:fillRect/>
+          </a:stretch>
+        </p:blipFill>
+        <p:spPr bwMode="auto">
+          <a:xfrm>
+            <a:off x="10802599" y="6212508"/>
+            <a:ext cx="1329440" cy="578697"/>
+          </a:xfrm>
+          <a:prstGeom prst="rect">
+            <a:avLst/>
+          </a:prstGeom>
+          <a:noFill/>
+          <a:extLst>
+            <a:ext uri="{909E8E84-426E-40DD-AFC4-6F175D3DCCD1}">
+              <a14:hiddenFill xmlns:a14="http://schemas.microsoft.com/office/drawing/2010/main">
+                <a:solidFill>
+                  <a:srgbClr val="FFFFFF"/>
+                </a:solidFill>
+              </a14:hiddenFill>
+            </a:ext>
+          </a:extLst>
+        </p:spPr>
+      </p:pic>
+    </p:spTree>
+    <p:extLst>
+      <p:ext uri="{BB962C8B-B14F-4D97-AF65-F5344CB8AC3E}">
+        <p14:creationId xmlns:p14="http://schemas.microsoft.com/office/powerpoint/2010/main" val="1070033144"/>
+      </p:ext>
+    </p:extLst>
+  </p:cSld>
+  <p:clrMapOvr>
+    <a:masterClrMapping/>
+  </p:clrMapOvr>
+  <mc:AlternateContent xmlns:mc="http://schemas.openxmlformats.org/markup-compatibility/2006" xmlns:p159="http://schemas.microsoft.com/office/powerpoint/2015/09/main">
+    <mc:Choice Requires="p159">
+      <p:transition xmlns:p14="http://schemas.microsoft.com/office/powerpoint/2010/main" spd="slow" p14:dur="1250">
+        <p159:morph option="byObject"/>
+      </p:transition>
+    </mc:Choice>
+    <mc:Fallback xmlns="">
+      <p:transition spd="slow">
+        <p:fade/>
+      </p:transition>
+    </mc:Fallback>
+  </mc:AlternateContent>
+</p:sld>
+</file>
+
+<file path=ppt/slides/slide15.xml><?xml version="1.0" encoding="utf-8"?>
+<p:sld xmlns:a="http://schemas.openxmlformats.org/drawingml/2006/main" xmlns:r="http://schemas.openxmlformats.org/officeDocument/2006/relationships" xmlns:p="http://schemas.openxmlformats.org/presentationml/2006/main">
+  <p:cSld>
+    <p:spTree>
+      <p:nvGrpSpPr>
+        <p:cNvPr id="1" name=""/>
+        <p:cNvGrpSpPr/>
+        <p:nvPr/>
+      </p:nvGrpSpPr>
+      <p:grpSpPr>
+        <a:xfrm>
+          <a:off x="0" y="0"/>
+          <a:ext cx="0" cy="0"/>
+          <a:chOff x="0" y="0"/>
+          <a:chExt cx="0" cy="0"/>
+        </a:xfrm>
+      </p:grpSpPr>
+      <p:cxnSp>
+        <p:nvCxnSpPr>
+          <p:cNvPr id="7" name="Conector reto 6">
+            <a:extLst>
+              <a:ext uri="{FF2B5EF4-FFF2-40B4-BE49-F238E27FC236}">
+                <a16:creationId xmlns:a16="http://schemas.microsoft.com/office/drawing/2014/main" id="{280B8309-4572-4E27-8B6F-D29679313292}"/>
+              </a:ext>
+            </a:extLst>
+          </p:cNvPr>
+          <p:cNvCxnSpPr>
+            <a:cxnSpLocks/>
+          </p:cNvCxnSpPr>
+          <p:nvPr/>
+        </p:nvCxnSpPr>
+        <p:spPr>
+          <a:xfrm>
+            <a:off x="-112541" y="970671"/>
+            <a:ext cx="8328073" cy="0"/>
+          </a:xfrm>
+          <a:prstGeom prst="line">
+            <a:avLst/>
+          </a:prstGeom>
+          <a:ln w="38100"/>
+        </p:spPr>
+        <p:style>
+          <a:lnRef idx="1">
+            <a:schemeClr val="accent1"/>
+          </a:lnRef>
+          <a:fillRef idx="0">
+            <a:schemeClr val="accent1"/>
+          </a:fillRef>
+          <a:effectRef idx="0">
+            <a:schemeClr val="accent1"/>
+          </a:effectRef>
+          <a:fontRef idx="minor">
+            <a:schemeClr val="tx1"/>
+          </a:fontRef>
+        </p:style>
+      </p:cxnSp>
+      <p:sp>
+        <p:nvSpPr>
+          <p:cNvPr id="8" name="CaixaDeTexto 7">
+            <a:extLst>
+              <a:ext uri="{FF2B5EF4-FFF2-40B4-BE49-F238E27FC236}">
+                <a16:creationId xmlns:a16="http://schemas.microsoft.com/office/drawing/2014/main" id="{39AE06C5-34BE-4D68-97C3-4C07702C2DF6}"/>
+              </a:ext>
+            </a:extLst>
+          </p:cNvPr>
+          <p:cNvSpPr txBox="1"/>
+          <p:nvPr/>
+        </p:nvSpPr>
+        <p:spPr>
+          <a:xfrm>
             <a:off x="1103819" y="140678"/>
             <a:ext cx="7815329" cy="646331"/>
           </a:xfrm>
@@ -7693,7 +9960,7 @@
 </p:sld>
 </file>
 
-<file path=ppt/slides/slide11.xml><?xml version="1.0" encoding="utf-8"?>
+<file path=ppt/slides/slide16.xml><?xml version="1.0" encoding="utf-8"?>
 <p:sld xmlns:a="http://schemas.openxmlformats.org/drawingml/2006/main" xmlns:r="http://schemas.openxmlformats.org/officeDocument/2006/relationships" xmlns:p="http://schemas.openxmlformats.org/presentationml/2006/main">
   <p:cSld>
     <p:spTree>
@@ -8708,7 +10975,7 @@
     </p:spTree>
     <p:extLst>
       <p:ext uri="{BB962C8B-B14F-4D97-AF65-F5344CB8AC3E}">
-        <p14:creationId xmlns:p14="http://schemas.microsoft.com/office/powerpoint/2010/main" val="1465096313"/>
+        <p14:creationId xmlns:p14="http://schemas.microsoft.com/office/powerpoint/2010/main" val="587472357"/>
       </p:ext>
     </p:extLst>
   </p:cSld>
@@ -10101,8 +12368,8 @@
         </p:nvSpPr>
         <p:spPr>
           <a:xfrm>
-            <a:off x="940904" y="1276323"/>
-            <a:ext cx="10310191" cy="4763868"/>
+            <a:off x="940903" y="1573800"/>
+            <a:ext cx="10310191" cy="4503797"/>
           </a:xfrm>
           <a:prstGeom prst="rect">
             <a:avLst/>
@@ -10116,9 +12383,6 @@
           <a:lstStyle/>
           <a:p>
             <a:pPr marL="285750" indent="-285750">
-              <a:lnSpc>
-                <a:spcPct val="150000"/>
-              </a:lnSpc>
               <a:spcAft>
                 <a:spcPts val="110"/>
               </a:spcAft>
@@ -10127,14 +12391,21 @@
             </a:pPr>
             <a:r>
               <a:rPr lang="pt-BR" sz="2000" b="1" dirty="0"/>
-              <a:t>Descritivas</a:t>
+              <a:t>Porque muitas analises focam na taxa de homicídio?</a:t>
             </a:r>
           </a:p>
           <a:p>
             <a:pPr marL="285750" indent="-285750">
-              <a:lnSpc>
-                <a:spcPct val="150000"/>
-              </a:lnSpc>
+              <a:spcAft>
+                <a:spcPts val="110"/>
+              </a:spcAft>
+              <a:buFont typeface="Wingdings" panose="05000000000000000000" pitchFamily="2" charset="2"/>
+              <a:buChar char="Ø"/>
+            </a:pPr>
+            <a:endParaRPr lang="pt-BR" sz="2000" b="1" dirty="0"/>
+          </a:p>
+          <a:p>
+            <a:pPr marL="285750" indent="-285750">
               <a:spcAft>
                 <a:spcPts val="110"/>
               </a:spcAft>
@@ -10143,14 +12414,32 @@
             </a:pPr>
             <a:r>
               <a:rPr lang="pt-BR" sz="2000" b="1" dirty="0"/>
-              <a:t>Taxas em Municípios pequenos</a:t>
+              <a:t>Porque possui </a:t>
             </a:r>
+            <a:r>
+              <a:rPr lang="pt-BR" sz="2000" b="1" u="none" strike="noStrike" dirty="0">
+                <a:effectLst/>
+                <a:latin typeface="Google Sans"/>
+              </a:rPr>
+              <a:t>menor margem de subnotificação</a:t>
+            </a:r>
+            <a:r>
+              <a:rPr lang="pt-BR" sz="2000" b="1" dirty="0"/>
+              <a:t> e maior confiabilidade estatística do que outros crimes</a:t>
+            </a:r>
           </a:p>
           <a:p>
             <a:pPr marL="285750" indent="-285750">
-              <a:lnSpc>
-                <a:spcPct val="150000"/>
-              </a:lnSpc>
+              <a:spcAft>
+                <a:spcPts val="110"/>
+              </a:spcAft>
+              <a:buFont typeface="Wingdings" panose="05000000000000000000" pitchFamily="2" charset="2"/>
+              <a:buChar char="Ø"/>
+            </a:pPr>
+            <a:endParaRPr lang="pt-BR" sz="2000" b="1" dirty="0"/>
+          </a:p>
+          <a:p>
+            <a:pPr marL="285750" indent="-285750">
               <a:spcAft>
                 <a:spcPts val="110"/>
               </a:spcAft>
@@ -10159,14 +12448,33 @@
             </a:pPr>
             <a:r>
               <a:rPr lang="pt-BR" sz="2000" b="1" dirty="0"/>
-              <a:t>Autocorrelação espacial</a:t>
+              <a:t>Especialistas em segurança pública explicam que nem todo furto, roubo ou ameaça é registrado em delegacias, mas um assassinato quase sempre deixa um corpo e gera um registro oficial em sistemas de saúde e de polícia (Fonte: </a:t>
             </a:r>
+            <a:r>
+              <a:rPr lang="pt-BR" sz="2000" b="1" u="none" strike="noStrike" dirty="0">
+                <a:effectLst/>
+                <a:latin typeface="Google Sans"/>
+                <a:hlinkClick r:id="rId5"/>
+              </a:rPr>
+              <a:t>Fórum Brasileiro de Segurança Pública</a:t>
+            </a:r>
+            <a:r>
+              <a:rPr lang="pt-BR" sz="2000" b="1" dirty="0"/>
+              <a:t>).</a:t>
+            </a:r>
           </a:p>
           <a:p>
             <a:pPr marL="285750" indent="-285750">
-              <a:lnSpc>
-                <a:spcPct val="150000"/>
-              </a:lnSpc>
+              <a:spcAft>
+                <a:spcPts val="110"/>
+              </a:spcAft>
+              <a:buFont typeface="Wingdings" panose="05000000000000000000" pitchFamily="2" charset="2"/>
+              <a:buChar char="Ø"/>
+            </a:pPr>
+            <a:endParaRPr lang="pt-BR" sz="2000" b="1" dirty="0"/>
+          </a:p>
+          <a:p>
+            <a:pPr marL="285750" indent="-285750">
               <a:spcAft>
                 <a:spcPts val="110"/>
               </a:spcAft>
@@ -10175,78 +12483,21 @@
             </a:pPr>
             <a:r>
               <a:rPr lang="pt-BR" sz="2000" b="1" dirty="0"/>
-              <a:t>Cadeias de Markov</a:t>
+              <a:t>Taxa de Homicídio que a ONU considerada epidemia: 10 por 100.000</a:t>
             </a:r>
           </a:p>
           <a:p>
             <a:pPr marL="285750" indent="-285750">
-              <a:lnSpc>
-                <a:spcPct val="150000"/>
-              </a:lnSpc>
               <a:spcAft>
                 <a:spcPts val="110"/>
               </a:spcAft>
               <a:buFont typeface="Wingdings" panose="05000000000000000000" pitchFamily="2" charset="2"/>
               <a:buChar char="Ø"/>
             </a:pPr>
-            <a:r>
-              <a:rPr lang="pt-BR" sz="2000" b="1" dirty="0"/>
-              <a:t>Roubo de Veículos</a:t>
-            </a:r>
+            <a:endParaRPr lang="pt-BR" sz="2000" b="1" dirty="0"/>
           </a:p>
           <a:p>
             <a:pPr marL="285750" indent="-285750">
-              <a:lnSpc>
-                <a:spcPct val="150000"/>
-              </a:lnSpc>
-              <a:spcAft>
-                <a:spcPts val="110"/>
-              </a:spcAft>
-              <a:buFont typeface="Wingdings" panose="05000000000000000000" pitchFamily="2" charset="2"/>
-              <a:buChar char="Ø"/>
-            </a:pPr>
-            <a:r>
-              <a:rPr lang="pt-BR" sz="2000" b="1" dirty="0"/>
-              <a:t>Furto</a:t>
-            </a:r>
-          </a:p>
-          <a:p>
-            <a:pPr marL="285750" indent="-285750">
-              <a:lnSpc>
-                <a:spcPct val="150000"/>
-              </a:lnSpc>
-              <a:spcAft>
-                <a:spcPts val="110"/>
-              </a:spcAft>
-              <a:buFont typeface="Wingdings" panose="05000000000000000000" pitchFamily="2" charset="2"/>
-              <a:buChar char="Ø"/>
-            </a:pPr>
-            <a:r>
-              <a:rPr lang="pt-BR" sz="2000" b="1" dirty="0"/>
-              <a:t>Homicídio</a:t>
-            </a:r>
-          </a:p>
-          <a:p>
-            <a:pPr marL="285750" indent="-285750">
-              <a:lnSpc>
-                <a:spcPct val="150000"/>
-              </a:lnSpc>
-              <a:spcAft>
-                <a:spcPts val="110"/>
-              </a:spcAft>
-              <a:buFont typeface="Wingdings" panose="05000000000000000000" pitchFamily="2" charset="2"/>
-              <a:buChar char="Ø"/>
-            </a:pPr>
-            <a:r>
-              <a:rPr lang="pt-BR" sz="2000" b="1" dirty="0"/>
-              <a:t>Taxa de Homicídio ONU: 10 por 100.000</a:t>
-            </a:r>
-          </a:p>
-          <a:p>
-            <a:pPr marL="285750" indent="-285750">
-              <a:lnSpc>
-                <a:spcPct val="150000"/>
-              </a:lnSpc>
               <a:spcAft>
                 <a:spcPts val="110"/>
               </a:spcAft>
@@ -10261,7 +12512,7 @@
               <a:t>Média Global:</a:t>
             </a:r>
             <a:r>
-              <a:rPr lang="pt-BR" sz="2000" dirty="0"/>
+              <a:rPr lang="pt-BR" sz="2000" b="1" dirty="0"/>
               <a:t> A taxa média no mundo gira em torno de </a:t>
             </a:r>
             <a:r>
@@ -10272,17 +12523,16 @@
               <a:t>5,8 homicídios por 100 mil habitantes</a:t>
             </a:r>
             <a:r>
-              <a:rPr lang="pt-BR" sz="2000" dirty="0"/>
+              <a:rPr lang="pt-BR" sz="2000" b="1" dirty="0"/>
               <a:t>.</a:t>
             </a:r>
-            <a:endParaRPr lang="pt-BR" sz="2000" b="1" dirty="0"/>
           </a:p>
         </p:txBody>
       </p:sp>
     </p:spTree>
     <p:extLst>
       <p:ext uri="{BB962C8B-B14F-4D97-AF65-F5344CB8AC3E}">
-        <p14:creationId xmlns:p14="http://schemas.microsoft.com/office/powerpoint/2010/main" val="204840894"/>
+        <p14:creationId xmlns:p14="http://schemas.microsoft.com/office/powerpoint/2010/main" val="2697758197"/>
       </p:ext>
     </p:extLst>
   </p:cSld>
@@ -10495,12 +12745,42 @@
           </a:extLst>
         </p:spPr>
       </p:pic>
-      <p:sp>
-        <p:nvSpPr>
-          <p:cNvPr id="4" name="CaixaDeTexto 3">
-            <a:extLst>
-              <a:ext uri="{FF2B5EF4-FFF2-40B4-BE49-F238E27FC236}">
-                <a16:creationId xmlns:a16="http://schemas.microsoft.com/office/drawing/2014/main" id="{F9B44222-0FEB-DD8A-E65A-F10683C06A0F}"/>
+      <p:pic>
+        <p:nvPicPr>
+          <p:cNvPr id="6" name="Imagem 5">
+            <a:extLst>
+              <a:ext uri="{FF2B5EF4-FFF2-40B4-BE49-F238E27FC236}">
+                <a16:creationId xmlns:a16="http://schemas.microsoft.com/office/drawing/2014/main" id="{C7CB915E-012D-A5FC-3321-870B91EF401C}"/>
+              </a:ext>
+            </a:extLst>
+          </p:cNvPr>
+          <p:cNvPicPr>
+            <a:picLocks noChangeAspect="1"/>
+          </p:cNvPicPr>
+          <p:nvPr/>
+        </p:nvPicPr>
+        <p:blipFill>
+          <a:blip r:embed="rId5"/>
+          <a:stretch>
+            <a:fillRect/>
+          </a:stretch>
+        </p:blipFill>
+        <p:spPr>
+          <a:xfrm>
+            <a:off x="1398216" y="1693895"/>
+            <a:ext cx="9404383" cy="4382314"/>
+          </a:xfrm>
+          <a:prstGeom prst="rect">
+            <a:avLst/>
+          </a:prstGeom>
+        </p:spPr>
+      </p:pic>
+      <p:sp>
+        <p:nvSpPr>
+          <p:cNvPr id="10" name="CaixaDeTexto 9">
+            <a:extLst>
+              <a:ext uri="{FF2B5EF4-FFF2-40B4-BE49-F238E27FC236}">
+                <a16:creationId xmlns:a16="http://schemas.microsoft.com/office/drawing/2014/main" id="{439966E0-F76D-F319-6141-19CB38DC8D8B}"/>
               </a:ext>
             </a:extLst>
           </p:cNvPr>
@@ -10509,8 +12789,8 @@
         </p:nvSpPr>
         <p:spPr>
           <a:xfrm>
-            <a:off x="940904" y="1276323"/>
-            <a:ext cx="10310191" cy="4763868"/>
+            <a:off x="5039192" y="2243955"/>
+            <a:ext cx="3492708" cy="646331"/>
           </a:xfrm>
           <a:prstGeom prst="rect">
             <a:avLst/>
@@ -10523,174 +12803,64 @@
           </a:bodyPr>
           <a:lstStyle/>
           <a:p>
-            <a:pPr marL="285750" indent="-285750">
-              <a:lnSpc>
-                <a:spcPct val="150000"/>
-              </a:lnSpc>
-              <a:spcAft>
-                <a:spcPts val="110"/>
-              </a:spcAft>
-              <a:buFont typeface="Wingdings" panose="05000000000000000000" pitchFamily="2" charset="2"/>
-              <a:buChar char="Ø"/>
-            </a:pPr>
+            <a:pPr algn="ctr"/>
             <a:r>
-              <a:rPr lang="pt-BR" sz="2000" b="1" dirty="0"/>
-              <a:t>Descritivas</a:t>
+              <a:rPr lang="pt-BR" b="1" dirty="0"/>
+              <a:t>2017 também foi ano de inflexão para outros crimes</a:t>
             </a:r>
           </a:p>
-          <a:p>
-            <a:pPr marL="285750" indent="-285750">
-              <a:lnSpc>
-                <a:spcPct val="150000"/>
-              </a:lnSpc>
-              <a:spcAft>
-                <a:spcPts val="110"/>
-              </a:spcAft>
-              <a:buFont typeface="Wingdings" panose="05000000000000000000" pitchFamily="2" charset="2"/>
-              <a:buChar char="Ø"/>
-            </a:pPr>
-            <a:r>
-              <a:rPr lang="pt-BR" sz="2000" b="1" dirty="0"/>
-              <a:t>Taxas em Municípios pequenos</a:t>
-            </a:r>
-          </a:p>
-          <a:p>
-            <a:pPr marL="285750" indent="-285750">
-              <a:lnSpc>
-                <a:spcPct val="150000"/>
-              </a:lnSpc>
-              <a:spcAft>
-                <a:spcPts val="110"/>
-              </a:spcAft>
-              <a:buFont typeface="Wingdings" panose="05000000000000000000" pitchFamily="2" charset="2"/>
-              <a:buChar char="Ø"/>
-            </a:pPr>
-            <a:r>
-              <a:rPr lang="pt-BR" sz="2000" b="1" dirty="0"/>
-              <a:t>Autocorrelação espacial</a:t>
-            </a:r>
-          </a:p>
-          <a:p>
-            <a:pPr marL="285750" indent="-285750">
-              <a:lnSpc>
-                <a:spcPct val="150000"/>
-              </a:lnSpc>
-              <a:spcAft>
-                <a:spcPts val="110"/>
-              </a:spcAft>
-              <a:buFont typeface="Wingdings" panose="05000000000000000000" pitchFamily="2" charset="2"/>
-              <a:buChar char="Ø"/>
-            </a:pPr>
-            <a:r>
-              <a:rPr lang="pt-BR" sz="2000" b="1" dirty="0"/>
-              <a:t>Cadeias de Markov</a:t>
-            </a:r>
-          </a:p>
-          <a:p>
-            <a:pPr marL="285750" indent="-285750">
-              <a:lnSpc>
-                <a:spcPct val="150000"/>
-              </a:lnSpc>
-              <a:spcAft>
-                <a:spcPts val="110"/>
-              </a:spcAft>
-              <a:buFont typeface="Wingdings" panose="05000000000000000000" pitchFamily="2" charset="2"/>
-              <a:buChar char="Ø"/>
-            </a:pPr>
-            <a:r>
-              <a:rPr lang="pt-BR" sz="2000" b="1" dirty="0"/>
-              <a:t>Roubo de Veículos</a:t>
-            </a:r>
-          </a:p>
-          <a:p>
-            <a:pPr marL="285750" indent="-285750">
-              <a:lnSpc>
-                <a:spcPct val="150000"/>
-              </a:lnSpc>
-              <a:spcAft>
-                <a:spcPts val="110"/>
-              </a:spcAft>
-              <a:buFont typeface="Wingdings" panose="05000000000000000000" pitchFamily="2" charset="2"/>
-              <a:buChar char="Ø"/>
-            </a:pPr>
-            <a:r>
-              <a:rPr lang="pt-BR" sz="2000" b="1" dirty="0"/>
-              <a:t>Furto</a:t>
-            </a:r>
-          </a:p>
-          <a:p>
-            <a:pPr marL="285750" indent="-285750">
-              <a:lnSpc>
-                <a:spcPct val="150000"/>
-              </a:lnSpc>
-              <a:spcAft>
-                <a:spcPts val="110"/>
-              </a:spcAft>
-              <a:buFont typeface="Wingdings" panose="05000000000000000000" pitchFamily="2" charset="2"/>
-              <a:buChar char="Ø"/>
-            </a:pPr>
-            <a:r>
-              <a:rPr lang="pt-BR" sz="2000" b="1" dirty="0"/>
-              <a:t>Homicídio</a:t>
-            </a:r>
-          </a:p>
-          <a:p>
-            <a:pPr marL="285750" indent="-285750">
-              <a:lnSpc>
-                <a:spcPct val="150000"/>
-              </a:lnSpc>
-              <a:spcAft>
-                <a:spcPts val="110"/>
-              </a:spcAft>
-              <a:buFont typeface="Wingdings" panose="05000000000000000000" pitchFamily="2" charset="2"/>
-              <a:buChar char="Ø"/>
-            </a:pPr>
-            <a:r>
-              <a:rPr lang="pt-BR" sz="2000" b="1" dirty="0"/>
-              <a:t>Taxa de Homicídio ONU: 10 por 100.000</a:t>
-            </a:r>
-          </a:p>
-          <a:p>
-            <a:pPr marL="285750" indent="-285750">
-              <a:lnSpc>
-                <a:spcPct val="150000"/>
-              </a:lnSpc>
-              <a:spcAft>
-                <a:spcPts val="110"/>
-              </a:spcAft>
-              <a:buFont typeface="Wingdings" panose="05000000000000000000" pitchFamily="2" charset="2"/>
-              <a:buChar char="Ø"/>
-            </a:pPr>
-            <a:r>
-              <a:rPr lang="pt-BR" sz="2000" b="1" u="none" strike="noStrike" dirty="0">
-                <a:effectLst/>
-                <a:latin typeface="Google Sans"/>
-              </a:rPr>
-              <a:t>Média Global:</a:t>
-            </a:r>
-            <a:r>
-              <a:rPr lang="pt-BR" sz="2000" dirty="0"/>
-              <a:t> A taxa média no mundo gira em torno de </a:t>
-            </a:r>
-            <a:r>
-              <a:rPr lang="pt-BR" sz="2000" b="1" u="none" strike="noStrike" dirty="0">
-                <a:effectLst/>
-                <a:latin typeface="Google Sans"/>
-              </a:rPr>
-              <a:t>5,8 homicídios por 100 mil habitantes</a:t>
-            </a:r>
-            <a:r>
-              <a:rPr lang="pt-BR" sz="2000" dirty="0"/>
-              <a:t>.</a:t>
-            </a:r>
-            <a:endParaRPr lang="pt-BR" sz="2000" b="1" dirty="0"/>
+        </p:txBody>
+      </p:sp>
+      <p:sp>
+        <p:nvSpPr>
+          <p:cNvPr id="14" name="Seta: para a Direita 13">
+            <a:extLst>
+              <a:ext uri="{FF2B5EF4-FFF2-40B4-BE49-F238E27FC236}">
+                <a16:creationId xmlns:a16="http://schemas.microsoft.com/office/drawing/2014/main" id="{09C2AF41-9EBC-A93B-F400-326DED611B2C}"/>
+              </a:ext>
+            </a:extLst>
+          </p:cNvPr>
+          <p:cNvSpPr/>
+          <p:nvPr/>
+        </p:nvSpPr>
+        <p:spPr>
+          <a:xfrm rot="5400000">
+            <a:off x="6387845" y="3011930"/>
+            <a:ext cx="435637" cy="359764"/>
+          </a:xfrm>
+          <a:prstGeom prst="rightArrow">
+            <a:avLst/>
+          </a:prstGeom>
+        </p:spPr>
+        <p:style>
+          <a:lnRef idx="2">
+            <a:schemeClr val="accent1">
+              <a:shade val="15000"/>
+            </a:schemeClr>
+          </a:lnRef>
+          <a:fillRef idx="1">
+            <a:schemeClr val="accent1"/>
+          </a:fillRef>
+          <a:effectRef idx="0">
+            <a:schemeClr val="accent1"/>
+          </a:effectRef>
+          <a:fontRef idx="minor">
+            <a:schemeClr val="lt1"/>
+          </a:fontRef>
+        </p:style>
+        <p:txBody>
+          <a:bodyPr rtlCol="0" anchor="ctr"/>
+          <a:lstStyle/>
+          <a:p>
+            <a:pPr algn="ctr"/>
+            <a:endParaRPr lang="pt-BR"/>
           </a:p>
         </p:txBody>
       </p:sp>
     </p:spTree>
     <p:extLst>
       <p:ext uri="{BB962C8B-B14F-4D97-AF65-F5344CB8AC3E}">
-        <p14:creationId xmlns:p14="http://schemas.microsoft.com/office/powerpoint/2010/main" val="1600642753"/>
+        <p14:creationId xmlns:p14="http://schemas.microsoft.com/office/powerpoint/2010/main" val="1268954086"/>
       </p:ext>
     </p:extLst>
   </p:cSld>
@@ -10709,6 +12879,220 @@
       </p:transition>
     </mc:Fallback>
   </mc:AlternateContent>
+  <p:timing>
+    <p:tnLst>
+      <p:par>
+        <p:cTn id="1" dur="indefinite" restart="never" nodeType="tmRoot">
+          <p:childTnLst>
+            <p:seq concurrent="1" nextAc="seek">
+              <p:cTn id="2" dur="indefinite" nodeType="mainSeq">
+                <p:childTnLst>
+                  <p:par>
+                    <p:cTn id="3" fill="hold">
+                      <p:stCondLst>
+                        <p:cond delay="indefinite"/>
+                      </p:stCondLst>
+                      <p:childTnLst>
+                        <p:par>
+                          <p:cTn id="4" fill="hold">
+                            <p:stCondLst>
+                              <p:cond delay="0"/>
+                            </p:stCondLst>
+                            <p:childTnLst>
+                              <p:par>
+                                <p:cTn id="5" presetID="42" presetClass="entr" presetSubtype="0" fill="hold" grpId="0" nodeType="clickEffect">
+                                  <p:stCondLst>
+                                    <p:cond delay="0"/>
+                                  </p:stCondLst>
+                                  <p:childTnLst>
+                                    <p:set>
+                                      <p:cBhvr>
+                                        <p:cTn id="6" dur="1" fill="hold">
+                                          <p:stCondLst>
+                                            <p:cond delay="0"/>
+                                          </p:stCondLst>
+                                        </p:cTn>
+                                        <p:tgtEl>
+                                          <p:spTgt spid="14"/>
+                                        </p:tgtEl>
+                                        <p:attrNameLst>
+                                          <p:attrName>style.visibility</p:attrName>
+                                        </p:attrNameLst>
+                                      </p:cBhvr>
+                                      <p:to>
+                                        <p:strVal val="visible"/>
+                                      </p:to>
+                                    </p:set>
+                                    <p:animEffect transition="in" filter="fade">
+                                      <p:cBhvr>
+                                        <p:cTn id="7" dur="1000"/>
+                                        <p:tgtEl>
+                                          <p:spTgt spid="14"/>
+                                        </p:tgtEl>
+                                      </p:cBhvr>
+                                    </p:animEffect>
+                                    <p:anim calcmode="lin" valueType="num">
+                                      <p:cBhvr>
+                                        <p:cTn id="8" dur="1000" fill="hold"/>
+                                        <p:tgtEl>
+                                          <p:spTgt spid="14"/>
+                                        </p:tgtEl>
+                                        <p:attrNameLst>
+                                          <p:attrName>ppt_x</p:attrName>
+                                        </p:attrNameLst>
+                                      </p:cBhvr>
+                                      <p:tavLst>
+                                        <p:tav tm="0">
+                                          <p:val>
+                                            <p:strVal val="#ppt_x"/>
+                                          </p:val>
+                                        </p:tav>
+                                        <p:tav tm="100000">
+                                          <p:val>
+                                            <p:strVal val="#ppt_x"/>
+                                          </p:val>
+                                        </p:tav>
+                                      </p:tavLst>
+                                    </p:anim>
+                                    <p:anim calcmode="lin" valueType="num">
+                                      <p:cBhvr>
+                                        <p:cTn id="9" dur="1000" fill="hold"/>
+                                        <p:tgtEl>
+                                          <p:spTgt spid="14"/>
+                                        </p:tgtEl>
+                                        <p:attrNameLst>
+                                          <p:attrName>ppt_y</p:attrName>
+                                        </p:attrNameLst>
+                                      </p:cBhvr>
+                                      <p:tavLst>
+                                        <p:tav tm="0">
+                                          <p:val>
+                                            <p:strVal val="#ppt_y+.1"/>
+                                          </p:val>
+                                        </p:tav>
+                                        <p:tav tm="100000">
+                                          <p:val>
+                                            <p:strVal val="#ppt_y"/>
+                                          </p:val>
+                                        </p:tav>
+                                      </p:tavLst>
+                                    </p:anim>
+                                  </p:childTnLst>
+                                </p:cTn>
+                              </p:par>
+                              <p:par>
+                                <p:cTn id="10" presetID="42" presetClass="entr" presetSubtype="0" fill="hold" grpId="0" nodeType="withEffect">
+                                  <p:stCondLst>
+                                    <p:cond delay="0"/>
+                                  </p:stCondLst>
+                                  <p:childTnLst>
+                                    <p:set>
+                                      <p:cBhvr>
+                                        <p:cTn id="11" dur="1" fill="hold">
+                                          <p:stCondLst>
+                                            <p:cond delay="0"/>
+                                          </p:stCondLst>
+                                        </p:cTn>
+                                        <p:tgtEl>
+                                          <p:spTgt spid="10"/>
+                                        </p:tgtEl>
+                                        <p:attrNameLst>
+                                          <p:attrName>style.visibility</p:attrName>
+                                        </p:attrNameLst>
+                                      </p:cBhvr>
+                                      <p:to>
+                                        <p:strVal val="visible"/>
+                                      </p:to>
+                                    </p:set>
+                                    <p:animEffect transition="in" filter="fade">
+                                      <p:cBhvr>
+                                        <p:cTn id="12" dur="1000"/>
+                                        <p:tgtEl>
+                                          <p:spTgt spid="10"/>
+                                        </p:tgtEl>
+                                      </p:cBhvr>
+                                    </p:animEffect>
+                                    <p:anim calcmode="lin" valueType="num">
+                                      <p:cBhvr>
+                                        <p:cTn id="13" dur="1000" fill="hold"/>
+                                        <p:tgtEl>
+                                          <p:spTgt spid="10"/>
+                                        </p:tgtEl>
+                                        <p:attrNameLst>
+                                          <p:attrName>ppt_x</p:attrName>
+                                        </p:attrNameLst>
+                                      </p:cBhvr>
+                                      <p:tavLst>
+                                        <p:tav tm="0">
+                                          <p:val>
+                                            <p:strVal val="#ppt_x"/>
+                                          </p:val>
+                                        </p:tav>
+                                        <p:tav tm="100000">
+                                          <p:val>
+                                            <p:strVal val="#ppt_x"/>
+                                          </p:val>
+                                        </p:tav>
+                                      </p:tavLst>
+                                    </p:anim>
+                                    <p:anim calcmode="lin" valueType="num">
+                                      <p:cBhvr>
+                                        <p:cTn id="14" dur="1000" fill="hold"/>
+                                        <p:tgtEl>
+                                          <p:spTgt spid="10"/>
+                                        </p:tgtEl>
+                                        <p:attrNameLst>
+                                          <p:attrName>ppt_y</p:attrName>
+                                        </p:attrNameLst>
+                                      </p:cBhvr>
+                                      <p:tavLst>
+                                        <p:tav tm="0">
+                                          <p:val>
+                                            <p:strVal val="#ppt_y+.1"/>
+                                          </p:val>
+                                        </p:tav>
+                                        <p:tav tm="100000">
+                                          <p:val>
+                                            <p:strVal val="#ppt_y"/>
+                                          </p:val>
+                                        </p:tav>
+                                      </p:tavLst>
+                                    </p:anim>
+                                  </p:childTnLst>
+                                </p:cTn>
+                              </p:par>
+                            </p:childTnLst>
+                          </p:cTn>
+                        </p:par>
+                      </p:childTnLst>
+                    </p:cTn>
+                  </p:par>
+                </p:childTnLst>
+              </p:cTn>
+              <p:prevCondLst>
+                <p:cond evt="onPrev" delay="0">
+                  <p:tgtEl>
+                    <p:sldTgt/>
+                  </p:tgtEl>
+                </p:cond>
+              </p:prevCondLst>
+              <p:nextCondLst>
+                <p:cond evt="onNext" delay="0">
+                  <p:tgtEl>
+                    <p:sldTgt/>
+                  </p:tgtEl>
+                </p:cond>
+              </p:nextCondLst>
+            </p:seq>
+          </p:childTnLst>
+        </p:cTn>
+      </p:par>
+    </p:tnLst>
+    <p:bldLst>
+      <p:bldP spid="10" grpId="0"/>
+      <p:bldP spid="14" grpId="0" animBg="1"/>
+    </p:bldLst>
+  </p:timing>
 </p:sld>
 </file>
 
@@ -10782,8 +13166,8 @@
         </p:nvSpPr>
         <p:spPr>
           <a:xfrm>
-            <a:off x="1103819" y="140678"/>
-            <a:ext cx="7815329" cy="646331"/>
+            <a:off x="249836" y="200638"/>
+            <a:ext cx="11692327" cy="584775"/>
           </a:xfrm>
           <a:prstGeom prst="rect">
             <a:avLst/>
@@ -10797,59 +13181,14 @@
           <a:lstStyle/>
           <a:p>
             <a:r>
-              <a:rPr lang="pt-BR" sz="3600" b="1" dirty="0">
+              <a:rPr lang="pt-BR" sz="3200" b="1" dirty="0">
                 <a:solidFill>
                   <a:srgbClr val="002060"/>
                 </a:solidFill>
                 <a:latin typeface="Cambria" panose="02040503050406030204" pitchFamily="18" charset="0"/>
                 <a:ea typeface="Cambria" panose="02040503050406030204" pitchFamily="18" charset="0"/>
               </a:rPr>
-              <a:t>Armas x Criminalidade</a:t>
-            </a:r>
-          </a:p>
-        </p:txBody>
-      </p:sp>
-      <p:sp>
-        <p:nvSpPr>
-          <p:cNvPr id="14" name="CaixaDeTexto 13">
-            <a:extLst>
-              <a:ext uri="{FF2B5EF4-FFF2-40B4-BE49-F238E27FC236}">
-                <a16:creationId xmlns:a16="http://schemas.microsoft.com/office/drawing/2014/main" id="{427DBFEB-81BF-4CC3-A411-FBF43D295C56}"/>
-              </a:ext>
-            </a:extLst>
-          </p:cNvPr>
-          <p:cNvSpPr txBox="1"/>
-          <p:nvPr/>
-        </p:nvSpPr>
-        <p:spPr>
-          <a:xfrm>
-            <a:off x="940904" y="1276323"/>
-            <a:ext cx="10310191" cy="506292"/>
-          </a:xfrm>
-          <a:prstGeom prst="rect">
-            <a:avLst/>
-          </a:prstGeom>
-          <a:noFill/>
-        </p:spPr>
-        <p:txBody>
-          <a:bodyPr wrap="square" rtlCol="0">
-            <a:spAutoFit/>
-          </a:bodyPr>
-          <a:lstStyle/>
-          <a:p>
-            <a:pPr marL="285750" indent="-285750">
-              <a:lnSpc>
-                <a:spcPct val="150000"/>
-              </a:lnSpc>
-              <a:spcAft>
-                <a:spcPts val="110"/>
-              </a:spcAft>
-              <a:buFont typeface="Wingdings" panose="05000000000000000000" pitchFamily="2" charset="2"/>
-              <a:buChar char="Ø"/>
-            </a:pPr>
-            <a:r>
-              <a:rPr lang="pt-BR" sz="2000" b="1" dirty="0"/>
-              <a:t>Noções gerais sobre Estatística. </a:t>
+              <a:t>Panorama RS à Luz dos Dados públicos disponíveis da SSP-RS</a:t>
             </a:r>
           </a:p>
         </p:txBody>
@@ -10951,7 +13290,7 @@
     </p:spTree>
     <p:extLst>
       <p:ext uri="{BB962C8B-B14F-4D97-AF65-F5344CB8AC3E}">
-        <p14:creationId xmlns:p14="http://schemas.microsoft.com/office/powerpoint/2010/main" val="3554767980"/>
+        <p14:creationId xmlns:p14="http://schemas.microsoft.com/office/powerpoint/2010/main" val="3832149468"/>
       </p:ext>
     </p:extLst>
   </p:cSld>
@@ -11043,8 +13382,8 @@
         </p:nvSpPr>
         <p:spPr>
           <a:xfrm>
-            <a:off x="1103819" y="140678"/>
-            <a:ext cx="7815329" cy="646331"/>
+            <a:off x="249836" y="200638"/>
+            <a:ext cx="11692327" cy="584775"/>
           </a:xfrm>
           <a:prstGeom prst="rect">
             <a:avLst/>
@@ -11058,59 +13397,14 @@
           <a:lstStyle/>
           <a:p>
             <a:r>
-              <a:rPr lang="pt-BR" sz="3600" b="1" dirty="0">
+              <a:rPr lang="pt-BR" sz="3200" b="1" dirty="0">
                 <a:solidFill>
                   <a:srgbClr val="002060"/>
                 </a:solidFill>
                 <a:latin typeface="Cambria" panose="02040503050406030204" pitchFamily="18" charset="0"/>
                 <a:ea typeface="Cambria" panose="02040503050406030204" pitchFamily="18" charset="0"/>
               </a:rPr>
-              <a:t>Luz x Criminalidade</a:t>
-            </a:r>
-          </a:p>
-        </p:txBody>
-      </p:sp>
-      <p:sp>
-        <p:nvSpPr>
-          <p:cNvPr id="14" name="CaixaDeTexto 13">
-            <a:extLst>
-              <a:ext uri="{FF2B5EF4-FFF2-40B4-BE49-F238E27FC236}">
-                <a16:creationId xmlns:a16="http://schemas.microsoft.com/office/drawing/2014/main" id="{427DBFEB-81BF-4CC3-A411-FBF43D295C56}"/>
-              </a:ext>
-            </a:extLst>
-          </p:cNvPr>
-          <p:cNvSpPr txBox="1"/>
-          <p:nvPr/>
-        </p:nvSpPr>
-        <p:spPr>
-          <a:xfrm>
-            <a:off x="940904" y="1276323"/>
-            <a:ext cx="10310191" cy="506292"/>
-          </a:xfrm>
-          <a:prstGeom prst="rect">
-            <a:avLst/>
-          </a:prstGeom>
-          <a:noFill/>
-        </p:spPr>
-        <p:txBody>
-          <a:bodyPr wrap="square" rtlCol="0">
-            <a:spAutoFit/>
-          </a:bodyPr>
-          <a:lstStyle/>
-          <a:p>
-            <a:pPr marL="285750" indent="-285750">
-              <a:lnSpc>
-                <a:spcPct val="150000"/>
-              </a:lnSpc>
-              <a:spcAft>
-                <a:spcPts val="110"/>
-              </a:spcAft>
-              <a:buFont typeface="Wingdings" panose="05000000000000000000" pitchFamily="2" charset="2"/>
-              <a:buChar char="Ø"/>
-            </a:pPr>
-            <a:r>
-              <a:rPr lang="pt-BR" sz="2000" b="1" dirty="0"/>
-              <a:t>Noções gerais sobre Estatística. </a:t>
+              <a:t>Panorama RS à Luz dos Dados públicos disponíveis da SSP-RS</a:t>
             </a:r>
           </a:p>
         </p:txBody>
@@ -11209,10 +13503,214 @@
           </a:extLst>
         </p:spPr>
       </p:pic>
+      <p:sp>
+        <p:nvSpPr>
+          <p:cNvPr id="4" name="CaixaDeTexto 3">
+            <a:extLst>
+              <a:ext uri="{FF2B5EF4-FFF2-40B4-BE49-F238E27FC236}">
+                <a16:creationId xmlns:a16="http://schemas.microsoft.com/office/drawing/2014/main" id="{F9B44222-0FEB-DD8A-E65A-F10683C06A0F}"/>
+              </a:ext>
+            </a:extLst>
+          </p:cNvPr>
+          <p:cNvSpPr txBox="1"/>
+          <p:nvPr/>
+        </p:nvSpPr>
+        <p:spPr>
+          <a:xfrm>
+            <a:off x="940903" y="1573800"/>
+            <a:ext cx="10310191" cy="707886"/>
+          </a:xfrm>
+          <a:prstGeom prst="rect">
+            <a:avLst/>
+          </a:prstGeom>
+          <a:noFill/>
+        </p:spPr>
+        <p:txBody>
+          <a:bodyPr wrap="square" rtlCol="0">
+            <a:spAutoFit/>
+          </a:bodyPr>
+          <a:lstStyle/>
+          <a:p>
+            <a:pPr marL="285750" indent="-285750">
+              <a:spcAft>
+                <a:spcPts val="110"/>
+              </a:spcAft>
+              <a:buFont typeface="Wingdings" panose="05000000000000000000" pitchFamily="2" charset="2"/>
+              <a:buChar char="Ø"/>
+            </a:pPr>
+            <a:r>
+              <a:rPr lang="pt-BR" sz="2000" b="1" dirty="0"/>
+              <a:t>Problema Estatístico: Taxas em Localidades com baixa população produzem estimativas com alta variabilidade.</a:t>
+            </a:r>
+          </a:p>
+        </p:txBody>
+      </p:sp>
+      <p:pic>
+        <p:nvPicPr>
+          <p:cNvPr id="6" name="Imagem 5">
+            <a:extLst>
+              <a:ext uri="{FF2B5EF4-FFF2-40B4-BE49-F238E27FC236}">
+                <a16:creationId xmlns:a16="http://schemas.microsoft.com/office/drawing/2014/main" id="{E0B70768-61C8-F85A-E614-A9F14CEAD950}"/>
+              </a:ext>
+            </a:extLst>
+          </p:cNvPr>
+          <p:cNvPicPr>
+            <a:picLocks noChangeAspect="1"/>
+          </p:cNvPicPr>
+          <p:nvPr/>
+        </p:nvPicPr>
+        <p:blipFill>
+          <a:blip r:embed="rId5"/>
+          <a:stretch>
+            <a:fillRect/>
+          </a:stretch>
+        </p:blipFill>
+        <p:spPr>
+          <a:xfrm>
+            <a:off x="0" y="2795311"/>
+            <a:ext cx="5909943" cy="2653720"/>
+          </a:xfrm>
+          <a:prstGeom prst="rect">
+            <a:avLst/>
+          </a:prstGeom>
+        </p:spPr>
+      </p:pic>
+      <p:sp>
+        <p:nvSpPr>
+          <p:cNvPr id="12" name="Retângulo 11">
+            <a:extLst>
+              <a:ext uri="{FF2B5EF4-FFF2-40B4-BE49-F238E27FC236}">
+                <a16:creationId xmlns:a16="http://schemas.microsoft.com/office/drawing/2014/main" id="{0B40F988-AD4C-F7F7-CE31-F2CDDF82E91A}"/>
+              </a:ext>
+            </a:extLst>
+          </p:cNvPr>
+          <p:cNvSpPr/>
+          <p:nvPr/>
+        </p:nvSpPr>
+        <p:spPr>
+          <a:xfrm>
+            <a:off x="1963711" y="3021788"/>
+            <a:ext cx="329784" cy="246068"/>
+          </a:xfrm>
+          <a:prstGeom prst="rect">
+            <a:avLst/>
+          </a:prstGeom>
+          <a:noFill/>
+          <a:ln w="57150">
+            <a:solidFill>
+              <a:schemeClr val="tx1"/>
+            </a:solidFill>
+          </a:ln>
+        </p:spPr>
+        <p:style>
+          <a:lnRef idx="2">
+            <a:schemeClr val="accent1">
+              <a:shade val="15000"/>
+            </a:schemeClr>
+          </a:lnRef>
+          <a:fillRef idx="1">
+            <a:schemeClr val="accent1"/>
+          </a:fillRef>
+          <a:effectRef idx="0">
+            <a:schemeClr val="accent1"/>
+          </a:effectRef>
+          <a:fontRef idx="minor">
+            <a:schemeClr val="lt1"/>
+          </a:fontRef>
+        </p:style>
+        <p:txBody>
+          <a:bodyPr rtlCol="0" anchor="ctr"/>
+          <a:lstStyle/>
+          <a:p>
+            <a:pPr algn="ctr"/>
+            <a:endParaRPr lang="pt-BR"/>
+          </a:p>
+        </p:txBody>
+      </p:sp>
+      <p:sp>
+        <p:nvSpPr>
+          <p:cNvPr id="13" name="Seta: Curva para Baixo 12">
+            <a:extLst>
+              <a:ext uri="{FF2B5EF4-FFF2-40B4-BE49-F238E27FC236}">
+                <a16:creationId xmlns:a16="http://schemas.microsoft.com/office/drawing/2014/main" id="{D34651EC-928C-45A9-FB4A-89294682FE03}"/>
+              </a:ext>
+            </a:extLst>
+          </p:cNvPr>
+          <p:cNvSpPr/>
+          <p:nvPr/>
+        </p:nvSpPr>
+        <p:spPr>
+          <a:xfrm>
+            <a:off x="2405332" y="2221305"/>
+            <a:ext cx="6363914" cy="788387"/>
+          </a:xfrm>
+          <a:prstGeom prst="curvedDownArrow">
+            <a:avLst/>
+          </a:prstGeom>
+        </p:spPr>
+        <p:style>
+          <a:lnRef idx="2">
+            <a:schemeClr val="accent1">
+              <a:shade val="15000"/>
+            </a:schemeClr>
+          </a:lnRef>
+          <a:fillRef idx="1">
+            <a:schemeClr val="accent1"/>
+          </a:fillRef>
+          <a:effectRef idx="0">
+            <a:schemeClr val="accent1"/>
+          </a:effectRef>
+          <a:fontRef idx="minor">
+            <a:schemeClr val="lt1"/>
+          </a:fontRef>
+        </p:style>
+        <p:txBody>
+          <a:bodyPr rtlCol="0" anchor="ctr"/>
+          <a:lstStyle/>
+          <a:p>
+            <a:pPr algn="ctr"/>
+            <a:endParaRPr lang="pt-BR">
+              <a:solidFill>
+                <a:schemeClr val="tx1"/>
+              </a:solidFill>
+            </a:endParaRPr>
+          </a:p>
+        </p:txBody>
+      </p:sp>
+      <p:pic>
+        <p:nvPicPr>
+          <p:cNvPr id="15" name="Imagem 14">
+            <a:extLst>
+              <a:ext uri="{FF2B5EF4-FFF2-40B4-BE49-F238E27FC236}">
+                <a16:creationId xmlns:a16="http://schemas.microsoft.com/office/drawing/2014/main" id="{AD23F083-ACAE-F3BE-99C5-AC59D9D5284D}"/>
+              </a:ext>
+            </a:extLst>
+          </p:cNvPr>
+          <p:cNvPicPr>
+            <a:picLocks noChangeAspect="1"/>
+          </p:cNvPicPr>
+          <p:nvPr/>
+        </p:nvPicPr>
+        <p:blipFill>
+          <a:blip r:embed="rId6"/>
+          <a:stretch>
+            <a:fillRect/>
+          </a:stretch>
+        </p:blipFill>
+        <p:spPr>
+          <a:xfrm>
+            <a:off x="7313232" y="3078001"/>
+            <a:ext cx="2915057" cy="2743583"/>
+          </a:xfrm>
+          <a:prstGeom prst="rect">
+            <a:avLst/>
+          </a:prstGeom>
+        </p:spPr>
+      </p:pic>
     </p:spTree>
     <p:extLst>
       <p:ext uri="{BB962C8B-B14F-4D97-AF65-F5344CB8AC3E}">
-        <p14:creationId xmlns:p14="http://schemas.microsoft.com/office/powerpoint/2010/main" val="1536836101"/>
+        <p14:creationId xmlns:p14="http://schemas.microsoft.com/office/powerpoint/2010/main" val="2071889659"/>
       </p:ext>
     </p:extLst>
   </p:cSld>
@@ -11304,8 +13802,8 @@
         </p:nvSpPr>
         <p:spPr>
           <a:xfrm>
-            <a:off x="779259" y="294626"/>
-            <a:ext cx="10633479" cy="523220"/>
+            <a:off x="249836" y="200638"/>
+            <a:ext cx="11692327" cy="584775"/>
           </a:xfrm>
           <a:prstGeom prst="rect">
             <a:avLst/>
@@ -11319,76 +13817,14 @@
           <a:lstStyle/>
           <a:p>
             <a:r>
-              <a:rPr lang="pt-BR" sz="2800" b="1" dirty="0">
+              <a:rPr lang="pt-BR" sz="3200" b="1" dirty="0">
                 <a:solidFill>
                   <a:srgbClr val="002060"/>
                 </a:solidFill>
                 <a:latin typeface="Cambria" panose="02040503050406030204" pitchFamily="18" charset="0"/>
                 <a:ea typeface="Cambria" panose="02040503050406030204" pitchFamily="18" charset="0"/>
               </a:rPr>
-              <a:t>Reincidência Criminal: o Efeito Estigma de </a:t>
-            </a:r>
-            <a:r>
-              <a:rPr lang="pt-BR" sz="2800" b="1" dirty="0" err="1">
-                <a:solidFill>
-                  <a:srgbClr val="002060"/>
-                </a:solidFill>
-                <a:latin typeface="Cambria" panose="02040503050406030204" pitchFamily="18" charset="0"/>
-                <a:ea typeface="Cambria" panose="02040503050406030204" pitchFamily="18" charset="0"/>
-              </a:rPr>
-              <a:t>Ex-Presidiários</a:t>
-            </a:r>
-            <a:endParaRPr lang="pt-BR" sz="2800" b="1" dirty="0">
-              <a:solidFill>
-                <a:srgbClr val="002060"/>
-              </a:solidFill>
-              <a:latin typeface="Cambria" panose="02040503050406030204" pitchFamily="18" charset="0"/>
-              <a:ea typeface="Cambria" panose="02040503050406030204" pitchFamily="18" charset="0"/>
-            </a:endParaRPr>
-          </a:p>
-        </p:txBody>
-      </p:sp>
-      <p:sp>
-        <p:nvSpPr>
-          <p:cNvPr id="14" name="CaixaDeTexto 13">
-            <a:extLst>
-              <a:ext uri="{FF2B5EF4-FFF2-40B4-BE49-F238E27FC236}">
-                <a16:creationId xmlns:a16="http://schemas.microsoft.com/office/drawing/2014/main" id="{427DBFEB-81BF-4CC3-A411-FBF43D295C56}"/>
-              </a:ext>
-            </a:extLst>
-          </p:cNvPr>
-          <p:cNvSpPr txBox="1"/>
-          <p:nvPr/>
-        </p:nvSpPr>
-        <p:spPr>
-          <a:xfrm>
-            <a:off x="940904" y="1276323"/>
-            <a:ext cx="10310191" cy="506292"/>
-          </a:xfrm>
-          <a:prstGeom prst="rect">
-            <a:avLst/>
-          </a:prstGeom>
-          <a:noFill/>
-        </p:spPr>
-        <p:txBody>
-          <a:bodyPr wrap="square" rtlCol="0">
-            <a:spAutoFit/>
-          </a:bodyPr>
-          <a:lstStyle/>
-          <a:p>
-            <a:pPr marL="285750" indent="-285750">
-              <a:lnSpc>
-                <a:spcPct val="150000"/>
-              </a:lnSpc>
-              <a:spcAft>
-                <a:spcPts val="110"/>
-              </a:spcAft>
-              <a:buFont typeface="Wingdings" panose="05000000000000000000" pitchFamily="2" charset="2"/>
-              <a:buChar char="Ø"/>
-            </a:pPr>
-            <a:r>
-              <a:rPr lang="pt-BR" sz="2000" b="1" dirty="0"/>
-              <a:t>Noções gerais sobre Estatística. </a:t>
+              <a:t>Panorama RS à Luz dos Dados públicos disponíveis da SSP-RS</a:t>
             </a:r>
           </a:p>
         </p:txBody>
@@ -11487,10 +13923,204 @@
           </a:extLst>
         </p:spPr>
       </p:pic>
+      <p:pic>
+        <p:nvPicPr>
+          <p:cNvPr id="5" name="Imagem 4">
+            <a:extLst>
+              <a:ext uri="{FF2B5EF4-FFF2-40B4-BE49-F238E27FC236}">
+                <a16:creationId xmlns:a16="http://schemas.microsoft.com/office/drawing/2014/main" id="{4318DFD3-3634-EC8F-4CA2-B0EB8093C36F}"/>
+              </a:ext>
+            </a:extLst>
+          </p:cNvPr>
+          <p:cNvPicPr>
+            <a:picLocks noChangeAspect="1"/>
+          </p:cNvPicPr>
+          <p:nvPr/>
+        </p:nvPicPr>
+        <p:blipFill>
+          <a:blip r:embed="rId5"/>
+          <a:stretch>
+            <a:fillRect/>
+          </a:stretch>
+        </p:blipFill>
+        <p:spPr>
+          <a:xfrm>
+            <a:off x="834897" y="1724537"/>
+            <a:ext cx="9043291" cy="4162785"/>
+          </a:xfrm>
+          <a:prstGeom prst="rect">
+            <a:avLst/>
+          </a:prstGeom>
+        </p:spPr>
+      </p:pic>
+      <p:sp>
+        <p:nvSpPr>
+          <p:cNvPr id="9" name="Seta: para a Direita 8">
+            <a:extLst>
+              <a:ext uri="{FF2B5EF4-FFF2-40B4-BE49-F238E27FC236}">
+                <a16:creationId xmlns:a16="http://schemas.microsoft.com/office/drawing/2014/main" id="{4ADC85D4-4D6F-B41F-8D19-0C37EEA6532F}"/>
+              </a:ext>
+            </a:extLst>
+          </p:cNvPr>
+          <p:cNvSpPr/>
+          <p:nvPr/>
+        </p:nvSpPr>
+        <p:spPr>
+          <a:xfrm rot="9753462">
+            <a:off x="5878180" y="1914580"/>
+            <a:ext cx="435637" cy="359764"/>
+          </a:xfrm>
+          <a:prstGeom prst="rightArrow">
+            <a:avLst/>
+          </a:prstGeom>
+        </p:spPr>
+        <p:style>
+          <a:lnRef idx="2">
+            <a:schemeClr val="accent1">
+              <a:shade val="15000"/>
+            </a:schemeClr>
+          </a:lnRef>
+          <a:fillRef idx="1">
+            <a:schemeClr val="accent1"/>
+          </a:fillRef>
+          <a:effectRef idx="0">
+            <a:schemeClr val="accent1"/>
+          </a:effectRef>
+          <a:fontRef idx="minor">
+            <a:schemeClr val="lt1"/>
+          </a:fontRef>
+        </p:style>
+        <p:txBody>
+          <a:bodyPr rtlCol="0" anchor="ctr"/>
+          <a:lstStyle/>
+          <a:p>
+            <a:pPr algn="ctr"/>
+            <a:endParaRPr lang="pt-BR"/>
+          </a:p>
+        </p:txBody>
+      </p:sp>
+      <p:sp>
+        <p:nvSpPr>
+          <p:cNvPr id="11" name="CaixaDeTexto 10">
+            <a:extLst>
+              <a:ext uri="{FF2B5EF4-FFF2-40B4-BE49-F238E27FC236}">
+                <a16:creationId xmlns:a16="http://schemas.microsoft.com/office/drawing/2014/main" id="{2618659E-1058-1132-89D4-6B86F32FC853}"/>
+              </a:ext>
+            </a:extLst>
+          </p:cNvPr>
+          <p:cNvSpPr txBox="1"/>
+          <p:nvPr/>
+        </p:nvSpPr>
+        <p:spPr>
+          <a:xfrm>
+            <a:off x="6220773" y="1725130"/>
+            <a:ext cx="2265502" cy="369332"/>
+          </a:xfrm>
+          <a:prstGeom prst="rect">
+            <a:avLst/>
+          </a:prstGeom>
+          <a:noFill/>
+        </p:spPr>
+        <p:txBody>
+          <a:bodyPr wrap="square" rtlCol="0">
+            <a:spAutoFit/>
+          </a:bodyPr>
+          <a:lstStyle/>
+          <a:p>
+            <a:pPr algn="ctr"/>
+            <a:r>
+              <a:rPr lang="pt-BR" b="1" dirty="0"/>
+              <a:t>Porto Alegre: 48,84</a:t>
+            </a:r>
+          </a:p>
+        </p:txBody>
+      </p:sp>
+      <p:sp>
+        <p:nvSpPr>
+          <p:cNvPr id="12" name="Seta: para a Direita 11">
+            <a:extLst>
+              <a:ext uri="{FF2B5EF4-FFF2-40B4-BE49-F238E27FC236}">
+                <a16:creationId xmlns:a16="http://schemas.microsoft.com/office/drawing/2014/main" id="{0A11E838-7A28-D1BE-5FDC-461C62B8169E}"/>
+              </a:ext>
+            </a:extLst>
+          </p:cNvPr>
+          <p:cNvSpPr/>
+          <p:nvPr/>
+        </p:nvSpPr>
+        <p:spPr>
+          <a:xfrm rot="9753462">
+            <a:off x="8530178" y="4959034"/>
+            <a:ext cx="435637" cy="359764"/>
+          </a:xfrm>
+          <a:prstGeom prst="rightArrow">
+            <a:avLst/>
+          </a:prstGeom>
+        </p:spPr>
+        <p:style>
+          <a:lnRef idx="2">
+            <a:schemeClr val="accent1">
+              <a:shade val="15000"/>
+            </a:schemeClr>
+          </a:lnRef>
+          <a:fillRef idx="1">
+            <a:schemeClr val="accent1"/>
+          </a:fillRef>
+          <a:effectRef idx="0">
+            <a:schemeClr val="accent1"/>
+          </a:effectRef>
+          <a:fontRef idx="minor">
+            <a:schemeClr val="lt1"/>
+          </a:fontRef>
+        </p:style>
+        <p:txBody>
+          <a:bodyPr rtlCol="0" anchor="ctr"/>
+          <a:lstStyle/>
+          <a:p>
+            <a:pPr algn="ctr"/>
+            <a:endParaRPr lang="pt-BR"/>
+          </a:p>
+        </p:txBody>
+      </p:sp>
+      <p:sp>
+        <p:nvSpPr>
+          <p:cNvPr id="13" name="CaixaDeTexto 12">
+            <a:extLst>
+              <a:ext uri="{FF2B5EF4-FFF2-40B4-BE49-F238E27FC236}">
+                <a16:creationId xmlns:a16="http://schemas.microsoft.com/office/drawing/2014/main" id="{D1F1D044-C509-E859-2F17-4F37728104EB}"/>
+              </a:ext>
+            </a:extLst>
+          </p:cNvPr>
+          <p:cNvSpPr txBox="1"/>
+          <p:nvPr/>
+        </p:nvSpPr>
+        <p:spPr>
+          <a:xfrm>
+            <a:off x="8872771" y="4769584"/>
+            <a:ext cx="2265502" cy="369332"/>
+          </a:xfrm>
+          <a:prstGeom prst="rect">
+            <a:avLst/>
+          </a:prstGeom>
+          <a:noFill/>
+        </p:spPr>
+        <p:txBody>
+          <a:bodyPr wrap="square" rtlCol="0">
+            <a:spAutoFit/>
+          </a:bodyPr>
+          <a:lstStyle/>
+          <a:p>
+            <a:pPr algn="ctr"/>
+            <a:r>
+              <a:rPr lang="pt-BR" b="1" dirty="0"/>
+              <a:t>Pelotas: 2,68</a:t>
+            </a:r>
+          </a:p>
+        </p:txBody>
+      </p:sp>
     </p:spTree>
     <p:extLst>
       <p:ext uri="{BB962C8B-B14F-4D97-AF65-F5344CB8AC3E}">
-        <p14:creationId xmlns:p14="http://schemas.microsoft.com/office/powerpoint/2010/main" val="1070033144"/>
+        <p14:creationId xmlns:p14="http://schemas.microsoft.com/office/powerpoint/2010/main" val="1290076"/>
       </p:ext>
     </p:extLst>
   </p:cSld>
@@ -11509,6 +14139,384 @@
       </p:transition>
     </mc:Fallback>
   </mc:AlternateContent>
+  <p:timing>
+    <p:tnLst>
+      <p:par>
+        <p:cTn id="1" dur="indefinite" restart="never" nodeType="tmRoot">
+          <p:childTnLst>
+            <p:seq concurrent="1" nextAc="seek">
+              <p:cTn id="2" dur="indefinite" nodeType="mainSeq">
+                <p:childTnLst>
+                  <p:par>
+                    <p:cTn id="3" fill="hold">
+                      <p:stCondLst>
+                        <p:cond delay="indefinite"/>
+                      </p:stCondLst>
+                      <p:childTnLst>
+                        <p:par>
+                          <p:cTn id="4" fill="hold">
+                            <p:stCondLst>
+                              <p:cond delay="0"/>
+                            </p:stCondLst>
+                            <p:childTnLst>
+                              <p:par>
+                                <p:cTn id="5" presetID="42" presetClass="entr" presetSubtype="0" fill="hold" grpId="0" nodeType="clickEffect">
+                                  <p:stCondLst>
+                                    <p:cond delay="0"/>
+                                  </p:stCondLst>
+                                  <p:childTnLst>
+                                    <p:set>
+                                      <p:cBhvr>
+                                        <p:cTn id="6" dur="1" fill="hold">
+                                          <p:stCondLst>
+                                            <p:cond delay="0"/>
+                                          </p:stCondLst>
+                                        </p:cTn>
+                                        <p:tgtEl>
+                                          <p:spTgt spid="9"/>
+                                        </p:tgtEl>
+                                        <p:attrNameLst>
+                                          <p:attrName>style.visibility</p:attrName>
+                                        </p:attrNameLst>
+                                      </p:cBhvr>
+                                      <p:to>
+                                        <p:strVal val="visible"/>
+                                      </p:to>
+                                    </p:set>
+                                    <p:animEffect transition="in" filter="fade">
+                                      <p:cBhvr>
+                                        <p:cTn id="7" dur="1000"/>
+                                        <p:tgtEl>
+                                          <p:spTgt spid="9"/>
+                                        </p:tgtEl>
+                                      </p:cBhvr>
+                                    </p:animEffect>
+                                    <p:anim calcmode="lin" valueType="num">
+                                      <p:cBhvr>
+                                        <p:cTn id="8" dur="1000" fill="hold"/>
+                                        <p:tgtEl>
+                                          <p:spTgt spid="9"/>
+                                        </p:tgtEl>
+                                        <p:attrNameLst>
+                                          <p:attrName>ppt_x</p:attrName>
+                                        </p:attrNameLst>
+                                      </p:cBhvr>
+                                      <p:tavLst>
+                                        <p:tav tm="0">
+                                          <p:val>
+                                            <p:strVal val="#ppt_x"/>
+                                          </p:val>
+                                        </p:tav>
+                                        <p:tav tm="100000">
+                                          <p:val>
+                                            <p:strVal val="#ppt_x"/>
+                                          </p:val>
+                                        </p:tav>
+                                      </p:tavLst>
+                                    </p:anim>
+                                    <p:anim calcmode="lin" valueType="num">
+                                      <p:cBhvr>
+                                        <p:cTn id="9" dur="1000" fill="hold"/>
+                                        <p:tgtEl>
+                                          <p:spTgt spid="9"/>
+                                        </p:tgtEl>
+                                        <p:attrNameLst>
+                                          <p:attrName>ppt_y</p:attrName>
+                                        </p:attrNameLst>
+                                      </p:cBhvr>
+                                      <p:tavLst>
+                                        <p:tav tm="0">
+                                          <p:val>
+                                            <p:strVal val="#ppt_y+.1"/>
+                                          </p:val>
+                                        </p:tav>
+                                        <p:tav tm="100000">
+                                          <p:val>
+                                            <p:strVal val="#ppt_y"/>
+                                          </p:val>
+                                        </p:tav>
+                                      </p:tavLst>
+                                    </p:anim>
+                                  </p:childTnLst>
+                                </p:cTn>
+                              </p:par>
+                              <p:par>
+                                <p:cTn id="10" presetID="42" presetClass="entr" presetSubtype="0" fill="hold" grpId="0" nodeType="withEffect">
+                                  <p:stCondLst>
+                                    <p:cond delay="0"/>
+                                  </p:stCondLst>
+                                  <p:childTnLst>
+                                    <p:set>
+                                      <p:cBhvr>
+                                        <p:cTn id="11" dur="1" fill="hold">
+                                          <p:stCondLst>
+                                            <p:cond delay="0"/>
+                                          </p:stCondLst>
+                                        </p:cTn>
+                                        <p:tgtEl>
+                                          <p:spTgt spid="11"/>
+                                        </p:tgtEl>
+                                        <p:attrNameLst>
+                                          <p:attrName>style.visibility</p:attrName>
+                                        </p:attrNameLst>
+                                      </p:cBhvr>
+                                      <p:to>
+                                        <p:strVal val="visible"/>
+                                      </p:to>
+                                    </p:set>
+                                    <p:animEffect transition="in" filter="fade">
+                                      <p:cBhvr>
+                                        <p:cTn id="12" dur="1000"/>
+                                        <p:tgtEl>
+                                          <p:spTgt spid="11"/>
+                                        </p:tgtEl>
+                                      </p:cBhvr>
+                                    </p:animEffect>
+                                    <p:anim calcmode="lin" valueType="num">
+                                      <p:cBhvr>
+                                        <p:cTn id="13" dur="1000" fill="hold"/>
+                                        <p:tgtEl>
+                                          <p:spTgt spid="11"/>
+                                        </p:tgtEl>
+                                        <p:attrNameLst>
+                                          <p:attrName>ppt_x</p:attrName>
+                                        </p:attrNameLst>
+                                      </p:cBhvr>
+                                      <p:tavLst>
+                                        <p:tav tm="0">
+                                          <p:val>
+                                            <p:strVal val="#ppt_x"/>
+                                          </p:val>
+                                        </p:tav>
+                                        <p:tav tm="100000">
+                                          <p:val>
+                                            <p:strVal val="#ppt_x"/>
+                                          </p:val>
+                                        </p:tav>
+                                      </p:tavLst>
+                                    </p:anim>
+                                    <p:anim calcmode="lin" valueType="num">
+                                      <p:cBhvr>
+                                        <p:cTn id="14" dur="1000" fill="hold"/>
+                                        <p:tgtEl>
+                                          <p:spTgt spid="11"/>
+                                        </p:tgtEl>
+                                        <p:attrNameLst>
+                                          <p:attrName>ppt_y</p:attrName>
+                                        </p:attrNameLst>
+                                      </p:cBhvr>
+                                      <p:tavLst>
+                                        <p:tav tm="0">
+                                          <p:val>
+                                            <p:strVal val="#ppt_y+.1"/>
+                                          </p:val>
+                                        </p:tav>
+                                        <p:tav tm="100000">
+                                          <p:val>
+                                            <p:strVal val="#ppt_y"/>
+                                          </p:val>
+                                        </p:tav>
+                                      </p:tavLst>
+                                    </p:anim>
+                                  </p:childTnLst>
+                                </p:cTn>
+                              </p:par>
+                              <p:par>
+                                <p:cTn id="15" presetID="42" presetClass="entr" presetSubtype="0" fill="hold" grpId="0" nodeType="withEffect">
+                                  <p:stCondLst>
+                                    <p:cond delay="0"/>
+                                  </p:stCondLst>
+                                  <p:childTnLst>
+                                    <p:set>
+                                      <p:cBhvr>
+                                        <p:cTn id="16" dur="1" fill="hold">
+                                          <p:stCondLst>
+                                            <p:cond delay="0"/>
+                                          </p:stCondLst>
+                                        </p:cTn>
+                                        <p:tgtEl>
+                                          <p:spTgt spid="12"/>
+                                        </p:tgtEl>
+                                        <p:attrNameLst>
+                                          <p:attrName>style.visibility</p:attrName>
+                                        </p:attrNameLst>
+                                      </p:cBhvr>
+                                      <p:to>
+                                        <p:strVal val="visible"/>
+                                      </p:to>
+                                    </p:set>
+                                    <p:animEffect transition="in" filter="fade">
+                                      <p:cBhvr>
+                                        <p:cTn id="17" dur="1000"/>
+                                        <p:tgtEl>
+                                          <p:spTgt spid="12"/>
+                                        </p:tgtEl>
+                                      </p:cBhvr>
+                                    </p:animEffect>
+                                    <p:anim calcmode="lin" valueType="num">
+                                      <p:cBhvr>
+                                        <p:cTn id="18" dur="1000" fill="hold"/>
+                                        <p:tgtEl>
+                                          <p:spTgt spid="12"/>
+                                        </p:tgtEl>
+                                        <p:attrNameLst>
+                                          <p:attrName>ppt_x</p:attrName>
+                                        </p:attrNameLst>
+                                      </p:cBhvr>
+                                      <p:tavLst>
+                                        <p:tav tm="0">
+                                          <p:val>
+                                            <p:strVal val="#ppt_x"/>
+                                          </p:val>
+                                        </p:tav>
+                                        <p:tav tm="100000">
+                                          <p:val>
+                                            <p:strVal val="#ppt_x"/>
+                                          </p:val>
+                                        </p:tav>
+                                      </p:tavLst>
+                                    </p:anim>
+                                    <p:anim calcmode="lin" valueType="num">
+                                      <p:cBhvr>
+                                        <p:cTn id="19" dur="1000" fill="hold"/>
+                                        <p:tgtEl>
+                                          <p:spTgt spid="12"/>
+                                        </p:tgtEl>
+                                        <p:attrNameLst>
+                                          <p:attrName>ppt_y</p:attrName>
+                                        </p:attrNameLst>
+                                      </p:cBhvr>
+                                      <p:tavLst>
+                                        <p:tav tm="0">
+                                          <p:val>
+                                            <p:strVal val="#ppt_y+.1"/>
+                                          </p:val>
+                                        </p:tav>
+                                        <p:tav tm="100000">
+                                          <p:val>
+                                            <p:strVal val="#ppt_y"/>
+                                          </p:val>
+                                        </p:tav>
+                                      </p:tavLst>
+                                    </p:anim>
+                                  </p:childTnLst>
+                                </p:cTn>
+                              </p:par>
+                              <p:par>
+                                <p:cTn id="20" presetID="42" presetClass="entr" presetSubtype="0" fill="hold" grpId="0" nodeType="withEffect">
+                                  <p:stCondLst>
+                                    <p:cond delay="0"/>
+                                  </p:stCondLst>
+                                  <p:childTnLst>
+                                    <p:set>
+                                      <p:cBhvr>
+                                        <p:cTn id="21" dur="1" fill="hold">
+                                          <p:stCondLst>
+                                            <p:cond delay="0"/>
+                                          </p:stCondLst>
+                                        </p:cTn>
+                                        <p:tgtEl>
+                                          <p:spTgt spid="13"/>
+                                        </p:tgtEl>
+                                        <p:attrNameLst>
+                                          <p:attrName>style.visibility</p:attrName>
+                                        </p:attrNameLst>
+                                      </p:cBhvr>
+                                      <p:to>
+                                        <p:strVal val="visible"/>
+                                      </p:to>
+                                    </p:set>
+                                    <p:animEffect transition="in" filter="fade">
+                                      <p:cBhvr>
+                                        <p:cTn id="22" dur="1000"/>
+                                        <p:tgtEl>
+                                          <p:spTgt spid="13"/>
+                                        </p:tgtEl>
+                                      </p:cBhvr>
+                                    </p:animEffect>
+                                    <p:anim calcmode="lin" valueType="num">
+                                      <p:cBhvr>
+                                        <p:cTn id="23" dur="1000" fill="hold"/>
+                                        <p:tgtEl>
+                                          <p:spTgt spid="13"/>
+                                        </p:tgtEl>
+                                        <p:attrNameLst>
+                                          <p:attrName>ppt_x</p:attrName>
+                                        </p:attrNameLst>
+                                      </p:cBhvr>
+                                      <p:tavLst>
+                                        <p:tav tm="0">
+                                          <p:val>
+                                            <p:strVal val="#ppt_x"/>
+                                          </p:val>
+                                        </p:tav>
+                                        <p:tav tm="100000">
+                                          <p:val>
+                                            <p:strVal val="#ppt_x"/>
+                                          </p:val>
+                                        </p:tav>
+                                      </p:tavLst>
+                                    </p:anim>
+                                    <p:anim calcmode="lin" valueType="num">
+                                      <p:cBhvr>
+                                        <p:cTn id="24" dur="1000" fill="hold"/>
+                                        <p:tgtEl>
+                                          <p:spTgt spid="13"/>
+                                        </p:tgtEl>
+                                        <p:attrNameLst>
+                                          <p:attrName>ppt_y</p:attrName>
+                                        </p:attrNameLst>
+                                      </p:cBhvr>
+                                      <p:tavLst>
+                                        <p:tav tm="0">
+                                          <p:val>
+                                            <p:strVal val="#ppt_y+.1"/>
+                                          </p:val>
+                                        </p:tav>
+                                        <p:tav tm="100000">
+                                          <p:val>
+                                            <p:strVal val="#ppt_y"/>
+                                          </p:val>
+                                        </p:tav>
+                                      </p:tavLst>
+                                    </p:anim>
+                                  </p:childTnLst>
+                                </p:cTn>
+                              </p:par>
+                            </p:childTnLst>
+                          </p:cTn>
+                        </p:par>
+                      </p:childTnLst>
+                    </p:cTn>
+                  </p:par>
+                </p:childTnLst>
+              </p:cTn>
+              <p:prevCondLst>
+                <p:cond evt="onPrev" delay="0">
+                  <p:tgtEl>
+                    <p:sldTgt/>
+                  </p:tgtEl>
+                </p:cond>
+              </p:prevCondLst>
+              <p:nextCondLst>
+                <p:cond evt="onNext" delay="0">
+                  <p:tgtEl>
+                    <p:sldTgt/>
+                  </p:tgtEl>
+                </p:cond>
+              </p:nextCondLst>
+            </p:seq>
+          </p:childTnLst>
+        </p:cTn>
+      </p:par>
+    </p:tnLst>
+    <p:bldLst>
+      <p:bldP spid="9" grpId="0" animBg="1"/>
+      <p:bldP spid="11" grpId="0"/>
+      <p:bldP spid="12" grpId="0" animBg="1"/>
+      <p:bldP spid="13" grpId="0"/>
+    </p:bldLst>
+  </p:timing>
 </p:sld>
 </file>
 

--- a/DIA 2 - APRESENTACAO - VERSAO AMPLIADA FINAL.pptx
+++ b/DIA 2 - APRESENTACAO - VERSAO AMPLIADA FINAL.pptx
@@ -5,7 +5,7 @@
     <p:sldMasterId id="2147483648" r:id="rId1"/>
   </p:sldMasterIdLst>
   <p:notesMasterIdLst>
-    <p:notesMasterId r:id="rId18"/>
+    <p:notesMasterId r:id="rId19"/>
   </p:notesMasterIdLst>
   <p:sldIdLst>
     <p:sldId id="256" r:id="rId2"/>
@@ -14,16 +14,17 @@
     <p:sldId id="269" r:id="rId5"/>
     <p:sldId id="274" r:id="rId6"/>
     <p:sldId id="270" r:id="rId7"/>
-    <p:sldId id="271" r:id="rId8"/>
-    <p:sldId id="275" r:id="rId9"/>
+    <p:sldId id="275" r:id="rId8"/>
+    <p:sldId id="271" r:id="rId9"/>
     <p:sldId id="272" r:id="rId10"/>
     <p:sldId id="267" r:id="rId11"/>
-    <p:sldId id="265" r:id="rId12"/>
-    <p:sldId id="260" r:id="rId13"/>
-    <p:sldId id="262" r:id="rId14"/>
-    <p:sldId id="263" r:id="rId15"/>
-    <p:sldId id="264" r:id="rId16"/>
-    <p:sldId id="261" r:id="rId17"/>
+    <p:sldId id="260" r:id="rId12"/>
+    <p:sldId id="262" r:id="rId13"/>
+    <p:sldId id="276" r:id="rId14"/>
+    <p:sldId id="277" r:id="rId15"/>
+    <p:sldId id="263" r:id="rId16"/>
+    <p:sldId id="264" r:id="rId17"/>
+    <p:sldId id="261" r:id="rId18"/>
   </p:sldIdLst>
   <p:sldSz cx="12192000" cy="6858000"/>
   <p:notesSz cx="6858000" cy="9144000"/>
@@ -2715,11 +2716,119 @@
   </pc:docChgLst>
   <pc:docChgLst>
     <pc:chgData name="Renan Xavier Cortes" userId="d6af805853004405" providerId="LiveId" clId="{32CE5F03-9B31-4102-A03B-787EE1528540}"/>
-    <pc:docChg chg="undo custSel addSld delSld modSld">
-      <pc:chgData name="Renan Xavier Cortes" userId="d6af805853004405" providerId="LiveId" clId="{32CE5F03-9B31-4102-A03B-787EE1528540}" dt="2026-09-29T19:03:40.045" v="359" actId="1076"/>
+    <pc:docChg chg="undo custSel addSld delSld modSld sldOrd">
+      <pc:chgData name="Renan Xavier Cortes" userId="d6af805853004405" providerId="LiveId" clId="{32CE5F03-9B31-4102-A03B-787EE1528540}" dt="2026-09-30T14:59:07.206" v="1677" actId="1076"/>
       <pc:docMkLst>
         <pc:docMk/>
       </pc:docMkLst>
+      <pc:sldChg chg="addSp delSp modSp mod">
+        <pc:chgData name="Renan Xavier Cortes" userId="d6af805853004405" providerId="LiveId" clId="{32CE5F03-9B31-4102-A03B-787EE1528540}" dt="2026-09-30T14:15:43.776" v="1256" actId="20577"/>
+        <pc:sldMkLst>
+          <pc:docMk/>
+          <pc:sldMk cId="3554767980" sldId="260"/>
+        </pc:sldMkLst>
+        <pc:spChg chg="add">
+          <ac:chgData name="Renan Xavier Cortes" userId="d6af805853004405" providerId="LiveId" clId="{32CE5F03-9B31-4102-A03B-787EE1528540}" dt="2026-09-30T13:56:14.886" v="829"/>
+          <ac:spMkLst>
+            <pc:docMk/>
+            <pc:sldMk cId="3554767980" sldId="260"/>
+            <ac:spMk id="4" creationId="{AF5919B4-CA74-37F8-4759-39BC1C4A8129}"/>
+          </ac:spMkLst>
+        </pc:spChg>
+        <pc:spChg chg="add mod">
+          <ac:chgData name="Renan Xavier Cortes" userId="d6af805853004405" providerId="LiveId" clId="{32CE5F03-9B31-4102-A03B-787EE1528540}" dt="2026-09-30T14:15:43.776" v="1256" actId="20577"/>
+          <ac:spMkLst>
+            <pc:docMk/>
+            <pc:sldMk cId="3554767980" sldId="260"/>
+            <ac:spMk id="5" creationId="{F8513A2C-EFAD-349F-ECA3-4EE11292D1C6}"/>
+          </ac:spMkLst>
+        </pc:spChg>
+        <pc:spChg chg="add mod">
+          <ac:chgData name="Renan Xavier Cortes" userId="d6af805853004405" providerId="LiveId" clId="{32CE5F03-9B31-4102-A03B-787EE1528540}" dt="2026-09-30T14:13:40.083" v="1226" actId="1076"/>
+          <ac:spMkLst>
+            <pc:docMk/>
+            <pc:sldMk cId="3554767980" sldId="260"/>
+            <ac:spMk id="9" creationId="{985D7B09-9BD8-C772-923A-E9C4FBA45B2B}"/>
+          </ac:spMkLst>
+        </pc:spChg>
+        <pc:spChg chg="mod">
+          <ac:chgData name="Renan Xavier Cortes" userId="d6af805853004405" providerId="LiveId" clId="{32CE5F03-9B31-4102-A03B-787EE1528540}" dt="2026-09-30T14:06:28.608" v="1164" actId="404"/>
+          <ac:spMkLst>
+            <pc:docMk/>
+            <pc:sldMk cId="3554767980" sldId="260"/>
+            <ac:spMk id="14" creationId="{427DBFEB-81BF-4CC3-A411-FBF43D295C56}"/>
+          </ac:spMkLst>
+        </pc:spChg>
+        <pc:picChg chg="add del mod">
+          <ac:chgData name="Renan Xavier Cortes" userId="d6af805853004405" providerId="LiveId" clId="{32CE5F03-9B31-4102-A03B-787EE1528540}" dt="2026-09-30T13:57:56.594" v="917" actId="478"/>
+          <ac:picMkLst>
+            <pc:docMk/>
+            <pc:sldMk cId="3554767980" sldId="260"/>
+            <ac:picMk id="1028" creationId="{EFF64496-3623-6156-1C45-72624FFD6A76}"/>
+          </ac:picMkLst>
+        </pc:picChg>
+        <pc:picChg chg="add mod">
+          <ac:chgData name="Renan Xavier Cortes" userId="d6af805853004405" providerId="LiveId" clId="{32CE5F03-9B31-4102-A03B-787EE1528540}" dt="2026-09-30T13:58:01.937" v="920" actId="1076"/>
+          <ac:picMkLst>
+            <pc:docMk/>
+            <pc:sldMk cId="3554767980" sldId="260"/>
+            <ac:picMk id="1030" creationId="{BAA8555A-A9C9-35F7-8A61-79165A878D49}"/>
+          </ac:picMkLst>
+        </pc:picChg>
+      </pc:sldChg>
+      <pc:sldChg chg="addSp modSp mod">
+        <pc:chgData name="Renan Xavier Cortes" userId="d6af805853004405" providerId="LiveId" clId="{32CE5F03-9B31-4102-A03B-787EE1528540}" dt="2026-09-30T14:46:07.940" v="1417" actId="1076"/>
+        <pc:sldMkLst>
+          <pc:docMk/>
+          <pc:sldMk cId="1536836101" sldId="262"/>
+        </pc:sldMkLst>
+        <pc:spChg chg="add mod">
+          <ac:chgData name="Renan Xavier Cortes" userId="d6af805853004405" providerId="LiveId" clId="{32CE5F03-9B31-4102-A03B-787EE1528540}" dt="2026-09-30T14:46:03.045" v="1415" actId="403"/>
+          <ac:spMkLst>
+            <pc:docMk/>
+            <pc:sldMk cId="1536836101" sldId="262"/>
+            <ac:spMk id="5" creationId="{E0FCEFC3-016C-BECB-5C9F-C81ABE58A50B}"/>
+          </ac:spMkLst>
+        </pc:spChg>
+        <pc:spChg chg="mod">
+          <ac:chgData name="Renan Xavier Cortes" userId="d6af805853004405" providerId="LiveId" clId="{32CE5F03-9B31-4102-A03B-787EE1528540}" dt="2026-09-30T14:46:07.940" v="1417" actId="1076"/>
+          <ac:spMkLst>
+            <pc:docMk/>
+            <pc:sldMk cId="1536836101" sldId="262"/>
+            <ac:spMk id="14" creationId="{427DBFEB-81BF-4CC3-A411-FBF43D295C56}"/>
+          </ac:spMkLst>
+        </pc:spChg>
+        <pc:picChg chg="add mod">
+          <ac:chgData name="Renan Xavier Cortes" userId="d6af805853004405" providerId="LiveId" clId="{32CE5F03-9B31-4102-A03B-787EE1528540}" dt="2026-09-30T14:17:13.559" v="1259" actId="1076"/>
+          <ac:picMkLst>
+            <pc:docMk/>
+            <pc:sldMk cId="1536836101" sldId="262"/>
+            <ac:picMk id="2050" creationId="{D5753060-8B2D-376B-A341-C1A929AB6692}"/>
+          </ac:picMkLst>
+        </pc:picChg>
+      </pc:sldChg>
+      <pc:sldChg chg="del">
+        <pc:chgData name="Renan Xavier Cortes" userId="d6af805853004405" providerId="LiveId" clId="{32CE5F03-9B31-4102-A03B-787EE1528540}" dt="2026-09-30T13:55:26.918" v="828" actId="47"/>
+        <pc:sldMkLst>
+          <pc:docMk/>
+          <pc:sldMk cId="1600642753" sldId="265"/>
+        </pc:sldMkLst>
+      </pc:sldChg>
+      <pc:sldChg chg="modSp mod">
+        <pc:chgData name="Renan Xavier Cortes" userId="d6af805853004405" providerId="LiveId" clId="{32CE5F03-9B31-4102-A03B-787EE1528540}" dt="2026-09-30T13:55:21.771" v="827" actId="20577"/>
+        <pc:sldMkLst>
+          <pc:docMk/>
+          <pc:sldMk cId="204840894" sldId="267"/>
+        </pc:sldMkLst>
+        <pc:spChg chg="mod">
+          <ac:chgData name="Renan Xavier Cortes" userId="d6af805853004405" providerId="LiveId" clId="{32CE5F03-9B31-4102-A03B-787EE1528540}" dt="2026-09-30T13:55:21.771" v="827" actId="20577"/>
+          <ac:spMkLst>
+            <pc:docMk/>
+            <pc:sldMk cId="204840894" sldId="267"/>
+            <ac:spMk id="4" creationId="{F9B44222-0FEB-DD8A-E65A-F10683C06A0F}"/>
+          </ac:spMkLst>
+        </pc:spChg>
+      </pc:sldChg>
       <pc:sldChg chg="del">
         <pc:chgData name="Renan Xavier Cortes" userId="d6af805853004405" providerId="LiveId" clId="{32CE5F03-9B31-4102-A03B-787EE1528540}" dt="2026-09-29T18:53:06.902" v="89" actId="47"/>
         <pc:sldMkLst>
@@ -2798,8 +2907,8 @@
           </ac:picMkLst>
         </pc:picChg>
       </pc:sldChg>
-      <pc:sldChg chg="delSp add mod delAnim">
-        <pc:chgData name="Renan Xavier Cortes" userId="d6af805853004405" providerId="LiveId" clId="{32CE5F03-9B31-4102-A03B-787EE1528540}" dt="2026-09-29T18:59:53.562" v="201" actId="478"/>
+      <pc:sldChg chg="addSp delSp modSp add mod delAnim modAnim">
+        <pc:chgData name="Renan Xavier Cortes" userId="d6af805853004405" providerId="LiveId" clId="{32CE5F03-9B31-4102-A03B-787EE1528540}" dt="2026-09-30T13:53:37.307" v="805" actId="20577"/>
         <pc:sldMkLst>
           <pc:docMk/>
           <pc:sldMk cId="3832149468" sldId="271"/>
@@ -2836,12 +2945,68 @@
             <ac:spMk id="13" creationId="{D1F1D044-C509-E859-2F17-4F37728104EB}"/>
           </ac:spMkLst>
         </pc:spChg>
+        <pc:spChg chg="add mod">
+          <ac:chgData name="Renan Xavier Cortes" userId="d6af805853004405" providerId="LiveId" clId="{32CE5F03-9B31-4102-A03B-787EE1528540}" dt="2026-09-30T13:51:57.320" v="780" actId="1076"/>
+          <ac:spMkLst>
+            <pc:docMk/>
+            <pc:sldMk cId="3832149468" sldId="271"/>
+            <ac:spMk id="14" creationId="{2D353D8D-8D89-B5D0-0B0D-DBD360319F04}"/>
+          </ac:spMkLst>
+        </pc:spChg>
+        <pc:spChg chg="add mod">
+          <ac:chgData name="Renan Xavier Cortes" userId="d6af805853004405" providerId="LiveId" clId="{32CE5F03-9B31-4102-A03B-787EE1528540}" dt="2026-09-30T13:51:54.199" v="779" actId="1076"/>
+          <ac:spMkLst>
+            <pc:docMk/>
+            <pc:sldMk cId="3832149468" sldId="271"/>
+            <ac:spMk id="16" creationId="{E59EF19D-2CB3-BEA7-2B76-4879D130E732}"/>
+          </ac:spMkLst>
+        </pc:spChg>
+        <pc:spChg chg="add mod">
+          <ac:chgData name="Renan Xavier Cortes" userId="d6af805853004405" providerId="LiveId" clId="{32CE5F03-9B31-4102-A03B-787EE1528540}" dt="2026-09-30T13:53:37.307" v="805" actId="20577"/>
+          <ac:spMkLst>
+            <pc:docMk/>
+            <pc:sldMk cId="3832149468" sldId="271"/>
+            <ac:spMk id="19" creationId="{F649D27E-B466-1E84-67F4-B04DF87AFE85}"/>
+          </ac:spMkLst>
+        </pc:spChg>
+        <pc:picChg chg="del">
+          <ac:chgData name="Renan Xavier Cortes" userId="d6af805853004405" providerId="LiveId" clId="{32CE5F03-9B31-4102-A03B-787EE1528540}" dt="2026-09-30T13:51:50.239" v="777" actId="478"/>
+          <ac:picMkLst>
+            <pc:docMk/>
+            <pc:sldMk cId="3832149468" sldId="271"/>
+            <ac:picMk id="2" creationId="{567C8E3D-C535-EC50-849C-270CEB4B8A04}"/>
+          </ac:picMkLst>
+        </pc:picChg>
+        <pc:picChg chg="del">
+          <ac:chgData name="Renan Xavier Cortes" userId="d6af805853004405" providerId="LiveId" clId="{32CE5F03-9B31-4102-A03B-787EE1528540}" dt="2026-09-30T13:51:47.039" v="775" actId="478"/>
+          <ac:picMkLst>
+            <pc:docMk/>
+            <pc:sldMk cId="3832149468" sldId="271"/>
+            <ac:picMk id="3" creationId="{C9663204-9A6C-C5D7-7C9B-AAF5653911D6}"/>
+          </ac:picMkLst>
+        </pc:picChg>
         <pc:picChg chg="del">
           <ac:chgData name="Renan Xavier Cortes" userId="d6af805853004405" providerId="LiveId" clId="{32CE5F03-9B31-4102-A03B-787EE1528540}" dt="2026-09-29T18:59:51.795" v="200" actId="478"/>
           <ac:picMkLst>
             <pc:docMk/>
             <pc:sldMk cId="3832149468" sldId="271"/>
             <ac:picMk id="5" creationId="{4318DFD3-3634-EC8F-4CA2-B0EB8093C36F}"/>
+          </ac:picMkLst>
+        </pc:picChg>
+        <pc:picChg chg="add mod">
+          <ac:chgData name="Renan Xavier Cortes" userId="d6af805853004405" providerId="LiveId" clId="{32CE5F03-9B31-4102-A03B-787EE1528540}" dt="2026-09-30T13:50:30.558" v="647" actId="1076"/>
+          <ac:picMkLst>
+            <pc:docMk/>
+            <pc:sldMk cId="3832149468" sldId="271"/>
+            <ac:picMk id="6" creationId="{9FA44AA4-873C-9384-BBCC-5F18798D8247}"/>
+          </ac:picMkLst>
+        </pc:picChg>
+        <pc:picChg chg="add mod">
+          <ac:chgData name="Renan Xavier Cortes" userId="d6af805853004405" providerId="LiveId" clId="{32CE5F03-9B31-4102-A03B-787EE1528540}" dt="2026-09-30T13:52:01.367" v="782" actId="1076"/>
+          <ac:picMkLst>
+            <pc:docMk/>
+            <pc:sldMk cId="3832149468" sldId="271"/>
+            <ac:picMk id="18" creationId="{E7C5C5E8-BDC7-6A56-284B-4BA81B6ED2B4}"/>
           </ac:picMkLst>
         </pc:picChg>
       </pc:sldChg>
@@ -2874,8 +3039,8 @@
           </ac:spMkLst>
         </pc:spChg>
       </pc:sldChg>
-      <pc:sldChg chg="addSp delSp modSp add mod">
-        <pc:chgData name="Renan Xavier Cortes" userId="d6af805853004405" providerId="LiveId" clId="{32CE5F03-9B31-4102-A03B-787EE1528540}" dt="2026-09-29T19:03:40.045" v="359" actId="1076"/>
+      <pc:sldChg chg="addSp delSp modSp add mod ord modAnim">
+        <pc:chgData name="Renan Xavier Cortes" userId="d6af805853004405" providerId="LiveId" clId="{32CE5F03-9B31-4102-A03B-787EE1528540}" dt="2026-09-30T13:15:15.035" v="536" actId="20577"/>
         <pc:sldMkLst>
           <pc:docMk/>
           <pc:sldMk cId="2071889659" sldId="275"/>
@@ -2912,6 +3077,14 @@
             <ac:spMk id="13" creationId="{D34651EC-928C-45A9-FB4A-89294682FE03}"/>
           </ac:spMkLst>
         </pc:spChg>
+        <pc:spChg chg="add mod">
+          <ac:chgData name="Renan Xavier Cortes" userId="d6af805853004405" providerId="LiveId" clId="{32CE5F03-9B31-4102-A03B-787EE1528540}" dt="2026-09-30T13:15:15.035" v="536" actId="20577"/>
+          <ac:spMkLst>
+            <pc:docMk/>
+            <pc:sldMk cId="2071889659" sldId="275"/>
+            <ac:spMk id="16" creationId="{B5C85418-58C3-73C3-56E1-05082A43A7EA}"/>
+          </ac:spMkLst>
+        </pc:spChg>
         <pc:picChg chg="add mod">
           <ac:chgData name="Renan Xavier Cortes" userId="d6af805853004405" providerId="LiveId" clId="{32CE5F03-9B31-4102-A03B-787EE1528540}" dt="2026-09-29T19:01:30.373" v="321" actId="1076"/>
           <ac:picMkLst>
@@ -2934,6 +3107,108 @@
             <pc:docMk/>
             <pc:sldMk cId="2071889659" sldId="275"/>
             <ac:picMk id="15" creationId="{AD23F083-ACAE-F3BE-99C5-AC59D9D5284D}"/>
+          </ac:picMkLst>
+        </pc:picChg>
+      </pc:sldChg>
+      <pc:sldChg chg="addSp delSp modSp add mod">
+        <pc:chgData name="Renan Xavier Cortes" userId="d6af805853004405" providerId="LiveId" clId="{32CE5F03-9B31-4102-A03B-787EE1528540}" dt="2026-09-30T14:53:19.890" v="1625" actId="20577"/>
+        <pc:sldMkLst>
+          <pc:docMk/>
+          <pc:sldMk cId="2069633465" sldId="276"/>
+        </pc:sldMkLst>
+        <pc:spChg chg="del">
+          <ac:chgData name="Renan Xavier Cortes" userId="d6af805853004405" providerId="LiveId" clId="{32CE5F03-9B31-4102-A03B-787EE1528540}" dt="2026-09-30T14:50:33.587" v="1421" actId="478"/>
+          <ac:spMkLst>
+            <pc:docMk/>
+            <pc:sldMk cId="2069633465" sldId="276"/>
+            <ac:spMk id="5" creationId="{E0FCEFC3-016C-BECB-5C9F-C81ABE58A50B}"/>
+          </ac:spMkLst>
+        </pc:spChg>
+        <pc:spChg chg="add mod">
+          <ac:chgData name="Renan Xavier Cortes" userId="d6af805853004405" providerId="LiveId" clId="{32CE5F03-9B31-4102-A03B-787EE1528540}" dt="2026-09-30T14:53:19.890" v="1625" actId="20577"/>
+          <ac:spMkLst>
+            <pc:docMk/>
+            <pc:sldMk cId="2069633465" sldId="276"/>
+            <ac:spMk id="9" creationId="{4D79014A-3A45-CFD7-AE17-E00E6FC5D783}"/>
+          </ac:spMkLst>
+        </pc:spChg>
+        <pc:spChg chg="del">
+          <ac:chgData name="Renan Xavier Cortes" userId="d6af805853004405" providerId="LiveId" clId="{32CE5F03-9B31-4102-A03B-787EE1528540}" dt="2026-09-30T14:50:31.662" v="1420" actId="478"/>
+          <ac:spMkLst>
+            <pc:docMk/>
+            <pc:sldMk cId="2069633465" sldId="276"/>
+            <ac:spMk id="14" creationId="{427DBFEB-81BF-4CC3-A411-FBF43D295C56}"/>
+          </ac:spMkLst>
+        </pc:spChg>
+        <pc:picChg chg="add mod">
+          <ac:chgData name="Renan Xavier Cortes" userId="d6af805853004405" providerId="LiveId" clId="{32CE5F03-9B31-4102-A03B-787EE1528540}" dt="2026-09-30T14:51:59.113" v="1580" actId="1076"/>
+          <ac:picMkLst>
+            <pc:docMk/>
+            <pc:sldMk cId="2069633465" sldId="276"/>
+            <ac:picMk id="6" creationId="{64DDF3AB-FF5B-BF09-85E6-30B0D1CEF6F4}"/>
+          </ac:picMkLst>
+        </pc:picChg>
+        <pc:picChg chg="del">
+          <ac:chgData name="Renan Xavier Cortes" userId="d6af805853004405" providerId="LiveId" clId="{32CE5F03-9B31-4102-A03B-787EE1528540}" dt="2026-09-30T14:50:30.343" v="1419" actId="478"/>
+          <ac:picMkLst>
+            <pc:docMk/>
+            <pc:sldMk cId="2069633465" sldId="276"/>
+            <ac:picMk id="2050" creationId="{D5753060-8B2D-376B-A341-C1A929AB6692}"/>
+          </ac:picMkLst>
+        </pc:picChg>
+      </pc:sldChg>
+      <pc:sldChg chg="addSp delSp modSp add mod">
+        <pc:chgData name="Renan Xavier Cortes" userId="d6af805853004405" providerId="LiveId" clId="{32CE5F03-9B31-4102-A03B-787EE1528540}" dt="2026-09-30T14:59:07.206" v="1677" actId="1076"/>
+        <pc:sldMkLst>
+          <pc:docMk/>
+          <pc:sldMk cId="1019914244" sldId="277"/>
+        </pc:sldMkLst>
+        <pc:spChg chg="mod">
+          <ac:chgData name="Renan Xavier Cortes" userId="d6af805853004405" providerId="LiveId" clId="{32CE5F03-9B31-4102-A03B-787EE1528540}" dt="2026-09-30T14:55:27.039" v="1664" actId="20577"/>
+          <ac:spMkLst>
+            <pc:docMk/>
+            <pc:sldMk cId="1019914244" sldId="277"/>
+            <ac:spMk id="9" creationId="{4D79014A-3A45-CFD7-AE17-E00E6FC5D783}"/>
+          </ac:spMkLst>
+        </pc:spChg>
+        <pc:picChg chg="del">
+          <ac:chgData name="Renan Xavier Cortes" userId="d6af805853004405" providerId="LiveId" clId="{32CE5F03-9B31-4102-A03B-787EE1528540}" dt="2026-09-30T14:56:11.182" v="1669" actId="478"/>
+          <ac:picMkLst>
+            <pc:docMk/>
+            <pc:sldMk cId="1019914244" sldId="277"/>
+            <ac:picMk id="2" creationId="{567C8E3D-C535-EC50-849C-270CEB4B8A04}"/>
+          </ac:picMkLst>
+        </pc:picChg>
+        <pc:picChg chg="del">
+          <ac:chgData name="Renan Xavier Cortes" userId="d6af805853004405" providerId="LiveId" clId="{32CE5F03-9B31-4102-A03B-787EE1528540}" dt="2026-09-30T14:58:58.389" v="1672" actId="478"/>
+          <ac:picMkLst>
+            <pc:docMk/>
+            <pc:sldMk cId="1019914244" sldId="277"/>
+            <ac:picMk id="3" creationId="{C9663204-9A6C-C5D7-7C9B-AAF5653911D6}"/>
+          </ac:picMkLst>
+        </pc:picChg>
+        <pc:picChg chg="add mod">
+          <ac:chgData name="Renan Xavier Cortes" userId="d6af805853004405" providerId="LiveId" clId="{32CE5F03-9B31-4102-A03B-787EE1528540}" dt="2026-09-30T14:56:13.020" v="1670" actId="1076"/>
+          <ac:picMkLst>
+            <pc:docMk/>
+            <pc:sldMk cId="1019914244" sldId="277"/>
+            <ac:picMk id="5" creationId="{ECE5EC1F-14C5-843E-05EF-98FE5A646D9D}"/>
+          </ac:picMkLst>
+        </pc:picChg>
+        <pc:picChg chg="del">
+          <ac:chgData name="Renan Xavier Cortes" userId="d6af805853004405" providerId="LiveId" clId="{32CE5F03-9B31-4102-A03B-787EE1528540}" dt="2026-09-30T14:56:07.050" v="1665" actId="478"/>
+          <ac:picMkLst>
+            <pc:docMk/>
+            <pc:sldMk cId="1019914244" sldId="277"/>
+            <ac:picMk id="6" creationId="{64DDF3AB-FF5B-BF09-85E6-30B0D1CEF6F4}"/>
+          </ac:picMkLst>
+        </pc:picChg>
+        <pc:picChg chg="add mod">
+          <ac:chgData name="Renan Xavier Cortes" userId="d6af805853004405" providerId="LiveId" clId="{32CE5F03-9B31-4102-A03B-787EE1528540}" dt="2026-09-30T14:59:07.206" v="1677" actId="1076"/>
+          <ac:picMkLst>
+            <pc:docMk/>
+            <pc:sldMk cId="1019914244" sldId="277"/>
+            <ac:picMk id="11" creationId="{7D2F9AF2-3B27-E6C1-5DA5-DAD401A60DEC}"/>
           </ac:picMkLst>
         </pc:picChg>
       </pc:sldChg>
@@ -3449,7 +3724,7 @@
     </p:spTree>
     <p:extLst>
       <p:ext uri="{BB962C8B-B14F-4D97-AF65-F5344CB8AC3E}">
-        <p14:creationId xmlns:p14="http://schemas.microsoft.com/office/powerpoint/2010/main" val="592255382"/>
+        <p14:creationId xmlns:p14="http://schemas.microsoft.com/office/powerpoint/2010/main" val="2429228612"/>
       </p:ext>
     </p:extLst>
   </p:cSld>
@@ -3533,7 +3808,7 @@
     </p:spTree>
     <p:extLst>
       <p:ext uri="{BB962C8B-B14F-4D97-AF65-F5344CB8AC3E}">
-        <p14:creationId xmlns:p14="http://schemas.microsoft.com/office/powerpoint/2010/main" val="2429228612"/>
+        <p14:creationId xmlns:p14="http://schemas.microsoft.com/office/powerpoint/2010/main" val="3517665198"/>
       </p:ext>
     </p:extLst>
   </p:cSld>
@@ -3617,7 +3892,7 @@
     </p:spTree>
     <p:extLst>
       <p:ext uri="{BB962C8B-B14F-4D97-AF65-F5344CB8AC3E}">
-        <p14:creationId xmlns:p14="http://schemas.microsoft.com/office/powerpoint/2010/main" val="3517665198"/>
+        <p14:creationId xmlns:p14="http://schemas.microsoft.com/office/powerpoint/2010/main" val="1151141459"/>
       </p:ext>
     </p:extLst>
   </p:cSld>
@@ -3701,7 +3976,7 @@
     </p:spTree>
     <p:extLst>
       <p:ext uri="{BB962C8B-B14F-4D97-AF65-F5344CB8AC3E}">
-        <p14:creationId xmlns:p14="http://schemas.microsoft.com/office/powerpoint/2010/main" val="1357359887"/>
+        <p14:creationId xmlns:p14="http://schemas.microsoft.com/office/powerpoint/2010/main" val="3480362650"/>
       </p:ext>
     </p:extLst>
   </p:cSld>
@@ -3785,7 +4060,7 @@
     </p:spTree>
     <p:extLst>
       <p:ext uri="{BB962C8B-B14F-4D97-AF65-F5344CB8AC3E}">
-        <p14:creationId xmlns:p14="http://schemas.microsoft.com/office/powerpoint/2010/main" val="393282365"/>
+        <p14:creationId xmlns:p14="http://schemas.microsoft.com/office/powerpoint/2010/main" val="1357359887"/>
       </p:ext>
     </p:extLst>
   </p:cSld>
@@ -3861,6 +4136,90 @@
             <a:fld id="{87C88D93-34D3-419D-AEF5-A26FFAFED389}" type="slidenum">
               <a:rPr lang="pt-BR" smtClean="0"/>
               <a:t>16</a:t>
+            </a:fld>
+            <a:endParaRPr lang="pt-BR"/>
+          </a:p>
+        </p:txBody>
+      </p:sp>
+    </p:spTree>
+    <p:extLst>
+      <p:ext uri="{BB962C8B-B14F-4D97-AF65-F5344CB8AC3E}">
+        <p14:creationId xmlns:p14="http://schemas.microsoft.com/office/powerpoint/2010/main" val="393282365"/>
+      </p:ext>
+    </p:extLst>
+  </p:cSld>
+  <p:clrMapOvr>
+    <a:masterClrMapping/>
+  </p:clrMapOvr>
+</p:notes>
+</file>
+
+<file path=ppt/notesSlides/notesSlide16.xml><?xml version="1.0" encoding="utf-8"?>
+<p:notes xmlns:a="http://schemas.openxmlformats.org/drawingml/2006/main" xmlns:r="http://schemas.openxmlformats.org/officeDocument/2006/relationships" xmlns:p="http://schemas.openxmlformats.org/presentationml/2006/main">
+  <p:cSld>
+    <p:spTree>
+      <p:nvGrpSpPr>
+        <p:cNvPr id="1" name=""/>
+        <p:cNvGrpSpPr/>
+        <p:nvPr/>
+      </p:nvGrpSpPr>
+      <p:grpSpPr>
+        <a:xfrm>
+          <a:off x="0" y="0"/>
+          <a:ext cx="0" cy="0"/>
+          <a:chOff x="0" y="0"/>
+          <a:chExt cx="0" cy="0"/>
+        </a:xfrm>
+      </p:grpSpPr>
+      <p:sp>
+        <p:nvSpPr>
+          <p:cNvPr id="2" name="Espaço Reservado para Imagem de Slide 1"/>
+          <p:cNvSpPr>
+            <a:spLocks noGrp="1" noRot="1" noChangeAspect="1"/>
+          </p:cNvSpPr>
+          <p:nvPr>
+            <p:ph type="sldImg"/>
+          </p:nvPr>
+        </p:nvSpPr>
+        <p:spPr/>
+      </p:sp>
+      <p:sp>
+        <p:nvSpPr>
+          <p:cNvPr id="3" name="Espaço Reservado para Anotações 2"/>
+          <p:cNvSpPr>
+            <a:spLocks noGrp="1"/>
+          </p:cNvSpPr>
+          <p:nvPr>
+            <p:ph type="body" idx="1"/>
+          </p:nvPr>
+        </p:nvSpPr>
+        <p:spPr/>
+        <p:txBody>
+          <a:bodyPr/>
+          <a:lstStyle/>
+          <a:p>
+            <a:endParaRPr lang="pt-BR" dirty="0"/>
+          </a:p>
+        </p:txBody>
+      </p:sp>
+      <p:sp>
+        <p:nvSpPr>
+          <p:cNvPr id="4" name="Espaço Reservado para Número de Slide 3"/>
+          <p:cNvSpPr>
+            <a:spLocks noGrp="1"/>
+          </p:cNvSpPr>
+          <p:nvPr>
+            <p:ph type="sldNum" sz="quarter" idx="5"/>
+          </p:nvPr>
+        </p:nvSpPr>
+        <p:spPr/>
+        <p:txBody>
+          <a:bodyPr/>
+          <a:lstStyle/>
+          <a:p>
+            <a:fld id="{87C88D93-34D3-419D-AEF5-A26FFAFED389}" type="slidenum">
+              <a:rPr lang="pt-BR" smtClean="0"/>
+              <a:t>17</a:t>
             </a:fld>
             <a:endParaRPr lang="pt-BR"/>
           </a:p>
@@ -4289,7 +4648,7 @@
     </p:spTree>
     <p:extLst>
       <p:ext uri="{BB962C8B-B14F-4D97-AF65-F5344CB8AC3E}">
-        <p14:creationId xmlns:p14="http://schemas.microsoft.com/office/powerpoint/2010/main" val="1019644604"/>
+        <p14:creationId xmlns:p14="http://schemas.microsoft.com/office/powerpoint/2010/main" val="2587457176"/>
       </p:ext>
     </p:extLst>
   </p:cSld>
@@ -4373,7 +4732,7 @@
     </p:spTree>
     <p:extLst>
       <p:ext uri="{BB962C8B-B14F-4D97-AF65-F5344CB8AC3E}">
-        <p14:creationId xmlns:p14="http://schemas.microsoft.com/office/powerpoint/2010/main" val="2587457176"/>
+        <p14:creationId xmlns:p14="http://schemas.microsoft.com/office/powerpoint/2010/main" val="1019644604"/>
       </p:ext>
     </p:extLst>
   </p:cSld>
@@ -8289,7 +8648,7 @@
         <p:spPr>
           <a:xfrm>
             <a:off x="940904" y="1276323"/>
-            <a:ext cx="10310191" cy="4763868"/>
+            <a:ext cx="10310191" cy="506292"/>
           </a:xfrm>
           <a:prstGeom prst="rect">
             <a:avLst/>
@@ -8314,155 +8673,8 @@
             </a:pPr>
             <a:r>
               <a:rPr lang="pt-BR" sz="2000" b="1" dirty="0"/>
-              <a:t>Descritivas</a:t>
+              <a:t>Furto no litoral?</a:t>
             </a:r>
-          </a:p>
-          <a:p>
-            <a:pPr marL="285750" indent="-285750">
-              <a:lnSpc>
-                <a:spcPct val="150000"/>
-              </a:lnSpc>
-              <a:spcAft>
-                <a:spcPts val="110"/>
-              </a:spcAft>
-              <a:buFont typeface="Wingdings" panose="05000000000000000000" pitchFamily="2" charset="2"/>
-              <a:buChar char="Ø"/>
-            </a:pPr>
-            <a:r>
-              <a:rPr lang="pt-BR" sz="2000" b="1" dirty="0"/>
-              <a:t>Taxas em Municípios pequenos</a:t>
-            </a:r>
-          </a:p>
-          <a:p>
-            <a:pPr marL="285750" indent="-285750">
-              <a:lnSpc>
-                <a:spcPct val="150000"/>
-              </a:lnSpc>
-              <a:spcAft>
-                <a:spcPts val="110"/>
-              </a:spcAft>
-              <a:buFont typeface="Wingdings" panose="05000000000000000000" pitchFamily="2" charset="2"/>
-              <a:buChar char="Ø"/>
-            </a:pPr>
-            <a:r>
-              <a:rPr lang="pt-BR" sz="2000" b="1" dirty="0"/>
-              <a:t>Autocorrelação espacial</a:t>
-            </a:r>
-          </a:p>
-          <a:p>
-            <a:pPr marL="285750" indent="-285750">
-              <a:lnSpc>
-                <a:spcPct val="150000"/>
-              </a:lnSpc>
-              <a:spcAft>
-                <a:spcPts val="110"/>
-              </a:spcAft>
-              <a:buFont typeface="Wingdings" panose="05000000000000000000" pitchFamily="2" charset="2"/>
-              <a:buChar char="Ø"/>
-            </a:pPr>
-            <a:r>
-              <a:rPr lang="pt-BR" sz="2000" b="1" dirty="0"/>
-              <a:t>Cadeias de Markov</a:t>
-            </a:r>
-          </a:p>
-          <a:p>
-            <a:pPr marL="285750" indent="-285750">
-              <a:lnSpc>
-                <a:spcPct val="150000"/>
-              </a:lnSpc>
-              <a:spcAft>
-                <a:spcPts val="110"/>
-              </a:spcAft>
-              <a:buFont typeface="Wingdings" panose="05000000000000000000" pitchFamily="2" charset="2"/>
-              <a:buChar char="Ø"/>
-            </a:pPr>
-            <a:r>
-              <a:rPr lang="pt-BR" sz="2000" b="1" dirty="0"/>
-              <a:t>Roubo de Veículos</a:t>
-            </a:r>
-          </a:p>
-          <a:p>
-            <a:pPr marL="285750" indent="-285750">
-              <a:lnSpc>
-                <a:spcPct val="150000"/>
-              </a:lnSpc>
-              <a:spcAft>
-                <a:spcPts val="110"/>
-              </a:spcAft>
-              <a:buFont typeface="Wingdings" panose="05000000000000000000" pitchFamily="2" charset="2"/>
-              <a:buChar char="Ø"/>
-            </a:pPr>
-            <a:r>
-              <a:rPr lang="pt-BR" sz="2000" b="1" dirty="0"/>
-              <a:t>Furto</a:t>
-            </a:r>
-          </a:p>
-          <a:p>
-            <a:pPr marL="285750" indent="-285750">
-              <a:lnSpc>
-                <a:spcPct val="150000"/>
-              </a:lnSpc>
-              <a:spcAft>
-                <a:spcPts val="110"/>
-              </a:spcAft>
-              <a:buFont typeface="Wingdings" panose="05000000000000000000" pitchFamily="2" charset="2"/>
-              <a:buChar char="Ø"/>
-            </a:pPr>
-            <a:r>
-              <a:rPr lang="pt-BR" sz="2000" b="1" dirty="0"/>
-              <a:t>Homicídio</a:t>
-            </a:r>
-          </a:p>
-          <a:p>
-            <a:pPr marL="285750" indent="-285750">
-              <a:lnSpc>
-                <a:spcPct val="150000"/>
-              </a:lnSpc>
-              <a:spcAft>
-                <a:spcPts val="110"/>
-              </a:spcAft>
-              <a:buFont typeface="Wingdings" panose="05000000000000000000" pitchFamily="2" charset="2"/>
-              <a:buChar char="Ø"/>
-            </a:pPr>
-            <a:r>
-              <a:rPr lang="pt-BR" sz="2000" b="1" dirty="0"/>
-              <a:t>Taxa de Homicídio ONU: 10 por 100.000</a:t>
-            </a:r>
-          </a:p>
-          <a:p>
-            <a:pPr marL="285750" indent="-285750">
-              <a:lnSpc>
-                <a:spcPct val="150000"/>
-              </a:lnSpc>
-              <a:spcAft>
-                <a:spcPts val="110"/>
-              </a:spcAft>
-              <a:buFont typeface="Wingdings" panose="05000000000000000000" pitchFamily="2" charset="2"/>
-              <a:buChar char="Ø"/>
-            </a:pPr>
-            <a:r>
-              <a:rPr lang="pt-BR" sz="2000" b="1" u="none" strike="noStrike" dirty="0">
-                <a:effectLst/>
-                <a:latin typeface="Google Sans"/>
-              </a:rPr>
-              <a:t>Média Global:</a:t>
-            </a:r>
-            <a:r>
-              <a:rPr lang="pt-BR" sz="2000" dirty="0"/>
-              <a:t> A taxa média no mundo gira em torno de </a:t>
-            </a:r>
-            <a:r>
-              <a:rPr lang="pt-BR" sz="2000" b="1" u="none" strike="noStrike" dirty="0">
-                <a:effectLst/>
-                <a:latin typeface="Google Sans"/>
-              </a:rPr>
-              <a:t>5,8 homicídios por 100 mil habitantes</a:t>
-            </a:r>
-            <a:r>
-              <a:rPr lang="pt-BR" sz="2000" dirty="0"/>
-              <a:t>.</a:t>
-            </a:r>
-            <a:endParaRPr lang="pt-BR" sz="2000" b="1" dirty="0"/>
           </a:p>
         </p:txBody>
       </p:sp>
@@ -8561,8 +8773,8 @@
         </p:nvSpPr>
         <p:spPr>
           <a:xfrm>
-            <a:off x="249836" y="200638"/>
-            <a:ext cx="11692327" cy="584775"/>
+            <a:off x="1103819" y="140678"/>
+            <a:ext cx="7815329" cy="646331"/>
           </a:xfrm>
           <a:prstGeom prst="rect">
             <a:avLst/>
@@ -8576,14 +8788,59 @@
           <a:lstStyle/>
           <a:p>
             <a:r>
-              <a:rPr lang="pt-BR" sz="3200" b="1" dirty="0">
+              <a:rPr lang="pt-BR" sz="3600" b="1" dirty="0">
                 <a:solidFill>
                   <a:srgbClr val="002060"/>
                 </a:solidFill>
                 <a:latin typeface="Cambria" panose="02040503050406030204" pitchFamily="18" charset="0"/>
                 <a:ea typeface="Cambria" panose="02040503050406030204" pitchFamily="18" charset="0"/>
               </a:rPr>
-              <a:t>Panorama RS à Luz dos Dados públicos disponíveis da SSP-RS</a:t>
+              <a:t>Armas x Criminalidade</a:t>
+            </a:r>
+          </a:p>
+        </p:txBody>
+      </p:sp>
+      <p:sp>
+        <p:nvSpPr>
+          <p:cNvPr id="14" name="CaixaDeTexto 13">
+            <a:extLst>
+              <a:ext uri="{FF2B5EF4-FFF2-40B4-BE49-F238E27FC236}">
+                <a16:creationId xmlns:a16="http://schemas.microsoft.com/office/drawing/2014/main" id="{427DBFEB-81BF-4CC3-A411-FBF43D295C56}"/>
+              </a:ext>
+            </a:extLst>
+          </p:cNvPr>
+          <p:cNvSpPr txBox="1"/>
+          <p:nvPr/>
+        </p:nvSpPr>
+        <p:spPr>
+          <a:xfrm>
+            <a:off x="940904" y="1154334"/>
+            <a:ext cx="7647769" cy="967957"/>
+          </a:xfrm>
+          <a:prstGeom prst="rect">
+            <a:avLst/>
+          </a:prstGeom>
+          <a:noFill/>
+        </p:spPr>
+        <p:txBody>
+          <a:bodyPr wrap="square" rtlCol="0">
+            <a:spAutoFit/>
+          </a:bodyPr>
+          <a:lstStyle/>
+          <a:p>
+            <a:pPr marL="285750" indent="-285750">
+              <a:lnSpc>
+                <a:spcPct val="150000"/>
+              </a:lnSpc>
+              <a:spcAft>
+                <a:spcPts val="110"/>
+              </a:spcAft>
+              <a:buFont typeface="Wingdings" panose="05000000000000000000" pitchFamily="2" charset="2"/>
+              <a:buChar char="Ø"/>
+            </a:pPr>
+            <a:r>
+              <a:rPr lang="pt-BR" sz="2000" b="1" dirty="0"/>
+              <a:t>A relação de armas e criminalidade também é presente na literatura. </a:t>
             </a:r>
           </a:p>
         </p:txBody>
@@ -8684,10 +8941,10 @@
       </p:pic>
       <p:sp>
         <p:nvSpPr>
-          <p:cNvPr id="4" name="CaixaDeTexto 3">
-            <a:extLst>
-              <a:ext uri="{FF2B5EF4-FFF2-40B4-BE49-F238E27FC236}">
-                <a16:creationId xmlns:a16="http://schemas.microsoft.com/office/drawing/2014/main" id="{F9B44222-0FEB-DD8A-E65A-F10683C06A0F}"/>
+          <p:cNvPr id="5" name="CaixaDeTexto 4">
+            <a:extLst>
+              <a:ext uri="{FF2B5EF4-FFF2-40B4-BE49-F238E27FC236}">
+                <a16:creationId xmlns:a16="http://schemas.microsoft.com/office/drawing/2014/main" id="{F8513A2C-EFAD-349F-ECA3-4EE11292D1C6}"/>
               </a:ext>
             </a:extLst>
           </p:cNvPr>
@@ -8696,8 +8953,8 @@
         </p:nvSpPr>
         <p:spPr>
           <a:xfrm>
-            <a:off x="940904" y="1276323"/>
-            <a:ext cx="10310191" cy="4763868"/>
+            <a:off x="940903" y="2305953"/>
+            <a:ext cx="11050446" cy="3789242"/>
           </a:xfrm>
           <a:prstGeom prst="rect">
             <a:avLst/>
@@ -8722,8 +8979,21 @@
             </a:pPr>
             <a:r>
               <a:rPr lang="pt-BR" sz="2000" b="1" dirty="0"/>
-              <a:t>Descritivas</a:t>
+              <a:t>Problemas: violência é um fenômeno complexo e de multifatorial e estimar a quantidade de armas em circulação é desafiador.</a:t>
             </a:r>
+          </a:p>
+          <a:p>
+            <a:pPr marL="285750" indent="-285750">
+              <a:lnSpc>
+                <a:spcPct val="150000"/>
+              </a:lnSpc>
+              <a:spcAft>
+                <a:spcPts val="110"/>
+              </a:spcAft>
+              <a:buFont typeface="Wingdings" panose="05000000000000000000" pitchFamily="2" charset="2"/>
+              <a:buChar char="Ø"/>
+            </a:pPr>
+            <a:endParaRPr lang="pt-BR" sz="2000" b="1" dirty="0"/>
           </a:p>
           <a:p>
             <a:pPr marL="285750" indent="-285750">
@@ -8738,8 +9008,21 @@
             </a:pPr>
             <a:r>
               <a:rPr lang="pt-BR" sz="2000" b="1" dirty="0"/>
-              <a:t>Taxas em Municípios pequenos</a:t>
+              <a:t>No Brasil, a obra de Daniel Cerqueira (“Menos Armas, Menos Crimes”) se destaca, defendendo que a redução na circulação de armas de fogo esteve associada a uma queda nos homicídios no período pós-Estatuto.</a:t>
             </a:r>
+          </a:p>
+          <a:p>
+            <a:pPr marL="285750" indent="-285750">
+              <a:lnSpc>
+                <a:spcPct val="150000"/>
+              </a:lnSpc>
+              <a:spcAft>
+                <a:spcPts val="110"/>
+              </a:spcAft>
+              <a:buFont typeface="Wingdings" panose="05000000000000000000" pitchFamily="2" charset="2"/>
+              <a:buChar char="Ø"/>
+            </a:pPr>
+            <a:endParaRPr lang="pt-BR" sz="2000" b="1" dirty="0"/>
           </a:p>
           <a:p>
             <a:pPr marL="285750" indent="-285750">
@@ -8754,130 +9037,139 @@
             </a:pPr>
             <a:r>
               <a:rPr lang="pt-BR" sz="2000" b="1" dirty="0"/>
-              <a:t>Autocorrelação espacial</a:t>
+              <a:t>Maioria das Revisões de Literatura são contrárias à tese “Mais Armas, Menos Crimes”</a:t>
             </a:r>
-          </a:p>
-          <a:p>
-            <a:pPr marL="285750" indent="-285750">
+            <a:r>
+              <a:rPr lang="pt-BR" sz="2000" b="1" baseline="30000" dirty="0"/>
+              <a:t>1,2</a:t>
+            </a:r>
+          </a:p>
+        </p:txBody>
+      </p:sp>
+      <p:pic>
+        <p:nvPicPr>
+          <p:cNvPr id="1030" name="Picture 6" descr="arma, pistola, automática (Pixabay/Reprodução)">
+            <a:extLst>
+              <a:ext uri="{FF2B5EF4-FFF2-40B4-BE49-F238E27FC236}">
+                <a16:creationId xmlns:a16="http://schemas.microsoft.com/office/drawing/2014/main" id="{BAA8555A-A9C9-35F7-8A61-79165A878D49}"/>
+              </a:ext>
+            </a:extLst>
+          </p:cNvPr>
+          <p:cNvPicPr>
+            <a:picLocks noChangeAspect="1" noChangeArrowheads="1"/>
+          </p:cNvPicPr>
+          <p:nvPr/>
+        </p:nvPicPr>
+        <p:blipFill>
+          <a:blip r:embed="rId5">
+            <a:extLst>
+              <a:ext uri="{28A0092B-C50C-407E-A947-70E740481C1C}">
+                <a14:useLocalDpi xmlns:a14="http://schemas.microsoft.com/office/drawing/2010/main" val="0"/>
+              </a:ext>
+            </a:extLst>
+          </a:blip>
+          <a:srcRect/>
+          <a:stretch>
+            <a:fillRect/>
+          </a:stretch>
+        </p:blipFill>
+        <p:spPr bwMode="auto">
+          <a:xfrm>
+            <a:off x="8739264" y="70305"/>
+            <a:ext cx="3252085" cy="2168057"/>
+          </a:xfrm>
+          <a:prstGeom prst="rect">
+            <a:avLst/>
+          </a:prstGeom>
+          <a:noFill/>
+          <a:extLst>
+            <a:ext uri="{909E8E84-426E-40DD-AFC4-6F175D3DCCD1}">
+              <a14:hiddenFill xmlns:a14="http://schemas.microsoft.com/office/drawing/2010/main">
+                <a:solidFill>
+                  <a:srgbClr val="FFFFFF"/>
+                </a:solidFill>
+              </a14:hiddenFill>
+            </a:ext>
+          </a:extLst>
+        </p:spPr>
+      </p:pic>
+      <p:sp>
+        <p:nvSpPr>
+          <p:cNvPr id="9" name="CaixaDeTexto 8">
+            <a:extLst>
+              <a:ext uri="{FF2B5EF4-FFF2-40B4-BE49-F238E27FC236}">
+                <a16:creationId xmlns:a16="http://schemas.microsoft.com/office/drawing/2014/main" id="{985D7B09-9BD8-C772-923A-E9C4FBA45B2B}"/>
+              </a:ext>
+            </a:extLst>
+          </p:cNvPr>
+          <p:cNvSpPr txBox="1"/>
+          <p:nvPr/>
+        </p:nvSpPr>
+        <p:spPr>
+          <a:xfrm>
+            <a:off x="1101549" y="6284204"/>
+            <a:ext cx="9988902" cy="586764"/>
+          </a:xfrm>
+          <a:prstGeom prst="rect">
+            <a:avLst/>
+          </a:prstGeom>
+          <a:noFill/>
+        </p:spPr>
+        <p:txBody>
+          <a:bodyPr wrap="square">
+            <a:spAutoFit/>
+          </a:bodyPr>
+          <a:lstStyle/>
+          <a:p>
+            <a:pPr>
               <a:lnSpc>
                 <a:spcPct val="150000"/>
               </a:lnSpc>
               <a:spcAft>
                 <a:spcPts val="110"/>
               </a:spcAft>
-              <a:buFont typeface="Wingdings" panose="05000000000000000000" pitchFamily="2" charset="2"/>
-              <a:buChar char="Ø"/>
             </a:pPr>
             <a:r>
-              <a:rPr lang="pt-BR" sz="2000" b="1" dirty="0"/>
-              <a:t>Cadeias de Markov</a:t>
+              <a:rPr lang="pt-BR" sz="1100" b="1" baseline="30000" dirty="0"/>
+              <a:t>1</a:t>
             </a:r>
-          </a:p>
-          <a:p>
-            <a:pPr marL="285750" indent="-285750">
+            <a:r>
+              <a:rPr lang="pt-BR" sz="1100" b="1" dirty="0"/>
+              <a:t>https://thomasvconti.com.br/2017/dossie-armas-violencia-e-crimes-o-que-nos-dizem-61-pesquisas-recentes/#resumo</a:t>
+            </a:r>
+          </a:p>
+          <a:p>
+            <a:pPr>
               <a:lnSpc>
                 <a:spcPct val="150000"/>
               </a:lnSpc>
               <a:spcAft>
                 <a:spcPts val="110"/>
               </a:spcAft>
-              <a:buFont typeface="Wingdings" panose="05000000000000000000" pitchFamily="2" charset="2"/>
-              <a:buChar char="Ø"/>
             </a:pPr>
             <a:r>
-              <a:rPr lang="pt-BR" sz="2000" b="1" dirty="0"/>
-              <a:t>Roubo de Veículos</a:t>
-            </a:r>
-          </a:p>
-          <a:p>
-            <a:pPr marL="285750" indent="-285750">
-              <a:lnSpc>
-                <a:spcPct val="150000"/>
-              </a:lnSpc>
-              <a:spcAft>
-                <a:spcPts val="110"/>
-              </a:spcAft>
-              <a:buFont typeface="Wingdings" panose="05000000000000000000" pitchFamily="2" charset="2"/>
-              <a:buChar char="Ø"/>
-            </a:pPr>
-            <a:r>
-              <a:rPr lang="pt-BR" sz="2000" b="1" dirty="0"/>
-              <a:t>Furto</a:t>
-            </a:r>
-          </a:p>
-          <a:p>
-            <a:pPr marL="285750" indent="-285750">
-              <a:lnSpc>
-                <a:spcPct val="150000"/>
-              </a:lnSpc>
-              <a:spcAft>
-                <a:spcPts val="110"/>
-              </a:spcAft>
-              <a:buFont typeface="Wingdings" panose="05000000000000000000" pitchFamily="2" charset="2"/>
-              <a:buChar char="Ø"/>
-            </a:pPr>
-            <a:r>
-              <a:rPr lang="pt-BR" sz="2000" b="1" dirty="0"/>
-              <a:t>Homicídio</a:t>
-            </a:r>
-          </a:p>
-          <a:p>
-            <a:pPr marL="285750" indent="-285750">
-              <a:lnSpc>
-                <a:spcPct val="150000"/>
-              </a:lnSpc>
-              <a:spcAft>
-                <a:spcPts val="110"/>
-              </a:spcAft>
-              <a:buFont typeface="Wingdings" panose="05000000000000000000" pitchFamily="2" charset="2"/>
-              <a:buChar char="Ø"/>
-            </a:pPr>
-            <a:r>
-              <a:rPr lang="pt-BR" sz="2000" b="1" dirty="0"/>
-              <a:t>Taxa de Homicídio ONU: 10 por 100.000</a:t>
-            </a:r>
-          </a:p>
-          <a:p>
-            <a:pPr marL="285750" indent="-285750">
-              <a:lnSpc>
-                <a:spcPct val="150000"/>
-              </a:lnSpc>
-              <a:spcAft>
-                <a:spcPts val="110"/>
-              </a:spcAft>
-              <a:buFont typeface="Wingdings" panose="05000000000000000000" pitchFamily="2" charset="2"/>
-              <a:buChar char="Ø"/>
-            </a:pPr>
-            <a:r>
-              <a:rPr lang="pt-BR" sz="2000" b="1" u="none" strike="noStrike" dirty="0">
-                <a:effectLst/>
-                <a:latin typeface="Google Sans"/>
-              </a:rPr>
-              <a:t>Média Global:</a:t>
+              <a:rPr lang="pt-BR" sz="1100" b="1" baseline="30000" dirty="0"/>
+              <a:t>2</a:t>
             </a:r>
             <a:r>
-              <a:rPr lang="pt-BR" sz="2000" dirty="0"/>
-              <a:t> A taxa média no mundo gira em torno de </a:t>
+              <a:rPr lang="pt-BR" sz="1100" b="1" dirty="0"/>
+              <a:t>https://forumseguranca.org.br/</a:t>
             </a:r>
             <a:r>
-              <a:rPr lang="pt-BR" sz="2000" b="1" u="none" strike="noStrike" dirty="0">
-                <a:effectLst/>
-                <a:latin typeface="Google Sans"/>
-              </a:rPr>
-              <a:t>5,8 homicídios por 100 mil habitantes</a:t>
+              <a:rPr lang="pt-BR" sz="1100" b="1" dirty="0" err="1"/>
+              <a:t>wp-content</a:t>
             </a:r>
             <a:r>
-              <a:rPr lang="pt-BR" sz="2000" dirty="0"/>
-              <a:t>.</a:t>
+              <a:rPr lang="pt-BR" sz="1100" b="1" dirty="0"/>
+              <a:t>/uploads/2022/09/informe-armas-fogo-homicidios-no-brasil.pdf</a:t>
             </a:r>
-            <a:endParaRPr lang="pt-BR" sz="2000" b="1" dirty="0"/>
           </a:p>
         </p:txBody>
       </p:sp>
     </p:spTree>
     <p:extLst>
       <p:ext uri="{BB962C8B-B14F-4D97-AF65-F5344CB8AC3E}">
-        <p14:creationId xmlns:p14="http://schemas.microsoft.com/office/powerpoint/2010/main" val="1600642753"/>
+        <p14:creationId xmlns:p14="http://schemas.microsoft.com/office/powerpoint/2010/main" val="3554767980"/>
       </p:ext>
     </p:extLst>
   </p:cSld>
@@ -8991,7 +9283,7 @@
                 <a:latin typeface="Cambria" panose="02040503050406030204" pitchFamily="18" charset="0"/>
                 <a:ea typeface="Cambria" panose="02040503050406030204" pitchFamily="18" charset="0"/>
               </a:rPr>
-              <a:t>Armas x Criminalidade</a:t>
+              <a:t>Luz x Criminalidade</a:t>
             </a:r>
           </a:p>
         </p:txBody>
@@ -9010,8 +9302,8 @@
         </p:nvSpPr>
         <p:spPr>
           <a:xfrm>
-            <a:off x="940904" y="1276323"/>
-            <a:ext cx="10310191" cy="506292"/>
+            <a:off x="940905" y="1154334"/>
+            <a:ext cx="7815330" cy="2851935"/>
           </a:xfrm>
           <a:prstGeom prst="rect">
             <a:avLst/>
@@ -9025,6 +9317,33 @@
           <a:lstStyle/>
           <a:p>
             <a:pPr marL="285750" indent="-285750">
+              <a:spcAft>
+                <a:spcPts val="110"/>
+              </a:spcAft>
+              <a:buFont typeface="Wingdings" panose="05000000000000000000" pitchFamily="2" charset="2"/>
+              <a:buChar char="Ø"/>
+            </a:pPr>
+            <a:r>
+              <a:rPr lang="pt-BR" sz="2800" b="1" dirty="0"/>
+              <a:t>Becker (1968) (Escolha racional):</a:t>
+            </a:r>
+            <a:r>
+              <a:rPr lang="pt-BR" sz="2800" dirty="0"/>
+              <a:t> o indivíduo comete o crime quando os benefícios esperados (financeiros ou psíquicos) superam os custos esperados.</a:t>
+            </a:r>
+          </a:p>
+          <a:p>
+            <a:pPr marL="342900" indent="-342900">
+              <a:spcAft>
+                <a:spcPts val="110"/>
+              </a:spcAft>
+              <a:buFont typeface="Wingdings" panose="05000000000000000000" pitchFamily="2" charset="2"/>
+              <a:buChar char="Ø"/>
+            </a:pPr>
+            <a:endParaRPr lang="pt-BR" sz="2800" b="1" dirty="0"/>
+          </a:p>
+          <a:p>
+            <a:pPr marL="285750" indent="-285750">
               <a:lnSpc>
                 <a:spcPct val="150000"/>
               </a:lnSpc>
@@ -9034,10 +9353,7 @@
               <a:buFont typeface="Wingdings" panose="05000000000000000000" pitchFamily="2" charset="2"/>
               <a:buChar char="Ø"/>
             </a:pPr>
-            <a:r>
-              <a:rPr lang="pt-BR" sz="2000" b="1" dirty="0"/>
-              <a:t>Noções gerais sobre Estatística. </a:t>
-            </a:r>
+            <a:endParaRPr lang="pt-BR" sz="2800" b="1" dirty="0"/>
           </a:p>
         </p:txBody>
       </p:sp>
@@ -9135,10 +9451,121 @@
           </a:extLst>
         </p:spPr>
       </p:pic>
+      <p:pic>
+        <p:nvPicPr>
+          <p:cNvPr id="2050" name="Picture 2" descr="perigoso Criminoso. silhueta do bandidos, criminosos com a irreconhecível  face dentro ameaçador pose às noite em Sombrio rua. 42707152 Foto de stock  no Vecteezy">
+            <a:extLst>
+              <a:ext uri="{FF2B5EF4-FFF2-40B4-BE49-F238E27FC236}">
+                <a16:creationId xmlns:a16="http://schemas.microsoft.com/office/drawing/2014/main" id="{D5753060-8B2D-376B-A341-C1A929AB6692}"/>
+              </a:ext>
+            </a:extLst>
+          </p:cNvPr>
+          <p:cNvPicPr>
+            <a:picLocks noChangeAspect="1" noChangeArrowheads="1"/>
+          </p:cNvPicPr>
+          <p:nvPr/>
+        </p:nvPicPr>
+        <p:blipFill>
+          <a:blip r:embed="rId5">
+            <a:extLst>
+              <a:ext uri="{28A0092B-C50C-407E-A947-70E740481C1C}">
+                <a14:useLocalDpi xmlns:a14="http://schemas.microsoft.com/office/drawing/2010/main" val="0"/>
+              </a:ext>
+            </a:extLst>
+          </a:blip>
+          <a:srcRect/>
+          <a:stretch>
+            <a:fillRect/>
+          </a:stretch>
+        </p:blipFill>
+        <p:spPr bwMode="auto">
+          <a:xfrm>
+            <a:off x="8799226" y="140678"/>
+            <a:ext cx="3139893" cy="2093262"/>
+          </a:xfrm>
+          <a:prstGeom prst="rect">
+            <a:avLst/>
+          </a:prstGeom>
+          <a:noFill/>
+          <a:extLst>
+            <a:ext uri="{909E8E84-426E-40DD-AFC4-6F175D3DCCD1}">
+              <a14:hiddenFill xmlns:a14="http://schemas.microsoft.com/office/drawing/2010/main">
+                <a:solidFill>
+                  <a:srgbClr val="FFFFFF"/>
+                </a:solidFill>
+              </a14:hiddenFill>
+            </a:ext>
+          </a:extLst>
+        </p:spPr>
+      </p:pic>
+      <p:sp>
+        <p:nvSpPr>
+          <p:cNvPr id="5" name="CaixaDeTexto 4">
+            <a:extLst>
+              <a:ext uri="{FF2B5EF4-FFF2-40B4-BE49-F238E27FC236}">
+                <a16:creationId xmlns:a16="http://schemas.microsoft.com/office/drawing/2014/main" id="{E0FCEFC3-016C-BECB-5C9F-C81ABE58A50B}"/>
+              </a:ext>
+            </a:extLst>
+          </p:cNvPr>
+          <p:cNvSpPr txBox="1"/>
+          <p:nvPr/>
+        </p:nvSpPr>
+        <p:spPr>
+          <a:xfrm>
+            <a:off x="940905" y="3250650"/>
+            <a:ext cx="10569561" cy="2677656"/>
+          </a:xfrm>
+          <a:prstGeom prst="rect">
+            <a:avLst/>
+          </a:prstGeom>
+          <a:noFill/>
+        </p:spPr>
+        <p:txBody>
+          <a:bodyPr wrap="square">
+            <a:spAutoFit/>
+          </a:bodyPr>
+          <a:lstStyle/>
+          <a:p>
+            <a:pPr marL="342900" indent="-342900" rtl="0">
+              <a:buFont typeface="Wingdings" panose="05000000000000000000" pitchFamily="2" charset="2"/>
+              <a:buChar char="Ø"/>
+            </a:pPr>
+            <a:r>
+              <a:rPr lang="pt-BR" sz="2800" b="1" dirty="0"/>
+              <a:t>Dissuasão: </a:t>
+            </a:r>
+            <a:r>
+              <a:rPr lang="pt-BR" sz="2800" dirty="0"/>
+              <a:t>a probabilidade de captura é um dos principais fatores que inibem o crime.</a:t>
+            </a:r>
+          </a:p>
+          <a:p>
+            <a:pPr marL="342900" indent="-342900" rtl="0">
+              <a:buFont typeface="Wingdings" panose="05000000000000000000" pitchFamily="2" charset="2"/>
+              <a:buChar char="Ø"/>
+            </a:pPr>
+            <a:endParaRPr lang="pt-BR" sz="2800" dirty="0"/>
+          </a:p>
+          <a:p>
+            <a:pPr marL="342900" indent="-342900" rtl="0">
+              <a:buFont typeface="Wingdings" panose="05000000000000000000" pitchFamily="2" charset="2"/>
+              <a:buChar char="Ø"/>
+            </a:pPr>
+            <a:r>
+              <a:rPr lang="pt-BR" sz="2800" b="1" dirty="0"/>
+              <a:t>Hipótese: </a:t>
+            </a:r>
+            <a:r>
+              <a:rPr lang="pt-BR" sz="2800" dirty="0"/>
+              <a:t>mais luminosidade significa mais testemunhas e mais facilidade para identificar os autores, o que aumenta a probabilidade de captura.</a:t>
+            </a:r>
+          </a:p>
+        </p:txBody>
+      </p:sp>
     </p:spTree>
     <p:extLst>
       <p:ext uri="{BB962C8B-B14F-4D97-AF65-F5344CB8AC3E}">
-        <p14:creationId xmlns:p14="http://schemas.microsoft.com/office/powerpoint/2010/main" val="3554767980"/>
+        <p14:creationId xmlns:p14="http://schemas.microsoft.com/office/powerpoint/2010/main" val="1536836101"/>
       </p:ext>
     </p:extLst>
   </p:cSld>
@@ -9257,51 +9684,6 @@
           </a:p>
         </p:txBody>
       </p:sp>
-      <p:sp>
-        <p:nvSpPr>
-          <p:cNvPr id="14" name="CaixaDeTexto 13">
-            <a:extLst>
-              <a:ext uri="{FF2B5EF4-FFF2-40B4-BE49-F238E27FC236}">
-                <a16:creationId xmlns:a16="http://schemas.microsoft.com/office/drawing/2014/main" id="{427DBFEB-81BF-4CC3-A411-FBF43D295C56}"/>
-              </a:ext>
-            </a:extLst>
-          </p:cNvPr>
-          <p:cNvSpPr txBox="1"/>
-          <p:nvPr/>
-        </p:nvSpPr>
-        <p:spPr>
-          <a:xfrm>
-            <a:off x="940904" y="1276323"/>
-            <a:ext cx="10310191" cy="506292"/>
-          </a:xfrm>
-          <a:prstGeom prst="rect">
-            <a:avLst/>
-          </a:prstGeom>
-          <a:noFill/>
-        </p:spPr>
-        <p:txBody>
-          <a:bodyPr wrap="square" rtlCol="0">
-            <a:spAutoFit/>
-          </a:bodyPr>
-          <a:lstStyle/>
-          <a:p>
-            <a:pPr marL="285750" indent="-285750">
-              <a:lnSpc>
-                <a:spcPct val="150000"/>
-              </a:lnSpc>
-              <a:spcAft>
-                <a:spcPts val="110"/>
-              </a:spcAft>
-              <a:buFont typeface="Wingdings" panose="05000000000000000000" pitchFamily="2" charset="2"/>
-              <a:buChar char="Ø"/>
-            </a:pPr>
-            <a:r>
-              <a:rPr lang="pt-BR" sz="2000" b="1" dirty="0"/>
-              <a:t>Noções gerais sobre Estatística. </a:t>
-            </a:r>
-          </a:p>
-        </p:txBody>
-      </p:sp>
       <p:pic>
         <p:nvPicPr>
           <p:cNvPr id="2" name="Picture 2" descr="UFRGS na Serra | Visão de futuro e coragem para inovar">
@@ -9396,10 +9778,121 @@
           </a:extLst>
         </p:spPr>
       </p:pic>
+      <p:pic>
+        <p:nvPicPr>
+          <p:cNvPr id="6" name="Imagem 5">
+            <a:extLst>
+              <a:ext uri="{FF2B5EF4-FFF2-40B4-BE49-F238E27FC236}">
+                <a16:creationId xmlns:a16="http://schemas.microsoft.com/office/drawing/2014/main" id="{64DDF3AB-FF5B-BF09-85E6-30B0D1CEF6F4}"/>
+              </a:ext>
+            </a:extLst>
+          </p:cNvPr>
+          <p:cNvPicPr>
+            <a:picLocks noChangeAspect="1"/>
+          </p:cNvPicPr>
+          <p:nvPr/>
+        </p:nvPicPr>
+        <p:blipFill>
+          <a:blip r:embed="rId5"/>
+          <a:stretch>
+            <a:fillRect/>
+          </a:stretch>
+        </p:blipFill>
+        <p:spPr>
+          <a:xfrm>
+            <a:off x="1318546" y="2295903"/>
+            <a:ext cx="9554908" cy="3591426"/>
+          </a:xfrm>
+          <a:prstGeom prst="rect">
+            <a:avLst/>
+          </a:prstGeom>
+        </p:spPr>
+      </p:pic>
+      <p:sp>
+        <p:nvSpPr>
+          <p:cNvPr id="9" name="CaixaDeTexto 8">
+            <a:extLst>
+              <a:ext uri="{FF2B5EF4-FFF2-40B4-BE49-F238E27FC236}">
+                <a16:creationId xmlns:a16="http://schemas.microsoft.com/office/drawing/2014/main" id="{4D79014A-3A45-CFD7-AE17-E00E6FC5D783}"/>
+              </a:ext>
+            </a:extLst>
+          </p:cNvPr>
+          <p:cNvSpPr txBox="1"/>
+          <p:nvPr/>
+        </p:nvSpPr>
+        <p:spPr>
+          <a:xfrm>
+            <a:off x="500433" y="1280362"/>
+            <a:ext cx="11191134" cy="1455270"/>
+          </a:xfrm>
+          <a:prstGeom prst="rect">
+            <a:avLst/>
+          </a:prstGeom>
+          <a:noFill/>
+        </p:spPr>
+        <p:txBody>
+          <a:bodyPr wrap="square" rtlCol="0">
+            <a:spAutoFit/>
+          </a:bodyPr>
+          <a:lstStyle/>
+          <a:p>
+            <a:pPr marL="285750" indent="-285750">
+              <a:spcAft>
+                <a:spcPts val="110"/>
+              </a:spcAft>
+              <a:buFont typeface="Wingdings" panose="05000000000000000000" pitchFamily="2" charset="2"/>
+              <a:buChar char="Ø"/>
+            </a:pPr>
+            <a:r>
+              <a:rPr lang="pt-BR" sz="2000" b="1" dirty="0" err="1"/>
+              <a:t>Doleac</a:t>
+            </a:r>
+            <a:r>
+              <a:rPr lang="pt-BR" sz="2000" b="1" dirty="0"/>
+              <a:t> </a:t>
+            </a:r>
+            <a:r>
+              <a:rPr lang="pt-BR" sz="2000" b="1" dirty="0" err="1"/>
+              <a:t>and</a:t>
+            </a:r>
+            <a:r>
+              <a:rPr lang="pt-BR" sz="2000" b="1" dirty="0"/>
+              <a:t> Sanders (2015): </a:t>
+            </a:r>
+            <a:r>
+              <a:rPr lang="pt-BR" sz="2000" dirty="0"/>
+              <a:t>regressão descontínua no início do Horário de Verão em Roubos e Estupros nos EUA</a:t>
+            </a:r>
+          </a:p>
+          <a:p>
+            <a:pPr marL="342900" indent="-342900">
+              <a:spcAft>
+                <a:spcPts val="110"/>
+              </a:spcAft>
+              <a:buFont typeface="Wingdings" panose="05000000000000000000" pitchFamily="2" charset="2"/>
+              <a:buChar char="Ø"/>
+            </a:pPr>
+            <a:endParaRPr lang="pt-BR" sz="2000" b="1" dirty="0"/>
+          </a:p>
+          <a:p>
+            <a:pPr marL="285750" indent="-285750">
+              <a:lnSpc>
+                <a:spcPct val="150000"/>
+              </a:lnSpc>
+              <a:spcAft>
+                <a:spcPts val="110"/>
+              </a:spcAft>
+              <a:buFont typeface="Wingdings" panose="05000000000000000000" pitchFamily="2" charset="2"/>
+              <a:buChar char="Ø"/>
+            </a:pPr>
+            <a:endParaRPr lang="pt-BR" sz="2000" b="1" dirty="0"/>
+          </a:p>
+        </p:txBody>
+      </p:sp>
     </p:spTree>
     <p:extLst>
       <p:ext uri="{BB962C8B-B14F-4D97-AF65-F5344CB8AC3E}">
-        <p14:creationId xmlns:p14="http://schemas.microsoft.com/office/powerpoint/2010/main" val="1536836101"/>
+        <p14:creationId xmlns:p14="http://schemas.microsoft.com/office/powerpoint/2010/main" val="2069633465"/>
       </p:ext>
     </p:extLst>
   </p:cSld>
@@ -9422,6 +9915,257 @@
 </file>
 
 <file path=ppt/slides/slide14.xml><?xml version="1.0" encoding="utf-8"?>
+<p:sld xmlns:a="http://schemas.openxmlformats.org/drawingml/2006/main" xmlns:r="http://schemas.openxmlformats.org/officeDocument/2006/relationships" xmlns:p="http://schemas.openxmlformats.org/presentationml/2006/main">
+  <p:cSld>
+    <p:spTree>
+      <p:nvGrpSpPr>
+        <p:cNvPr id="1" name=""/>
+        <p:cNvGrpSpPr/>
+        <p:nvPr/>
+      </p:nvGrpSpPr>
+      <p:grpSpPr>
+        <a:xfrm>
+          <a:off x="0" y="0"/>
+          <a:ext cx="0" cy="0"/>
+          <a:chOff x="0" y="0"/>
+          <a:chExt cx="0" cy="0"/>
+        </a:xfrm>
+      </p:grpSpPr>
+      <p:cxnSp>
+        <p:nvCxnSpPr>
+          <p:cNvPr id="7" name="Conector reto 6">
+            <a:extLst>
+              <a:ext uri="{FF2B5EF4-FFF2-40B4-BE49-F238E27FC236}">
+                <a16:creationId xmlns:a16="http://schemas.microsoft.com/office/drawing/2014/main" id="{280B8309-4572-4E27-8B6F-D29679313292}"/>
+              </a:ext>
+            </a:extLst>
+          </p:cNvPr>
+          <p:cNvCxnSpPr>
+            <a:cxnSpLocks/>
+          </p:cNvCxnSpPr>
+          <p:nvPr/>
+        </p:nvCxnSpPr>
+        <p:spPr>
+          <a:xfrm>
+            <a:off x="-112541" y="970671"/>
+            <a:ext cx="8328073" cy="0"/>
+          </a:xfrm>
+          <a:prstGeom prst="line">
+            <a:avLst/>
+          </a:prstGeom>
+          <a:ln w="38100"/>
+        </p:spPr>
+        <p:style>
+          <a:lnRef idx="1">
+            <a:schemeClr val="accent1"/>
+          </a:lnRef>
+          <a:fillRef idx="0">
+            <a:schemeClr val="accent1"/>
+          </a:fillRef>
+          <a:effectRef idx="0">
+            <a:schemeClr val="accent1"/>
+          </a:effectRef>
+          <a:fontRef idx="minor">
+            <a:schemeClr val="tx1"/>
+          </a:fontRef>
+        </p:style>
+      </p:cxnSp>
+      <p:sp>
+        <p:nvSpPr>
+          <p:cNvPr id="8" name="CaixaDeTexto 7">
+            <a:extLst>
+              <a:ext uri="{FF2B5EF4-FFF2-40B4-BE49-F238E27FC236}">
+                <a16:creationId xmlns:a16="http://schemas.microsoft.com/office/drawing/2014/main" id="{39AE06C5-34BE-4D68-97C3-4C07702C2DF6}"/>
+              </a:ext>
+            </a:extLst>
+          </p:cNvPr>
+          <p:cNvSpPr txBox="1"/>
+          <p:nvPr/>
+        </p:nvSpPr>
+        <p:spPr>
+          <a:xfrm>
+            <a:off x="1103819" y="140678"/>
+            <a:ext cx="7815329" cy="646331"/>
+          </a:xfrm>
+          <a:prstGeom prst="rect">
+            <a:avLst/>
+          </a:prstGeom>
+          <a:noFill/>
+        </p:spPr>
+        <p:txBody>
+          <a:bodyPr wrap="square" rtlCol="0">
+            <a:spAutoFit/>
+          </a:bodyPr>
+          <a:lstStyle/>
+          <a:p>
+            <a:r>
+              <a:rPr lang="pt-BR" sz="3600" b="1" dirty="0">
+                <a:solidFill>
+                  <a:srgbClr val="002060"/>
+                </a:solidFill>
+                <a:latin typeface="Cambria" panose="02040503050406030204" pitchFamily="18" charset="0"/>
+                <a:ea typeface="Cambria" panose="02040503050406030204" pitchFamily="18" charset="0"/>
+              </a:rPr>
+              <a:t>Luz x Criminalidade</a:t>
+            </a:r>
+          </a:p>
+        </p:txBody>
+      </p:sp>
+      <p:sp>
+        <p:nvSpPr>
+          <p:cNvPr id="9" name="CaixaDeTexto 8">
+            <a:extLst>
+              <a:ext uri="{FF2B5EF4-FFF2-40B4-BE49-F238E27FC236}">
+                <a16:creationId xmlns:a16="http://schemas.microsoft.com/office/drawing/2014/main" id="{4D79014A-3A45-CFD7-AE17-E00E6FC5D783}"/>
+              </a:ext>
+            </a:extLst>
+          </p:cNvPr>
+          <p:cNvSpPr txBox="1"/>
+          <p:nvPr/>
+        </p:nvSpPr>
+        <p:spPr>
+          <a:xfrm>
+            <a:off x="500433" y="1280362"/>
+            <a:ext cx="11191134" cy="1455270"/>
+          </a:xfrm>
+          <a:prstGeom prst="rect">
+            <a:avLst/>
+          </a:prstGeom>
+          <a:noFill/>
+        </p:spPr>
+        <p:txBody>
+          <a:bodyPr wrap="square" rtlCol="0">
+            <a:spAutoFit/>
+          </a:bodyPr>
+          <a:lstStyle/>
+          <a:p>
+            <a:pPr marL="285750" indent="-285750">
+              <a:spcAft>
+                <a:spcPts val="110"/>
+              </a:spcAft>
+              <a:buFont typeface="Wingdings" panose="05000000000000000000" pitchFamily="2" charset="2"/>
+              <a:buChar char="Ø"/>
+            </a:pPr>
+            <a:r>
+              <a:rPr lang="pt-BR" sz="2000" b="1" dirty="0"/>
+              <a:t>Cortes et.al (2021): </a:t>
+            </a:r>
+            <a:r>
+              <a:rPr lang="pt-BR" sz="2000" dirty="0"/>
+              <a:t>regressão descontínua no início do Horário de Verão em Homicídios no RS (Dados do SIM do Ministério da Saúde)</a:t>
+            </a:r>
+          </a:p>
+          <a:p>
+            <a:pPr marL="342900" indent="-342900">
+              <a:spcAft>
+                <a:spcPts val="110"/>
+              </a:spcAft>
+              <a:buFont typeface="Wingdings" panose="05000000000000000000" pitchFamily="2" charset="2"/>
+              <a:buChar char="Ø"/>
+            </a:pPr>
+            <a:endParaRPr lang="pt-BR" sz="2000" b="1" dirty="0"/>
+          </a:p>
+          <a:p>
+            <a:pPr marL="285750" indent="-285750">
+              <a:lnSpc>
+                <a:spcPct val="150000"/>
+              </a:lnSpc>
+              <a:spcAft>
+                <a:spcPts val="110"/>
+              </a:spcAft>
+              <a:buFont typeface="Wingdings" panose="05000000000000000000" pitchFamily="2" charset="2"/>
+              <a:buChar char="Ø"/>
+            </a:pPr>
+            <a:endParaRPr lang="pt-BR" sz="2000" b="1" dirty="0"/>
+          </a:p>
+        </p:txBody>
+      </p:sp>
+      <p:pic>
+        <p:nvPicPr>
+          <p:cNvPr id="5" name="Imagem 4">
+            <a:extLst>
+              <a:ext uri="{FF2B5EF4-FFF2-40B4-BE49-F238E27FC236}">
+                <a16:creationId xmlns:a16="http://schemas.microsoft.com/office/drawing/2014/main" id="{ECE5EC1F-14C5-843E-05EF-98FE5A646D9D}"/>
+              </a:ext>
+            </a:extLst>
+          </p:cNvPr>
+          <p:cNvPicPr>
+            <a:picLocks noChangeAspect="1"/>
+          </p:cNvPicPr>
+          <p:nvPr/>
+        </p:nvPicPr>
+        <p:blipFill>
+          <a:blip r:embed="rId3"/>
+          <a:stretch>
+            <a:fillRect/>
+          </a:stretch>
+        </p:blipFill>
+        <p:spPr>
+          <a:xfrm>
+            <a:off x="500433" y="2278052"/>
+            <a:ext cx="4887007" cy="4439270"/>
+          </a:xfrm>
+          <a:prstGeom prst="rect">
+            <a:avLst/>
+          </a:prstGeom>
+        </p:spPr>
+      </p:pic>
+      <p:pic>
+        <p:nvPicPr>
+          <p:cNvPr id="11" name="Imagem 10">
+            <a:extLst>
+              <a:ext uri="{FF2B5EF4-FFF2-40B4-BE49-F238E27FC236}">
+                <a16:creationId xmlns:a16="http://schemas.microsoft.com/office/drawing/2014/main" id="{7D2F9AF2-3B27-E6C1-5DA5-DAD401A60DEC}"/>
+              </a:ext>
+            </a:extLst>
+          </p:cNvPr>
+          <p:cNvPicPr>
+            <a:picLocks noChangeAspect="1"/>
+          </p:cNvPicPr>
+          <p:nvPr/>
+        </p:nvPicPr>
+        <p:blipFill>
+          <a:blip r:embed="rId4"/>
+          <a:stretch>
+            <a:fillRect/>
+          </a:stretch>
+        </p:blipFill>
+        <p:spPr>
+          <a:xfrm>
+            <a:off x="6694506" y="1774634"/>
+            <a:ext cx="4997061" cy="5083366"/>
+          </a:xfrm>
+          <a:prstGeom prst="rect">
+            <a:avLst/>
+          </a:prstGeom>
+        </p:spPr>
+      </p:pic>
+    </p:spTree>
+    <p:extLst>
+      <p:ext uri="{BB962C8B-B14F-4D97-AF65-F5344CB8AC3E}">
+        <p14:creationId xmlns:p14="http://schemas.microsoft.com/office/powerpoint/2010/main" val="1019914244"/>
+      </p:ext>
+    </p:extLst>
+  </p:cSld>
+  <p:clrMapOvr>
+    <a:masterClrMapping/>
+  </p:clrMapOvr>
+  <mc:AlternateContent xmlns:mc="http://schemas.openxmlformats.org/markup-compatibility/2006" xmlns:p159="http://schemas.microsoft.com/office/powerpoint/2015/09/main">
+    <mc:Choice Requires="p159">
+      <p:transition xmlns:p14="http://schemas.microsoft.com/office/powerpoint/2010/main" spd="slow" p14:dur="1250">
+        <p159:morph option="byObject"/>
+      </p:transition>
+    </mc:Choice>
+    <mc:Fallback xmlns="">
+      <p:transition spd="slow">
+        <p:fade/>
+      </p:transition>
+    </mc:Fallback>
+  </mc:AlternateContent>
+</p:sld>
+</file>
+
+<file path=ppt/slides/slide15.xml><?xml version="1.0" encoding="utf-8"?>
 <p:sld xmlns:a="http://schemas.openxmlformats.org/drawingml/2006/main" xmlns:r="http://schemas.openxmlformats.org/officeDocument/2006/relationships" xmlns:p="http://schemas.openxmlformats.org/presentationml/2006/main">
   <p:cSld>
     <p:spTree>
@@ -9699,7 +10443,7 @@
 </p:sld>
 </file>
 
-<file path=ppt/slides/slide15.xml><?xml version="1.0" encoding="utf-8"?>
+<file path=ppt/slides/slide16.xml><?xml version="1.0" encoding="utf-8"?>
 <p:sld xmlns:a="http://schemas.openxmlformats.org/drawingml/2006/main" xmlns:r="http://schemas.openxmlformats.org/officeDocument/2006/relationships" xmlns:p="http://schemas.openxmlformats.org/presentationml/2006/main">
   <p:cSld>
     <p:spTree>
@@ -9960,7 +10704,7 @@
 </p:sld>
 </file>
 
-<file path=ppt/slides/slide16.xml><?xml version="1.0" encoding="utf-8"?>
+<file path=ppt/slides/slide17.xml><?xml version="1.0" encoding="utf-8"?>
 <p:sld xmlns:a="http://schemas.openxmlformats.org/drawingml/2006/main" xmlns:r="http://schemas.openxmlformats.org/officeDocument/2006/relationships" xmlns:p="http://schemas.openxmlformats.org/presentationml/2006/main">
   <p:cSld>
     <p:spTree>
@@ -13287,222 +14031,6 @@
           </a:extLst>
         </p:spPr>
       </p:pic>
-    </p:spTree>
-    <p:extLst>
-      <p:ext uri="{BB962C8B-B14F-4D97-AF65-F5344CB8AC3E}">
-        <p14:creationId xmlns:p14="http://schemas.microsoft.com/office/powerpoint/2010/main" val="3832149468"/>
-      </p:ext>
-    </p:extLst>
-  </p:cSld>
-  <p:clrMapOvr>
-    <a:masterClrMapping/>
-  </p:clrMapOvr>
-  <mc:AlternateContent xmlns:mc="http://schemas.openxmlformats.org/markup-compatibility/2006" xmlns:p159="http://schemas.microsoft.com/office/powerpoint/2015/09/main">
-    <mc:Choice Requires="p159">
-      <p:transition xmlns:p14="http://schemas.microsoft.com/office/powerpoint/2010/main" spd="slow" p14:dur="1250">
-        <p159:morph option="byObject"/>
-      </p:transition>
-    </mc:Choice>
-    <mc:Fallback xmlns="">
-      <p:transition spd="slow">
-        <p:fade/>
-      </p:transition>
-    </mc:Fallback>
-  </mc:AlternateContent>
-</p:sld>
-</file>
-
-<file path=ppt/slides/slide8.xml><?xml version="1.0" encoding="utf-8"?>
-<p:sld xmlns:a="http://schemas.openxmlformats.org/drawingml/2006/main" xmlns:r="http://schemas.openxmlformats.org/officeDocument/2006/relationships" xmlns:p="http://schemas.openxmlformats.org/presentationml/2006/main">
-  <p:cSld>
-    <p:spTree>
-      <p:nvGrpSpPr>
-        <p:cNvPr id="1" name=""/>
-        <p:cNvGrpSpPr/>
-        <p:nvPr/>
-      </p:nvGrpSpPr>
-      <p:grpSpPr>
-        <a:xfrm>
-          <a:off x="0" y="0"/>
-          <a:ext cx="0" cy="0"/>
-          <a:chOff x="0" y="0"/>
-          <a:chExt cx="0" cy="0"/>
-        </a:xfrm>
-      </p:grpSpPr>
-      <p:cxnSp>
-        <p:nvCxnSpPr>
-          <p:cNvPr id="7" name="Conector reto 6">
-            <a:extLst>
-              <a:ext uri="{FF2B5EF4-FFF2-40B4-BE49-F238E27FC236}">
-                <a16:creationId xmlns:a16="http://schemas.microsoft.com/office/drawing/2014/main" id="{280B8309-4572-4E27-8B6F-D29679313292}"/>
-              </a:ext>
-            </a:extLst>
-          </p:cNvPr>
-          <p:cNvCxnSpPr>
-            <a:cxnSpLocks/>
-          </p:cNvCxnSpPr>
-          <p:nvPr/>
-        </p:nvCxnSpPr>
-        <p:spPr>
-          <a:xfrm>
-            <a:off x="-112541" y="970671"/>
-            <a:ext cx="8328073" cy="0"/>
-          </a:xfrm>
-          <a:prstGeom prst="line">
-            <a:avLst/>
-          </a:prstGeom>
-          <a:ln w="38100"/>
-        </p:spPr>
-        <p:style>
-          <a:lnRef idx="1">
-            <a:schemeClr val="accent1"/>
-          </a:lnRef>
-          <a:fillRef idx="0">
-            <a:schemeClr val="accent1"/>
-          </a:fillRef>
-          <a:effectRef idx="0">
-            <a:schemeClr val="accent1"/>
-          </a:effectRef>
-          <a:fontRef idx="minor">
-            <a:schemeClr val="tx1"/>
-          </a:fontRef>
-        </p:style>
-      </p:cxnSp>
-      <p:sp>
-        <p:nvSpPr>
-          <p:cNvPr id="8" name="CaixaDeTexto 7">
-            <a:extLst>
-              <a:ext uri="{FF2B5EF4-FFF2-40B4-BE49-F238E27FC236}">
-                <a16:creationId xmlns:a16="http://schemas.microsoft.com/office/drawing/2014/main" id="{39AE06C5-34BE-4D68-97C3-4C07702C2DF6}"/>
-              </a:ext>
-            </a:extLst>
-          </p:cNvPr>
-          <p:cNvSpPr txBox="1"/>
-          <p:nvPr/>
-        </p:nvSpPr>
-        <p:spPr>
-          <a:xfrm>
-            <a:off x="249836" y="200638"/>
-            <a:ext cx="11692327" cy="584775"/>
-          </a:xfrm>
-          <a:prstGeom prst="rect">
-            <a:avLst/>
-          </a:prstGeom>
-          <a:noFill/>
-        </p:spPr>
-        <p:txBody>
-          <a:bodyPr wrap="square" rtlCol="0">
-            <a:spAutoFit/>
-          </a:bodyPr>
-          <a:lstStyle/>
-          <a:p>
-            <a:r>
-              <a:rPr lang="pt-BR" sz="3200" b="1" dirty="0">
-                <a:solidFill>
-                  <a:srgbClr val="002060"/>
-                </a:solidFill>
-                <a:latin typeface="Cambria" panose="02040503050406030204" pitchFamily="18" charset="0"/>
-                <a:ea typeface="Cambria" panose="02040503050406030204" pitchFamily="18" charset="0"/>
-              </a:rPr>
-              <a:t>Panorama RS à Luz dos Dados públicos disponíveis da SSP-RS</a:t>
-            </a:r>
-          </a:p>
-        </p:txBody>
-      </p:sp>
-      <p:pic>
-        <p:nvPicPr>
-          <p:cNvPr id="2" name="Picture 2" descr="UFRGS na Serra | Visão de futuro e coragem para inovar">
-            <a:extLst>
-              <a:ext uri="{FF2B5EF4-FFF2-40B4-BE49-F238E27FC236}">
-                <a16:creationId xmlns:a16="http://schemas.microsoft.com/office/drawing/2014/main" id="{567C8E3D-C535-EC50-849C-270CEB4B8A04}"/>
-              </a:ext>
-            </a:extLst>
-          </p:cNvPr>
-          <p:cNvPicPr>
-            <a:picLocks noChangeAspect="1" noChangeArrowheads="1"/>
-          </p:cNvPicPr>
-          <p:nvPr/>
-        </p:nvPicPr>
-        <p:blipFill>
-          <a:blip r:embed="rId3">
-            <a:extLst>
-              <a:ext uri="{28A0092B-C50C-407E-A947-70E740481C1C}">
-                <a14:useLocalDpi xmlns:a14="http://schemas.microsoft.com/office/drawing/2010/main" val="0"/>
-              </a:ext>
-            </a:extLst>
-          </a:blip>
-          <a:srcRect/>
-          <a:stretch>
-            <a:fillRect/>
-          </a:stretch>
-        </p:blipFill>
-        <p:spPr bwMode="auto">
-          <a:xfrm>
-            <a:off x="119922" y="6346096"/>
-            <a:ext cx="683614" cy="445109"/>
-          </a:xfrm>
-          <a:prstGeom prst="rect">
-            <a:avLst/>
-          </a:prstGeom>
-          <a:noFill/>
-          <a:extLst>
-            <a:ext uri="{909E8E84-426E-40DD-AFC4-6F175D3DCCD1}">
-              <a14:hiddenFill xmlns:a14="http://schemas.microsoft.com/office/drawing/2010/main">
-                <a:solidFill>
-                  <a:srgbClr val="FFFFFF"/>
-                </a:solidFill>
-              </a14:hiddenFill>
-            </a:ext>
-          </a:extLst>
-        </p:spPr>
-      </p:pic>
-      <p:pic>
-        <p:nvPicPr>
-          <p:cNvPr id="3" name="Picture 4">
-            <a:extLst>
-              <a:ext uri="{FF2B5EF4-FFF2-40B4-BE49-F238E27FC236}">
-                <a16:creationId xmlns:a16="http://schemas.microsoft.com/office/drawing/2014/main" id="{C9663204-9A6C-C5D7-7C9B-AAF5653911D6}"/>
-              </a:ext>
-            </a:extLst>
-          </p:cNvPr>
-          <p:cNvPicPr>
-            <a:picLocks noChangeAspect="1" noChangeArrowheads="1"/>
-          </p:cNvPicPr>
-          <p:nvPr/>
-        </p:nvPicPr>
-        <p:blipFill>
-          <a:blip r:embed="rId4">
-            <a:extLst>
-              <a:ext uri="{28A0092B-C50C-407E-A947-70E740481C1C}">
-                <a14:useLocalDpi xmlns:a14="http://schemas.microsoft.com/office/drawing/2010/main" val="0"/>
-              </a:ext>
-            </a:extLst>
-          </a:blip>
-          <a:srcRect/>
-          <a:stretch>
-            <a:fillRect/>
-          </a:stretch>
-        </p:blipFill>
-        <p:spPr bwMode="auto">
-          <a:xfrm>
-            <a:off x="10802599" y="6212508"/>
-            <a:ext cx="1329440" cy="578697"/>
-          </a:xfrm>
-          <a:prstGeom prst="rect">
-            <a:avLst/>
-          </a:prstGeom>
-          <a:noFill/>
-          <a:extLst>
-            <a:ext uri="{909E8E84-426E-40DD-AFC4-6F175D3DCCD1}">
-              <a14:hiddenFill xmlns:a14="http://schemas.microsoft.com/office/drawing/2010/main">
-                <a:solidFill>
-                  <a:srgbClr val="FFFFFF"/>
-                </a:solidFill>
-              </a14:hiddenFill>
-            </a:ext>
-          </a:extLst>
-        </p:spPr>
-      </p:pic>
       <p:sp>
         <p:nvSpPr>
           <p:cNvPr id="4" name="CaixaDeTexto 3">
@@ -13707,6 +14235,64 @@
           </a:prstGeom>
         </p:spPr>
       </p:pic>
+      <p:sp>
+        <p:nvSpPr>
+          <p:cNvPr id="16" name="CaixaDeTexto 15">
+            <a:extLst>
+              <a:ext uri="{FF2B5EF4-FFF2-40B4-BE49-F238E27FC236}">
+                <a16:creationId xmlns:a16="http://schemas.microsoft.com/office/drawing/2014/main" id="{B5C85418-58C3-73C3-56E1-05082A43A7EA}"/>
+              </a:ext>
+            </a:extLst>
+          </p:cNvPr>
+          <p:cNvSpPr txBox="1"/>
+          <p:nvPr/>
+        </p:nvSpPr>
+        <p:spPr>
+          <a:xfrm>
+            <a:off x="940904" y="5993852"/>
+            <a:ext cx="9597182" cy="707886"/>
+          </a:xfrm>
+          <a:prstGeom prst="rect">
+            <a:avLst/>
+          </a:prstGeom>
+          <a:noFill/>
+        </p:spPr>
+        <p:txBody>
+          <a:bodyPr wrap="square" rtlCol="0">
+            <a:spAutoFit/>
+          </a:bodyPr>
+          <a:lstStyle/>
+          <a:p>
+            <a:pPr marL="285750" indent="-285750">
+              <a:spcAft>
+                <a:spcPts val="110"/>
+              </a:spcAft>
+              <a:buFont typeface="Wingdings" panose="05000000000000000000" pitchFamily="2" charset="2"/>
+              <a:buChar char="Ø"/>
+            </a:pPr>
+            <a:r>
+              <a:rPr lang="pt-BR" sz="2000" b="1" dirty="0"/>
+              <a:t>Possíveis solução: taxas com agregação espacial/temporal, taxas bayesianas (como </a:t>
+            </a:r>
+            <a:r>
+              <a:rPr lang="pt-BR" sz="2000" b="1" dirty="0" err="1"/>
+              <a:t>Empirical</a:t>
+            </a:r>
+            <a:r>
+              <a:rPr lang="pt-BR" sz="2000" b="1" dirty="0"/>
+              <a:t> </a:t>
+            </a:r>
+            <a:r>
+              <a:rPr lang="pt-BR" sz="2000" b="1" dirty="0" err="1"/>
+              <a:t>Bayes</a:t>
+            </a:r>
+            <a:r>
+              <a:rPr lang="pt-BR" sz="2000" b="1" dirty="0"/>
+              <a:t> ou BYM), etc. </a:t>
+            </a:r>
+          </a:p>
+        </p:txBody>
+      </p:sp>
     </p:spTree>
     <p:extLst>
       <p:ext uri="{BB962C8B-B14F-4D97-AF65-F5344CB8AC3E}">
@@ -13729,6 +14315,1024 @@
       </p:transition>
     </mc:Fallback>
   </mc:AlternateContent>
+  <p:timing>
+    <p:tnLst>
+      <p:par>
+        <p:cTn id="1" dur="indefinite" restart="never" nodeType="tmRoot">
+          <p:childTnLst>
+            <p:seq concurrent="1" nextAc="seek">
+              <p:cTn id="2" dur="indefinite" nodeType="mainSeq">
+                <p:childTnLst>
+                  <p:par>
+                    <p:cTn id="3" fill="hold">
+                      <p:stCondLst>
+                        <p:cond delay="indefinite"/>
+                      </p:stCondLst>
+                      <p:childTnLst>
+                        <p:par>
+                          <p:cTn id="4" fill="hold">
+                            <p:stCondLst>
+                              <p:cond delay="0"/>
+                            </p:stCondLst>
+                            <p:childTnLst>
+                              <p:par>
+                                <p:cTn id="5" presetID="42" presetClass="entr" presetSubtype="0" fill="hold" nodeType="clickEffect">
+                                  <p:stCondLst>
+                                    <p:cond delay="0"/>
+                                  </p:stCondLst>
+                                  <p:childTnLst>
+                                    <p:set>
+                                      <p:cBhvr>
+                                        <p:cTn id="6" dur="1" fill="hold">
+                                          <p:stCondLst>
+                                            <p:cond delay="0"/>
+                                          </p:stCondLst>
+                                        </p:cTn>
+                                        <p:tgtEl>
+                                          <p:spTgt spid="6"/>
+                                        </p:tgtEl>
+                                        <p:attrNameLst>
+                                          <p:attrName>style.visibility</p:attrName>
+                                        </p:attrNameLst>
+                                      </p:cBhvr>
+                                      <p:to>
+                                        <p:strVal val="visible"/>
+                                      </p:to>
+                                    </p:set>
+                                    <p:animEffect transition="in" filter="fade">
+                                      <p:cBhvr>
+                                        <p:cTn id="7" dur="1000"/>
+                                        <p:tgtEl>
+                                          <p:spTgt spid="6"/>
+                                        </p:tgtEl>
+                                      </p:cBhvr>
+                                    </p:animEffect>
+                                    <p:anim calcmode="lin" valueType="num">
+                                      <p:cBhvr>
+                                        <p:cTn id="8" dur="1000" fill="hold"/>
+                                        <p:tgtEl>
+                                          <p:spTgt spid="6"/>
+                                        </p:tgtEl>
+                                        <p:attrNameLst>
+                                          <p:attrName>ppt_x</p:attrName>
+                                        </p:attrNameLst>
+                                      </p:cBhvr>
+                                      <p:tavLst>
+                                        <p:tav tm="0">
+                                          <p:val>
+                                            <p:strVal val="#ppt_x"/>
+                                          </p:val>
+                                        </p:tav>
+                                        <p:tav tm="100000">
+                                          <p:val>
+                                            <p:strVal val="#ppt_x"/>
+                                          </p:val>
+                                        </p:tav>
+                                      </p:tavLst>
+                                    </p:anim>
+                                    <p:anim calcmode="lin" valueType="num">
+                                      <p:cBhvr>
+                                        <p:cTn id="9" dur="1000" fill="hold"/>
+                                        <p:tgtEl>
+                                          <p:spTgt spid="6"/>
+                                        </p:tgtEl>
+                                        <p:attrNameLst>
+                                          <p:attrName>ppt_y</p:attrName>
+                                        </p:attrNameLst>
+                                      </p:cBhvr>
+                                      <p:tavLst>
+                                        <p:tav tm="0">
+                                          <p:val>
+                                            <p:strVal val="#ppt_y+.1"/>
+                                          </p:val>
+                                        </p:tav>
+                                        <p:tav tm="100000">
+                                          <p:val>
+                                            <p:strVal val="#ppt_y"/>
+                                          </p:val>
+                                        </p:tav>
+                                      </p:tavLst>
+                                    </p:anim>
+                                  </p:childTnLst>
+                                </p:cTn>
+                              </p:par>
+                            </p:childTnLst>
+                          </p:cTn>
+                        </p:par>
+                      </p:childTnLst>
+                    </p:cTn>
+                  </p:par>
+                  <p:par>
+                    <p:cTn id="10" fill="hold">
+                      <p:stCondLst>
+                        <p:cond delay="indefinite"/>
+                      </p:stCondLst>
+                      <p:childTnLst>
+                        <p:par>
+                          <p:cTn id="11" fill="hold">
+                            <p:stCondLst>
+                              <p:cond delay="0"/>
+                            </p:stCondLst>
+                            <p:childTnLst>
+                              <p:par>
+                                <p:cTn id="12" presetID="42" presetClass="entr" presetSubtype="0" fill="hold" grpId="0" nodeType="clickEffect">
+                                  <p:stCondLst>
+                                    <p:cond delay="0"/>
+                                  </p:stCondLst>
+                                  <p:childTnLst>
+                                    <p:set>
+                                      <p:cBhvr>
+                                        <p:cTn id="13" dur="1" fill="hold">
+                                          <p:stCondLst>
+                                            <p:cond delay="0"/>
+                                          </p:stCondLst>
+                                        </p:cTn>
+                                        <p:tgtEl>
+                                          <p:spTgt spid="12"/>
+                                        </p:tgtEl>
+                                        <p:attrNameLst>
+                                          <p:attrName>style.visibility</p:attrName>
+                                        </p:attrNameLst>
+                                      </p:cBhvr>
+                                      <p:to>
+                                        <p:strVal val="visible"/>
+                                      </p:to>
+                                    </p:set>
+                                    <p:animEffect transition="in" filter="fade">
+                                      <p:cBhvr>
+                                        <p:cTn id="14" dur="1000"/>
+                                        <p:tgtEl>
+                                          <p:spTgt spid="12"/>
+                                        </p:tgtEl>
+                                      </p:cBhvr>
+                                    </p:animEffect>
+                                    <p:anim calcmode="lin" valueType="num">
+                                      <p:cBhvr>
+                                        <p:cTn id="15" dur="1000" fill="hold"/>
+                                        <p:tgtEl>
+                                          <p:spTgt spid="12"/>
+                                        </p:tgtEl>
+                                        <p:attrNameLst>
+                                          <p:attrName>ppt_x</p:attrName>
+                                        </p:attrNameLst>
+                                      </p:cBhvr>
+                                      <p:tavLst>
+                                        <p:tav tm="0">
+                                          <p:val>
+                                            <p:strVal val="#ppt_x"/>
+                                          </p:val>
+                                        </p:tav>
+                                        <p:tav tm="100000">
+                                          <p:val>
+                                            <p:strVal val="#ppt_x"/>
+                                          </p:val>
+                                        </p:tav>
+                                      </p:tavLst>
+                                    </p:anim>
+                                    <p:anim calcmode="lin" valueType="num">
+                                      <p:cBhvr>
+                                        <p:cTn id="16" dur="1000" fill="hold"/>
+                                        <p:tgtEl>
+                                          <p:spTgt spid="12"/>
+                                        </p:tgtEl>
+                                        <p:attrNameLst>
+                                          <p:attrName>ppt_y</p:attrName>
+                                        </p:attrNameLst>
+                                      </p:cBhvr>
+                                      <p:tavLst>
+                                        <p:tav tm="0">
+                                          <p:val>
+                                            <p:strVal val="#ppt_y+.1"/>
+                                          </p:val>
+                                        </p:tav>
+                                        <p:tav tm="100000">
+                                          <p:val>
+                                            <p:strVal val="#ppt_y"/>
+                                          </p:val>
+                                        </p:tav>
+                                      </p:tavLst>
+                                    </p:anim>
+                                  </p:childTnLst>
+                                </p:cTn>
+                              </p:par>
+                              <p:par>
+                                <p:cTn id="17" presetID="42" presetClass="entr" presetSubtype="0" fill="hold" grpId="0" nodeType="withEffect">
+                                  <p:stCondLst>
+                                    <p:cond delay="0"/>
+                                  </p:stCondLst>
+                                  <p:childTnLst>
+                                    <p:set>
+                                      <p:cBhvr>
+                                        <p:cTn id="18" dur="1" fill="hold">
+                                          <p:stCondLst>
+                                            <p:cond delay="0"/>
+                                          </p:stCondLst>
+                                        </p:cTn>
+                                        <p:tgtEl>
+                                          <p:spTgt spid="13"/>
+                                        </p:tgtEl>
+                                        <p:attrNameLst>
+                                          <p:attrName>style.visibility</p:attrName>
+                                        </p:attrNameLst>
+                                      </p:cBhvr>
+                                      <p:to>
+                                        <p:strVal val="visible"/>
+                                      </p:to>
+                                    </p:set>
+                                    <p:animEffect transition="in" filter="fade">
+                                      <p:cBhvr>
+                                        <p:cTn id="19" dur="1000"/>
+                                        <p:tgtEl>
+                                          <p:spTgt spid="13"/>
+                                        </p:tgtEl>
+                                      </p:cBhvr>
+                                    </p:animEffect>
+                                    <p:anim calcmode="lin" valueType="num">
+                                      <p:cBhvr>
+                                        <p:cTn id="20" dur="1000" fill="hold"/>
+                                        <p:tgtEl>
+                                          <p:spTgt spid="13"/>
+                                        </p:tgtEl>
+                                        <p:attrNameLst>
+                                          <p:attrName>ppt_x</p:attrName>
+                                        </p:attrNameLst>
+                                      </p:cBhvr>
+                                      <p:tavLst>
+                                        <p:tav tm="0">
+                                          <p:val>
+                                            <p:strVal val="#ppt_x"/>
+                                          </p:val>
+                                        </p:tav>
+                                        <p:tav tm="100000">
+                                          <p:val>
+                                            <p:strVal val="#ppt_x"/>
+                                          </p:val>
+                                        </p:tav>
+                                      </p:tavLst>
+                                    </p:anim>
+                                    <p:anim calcmode="lin" valueType="num">
+                                      <p:cBhvr>
+                                        <p:cTn id="21" dur="1000" fill="hold"/>
+                                        <p:tgtEl>
+                                          <p:spTgt spid="13"/>
+                                        </p:tgtEl>
+                                        <p:attrNameLst>
+                                          <p:attrName>ppt_y</p:attrName>
+                                        </p:attrNameLst>
+                                      </p:cBhvr>
+                                      <p:tavLst>
+                                        <p:tav tm="0">
+                                          <p:val>
+                                            <p:strVal val="#ppt_y+.1"/>
+                                          </p:val>
+                                        </p:tav>
+                                        <p:tav tm="100000">
+                                          <p:val>
+                                            <p:strVal val="#ppt_y"/>
+                                          </p:val>
+                                        </p:tav>
+                                      </p:tavLst>
+                                    </p:anim>
+                                  </p:childTnLst>
+                                </p:cTn>
+                              </p:par>
+                              <p:par>
+                                <p:cTn id="22" presetID="42" presetClass="entr" presetSubtype="0" fill="hold" nodeType="withEffect">
+                                  <p:stCondLst>
+                                    <p:cond delay="0"/>
+                                  </p:stCondLst>
+                                  <p:childTnLst>
+                                    <p:set>
+                                      <p:cBhvr>
+                                        <p:cTn id="23" dur="1" fill="hold">
+                                          <p:stCondLst>
+                                            <p:cond delay="0"/>
+                                          </p:stCondLst>
+                                        </p:cTn>
+                                        <p:tgtEl>
+                                          <p:spTgt spid="15"/>
+                                        </p:tgtEl>
+                                        <p:attrNameLst>
+                                          <p:attrName>style.visibility</p:attrName>
+                                        </p:attrNameLst>
+                                      </p:cBhvr>
+                                      <p:to>
+                                        <p:strVal val="visible"/>
+                                      </p:to>
+                                    </p:set>
+                                    <p:animEffect transition="in" filter="fade">
+                                      <p:cBhvr>
+                                        <p:cTn id="24" dur="1000"/>
+                                        <p:tgtEl>
+                                          <p:spTgt spid="15"/>
+                                        </p:tgtEl>
+                                      </p:cBhvr>
+                                    </p:animEffect>
+                                    <p:anim calcmode="lin" valueType="num">
+                                      <p:cBhvr>
+                                        <p:cTn id="25" dur="1000" fill="hold"/>
+                                        <p:tgtEl>
+                                          <p:spTgt spid="15"/>
+                                        </p:tgtEl>
+                                        <p:attrNameLst>
+                                          <p:attrName>ppt_x</p:attrName>
+                                        </p:attrNameLst>
+                                      </p:cBhvr>
+                                      <p:tavLst>
+                                        <p:tav tm="0">
+                                          <p:val>
+                                            <p:strVal val="#ppt_x"/>
+                                          </p:val>
+                                        </p:tav>
+                                        <p:tav tm="100000">
+                                          <p:val>
+                                            <p:strVal val="#ppt_x"/>
+                                          </p:val>
+                                        </p:tav>
+                                      </p:tavLst>
+                                    </p:anim>
+                                    <p:anim calcmode="lin" valueType="num">
+                                      <p:cBhvr>
+                                        <p:cTn id="26" dur="1000" fill="hold"/>
+                                        <p:tgtEl>
+                                          <p:spTgt spid="15"/>
+                                        </p:tgtEl>
+                                        <p:attrNameLst>
+                                          <p:attrName>ppt_y</p:attrName>
+                                        </p:attrNameLst>
+                                      </p:cBhvr>
+                                      <p:tavLst>
+                                        <p:tav tm="0">
+                                          <p:val>
+                                            <p:strVal val="#ppt_y+.1"/>
+                                          </p:val>
+                                        </p:tav>
+                                        <p:tav tm="100000">
+                                          <p:val>
+                                            <p:strVal val="#ppt_y"/>
+                                          </p:val>
+                                        </p:tav>
+                                      </p:tavLst>
+                                    </p:anim>
+                                  </p:childTnLst>
+                                </p:cTn>
+                              </p:par>
+                            </p:childTnLst>
+                          </p:cTn>
+                        </p:par>
+                      </p:childTnLst>
+                    </p:cTn>
+                  </p:par>
+                  <p:par>
+                    <p:cTn id="27" fill="hold">
+                      <p:stCondLst>
+                        <p:cond delay="indefinite"/>
+                      </p:stCondLst>
+                      <p:childTnLst>
+                        <p:par>
+                          <p:cTn id="28" fill="hold">
+                            <p:stCondLst>
+                              <p:cond delay="0"/>
+                            </p:stCondLst>
+                            <p:childTnLst>
+                              <p:par>
+                                <p:cTn id="29" presetID="42" presetClass="entr" presetSubtype="0" fill="hold" grpId="0" nodeType="clickEffect">
+                                  <p:stCondLst>
+                                    <p:cond delay="0"/>
+                                  </p:stCondLst>
+                                  <p:childTnLst>
+                                    <p:set>
+                                      <p:cBhvr>
+                                        <p:cTn id="30" dur="1" fill="hold">
+                                          <p:stCondLst>
+                                            <p:cond delay="0"/>
+                                          </p:stCondLst>
+                                        </p:cTn>
+                                        <p:tgtEl>
+                                          <p:spTgt spid="16"/>
+                                        </p:tgtEl>
+                                        <p:attrNameLst>
+                                          <p:attrName>style.visibility</p:attrName>
+                                        </p:attrNameLst>
+                                      </p:cBhvr>
+                                      <p:to>
+                                        <p:strVal val="visible"/>
+                                      </p:to>
+                                    </p:set>
+                                    <p:animEffect transition="in" filter="fade">
+                                      <p:cBhvr>
+                                        <p:cTn id="31" dur="1000"/>
+                                        <p:tgtEl>
+                                          <p:spTgt spid="16"/>
+                                        </p:tgtEl>
+                                      </p:cBhvr>
+                                    </p:animEffect>
+                                    <p:anim calcmode="lin" valueType="num">
+                                      <p:cBhvr>
+                                        <p:cTn id="32" dur="1000" fill="hold"/>
+                                        <p:tgtEl>
+                                          <p:spTgt spid="16"/>
+                                        </p:tgtEl>
+                                        <p:attrNameLst>
+                                          <p:attrName>ppt_x</p:attrName>
+                                        </p:attrNameLst>
+                                      </p:cBhvr>
+                                      <p:tavLst>
+                                        <p:tav tm="0">
+                                          <p:val>
+                                            <p:strVal val="#ppt_x"/>
+                                          </p:val>
+                                        </p:tav>
+                                        <p:tav tm="100000">
+                                          <p:val>
+                                            <p:strVal val="#ppt_x"/>
+                                          </p:val>
+                                        </p:tav>
+                                      </p:tavLst>
+                                    </p:anim>
+                                    <p:anim calcmode="lin" valueType="num">
+                                      <p:cBhvr>
+                                        <p:cTn id="33" dur="1000" fill="hold"/>
+                                        <p:tgtEl>
+                                          <p:spTgt spid="16"/>
+                                        </p:tgtEl>
+                                        <p:attrNameLst>
+                                          <p:attrName>ppt_y</p:attrName>
+                                        </p:attrNameLst>
+                                      </p:cBhvr>
+                                      <p:tavLst>
+                                        <p:tav tm="0">
+                                          <p:val>
+                                            <p:strVal val="#ppt_y+.1"/>
+                                          </p:val>
+                                        </p:tav>
+                                        <p:tav tm="100000">
+                                          <p:val>
+                                            <p:strVal val="#ppt_y"/>
+                                          </p:val>
+                                        </p:tav>
+                                      </p:tavLst>
+                                    </p:anim>
+                                  </p:childTnLst>
+                                </p:cTn>
+                              </p:par>
+                            </p:childTnLst>
+                          </p:cTn>
+                        </p:par>
+                      </p:childTnLst>
+                    </p:cTn>
+                  </p:par>
+                </p:childTnLst>
+              </p:cTn>
+              <p:prevCondLst>
+                <p:cond evt="onPrev" delay="0">
+                  <p:tgtEl>
+                    <p:sldTgt/>
+                  </p:tgtEl>
+                </p:cond>
+              </p:prevCondLst>
+              <p:nextCondLst>
+                <p:cond evt="onNext" delay="0">
+                  <p:tgtEl>
+                    <p:sldTgt/>
+                  </p:tgtEl>
+                </p:cond>
+              </p:nextCondLst>
+            </p:seq>
+          </p:childTnLst>
+        </p:cTn>
+      </p:par>
+    </p:tnLst>
+    <p:bldLst>
+      <p:bldP spid="12" grpId="0" animBg="1"/>
+      <p:bldP spid="13" grpId="0" animBg="1"/>
+      <p:bldP spid="16" grpId="0"/>
+    </p:bldLst>
+  </p:timing>
+</p:sld>
+</file>
+
+<file path=ppt/slides/slide8.xml><?xml version="1.0" encoding="utf-8"?>
+<p:sld xmlns:a="http://schemas.openxmlformats.org/drawingml/2006/main" xmlns:r="http://schemas.openxmlformats.org/officeDocument/2006/relationships" xmlns:p="http://schemas.openxmlformats.org/presentationml/2006/main">
+  <p:cSld>
+    <p:spTree>
+      <p:nvGrpSpPr>
+        <p:cNvPr id="1" name=""/>
+        <p:cNvGrpSpPr/>
+        <p:nvPr/>
+      </p:nvGrpSpPr>
+      <p:grpSpPr>
+        <a:xfrm>
+          <a:off x="0" y="0"/>
+          <a:ext cx="0" cy="0"/>
+          <a:chOff x="0" y="0"/>
+          <a:chExt cx="0" cy="0"/>
+        </a:xfrm>
+      </p:grpSpPr>
+      <p:cxnSp>
+        <p:nvCxnSpPr>
+          <p:cNvPr id="7" name="Conector reto 6">
+            <a:extLst>
+              <a:ext uri="{FF2B5EF4-FFF2-40B4-BE49-F238E27FC236}">
+                <a16:creationId xmlns:a16="http://schemas.microsoft.com/office/drawing/2014/main" id="{280B8309-4572-4E27-8B6F-D29679313292}"/>
+              </a:ext>
+            </a:extLst>
+          </p:cNvPr>
+          <p:cNvCxnSpPr>
+            <a:cxnSpLocks/>
+          </p:cNvCxnSpPr>
+          <p:nvPr/>
+        </p:nvCxnSpPr>
+        <p:spPr>
+          <a:xfrm>
+            <a:off x="-112541" y="970671"/>
+            <a:ext cx="8328073" cy="0"/>
+          </a:xfrm>
+          <a:prstGeom prst="line">
+            <a:avLst/>
+          </a:prstGeom>
+          <a:ln w="38100"/>
+        </p:spPr>
+        <p:style>
+          <a:lnRef idx="1">
+            <a:schemeClr val="accent1"/>
+          </a:lnRef>
+          <a:fillRef idx="0">
+            <a:schemeClr val="accent1"/>
+          </a:fillRef>
+          <a:effectRef idx="0">
+            <a:schemeClr val="accent1"/>
+          </a:effectRef>
+          <a:fontRef idx="minor">
+            <a:schemeClr val="tx1"/>
+          </a:fontRef>
+        </p:style>
+      </p:cxnSp>
+      <p:sp>
+        <p:nvSpPr>
+          <p:cNvPr id="8" name="CaixaDeTexto 7">
+            <a:extLst>
+              <a:ext uri="{FF2B5EF4-FFF2-40B4-BE49-F238E27FC236}">
+                <a16:creationId xmlns:a16="http://schemas.microsoft.com/office/drawing/2014/main" id="{39AE06C5-34BE-4D68-97C3-4C07702C2DF6}"/>
+              </a:ext>
+            </a:extLst>
+          </p:cNvPr>
+          <p:cNvSpPr txBox="1"/>
+          <p:nvPr/>
+        </p:nvSpPr>
+        <p:spPr>
+          <a:xfrm>
+            <a:off x="249836" y="200638"/>
+            <a:ext cx="11692327" cy="584775"/>
+          </a:xfrm>
+          <a:prstGeom prst="rect">
+            <a:avLst/>
+          </a:prstGeom>
+          <a:noFill/>
+        </p:spPr>
+        <p:txBody>
+          <a:bodyPr wrap="square" rtlCol="0">
+            <a:spAutoFit/>
+          </a:bodyPr>
+          <a:lstStyle/>
+          <a:p>
+            <a:r>
+              <a:rPr lang="pt-BR" sz="3200" b="1" dirty="0">
+                <a:solidFill>
+                  <a:srgbClr val="002060"/>
+                </a:solidFill>
+                <a:latin typeface="Cambria" panose="02040503050406030204" pitchFamily="18" charset="0"/>
+                <a:ea typeface="Cambria" panose="02040503050406030204" pitchFamily="18" charset="0"/>
+              </a:rPr>
+              <a:t>Panorama RS à Luz dos Dados públicos disponíveis da SSP-RS</a:t>
+            </a:r>
+          </a:p>
+        </p:txBody>
+      </p:sp>
+      <p:pic>
+        <p:nvPicPr>
+          <p:cNvPr id="6" name="Imagem 5">
+            <a:extLst>
+              <a:ext uri="{FF2B5EF4-FFF2-40B4-BE49-F238E27FC236}">
+                <a16:creationId xmlns:a16="http://schemas.microsoft.com/office/drawing/2014/main" id="{9FA44AA4-873C-9384-BBCC-5F18798D8247}"/>
+              </a:ext>
+            </a:extLst>
+          </p:cNvPr>
+          <p:cNvPicPr>
+            <a:picLocks noChangeAspect="1"/>
+          </p:cNvPicPr>
+          <p:nvPr/>
+        </p:nvPicPr>
+        <p:blipFill>
+          <a:blip r:embed="rId3"/>
+          <a:stretch>
+            <a:fillRect/>
+          </a:stretch>
+        </p:blipFill>
+        <p:spPr>
+          <a:xfrm>
+            <a:off x="202220" y="1827378"/>
+            <a:ext cx="5649460" cy="4059951"/>
+          </a:xfrm>
+          <a:prstGeom prst="rect">
+            <a:avLst/>
+          </a:prstGeom>
+        </p:spPr>
+      </p:pic>
+      <p:sp>
+        <p:nvSpPr>
+          <p:cNvPr id="14" name="CaixaDeTexto 13">
+            <a:extLst>
+              <a:ext uri="{FF2B5EF4-FFF2-40B4-BE49-F238E27FC236}">
+                <a16:creationId xmlns:a16="http://schemas.microsoft.com/office/drawing/2014/main" id="{2D353D8D-8D89-B5D0-0B0D-DBD360319F04}"/>
+              </a:ext>
+            </a:extLst>
+          </p:cNvPr>
+          <p:cNvSpPr txBox="1"/>
+          <p:nvPr/>
+        </p:nvSpPr>
+        <p:spPr>
+          <a:xfrm>
+            <a:off x="202220" y="1164194"/>
+            <a:ext cx="6153462" cy="506292"/>
+          </a:xfrm>
+          <a:prstGeom prst="rect">
+            <a:avLst/>
+          </a:prstGeom>
+          <a:noFill/>
+        </p:spPr>
+        <p:txBody>
+          <a:bodyPr wrap="square">
+            <a:spAutoFit/>
+          </a:bodyPr>
+          <a:lstStyle/>
+          <a:p>
+            <a:pPr marL="285750" indent="-285750">
+              <a:lnSpc>
+                <a:spcPct val="150000"/>
+              </a:lnSpc>
+              <a:spcAft>
+                <a:spcPts val="110"/>
+              </a:spcAft>
+              <a:buFont typeface="Wingdings" panose="05000000000000000000" pitchFamily="2" charset="2"/>
+              <a:buChar char="Ø"/>
+            </a:pPr>
+            <a:r>
+              <a:rPr lang="pt-BR" sz="2000" b="1" dirty="0"/>
+              <a:t>Autocorrelação espacial forte em Roubo de Veículos</a:t>
+            </a:r>
+          </a:p>
+        </p:txBody>
+      </p:sp>
+      <p:sp>
+        <p:nvSpPr>
+          <p:cNvPr id="16" name="CaixaDeTexto 15">
+            <a:extLst>
+              <a:ext uri="{FF2B5EF4-FFF2-40B4-BE49-F238E27FC236}">
+                <a16:creationId xmlns:a16="http://schemas.microsoft.com/office/drawing/2014/main" id="{E59EF19D-2CB3-BEA7-2B76-4879D130E732}"/>
+              </a:ext>
+            </a:extLst>
+          </p:cNvPr>
+          <p:cNvSpPr txBox="1"/>
+          <p:nvPr/>
+        </p:nvSpPr>
+        <p:spPr>
+          <a:xfrm>
+            <a:off x="281251" y="6062324"/>
+            <a:ext cx="5491397" cy="707886"/>
+          </a:xfrm>
+          <a:prstGeom prst="rect">
+            <a:avLst/>
+          </a:prstGeom>
+          <a:noFill/>
+        </p:spPr>
+        <p:txBody>
+          <a:bodyPr wrap="square">
+            <a:spAutoFit/>
+          </a:bodyPr>
+          <a:lstStyle/>
+          <a:p>
+            <a:pPr marL="285750" indent="-285750">
+              <a:buFont typeface="Wingdings" panose="05000000000000000000" pitchFamily="2" charset="2"/>
+              <a:buChar char="Ø"/>
+            </a:pPr>
+            <a:r>
+              <a:rPr lang="pt-BR" sz="2000" b="1" dirty="0"/>
+              <a:t>Mancha na região metropolitana: mercado de desmanches?</a:t>
+            </a:r>
+          </a:p>
+        </p:txBody>
+      </p:sp>
+      <p:pic>
+        <p:nvPicPr>
+          <p:cNvPr id="18" name="Imagem 17">
+            <a:extLst>
+              <a:ext uri="{FF2B5EF4-FFF2-40B4-BE49-F238E27FC236}">
+                <a16:creationId xmlns:a16="http://schemas.microsoft.com/office/drawing/2014/main" id="{E7C5C5E8-BDC7-6A56-284B-4BA81B6ED2B4}"/>
+              </a:ext>
+            </a:extLst>
+          </p:cNvPr>
+          <p:cNvPicPr>
+            <a:picLocks noChangeAspect="1"/>
+          </p:cNvPicPr>
+          <p:nvPr/>
+        </p:nvPicPr>
+        <p:blipFill>
+          <a:blip r:embed="rId4"/>
+          <a:stretch>
+            <a:fillRect/>
+          </a:stretch>
+        </p:blipFill>
+        <p:spPr>
+          <a:xfrm>
+            <a:off x="6158224" y="1155930"/>
+            <a:ext cx="5741697" cy="3768204"/>
+          </a:xfrm>
+          <a:prstGeom prst="rect">
+            <a:avLst/>
+          </a:prstGeom>
+        </p:spPr>
+      </p:pic>
+      <p:sp>
+        <p:nvSpPr>
+          <p:cNvPr id="19" name="CaixaDeTexto 18">
+            <a:extLst>
+              <a:ext uri="{FF2B5EF4-FFF2-40B4-BE49-F238E27FC236}">
+                <a16:creationId xmlns:a16="http://schemas.microsoft.com/office/drawing/2014/main" id="{F649D27E-B466-1E84-67F4-B04DF87AFE85}"/>
+              </a:ext>
+            </a:extLst>
+          </p:cNvPr>
+          <p:cNvSpPr txBox="1"/>
+          <p:nvPr/>
+        </p:nvSpPr>
+        <p:spPr>
+          <a:xfrm>
+            <a:off x="6158224" y="5340588"/>
+            <a:ext cx="6033776" cy="1429622"/>
+          </a:xfrm>
+          <a:prstGeom prst="rect">
+            <a:avLst/>
+          </a:prstGeom>
+          <a:noFill/>
+        </p:spPr>
+        <p:txBody>
+          <a:bodyPr wrap="square">
+            <a:spAutoFit/>
+          </a:bodyPr>
+          <a:lstStyle/>
+          <a:p>
+            <a:pPr marL="285750" indent="-285750">
+              <a:lnSpc>
+                <a:spcPct val="150000"/>
+              </a:lnSpc>
+              <a:spcAft>
+                <a:spcPts val="110"/>
+              </a:spcAft>
+              <a:buFont typeface="Wingdings" panose="05000000000000000000" pitchFamily="2" charset="2"/>
+              <a:buChar char="Ø"/>
+            </a:pPr>
+            <a:r>
+              <a:rPr lang="pt-BR" sz="2000" b="1" dirty="0"/>
+              <a:t>Relação de vizinhança na presença de crimes futuros também verificada via Cadeias de Markov Espaço-Temporais</a:t>
+            </a:r>
+          </a:p>
+        </p:txBody>
+      </p:sp>
+    </p:spTree>
+    <p:extLst>
+      <p:ext uri="{BB962C8B-B14F-4D97-AF65-F5344CB8AC3E}">
+        <p14:creationId xmlns:p14="http://schemas.microsoft.com/office/powerpoint/2010/main" val="3832149468"/>
+      </p:ext>
+    </p:extLst>
+  </p:cSld>
+  <p:clrMapOvr>
+    <a:masterClrMapping/>
+  </p:clrMapOvr>
+  <mc:AlternateContent xmlns:mc="http://schemas.openxmlformats.org/markup-compatibility/2006" xmlns:p159="http://schemas.microsoft.com/office/powerpoint/2015/09/main">
+    <mc:Choice Requires="p159">
+      <p:transition xmlns:p14="http://schemas.microsoft.com/office/powerpoint/2010/main" spd="slow" p14:dur="1250">
+        <p159:morph option="byObject"/>
+      </p:transition>
+    </mc:Choice>
+    <mc:Fallback xmlns="">
+      <p:transition spd="slow">
+        <p:fade/>
+      </p:transition>
+    </mc:Fallback>
+  </mc:AlternateContent>
+  <p:timing>
+    <p:tnLst>
+      <p:par>
+        <p:cTn id="1" dur="indefinite" restart="never" nodeType="tmRoot">
+          <p:childTnLst>
+            <p:seq concurrent="1" nextAc="seek">
+              <p:cTn id="2" dur="indefinite" nodeType="mainSeq">
+                <p:childTnLst>
+                  <p:par>
+                    <p:cTn id="3" fill="hold">
+                      <p:stCondLst>
+                        <p:cond delay="indefinite"/>
+                      </p:stCondLst>
+                      <p:childTnLst>
+                        <p:par>
+                          <p:cTn id="4" fill="hold">
+                            <p:stCondLst>
+                              <p:cond delay="0"/>
+                            </p:stCondLst>
+                            <p:childTnLst>
+                              <p:par>
+                                <p:cTn id="5" presetID="42" presetClass="entr" presetSubtype="0" fill="hold" nodeType="clickEffect">
+                                  <p:stCondLst>
+                                    <p:cond delay="0"/>
+                                  </p:stCondLst>
+                                  <p:childTnLst>
+                                    <p:set>
+                                      <p:cBhvr>
+                                        <p:cTn id="6" dur="1" fill="hold">
+                                          <p:stCondLst>
+                                            <p:cond delay="0"/>
+                                          </p:stCondLst>
+                                        </p:cTn>
+                                        <p:tgtEl>
+                                          <p:spTgt spid="18"/>
+                                        </p:tgtEl>
+                                        <p:attrNameLst>
+                                          <p:attrName>style.visibility</p:attrName>
+                                        </p:attrNameLst>
+                                      </p:cBhvr>
+                                      <p:to>
+                                        <p:strVal val="visible"/>
+                                      </p:to>
+                                    </p:set>
+                                    <p:animEffect transition="in" filter="fade">
+                                      <p:cBhvr>
+                                        <p:cTn id="7" dur="1000"/>
+                                        <p:tgtEl>
+                                          <p:spTgt spid="18"/>
+                                        </p:tgtEl>
+                                      </p:cBhvr>
+                                    </p:animEffect>
+                                    <p:anim calcmode="lin" valueType="num">
+                                      <p:cBhvr>
+                                        <p:cTn id="8" dur="1000" fill="hold"/>
+                                        <p:tgtEl>
+                                          <p:spTgt spid="18"/>
+                                        </p:tgtEl>
+                                        <p:attrNameLst>
+                                          <p:attrName>ppt_x</p:attrName>
+                                        </p:attrNameLst>
+                                      </p:cBhvr>
+                                      <p:tavLst>
+                                        <p:tav tm="0">
+                                          <p:val>
+                                            <p:strVal val="#ppt_x"/>
+                                          </p:val>
+                                        </p:tav>
+                                        <p:tav tm="100000">
+                                          <p:val>
+                                            <p:strVal val="#ppt_x"/>
+                                          </p:val>
+                                        </p:tav>
+                                      </p:tavLst>
+                                    </p:anim>
+                                    <p:anim calcmode="lin" valueType="num">
+                                      <p:cBhvr>
+                                        <p:cTn id="9" dur="1000" fill="hold"/>
+                                        <p:tgtEl>
+                                          <p:spTgt spid="18"/>
+                                        </p:tgtEl>
+                                        <p:attrNameLst>
+                                          <p:attrName>ppt_y</p:attrName>
+                                        </p:attrNameLst>
+                                      </p:cBhvr>
+                                      <p:tavLst>
+                                        <p:tav tm="0">
+                                          <p:val>
+                                            <p:strVal val="#ppt_y+.1"/>
+                                          </p:val>
+                                        </p:tav>
+                                        <p:tav tm="100000">
+                                          <p:val>
+                                            <p:strVal val="#ppt_y"/>
+                                          </p:val>
+                                        </p:tav>
+                                      </p:tavLst>
+                                    </p:anim>
+                                  </p:childTnLst>
+                                </p:cTn>
+                              </p:par>
+                              <p:par>
+                                <p:cTn id="10" presetID="42" presetClass="entr" presetSubtype="0" fill="hold" grpId="0" nodeType="withEffect">
+                                  <p:stCondLst>
+                                    <p:cond delay="0"/>
+                                  </p:stCondLst>
+                                  <p:childTnLst>
+                                    <p:set>
+                                      <p:cBhvr>
+                                        <p:cTn id="11" dur="1" fill="hold">
+                                          <p:stCondLst>
+                                            <p:cond delay="0"/>
+                                          </p:stCondLst>
+                                        </p:cTn>
+                                        <p:tgtEl>
+                                          <p:spTgt spid="19"/>
+                                        </p:tgtEl>
+                                        <p:attrNameLst>
+                                          <p:attrName>style.visibility</p:attrName>
+                                        </p:attrNameLst>
+                                      </p:cBhvr>
+                                      <p:to>
+                                        <p:strVal val="visible"/>
+                                      </p:to>
+                                    </p:set>
+                                    <p:animEffect transition="in" filter="fade">
+                                      <p:cBhvr>
+                                        <p:cTn id="12" dur="1000"/>
+                                        <p:tgtEl>
+                                          <p:spTgt spid="19"/>
+                                        </p:tgtEl>
+                                      </p:cBhvr>
+                                    </p:animEffect>
+                                    <p:anim calcmode="lin" valueType="num">
+                                      <p:cBhvr>
+                                        <p:cTn id="13" dur="1000" fill="hold"/>
+                                        <p:tgtEl>
+                                          <p:spTgt spid="19"/>
+                                        </p:tgtEl>
+                                        <p:attrNameLst>
+                                          <p:attrName>ppt_x</p:attrName>
+                                        </p:attrNameLst>
+                                      </p:cBhvr>
+                                      <p:tavLst>
+                                        <p:tav tm="0">
+                                          <p:val>
+                                            <p:strVal val="#ppt_x"/>
+                                          </p:val>
+                                        </p:tav>
+                                        <p:tav tm="100000">
+                                          <p:val>
+                                            <p:strVal val="#ppt_x"/>
+                                          </p:val>
+                                        </p:tav>
+                                      </p:tavLst>
+                                    </p:anim>
+                                    <p:anim calcmode="lin" valueType="num">
+                                      <p:cBhvr>
+                                        <p:cTn id="14" dur="1000" fill="hold"/>
+                                        <p:tgtEl>
+                                          <p:spTgt spid="19"/>
+                                        </p:tgtEl>
+                                        <p:attrNameLst>
+                                          <p:attrName>ppt_y</p:attrName>
+                                        </p:attrNameLst>
+                                      </p:cBhvr>
+                                      <p:tavLst>
+                                        <p:tav tm="0">
+                                          <p:val>
+                                            <p:strVal val="#ppt_y+.1"/>
+                                          </p:val>
+                                        </p:tav>
+                                        <p:tav tm="100000">
+                                          <p:val>
+                                            <p:strVal val="#ppt_y"/>
+                                          </p:val>
+                                        </p:tav>
+                                      </p:tavLst>
+                                    </p:anim>
+                                  </p:childTnLst>
+                                </p:cTn>
+                              </p:par>
+                            </p:childTnLst>
+                          </p:cTn>
+                        </p:par>
+                      </p:childTnLst>
+                    </p:cTn>
+                  </p:par>
+                </p:childTnLst>
+              </p:cTn>
+              <p:prevCondLst>
+                <p:cond evt="onPrev" delay="0">
+                  <p:tgtEl>
+                    <p:sldTgt/>
+                  </p:tgtEl>
+                </p:cond>
+              </p:prevCondLst>
+              <p:nextCondLst>
+                <p:cond evt="onNext" delay="0">
+                  <p:tgtEl>
+                    <p:sldTgt/>
+                  </p:tgtEl>
+                </p:cond>
+              </p:nextCondLst>
+            </p:seq>
+          </p:childTnLst>
+        </p:cTn>
+      </p:par>
+    </p:tnLst>
+    <p:bldLst>
+      <p:bldP spid="19" grpId="0"/>
+    </p:bldLst>
+  </p:timing>
 </p:sld>
 </file>
 

--- a/DIA 2 - APRESENTACAO - VERSAO AMPLIADA FINAL.pptx
+++ b/DIA 2 - APRESENTACAO - VERSAO AMPLIADA FINAL.pptx
@@ -16,14 +16,14 @@
     <p:sldId id="270" r:id="rId7"/>
     <p:sldId id="275" r:id="rId8"/>
     <p:sldId id="271" r:id="rId9"/>
-    <p:sldId id="272" r:id="rId10"/>
-    <p:sldId id="267" r:id="rId11"/>
-    <p:sldId id="260" r:id="rId12"/>
-    <p:sldId id="262" r:id="rId13"/>
-    <p:sldId id="276" r:id="rId14"/>
-    <p:sldId id="277" r:id="rId15"/>
-    <p:sldId id="263" r:id="rId16"/>
-    <p:sldId id="264" r:id="rId17"/>
+    <p:sldId id="267" r:id="rId10"/>
+    <p:sldId id="260" r:id="rId11"/>
+    <p:sldId id="262" r:id="rId12"/>
+    <p:sldId id="276" r:id="rId13"/>
+    <p:sldId id="277" r:id="rId14"/>
+    <p:sldId id="264" r:id="rId15"/>
+    <p:sldId id="278" r:id="rId16"/>
+    <p:sldId id="263" r:id="rId17"/>
     <p:sldId id="261" r:id="rId18"/>
   </p:sldIdLst>
   <p:sldSz cx="12192000" cy="6858000"/>
@@ -2717,7 +2717,7 @@
   <pc:docChgLst>
     <pc:chgData name="Renan Xavier Cortes" userId="d6af805853004405" providerId="LiveId" clId="{32CE5F03-9B31-4102-A03B-787EE1528540}"/>
     <pc:docChg chg="undo custSel addSld delSld modSld sldOrd">
-      <pc:chgData name="Renan Xavier Cortes" userId="d6af805853004405" providerId="LiveId" clId="{32CE5F03-9B31-4102-A03B-787EE1528540}" dt="2026-09-30T14:59:07.206" v="1677" actId="1076"/>
+      <pc:chgData name="Renan Xavier Cortes" userId="d6af805853004405" providerId="LiveId" clId="{32CE5F03-9B31-4102-A03B-787EE1528540}" dt="2026-09-30T18:35:29.770" v="2016"/>
       <pc:docMkLst>
         <pc:docMk/>
       </pc:docMkLst>
@@ -2807,6 +2807,85 @@
           </ac:picMkLst>
         </pc:picChg>
       </pc:sldChg>
+      <pc:sldChg chg="addSp delSp modSp mod ord">
+        <pc:chgData name="Renan Xavier Cortes" userId="d6af805853004405" providerId="LiveId" clId="{32CE5F03-9B31-4102-A03B-787EE1528540}" dt="2026-09-30T18:19:19.635" v="1857" actId="1076"/>
+        <pc:sldMkLst>
+          <pc:docMk/>
+          <pc:sldMk cId="4218870347" sldId="264"/>
+        </pc:sldMkLst>
+        <pc:spChg chg="add del mod">
+          <ac:chgData name="Renan Xavier Cortes" userId="d6af805853004405" providerId="LiveId" clId="{32CE5F03-9B31-4102-A03B-787EE1528540}" dt="2026-09-30T17:55:06.674" v="1686" actId="478"/>
+          <ac:spMkLst>
+            <pc:docMk/>
+            <pc:sldMk cId="4218870347" sldId="264"/>
+            <ac:spMk id="5" creationId="{7BB93A7C-F866-CC39-8292-7BD5B8DA7A0B}"/>
+          </ac:spMkLst>
+        </pc:spChg>
+        <pc:spChg chg="add mod">
+          <ac:chgData name="Renan Xavier Cortes" userId="d6af805853004405" providerId="LiveId" clId="{32CE5F03-9B31-4102-A03B-787EE1528540}" dt="2026-09-30T17:55:15.430" v="1688" actId="403"/>
+          <ac:spMkLst>
+            <pc:docMk/>
+            <pc:sldMk cId="4218870347" sldId="264"/>
+            <ac:spMk id="9" creationId="{F3D738E0-9802-84AC-D1D0-0F6C3997DA9A}"/>
+          </ac:spMkLst>
+        </pc:spChg>
+        <pc:spChg chg="add mod">
+          <ac:chgData name="Renan Xavier Cortes" userId="d6af805853004405" providerId="LiveId" clId="{32CE5F03-9B31-4102-A03B-787EE1528540}" dt="2026-09-30T17:55:15.430" v="1688" actId="403"/>
+          <ac:spMkLst>
+            <pc:docMk/>
+            <pc:sldMk cId="4218870347" sldId="264"/>
+            <ac:spMk id="10" creationId="{472D680D-5A60-F84E-BF35-612417316049}"/>
+          </ac:spMkLst>
+        </pc:spChg>
+        <pc:spChg chg="add mod">
+          <ac:chgData name="Renan Xavier Cortes" userId="d6af805853004405" providerId="LiveId" clId="{32CE5F03-9B31-4102-A03B-787EE1528540}" dt="2026-09-30T17:54:59.157" v="1685"/>
+          <ac:spMkLst>
+            <pc:docMk/>
+            <pc:sldMk cId="4218870347" sldId="264"/>
+            <ac:spMk id="11" creationId="{463AE348-FF9C-094B-31C9-092F747FF823}"/>
+          </ac:spMkLst>
+        </pc:spChg>
+        <pc:spChg chg="add mod">
+          <ac:chgData name="Renan Xavier Cortes" userId="d6af805853004405" providerId="LiveId" clId="{32CE5F03-9B31-4102-A03B-787EE1528540}" dt="2026-09-30T18:19:19.635" v="1857" actId="1076"/>
+          <ac:spMkLst>
+            <pc:docMk/>
+            <pc:sldMk cId="4218870347" sldId="264"/>
+            <ac:spMk id="12" creationId="{E8C7AD1B-2FCE-2932-CAB2-FFF8012D7F25}"/>
+          </ac:spMkLst>
+        </pc:spChg>
+        <pc:spChg chg="add mod">
+          <ac:chgData name="Renan Xavier Cortes" userId="d6af805853004405" providerId="LiveId" clId="{32CE5F03-9B31-4102-A03B-787EE1528540}" dt="2026-09-30T17:55:10.744" v="1687" actId="1076"/>
+          <ac:spMkLst>
+            <pc:docMk/>
+            <pc:sldMk cId="4218870347" sldId="264"/>
+            <ac:spMk id="13" creationId="{188B4642-779A-5D9F-A48A-05401DD39358}"/>
+          </ac:spMkLst>
+        </pc:spChg>
+        <pc:spChg chg="mod">
+          <ac:chgData name="Renan Xavier Cortes" userId="d6af805853004405" providerId="LiveId" clId="{32CE5F03-9B31-4102-A03B-787EE1528540}" dt="2026-09-30T17:54:00.655" v="1682" actId="20577"/>
+          <ac:spMkLst>
+            <pc:docMk/>
+            <pc:sldMk cId="4218870347" sldId="264"/>
+            <ac:spMk id="14" creationId="{427DBFEB-81BF-4CC3-A411-FBF43D295C56}"/>
+          </ac:spMkLst>
+        </pc:spChg>
+        <pc:graphicFrameChg chg="add del mod">
+          <ac:chgData name="Renan Xavier Cortes" userId="d6af805853004405" providerId="LiveId" clId="{32CE5F03-9B31-4102-A03B-787EE1528540}" dt="2026-09-30T17:54:58.285" v="1684" actId="478"/>
+          <ac:graphicFrameMkLst>
+            <pc:docMk/>
+            <pc:sldMk cId="4218870347" sldId="264"/>
+            <ac:graphicFrameMk id="4" creationId="{459144C7-4703-52CE-DB4F-17FF275B5461}"/>
+          </ac:graphicFrameMkLst>
+        </pc:graphicFrameChg>
+        <pc:graphicFrameChg chg="add mod">
+          <ac:chgData name="Renan Xavier Cortes" userId="d6af805853004405" providerId="LiveId" clId="{32CE5F03-9B31-4102-A03B-787EE1528540}" dt="2026-09-30T17:54:59.157" v="1685"/>
+          <ac:graphicFrameMkLst>
+            <pc:docMk/>
+            <pc:sldMk cId="4218870347" sldId="264"/>
+            <ac:graphicFrameMk id="6" creationId="{58EE9A4A-D221-8BD1-EC89-B091240DADA6}"/>
+          </ac:graphicFrameMkLst>
+        </pc:graphicFrameChg>
+      </pc:sldChg>
       <pc:sldChg chg="del">
         <pc:chgData name="Renan Xavier Cortes" userId="d6af805853004405" providerId="LiveId" clId="{32CE5F03-9B31-4102-A03B-787EE1528540}" dt="2026-09-30T13:55:26.918" v="828" actId="47"/>
         <pc:sldMkLst>
@@ -2814,20 +2893,108 @@
           <pc:sldMk cId="1600642753" sldId="265"/>
         </pc:sldMkLst>
       </pc:sldChg>
-      <pc:sldChg chg="modSp mod">
-        <pc:chgData name="Renan Xavier Cortes" userId="d6af805853004405" providerId="LiveId" clId="{32CE5F03-9B31-4102-A03B-787EE1528540}" dt="2026-09-30T13:55:21.771" v="827" actId="20577"/>
+      <pc:sldChg chg="addSp modSp mod ord modAnim">
+        <pc:chgData name="Renan Xavier Cortes" userId="d6af805853004405" providerId="LiveId" clId="{32CE5F03-9B31-4102-A03B-787EE1528540}" dt="2026-09-30T18:35:29.770" v="2016"/>
         <pc:sldMkLst>
           <pc:docMk/>
           <pc:sldMk cId="204840894" sldId="267"/>
         </pc:sldMkLst>
         <pc:spChg chg="mod">
-          <ac:chgData name="Renan Xavier Cortes" userId="d6af805853004405" providerId="LiveId" clId="{32CE5F03-9B31-4102-A03B-787EE1528540}" dt="2026-09-30T13:55:21.771" v="827" actId="20577"/>
+          <ac:chgData name="Renan Xavier Cortes" userId="d6af805853004405" providerId="LiveId" clId="{32CE5F03-9B31-4102-A03B-787EE1528540}" dt="2026-09-30T18:32:38.713" v="1913" actId="403"/>
           <ac:spMkLst>
             <pc:docMk/>
             <pc:sldMk cId="204840894" sldId="267"/>
             <ac:spMk id="4" creationId="{F9B44222-0FEB-DD8A-E65A-F10683C06A0F}"/>
           </ac:spMkLst>
         </pc:spChg>
+        <pc:spChg chg="add mod">
+          <ac:chgData name="Renan Xavier Cortes" userId="d6af805853004405" providerId="LiveId" clId="{32CE5F03-9B31-4102-A03B-787EE1528540}" dt="2026-09-30T18:31:23.069" v="1866" actId="1076"/>
+          <ac:spMkLst>
+            <pc:docMk/>
+            <pc:sldMk cId="204840894" sldId="267"/>
+            <ac:spMk id="9" creationId="{A7924BE9-722D-AE8C-355C-9C9926B6843C}"/>
+          </ac:spMkLst>
+        </pc:spChg>
+        <pc:spChg chg="add mod">
+          <ac:chgData name="Renan Xavier Cortes" userId="d6af805853004405" providerId="LiveId" clId="{32CE5F03-9B31-4102-A03B-787EE1528540}" dt="2026-09-30T18:32:45.513" v="1915" actId="1076"/>
+          <ac:spMkLst>
+            <pc:docMk/>
+            <pc:sldMk cId="204840894" sldId="267"/>
+            <ac:spMk id="10" creationId="{3DB70E76-2C85-16FB-C8CC-53EB3AEECE7B}"/>
+          </ac:spMkLst>
+        </pc:spChg>
+        <pc:spChg chg="add mod">
+          <ac:chgData name="Renan Xavier Cortes" userId="d6af805853004405" providerId="LiveId" clId="{32CE5F03-9B31-4102-A03B-787EE1528540}" dt="2026-09-30T18:33:31.583" v="1950" actId="1076"/>
+          <ac:spMkLst>
+            <pc:docMk/>
+            <pc:sldMk cId="204840894" sldId="267"/>
+            <ac:spMk id="11" creationId="{CB184BE6-0BE2-BA18-029A-52DD351FDF0B}"/>
+          </ac:spMkLst>
+        </pc:spChg>
+        <pc:spChg chg="add mod">
+          <ac:chgData name="Renan Xavier Cortes" userId="d6af805853004405" providerId="LiveId" clId="{32CE5F03-9B31-4102-A03B-787EE1528540}" dt="2026-09-30T18:34:11.379" v="1981" actId="1076"/>
+          <ac:spMkLst>
+            <pc:docMk/>
+            <pc:sldMk cId="204840894" sldId="267"/>
+            <ac:spMk id="12" creationId="{2393E99D-8654-6736-563B-90241C78B105}"/>
+          </ac:spMkLst>
+        </pc:spChg>
+        <pc:spChg chg="add mod">
+          <ac:chgData name="Renan Xavier Cortes" userId="d6af805853004405" providerId="LiveId" clId="{32CE5F03-9B31-4102-A03B-787EE1528540}" dt="2026-09-30T18:34:08.750" v="1980" actId="1076"/>
+          <ac:spMkLst>
+            <pc:docMk/>
+            <pc:sldMk cId="204840894" sldId="267"/>
+            <ac:spMk id="13" creationId="{36618367-6AF6-11AD-D1D8-E58D6B826BC7}"/>
+          </ac:spMkLst>
+        </pc:spChg>
+        <pc:spChg chg="add mod">
+          <ac:chgData name="Renan Xavier Cortes" userId="d6af805853004405" providerId="LiveId" clId="{32CE5F03-9B31-4102-A03B-787EE1528540}" dt="2026-09-30T18:33:35.489" v="1952" actId="1076"/>
+          <ac:spMkLst>
+            <pc:docMk/>
+            <pc:sldMk cId="204840894" sldId="267"/>
+            <ac:spMk id="14" creationId="{8D019ECB-738C-DA5C-6576-C6F980D41762}"/>
+          </ac:spMkLst>
+        </pc:spChg>
+        <pc:spChg chg="add mod">
+          <ac:chgData name="Renan Xavier Cortes" userId="d6af805853004405" providerId="LiveId" clId="{32CE5F03-9B31-4102-A03B-787EE1528540}" dt="2026-09-30T18:35:13.497" v="2015" actId="1076"/>
+          <ac:spMkLst>
+            <pc:docMk/>
+            <pc:sldMk cId="204840894" sldId="267"/>
+            <ac:spMk id="15" creationId="{574D6D9C-D93C-E743-92A2-746B8DEBF90F}"/>
+          </ac:spMkLst>
+        </pc:spChg>
+        <pc:spChg chg="add mod">
+          <ac:chgData name="Renan Xavier Cortes" userId="d6af805853004405" providerId="LiveId" clId="{32CE5F03-9B31-4102-A03B-787EE1528540}" dt="2026-09-30T18:34:33.281" v="1995" actId="1076"/>
+          <ac:spMkLst>
+            <pc:docMk/>
+            <pc:sldMk cId="204840894" sldId="267"/>
+            <ac:spMk id="16" creationId="{48E74E98-E9A5-2B69-D05B-BE0099A83A98}"/>
+          </ac:spMkLst>
+        </pc:spChg>
+        <pc:spChg chg="add mod">
+          <ac:chgData name="Renan Xavier Cortes" userId="d6af805853004405" providerId="LiveId" clId="{32CE5F03-9B31-4102-A03B-787EE1528540}" dt="2026-09-30T18:34:52.895" v="2000" actId="1076"/>
+          <ac:spMkLst>
+            <pc:docMk/>
+            <pc:sldMk cId="204840894" sldId="267"/>
+            <ac:spMk id="17" creationId="{FACE062B-6F3D-8D21-21CB-ECA3E8074E2F}"/>
+          </ac:spMkLst>
+        </pc:spChg>
+        <pc:spChg chg="add mod">
+          <ac:chgData name="Renan Xavier Cortes" userId="d6af805853004405" providerId="LiveId" clId="{32CE5F03-9B31-4102-A03B-787EE1528540}" dt="2026-09-30T18:35:09.419" v="2014" actId="1076"/>
+          <ac:spMkLst>
+            <pc:docMk/>
+            <pc:sldMk cId="204840894" sldId="267"/>
+            <ac:spMk id="18" creationId="{F1F8C814-56E9-CAB5-BF4F-0B98EEFB341E}"/>
+          </ac:spMkLst>
+        </pc:spChg>
+        <pc:picChg chg="add mod">
+          <ac:chgData name="Renan Xavier Cortes" userId="d6af805853004405" providerId="LiveId" clId="{32CE5F03-9B31-4102-A03B-787EE1528540}" dt="2026-09-30T18:33:46.611" v="1965" actId="1076"/>
+          <ac:picMkLst>
+            <pc:docMk/>
+            <pc:sldMk cId="204840894" sldId="267"/>
+            <ac:picMk id="6" creationId="{A9B172CF-DDA4-9000-FC49-49E50601E3A1}"/>
+          </ac:picMkLst>
+        </pc:picChg>
       </pc:sldChg>
       <pc:sldChg chg="del">
         <pc:chgData name="Renan Xavier Cortes" userId="d6af805853004405" providerId="LiveId" clId="{32CE5F03-9B31-4102-A03B-787EE1528540}" dt="2026-09-29T18:53:06.902" v="89" actId="47"/>
@@ -3010,8 +3177,8 @@
           </ac:picMkLst>
         </pc:picChg>
       </pc:sldChg>
-      <pc:sldChg chg="add">
-        <pc:chgData name="Renan Xavier Cortes" userId="d6af805853004405" providerId="LiveId" clId="{32CE5F03-9B31-4102-A03B-787EE1528540}" dt="2026-09-29T18:44:16.387" v="2"/>
+      <pc:sldChg chg="add del">
+        <pc:chgData name="Renan Xavier Cortes" userId="d6af805853004405" providerId="LiveId" clId="{32CE5F03-9B31-4102-A03B-787EE1528540}" dt="2026-09-30T18:31:57.931" v="1868" actId="47"/>
         <pc:sldMkLst>
           <pc:docMk/>
           <pc:sldMk cId="1290076" sldId="272"/>
@@ -3212,9 +3379,333 @@
           </ac:picMkLst>
         </pc:picChg>
       </pc:sldChg>
+      <pc:sldChg chg="addSp delSp modSp add mod">
+        <pc:chgData name="Renan Xavier Cortes" userId="d6af805853004405" providerId="LiveId" clId="{32CE5F03-9B31-4102-A03B-787EE1528540}" dt="2026-09-30T18:14:47.213" v="1846" actId="122"/>
+        <pc:sldMkLst>
+          <pc:docMk/>
+          <pc:sldMk cId="1921800444" sldId="278"/>
+        </pc:sldMkLst>
+        <pc:spChg chg="add mod">
+          <ac:chgData name="Renan Xavier Cortes" userId="d6af805853004405" providerId="LiveId" clId="{32CE5F03-9B31-4102-A03B-787EE1528540}" dt="2026-09-30T18:12:49.389" v="1724" actId="1076"/>
+          <ac:spMkLst>
+            <pc:docMk/>
+            <pc:sldMk cId="1921800444" sldId="278"/>
+            <ac:spMk id="5" creationId="{8B10989E-6495-BA93-F912-8AAFEB296936}"/>
+          </ac:spMkLst>
+        </pc:spChg>
+        <pc:spChg chg="del">
+          <ac:chgData name="Renan Xavier Cortes" userId="d6af805853004405" providerId="LiveId" clId="{32CE5F03-9B31-4102-A03B-787EE1528540}" dt="2026-09-30T18:11:28.032" v="1706" actId="478"/>
+          <ac:spMkLst>
+            <pc:docMk/>
+            <pc:sldMk cId="1921800444" sldId="278"/>
+            <ac:spMk id="9" creationId="{F3D738E0-9802-84AC-D1D0-0F6C3997DA9A}"/>
+          </ac:spMkLst>
+        </pc:spChg>
+        <pc:spChg chg="del">
+          <ac:chgData name="Renan Xavier Cortes" userId="d6af805853004405" providerId="LiveId" clId="{32CE5F03-9B31-4102-A03B-787EE1528540}" dt="2026-09-30T18:11:28.882" v="1707" actId="478"/>
+          <ac:spMkLst>
+            <pc:docMk/>
+            <pc:sldMk cId="1921800444" sldId="278"/>
+            <ac:spMk id="10" creationId="{472D680D-5A60-F84E-BF35-612417316049}"/>
+          </ac:spMkLst>
+        </pc:spChg>
+        <pc:spChg chg="del">
+          <ac:chgData name="Renan Xavier Cortes" userId="d6af805853004405" providerId="LiveId" clId="{32CE5F03-9B31-4102-A03B-787EE1528540}" dt="2026-09-30T18:11:29.817" v="1708" actId="478"/>
+          <ac:spMkLst>
+            <pc:docMk/>
+            <pc:sldMk cId="1921800444" sldId="278"/>
+            <ac:spMk id="11" creationId="{463AE348-FF9C-094B-31C9-092F747FF823}"/>
+          </ac:spMkLst>
+        </pc:spChg>
+        <pc:spChg chg="del">
+          <ac:chgData name="Renan Xavier Cortes" userId="d6af805853004405" providerId="LiveId" clId="{32CE5F03-9B31-4102-A03B-787EE1528540}" dt="2026-09-30T18:11:32.786" v="1709" actId="478"/>
+          <ac:spMkLst>
+            <pc:docMk/>
+            <pc:sldMk cId="1921800444" sldId="278"/>
+            <ac:spMk id="12" creationId="{E8C7AD1B-2FCE-2932-CAB2-FFF8012D7F25}"/>
+          </ac:spMkLst>
+        </pc:spChg>
+        <pc:spChg chg="del">
+          <ac:chgData name="Renan Xavier Cortes" userId="d6af805853004405" providerId="LiveId" clId="{32CE5F03-9B31-4102-A03B-787EE1528540}" dt="2026-09-30T18:11:40.294" v="1712" actId="478"/>
+          <ac:spMkLst>
+            <pc:docMk/>
+            <pc:sldMk cId="1921800444" sldId="278"/>
+            <ac:spMk id="13" creationId="{188B4642-779A-5D9F-A48A-05401DD39358}"/>
+          </ac:spMkLst>
+        </pc:spChg>
+        <pc:spChg chg="add mod">
+          <ac:chgData name="Renan Xavier Cortes" userId="d6af805853004405" providerId="LiveId" clId="{32CE5F03-9B31-4102-A03B-787EE1528540}" dt="2026-09-30T18:14:47.213" v="1846" actId="122"/>
+          <ac:spMkLst>
+            <pc:docMk/>
+            <pc:sldMk cId="1921800444" sldId="278"/>
+            <ac:spMk id="15" creationId="{F866C2C7-F83C-0C53-9473-159DD068B21A}"/>
+          </ac:spMkLst>
+        </pc:spChg>
+        <pc:graphicFrameChg chg="del">
+          <ac:chgData name="Renan Xavier Cortes" userId="d6af805853004405" providerId="LiveId" clId="{32CE5F03-9B31-4102-A03B-787EE1528540}" dt="2026-09-30T18:11:26.899" v="1705" actId="478"/>
+          <ac:graphicFrameMkLst>
+            <pc:docMk/>
+            <pc:sldMk cId="1921800444" sldId="278"/>
+            <ac:graphicFrameMk id="6" creationId="{58EE9A4A-D221-8BD1-EC89-B091240DADA6}"/>
+          </ac:graphicFrameMkLst>
+        </pc:graphicFrameChg>
+        <pc:picChg chg="add mod">
+          <ac:chgData name="Renan Xavier Cortes" userId="d6af805853004405" providerId="LiveId" clId="{32CE5F03-9B31-4102-A03B-787EE1528540}" dt="2026-09-30T18:14:17.047" v="1842" actId="1076"/>
+          <ac:picMkLst>
+            <pc:docMk/>
+            <pc:sldMk cId="1921800444" sldId="278"/>
+            <ac:picMk id="3074" creationId="{496D2546-4354-68C6-EAA2-03111C34F4D9}"/>
+          </ac:picMkLst>
+        </pc:picChg>
+      </pc:sldChg>
     </pc:docChg>
   </pc:docChgLst>
 </pc:chgInfo>
+</file>
+
+<file path=ppt/charts/chart1.xml><?xml version="1.0" encoding="utf-8"?>
+<c:chartSpace xmlns:c="http://schemas.openxmlformats.org/drawingml/2006/chart" xmlns:a="http://schemas.openxmlformats.org/drawingml/2006/main" xmlns:r="http://schemas.openxmlformats.org/officeDocument/2006/relationships" xmlns:c16r2="http://schemas.microsoft.com/office/drawing/2015/06/chart">
+  <c:date1904 val="0"/>
+  <c:lang val="pt-BR"/>
+  <c:roundedCorners val="1"/>
+  <mc:AlternateContent xmlns:mc="http://schemas.openxmlformats.org/markup-compatibility/2006">
+    <mc:Choice xmlns:c14="http://schemas.microsoft.com/office/drawing/2007/8/2/chart" Requires="c14">
+      <c14:style val="102"/>
+    </mc:Choice>
+    <mc:Fallback>
+      <c:style val="2"/>
+    </mc:Fallback>
+  </mc:AlternateContent>
+  <c:chart>
+    <c:autoTitleDeleted val="1"/>
+    <c:plotArea>
+      <c:layout/>
+      <c:lineChart>
+        <c:grouping val="standard"/>
+        <c:varyColors val="0"/>
+        <c:ser>
+          <c:idx val="0"/>
+          <c:order val="0"/>
+          <c:tx>
+            <c:strRef>
+              <c:f>Sheet1!$B$1</c:f>
+              <c:strCache>
+                <c:ptCount val="1"/>
+                <c:pt idx="0">
+                  <c:v>Prevalência de atividade criminal (ilustrativo)</c:v>
+                </c:pt>
+              </c:strCache>
+            </c:strRef>
+          </c:tx>
+          <c:spPr>
+            <a:ln w="38100">
+              <a:solidFill>
+                <a:srgbClr val="C1121F"/>
+              </a:solidFill>
+            </a:ln>
+          </c:spPr>
+          <c:marker>
+            <c:spPr>
+              <a:solidFill>
+                <a:srgbClr val="C1121F"/>
+              </a:solidFill>
+              <a:ln>
+                <a:solidFill>
+                  <a:srgbClr val="C1121F"/>
+                </a:solidFill>
+              </a:ln>
+            </c:spPr>
+          </c:marker>
+          <c:cat>
+            <c:strRef>
+              <c:f>Sheet1!$A$2:$A$9</c:f>
+              <c:strCache>
+                <c:ptCount val="8"/>
+                <c:pt idx="0">
+                  <c:v>15</c:v>
+                </c:pt>
+                <c:pt idx="1">
+                  <c:v>20</c:v>
+                </c:pt>
+                <c:pt idx="2">
+                  <c:v>25</c:v>
+                </c:pt>
+                <c:pt idx="3">
+                  <c:v>30</c:v>
+                </c:pt>
+                <c:pt idx="4">
+                  <c:v>35</c:v>
+                </c:pt>
+                <c:pt idx="5">
+                  <c:v>40</c:v>
+                </c:pt>
+                <c:pt idx="6">
+                  <c:v>45</c:v>
+                </c:pt>
+                <c:pt idx="7">
+                  <c:v>50</c:v>
+                </c:pt>
+              </c:strCache>
+            </c:strRef>
+          </c:cat>
+          <c:val>
+            <c:numRef>
+              <c:f>Sheet1!$B$2:$B$9</c:f>
+              <c:numCache>
+                <c:formatCode>General</c:formatCode>
+                <c:ptCount val="8"/>
+                <c:pt idx="0">
+                  <c:v>10</c:v>
+                </c:pt>
+                <c:pt idx="1">
+                  <c:v>55</c:v>
+                </c:pt>
+                <c:pt idx="2">
+                  <c:v>80</c:v>
+                </c:pt>
+                <c:pt idx="3">
+                  <c:v>65</c:v>
+                </c:pt>
+                <c:pt idx="4">
+                  <c:v>45</c:v>
+                </c:pt>
+                <c:pt idx="5">
+                  <c:v>30</c:v>
+                </c:pt>
+                <c:pt idx="6">
+                  <c:v>18</c:v>
+                </c:pt>
+                <c:pt idx="7">
+                  <c:v>10</c:v>
+                </c:pt>
+              </c:numCache>
+            </c:numRef>
+          </c:val>
+          <c:smooth val="0"/>
+          <c:extLst>
+            <c:ext xmlns:c16="http://schemas.microsoft.com/office/drawing/2014/chart" uri="{C3380CC4-5D6E-409C-BE32-E72D297353CC}">
+              <c16:uniqueId val="{00000000-8527-44E9-B3AA-90EDED4465A9}"/>
+            </c:ext>
+          </c:extLst>
+        </c:ser>
+        <c:dLbls>
+          <c:showLegendKey val="0"/>
+          <c:showVal val="0"/>
+          <c:showCatName val="0"/>
+          <c:showSerName val="0"/>
+          <c:showPercent val="0"/>
+          <c:showBubbleSize val="0"/>
+        </c:dLbls>
+        <c:marker val="1"/>
+        <c:smooth val="0"/>
+        <c:axId val="2118791784"/>
+        <c:axId val="2140495176"/>
+      </c:lineChart>
+      <c:catAx>
+        <c:axId val="2118791784"/>
+        <c:scaling>
+          <c:orientation val="minMax"/>
+        </c:scaling>
+        <c:delete val="0"/>
+        <c:axPos val="b"/>
+        <c:numFmt formatCode="General" sourceLinked="0"/>
+        <c:majorTickMark val="out"/>
+        <c:minorTickMark val="none"/>
+        <c:tickLblPos val="nextTo"/>
+        <c:spPr>
+          <a:ln>
+            <a:solidFill>
+              <a:srgbClr val="B5B5B0"/>
+            </a:solidFill>
+          </a:ln>
+        </c:spPr>
+        <c:txPr>
+          <a:bodyPr/>
+          <a:lstStyle/>
+          <a:p>
+            <a:pPr>
+              <a:defRPr sz="1250">
+                <a:solidFill>
+                  <a:srgbClr val="3A3A3A"/>
+                </a:solidFill>
+                <a:latin typeface="Calibri"/>
+              </a:defRPr>
+            </a:pPr>
+            <a:endParaRPr lang="pt-BR"/>
+          </a:p>
+        </c:txPr>
+        <c:crossAx val="2140495176"/>
+        <c:crosses val="autoZero"/>
+        <c:auto val="1"/>
+        <c:lblAlgn val="ctr"/>
+        <c:lblOffset val="100"/>
+        <c:noMultiLvlLbl val="0"/>
+      </c:catAx>
+      <c:valAx>
+        <c:axId val="2140495176"/>
+        <c:scaling>
+          <c:orientation val="minMax"/>
+        </c:scaling>
+        <c:delete val="0"/>
+        <c:axPos val="l"/>
+        <c:majorGridlines>
+          <c:spPr>
+            <a:ln w="6350">
+              <a:solidFill>
+                <a:srgbClr val="E0E0DC"/>
+              </a:solidFill>
+            </a:ln>
+          </c:spPr>
+        </c:majorGridlines>
+        <c:numFmt formatCode="General" sourceLinked="1"/>
+        <c:majorTickMark val="out"/>
+        <c:minorTickMark val="none"/>
+        <c:tickLblPos val="nextTo"/>
+        <c:spPr>
+          <a:ln>
+            <a:solidFill>
+              <a:srgbClr val="B5B5B0"/>
+            </a:solidFill>
+          </a:ln>
+        </c:spPr>
+        <c:txPr>
+          <a:bodyPr/>
+          <a:lstStyle/>
+          <a:p>
+            <a:pPr>
+              <a:defRPr sz="1100">
+                <a:solidFill>
+                  <a:srgbClr val="3A3A3A"/>
+                </a:solidFill>
+                <a:latin typeface="Calibri"/>
+              </a:defRPr>
+            </a:pPr>
+            <a:endParaRPr lang="pt-BR"/>
+          </a:p>
+        </c:txPr>
+        <c:crossAx val="2118791784"/>
+        <c:crosses val="autoZero"/>
+        <c:crossBetween val="between"/>
+      </c:valAx>
+    </c:plotArea>
+    <c:plotVisOnly val="1"/>
+    <c:dispBlanksAs val="gap"/>
+    <c:showDLblsOverMax val="0"/>
+  </c:chart>
+  <c:txPr>
+    <a:bodyPr/>
+    <a:lstStyle/>
+    <a:p>
+      <a:pPr>
+        <a:defRPr sz="1800"/>
+      </a:pPr>
+      <a:endParaRPr lang="pt-BR"/>
+    </a:p>
+  </c:txPr>
+  <c:externalData r:id="rId1">
+    <c:autoUpdate val="0"/>
+  </c:externalData>
+</c:chartSpace>
 </file>
 
 <file path=ppt/notesMasters/notesMaster1.xml><?xml version="1.0" encoding="utf-8"?>
@@ -3724,7 +4215,7 @@
     </p:spTree>
     <p:extLst>
       <p:ext uri="{BB962C8B-B14F-4D97-AF65-F5344CB8AC3E}">
-        <p14:creationId xmlns:p14="http://schemas.microsoft.com/office/powerpoint/2010/main" val="2429228612"/>
+        <p14:creationId xmlns:p14="http://schemas.microsoft.com/office/powerpoint/2010/main" val="3517665198"/>
       </p:ext>
     </p:extLst>
   </p:cSld>
@@ -3808,7 +4299,7 @@
     </p:spTree>
     <p:extLst>
       <p:ext uri="{BB962C8B-B14F-4D97-AF65-F5344CB8AC3E}">
-        <p14:creationId xmlns:p14="http://schemas.microsoft.com/office/powerpoint/2010/main" val="3517665198"/>
+        <p14:creationId xmlns:p14="http://schemas.microsoft.com/office/powerpoint/2010/main" val="1151141459"/>
       </p:ext>
     </p:extLst>
   </p:cSld>
@@ -3892,7 +4383,7 @@
     </p:spTree>
     <p:extLst>
       <p:ext uri="{BB962C8B-B14F-4D97-AF65-F5344CB8AC3E}">
-        <p14:creationId xmlns:p14="http://schemas.microsoft.com/office/powerpoint/2010/main" val="1151141459"/>
+        <p14:creationId xmlns:p14="http://schemas.microsoft.com/office/powerpoint/2010/main" val="3480362650"/>
       </p:ext>
     </p:extLst>
   </p:cSld>
@@ -3976,7 +4467,7 @@
     </p:spTree>
     <p:extLst>
       <p:ext uri="{BB962C8B-B14F-4D97-AF65-F5344CB8AC3E}">
-        <p14:creationId xmlns:p14="http://schemas.microsoft.com/office/powerpoint/2010/main" val="3480362650"/>
+        <p14:creationId xmlns:p14="http://schemas.microsoft.com/office/powerpoint/2010/main" val="393282365"/>
       </p:ext>
     </p:extLst>
   </p:cSld>
@@ -4060,7 +4551,7 @@
     </p:spTree>
     <p:extLst>
       <p:ext uri="{BB962C8B-B14F-4D97-AF65-F5344CB8AC3E}">
-        <p14:creationId xmlns:p14="http://schemas.microsoft.com/office/powerpoint/2010/main" val="1357359887"/>
+        <p14:creationId xmlns:p14="http://schemas.microsoft.com/office/powerpoint/2010/main" val="1477671489"/>
       </p:ext>
     </p:extLst>
   </p:cSld>
@@ -4144,7 +4635,7 @@
     </p:spTree>
     <p:extLst>
       <p:ext uri="{BB962C8B-B14F-4D97-AF65-F5344CB8AC3E}">
-        <p14:creationId xmlns:p14="http://schemas.microsoft.com/office/powerpoint/2010/main" val="393282365"/>
+        <p14:creationId xmlns:p14="http://schemas.microsoft.com/office/powerpoint/2010/main" val="1357359887"/>
       </p:ext>
     </p:extLst>
   </p:cSld>
@@ -4816,7 +5307,7 @@
     </p:spTree>
     <p:extLst>
       <p:ext uri="{BB962C8B-B14F-4D97-AF65-F5344CB8AC3E}">
-        <p14:creationId xmlns:p14="http://schemas.microsoft.com/office/powerpoint/2010/main" val="3085305389"/>
+        <p14:creationId xmlns:p14="http://schemas.microsoft.com/office/powerpoint/2010/main" val="2353704698"/>
       </p:ext>
     </p:extLst>
   </p:cSld>
@@ -4900,7 +5391,7 @@
     </p:spTree>
     <p:extLst>
       <p:ext uri="{BB962C8B-B14F-4D97-AF65-F5344CB8AC3E}">
-        <p14:creationId xmlns:p14="http://schemas.microsoft.com/office/powerpoint/2010/main" val="2353704698"/>
+        <p14:creationId xmlns:p14="http://schemas.microsoft.com/office/powerpoint/2010/main" val="2429228612"/>
       </p:ext>
     </p:extLst>
   </p:cSld>
@@ -8512,8 +9003,8 @@
         </p:nvSpPr>
         <p:spPr>
           <a:xfrm>
-            <a:off x="249836" y="200638"/>
-            <a:ext cx="11692327" cy="584775"/>
+            <a:off x="1103819" y="140678"/>
+            <a:ext cx="7815329" cy="646331"/>
           </a:xfrm>
           <a:prstGeom prst="rect">
             <a:avLst/>
@@ -8527,14 +9018,59 @@
           <a:lstStyle/>
           <a:p>
             <a:r>
-              <a:rPr lang="pt-BR" sz="3200" b="1" dirty="0">
+              <a:rPr lang="pt-BR" sz="3600" b="1" dirty="0">
                 <a:solidFill>
                   <a:srgbClr val="002060"/>
                 </a:solidFill>
                 <a:latin typeface="Cambria" panose="02040503050406030204" pitchFamily="18" charset="0"/>
                 <a:ea typeface="Cambria" panose="02040503050406030204" pitchFamily="18" charset="0"/>
               </a:rPr>
-              <a:t>Panorama RS à Luz dos Dados públicos disponíveis da SSP-RS</a:t>
+              <a:t>Armas x Criminalidade</a:t>
+            </a:r>
+          </a:p>
+        </p:txBody>
+      </p:sp>
+      <p:sp>
+        <p:nvSpPr>
+          <p:cNvPr id="14" name="CaixaDeTexto 13">
+            <a:extLst>
+              <a:ext uri="{FF2B5EF4-FFF2-40B4-BE49-F238E27FC236}">
+                <a16:creationId xmlns:a16="http://schemas.microsoft.com/office/drawing/2014/main" id="{427DBFEB-81BF-4CC3-A411-FBF43D295C56}"/>
+              </a:ext>
+            </a:extLst>
+          </p:cNvPr>
+          <p:cNvSpPr txBox="1"/>
+          <p:nvPr/>
+        </p:nvSpPr>
+        <p:spPr>
+          <a:xfrm>
+            <a:off x="940904" y="1154334"/>
+            <a:ext cx="7647769" cy="967957"/>
+          </a:xfrm>
+          <a:prstGeom prst="rect">
+            <a:avLst/>
+          </a:prstGeom>
+          <a:noFill/>
+        </p:spPr>
+        <p:txBody>
+          <a:bodyPr wrap="square" rtlCol="0">
+            <a:spAutoFit/>
+          </a:bodyPr>
+          <a:lstStyle/>
+          <a:p>
+            <a:pPr marL="285750" indent="-285750">
+              <a:lnSpc>
+                <a:spcPct val="150000"/>
+              </a:lnSpc>
+              <a:spcAft>
+                <a:spcPts val="110"/>
+              </a:spcAft>
+              <a:buFont typeface="Wingdings" panose="05000000000000000000" pitchFamily="2" charset="2"/>
+              <a:buChar char="Ø"/>
+            </a:pPr>
+            <a:r>
+              <a:rPr lang="pt-BR" sz="2000" b="1" dirty="0"/>
+              <a:t>A relação de armas e criminalidade também é presente na literatura. </a:t>
             </a:r>
           </a:p>
         </p:txBody>
@@ -8635,10 +9171,10 @@
       </p:pic>
       <p:sp>
         <p:nvSpPr>
-          <p:cNvPr id="4" name="CaixaDeTexto 3">
-            <a:extLst>
-              <a:ext uri="{FF2B5EF4-FFF2-40B4-BE49-F238E27FC236}">
-                <a16:creationId xmlns:a16="http://schemas.microsoft.com/office/drawing/2014/main" id="{F9B44222-0FEB-DD8A-E65A-F10683C06A0F}"/>
+          <p:cNvPr id="5" name="CaixaDeTexto 4">
+            <a:extLst>
+              <a:ext uri="{FF2B5EF4-FFF2-40B4-BE49-F238E27FC236}">
+                <a16:creationId xmlns:a16="http://schemas.microsoft.com/office/drawing/2014/main" id="{F8513A2C-EFAD-349F-ECA3-4EE11292D1C6}"/>
               </a:ext>
             </a:extLst>
           </p:cNvPr>
@@ -8647,8 +9183,8 @@
         </p:nvSpPr>
         <p:spPr>
           <a:xfrm>
-            <a:off x="940904" y="1276323"/>
-            <a:ext cx="10310191" cy="506292"/>
+            <a:off x="940903" y="2305953"/>
+            <a:ext cx="11050446" cy="3789242"/>
           </a:xfrm>
           <a:prstGeom prst="rect">
             <a:avLst/>
@@ -8673,7 +9209,189 @@
             </a:pPr>
             <a:r>
               <a:rPr lang="pt-BR" sz="2000" b="1" dirty="0"/>
-              <a:t>Furto no litoral?</a:t>
+              <a:t>Problemas: violência é um fenômeno complexo e de multifatorial e estimar a quantidade de armas em circulação é desafiador.</a:t>
+            </a:r>
+          </a:p>
+          <a:p>
+            <a:pPr marL="285750" indent="-285750">
+              <a:lnSpc>
+                <a:spcPct val="150000"/>
+              </a:lnSpc>
+              <a:spcAft>
+                <a:spcPts val="110"/>
+              </a:spcAft>
+              <a:buFont typeface="Wingdings" panose="05000000000000000000" pitchFamily="2" charset="2"/>
+              <a:buChar char="Ø"/>
+            </a:pPr>
+            <a:endParaRPr lang="pt-BR" sz="2000" b="1" dirty="0"/>
+          </a:p>
+          <a:p>
+            <a:pPr marL="285750" indent="-285750">
+              <a:lnSpc>
+                <a:spcPct val="150000"/>
+              </a:lnSpc>
+              <a:spcAft>
+                <a:spcPts val="110"/>
+              </a:spcAft>
+              <a:buFont typeface="Wingdings" panose="05000000000000000000" pitchFamily="2" charset="2"/>
+              <a:buChar char="Ø"/>
+            </a:pPr>
+            <a:r>
+              <a:rPr lang="pt-BR" sz="2000" b="1" dirty="0"/>
+              <a:t>No Brasil, a obra de Daniel Cerqueira (“Menos Armas, Menos Crimes”) se destaca, defendendo que a redução na circulação de armas de fogo esteve associada a uma queda nos homicídios no período pós-Estatuto.</a:t>
+            </a:r>
+          </a:p>
+          <a:p>
+            <a:pPr marL="285750" indent="-285750">
+              <a:lnSpc>
+                <a:spcPct val="150000"/>
+              </a:lnSpc>
+              <a:spcAft>
+                <a:spcPts val="110"/>
+              </a:spcAft>
+              <a:buFont typeface="Wingdings" panose="05000000000000000000" pitchFamily="2" charset="2"/>
+              <a:buChar char="Ø"/>
+            </a:pPr>
+            <a:endParaRPr lang="pt-BR" sz="2000" b="1" dirty="0"/>
+          </a:p>
+          <a:p>
+            <a:pPr marL="285750" indent="-285750">
+              <a:lnSpc>
+                <a:spcPct val="150000"/>
+              </a:lnSpc>
+              <a:spcAft>
+                <a:spcPts val="110"/>
+              </a:spcAft>
+              <a:buFont typeface="Wingdings" panose="05000000000000000000" pitchFamily="2" charset="2"/>
+              <a:buChar char="Ø"/>
+            </a:pPr>
+            <a:r>
+              <a:rPr lang="pt-BR" sz="2000" b="1" dirty="0"/>
+              <a:t>Maioria das Revisões de Literatura são contrárias à tese “Mais Armas, Menos Crimes”</a:t>
+            </a:r>
+            <a:r>
+              <a:rPr lang="pt-BR" sz="2000" b="1" baseline="30000" dirty="0"/>
+              <a:t>1,2</a:t>
+            </a:r>
+          </a:p>
+        </p:txBody>
+      </p:sp>
+      <p:pic>
+        <p:nvPicPr>
+          <p:cNvPr id="1030" name="Picture 6" descr="arma, pistola, automática (Pixabay/Reprodução)">
+            <a:extLst>
+              <a:ext uri="{FF2B5EF4-FFF2-40B4-BE49-F238E27FC236}">
+                <a16:creationId xmlns:a16="http://schemas.microsoft.com/office/drawing/2014/main" id="{BAA8555A-A9C9-35F7-8A61-79165A878D49}"/>
+              </a:ext>
+            </a:extLst>
+          </p:cNvPr>
+          <p:cNvPicPr>
+            <a:picLocks noChangeAspect="1" noChangeArrowheads="1"/>
+          </p:cNvPicPr>
+          <p:nvPr/>
+        </p:nvPicPr>
+        <p:blipFill>
+          <a:blip r:embed="rId5">
+            <a:extLst>
+              <a:ext uri="{28A0092B-C50C-407E-A947-70E740481C1C}">
+                <a14:useLocalDpi xmlns:a14="http://schemas.microsoft.com/office/drawing/2010/main" val="0"/>
+              </a:ext>
+            </a:extLst>
+          </a:blip>
+          <a:srcRect/>
+          <a:stretch>
+            <a:fillRect/>
+          </a:stretch>
+        </p:blipFill>
+        <p:spPr bwMode="auto">
+          <a:xfrm>
+            <a:off x="8739264" y="70305"/>
+            <a:ext cx="3252085" cy="2168057"/>
+          </a:xfrm>
+          <a:prstGeom prst="rect">
+            <a:avLst/>
+          </a:prstGeom>
+          <a:noFill/>
+          <a:extLst>
+            <a:ext uri="{909E8E84-426E-40DD-AFC4-6F175D3DCCD1}">
+              <a14:hiddenFill xmlns:a14="http://schemas.microsoft.com/office/drawing/2010/main">
+                <a:solidFill>
+                  <a:srgbClr val="FFFFFF"/>
+                </a:solidFill>
+              </a14:hiddenFill>
+            </a:ext>
+          </a:extLst>
+        </p:spPr>
+      </p:pic>
+      <p:sp>
+        <p:nvSpPr>
+          <p:cNvPr id="9" name="CaixaDeTexto 8">
+            <a:extLst>
+              <a:ext uri="{FF2B5EF4-FFF2-40B4-BE49-F238E27FC236}">
+                <a16:creationId xmlns:a16="http://schemas.microsoft.com/office/drawing/2014/main" id="{985D7B09-9BD8-C772-923A-E9C4FBA45B2B}"/>
+              </a:ext>
+            </a:extLst>
+          </p:cNvPr>
+          <p:cNvSpPr txBox="1"/>
+          <p:nvPr/>
+        </p:nvSpPr>
+        <p:spPr>
+          <a:xfrm>
+            <a:off x="1101549" y="6284204"/>
+            <a:ext cx="9988902" cy="586764"/>
+          </a:xfrm>
+          <a:prstGeom prst="rect">
+            <a:avLst/>
+          </a:prstGeom>
+          <a:noFill/>
+        </p:spPr>
+        <p:txBody>
+          <a:bodyPr wrap="square">
+            <a:spAutoFit/>
+          </a:bodyPr>
+          <a:lstStyle/>
+          <a:p>
+            <a:pPr>
+              <a:lnSpc>
+                <a:spcPct val="150000"/>
+              </a:lnSpc>
+              <a:spcAft>
+                <a:spcPts val="110"/>
+              </a:spcAft>
+            </a:pPr>
+            <a:r>
+              <a:rPr lang="pt-BR" sz="1100" b="1" baseline="30000" dirty="0"/>
+              <a:t>1</a:t>
+            </a:r>
+            <a:r>
+              <a:rPr lang="pt-BR" sz="1100" b="1" dirty="0"/>
+              <a:t>https://thomasvconti.com.br/2017/dossie-armas-violencia-e-crimes-o-que-nos-dizem-61-pesquisas-recentes/#resumo</a:t>
+            </a:r>
+          </a:p>
+          <a:p>
+            <a:pPr>
+              <a:lnSpc>
+                <a:spcPct val="150000"/>
+              </a:lnSpc>
+              <a:spcAft>
+                <a:spcPts val="110"/>
+              </a:spcAft>
+            </a:pPr>
+            <a:r>
+              <a:rPr lang="pt-BR" sz="1100" b="1" baseline="30000" dirty="0"/>
+              <a:t>2</a:t>
+            </a:r>
+            <a:r>
+              <a:rPr lang="pt-BR" sz="1100" b="1" dirty="0"/>
+              <a:t>https://forumseguranca.org.br/</a:t>
+            </a:r>
+            <a:r>
+              <a:rPr lang="pt-BR" sz="1100" b="1" dirty="0" err="1"/>
+              <a:t>wp-content</a:t>
+            </a:r>
+            <a:r>
+              <a:rPr lang="pt-BR" sz="1100" b="1" dirty="0"/>
+              <a:t>/uploads/2022/09/informe-armas-fogo-homicidios-no-brasil.pdf</a:t>
             </a:r>
           </a:p>
         </p:txBody>
@@ -8681,7 +9399,7 @@
     </p:spTree>
     <p:extLst>
       <p:ext uri="{BB962C8B-B14F-4D97-AF65-F5344CB8AC3E}">
-        <p14:creationId xmlns:p14="http://schemas.microsoft.com/office/powerpoint/2010/main" val="204840894"/>
+        <p14:creationId xmlns:p14="http://schemas.microsoft.com/office/powerpoint/2010/main" val="3554767980"/>
       </p:ext>
     </p:extLst>
   </p:cSld>
@@ -8795,7 +9513,7 @@
                 <a:latin typeface="Cambria" panose="02040503050406030204" pitchFamily="18" charset="0"/>
                 <a:ea typeface="Cambria" panose="02040503050406030204" pitchFamily="18" charset="0"/>
               </a:rPr>
-              <a:t>Armas x Criminalidade</a:t>
+              <a:t>Luz x Criminalidade</a:t>
             </a:r>
           </a:p>
         </p:txBody>
@@ -8814,8 +9532,8 @@
         </p:nvSpPr>
         <p:spPr>
           <a:xfrm>
-            <a:off x="940904" y="1154334"/>
-            <a:ext cx="7647769" cy="967957"/>
+            <a:off x="940905" y="1154334"/>
+            <a:ext cx="7815330" cy="2851935"/>
           </a:xfrm>
           <a:prstGeom prst="rect">
             <a:avLst/>
@@ -8829,6 +9547,33 @@
           <a:lstStyle/>
           <a:p>
             <a:pPr marL="285750" indent="-285750">
+              <a:spcAft>
+                <a:spcPts val="110"/>
+              </a:spcAft>
+              <a:buFont typeface="Wingdings" panose="05000000000000000000" pitchFamily="2" charset="2"/>
+              <a:buChar char="Ø"/>
+            </a:pPr>
+            <a:r>
+              <a:rPr lang="pt-BR" sz="2800" b="1" dirty="0"/>
+              <a:t>Becker (1968) (Escolha racional):</a:t>
+            </a:r>
+            <a:r>
+              <a:rPr lang="pt-BR" sz="2800" dirty="0"/>
+              <a:t> o indivíduo comete o crime quando os benefícios esperados (financeiros ou psíquicos) superam os custos esperados.</a:t>
+            </a:r>
+          </a:p>
+          <a:p>
+            <a:pPr marL="342900" indent="-342900">
+              <a:spcAft>
+                <a:spcPts val="110"/>
+              </a:spcAft>
+              <a:buFont typeface="Wingdings" panose="05000000000000000000" pitchFamily="2" charset="2"/>
+              <a:buChar char="Ø"/>
+            </a:pPr>
+            <a:endParaRPr lang="pt-BR" sz="2800" b="1" dirty="0"/>
+          </a:p>
+          <a:p>
+            <a:pPr marL="285750" indent="-285750">
               <a:lnSpc>
                 <a:spcPct val="150000"/>
               </a:lnSpc>
@@ -8838,10 +9583,7 @@
               <a:buFont typeface="Wingdings" panose="05000000000000000000" pitchFamily="2" charset="2"/>
               <a:buChar char="Ø"/>
             </a:pPr>
-            <a:r>
-              <a:rPr lang="pt-BR" sz="2000" b="1" dirty="0"/>
-              <a:t>A relação de armas e criminalidade também é presente na literatura. </a:t>
-            </a:r>
+            <a:endParaRPr lang="pt-BR" sz="2800" b="1" dirty="0"/>
           </a:p>
         </p:txBody>
       </p:sp>
@@ -8939,119 +9681,12 @@
           </a:extLst>
         </p:spPr>
       </p:pic>
-      <p:sp>
-        <p:nvSpPr>
-          <p:cNvPr id="5" name="CaixaDeTexto 4">
-            <a:extLst>
-              <a:ext uri="{FF2B5EF4-FFF2-40B4-BE49-F238E27FC236}">
-                <a16:creationId xmlns:a16="http://schemas.microsoft.com/office/drawing/2014/main" id="{F8513A2C-EFAD-349F-ECA3-4EE11292D1C6}"/>
-              </a:ext>
-            </a:extLst>
-          </p:cNvPr>
-          <p:cNvSpPr txBox="1"/>
-          <p:nvPr/>
-        </p:nvSpPr>
-        <p:spPr>
-          <a:xfrm>
-            <a:off x="940903" y="2305953"/>
-            <a:ext cx="11050446" cy="3789242"/>
-          </a:xfrm>
-          <a:prstGeom prst="rect">
-            <a:avLst/>
-          </a:prstGeom>
-          <a:noFill/>
-        </p:spPr>
-        <p:txBody>
-          <a:bodyPr wrap="square" rtlCol="0">
-            <a:spAutoFit/>
-          </a:bodyPr>
-          <a:lstStyle/>
-          <a:p>
-            <a:pPr marL="285750" indent="-285750">
-              <a:lnSpc>
-                <a:spcPct val="150000"/>
-              </a:lnSpc>
-              <a:spcAft>
-                <a:spcPts val="110"/>
-              </a:spcAft>
-              <a:buFont typeface="Wingdings" panose="05000000000000000000" pitchFamily="2" charset="2"/>
-              <a:buChar char="Ø"/>
-            </a:pPr>
-            <a:r>
-              <a:rPr lang="pt-BR" sz="2000" b="1" dirty="0"/>
-              <a:t>Problemas: violência é um fenômeno complexo e de multifatorial e estimar a quantidade de armas em circulação é desafiador.</a:t>
-            </a:r>
-          </a:p>
-          <a:p>
-            <a:pPr marL="285750" indent="-285750">
-              <a:lnSpc>
-                <a:spcPct val="150000"/>
-              </a:lnSpc>
-              <a:spcAft>
-                <a:spcPts val="110"/>
-              </a:spcAft>
-              <a:buFont typeface="Wingdings" panose="05000000000000000000" pitchFamily="2" charset="2"/>
-              <a:buChar char="Ø"/>
-            </a:pPr>
-            <a:endParaRPr lang="pt-BR" sz="2000" b="1" dirty="0"/>
-          </a:p>
-          <a:p>
-            <a:pPr marL="285750" indent="-285750">
-              <a:lnSpc>
-                <a:spcPct val="150000"/>
-              </a:lnSpc>
-              <a:spcAft>
-                <a:spcPts val="110"/>
-              </a:spcAft>
-              <a:buFont typeface="Wingdings" panose="05000000000000000000" pitchFamily="2" charset="2"/>
-              <a:buChar char="Ø"/>
-            </a:pPr>
-            <a:r>
-              <a:rPr lang="pt-BR" sz="2000" b="1" dirty="0"/>
-              <a:t>No Brasil, a obra de Daniel Cerqueira (“Menos Armas, Menos Crimes”) se destaca, defendendo que a redução na circulação de armas de fogo esteve associada a uma queda nos homicídios no período pós-Estatuto.</a:t>
-            </a:r>
-          </a:p>
-          <a:p>
-            <a:pPr marL="285750" indent="-285750">
-              <a:lnSpc>
-                <a:spcPct val="150000"/>
-              </a:lnSpc>
-              <a:spcAft>
-                <a:spcPts val="110"/>
-              </a:spcAft>
-              <a:buFont typeface="Wingdings" panose="05000000000000000000" pitchFamily="2" charset="2"/>
-              <a:buChar char="Ø"/>
-            </a:pPr>
-            <a:endParaRPr lang="pt-BR" sz="2000" b="1" dirty="0"/>
-          </a:p>
-          <a:p>
-            <a:pPr marL="285750" indent="-285750">
-              <a:lnSpc>
-                <a:spcPct val="150000"/>
-              </a:lnSpc>
-              <a:spcAft>
-                <a:spcPts val="110"/>
-              </a:spcAft>
-              <a:buFont typeface="Wingdings" panose="05000000000000000000" pitchFamily="2" charset="2"/>
-              <a:buChar char="Ø"/>
-            </a:pPr>
-            <a:r>
-              <a:rPr lang="pt-BR" sz="2000" b="1" dirty="0"/>
-              <a:t>Maioria das Revisões de Literatura são contrárias à tese “Mais Armas, Menos Crimes”</a:t>
-            </a:r>
-            <a:r>
-              <a:rPr lang="pt-BR" sz="2000" b="1" baseline="30000" dirty="0"/>
-              <a:t>1,2</a:t>
-            </a:r>
-          </a:p>
-        </p:txBody>
-      </p:sp>
       <p:pic>
         <p:nvPicPr>
-          <p:cNvPr id="1030" name="Picture 6" descr="arma, pistola, automática (Pixabay/Reprodução)">
-            <a:extLst>
-              <a:ext uri="{FF2B5EF4-FFF2-40B4-BE49-F238E27FC236}">
-                <a16:creationId xmlns:a16="http://schemas.microsoft.com/office/drawing/2014/main" id="{BAA8555A-A9C9-35F7-8A61-79165A878D49}"/>
+          <p:cNvPr id="2050" name="Picture 2" descr="perigoso Criminoso. silhueta do bandidos, criminosos com a irreconhecível  face dentro ameaçador pose às noite em Sombrio rua. 42707152 Foto de stock  no Vecteezy">
+            <a:extLst>
+              <a:ext uri="{FF2B5EF4-FFF2-40B4-BE49-F238E27FC236}">
+                <a16:creationId xmlns:a16="http://schemas.microsoft.com/office/drawing/2014/main" id="{D5753060-8B2D-376B-A341-C1A929AB6692}"/>
               </a:ext>
             </a:extLst>
           </p:cNvPr>
@@ -9075,8 +9710,8 @@
         </p:blipFill>
         <p:spPr bwMode="auto">
           <a:xfrm>
-            <a:off x="8739264" y="70305"/>
-            <a:ext cx="3252085" cy="2168057"/>
+            <a:off x="8799226" y="140678"/>
+            <a:ext cx="3139893" cy="2093262"/>
           </a:xfrm>
           <a:prstGeom prst="rect">
             <a:avLst/>
@@ -9095,10 +9730,10 @@
       </p:pic>
       <p:sp>
         <p:nvSpPr>
-          <p:cNvPr id="9" name="CaixaDeTexto 8">
-            <a:extLst>
-              <a:ext uri="{FF2B5EF4-FFF2-40B4-BE49-F238E27FC236}">
-                <a16:creationId xmlns:a16="http://schemas.microsoft.com/office/drawing/2014/main" id="{985D7B09-9BD8-C772-923A-E9C4FBA45B2B}"/>
+          <p:cNvPr id="5" name="CaixaDeTexto 4">
+            <a:extLst>
+              <a:ext uri="{FF2B5EF4-FFF2-40B4-BE49-F238E27FC236}">
+                <a16:creationId xmlns:a16="http://schemas.microsoft.com/office/drawing/2014/main" id="{E0FCEFC3-016C-BECB-5C9F-C81ABE58A50B}"/>
               </a:ext>
             </a:extLst>
           </p:cNvPr>
@@ -9107,8 +9742,8 @@
         </p:nvSpPr>
         <p:spPr>
           <a:xfrm>
-            <a:off x="1101549" y="6284204"/>
-            <a:ext cx="9988902" cy="586764"/>
+            <a:off x="940905" y="3250650"/>
+            <a:ext cx="10569561" cy="2677656"/>
           </a:xfrm>
           <a:prstGeom prst="rect">
             <a:avLst/>
@@ -9121,47 +9756,38 @@
           </a:bodyPr>
           <a:lstStyle/>
           <a:p>
-            <a:pPr>
-              <a:lnSpc>
-                <a:spcPct val="150000"/>
-              </a:lnSpc>
-              <a:spcAft>
-                <a:spcPts val="110"/>
-              </a:spcAft>
+            <a:pPr marL="342900" indent="-342900" rtl="0">
+              <a:buFont typeface="Wingdings" panose="05000000000000000000" pitchFamily="2" charset="2"/>
+              <a:buChar char="Ø"/>
             </a:pPr>
             <a:r>
-              <a:rPr lang="pt-BR" sz="1100" b="1" baseline="30000" dirty="0"/>
-              <a:t>1</a:t>
-            </a:r>
-            <a:r>
-              <a:rPr lang="pt-BR" sz="1100" b="1" dirty="0"/>
-              <a:t>https://thomasvconti.com.br/2017/dossie-armas-violencia-e-crimes-o-que-nos-dizem-61-pesquisas-recentes/#resumo</a:t>
-            </a:r>
-          </a:p>
-          <a:p>
-            <a:pPr>
-              <a:lnSpc>
-                <a:spcPct val="150000"/>
-              </a:lnSpc>
-              <a:spcAft>
-                <a:spcPts val="110"/>
-              </a:spcAft>
+              <a:rPr lang="pt-BR" sz="2800" b="1" dirty="0"/>
+              <a:t>Dissuasão: </a:t>
+            </a:r>
+            <a:r>
+              <a:rPr lang="pt-BR" sz="2800" dirty="0"/>
+              <a:t>a probabilidade de captura é um dos principais fatores que inibem o crime.</a:t>
+            </a:r>
+          </a:p>
+          <a:p>
+            <a:pPr marL="342900" indent="-342900" rtl="0">
+              <a:buFont typeface="Wingdings" panose="05000000000000000000" pitchFamily="2" charset="2"/>
+              <a:buChar char="Ø"/>
             </a:pPr>
-            <a:r>
-              <a:rPr lang="pt-BR" sz="1100" b="1" baseline="30000" dirty="0"/>
-              <a:t>2</a:t>
-            </a:r>
-            <a:r>
-              <a:rPr lang="pt-BR" sz="1100" b="1" dirty="0"/>
-              <a:t>https://forumseguranca.org.br/</a:t>
-            </a:r>
-            <a:r>
-              <a:rPr lang="pt-BR" sz="1100" b="1" dirty="0" err="1"/>
-              <a:t>wp-content</a:t>
-            </a:r>
-            <a:r>
-              <a:rPr lang="pt-BR" sz="1100" b="1" dirty="0"/>
-              <a:t>/uploads/2022/09/informe-armas-fogo-homicidios-no-brasil.pdf</a:t>
+            <a:endParaRPr lang="pt-BR" sz="2800" dirty="0"/>
+          </a:p>
+          <a:p>
+            <a:pPr marL="342900" indent="-342900" rtl="0">
+              <a:buFont typeface="Wingdings" panose="05000000000000000000" pitchFamily="2" charset="2"/>
+              <a:buChar char="Ø"/>
+            </a:pPr>
+            <a:r>
+              <a:rPr lang="pt-BR" sz="2800" b="1" dirty="0"/>
+              <a:t>Hipótese: </a:t>
+            </a:r>
+            <a:r>
+              <a:rPr lang="pt-BR" sz="2800" dirty="0"/>
+              <a:t>mais luminosidade significa mais testemunhas e mais facilidade para identificar os autores, o que aumenta a probabilidade de captura.</a:t>
             </a:r>
           </a:p>
         </p:txBody>
@@ -9169,7 +9795,7 @@
     </p:spTree>
     <p:extLst>
       <p:ext uri="{BB962C8B-B14F-4D97-AF65-F5344CB8AC3E}">
-        <p14:creationId xmlns:p14="http://schemas.microsoft.com/office/powerpoint/2010/main" val="3554767980"/>
+        <p14:creationId xmlns:p14="http://schemas.microsoft.com/office/powerpoint/2010/main" val="1536836101"/>
       </p:ext>
     </p:extLst>
   </p:cSld>
@@ -9288,75 +9914,6 @@
           </a:p>
         </p:txBody>
       </p:sp>
-      <p:sp>
-        <p:nvSpPr>
-          <p:cNvPr id="14" name="CaixaDeTexto 13">
-            <a:extLst>
-              <a:ext uri="{FF2B5EF4-FFF2-40B4-BE49-F238E27FC236}">
-                <a16:creationId xmlns:a16="http://schemas.microsoft.com/office/drawing/2014/main" id="{427DBFEB-81BF-4CC3-A411-FBF43D295C56}"/>
-              </a:ext>
-            </a:extLst>
-          </p:cNvPr>
-          <p:cNvSpPr txBox="1"/>
-          <p:nvPr/>
-        </p:nvSpPr>
-        <p:spPr>
-          <a:xfrm>
-            <a:off x="940905" y="1154334"/>
-            <a:ext cx="7815330" cy="2851935"/>
-          </a:xfrm>
-          <a:prstGeom prst="rect">
-            <a:avLst/>
-          </a:prstGeom>
-          <a:noFill/>
-        </p:spPr>
-        <p:txBody>
-          <a:bodyPr wrap="square" rtlCol="0">
-            <a:spAutoFit/>
-          </a:bodyPr>
-          <a:lstStyle/>
-          <a:p>
-            <a:pPr marL="285750" indent="-285750">
-              <a:spcAft>
-                <a:spcPts val="110"/>
-              </a:spcAft>
-              <a:buFont typeface="Wingdings" panose="05000000000000000000" pitchFamily="2" charset="2"/>
-              <a:buChar char="Ø"/>
-            </a:pPr>
-            <a:r>
-              <a:rPr lang="pt-BR" sz="2800" b="1" dirty="0"/>
-              <a:t>Becker (1968) (Escolha racional):</a:t>
-            </a:r>
-            <a:r>
-              <a:rPr lang="pt-BR" sz="2800" dirty="0"/>
-              <a:t> o indivíduo comete o crime quando os benefícios esperados (financeiros ou psíquicos) superam os custos esperados.</a:t>
-            </a:r>
-          </a:p>
-          <a:p>
-            <a:pPr marL="342900" indent="-342900">
-              <a:spcAft>
-                <a:spcPts val="110"/>
-              </a:spcAft>
-              <a:buFont typeface="Wingdings" panose="05000000000000000000" pitchFamily="2" charset="2"/>
-              <a:buChar char="Ø"/>
-            </a:pPr>
-            <a:endParaRPr lang="pt-BR" sz="2800" b="1" dirty="0"/>
-          </a:p>
-          <a:p>
-            <a:pPr marL="285750" indent="-285750">
-              <a:lnSpc>
-                <a:spcPct val="150000"/>
-              </a:lnSpc>
-              <a:spcAft>
-                <a:spcPts val="110"/>
-              </a:spcAft>
-              <a:buFont typeface="Wingdings" panose="05000000000000000000" pitchFamily="2" charset="2"/>
-              <a:buChar char="Ø"/>
-            </a:pPr>
-            <a:endParaRPr lang="pt-BR" sz="2800" b="1" dirty="0"/>
-          </a:p>
-        </p:txBody>
-      </p:sp>
       <p:pic>
         <p:nvPicPr>
           <p:cNvPr id="2" name="Picture 2" descr="UFRGS na Serra | Visão de futuro e coragem para inovar">
@@ -9453,333 +10010,6 @@
       </p:pic>
       <p:pic>
         <p:nvPicPr>
-          <p:cNvPr id="2050" name="Picture 2" descr="perigoso Criminoso. silhueta do bandidos, criminosos com a irreconhecível  face dentro ameaçador pose às noite em Sombrio rua. 42707152 Foto de stock  no Vecteezy">
-            <a:extLst>
-              <a:ext uri="{FF2B5EF4-FFF2-40B4-BE49-F238E27FC236}">
-                <a16:creationId xmlns:a16="http://schemas.microsoft.com/office/drawing/2014/main" id="{D5753060-8B2D-376B-A341-C1A929AB6692}"/>
-              </a:ext>
-            </a:extLst>
-          </p:cNvPr>
-          <p:cNvPicPr>
-            <a:picLocks noChangeAspect="1" noChangeArrowheads="1"/>
-          </p:cNvPicPr>
-          <p:nvPr/>
-        </p:nvPicPr>
-        <p:blipFill>
-          <a:blip r:embed="rId5">
-            <a:extLst>
-              <a:ext uri="{28A0092B-C50C-407E-A947-70E740481C1C}">
-                <a14:useLocalDpi xmlns:a14="http://schemas.microsoft.com/office/drawing/2010/main" val="0"/>
-              </a:ext>
-            </a:extLst>
-          </a:blip>
-          <a:srcRect/>
-          <a:stretch>
-            <a:fillRect/>
-          </a:stretch>
-        </p:blipFill>
-        <p:spPr bwMode="auto">
-          <a:xfrm>
-            <a:off x="8799226" y="140678"/>
-            <a:ext cx="3139893" cy="2093262"/>
-          </a:xfrm>
-          <a:prstGeom prst="rect">
-            <a:avLst/>
-          </a:prstGeom>
-          <a:noFill/>
-          <a:extLst>
-            <a:ext uri="{909E8E84-426E-40DD-AFC4-6F175D3DCCD1}">
-              <a14:hiddenFill xmlns:a14="http://schemas.microsoft.com/office/drawing/2010/main">
-                <a:solidFill>
-                  <a:srgbClr val="FFFFFF"/>
-                </a:solidFill>
-              </a14:hiddenFill>
-            </a:ext>
-          </a:extLst>
-        </p:spPr>
-      </p:pic>
-      <p:sp>
-        <p:nvSpPr>
-          <p:cNvPr id="5" name="CaixaDeTexto 4">
-            <a:extLst>
-              <a:ext uri="{FF2B5EF4-FFF2-40B4-BE49-F238E27FC236}">
-                <a16:creationId xmlns:a16="http://schemas.microsoft.com/office/drawing/2014/main" id="{E0FCEFC3-016C-BECB-5C9F-C81ABE58A50B}"/>
-              </a:ext>
-            </a:extLst>
-          </p:cNvPr>
-          <p:cNvSpPr txBox="1"/>
-          <p:nvPr/>
-        </p:nvSpPr>
-        <p:spPr>
-          <a:xfrm>
-            <a:off x="940905" y="3250650"/>
-            <a:ext cx="10569561" cy="2677656"/>
-          </a:xfrm>
-          <a:prstGeom prst="rect">
-            <a:avLst/>
-          </a:prstGeom>
-          <a:noFill/>
-        </p:spPr>
-        <p:txBody>
-          <a:bodyPr wrap="square">
-            <a:spAutoFit/>
-          </a:bodyPr>
-          <a:lstStyle/>
-          <a:p>
-            <a:pPr marL="342900" indent="-342900" rtl="0">
-              <a:buFont typeface="Wingdings" panose="05000000000000000000" pitchFamily="2" charset="2"/>
-              <a:buChar char="Ø"/>
-            </a:pPr>
-            <a:r>
-              <a:rPr lang="pt-BR" sz="2800" b="1" dirty="0"/>
-              <a:t>Dissuasão: </a:t>
-            </a:r>
-            <a:r>
-              <a:rPr lang="pt-BR" sz="2800" dirty="0"/>
-              <a:t>a probabilidade de captura é um dos principais fatores que inibem o crime.</a:t>
-            </a:r>
-          </a:p>
-          <a:p>
-            <a:pPr marL="342900" indent="-342900" rtl="0">
-              <a:buFont typeface="Wingdings" panose="05000000000000000000" pitchFamily="2" charset="2"/>
-              <a:buChar char="Ø"/>
-            </a:pPr>
-            <a:endParaRPr lang="pt-BR" sz="2800" dirty="0"/>
-          </a:p>
-          <a:p>
-            <a:pPr marL="342900" indent="-342900" rtl="0">
-              <a:buFont typeface="Wingdings" panose="05000000000000000000" pitchFamily="2" charset="2"/>
-              <a:buChar char="Ø"/>
-            </a:pPr>
-            <a:r>
-              <a:rPr lang="pt-BR" sz="2800" b="1" dirty="0"/>
-              <a:t>Hipótese: </a:t>
-            </a:r>
-            <a:r>
-              <a:rPr lang="pt-BR" sz="2800" dirty="0"/>
-              <a:t>mais luminosidade significa mais testemunhas e mais facilidade para identificar os autores, o que aumenta a probabilidade de captura.</a:t>
-            </a:r>
-          </a:p>
-        </p:txBody>
-      </p:sp>
-    </p:spTree>
-    <p:extLst>
-      <p:ext uri="{BB962C8B-B14F-4D97-AF65-F5344CB8AC3E}">
-        <p14:creationId xmlns:p14="http://schemas.microsoft.com/office/powerpoint/2010/main" val="1536836101"/>
-      </p:ext>
-    </p:extLst>
-  </p:cSld>
-  <p:clrMapOvr>
-    <a:masterClrMapping/>
-  </p:clrMapOvr>
-  <mc:AlternateContent xmlns:mc="http://schemas.openxmlformats.org/markup-compatibility/2006" xmlns:p159="http://schemas.microsoft.com/office/powerpoint/2015/09/main">
-    <mc:Choice Requires="p159">
-      <p:transition xmlns:p14="http://schemas.microsoft.com/office/powerpoint/2010/main" spd="slow" p14:dur="1250">
-        <p159:morph option="byObject"/>
-      </p:transition>
-    </mc:Choice>
-    <mc:Fallback xmlns="">
-      <p:transition spd="slow">
-        <p:fade/>
-      </p:transition>
-    </mc:Fallback>
-  </mc:AlternateContent>
-</p:sld>
-</file>
-
-<file path=ppt/slides/slide13.xml><?xml version="1.0" encoding="utf-8"?>
-<p:sld xmlns:a="http://schemas.openxmlformats.org/drawingml/2006/main" xmlns:r="http://schemas.openxmlformats.org/officeDocument/2006/relationships" xmlns:p="http://schemas.openxmlformats.org/presentationml/2006/main">
-  <p:cSld>
-    <p:spTree>
-      <p:nvGrpSpPr>
-        <p:cNvPr id="1" name=""/>
-        <p:cNvGrpSpPr/>
-        <p:nvPr/>
-      </p:nvGrpSpPr>
-      <p:grpSpPr>
-        <a:xfrm>
-          <a:off x="0" y="0"/>
-          <a:ext cx="0" cy="0"/>
-          <a:chOff x="0" y="0"/>
-          <a:chExt cx="0" cy="0"/>
-        </a:xfrm>
-      </p:grpSpPr>
-      <p:cxnSp>
-        <p:nvCxnSpPr>
-          <p:cNvPr id="7" name="Conector reto 6">
-            <a:extLst>
-              <a:ext uri="{FF2B5EF4-FFF2-40B4-BE49-F238E27FC236}">
-                <a16:creationId xmlns:a16="http://schemas.microsoft.com/office/drawing/2014/main" id="{280B8309-4572-4E27-8B6F-D29679313292}"/>
-              </a:ext>
-            </a:extLst>
-          </p:cNvPr>
-          <p:cNvCxnSpPr>
-            <a:cxnSpLocks/>
-          </p:cNvCxnSpPr>
-          <p:nvPr/>
-        </p:nvCxnSpPr>
-        <p:spPr>
-          <a:xfrm>
-            <a:off x="-112541" y="970671"/>
-            <a:ext cx="8328073" cy="0"/>
-          </a:xfrm>
-          <a:prstGeom prst="line">
-            <a:avLst/>
-          </a:prstGeom>
-          <a:ln w="38100"/>
-        </p:spPr>
-        <p:style>
-          <a:lnRef idx="1">
-            <a:schemeClr val="accent1"/>
-          </a:lnRef>
-          <a:fillRef idx="0">
-            <a:schemeClr val="accent1"/>
-          </a:fillRef>
-          <a:effectRef idx="0">
-            <a:schemeClr val="accent1"/>
-          </a:effectRef>
-          <a:fontRef idx="minor">
-            <a:schemeClr val="tx1"/>
-          </a:fontRef>
-        </p:style>
-      </p:cxnSp>
-      <p:sp>
-        <p:nvSpPr>
-          <p:cNvPr id="8" name="CaixaDeTexto 7">
-            <a:extLst>
-              <a:ext uri="{FF2B5EF4-FFF2-40B4-BE49-F238E27FC236}">
-                <a16:creationId xmlns:a16="http://schemas.microsoft.com/office/drawing/2014/main" id="{39AE06C5-34BE-4D68-97C3-4C07702C2DF6}"/>
-              </a:ext>
-            </a:extLst>
-          </p:cNvPr>
-          <p:cNvSpPr txBox="1"/>
-          <p:nvPr/>
-        </p:nvSpPr>
-        <p:spPr>
-          <a:xfrm>
-            <a:off x="1103819" y="140678"/>
-            <a:ext cx="7815329" cy="646331"/>
-          </a:xfrm>
-          <a:prstGeom prst="rect">
-            <a:avLst/>
-          </a:prstGeom>
-          <a:noFill/>
-        </p:spPr>
-        <p:txBody>
-          <a:bodyPr wrap="square" rtlCol="0">
-            <a:spAutoFit/>
-          </a:bodyPr>
-          <a:lstStyle/>
-          <a:p>
-            <a:r>
-              <a:rPr lang="pt-BR" sz="3600" b="1" dirty="0">
-                <a:solidFill>
-                  <a:srgbClr val="002060"/>
-                </a:solidFill>
-                <a:latin typeface="Cambria" panose="02040503050406030204" pitchFamily="18" charset="0"/>
-                <a:ea typeface="Cambria" panose="02040503050406030204" pitchFamily="18" charset="0"/>
-              </a:rPr>
-              <a:t>Luz x Criminalidade</a:t>
-            </a:r>
-          </a:p>
-        </p:txBody>
-      </p:sp>
-      <p:pic>
-        <p:nvPicPr>
-          <p:cNvPr id="2" name="Picture 2" descr="UFRGS na Serra | Visão de futuro e coragem para inovar">
-            <a:extLst>
-              <a:ext uri="{FF2B5EF4-FFF2-40B4-BE49-F238E27FC236}">
-                <a16:creationId xmlns:a16="http://schemas.microsoft.com/office/drawing/2014/main" id="{567C8E3D-C535-EC50-849C-270CEB4B8A04}"/>
-              </a:ext>
-            </a:extLst>
-          </p:cNvPr>
-          <p:cNvPicPr>
-            <a:picLocks noChangeAspect="1" noChangeArrowheads="1"/>
-          </p:cNvPicPr>
-          <p:nvPr/>
-        </p:nvPicPr>
-        <p:blipFill>
-          <a:blip r:embed="rId3">
-            <a:extLst>
-              <a:ext uri="{28A0092B-C50C-407E-A947-70E740481C1C}">
-                <a14:useLocalDpi xmlns:a14="http://schemas.microsoft.com/office/drawing/2010/main" val="0"/>
-              </a:ext>
-            </a:extLst>
-          </a:blip>
-          <a:srcRect/>
-          <a:stretch>
-            <a:fillRect/>
-          </a:stretch>
-        </p:blipFill>
-        <p:spPr bwMode="auto">
-          <a:xfrm>
-            <a:off x="119922" y="6346096"/>
-            <a:ext cx="683614" cy="445109"/>
-          </a:xfrm>
-          <a:prstGeom prst="rect">
-            <a:avLst/>
-          </a:prstGeom>
-          <a:noFill/>
-          <a:extLst>
-            <a:ext uri="{909E8E84-426E-40DD-AFC4-6F175D3DCCD1}">
-              <a14:hiddenFill xmlns:a14="http://schemas.microsoft.com/office/drawing/2010/main">
-                <a:solidFill>
-                  <a:srgbClr val="FFFFFF"/>
-                </a:solidFill>
-              </a14:hiddenFill>
-            </a:ext>
-          </a:extLst>
-        </p:spPr>
-      </p:pic>
-      <p:pic>
-        <p:nvPicPr>
-          <p:cNvPr id="3" name="Picture 4">
-            <a:extLst>
-              <a:ext uri="{FF2B5EF4-FFF2-40B4-BE49-F238E27FC236}">
-                <a16:creationId xmlns:a16="http://schemas.microsoft.com/office/drawing/2014/main" id="{C9663204-9A6C-C5D7-7C9B-AAF5653911D6}"/>
-              </a:ext>
-            </a:extLst>
-          </p:cNvPr>
-          <p:cNvPicPr>
-            <a:picLocks noChangeAspect="1" noChangeArrowheads="1"/>
-          </p:cNvPicPr>
-          <p:nvPr/>
-        </p:nvPicPr>
-        <p:blipFill>
-          <a:blip r:embed="rId4">
-            <a:extLst>
-              <a:ext uri="{28A0092B-C50C-407E-A947-70E740481C1C}">
-                <a14:useLocalDpi xmlns:a14="http://schemas.microsoft.com/office/drawing/2010/main" val="0"/>
-              </a:ext>
-            </a:extLst>
-          </a:blip>
-          <a:srcRect/>
-          <a:stretch>
-            <a:fillRect/>
-          </a:stretch>
-        </p:blipFill>
-        <p:spPr bwMode="auto">
-          <a:xfrm>
-            <a:off x="10802599" y="6212508"/>
-            <a:ext cx="1329440" cy="578697"/>
-          </a:xfrm>
-          <a:prstGeom prst="rect">
-            <a:avLst/>
-          </a:prstGeom>
-          <a:noFill/>
-          <a:extLst>
-            <a:ext uri="{909E8E84-426E-40DD-AFC4-6F175D3DCCD1}">
-              <a14:hiddenFill xmlns:a14="http://schemas.microsoft.com/office/drawing/2010/main">
-                <a:solidFill>
-                  <a:srgbClr val="FFFFFF"/>
-                </a:solidFill>
-              </a14:hiddenFill>
-            </a:ext>
-          </a:extLst>
-        </p:spPr>
-      </p:pic>
-      <p:pic>
-        <p:nvPicPr>
           <p:cNvPr id="6" name="Imagem 5">
             <a:extLst>
               <a:ext uri="{FF2B5EF4-FFF2-40B4-BE49-F238E27FC236}">
@@ -9914,7 +10144,7 @@
 </p:sld>
 </file>
 
-<file path=ppt/slides/slide14.xml><?xml version="1.0" encoding="utf-8"?>
+<file path=ppt/slides/slide13.xml><?xml version="1.0" encoding="utf-8"?>
 <p:sld xmlns:a="http://schemas.openxmlformats.org/drawingml/2006/main" xmlns:r="http://schemas.openxmlformats.org/officeDocument/2006/relationships" xmlns:p="http://schemas.openxmlformats.org/presentationml/2006/main">
   <p:cSld>
     <p:spTree>
@@ -10165,7 +10395,7 @@
 </p:sld>
 </file>
 
-<file path=ppt/slides/slide15.xml><?xml version="1.0" encoding="utf-8"?>
+<file path=ppt/slides/slide14.xml><?xml version="1.0" encoding="utf-8"?>
 <p:sld xmlns:a="http://schemas.openxmlformats.org/drawingml/2006/main" xmlns:r="http://schemas.openxmlformats.org/officeDocument/2006/relationships" xmlns:p="http://schemas.openxmlformats.org/presentationml/2006/main">
   <p:cSld>
     <p:spTree>
@@ -10235,8 +10465,8 @@
         </p:nvSpPr>
         <p:spPr>
           <a:xfrm>
-            <a:off x="779259" y="294626"/>
-            <a:ext cx="10633479" cy="523220"/>
+            <a:off x="1103819" y="140678"/>
+            <a:ext cx="7815329" cy="646331"/>
           </a:xfrm>
           <a:prstGeom prst="rect">
             <a:avLst/>
@@ -10250,32 +10480,15 @@
           <a:lstStyle/>
           <a:p>
             <a:r>
-              <a:rPr lang="pt-BR" sz="2800" b="1" dirty="0">
+              <a:rPr lang="pt-BR" sz="3600" b="1" dirty="0">
                 <a:solidFill>
                   <a:srgbClr val="002060"/>
                 </a:solidFill>
                 <a:latin typeface="Cambria" panose="02040503050406030204" pitchFamily="18" charset="0"/>
                 <a:ea typeface="Cambria" panose="02040503050406030204" pitchFamily="18" charset="0"/>
               </a:rPr>
-              <a:t>Reincidência Criminal: o Efeito Estigma de </a:t>
-            </a:r>
-            <a:r>
-              <a:rPr lang="pt-BR" sz="2800" b="1" dirty="0" err="1">
-                <a:solidFill>
-                  <a:srgbClr val="002060"/>
-                </a:solidFill>
-                <a:latin typeface="Cambria" panose="02040503050406030204" pitchFamily="18" charset="0"/>
-                <a:ea typeface="Cambria" panose="02040503050406030204" pitchFamily="18" charset="0"/>
-              </a:rPr>
-              <a:t>Ex-Presidiários</a:t>
-            </a:r>
-            <a:endParaRPr lang="pt-BR" sz="2800" b="1" dirty="0">
-              <a:solidFill>
-                <a:srgbClr val="002060"/>
-              </a:solidFill>
-              <a:latin typeface="Cambria" panose="02040503050406030204" pitchFamily="18" charset="0"/>
-              <a:ea typeface="Cambria" panose="02040503050406030204" pitchFamily="18" charset="0"/>
-            </a:endParaRPr>
+              <a:t>Tempo de Carreira Criminal</a:t>
+            </a:r>
           </a:p>
         </p:txBody>
       </p:sp>
@@ -10319,7 +10532,7 @@
             </a:pPr>
             <a:r>
               <a:rPr lang="pt-BR" sz="2000" b="1" dirty="0"/>
-              <a:t>Noções gerais sobre Estatística. </a:t>
+              <a:t>Curva idade-crime</a:t>
             </a:r>
           </a:p>
         </p:txBody>
@@ -10418,10 +10631,1396 @@
           </a:extLst>
         </p:spPr>
       </p:pic>
+      <p:graphicFrame>
+        <p:nvGraphicFramePr>
+          <p:cNvPr id="6" name="Chart 5">
+            <a:extLst>
+              <a:ext uri="{FF2B5EF4-FFF2-40B4-BE49-F238E27FC236}">
+                <a16:creationId xmlns:a16="http://schemas.microsoft.com/office/drawing/2014/main" id="{58EE9A4A-D221-8BD1-EC89-B091240DADA6}"/>
+              </a:ext>
+            </a:extLst>
+          </p:cNvPr>
+          <p:cNvGraphicFramePr>
+            <a:graphicFrameLocks noGrp="1"/>
+          </p:cNvGraphicFramePr>
+          <p:nvPr/>
+        </p:nvGraphicFramePr>
+        <p:xfrm>
+          <a:off x="548640" y="2331720"/>
+          <a:ext cx="6035040" cy="3566160"/>
+        </p:xfrm>
+        <a:graphic>
+          <a:graphicData uri="http://schemas.openxmlformats.org/drawingml/2006/chart">
+            <c:chart xmlns:c="http://schemas.openxmlformats.org/drawingml/2006/chart" xmlns:r="http://schemas.openxmlformats.org/officeDocument/2006/relationships" r:id="rId5"/>
+          </a:graphicData>
+        </a:graphic>
+      </p:graphicFrame>
+      <p:sp>
+        <p:nvSpPr>
+          <p:cNvPr id="9" name="TextBox 6">
+            <a:extLst>
+              <a:ext uri="{FF2B5EF4-FFF2-40B4-BE49-F238E27FC236}">
+                <a16:creationId xmlns:a16="http://schemas.microsoft.com/office/drawing/2014/main" id="{F3D738E0-9802-84AC-D1D0-0F6C3997DA9A}"/>
+              </a:ext>
+            </a:extLst>
+          </p:cNvPr>
+          <p:cNvSpPr txBox="1"/>
+          <p:nvPr/>
+        </p:nvSpPr>
+        <p:spPr>
+          <a:xfrm>
+            <a:off x="6903720" y="2377440"/>
+            <a:ext cx="4709160" cy="184666"/>
+          </a:xfrm>
+          <a:prstGeom prst="rect">
+            <a:avLst/>
+          </a:prstGeom>
+          <a:noFill/>
+        </p:spPr>
+        <p:txBody>
+          <a:bodyPr wrap="square" lIns="0" tIns="0" rIns="0" bIns="0" anchor="t">
+            <a:spAutoFit/>
+          </a:bodyPr>
+          <a:lstStyle/>
+          <a:p>
+            <a:pPr algn="l">
+              <a:lnSpc>
+                <a:spcPct val="100000"/>
+              </a:lnSpc>
+            </a:pPr>
+            <a:r>
+              <a:rPr sz="1200" b="1" i="0">
+                <a:solidFill>
+                  <a:srgbClr val="767676"/>
+                </a:solidFill>
+                <a:latin typeface="Calibri"/>
+              </a:rPr>
+              <a:t>O PICO ESTÁ ENVELHECENDO</a:t>
+            </a:r>
+          </a:p>
+        </p:txBody>
+      </p:sp>
+      <p:sp>
+        <p:nvSpPr>
+          <p:cNvPr id="10" name="TextBox 7">
+            <a:extLst>
+              <a:ext uri="{FF2B5EF4-FFF2-40B4-BE49-F238E27FC236}">
+                <a16:creationId xmlns:a16="http://schemas.microsoft.com/office/drawing/2014/main" id="{472D680D-5A60-F84E-BF35-612417316049}"/>
+              </a:ext>
+            </a:extLst>
+          </p:cNvPr>
+          <p:cNvSpPr txBox="1"/>
+          <p:nvPr/>
+        </p:nvSpPr>
+        <p:spPr>
+          <a:xfrm>
+            <a:off x="6903720" y="2697480"/>
+            <a:ext cx="4709160" cy="758349"/>
+          </a:xfrm>
+          <a:prstGeom prst="rect">
+            <a:avLst/>
+          </a:prstGeom>
+          <a:noFill/>
+        </p:spPr>
+        <p:txBody>
+          <a:bodyPr wrap="square" lIns="0" tIns="0" rIns="0" bIns="0" anchor="t">
+            <a:spAutoFit/>
+          </a:bodyPr>
+          <a:lstStyle/>
+          <a:p>
+            <a:pPr algn="l">
+              <a:lnSpc>
+                <a:spcPct val="120000"/>
+              </a:lnSpc>
+            </a:pPr>
+            <a:r>
+              <a:rPr sz="1400" b="0" i="0" dirty="0">
+                <a:solidFill>
+                  <a:srgbClr val="3A3A3A"/>
+                </a:solidFill>
+                <a:latin typeface="Calibri"/>
+              </a:rPr>
+              <a:t>Dados de </a:t>
+            </a:r>
+            <a:r>
+              <a:rPr sz="1400" b="0" i="0" dirty="0" err="1">
+                <a:solidFill>
+                  <a:srgbClr val="3A3A3A"/>
+                </a:solidFill>
+                <a:latin typeface="Calibri"/>
+              </a:rPr>
+              <a:t>prisões</a:t>
+            </a:r>
+            <a:r>
+              <a:rPr sz="1400" b="0" i="0" dirty="0">
+                <a:solidFill>
+                  <a:srgbClr val="3A3A3A"/>
+                </a:solidFill>
+                <a:latin typeface="Calibri"/>
+              </a:rPr>
+              <a:t> </a:t>
+            </a:r>
+            <a:r>
+              <a:rPr sz="1400" b="0" i="0" dirty="0" err="1">
+                <a:solidFill>
+                  <a:srgbClr val="3A3A3A"/>
+                </a:solidFill>
+                <a:latin typeface="Calibri"/>
+              </a:rPr>
+              <a:t>nos</a:t>
+            </a:r>
+            <a:r>
+              <a:rPr sz="1400" b="0" i="0" dirty="0">
+                <a:solidFill>
+                  <a:srgbClr val="3A3A3A"/>
+                </a:solidFill>
+                <a:latin typeface="Calibri"/>
+              </a:rPr>
+              <a:t> EUA </a:t>
+            </a:r>
+            <a:r>
+              <a:rPr sz="1400" b="0" i="0" dirty="0" err="1">
+                <a:solidFill>
+                  <a:srgbClr val="3A3A3A"/>
+                </a:solidFill>
+                <a:latin typeface="Calibri"/>
+              </a:rPr>
+              <a:t>em</a:t>
+            </a:r>
+            <a:r>
+              <a:rPr sz="1400" b="0" i="0" dirty="0">
+                <a:solidFill>
+                  <a:srgbClr val="3A3A3A"/>
+                </a:solidFill>
+                <a:latin typeface="Calibri"/>
+              </a:rPr>
+              <a:t> 2024 </a:t>
+            </a:r>
+            <a:r>
+              <a:rPr sz="1400" b="0" i="0" dirty="0" err="1">
+                <a:solidFill>
+                  <a:srgbClr val="3A3A3A"/>
+                </a:solidFill>
+                <a:latin typeface="Calibri"/>
+              </a:rPr>
+              <a:t>mostram</a:t>
+            </a:r>
+            <a:r>
+              <a:rPr sz="1400" b="0" i="0" dirty="0">
+                <a:solidFill>
+                  <a:srgbClr val="3A3A3A"/>
+                </a:solidFill>
+                <a:latin typeface="Calibri"/>
+              </a:rPr>
+              <a:t> a </a:t>
+            </a:r>
+            <a:r>
+              <a:rPr sz="1400" b="0" i="0" dirty="0" err="1">
+                <a:solidFill>
+                  <a:srgbClr val="3A3A3A"/>
+                </a:solidFill>
+                <a:latin typeface="Calibri"/>
+              </a:rPr>
+              <a:t>idade</a:t>
+            </a:r>
+            <a:r>
+              <a:rPr sz="1400" b="0" i="0" dirty="0">
+                <a:solidFill>
+                  <a:srgbClr val="3A3A3A"/>
+                </a:solidFill>
+                <a:latin typeface="Calibri"/>
+              </a:rPr>
+              <a:t> de </a:t>
+            </a:r>
+            <a:r>
+              <a:rPr sz="1400" b="0" i="0" dirty="0" err="1">
+                <a:solidFill>
+                  <a:srgbClr val="3A3A3A"/>
+                </a:solidFill>
+                <a:latin typeface="Calibri"/>
+              </a:rPr>
+              <a:t>pico</a:t>
+            </a:r>
+            <a:r>
+              <a:rPr sz="1400" b="0" i="0" dirty="0">
+                <a:solidFill>
+                  <a:srgbClr val="3A3A3A"/>
+                </a:solidFill>
+                <a:latin typeface="Calibri"/>
+              </a:rPr>
+              <a:t> </a:t>
+            </a:r>
+            <a:r>
+              <a:rPr sz="1400" b="0" i="0" dirty="0" err="1">
+                <a:solidFill>
+                  <a:srgbClr val="3A3A3A"/>
+                </a:solidFill>
+                <a:latin typeface="Calibri"/>
+              </a:rPr>
+              <a:t>próxima</a:t>
+            </a:r>
+            <a:r>
+              <a:rPr sz="1400" b="0" i="0" dirty="0">
+                <a:solidFill>
+                  <a:srgbClr val="3A3A3A"/>
+                </a:solidFill>
+                <a:latin typeface="Calibri"/>
+              </a:rPr>
+              <a:t> dos 32 </a:t>
+            </a:r>
+            <a:r>
+              <a:rPr sz="1400" b="0" i="0" dirty="0" err="1">
+                <a:solidFill>
+                  <a:srgbClr val="3A3A3A"/>
+                </a:solidFill>
+                <a:latin typeface="Calibri"/>
+              </a:rPr>
+              <a:t>anos</a:t>
+            </a:r>
+            <a:r>
+              <a:rPr sz="1400" b="0" i="0" dirty="0">
+                <a:solidFill>
+                  <a:srgbClr val="3A3A3A"/>
+                </a:solidFill>
+                <a:latin typeface="Calibri"/>
+              </a:rPr>
+              <a:t> — </a:t>
+            </a:r>
+            <a:r>
+              <a:rPr sz="1400" b="0" i="0" dirty="0" err="1">
+                <a:solidFill>
+                  <a:srgbClr val="3A3A3A"/>
+                </a:solidFill>
+                <a:latin typeface="Calibri"/>
+              </a:rPr>
+              <a:t>mais</a:t>
+            </a:r>
+            <a:r>
+              <a:rPr sz="1400" b="0" i="0" dirty="0">
+                <a:solidFill>
+                  <a:srgbClr val="3A3A3A"/>
+                </a:solidFill>
+                <a:latin typeface="Calibri"/>
+              </a:rPr>
+              <a:t> </a:t>
+            </a:r>
+            <a:r>
+              <a:rPr sz="1400" b="0" i="0" dirty="0" err="1">
+                <a:solidFill>
+                  <a:srgbClr val="3A3A3A"/>
+                </a:solidFill>
+                <a:latin typeface="Calibri"/>
+              </a:rPr>
+              <a:t>alta</a:t>
+            </a:r>
+            <a:r>
+              <a:rPr sz="1400" b="0" i="0" dirty="0">
+                <a:solidFill>
+                  <a:srgbClr val="3A3A3A"/>
+                </a:solidFill>
+                <a:latin typeface="Calibri"/>
+              </a:rPr>
+              <a:t> que </a:t>
+            </a:r>
+            <a:r>
+              <a:rPr sz="1400" b="0" i="0" dirty="0" err="1">
+                <a:solidFill>
+                  <a:srgbClr val="3A3A3A"/>
+                </a:solidFill>
+                <a:latin typeface="Calibri"/>
+              </a:rPr>
+              <a:t>os</a:t>
+            </a:r>
+            <a:r>
+              <a:rPr sz="1400" b="0" i="0" dirty="0">
+                <a:solidFill>
+                  <a:srgbClr val="3A3A3A"/>
+                </a:solidFill>
+                <a:latin typeface="Calibri"/>
+              </a:rPr>
+              <a:t> </a:t>
+            </a:r>
+            <a:r>
+              <a:rPr sz="1400" b="0" i="0" dirty="0" err="1">
+                <a:solidFill>
+                  <a:srgbClr val="3A3A3A"/>
+                </a:solidFill>
+                <a:latin typeface="Calibri"/>
+              </a:rPr>
+              <a:t>padrões</a:t>
+            </a:r>
+            <a:r>
+              <a:rPr sz="1400" b="0" i="0" dirty="0">
+                <a:solidFill>
+                  <a:srgbClr val="3A3A3A"/>
+                </a:solidFill>
+                <a:latin typeface="Calibri"/>
+              </a:rPr>
+              <a:t> </a:t>
+            </a:r>
+            <a:r>
+              <a:rPr sz="1400" b="0" i="0" dirty="0" err="1">
+                <a:solidFill>
+                  <a:srgbClr val="3A3A3A"/>
+                </a:solidFill>
+                <a:latin typeface="Calibri"/>
+              </a:rPr>
+              <a:t>históricos</a:t>
+            </a:r>
+            <a:r>
+              <a:rPr sz="1400" b="0" i="0" dirty="0">
+                <a:solidFill>
+                  <a:srgbClr val="3A3A3A"/>
+                </a:solidFill>
+                <a:latin typeface="Calibri"/>
+              </a:rPr>
+              <a:t> da curva </a:t>
+            </a:r>
+            <a:r>
+              <a:rPr sz="1400" b="0" i="0" dirty="0" err="1">
+                <a:solidFill>
+                  <a:srgbClr val="3A3A3A"/>
+                </a:solidFill>
+                <a:latin typeface="Calibri"/>
+              </a:rPr>
+              <a:t>idade</a:t>
+            </a:r>
+            <a:r>
+              <a:rPr sz="1400" b="0" i="0" dirty="0">
+                <a:solidFill>
+                  <a:srgbClr val="3A3A3A"/>
+                </a:solidFill>
+                <a:latin typeface="Calibri"/>
+              </a:rPr>
+              <a:t>-crime.</a:t>
+            </a:r>
+          </a:p>
+        </p:txBody>
+      </p:sp>
+      <p:sp>
+        <p:nvSpPr>
+          <p:cNvPr id="11" name="Rectangle 8">
+            <a:extLst>
+              <a:ext uri="{FF2B5EF4-FFF2-40B4-BE49-F238E27FC236}">
+                <a16:creationId xmlns:a16="http://schemas.microsoft.com/office/drawing/2014/main" id="{463AE348-FF9C-094B-31C9-092F747FF823}"/>
+              </a:ext>
+            </a:extLst>
+          </p:cNvPr>
+          <p:cNvSpPr/>
+          <p:nvPr/>
+        </p:nvSpPr>
+        <p:spPr>
+          <a:xfrm>
+            <a:off x="6903720" y="4069080"/>
+            <a:ext cx="4709160" cy="1737360"/>
+          </a:xfrm>
+          <a:prstGeom prst="rect">
+            <a:avLst/>
+          </a:prstGeom>
+          <a:solidFill>
+            <a:srgbClr val="ECECE9"/>
+          </a:solidFill>
+          <a:ln>
+            <a:noFill/>
+          </a:ln>
+          <a:effectLst/>
+        </p:spPr>
+        <p:style>
+          <a:lnRef idx="1">
+            <a:schemeClr val="accent1"/>
+          </a:lnRef>
+          <a:fillRef idx="3">
+            <a:schemeClr val="accent1"/>
+          </a:fillRef>
+          <a:effectRef idx="2">
+            <a:schemeClr val="accent1"/>
+          </a:effectRef>
+          <a:fontRef idx="minor">
+            <a:schemeClr val="lt1"/>
+          </a:fontRef>
+        </p:style>
+        <p:txBody>
+          <a:bodyPr rtlCol="0" anchor="ctr"/>
+          <a:lstStyle/>
+          <a:p>
+            <a:pPr algn="ctr"/>
+            <a:endParaRPr/>
+          </a:p>
+        </p:txBody>
+      </p:sp>
+      <p:sp>
+        <p:nvSpPr>
+          <p:cNvPr id="12" name="TextBox 10">
+            <a:extLst>
+              <a:ext uri="{FF2B5EF4-FFF2-40B4-BE49-F238E27FC236}">
+                <a16:creationId xmlns:a16="http://schemas.microsoft.com/office/drawing/2014/main" id="{E8C7AD1B-2FCE-2932-CAB2-FFF8012D7F25}"/>
+              </a:ext>
+            </a:extLst>
+          </p:cNvPr>
+          <p:cNvSpPr txBox="1"/>
+          <p:nvPr/>
+        </p:nvSpPr>
+        <p:spPr>
+          <a:xfrm>
+            <a:off x="7018020" y="4357431"/>
+            <a:ext cx="4594860" cy="1224246"/>
+          </a:xfrm>
+          <a:prstGeom prst="rect">
+            <a:avLst/>
+          </a:prstGeom>
+          <a:noFill/>
+        </p:spPr>
+        <p:txBody>
+          <a:bodyPr wrap="square" lIns="0" tIns="0" rIns="0" bIns="0" anchor="t">
+            <a:spAutoFit/>
+          </a:bodyPr>
+          <a:lstStyle/>
+          <a:p>
+            <a:pPr algn="l">
+              <a:lnSpc>
+                <a:spcPct val="115000"/>
+              </a:lnSpc>
+            </a:pPr>
+            <a:r>
+              <a:rPr sz="1400" b="0" i="0" dirty="0">
+                <a:solidFill>
+                  <a:srgbClr val="3A3A3A"/>
+                </a:solidFill>
+                <a:latin typeface="Calibri"/>
+              </a:rPr>
+              <a:t>O </a:t>
+            </a:r>
+            <a:r>
+              <a:rPr sz="1400" b="0" i="0" dirty="0" err="1">
+                <a:solidFill>
+                  <a:srgbClr val="3A3A3A"/>
+                </a:solidFill>
+                <a:latin typeface="Calibri"/>
+              </a:rPr>
+              <a:t>maior</a:t>
+            </a:r>
+            <a:r>
+              <a:rPr sz="1400" b="0" i="0" dirty="0">
+                <a:solidFill>
+                  <a:srgbClr val="3A3A3A"/>
+                </a:solidFill>
+                <a:latin typeface="Calibri"/>
+              </a:rPr>
+              <a:t> </a:t>
+            </a:r>
+            <a:r>
+              <a:rPr sz="1400" b="0" i="0" dirty="0" err="1">
+                <a:solidFill>
+                  <a:srgbClr val="3A3A3A"/>
+                </a:solidFill>
+                <a:latin typeface="Calibri"/>
+              </a:rPr>
+              <a:t>efeito</a:t>
+            </a:r>
+            <a:r>
+              <a:rPr sz="1400" b="0" i="0" dirty="0">
+                <a:solidFill>
+                  <a:srgbClr val="3A3A3A"/>
+                </a:solidFill>
+                <a:latin typeface="Calibri"/>
+              </a:rPr>
+              <a:t> </a:t>
+            </a:r>
+            <a:r>
+              <a:rPr sz="1400" b="0" i="0" dirty="0" err="1">
+                <a:solidFill>
+                  <a:srgbClr val="3A3A3A"/>
+                </a:solidFill>
+                <a:latin typeface="Calibri"/>
+              </a:rPr>
+              <a:t>incapacitador</a:t>
+            </a:r>
+            <a:r>
+              <a:rPr sz="1400" b="0" i="0" dirty="0">
+                <a:solidFill>
+                  <a:srgbClr val="3A3A3A"/>
+                </a:solidFill>
+                <a:latin typeface="Calibri"/>
+              </a:rPr>
+              <a:t> </a:t>
+            </a:r>
+            <a:r>
+              <a:rPr lang="pt-BR" sz="1400" b="0" i="0" dirty="0">
+                <a:solidFill>
+                  <a:srgbClr val="3A3A3A"/>
+                </a:solidFill>
+                <a:latin typeface="Calibri"/>
+              </a:rPr>
+              <a:t>(ou seja, o intervalo de idade em que manter alguém fora do circuito criminal mais reduz crimes futuros) </a:t>
+            </a:r>
+            <a:r>
+              <a:rPr sz="1400" b="0" i="0" dirty="0" err="1">
+                <a:solidFill>
+                  <a:srgbClr val="3A3A3A"/>
+                </a:solidFill>
+                <a:latin typeface="Calibri"/>
+              </a:rPr>
+              <a:t>hoje</a:t>
+            </a:r>
+            <a:r>
+              <a:rPr sz="1400" b="0" i="0" dirty="0">
+                <a:solidFill>
+                  <a:srgbClr val="3A3A3A"/>
+                </a:solidFill>
+                <a:latin typeface="Calibri"/>
+              </a:rPr>
+              <a:t> </a:t>
+            </a:r>
+            <a:r>
+              <a:rPr sz="1400" b="0" i="0" dirty="0" err="1">
+                <a:solidFill>
+                  <a:srgbClr val="3A3A3A"/>
+                </a:solidFill>
+                <a:latin typeface="Calibri"/>
+              </a:rPr>
+              <a:t>está</a:t>
+            </a:r>
+            <a:r>
+              <a:rPr sz="1400" b="0" i="0" dirty="0">
+                <a:solidFill>
+                  <a:srgbClr val="3A3A3A"/>
+                </a:solidFill>
+                <a:latin typeface="Calibri"/>
+              </a:rPr>
+              <a:t> entre 30–40 </a:t>
+            </a:r>
+            <a:r>
+              <a:rPr sz="1400" b="0" i="0" dirty="0" err="1">
+                <a:solidFill>
+                  <a:srgbClr val="3A3A3A"/>
+                </a:solidFill>
+                <a:latin typeface="Calibri"/>
+              </a:rPr>
+              <a:t>anos</a:t>
+            </a:r>
+            <a:r>
+              <a:rPr sz="1400" b="0" i="0" dirty="0">
+                <a:solidFill>
+                  <a:srgbClr val="3A3A3A"/>
+                </a:solidFill>
+                <a:latin typeface="Calibri"/>
+              </a:rPr>
+              <a:t>, </a:t>
+            </a:r>
+            <a:r>
+              <a:rPr sz="1400" b="0" i="0" dirty="0" err="1">
+                <a:solidFill>
+                  <a:srgbClr val="3A3A3A"/>
+                </a:solidFill>
+                <a:latin typeface="Calibri"/>
+              </a:rPr>
+              <a:t>não</a:t>
+            </a:r>
+            <a:r>
+              <a:rPr sz="1400" b="0" i="0" dirty="0">
+                <a:solidFill>
+                  <a:srgbClr val="3A3A3A"/>
+                </a:solidFill>
+                <a:latin typeface="Calibri"/>
+              </a:rPr>
+              <a:t> no </a:t>
+            </a:r>
+            <a:r>
+              <a:rPr sz="1400" b="0" i="0" dirty="0" err="1">
+                <a:solidFill>
+                  <a:srgbClr val="3A3A3A"/>
+                </a:solidFill>
+                <a:latin typeface="Calibri"/>
+              </a:rPr>
+              <a:t>pico</a:t>
+            </a:r>
+            <a:r>
+              <a:rPr sz="1400" b="0" i="0" dirty="0">
+                <a:solidFill>
+                  <a:srgbClr val="3A3A3A"/>
+                </a:solidFill>
+                <a:latin typeface="Calibri"/>
+              </a:rPr>
+              <a:t> </a:t>
+            </a:r>
+            <a:r>
+              <a:rPr sz="1400" b="0" i="0" dirty="0" err="1">
+                <a:solidFill>
+                  <a:srgbClr val="3A3A3A"/>
+                </a:solidFill>
+                <a:latin typeface="Calibri"/>
+              </a:rPr>
+              <a:t>jovem</a:t>
+            </a:r>
+            <a:r>
+              <a:rPr lang="pt-BR" sz="1400" dirty="0">
+                <a:solidFill>
+                  <a:srgbClr val="3A3A3A"/>
+                </a:solidFill>
+                <a:latin typeface="Calibri"/>
+              </a:rPr>
+              <a:t> (</a:t>
+            </a:r>
+            <a:r>
+              <a:rPr lang="en-US" sz="1400" dirty="0">
+                <a:solidFill>
+                  <a:srgbClr val="3A3A3A"/>
+                </a:solidFill>
+                <a:latin typeface="Calibri"/>
+              </a:rPr>
+              <a:t>David P. Farrington, "Age and Crime", Crime and Justice, v. 7, p. 189–250, 1986).</a:t>
+            </a:r>
+            <a:endParaRPr sz="1400" b="0" i="0" dirty="0">
+              <a:solidFill>
+                <a:srgbClr val="3A3A3A"/>
+              </a:solidFill>
+              <a:latin typeface="Calibri"/>
+            </a:endParaRPr>
+          </a:p>
+        </p:txBody>
+      </p:sp>
+      <p:sp>
+        <p:nvSpPr>
+          <p:cNvPr id="13" name="TextBox 11">
+            <a:extLst>
+              <a:ext uri="{FF2B5EF4-FFF2-40B4-BE49-F238E27FC236}">
+                <a16:creationId xmlns:a16="http://schemas.microsoft.com/office/drawing/2014/main" id="{188B4642-779A-5D9F-A48A-05401DD39358}"/>
+              </a:ext>
+            </a:extLst>
+          </p:cNvPr>
+          <p:cNvSpPr txBox="1"/>
+          <p:nvPr/>
+        </p:nvSpPr>
+        <p:spPr>
+          <a:xfrm>
+            <a:off x="563879" y="6127824"/>
+            <a:ext cx="11064240" cy="320040"/>
+          </a:xfrm>
+          <a:prstGeom prst="rect">
+            <a:avLst/>
+          </a:prstGeom>
+          <a:noFill/>
+        </p:spPr>
+        <p:txBody>
+          <a:bodyPr wrap="square" lIns="0" tIns="0" rIns="0" bIns="0" anchor="t">
+            <a:spAutoFit/>
+          </a:bodyPr>
+          <a:lstStyle/>
+          <a:p>
+            <a:pPr algn="l">
+              <a:lnSpc>
+                <a:spcPct val="100000"/>
+              </a:lnSpc>
+            </a:pPr>
+            <a:r>
+              <a:rPr sz="1000" b="0" i="1" dirty="0">
+                <a:solidFill>
+                  <a:srgbClr val="767676"/>
+                </a:solidFill>
+                <a:latin typeface="Calibri"/>
+              </a:rPr>
+              <a:t>Fonte: </a:t>
+            </a:r>
+            <a:r>
+              <a:rPr sz="1000" b="0" i="1" dirty="0" err="1">
+                <a:solidFill>
+                  <a:srgbClr val="767676"/>
+                </a:solidFill>
+                <a:latin typeface="Calibri"/>
+              </a:rPr>
+              <a:t>análise</a:t>
+            </a:r>
+            <a:r>
+              <a:rPr sz="1000" b="0" i="1" dirty="0">
+                <a:solidFill>
+                  <a:srgbClr val="767676"/>
+                </a:solidFill>
+                <a:latin typeface="Calibri"/>
+              </a:rPr>
+              <a:t> de dados de </a:t>
+            </a:r>
+            <a:r>
+              <a:rPr sz="1000" b="0" i="1" dirty="0" err="1">
+                <a:solidFill>
+                  <a:srgbClr val="767676"/>
+                </a:solidFill>
+                <a:latin typeface="Calibri"/>
+              </a:rPr>
+              <a:t>prisões</a:t>
+            </a:r>
+            <a:r>
+              <a:rPr sz="1000" b="0" i="1" dirty="0">
+                <a:solidFill>
+                  <a:srgbClr val="767676"/>
+                </a:solidFill>
+                <a:latin typeface="Calibri"/>
+              </a:rPr>
+              <a:t> </a:t>
+            </a:r>
+            <a:r>
+              <a:rPr sz="1000" b="0" i="1" dirty="0" err="1">
+                <a:solidFill>
+                  <a:srgbClr val="767676"/>
+                </a:solidFill>
+                <a:latin typeface="Calibri"/>
+              </a:rPr>
+              <a:t>nos</a:t>
+            </a:r>
+            <a:r>
+              <a:rPr sz="1000" b="0" i="1" dirty="0">
+                <a:solidFill>
+                  <a:srgbClr val="767676"/>
+                </a:solidFill>
+                <a:latin typeface="Calibri"/>
+              </a:rPr>
+              <a:t> EUA (2024); </a:t>
+            </a:r>
+            <a:r>
+              <a:rPr sz="1000" b="0" i="1" dirty="0" err="1">
+                <a:solidFill>
+                  <a:srgbClr val="767676"/>
+                </a:solidFill>
+                <a:latin typeface="Calibri"/>
+              </a:rPr>
+              <a:t>literatura</a:t>
+            </a:r>
+            <a:r>
+              <a:rPr sz="1000" b="0" i="1" dirty="0">
+                <a:solidFill>
+                  <a:srgbClr val="767676"/>
+                </a:solidFill>
+                <a:latin typeface="Calibri"/>
+              </a:rPr>
+              <a:t> </a:t>
+            </a:r>
+            <a:r>
+              <a:rPr sz="1000" b="0" i="1" dirty="0" err="1">
+                <a:solidFill>
+                  <a:srgbClr val="767676"/>
+                </a:solidFill>
+                <a:latin typeface="Calibri"/>
+              </a:rPr>
+              <a:t>brasileira</a:t>
+            </a:r>
+            <a:r>
+              <a:rPr sz="1000" b="0" i="1" dirty="0">
+                <a:solidFill>
+                  <a:srgbClr val="767676"/>
+                </a:solidFill>
+                <a:latin typeface="Calibri"/>
+              </a:rPr>
+              <a:t> de </a:t>
+            </a:r>
+            <a:r>
+              <a:rPr sz="1000" b="0" i="1" dirty="0" err="1">
+                <a:solidFill>
+                  <a:srgbClr val="767676"/>
+                </a:solidFill>
+                <a:latin typeface="Calibri"/>
+              </a:rPr>
+              <a:t>economia</a:t>
+            </a:r>
+            <a:r>
+              <a:rPr sz="1000" b="0" i="1" dirty="0">
+                <a:solidFill>
+                  <a:srgbClr val="767676"/>
+                </a:solidFill>
+                <a:latin typeface="Calibri"/>
+              </a:rPr>
+              <a:t> do crime </a:t>
+            </a:r>
+            <a:r>
+              <a:rPr sz="1000" b="0" i="1" dirty="0" err="1">
+                <a:solidFill>
+                  <a:srgbClr val="767676"/>
+                </a:solidFill>
+                <a:latin typeface="Calibri"/>
+              </a:rPr>
+              <a:t>sobre</a:t>
+            </a:r>
+            <a:r>
+              <a:rPr sz="1000" b="0" i="1" dirty="0">
+                <a:solidFill>
+                  <a:srgbClr val="767676"/>
+                </a:solidFill>
+                <a:latin typeface="Calibri"/>
+              </a:rPr>
+              <a:t> </a:t>
+            </a:r>
+            <a:r>
+              <a:rPr sz="1000" b="0" i="1" dirty="0" err="1">
+                <a:solidFill>
+                  <a:srgbClr val="767676"/>
+                </a:solidFill>
+                <a:latin typeface="Calibri"/>
+              </a:rPr>
+              <a:t>duração</a:t>
+            </a:r>
+            <a:r>
+              <a:rPr sz="1000" b="0" i="1" dirty="0">
+                <a:solidFill>
+                  <a:srgbClr val="767676"/>
+                </a:solidFill>
+                <a:latin typeface="Calibri"/>
+              </a:rPr>
+              <a:t> de </a:t>
+            </a:r>
+            <a:r>
+              <a:rPr sz="1000" b="0" i="1" dirty="0" err="1">
+                <a:solidFill>
+                  <a:srgbClr val="767676"/>
+                </a:solidFill>
+                <a:latin typeface="Calibri"/>
+              </a:rPr>
+              <a:t>carreira</a:t>
+            </a:r>
+            <a:r>
+              <a:rPr sz="1000" b="0" i="1" dirty="0">
+                <a:solidFill>
+                  <a:srgbClr val="767676"/>
+                </a:solidFill>
+                <a:latin typeface="Calibri"/>
+              </a:rPr>
+              <a:t> </a:t>
+            </a:r>
+            <a:r>
+              <a:rPr sz="1000" b="0" i="1" dirty="0" err="1">
+                <a:solidFill>
+                  <a:srgbClr val="767676"/>
+                </a:solidFill>
+                <a:latin typeface="Calibri"/>
+              </a:rPr>
+              <a:t>criminosa</a:t>
+            </a:r>
+            <a:r>
+              <a:rPr sz="1000" b="0" i="1" dirty="0">
+                <a:solidFill>
+                  <a:srgbClr val="767676"/>
+                </a:solidFill>
+                <a:latin typeface="Calibri"/>
+              </a:rPr>
+              <a:t>.</a:t>
+            </a:r>
+          </a:p>
+        </p:txBody>
+      </p:sp>
     </p:spTree>
     <p:extLst>
       <p:ext uri="{BB962C8B-B14F-4D97-AF65-F5344CB8AC3E}">
-        <p14:creationId xmlns:p14="http://schemas.microsoft.com/office/powerpoint/2010/main" val="1070033144"/>
+        <p14:creationId xmlns:p14="http://schemas.microsoft.com/office/powerpoint/2010/main" val="4218870347"/>
+      </p:ext>
+    </p:extLst>
+  </p:cSld>
+  <p:clrMapOvr>
+    <a:masterClrMapping/>
+  </p:clrMapOvr>
+  <mc:AlternateContent xmlns:mc="http://schemas.openxmlformats.org/markup-compatibility/2006" xmlns:p159="http://schemas.microsoft.com/office/powerpoint/2015/09/main">
+    <mc:Choice Requires="p159">
+      <p:transition xmlns:p14="http://schemas.microsoft.com/office/powerpoint/2010/main" spd="slow" p14:dur="1250">
+        <p159:morph option="byObject"/>
+      </p:transition>
+    </mc:Choice>
+    <mc:Fallback xmlns="">
+      <p:transition spd="slow">
+        <p:fade/>
+      </p:transition>
+    </mc:Fallback>
+  </mc:AlternateContent>
+</p:sld>
+</file>
+
+<file path=ppt/slides/slide15.xml><?xml version="1.0" encoding="utf-8"?>
+<p:sld xmlns:a="http://schemas.openxmlformats.org/drawingml/2006/main" xmlns:r="http://schemas.openxmlformats.org/officeDocument/2006/relationships" xmlns:p="http://schemas.openxmlformats.org/presentationml/2006/main">
+  <p:cSld>
+    <p:spTree>
+      <p:nvGrpSpPr>
+        <p:cNvPr id="1" name=""/>
+        <p:cNvGrpSpPr/>
+        <p:nvPr/>
+      </p:nvGrpSpPr>
+      <p:grpSpPr>
+        <a:xfrm>
+          <a:off x="0" y="0"/>
+          <a:ext cx="0" cy="0"/>
+          <a:chOff x="0" y="0"/>
+          <a:chExt cx="0" cy="0"/>
+        </a:xfrm>
+      </p:grpSpPr>
+      <p:cxnSp>
+        <p:nvCxnSpPr>
+          <p:cNvPr id="7" name="Conector reto 6">
+            <a:extLst>
+              <a:ext uri="{FF2B5EF4-FFF2-40B4-BE49-F238E27FC236}">
+                <a16:creationId xmlns:a16="http://schemas.microsoft.com/office/drawing/2014/main" id="{280B8309-4572-4E27-8B6F-D29679313292}"/>
+              </a:ext>
+            </a:extLst>
+          </p:cNvPr>
+          <p:cNvCxnSpPr>
+            <a:cxnSpLocks/>
+          </p:cNvCxnSpPr>
+          <p:nvPr/>
+        </p:nvCxnSpPr>
+        <p:spPr>
+          <a:xfrm>
+            <a:off x="-112541" y="970671"/>
+            <a:ext cx="8328073" cy="0"/>
+          </a:xfrm>
+          <a:prstGeom prst="line">
+            <a:avLst/>
+          </a:prstGeom>
+          <a:ln w="38100"/>
+        </p:spPr>
+        <p:style>
+          <a:lnRef idx="1">
+            <a:schemeClr val="accent1"/>
+          </a:lnRef>
+          <a:fillRef idx="0">
+            <a:schemeClr val="accent1"/>
+          </a:fillRef>
+          <a:effectRef idx="0">
+            <a:schemeClr val="accent1"/>
+          </a:effectRef>
+          <a:fontRef idx="minor">
+            <a:schemeClr val="tx1"/>
+          </a:fontRef>
+        </p:style>
+      </p:cxnSp>
+      <p:sp>
+        <p:nvSpPr>
+          <p:cNvPr id="8" name="CaixaDeTexto 7">
+            <a:extLst>
+              <a:ext uri="{FF2B5EF4-FFF2-40B4-BE49-F238E27FC236}">
+                <a16:creationId xmlns:a16="http://schemas.microsoft.com/office/drawing/2014/main" id="{39AE06C5-34BE-4D68-97C3-4C07702C2DF6}"/>
+              </a:ext>
+            </a:extLst>
+          </p:cNvPr>
+          <p:cNvSpPr txBox="1"/>
+          <p:nvPr/>
+        </p:nvSpPr>
+        <p:spPr>
+          <a:xfrm>
+            <a:off x="1103819" y="140678"/>
+            <a:ext cx="7815329" cy="646331"/>
+          </a:xfrm>
+          <a:prstGeom prst="rect">
+            <a:avLst/>
+          </a:prstGeom>
+          <a:noFill/>
+        </p:spPr>
+        <p:txBody>
+          <a:bodyPr wrap="square" rtlCol="0">
+            <a:spAutoFit/>
+          </a:bodyPr>
+          <a:lstStyle/>
+          <a:p>
+            <a:r>
+              <a:rPr lang="pt-BR" sz="3600" b="1" dirty="0">
+                <a:solidFill>
+                  <a:srgbClr val="002060"/>
+                </a:solidFill>
+                <a:latin typeface="Cambria" panose="02040503050406030204" pitchFamily="18" charset="0"/>
+                <a:ea typeface="Cambria" panose="02040503050406030204" pitchFamily="18" charset="0"/>
+              </a:rPr>
+              <a:t>Tempo de Carreira Criminal</a:t>
+            </a:r>
+          </a:p>
+        </p:txBody>
+      </p:sp>
+      <p:sp>
+        <p:nvSpPr>
+          <p:cNvPr id="14" name="CaixaDeTexto 13">
+            <a:extLst>
+              <a:ext uri="{FF2B5EF4-FFF2-40B4-BE49-F238E27FC236}">
+                <a16:creationId xmlns:a16="http://schemas.microsoft.com/office/drawing/2014/main" id="{427DBFEB-81BF-4CC3-A411-FBF43D295C56}"/>
+              </a:ext>
+            </a:extLst>
+          </p:cNvPr>
+          <p:cNvSpPr txBox="1"/>
+          <p:nvPr/>
+        </p:nvSpPr>
+        <p:spPr>
+          <a:xfrm>
+            <a:off x="940904" y="1276323"/>
+            <a:ext cx="10310191" cy="506292"/>
+          </a:xfrm>
+          <a:prstGeom prst="rect">
+            <a:avLst/>
+          </a:prstGeom>
+          <a:noFill/>
+        </p:spPr>
+        <p:txBody>
+          <a:bodyPr wrap="square" rtlCol="0">
+            <a:spAutoFit/>
+          </a:bodyPr>
+          <a:lstStyle/>
+          <a:p>
+            <a:pPr marL="285750" indent="-285750">
+              <a:lnSpc>
+                <a:spcPct val="150000"/>
+              </a:lnSpc>
+              <a:spcAft>
+                <a:spcPts val="110"/>
+              </a:spcAft>
+              <a:buFont typeface="Wingdings" panose="05000000000000000000" pitchFamily="2" charset="2"/>
+              <a:buChar char="Ø"/>
+            </a:pPr>
+            <a:r>
+              <a:rPr lang="pt-BR" sz="2000" b="1" dirty="0"/>
+              <a:t>Curva idade-crime</a:t>
+            </a:r>
+          </a:p>
+        </p:txBody>
+      </p:sp>
+      <p:pic>
+        <p:nvPicPr>
+          <p:cNvPr id="2" name="Picture 2" descr="UFRGS na Serra | Visão de futuro e coragem para inovar">
+            <a:extLst>
+              <a:ext uri="{FF2B5EF4-FFF2-40B4-BE49-F238E27FC236}">
+                <a16:creationId xmlns:a16="http://schemas.microsoft.com/office/drawing/2014/main" id="{567C8E3D-C535-EC50-849C-270CEB4B8A04}"/>
+              </a:ext>
+            </a:extLst>
+          </p:cNvPr>
+          <p:cNvPicPr>
+            <a:picLocks noChangeAspect="1" noChangeArrowheads="1"/>
+          </p:cNvPicPr>
+          <p:nvPr/>
+        </p:nvPicPr>
+        <p:blipFill>
+          <a:blip r:embed="rId3">
+            <a:extLst>
+              <a:ext uri="{28A0092B-C50C-407E-A947-70E740481C1C}">
+                <a14:useLocalDpi xmlns:a14="http://schemas.microsoft.com/office/drawing/2010/main" val="0"/>
+              </a:ext>
+            </a:extLst>
+          </a:blip>
+          <a:srcRect/>
+          <a:stretch>
+            <a:fillRect/>
+          </a:stretch>
+        </p:blipFill>
+        <p:spPr bwMode="auto">
+          <a:xfrm>
+            <a:off x="119922" y="6346096"/>
+            <a:ext cx="683614" cy="445109"/>
+          </a:xfrm>
+          <a:prstGeom prst="rect">
+            <a:avLst/>
+          </a:prstGeom>
+          <a:noFill/>
+          <a:extLst>
+            <a:ext uri="{909E8E84-426E-40DD-AFC4-6F175D3DCCD1}">
+              <a14:hiddenFill xmlns:a14="http://schemas.microsoft.com/office/drawing/2010/main">
+                <a:solidFill>
+                  <a:srgbClr val="FFFFFF"/>
+                </a:solidFill>
+              </a14:hiddenFill>
+            </a:ext>
+          </a:extLst>
+        </p:spPr>
+      </p:pic>
+      <p:pic>
+        <p:nvPicPr>
+          <p:cNvPr id="3" name="Picture 4">
+            <a:extLst>
+              <a:ext uri="{FF2B5EF4-FFF2-40B4-BE49-F238E27FC236}">
+                <a16:creationId xmlns:a16="http://schemas.microsoft.com/office/drawing/2014/main" id="{C9663204-9A6C-C5D7-7C9B-AAF5653911D6}"/>
+              </a:ext>
+            </a:extLst>
+          </p:cNvPr>
+          <p:cNvPicPr>
+            <a:picLocks noChangeAspect="1" noChangeArrowheads="1"/>
+          </p:cNvPicPr>
+          <p:nvPr/>
+        </p:nvPicPr>
+        <p:blipFill>
+          <a:blip r:embed="rId4">
+            <a:extLst>
+              <a:ext uri="{28A0092B-C50C-407E-A947-70E740481C1C}">
+                <a14:useLocalDpi xmlns:a14="http://schemas.microsoft.com/office/drawing/2010/main" val="0"/>
+              </a:ext>
+            </a:extLst>
+          </a:blip>
+          <a:srcRect/>
+          <a:stretch>
+            <a:fillRect/>
+          </a:stretch>
+        </p:blipFill>
+        <p:spPr bwMode="auto">
+          <a:xfrm>
+            <a:off x="10802599" y="6212508"/>
+            <a:ext cx="1329440" cy="578697"/>
+          </a:xfrm>
+          <a:prstGeom prst="rect">
+            <a:avLst/>
+          </a:prstGeom>
+          <a:noFill/>
+          <a:extLst>
+            <a:ext uri="{909E8E84-426E-40DD-AFC4-6F175D3DCCD1}">
+              <a14:hiddenFill xmlns:a14="http://schemas.microsoft.com/office/drawing/2010/main">
+                <a:solidFill>
+                  <a:srgbClr val="FFFFFF"/>
+                </a:solidFill>
+              </a14:hiddenFill>
+            </a:ext>
+          </a:extLst>
+        </p:spPr>
+      </p:pic>
+      <p:pic>
+        <p:nvPicPr>
+          <p:cNvPr id="3074" name="Picture 2" descr="Captura de tela">
+            <a:extLst>
+              <a:ext uri="{FF2B5EF4-FFF2-40B4-BE49-F238E27FC236}">
+                <a16:creationId xmlns:a16="http://schemas.microsoft.com/office/drawing/2014/main" id="{496D2546-4354-68C6-EAA2-03111C34F4D9}"/>
+              </a:ext>
+            </a:extLst>
+          </p:cNvPr>
+          <p:cNvPicPr>
+            <a:picLocks noChangeAspect="1" noChangeArrowheads="1"/>
+          </p:cNvPicPr>
+          <p:nvPr/>
+        </p:nvPicPr>
+        <p:blipFill>
+          <a:blip r:embed="rId5">
+            <a:extLst>
+              <a:ext uri="{28A0092B-C50C-407E-A947-70E740481C1C}">
+                <a14:useLocalDpi xmlns:a14="http://schemas.microsoft.com/office/drawing/2010/main" val="0"/>
+              </a:ext>
+            </a:extLst>
+          </a:blip>
+          <a:srcRect/>
+          <a:stretch>
+            <a:fillRect/>
+          </a:stretch>
+        </p:blipFill>
+        <p:spPr bwMode="auto">
+          <a:xfrm>
+            <a:off x="803536" y="1794841"/>
+            <a:ext cx="6449036" cy="4191970"/>
+          </a:xfrm>
+          <a:prstGeom prst="rect">
+            <a:avLst/>
+          </a:prstGeom>
+          <a:noFill/>
+          <a:extLst>
+            <a:ext uri="{909E8E84-426E-40DD-AFC4-6F175D3DCCD1}">
+              <a14:hiddenFill xmlns:a14="http://schemas.microsoft.com/office/drawing/2010/main">
+                <a:solidFill>
+                  <a:srgbClr val="FFFFFF"/>
+                </a:solidFill>
+              </a14:hiddenFill>
+            </a:ext>
+          </a:extLst>
+        </p:spPr>
+      </p:pic>
+      <p:sp>
+        <p:nvSpPr>
+          <p:cNvPr id="5" name="CaixaDeTexto 4">
+            <a:extLst>
+              <a:ext uri="{FF2B5EF4-FFF2-40B4-BE49-F238E27FC236}">
+                <a16:creationId xmlns:a16="http://schemas.microsoft.com/office/drawing/2014/main" id="{8B10989E-6495-BA93-F912-8AAFEB296936}"/>
+              </a:ext>
+            </a:extLst>
+          </p:cNvPr>
+          <p:cNvSpPr txBox="1"/>
+          <p:nvPr/>
+        </p:nvSpPr>
+        <p:spPr>
+          <a:xfrm>
+            <a:off x="1103819" y="6126961"/>
+            <a:ext cx="7438598" cy="523220"/>
+          </a:xfrm>
+          <a:prstGeom prst="rect">
+            <a:avLst/>
+          </a:prstGeom>
+          <a:noFill/>
+        </p:spPr>
+        <p:txBody>
+          <a:bodyPr wrap="square">
+            <a:spAutoFit/>
+          </a:bodyPr>
+          <a:lstStyle/>
+          <a:p>
+            <a:r>
+              <a:rPr lang="en-US" sz="1400" b="0" i="0" dirty="0">
+                <a:solidFill>
+                  <a:srgbClr val="333333"/>
+                </a:solidFill>
+                <a:effectLst/>
+                <a:latin typeface="Arial" panose="020B0604020202020204" pitchFamily="34" charset="0"/>
+              </a:rPr>
+              <a:t>Moffitt, T. E. (1993). Adolescence-limited and life-course-persistent antisocial behavior: A developmental taxonomy. </a:t>
+            </a:r>
+            <a:r>
+              <a:rPr lang="en-US" sz="1400" b="0" i="1" dirty="0">
+                <a:solidFill>
+                  <a:srgbClr val="333333"/>
+                </a:solidFill>
+                <a:effectLst/>
+                <a:latin typeface="Arial" panose="020B0604020202020204" pitchFamily="34" charset="0"/>
+              </a:rPr>
+              <a:t>Psychological Review, 100</a:t>
+            </a:r>
+            <a:r>
+              <a:rPr lang="en-US" sz="1400" b="0" i="0" dirty="0">
+                <a:solidFill>
+                  <a:srgbClr val="333333"/>
+                </a:solidFill>
+                <a:effectLst/>
+                <a:latin typeface="Arial" panose="020B0604020202020204" pitchFamily="34" charset="0"/>
+              </a:rPr>
+              <a:t>(4), 674–701</a:t>
+            </a:r>
+            <a:endParaRPr lang="pt-BR" sz="1400" dirty="0"/>
+          </a:p>
+        </p:txBody>
+      </p:sp>
+      <p:sp>
+        <p:nvSpPr>
+          <p:cNvPr id="15" name="CaixaDeTexto 14">
+            <a:extLst>
+              <a:ext uri="{FF2B5EF4-FFF2-40B4-BE49-F238E27FC236}">
+                <a16:creationId xmlns:a16="http://schemas.microsoft.com/office/drawing/2014/main" id="{F866C2C7-F83C-0C53-9473-159DD068B21A}"/>
+              </a:ext>
+            </a:extLst>
+          </p:cNvPr>
+          <p:cNvSpPr txBox="1"/>
+          <p:nvPr/>
+        </p:nvSpPr>
+        <p:spPr>
+          <a:xfrm>
+            <a:off x="7674963" y="2717469"/>
+            <a:ext cx="4457075" cy="2031325"/>
+          </a:xfrm>
+          <a:prstGeom prst="rect">
+            <a:avLst/>
+          </a:prstGeom>
+          <a:noFill/>
+        </p:spPr>
+        <p:txBody>
+          <a:bodyPr wrap="square" rtlCol="0">
+            <a:spAutoFit/>
+          </a:bodyPr>
+          <a:lstStyle/>
+          <a:p>
+            <a:pPr algn="ctr"/>
+            <a:r>
+              <a:rPr lang="pt-BR" b="1" dirty="0"/>
+              <a:t>Mudanças na estrutura etária também podem ser um fator que explique as taxas de criminalidade (MELLO, João Manoel Pinho de; SCHNEIDER, Alexandre. </a:t>
+            </a:r>
+            <a:r>
+              <a:rPr lang="pt-BR" b="1" u="none" strike="noStrike" dirty="0">
+                <a:effectLst/>
+                <a:latin typeface="Google Sans"/>
+              </a:rPr>
+              <a:t>Age </a:t>
+            </a:r>
+            <a:r>
+              <a:rPr lang="pt-BR" b="1" u="none" strike="noStrike" dirty="0" err="1">
+                <a:effectLst/>
+                <a:latin typeface="Google Sans"/>
+              </a:rPr>
+              <a:t>structure</a:t>
+            </a:r>
+            <a:r>
+              <a:rPr lang="pt-BR" b="1" u="none" strike="noStrike" dirty="0">
+                <a:effectLst/>
+                <a:latin typeface="Google Sans"/>
+              </a:rPr>
+              <a:t> </a:t>
+            </a:r>
+            <a:r>
+              <a:rPr lang="pt-BR" b="1" u="none" strike="noStrike" dirty="0" err="1">
+                <a:effectLst/>
+                <a:latin typeface="Google Sans"/>
+              </a:rPr>
+              <a:t>explaining</a:t>
+            </a:r>
+            <a:r>
+              <a:rPr lang="pt-BR" b="1" u="none" strike="noStrike" dirty="0">
+                <a:effectLst/>
+                <a:latin typeface="Google Sans"/>
+              </a:rPr>
+              <a:t> a </a:t>
+            </a:r>
+            <a:r>
+              <a:rPr lang="pt-BR" b="1" u="none" strike="noStrike" dirty="0" err="1">
+                <a:effectLst/>
+                <a:latin typeface="Google Sans"/>
+              </a:rPr>
+              <a:t>large</a:t>
+            </a:r>
+            <a:r>
+              <a:rPr lang="pt-BR" b="1" u="none" strike="noStrike" dirty="0">
+                <a:effectLst/>
+                <a:latin typeface="Google Sans"/>
+              </a:rPr>
+              <a:t> shift in </a:t>
+            </a:r>
+            <a:r>
+              <a:rPr lang="pt-BR" b="1" u="none" strike="noStrike" dirty="0" err="1">
+                <a:effectLst/>
+                <a:latin typeface="Google Sans"/>
+              </a:rPr>
+              <a:t>homicides</a:t>
+            </a:r>
+            <a:r>
+              <a:rPr lang="pt-BR" b="1" u="none" strike="noStrike" dirty="0">
+                <a:effectLst/>
+                <a:latin typeface="Google Sans"/>
+              </a:rPr>
+              <a:t>:</a:t>
+            </a:r>
+            <a:r>
+              <a:rPr lang="pt-BR" b="1" dirty="0"/>
+              <a:t> </a:t>
+            </a:r>
+            <a:r>
+              <a:rPr lang="pt-BR" b="1" dirty="0" err="1"/>
+              <a:t>the</a:t>
+            </a:r>
+            <a:r>
+              <a:rPr lang="pt-BR" b="1" dirty="0"/>
+              <a:t> case </a:t>
+            </a:r>
+            <a:r>
+              <a:rPr lang="pt-BR" b="1" dirty="0" err="1"/>
+              <a:t>of</a:t>
+            </a:r>
+            <a:r>
+              <a:rPr lang="pt-BR" b="1" dirty="0"/>
+              <a:t> </a:t>
+            </a:r>
+            <a:r>
+              <a:rPr lang="pt-BR" b="1" dirty="0" err="1"/>
+              <a:t>the</a:t>
+            </a:r>
+            <a:r>
+              <a:rPr lang="pt-BR" b="1" dirty="0"/>
+              <a:t> </a:t>
+            </a:r>
+            <a:r>
+              <a:rPr lang="pt-BR" b="1" dirty="0" err="1"/>
+              <a:t>state</a:t>
+            </a:r>
+            <a:r>
+              <a:rPr lang="pt-BR" b="1" dirty="0"/>
+              <a:t> </a:t>
+            </a:r>
+            <a:r>
+              <a:rPr lang="pt-BR" b="1" dirty="0" err="1"/>
+              <a:t>of</a:t>
+            </a:r>
+            <a:r>
+              <a:rPr lang="pt-BR" b="1" dirty="0"/>
+              <a:t> São Paulo. Rio de Janeiro: PUC-Rio, 2007)</a:t>
+            </a:r>
+          </a:p>
+        </p:txBody>
+      </p:sp>
+    </p:spTree>
+    <p:extLst>
+      <p:ext uri="{BB962C8B-B14F-4D97-AF65-F5344CB8AC3E}">
+        <p14:creationId xmlns:p14="http://schemas.microsoft.com/office/powerpoint/2010/main" val="1921800444"/>
       </p:ext>
     </p:extLst>
   </p:cSld>
@@ -10513,8 +12112,8 @@
         </p:nvSpPr>
         <p:spPr>
           <a:xfrm>
-            <a:off x="1103819" y="140678"/>
-            <a:ext cx="7815329" cy="646331"/>
+            <a:off x="779259" y="294626"/>
+            <a:ext cx="10633479" cy="523220"/>
           </a:xfrm>
           <a:prstGeom prst="rect">
             <a:avLst/>
@@ -10528,15 +12127,32 @@
           <a:lstStyle/>
           <a:p>
             <a:r>
-              <a:rPr lang="pt-BR" sz="3600" b="1" dirty="0">
+              <a:rPr lang="pt-BR" sz="2800" b="1" dirty="0">
                 <a:solidFill>
                   <a:srgbClr val="002060"/>
                 </a:solidFill>
                 <a:latin typeface="Cambria" panose="02040503050406030204" pitchFamily="18" charset="0"/>
                 <a:ea typeface="Cambria" panose="02040503050406030204" pitchFamily="18" charset="0"/>
               </a:rPr>
-              <a:t>Tempo de Carreira Criminal</a:t>
-            </a:r>
+              <a:t>Reincidência Criminal: o Efeito Estigma de </a:t>
+            </a:r>
+            <a:r>
+              <a:rPr lang="pt-BR" sz="2800" b="1" dirty="0" err="1">
+                <a:solidFill>
+                  <a:srgbClr val="002060"/>
+                </a:solidFill>
+                <a:latin typeface="Cambria" panose="02040503050406030204" pitchFamily="18" charset="0"/>
+                <a:ea typeface="Cambria" panose="02040503050406030204" pitchFamily="18" charset="0"/>
+              </a:rPr>
+              <a:t>Ex-Presidiários</a:t>
+            </a:r>
+            <a:endParaRPr lang="pt-BR" sz="2800" b="1" dirty="0">
+              <a:solidFill>
+                <a:srgbClr val="002060"/>
+              </a:solidFill>
+              <a:latin typeface="Cambria" panose="02040503050406030204" pitchFamily="18" charset="0"/>
+              <a:ea typeface="Cambria" panose="02040503050406030204" pitchFamily="18" charset="0"/>
+            </a:endParaRPr>
           </a:p>
         </p:txBody>
       </p:sp>
@@ -10682,7 +12298,7 @@
     </p:spTree>
     <p:extLst>
       <p:ext uri="{BB962C8B-B14F-4D97-AF65-F5344CB8AC3E}">
-        <p14:creationId xmlns:p14="http://schemas.microsoft.com/office/powerpoint/2010/main" val="4218870347"/>
+        <p14:creationId xmlns:p14="http://schemas.microsoft.com/office/powerpoint/2010/main" val="1070033144"/>
       </p:ext>
     </p:extLst>
   </p:cSld>
@@ -15527,12 +17143,57 @@
           </a:extLst>
         </p:spPr>
       </p:pic>
+      <p:sp>
+        <p:nvSpPr>
+          <p:cNvPr id="4" name="CaixaDeTexto 3">
+            <a:extLst>
+              <a:ext uri="{FF2B5EF4-FFF2-40B4-BE49-F238E27FC236}">
+                <a16:creationId xmlns:a16="http://schemas.microsoft.com/office/drawing/2014/main" id="{F9B44222-0FEB-DD8A-E65A-F10683C06A0F}"/>
+              </a:ext>
+            </a:extLst>
+          </p:cNvPr>
+          <p:cNvSpPr txBox="1"/>
+          <p:nvPr/>
+        </p:nvSpPr>
+        <p:spPr>
+          <a:xfrm>
+            <a:off x="940904" y="1276323"/>
+            <a:ext cx="10310191" cy="589072"/>
+          </a:xfrm>
+          <a:prstGeom prst="rect">
+            <a:avLst/>
+          </a:prstGeom>
+          <a:noFill/>
+        </p:spPr>
+        <p:txBody>
+          <a:bodyPr wrap="square" rtlCol="0">
+            <a:spAutoFit/>
+          </a:bodyPr>
+          <a:lstStyle/>
+          <a:p>
+            <a:pPr marL="285750" indent="-285750">
+              <a:lnSpc>
+                <a:spcPct val="150000"/>
+              </a:lnSpc>
+              <a:spcAft>
+                <a:spcPts val="110"/>
+              </a:spcAft>
+              <a:buFont typeface="Wingdings" panose="05000000000000000000" pitchFamily="2" charset="2"/>
+              <a:buChar char="Ø"/>
+            </a:pPr>
+            <a:r>
+              <a:rPr lang="pt-BR" sz="2400" b="1" dirty="0"/>
+              <a:t>Furtos, por sua vez, possuem altas taxas no litoral norte</a:t>
+            </a:r>
+          </a:p>
+        </p:txBody>
+      </p:sp>
       <p:pic>
         <p:nvPicPr>
-          <p:cNvPr id="5" name="Imagem 4">
-            <a:extLst>
-              <a:ext uri="{FF2B5EF4-FFF2-40B4-BE49-F238E27FC236}">
-                <a16:creationId xmlns:a16="http://schemas.microsoft.com/office/drawing/2014/main" id="{4318DFD3-3634-EC8F-4CA2-B0EB8093C36F}"/>
+          <p:cNvPr id="6" name="Imagem 5">
+            <a:extLst>
+              <a:ext uri="{FF2B5EF4-FFF2-40B4-BE49-F238E27FC236}">
+                <a16:creationId xmlns:a16="http://schemas.microsoft.com/office/drawing/2014/main" id="{A9B172CF-DDA4-9000-FC49-49E50601E3A1}"/>
               </a:ext>
             </a:extLst>
           </p:cNvPr>
@@ -15549,8 +17210,8 @@
         </p:blipFill>
         <p:spPr>
           <a:xfrm>
-            <a:off x="834897" y="1724537"/>
-            <a:ext cx="9043291" cy="4162785"/>
+            <a:off x="956817" y="2036595"/>
+            <a:ext cx="10294278" cy="4309501"/>
           </a:xfrm>
           <a:prstGeom prst="rect">
             <a:avLst/>
@@ -15559,10 +17220,10 @@
       </p:pic>
       <p:sp>
         <p:nvSpPr>
-          <p:cNvPr id="9" name="Seta: para a Direita 8">
-            <a:extLst>
-              <a:ext uri="{FF2B5EF4-FFF2-40B4-BE49-F238E27FC236}">
-                <a16:creationId xmlns:a16="http://schemas.microsoft.com/office/drawing/2014/main" id="{4ADC85D4-4D6F-B41F-8D19-0C37EEA6532F}"/>
+          <p:cNvPr id="9" name="Seta: para a Esquerda 8">
+            <a:extLst>
+              <a:ext uri="{FF2B5EF4-FFF2-40B4-BE49-F238E27FC236}">
+                <a16:creationId xmlns:a16="http://schemas.microsoft.com/office/drawing/2014/main" id="{A7924BE9-722D-AE8C-355C-9C9926B6843C}"/>
               </a:ext>
             </a:extLst>
           </p:cNvPr>
@@ -15570,11 +17231,11 @@
           <p:nvPr/>
         </p:nvSpPr>
         <p:spPr>
-          <a:xfrm rot="9753462">
-            <a:off x="5878180" y="1914580"/>
-            <a:ext cx="435637" cy="359764"/>
+          <a:xfrm>
+            <a:off x="7225259" y="3141467"/>
+            <a:ext cx="434715" cy="221105"/>
           </a:xfrm>
-          <a:prstGeom prst="rightArrow">
+          <a:prstGeom prst="leftArrow">
             <a:avLst/>
           </a:prstGeom>
         </p:spPr>
@@ -15605,58 +17266,22 @@
       </p:sp>
       <p:sp>
         <p:nvSpPr>
-          <p:cNvPr id="11" name="CaixaDeTexto 10">
-            <a:extLst>
-              <a:ext uri="{FF2B5EF4-FFF2-40B4-BE49-F238E27FC236}">
-                <a16:creationId xmlns:a16="http://schemas.microsoft.com/office/drawing/2014/main" id="{2618659E-1058-1132-89D4-6B86F32FC853}"/>
-              </a:ext>
-            </a:extLst>
-          </p:cNvPr>
-          <p:cNvSpPr txBox="1"/>
+          <p:cNvPr id="10" name="Seta: para a Esquerda 9">
+            <a:extLst>
+              <a:ext uri="{FF2B5EF4-FFF2-40B4-BE49-F238E27FC236}">
+                <a16:creationId xmlns:a16="http://schemas.microsoft.com/office/drawing/2014/main" id="{3DB70E76-2C85-16FB-C8CC-53EB3AEECE7B}"/>
+              </a:ext>
+            </a:extLst>
+          </p:cNvPr>
+          <p:cNvSpPr/>
           <p:nvPr/>
         </p:nvSpPr>
         <p:spPr>
           <a:xfrm>
-            <a:off x="6220773" y="1725130"/>
-            <a:ext cx="2265502" cy="369332"/>
+            <a:off x="7007901" y="3552606"/>
+            <a:ext cx="434715" cy="221105"/>
           </a:xfrm>
-          <a:prstGeom prst="rect">
-            <a:avLst/>
-          </a:prstGeom>
-          <a:noFill/>
-        </p:spPr>
-        <p:txBody>
-          <a:bodyPr wrap="square" rtlCol="0">
-            <a:spAutoFit/>
-          </a:bodyPr>
-          <a:lstStyle/>
-          <a:p>
-            <a:pPr algn="ctr"/>
-            <a:r>
-              <a:rPr lang="pt-BR" b="1" dirty="0"/>
-              <a:t>Porto Alegre: 48,84</a:t>
-            </a:r>
-          </a:p>
-        </p:txBody>
-      </p:sp>
-      <p:sp>
-        <p:nvSpPr>
-          <p:cNvPr id="12" name="Seta: para a Direita 11">
-            <a:extLst>
-              <a:ext uri="{FF2B5EF4-FFF2-40B4-BE49-F238E27FC236}">
-                <a16:creationId xmlns:a16="http://schemas.microsoft.com/office/drawing/2014/main" id="{0A11E838-7A28-D1BE-5FDC-461C62B8169E}"/>
-              </a:ext>
-            </a:extLst>
-          </p:cNvPr>
-          <p:cNvSpPr/>
-          <p:nvPr/>
-        </p:nvSpPr>
-        <p:spPr>
-          <a:xfrm rot="9753462">
-            <a:off x="8530178" y="4959034"/>
-            <a:ext cx="435637" cy="359764"/>
-          </a:xfrm>
-          <a:prstGeom prst="rightArrow">
+          <a:prstGeom prst="leftArrow">
             <a:avLst/>
           </a:prstGeom>
         </p:spPr>
@@ -15687,10 +17312,56 @@
       </p:sp>
       <p:sp>
         <p:nvSpPr>
-          <p:cNvPr id="13" name="CaixaDeTexto 12">
-            <a:extLst>
-              <a:ext uri="{FF2B5EF4-FFF2-40B4-BE49-F238E27FC236}">
-                <a16:creationId xmlns:a16="http://schemas.microsoft.com/office/drawing/2014/main" id="{D1F1D044-C509-E859-2F17-4F37728104EB}"/>
+          <p:cNvPr id="11" name="Seta: para a Esquerda 10">
+            <a:extLst>
+              <a:ext uri="{FF2B5EF4-FFF2-40B4-BE49-F238E27FC236}">
+                <a16:creationId xmlns:a16="http://schemas.microsoft.com/office/drawing/2014/main" id="{CB184BE6-0BE2-BA18-029A-52DD351FDF0B}"/>
+              </a:ext>
+            </a:extLst>
+          </p:cNvPr>
+          <p:cNvSpPr/>
+          <p:nvPr/>
+        </p:nvSpPr>
+        <p:spPr>
+          <a:xfrm>
+            <a:off x="6790543" y="4191345"/>
+            <a:ext cx="434715" cy="221105"/>
+          </a:xfrm>
+          <a:prstGeom prst="leftArrow">
+            <a:avLst/>
+          </a:prstGeom>
+        </p:spPr>
+        <p:style>
+          <a:lnRef idx="2">
+            <a:schemeClr val="accent1">
+              <a:shade val="15000"/>
+            </a:schemeClr>
+          </a:lnRef>
+          <a:fillRef idx="1">
+            <a:schemeClr val="accent1"/>
+          </a:fillRef>
+          <a:effectRef idx="0">
+            <a:schemeClr val="accent1"/>
+          </a:effectRef>
+          <a:fontRef idx="minor">
+            <a:schemeClr val="lt1"/>
+          </a:fontRef>
+        </p:style>
+        <p:txBody>
+          <a:bodyPr rtlCol="0" anchor="ctr"/>
+          <a:lstStyle/>
+          <a:p>
+            <a:pPr algn="ctr"/>
+            <a:endParaRPr lang="pt-BR"/>
+          </a:p>
+        </p:txBody>
+      </p:sp>
+      <p:sp>
+        <p:nvSpPr>
+          <p:cNvPr id="12" name="CaixaDeTexto 11">
+            <a:extLst>
+              <a:ext uri="{FF2B5EF4-FFF2-40B4-BE49-F238E27FC236}">
+                <a16:creationId xmlns:a16="http://schemas.microsoft.com/office/drawing/2014/main" id="{2393E99D-8654-6736-563B-90241C78B105}"/>
               </a:ext>
             </a:extLst>
           </p:cNvPr>
@@ -15699,8 +17370,8 @@
         </p:nvSpPr>
         <p:spPr>
           <a:xfrm>
-            <a:off x="8872771" y="4769584"/>
-            <a:ext cx="2265502" cy="369332"/>
+            <a:off x="7763957" y="3069717"/>
+            <a:ext cx="1998019" cy="369332"/>
           </a:xfrm>
           <a:prstGeom prst="rect">
             <a:avLst/>
@@ -15713,18 +17384,250 @@
           </a:bodyPr>
           <a:lstStyle/>
           <a:p>
+            <a:r>
+              <a:rPr lang="pt-BR" b="1" dirty="0"/>
+              <a:t>Arroio do Sal</a:t>
+            </a:r>
+          </a:p>
+        </p:txBody>
+      </p:sp>
+      <p:sp>
+        <p:nvSpPr>
+          <p:cNvPr id="13" name="CaixaDeTexto 12">
+            <a:extLst>
+              <a:ext uri="{FF2B5EF4-FFF2-40B4-BE49-F238E27FC236}">
+                <a16:creationId xmlns:a16="http://schemas.microsoft.com/office/drawing/2014/main" id="{36618367-6AF6-11AD-D1D8-E58D6B826BC7}"/>
+              </a:ext>
+            </a:extLst>
+          </p:cNvPr>
+          <p:cNvSpPr txBox="1"/>
+          <p:nvPr/>
+        </p:nvSpPr>
+        <p:spPr>
+          <a:xfrm>
+            <a:off x="7538434" y="3463841"/>
+            <a:ext cx="2223542" cy="369332"/>
+          </a:xfrm>
+          <a:prstGeom prst="rect">
+            <a:avLst/>
+          </a:prstGeom>
+          <a:noFill/>
+        </p:spPr>
+        <p:txBody>
+          <a:bodyPr wrap="square" rtlCol="0">
+            <a:spAutoFit/>
+          </a:bodyPr>
+          <a:lstStyle/>
+          <a:p>
+            <a:r>
+              <a:rPr lang="pt-BR" b="1" dirty="0"/>
+              <a:t>Capão da Canoa</a:t>
+            </a:r>
+          </a:p>
+        </p:txBody>
+      </p:sp>
+      <p:sp>
+        <p:nvSpPr>
+          <p:cNvPr id="14" name="Seta: para a Esquerda 13">
+            <a:extLst>
+              <a:ext uri="{FF2B5EF4-FFF2-40B4-BE49-F238E27FC236}">
+                <a16:creationId xmlns:a16="http://schemas.microsoft.com/office/drawing/2014/main" id="{8D019ECB-738C-DA5C-6576-C6F980D41762}"/>
+              </a:ext>
+            </a:extLst>
+          </p:cNvPr>
+          <p:cNvSpPr/>
+          <p:nvPr/>
+        </p:nvSpPr>
+        <p:spPr>
+          <a:xfrm>
+            <a:off x="6775552" y="4608979"/>
+            <a:ext cx="434715" cy="221105"/>
+          </a:xfrm>
+          <a:prstGeom prst="leftArrow">
+            <a:avLst/>
+          </a:prstGeom>
+        </p:spPr>
+        <p:style>
+          <a:lnRef idx="2">
+            <a:schemeClr val="accent1">
+              <a:shade val="15000"/>
+            </a:schemeClr>
+          </a:lnRef>
+          <a:fillRef idx="1">
+            <a:schemeClr val="accent1"/>
+          </a:fillRef>
+          <a:effectRef idx="0">
+            <a:schemeClr val="accent1"/>
+          </a:effectRef>
+          <a:fontRef idx="minor">
+            <a:schemeClr val="lt1"/>
+          </a:fontRef>
+        </p:style>
+        <p:txBody>
+          <a:bodyPr rtlCol="0" anchor="ctr"/>
+          <a:lstStyle/>
+          <a:p>
             <a:pPr algn="ctr"/>
+            <a:endParaRPr lang="pt-BR"/>
+          </a:p>
+        </p:txBody>
+      </p:sp>
+      <p:sp>
+        <p:nvSpPr>
+          <p:cNvPr id="15" name="CaixaDeTexto 14">
+            <a:extLst>
+              <a:ext uri="{FF2B5EF4-FFF2-40B4-BE49-F238E27FC236}">
+                <a16:creationId xmlns:a16="http://schemas.microsoft.com/office/drawing/2014/main" id="{574D6D9C-D93C-E743-92A2-746B8DEBF90F}"/>
+              </a:ext>
+            </a:extLst>
+          </p:cNvPr>
+          <p:cNvSpPr txBox="1"/>
+          <p:nvPr/>
+        </p:nvSpPr>
+        <p:spPr>
+          <a:xfrm>
+            <a:off x="7364470" y="4117231"/>
+            <a:ext cx="1393163" cy="369332"/>
+          </a:xfrm>
+          <a:prstGeom prst="rect">
+            <a:avLst/>
+          </a:prstGeom>
+          <a:noFill/>
+        </p:spPr>
+        <p:txBody>
+          <a:bodyPr wrap="square" rtlCol="0">
+            <a:spAutoFit/>
+          </a:bodyPr>
+          <a:lstStyle/>
+          <a:p>
             <a:r>
               <a:rPr lang="pt-BR" b="1" dirty="0"/>
-              <a:t>Pelotas: 2,68</a:t>
-            </a:r>
+              <a:t>Tramandaí</a:t>
+            </a:r>
+          </a:p>
+        </p:txBody>
+      </p:sp>
+      <p:sp>
+        <p:nvSpPr>
+          <p:cNvPr id="16" name="CaixaDeTexto 15">
+            <a:extLst>
+              <a:ext uri="{FF2B5EF4-FFF2-40B4-BE49-F238E27FC236}">
+                <a16:creationId xmlns:a16="http://schemas.microsoft.com/office/drawing/2014/main" id="{48E74E98-E9A5-2B69-D05B-BE0099A83A98}"/>
+              </a:ext>
+            </a:extLst>
+          </p:cNvPr>
+          <p:cNvSpPr txBox="1"/>
+          <p:nvPr/>
+        </p:nvSpPr>
+        <p:spPr>
+          <a:xfrm>
+            <a:off x="7334490" y="4528370"/>
+            <a:ext cx="1393163" cy="369332"/>
+          </a:xfrm>
+          <a:prstGeom prst="rect">
+            <a:avLst/>
+          </a:prstGeom>
+          <a:noFill/>
+        </p:spPr>
+        <p:txBody>
+          <a:bodyPr wrap="square" rtlCol="0">
+            <a:spAutoFit/>
+          </a:bodyPr>
+          <a:lstStyle/>
+          <a:p>
+            <a:r>
+              <a:rPr lang="pt-BR" b="1" dirty="0"/>
+              <a:t>Cidreira</a:t>
+            </a:r>
+          </a:p>
+        </p:txBody>
+      </p:sp>
+      <p:sp>
+        <p:nvSpPr>
+          <p:cNvPr id="17" name="Seta: para a Esquerda 16">
+            <a:extLst>
+              <a:ext uri="{FF2B5EF4-FFF2-40B4-BE49-F238E27FC236}">
+                <a16:creationId xmlns:a16="http://schemas.microsoft.com/office/drawing/2014/main" id="{FACE062B-6F3D-8D21-21CB-ECA3E8074E2F}"/>
+              </a:ext>
+            </a:extLst>
+          </p:cNvPr>
+          <p:cNvSpPr/>
+          <p:nvPr/>
+        </p:nvSpPr>
+        <p:spPr>
+          <a:xfrm>
+            <a:off x="6899775" y="3855182"/>
+            <a:ext cx="434715" cy="221105"/>
+          </a:xfrm>
+          <a:prstGeom prst="leftArrow">
+            <a:avLst/>
+          </a:prstGeom>
+        </p:spPr>
+        <p:style>
+          <a:lnRef idx="2">
+            <a:schemeClr val="accent1">
+              <a:shade val="15000"/>
+            </a:schemeClr>
+          </a:lnRef>
+          <a:fillRef idx="1">
+            <a:schemeClr val="accent1"/>
+          </a:fillRef>
+          <a:effectRef idx="0">
+            <a:schemeClr val="accent1"/>
+          </a:effectRef>
+          <a:fontRef idx="minor">
+            <a:schemeClr val="lt1"/>
+          </a:fontRef>
+        </p:style>
+        <p:txBody>
+          <a:bodyPr rtlCol="0" anchor="ctr"/>
+          <a:lstStyle/>
+          <a:p>
+            <a:pPr algn="ctr"/>
+            <a:endParaRPr lang="pt-BR"/>
+          </a:p>
+        </p:txBody>
+      </p:sp>
+      <p:sp>
+        <p:nvSpPr>
+          <p:cNvPr id="18" name="CaixaDeTexto 17">
+            <a:extLst>
+              <a:ext uri="{FF2B5EF4-FFF2-40B4-BE49-F238E27FC236}">
+                <a16:creationId xmlns:a16="http://schemas.microsoft.com/office/drawing/2014/main" id="{F1F8C814-56E9-CAB5-BF4F-0B98EEFB341E}"/>
+              </a:ext>
+            </a:extLst>
+          </p:cNvPr>
+          <p:cNvSpPr txBox="1"/>
+          <p:nvPr/>
+        </p:nvSpPr>
+        <p:spPr>
+          <a:xfrm>
+            <a:off x="7451452" y="3797917"/>
+            <a:ext cx="2223542" cy="369332"/>
+          </a:xfrm>
+          <a:prstGeom prst="rect">
+            <a:avLst/>
+          </a:prstGeom>
+          <a:noFill/>
+        </p:spPr>
+        <p:txBody>
+          <a:bodyPr wrap="square" rtlCol="0">
+            <a:spAutoFit/>
+          </a:bodyPr>
+          <a:lstStyle/>
+          <a:p>
+            <a:r>
+              <a:rPr lang="pt-BR" b="1" dirty="0" err="1"/>
+              <a:t>Xangri-lá</a:t>
+            </a:r>
+            <a:endParaRPr lang="pt-BR" b="1" dirty="0"/>
           </a:p>
         </p:txBody>
       </p:sp>
     </p:spTree>
     <p:extLst>
       <p:ext uri="{BB962C8B-B14F-4D97-AF65-F5344CB8AC3E}">
-        <p14:creationId xmlns:p14="http://schemas.microsoft.com/office/powerpoint/2010/main" val="1290076"/>
+        <p14:creationId xmlns:p14="http://schemas.microsoft.com/office/powerpoint/2010/main" val="204840894"/>
       </p:ext>
     </p:extLst>
   </p:cSld>
@@ -15858,7 +17761,7 @@
                                           </p:stCondLst>
                                         </p:cTn>
                                         <p:tgtEl>
-                                          <p:spTgt spid="11"/>
+                                          <p:spTgt spid="10"/>
                                         </p:tgtEl>
                                         <p:attrNameLst>
                                           <p:attrName>style.visibility</p:attrName>
@@ -15872,7 +17775,7 @@
                                       <p:cBhvr>
                                         <p:cTn id="12" dur="1000"/>
                                         <p:tgtEl>
-                                          <p:spTgt spid="11"/>
+                                          <p:spTgt spid="10"/>
                                         </p:tgtEl>
                                       </p:cBhvr>
                                     </p:animEffect>
@@ -15880,7 +17783,7 @@
                                       <p:cBhvr>
                                         <p:cTn id="13" dur="1000" fill="hold"/>
                                         <p:tgtEl>
-                                          <p:spTgt spid="11"/>
+                                          <p:spTgt spid="10"/>
                                         </p:tgtEl>
                                         <p:attrNameLst>
                                           <p:attrName>ppt_x</p:attrName>
@@ -15903,7 +17806,7 @@
                                       <p:cBhvr>
                                         <p:cTn id="14" dur="1000" fill="hold"/>
                                         <p:tgtEl>
-                                          <p:spTgt spid="11"/>
+                                          <p:spTgt spid="10"/>
                                         </p:tgtEl>
                                         <p:attrNameLst>
                                           <p:attrName>ppt_y</p:attrName>
@@ -15939,7 +17842,7 @@
                                           </p:stCondLst>
                                         </p:cTn>
                                         <p:tgtEl>
-                                          <p:spTgt spid="12"/>
+                                          <p:spTgt spid="17"/>
                                         </p:tgtEl>
                                         <p:attrNameLst>
                                           <p:attrName>style.visibility</p:attrName>
@@ -15953,7 +17856,7 @@
                                       <p:cBhvr>
                                         <p:cTn id="17" dur="1000"/>
                                         <p:tgtEl>
-                                          <p:spTgt spid="12"/>
+                                          <p:spTgt spid="17"/>
                                         </p:tgtEl>
                                       </p:cBhvr>
                                     </p:animEffect>
@@ -15961,7 +17864,7 @@
                                       <p:cBhvr>
                                         <p:cTn id="18" dur="1000" fill="hold"/>
                                         <p:tgtEl>
-                                          <p:spTgt spid="12"/>
+                                          <p:spTgt spid="17"/>
                                         </p:tgtEl>
                                         <p:attrNameLst>
                                           <p:attrName>ppt_x</p:attrName>
@@ -15984,7 +17887,7 @@
                                       <p:cBhvr>
                                         <p:cTn id="19" dur="1000" fill="hold"/>
                                         <p:tgtEl>
-                                          <p:spTgt spid="12"/>
+                                          <p:spTgt spid="17"/>
                                         </p:tgtEl>
                                         <p:attrNameLst>
                                           <p:attrName>ppt_y</p:attrName>
@@ -16020,7 +17923,7 @@
                                           </p:stCondLst>
                                         </p:cTn>
                                         <p:tgtEl>
-                                          <p:spTgt spid="13"/>
+                                          <p:spTgt spid="14"/>
                                         </p:tgtEl>
                                         <p:attrNameLst>
                                           <p:attrName>style.visibility</p:attrName>
@@ -16034,13 +17937,418 @@
                                       <p:cBhvr>
                                         <p:cTn id="22" dur="1000"/>
                                         <p:tgtEl>
+                                          <p:spTgt spid="14"/>
+                                        </p:tgtEl>
+                                      </p:cBhvr>
+                                    </p:animEffect>
+                                    <p:anim calcmode="lin" valueType="num">
+                                      <p:cBhvr>
+                                        <p:cTn id="23" dur="1000" fill="hold"/>
+                                        <p:tgtEl>
+                                          <p:spTgt spid="14"/>
+                                        </p:tgtEl>
+                                        <p:attrNameLst>
+                                          <p:attrName>ppt_x</p:attrName>
+                                        </p:attrNameLst>
+                                      </p:cBhvr>
+                                      <p:tavLst>
+                                        <p:tav tm="0">
+                                          <p:val>
+                                            <p:strVal val="#ppt_x"/>
+                                          </p:val>
+                                        </p:tav>
+                                        <p:tav tm="100000">
+                                          <p:val>
+                                            <p:strVal val="#ppt_x"/>
+                                          </p:val>
+                                        </p:tav>
+                                      </p:tavLst>
+                                    </p:anim>
+                                    <p:anim calcmode="lin" valueType="num">
+                                      <p:cBhvr>
+                                        <p:cTn id="24" dur="1000" fill="hold"/>
+                                        <p:tgtEl>
+                                          <p:spTgt spid="14"/>
+                                        </p:tgtEl>
+                                        <p:attrNameLst>
+                                          <p:attrName>ppt_y</p:attrName>
+                                        </p:attrNameLst>
+                                      </p:cBhvr>
+                                      <p:tavLst>
+                                        <p:tav tm="0">
+                                          <p:val>
+                                            <p:strVal val="#ppt_y+.1"/>
+                                          </p:val>
+                                        </p:tav>
+                                        <p:tav tm="100000">
+                                          <p:val>
+                                            <p:strVal val="#ppt_y"/>
+                                          </p:val>
+                                        </p:tav>
+                                      </p:tavLst>
+                                    </p:anim>
+                                  </p:childTnLst>
+                                </p:cTn>
+                              </p:par>
+                              <p:par>
+                                <p:cTn id="25" presetID="42" presetClass="entr" presetSubtype="0" fill="hold" grpId="0" nodeType="withEffect">
+                                  <p:stCondLst>
+                                    <p:cond delay="0"/>
+                                  </p:stCondLst>
+                                  <p:childTnLst>
+                                    <p:set>
+                                      <p:cBhvr>
+                                        <p:cTn id="26" dur="1" fill="hold">
+                                          <p:stCondLst>
+                                            <p:cond delay="0"/>
+                                          </p:stCondLst>
+                                        </p:cTn>
+                                        <p:tgtEl>
+                                          <p:spTgt spid="11"/>
+                                        </p:tgtEl>
+                                        <p:attrNameLst>
+                                          <p:attrName>style.visibility</p:attrName>
+                                        </p:attrNameLst>
+                                      </p:cBhvr>
+                                      <p:to>
+                                        <p:strVal val="visible"/>
+                                      </p:to>
+                                    </p:set>
+                                    <p:animEffect transition="in" filter="fade">
+                                      <p:cBhvr>
+                                        <p:cTn id="27" dur="1000"/>
+                                        <p:tgtEl>
+                                          <p:spTgt spid="11"/>
+                                        </p:tgtEl>
+                                      </p:cBhvr>
+                                    </p:animEffect>
+                                    <p:anim calcmode="lin" valueType="num">
+                                      <p:cBhvr>
+                                        <p:cTn id="28" dur="1000" fill="hold"/>
+                                        <p:tgtEl>
+                                          <p:spTgt spid="11"/>
+                                        </p:tgtEl>
+                                        <p:attrNameLst>
+                                          <p:attrName>ppt_x</p:attrName>
+                                        </p:attrNameLst>
+                                      </p:cBhvr>
+                                      <p:tavLst>
+                                        <p:tav tm="0">
+                                          <p:val>
+                                            <p:strVal val="#ppt_x"/>
+                                          </p:val>
+                                        </p:tav>
+                                        <p:tav tm="100000">
+                                          <p:val>
+                                            <p:strVal val="#ppt_x"/>
+                                          </p:val>
+                                        </p:tav>
+                                      </p:tavLst>
+                                    </p:anim>
+                                    <p:anim calcmode="lin" valueType="num">
+                                      <p:cBhvr>
+                                        <p:cTn id="29" dur="1000" fill="hold"/>
+                                        <p:tgtEl>
+                                          <p:spTgt spid="11"/>
+                                        </p:tgtEl>
+                                        <p:attrNameLst>
+                                          <p:attrName>ppt_y</p:attrName>
+                                        </p:attrNameLst>
+                                      </p:cBhvr>
+                                      <p:tavLst>
+                                        <p:tav tm="0">
+                                          <p:val>
+                                            <p:strVal val="#ppt_y+.1"/>
+                                          </p:val>
+                                        </p:tav>
+                                        <p:tav tm="100000">
+                                          <p:val>
+                                            <p:strVal val="#ppt_y"/>
+                                          </p:val>
+                                        </p:tav>
+                                      </p:tavLst>
+                                    </p:anim>
+                                  </p:childTnLst>
+                                </p:cTn>
+                              </p:par>
+                              <p:par>
+                                <p:cTn id="30" presetID="42" presetClass="entr" presetSubtype="0" fill="hold" grpId="0" nodeType="withEffect">
+                                  <p:stCondLst>
+                                    <p:cond delay="0"/>
+                                  </p:stCondLst>
+                                  <p:childTnLst>
+                                    <p:set>
+                                      <p:cBhvr>
+                                        <p:cTn id="31" dur="1" fill="hold">
+                                          <p:stCondLst>
+                                            <p:cond delay="0"/>
+                                          </p:stCondLst>
+                                        </p:cTn>
+                                        <p:tgtEl>
+                                          <p:spTgt spid="16"/>
+                                        </p:tgtEl>
+                                        <p:attrNameLst>
+                                          <p:attrName>style.visibility</p:attrName>
+                                        </p:attrNameLst>
+                                      </p:cBhvr>
+                                      <p:to>
+                                        <p:strVal val="visible"/>
+                                      </p:to>
+                                    </p:set>
+                                    <p:animEffect transition="in" filter="fade">
+                                      <p:cBhvr>
+                                        <p:cTn id="32" dur="1000"/>
+                                        <p:tgtEl>
+                                          <p:spTgt spid="16"/>
+                                        </p:tgtEl>
+                                      </p:cBhvr>
+                                    </p:animEffect>
+                                    <p:anim calcmode="lin" valueType="num">
+                                      <p:cBhvr>
+                                        <p:cTn id="33" dur="1000" fill="hold"/>
+                                        <p:tgtEl>
+                                          <p:spTgt spid="16"/>
+                                        </p:tgtEl>
+                                        <p:attrNameLst>
+                                          <p:attrName>ppt_x</p:attrName>
+                                        </p:attrNameLst>
+                                      </p:cBhvr>
+                                      <p:tavLst>
+                                        <p:tav tm="0">
+                                          <p:val>
+                                            <p:strVal val="#ppt_x"/>
+                                          </p:val>
+                                        </p:tav>
+                                        <p:tav tm="100000">
+                                          <p:val>
+                                            <p:strVal val="#ppt_x"/>
+                                          </p:val>
+                                        </p:tav>
+                                      </p:tavLst>
+                                    </p:anim>
+                                    <p:anim calcmode="lin" valueType="num">
+                                      <p:cBhvr>
+                                        <p:cTn id="34" dur="1000" fill="hold"/>
+                                        <p:tgtEl>
+                                          <p:spTgt spid="16"/>
+                                        </p:tgtEl>
+                                        <p:attrNameLst>
+                                          <p:attrName>ppt_y</p:attrName>
+                                        </p:attrNameLst>
+                                      </p:cBhvr>
+                                      <p:tavLst>
+                                        <p:tav tm="0">
+                                          <p:val>
+                                            <p:strVal val="#ppt_y+.1"/>
+                                          </p:val>
+                                        </p:tav>
+                                        <p:tav tm="100000">
+                                          <p:val>
+                                            <p:strVal val="#ppt_y"/>
+                                          </p:val>
+                                        </p:tav>
+                                      </p:tavLst>
+                                    </p:anim>
+                                  </p:childTnLst>
+                                </p:cTn>
+                              </p:par>
+                              <p:par>
+                                <p:cTn id="35" presetID="42" presetClass="entr" presetSubtype="0" fill="hold" grpId="0" nodeType="withEffect">
+                                  <p:stCondLst>
+                                    <p:cond delay="0"/>
+                                  </p:stCondLst>
+                                  <p:childTnLst>
+                                    <p:set>
+                                      <p:cBhvr>
+                                        <p:cTn id="36" dur="1" fill="hold">
+                                          <p:stCondLst>
+                                            <p:cond delay="0"/>
+                                          </p:stCondLst>
+                                        </p:cTn>
+                                        <p:tgtEl>
+                                          <p:spTgt spid="15"/>
+                                        </p:tgtEl>
+                                        <p:attrNameLst>
+                                          <p:attrName>style.visibility</p:attrName>
+                                        </p:attrNameLst>
+                                      </p:cBhvr>
+                                      <p:to>
+                                        <p:strVal val="visible"/>
+                                      </p:to>
+                                    </p:set>
+                                    <p:animEffect transition="in" filter="fade">
+                                      <p:cBhvr>
+                                        <p:cTn id="37" dur="1000"/>
+                                        <p:tgtEl>
+                                          <p:spTgt spid="15"/>
+                                        </p:tgtEl>
+                                      </p:cBhvr>
+                                    </p:animEffect>
+                                    <p:anim calcmode="lin" valueType="num">
+                                      <p:cBhvr>
+                                        <p:cTn id="38" dur="1000" fill="hold"/>
+                                        <p:tgtEl>
+                                          <p:spTgt spid="15"/>
+                                        </p:tgtEl>
+                                        <p:attrNameLst>
+                                          <p:attrName>ppt_x</p:attrName>
+                                        </p:attrNameLst>
+                                      </p:cBhvr>
+                                      <p:tavLst>
+                                        <p:tav tm="0">
+                                          <p:val>
+                                            <p:strVal val="#ppt_x"/>
+                                          </p:val>
+                                        </p:tav>
+                                        <p:tav tm="100000">
+                                          <p:val>
+                                            <p:strVal val="#ppt_x"/>
+                                          </p:val>
+                                        </p:tav>
+                                      </p:tavLst>
+                                    </p:anim>
+                                    <p:anim calcmode="lin" valueType="num">
+                                      <p:cBhvr>
+                                        <p:cTn id="39" dur="1000" fill="hold"/>
+                                        <p:tgtEl>
+                                          <p:spTgt spid="15"/>
+                                        </p:tgtEl>
+                                        <p:attrNameLst>
+                                          <p:attrName>ppt_y</p:attrName>
+                                        </p:attrNameLst>
+                                      </p:cBhvr>
+                                      <p:tavLst>
+                                        <p:tav tm="0">
+                                          <p:val>
+                                            <p:strVal val="#ppt_y+.1"/>
+                                          </p:val>
+                                        </p:tav>
+                                        <p:tav tm="100000">
+                                          <p:val>
+                                            <p:strVal val="#ppt_y"/>
+                                          </p:val>
+                                        </p:tav>
+                                      </p:tavLst>
+                                    </p:anim>
+                                  </p:childTnLst>
+                                </p:cTn>
+                              </p:par>
+                              <p:par>
+                                <p:cTn id="40" presetID="42" presetClass="entr" presetSubtype="0" fill="hold" grpId="0" nodeType="withEffect">
+                                  <p:stCondLst>
+                                    <p:cond delay="0"/>
+                                  </p:stCondLst>
+                                  <p:childTnLst>
+                                    <p:set>
+                                      <p:cBhvr>
+                                        <p:cTn id="41" dur="1" fill="hold">
+                                          <p:stCondLst>
+                                            <p:cond delay="0"/>
+                                          </p:stCondLst>
+                                        </p:cTn>
+                                        <p:tgtEl>
+                                          <p:spTgt spid="18"/>
+                                        </p:tgtEl>
+                                        <p:attrNameLst>
+                                          <p:attrName>style.visibility</p:attrName>
+                                        </p:attrNameLst>
+                                      </p:cBhvr>
+                                      <p:to>
+                                        <p:strVal val="visible"/>
+                                      </p:to>
+                                    </p:set>
+                                    <p:animEffect transition="in" filter="fade">
+                                      <p:cBhvr>
+                                        <p:cTn id="42" dur="1000"/>
+                                        <p:tgtEl>
+                                          <p:spTgt spid="18"/>
+                                        </p:tgtEl>
+                                      </p:cBhvr>
+                                    </p:animEffect>
+                                    <p:anim calcmode="lin" valueType="num">
+                                      <p:cBhvr>
+                                        <p:cTn id="43" dur="1000" fill="hold"/>
+                                        <p:tgtEl>
+                                          <p:spTgt spid="18"/>
+                                        </p:tgtEl>
+                                        <p:attrNameLst>
+                                          <p:attrName>ppt_x</p:attrName>
+                                        </p:attrNameLst>
+                                      </p:cBhvr>
+                                      <p:tavLst>
+                                        <p:tav tm="0">
+                                          <p:val>
+                                            <p:strVal val="#ppt_x"/>
+                                          </p:val>
+                                        </p:tav>
+                                        <p:tav tm="100000">
+                                          <p:val>
+                                            <p:strVal val="#ppt_x"/>
+                                          </p:val>
+                                        </p:tav>
+                                      </p:tavLst>
+                                    </p:anim>
+                                    <p:anim calcmode="lin" valueType="num">
+                                      <p:cBhvr>
+                                        <p:cTn id="44" dur="1000" fill="hold"/>
+                                        <p:tgtEl>
+                                          <p:spTgt spid="18"/>
+                                        </p:tgtEl>
+                                        <p:attrNameLst>
+                                          <p:attrName>ppt_y</p:attrName>
+                                        </p:attrNameLst>
+                                      </p:cBhvr>
+                                      <p:tavLst>
+                                        <p:tav tm="0">
+                                          <p:val>
+                                            <p:strVal val="#ppt_y+.1"/>
+                                          </p:val>
+                                        </p:tav>
+                                        <p:tav tm="100000">
+                                          <p:val>
+                                            <p:strVal val="#ppt_y"/>
+                                          </p:val>
+                                        </p:tav>
+                                      </p:tavLst>
+                                    </p:anim>
+                                  </p:childTnLst>
+                                </p:cTn>
+                              </p:par>
+                              <p:par>
+                                <p:cTn id="45" presetID="42" presetClass="entr" presetSubtype="0" fill="hold" grpId="0" nodeType="withEffect">
+                                  <p:stCondLst>
+                                    <p:cond delay="0"/>
+                                  </p:stCondLst>
+                                  <p:childTnLst>
+                                    <p:set>
+                                      <p:cBhvr>
+                                        <p:cTn id="46" dur="1" fill="hold">
+                                          <p:stCondLst>
+                                            <p:cond delay="0"/>
+                                          </p:stCondLst>
+                                        </p:cTn>
+                                        <p:tgtEl>
+                                          <p:spTgt spid="13"/>
+                                        </p:tgtEl>
+                                        <p:attrNameLst>
+                                          <p:attrName>style.visibility</p:attrName>
+                                        </p:attrNameLst>
+                                      </p:cBhvr>
+                                      <p:to>
+                                        <p:strVal val="visible"/>
+                                      </p:to>
+                                    </p:set>
+                                    <p:animEffect transition="in" filter="fade">
+                                      <p:cBhvr>
+                                        <p:cTn id="47" dur="1000"/>
+                                        <p:tgtEl>
                                           <p:spTgt spid="13"/>
                                         </p:tgtEl>
                                       </p:cBhvr>
                                     </p:animEffect>
                                     <p:anim calcmode="lin" valueType="num">
                                       <p:cBhvr>
-                                        <p:cTn id="23" dur="1000" fill="hold"/>
+                                        <p:cTn id="48" dur="1000" fill="hold"/>
                                         <p:tgtEl>
                                           <p:spTgt spid="13"/>
                                         </p:tgtEl>
@@ -16063,9 +18371,90 @@
                                     </p:anim>
                                     <p:anim calcmode="lin" valueType="num">
                                       <p:cBhvr>
-                                        <p:cTn id="24" dur="1000" fill="hold"/>
+                                        <p:cTn id="49" dur="1000" fill="hold"/>
                                         <p:tgtEl>
                                           <p:spTgt spid="13"/>
+                                        </p:tgtEl>
+                                        <p:attrNameLst>
+                                          <p:attrName>ppt_y</p:attrName>
+                                        </p:attrNameLst>
+                                      </p:cBhvr>
+                                      <p:tavLst>
+                                        <p:tav tm="0">
+                                          <p:val>
+                                            <p:strVal val="#ppt_y+.1"/>
+                                          </p:val>
+                                        </p:tav>
+                                        <p:tav tm="100000">
+                                          <p:val>
+                                            <p:strVal val="#ppt_y"/>
+                                          </p:val>
+                                        </p:tav>
+                                      </p:tavLst>
+                                    </p:anim>
+                                  </p:childTnLst>
+                                </p:cTn>
+                              </p:par>
+                              <p:par>
+                                <p:cTn id="50" presetID="42" presetClass="entr" presetSubtype="0" fill="hold" grpId="0" nodeType="withEffect">
+                                  <p:stCondLst>
+                                    <p:cond delay="0"/>
+                                  </p:stCondLst>
+                                  <p:childTnLst>
+                                    <p:set>
+                                      <p:cBhvr>
+                                        <p:cTn id="51" dur="1" fill="hold">
+                                          <p:stCondLst>
+                                            <p:cond delay="0"/>
+                                          </p:stCondLst>
+                                        </p:cTn>
+                                        <p:tgtEl>
+                                          <p:spTgt spid="12"/>
+                                        </p:tgtEl>
+                                        <p:attrNameLst>
+                                          <p:attrName>style.visibility</p:attrName>
+                                        </p:attrNameLst>
+                                      </p:cBhvr>
+                                      <p:to>
+                                        <p:strVal val="visible"/>
+                                      </p:to>
+                                    </p:set>
+                                    <p:animEffect transition="in" filter="fade">
+                                      <p:cBhvr>
+                                        <p:cTn id="52" dur="1000"/>
+                                        <p:tgtEl>
+                                          <p:spTgt spid="12"/>
+                                        </p:tgtEl>
+                                      </p:cBhvr>
+                                    </p:animEffect>
+                                    <p:anim calcmode="lin" valueType="num">
+                                      <p:cBhvr>
+                                        <p:cTn id="53" dur="1000" fill="hold"/>
+                                        <p:tgtEl>
+                                          <p:spTgt spid="12"/>
+                                        </p:tgtEl>
+                                        <p:attrNameLst>
+                                          <p:attrName>ppt_x</p:attrName>
+                                        </p:attrNameLst>
+                                      </p:cBhvr>
+                                      <p:tavLst>
+                                        <p:tav tm="0">
+                                          <p:val>
+                                            <p:strVal val="#ppt_x"/>
+                                          </p:val>
+                                        </p:tav>
+                                        <p:tav tm="100000">
+                                          <p:val>
+                                            <p:strVal val="#ppt_x"/>
+                                          </p:val>
+                                        </p:tav>
+                                      </p:tavLst>
+                                    </p:anim>
+                                    <p:anim calcmode="lin" valueType="num">
+                                      <p:cBhvr>
+                                        <p:cTn id="54" dur="1000" fill="hold"/>
+                                        <p:tgtEl>
+                                          <p:spTgt spid="12"/>
                                         </p:tgtEl>
                                         <p:attrNameLst>
                                           <p:attrName>ppt_y</p:attrName>
@@ -16116,9 +18505,15 @@
     </p:tnLst>
     <p:bldLst>
       <p:bldP spid="9" grpId="0" animBg="1"/>
-      <p:bldP spid="11" grpId="0"/>
-      <p:bldP spid="12" grpId="0" animBg="1"/>
+      <p:bldP spid="10" grpId="0" animBg="1"/>
+      <p:bldP spid="11" grpId="0" animBg="1"/>
+      <p:bldP spid="12" grpId="0"/>
       <p:bldP spid="13" grpId="0"/>
+      <p:bldP spid="14" grpId="0" animBg="1"/>
+      <p:bldP spid="15" grpId="0"/>
+      <p:bldP spid="16" grpId="0"/>
+      <p:bldP spid="17" grpId="0" animBg="1"/>
+      <p:bldP spid="18" grpId="0"/>
     </p:bldLst>
   </p:timing>
 </p:sld>

--- a/DIA 2 - APRESENTACAO - VERSAO AMPLIADA FINAL.pptx
+++ b/DIA 2 - APRESENTACAO - VERSAO AMPLIADA FINAL.pptx
@@ -2717,7 +2717,7 @@
   <pc:docChgLst>
     <pc:chgData name="Renan Xavier Cortes" userId="d6af805853004405" providerId="LiveId" clId="{32CE5F03-9B31-4102-A03B-787EE1528540}"/>
     <pc:docChg chg="undo custSel addSld delSld modSld sldOrd">
-      <pc:chgData name="Renan Xavier Cortes" userId="d6af805853004405" providerId="LiveId" clId="{32CE5F03-9B31-4102-A03B-787EE1528540}" dt="2026-09-30T18:35:29.770" v="2016"/>
+      <pc:chgData name="Renan Xavier Cortes" userId="d6af805853004405" providerId="LiveId" clId="{32CE5F03-9B31-4102-A03B-787EE1528540}" dt="2026-09-30T19:14:08.306" v="2548" actId="20577"/>
       <pc:docMkLst>
         <pc:docMk/>
       </pc:docMkLst>
@@ -2777,6 +2777,61 @@
         </pc:picChg>
       </pc:sldChg>
       <pc:sldChg chg="addSp modSp mod">
+        <pc:chgData name="Renan Xavier Cortes" userId="d6af805853004405" providerId="LiveId" clId="{32CE5F03-9B31-4102-A03B-787EE1528540}" dt="2026-09-30T19:10:25.079" v="2546" actId="1076"/>
+        <pc:sldMkLst>
+          <pc:docMk/>
+          <pc:sldMk cId="3705900010" sldId="261"/>
+        </pc:sldMkLst>
+        <pc:spChg chg="add">
+          <ac:chgData name="Renan Xavier Cortes" userId="d6af805853004405" providerId="LiveId" clId="{32CE5F03-9B31-4102-A03B-787EE1528540}" dt="2026-09-30T19:08:49.415" v="2535"/>
+          <ac:spMkLst>
+            <pc:docMk/>
+            <pc:sldMk cId="3705900010" sldId="261"/>
+            <ac:spMk id="4" creationId="{26CF9A97-1C8F-3603-527C-B47CCD37E1EF}"/>
+          </ac:spMkLst>
+        </pc:spChg>
+        <pc:spChg chg="mod">
+          <ac:chgData name="Renan Xavier Cortes" userId="d6af805853004405" providerId="LiveId" clId="{32CE5F03-9B31-4102-A03B-787EE1528540}" dt="2026-09-30T19:02:35.833" v="2239" actId="20577"/>
+          <ac:spMkLst>
+            <pc:docMk/>
+            <pc:sldMk cId="3705900010" sldId="261"/>
+            <ac:spMk id="8" creationId="{39AE06C5-34BE-4D68-97C3-4C07702C2DF6}"/>
+          </ac:spMkLst>
+        </pc:spChg>
+        <pc:spChg chg="mod">
+          <ac:chgData name="Renan Xavier Cortes" userId="d6af805853004405" providerId="LiveId" clId="{32CE5F03-9B31-4102-A03B-787EE1528540}" dt="2026-09-30T19:07:00.425" v="2533" actId="20577"/>
+          <ac:spMkLst>
+            <pc:docMk/>
+            <pc:sldMk cId="3705900010" sldId="261"/>
+            <ac:spMk id="14" creationId="{427DBFEB-81BF-4CC3-A411-FBF43D295C56}"/>
+          </ac:spMkLst>
+        </pc:spChg>
+        <pc:picChg chg="add mod">
+          <ac:chgData name="Renan Xavier Cortes" userId="d6af805853004405" providerId="LiveId" clId="{32CE5F03-9B31-4102-A03B-787EE1528540}" dt="2026-09-30T19:09:13.712" v="2543" actId="1076"/>
+          <ac:picMkLst>
+            <pc:docMk/>
+            <pc:sldMk cId="3705900010" sldId="261"/>
+            <ac:picMk id="6" creationId="{794762C9-B5D3-1977-F0FE-A99EEC89CE5D}"/>
+          </ac:picMkLst>
+        </pc:picChg>
+        <pc:picChg chg="add mod">
+          <ac:chgData name="Renan Xavier Cortes" userId="d6af805853004405" providerId="LiveId" clId="{32CE5F03-9B31-4102-A03B-787EE1528540}" dt="2026-09-30T19:09:09.950" v="2541" actId="1076"/>
+          <ac:picMkLst>
+            <pc:docMk/>
+            <pc:sldMk cId="3705900010" sldId="261"/>
+            <ac:picMk id="7170" creationId="{1A22D7E4-EFBD-340A-BBAC-D01BB1295755}"/>
+          </ac:picMkLst>
+        </pc:picChg>
+        <pc:picChg chg="add mod">
+          <ac:chgData name="Renan Xavier Cortes" userId="d6af805853004405" providerId="LiveId" clId="{32CE5F03-9B31-4102-A03B-787EE1528540}" dt="2026-09-30T19:10:25.079" v="2546" actId="1076"/>
+          <ac:picMkLst>
+            <pc:docMk/>
+            <pc:sldMk cId="3705900010" sldId="261"/>
+            <ac:picMk id="7174" creationId="{182F9BF4-F274-8F50-77FB-FC6F00E8397E}"/>
+          </ac:picMkLst>
+        </pc:picChg>
+      </pc:sldChg>
+      <pc:sldChg chg="addSp modSp mod">
         <pc:chgData name="Renan Xavier Cortes" userId="d6af805853004405" providerId="LiveId" clId="{32CE5F03-9B31-4102-A03B-787EE1528540}" dt="2026-09-30T14:46:07.940" v="1417" actId="1076"/>
         <pc:sldMkLst>
           <pc:docMk/>
@@ -2804,6 +2859,37 @@
             <pc:docMk/>
             <pc:sldMk cId="1536836101" sldId="262"/>
             <ac:picMk id="2050" creationId="{D5753060-8B2D-376B-A341-C1A929AB6692}"/>
+          </ac:picMkLst>
+        </pc:picChg>
+      </pc:sldChg>
+      <pc:sldChg chg="addSp modSp mod">
+        <pc:chgData name="Renan Xavier Cortes" userId="d6af805853004405" providerId="LiveId" clId="{32CE5F03-9B31-4102-A03B-787EE1528540}" dt="2026-09-30T18:57:45.323" v="2169" actId="255"/>
+        <pc:sldMkLst>
+          <pc:docMk/>
+          <pc:sldMk cId="1070033144" sldId="263"/>
+        </pc:sldMkLst>
+        <pc:spChg chg="mod">
+          <ac:chgData name="Renan Xavier Cortes" userId="d6af805853004405" providerId="LiveId" clId="{32CE5F03-9B31-4102-A03B-787EE1528540}" dt="2026-09-30T18:43:50.078" v="2046" actId="1076"/>
+          <ac:spMkLst>
+            <pc:docMk/>
+            <pc:sldMk cId="1070033144" sldId="263"/>
+            <ac:spMk id="8" creationId="{39AE06C5-34BE-4D68-97C3-4C07702C2DF6}"/>
+          </ac:spMkLst>
+        </pc:spChg>
+        <pc:spChg chg="mod">
+          <ac:chgData name="Renan Xavier Cortes" userId="d6af805853004405" providerId="LiveId" clId="{32CE5F03-9B31-4102-A03B-787EE1528540}" dt="2026-09-30T18:57:45.323" v="2169" actId="255"/>
+          <ac:spMkLst>
+            <pc:docMk/>
+            <pc:sldMk cId="1070033144" sldId="263"/>
+            <ac:spMk id="14" creationId="{427DBFEB-81BF-4CC3-A411-FBF43D295C56}"/>
+          </ac:spMkLst>
+        </pc:spChg>
+        <pc:picChg chg="add mod">
+          <ac:chgData name="Renan Xavier Cortes" userId="d6af805853004405" providerId="LiveId" clId="{32CE5F03-9B31-4102-A03B-787EE1528540}" dt="2026-09-30T18:43:53.470" v="2048" actId="14100"/>
+          <ac:picMkLst>
+            <pc:docMk/>
+            <pc:sldMk cId="1070033144" sldId="263"/>
+            <ac:picMk id="6146" creationId="{54608EC3-B8E2-2804-8729-CF81BB847823}"/>
           </ac:picMkLst>
         </pc:picChg>
       </pc:sldChg>
@@ -3192,13 +3278,13 @@
         </pc:sldMkLst>
       </pc:sldChg>
       <pc:sldChg chg="modSp add mod">
-        <pc:chgData name="Renan Xavier Cortes" userId="d6af805853004405" providerId="LiveId" clId="{32CE5F03-9B31-4102-A03B-787EE1528540}" dt="2026-09-29T18:59:18.488" v="196" actId="20577"/>
+        <pc:chgData name="Renan Xavier Cortes" userId="d6af805853004405" providerId="LiveId" clId="{32CE5F03-9B31-4102-A03B-787EE1528540}" dt="2026-09-30T19:14:08.306" v="2548" actId="20577"/>
         <pc:sldMkLst>
           <pc:docMk/>
           <pc:sldMk cId="2697758197" sldId="274"/>
         </pc:sldMkLst>
         <pc:spChg chg="mod">
-          <ac:chgData name="Renan Xavier Cortes" userId="d6af805853004405" providerId="LiveId" clId="{32CE5F03-9B31-4102-A03B-787EE1528540}" dt="2026-09-29T18:59:18.488" v="196" actId="20577"/>
+          <ac:chgData name="Renan Xavier Cortes" userId="d6af805853004405" providerId="LiveId" clId="{32CE5F03-9B31-4102-A03B-787EE1528540}" dt="2026-09-30T19:14:08.306" v="2548" actId="20577"/>
           <ac:spMkLst>
             <pc:docMk/>
             <pc:sldMk cId="2697758197" sldId="274"/>
@@ -12112,7 +12198,7 @@
         </p:nvSpPr>
         <p:spPr>
           <a:xfrm>
-            <a:off x="779259" y="294626"/>
+            <a:off x="169120" y="247071"/>
             <a:ext cx="10633479" cy="523220"/>
           </a:xfrm>
           <a:prstGeom prst="rect">
@@ -12170,8 +12256,8 @@
         </p:nvSpPr>
         <p:spPr>
           <a:xfrm>
-            <a:off x="940904" y="1276323"/>
-            <a:ext cx="10310191" cy="506292"/>
+            <a:off x="660325" y="1261333"/>
+            <a:ext cx="10871345" cy="5249642"/>
           </a:xfrm>
           <a:prstGeom prst="rect">
             <a:avLst/>
@@ -12195,8 +12281,123 @@
               <a:buChar char="Ø"/>
             </a:pPr>
             <a:r>
-              <a:rPr lang="pt-BR" sz="2000" b="1" dirty="0"/>
-              <a:t>Noções gerais sobre Estatística. </a:t>
+              <a:rPr lang="pt-BR" sz="1850" b="1" dirty="0" err="1"/>
+              <a:t>Devah</a:t>
+            </a:r>
+            <a:r>
+              <a:rPr lang="pt-BR" sz="1850" b="1" dirty="0"/>
+              <a:t> Pager (2003) no American </a:t>
+            </a:r>
+            <a:r>
+              <a:rPr lang="pt-BR" sz="1850" b="1" dirty="0" err="1"/>
+              <a:t>Journal</a:t>
+            </a:r>
+            <a:r>
+              <a:rPr lang="pt-BR" sz="1850" b="1" dirty="0"/>
+              <a:t> </a:t>
+            </a:r>
+            <a:r>
+              <a:rPr lang="pt-BR" sz="1850" b="1" dirty="0" err="1"/>
+              <a:t>of</a:t>
+            </a:r>
+            <a:r>
+              <a:rPr lang="pt-BR" sz="1850" b="1" dirty="0"/>
+              <a:t> </a:t>
+            </a:r>
+            <a:r>
+              <a:rPr lang="pt-BR" sz="1850" b="1" dirty="0" err="1"/>
+              <a:t>Sociology</a:t>
+            </a:r>
+            <a:r>
+              <a:rPr lang="pt-BR" sz="1850" b="1" dirty="0"/>
+              <a:t>: desenho experimental elegante: ela enviou candidatos com perfis idênticos de escolaridade e experiência, alguns com antecedentes criminais fictícios e outros sem, para vagas reais de emprego em Milwaukee. O resultado: candidatos com antecedentes receberam menos da metade dos retornos dos candidatos sem antecedentes — e, entre homens negros, ter antecedentes reduzia as chances a um patamar em que eles se saíam pior do que homens brancos recém-saídos da prisão.</a:t>
+            </a:r>
+          </a:p>
+          <a:p>
+            <a:pPr marL="285750" indent="-285750">
+              <a:lnSpc>
+                <a:spcPct val="150000"/>
+              </a:lnSpc>
+              <a:spcAft>
+                <a:spcPts val="110"/>
+              </a:spcAft>
+              <a:buFont typeface="Wingdings" panose="05000000000000000000" pitchFamily="2" charset="2"/>
+              <a:buChar char="Ø"/>
+            </a:pPr>
+            <a:endParaRPr lang="pt-BR" sz="1850" b="1" dirty="0"/>
+          </a:p>
+          <a:p>
+            <a:pPr marL="285750" indent="-285750">
+              <a:lnSpc>
+                <a:spcPct val="150000"/>
+              </a:lnSpc>
+              <a:spcAft>
+                <a:spcPts val="110"/>
+              </a:spcAft>
+              <a:buFont typeface="Wingdings" panose="05000000000000000000" pitchFamily="2" charset="2"/>
+              <a:buChar char="Ø"/>
+            </a:pPr>
+            <a:r>
+              <a:rPr lang="pt-BR" sz="1850" b="1" dirty="0"/>
+              <a:t>O antecedente criminal funciona, na prática, como um imposto sobre a empregabilidade.</a:t>
+            </a:r>
+          </a:p>
+          <a:p>
+            <a:pPr marL="285750" indent="-285750">
+              <a:lnSpc>
+                <a:spcPct val="150000"/>
+              </a:lnSpc>
+              <a:spcAft>
+                <a:spcPts val="110"/>
+              </a:spcAft>
+              <a:buFont typeface="Wingdings" panose="05000000000000000000" pitchFamily="2" charset="2"/>
+              <a:buChar char="Ø"/>
+            </a:pPr>
+            <a:endParaRPr lang="pt-BR" sz="1850" b="1" dirty="0"/>
+          </a:p>
+          <a:p>
+            <a:pPr marL="285750" indent="-285750">
+              <a:lnSpc>
+                <a:spcPct val="150000"/>
+              </a:lnSpc>
+              <a:spcAft>
+                <a:spcPts val="110"/>
+              </a:spcAft>
+              <a:buFont typeface="Wingdings" panose="05000000000000000000" pitchFamily="2" charset="2"/>
+              <a:buChar char="Ø"/>
+            </a:pPr>
+            <a:r>
+              <a:rPr lang="pt-BR" sz="1850" b="1" dirty="0"/>
+              <a:t>Quando o mercado de trabalho formal fecha a porta, o custo de oportunidade do crime despenca.</a:t>
+            </a:r>
+          </a:p>
+          <a:p>
+            <a:pPr marL="285750" indent="-285750">
+              <a:lnSpc>
+                <a:spcPct val="150000"/>
+              </a:lnSpc>
+              <a:spcAft>
+                <a:spcPts val="110"/>
+              </a:spcAft>
+              <a:buFont typeface="Wingdings" panose="05000000000000000000" pitchFamily="2" charset="2"/>
+              <a:buChar char="Ø"/>
+            </a:pPr>
+            <a:endParaRPr lang="pt-BR" sz="1850" b="1" dirty="0"/>
+          </a:p>
+          <a:p>
+            <a:pPr marL="285750" indent="-285750">
+              <a:lnSpc>
+                <a:spcPct val="150000"/>
+              </a:lnSpc>
+              <a:spcAft>
+                <a:spcPts val="110"/>
+              </a:spcAft>
+              <a:buFont typeface="Wingdings" panose="05000000000000000000" pitchFamily="2" charset="2"/>
+              <a:buChar char="Ø"/>
+            </a:pPr>
+            <a:r>
+              <a:rPr lang="pt-BR" sz="1850" b="1" dirty="0"/>
+              <a:t>No Brasil, o tema ainda é pouco explorado na literatura.</a:t>
             </a:r>
           </a:p>
         </p:txBody>
@@ -12279,6 +12480,53 @@
           <a:xfrm>
             <a:off x="10802599" y="6212508"/>
             <a:ext cx="1329440" cy="578697"/>
+          </a:xfrm>
+          <a:prstGeom prst="rect">
+            <a:avLst/>
+          </a:prstGeom>
+          <a:noFill/>
+          <a:extLst>
+            <a:ext uri="{909E8E84-426E-40DD-AFC4-6F175D3DCCD1}">
+              <a14:hiddenFill xmlns:a14="http://schemas.microsoft.com/office/drawing/2010/main">
+                <a:solidFill>
+                  <a:srgbClr val="FFFFFF"/>
+                </a:solidFill>
+              </a14:hiddenFill>
+            </a:ext>
+          </a:extLst>
+        </p:spPr>
+      </p:pic>
+      <p:pic>
+        <p:nvPicPr>
+          <p:cNvPr id="6146" name="Picture 2">
+            <a:extLst>
+              <a:ext uri="{FF2B5EF4-FFF2-40B4-BE49-F238E27FC236}">
+                <a16:creationId xmlns:a16="http://schemas.microsoft.com/office/drawing/2014/main" id="{54608EC3-B8E2-2804-8729-CF81BB847823}"/>
+              </a:ext>
+            </a:extLst>
+          </p:cNvPr>
+          <p:cNvPicPr>
+            <a:picLocks noChangeAspect="1" noChangeArrowheads="1"/>
+          </p:cNvPicPr>
+          <p:nvPr/>
+        </p:nvPicPr>
+        <p:blipFill>
+          <a:blip r:embed="rId5">
+            <a:extLst>
+              <a:ext uri="{28A0092B-C50C-407E-A947-70E740481C1C}">
+                <a14:useLocalDpi xmlns:a14="http://schemas.microsoft.com/office/drawing/2010/main" val="0"/>
+              </a:ext>
+            </a:extLst>
+          </a:blip>
+          <a:srcRect/>
+          <a:stretch>
+            <a:fillRect/>
+          </a:stretch>
+        </p:blipFill>
+        <p:spPr bwMode="auto">
+          <a:xfrm>
+            <a:off x="9968458" y="210839"/>
+            <a:ext cx="2054421" cy="1078571"/>
           </a:xfrm>
           <a:prstGeom prst="rect">
             <a:avLst/>
@@ -12412,7 +12660,7 @@
                 <a:latin typeface="Cambria" panose="02040503050406030204" pitchFamily="18" charset="0"/>
                 <a:ea typeface="Cambria" panose="02040503050406030204" pitchFamily="18" charset="0"/>
               </a:rPr>
-              <a:t>O que veremos a seguir</a:t>
+              <a:t>Quem falará a seguir</a:t>
             </a:r>
           </a:p>
         </p:txBody>
@@ -12432,7 +12680,7 @@
         <p:spPr>
           <a:xfrm>
             <a:off x="940904" y="1276323"/>
-            <a:ext cx="10310191" cy="1455270"/>
+            <a:ext cx="8621415" cy="4712572"/>
           </a:xfrm>
           <a:prstGeom prst="rect">
             <a:avLst/>
@@ -12457,11 +12705,61 @@
             </a:pPr>
             <a:r>
               <a:rPr lang="pt-BR" sz="2000" b="1" dirty="0"/>
-              <a:t>Apresentação da equipe do Henrique </a:t>
+              <a:t>Henrique </a:t>
             </a:r>
             <a:r>
               <a:rPr lang="pt-BR" sz="2000" b="1" dirty="0" err="1"/>
               <a:t>Joner</a:t>
+            </a:r>
+            <a:r>
+              <a:rPr lang="pt-BR" sz="2000" b="1" dirty="0"/>
+              <a:t>: </a:t>
+            </a:r>
+            <a:r>
+              <a:rPr lang="pt-BR" sz="2000" dirty="0"/>
+              <a:t>Estatístico e Mestre em Economia pela UFRGS, estuda Economia do Crime, mais especificamente abordagens de inteligência artificial aplicadas a gestão da segurança pública.</a:t>
+            </a:r>
+            <a:endParaRPr lang="pt-BR" sz="2000" b="1" dirty="0"/>
+          </a:p>
+          <a:p>
+            <a:pPr marL="285750" indent="-285750">
+              <a:lnSpc>
+                <a:spcPct val="150000"/>
+              </a:lnSpc>
+              <a:spcAft>
+                <a:spcPts val="110"/>
+              </a:spcAft>
+              <a:buFont typeface="Wingdings" panose="05000000000000000000" pitchFamily="2" charset="2"/>
+              <a:buChar char="Ø"/>
+            </a:pPr>
+            <a:r>
+              <a:rPr lang="pt-BR" sz="2000" b="1" dirty="0"/>
+              <a:t>Rafael Bernardini dos Santos: </a:t>
+            </a:r>
+            <a:r>
+              <a:rPr lang="pt-BR" sz="2000" dirty="0"/>
+              <a:t>Estatístico formado pela UFRGS e atua atualmente com segurança pública no Departamento de Economia e Estatística.</a:t>
+            </a:r>
+            <a:endParaRPr lang="pt-BR" sz="2000" b="1" dirty="0"/>
+          </a:p>
+          <a:p>
+            <a:pPr marL="285750" indent="-285750">
+              <a:lnSpc>
+                <a:spcPct val="150000"/>
+              </a:lnSpc>
+              <a:spcAft>
+                <a:spcPts val="110"/>
+              </a:spcAft>
+              <a:buFont typeface="Wingdings" panose="05000000000000000000" pitchFamily="2" charset="2"/>
+              <a:buChar char="Ø"/>
+            </a:pPr>
+            <a:r>
+              <a:rPr lang="pt-BR" sz="2000" b="1" dirty="0"/>
+              <a:t>Gisele da Silva Ferreira: </a:t>
+            </a:r>
+            <a:r>
+              <a:rPr lang="pt-BR" sz="2000" dirty="0"/>
+              <a:t>Estatística formada pela UFRGS e atua atualmente com segurança pública no Departamento de Economia e Estatística.</a:t>
             </a:r>
             <a:endParaRPr lang="pt-BR" sz="2000" b="1" dirty="0"/>
           </a:p>
@@ -12491,7 +12789,7 @@
             </a:pPr>
             <a:r>
               <a:rPr lang="pt-BR" sz="2000" b="1" dirty="0"/>
-              <a:t>Tenho certeza que será uma manhã muito proveitosa. Aproveitem!</a:t>
+              <a:t>Será uma manhã muito proveitosa. Aproveitem!</a:t>
             </a:r>
           </a:p>
         </p:txBody>
@@ -12574,6 +12872,130 @@
           <a:xfrm>
             <a:off x="10802599" y="6212508"/>
             <a:ext cx="1329440" cy="578697"/>
+          </a:xfrm>
+          <a:prstGeom prst="rect">
+            <a:avLst/>
+          </a:prstGeom>
+          <a:noFill/>
+          <a:extLst>
+            <a:ext uri="{909E8E84-426E-40DD-AFC4-6F175D3DCCD1}">
+              <a14:hiddenFill xmlns:a14="http://schemas.microsoft.com/office/drawing/2010/main">
+                <a:solidFill>
+                  <a:srgbClr val="FFFFFF"/>
+                </a:solidFill>
+              </a14:hiddenFill>
+            </a:ext>
+          </a:extLst>
+        </p:spPr>
+      </p:pic>
+      <p:pic>
+        <p:nvPicPr>
+          <p:cNvPr id="7170" name="Picture 2" descr="Henrique Joner - Estatístico | Geospatial Data Scientist | Estado do Rio Grande do Sul | LinkedIn">
+            <a:extLst>
+              <a:ext uri="{FF2B5EF4-FFF2-40B4-BE49-F238E27FC236}">
+                <a16:creationId xmlns:a16="http://schemas.microsoft.com/office/drawing/2014/main" id="{1A22D7E4-EFBD-340A-BBAC-D01BB1295755}"/>
+              </a:ext>
+            </a:extLst>
+          </p:cNvPr>
+          <p:cNvPicPr>
+            <a:picLocks noChangeAspect="1" noChangeArrowheads="1"/>
+          </p:cNvPicPr>
+          <p:nvPr/>
+        </p:nvPicPr>
+        <p:blipFill>
+          <a:blip r:embed="rId5">
+            <a:extLst>
+              <a:ext uri="{28A0092B-C50C-407E-A947-70E740481C1C}">
+                <a14:useLocalDpi xmlns:a14="http://schemas.microsoft.com/office/drawing/2010/main" val="0"/>
+              </a:ext>
+            </a:extLst>
+          </a:blip>
+          <a:srcRect/>
+          <a:stretch>
+            <a:fillRect/>
+          </a:stretch>
+        </p:blipFill>
+        <p:spPr bwMode="auto">
+          <a:xfrm>
+            <a:off x="9510651" y="463843"/>
+            <a:ext cx="1905000" cy="1905000"/>
+          </a:xfrm>
+          <a:prstGeom prst="rect">
+            <a:avLst/>
+          </a:prstGeom>
+          <a:noFill/>
+          <a:extLst>
+            <a:ext uri="{909E8E84-426E-40DD-AFC4-6F175D3DCCD1}">
+              <a14:hiddenFill xmlns:a14="http://schemas.microsoft.com/office/drawing/2010/main">
+                <a:solidFill>
+                  <a:srgbClr val="FFFFFF"/>
+                </a:solidFill>
+              </a14:hiddenFill>
+            </a:ext>
+          </a:extLst>
+        </p:spPr>
+      </p:pic>
+      <p:pic>
+        <p:nvPicPr>
+          <p:cNvPr id="6" name="Imagem 5">
+            <a:extLst>
+              <a:ext uri="{FF2B5EF4-FFF2-40B4-BE49-F238E27FC236}">
+                <a16:creationId xmlns:a16="http://schemas.microsoft.com/office/drawing/2014/main" id="{794762C9-B5D3-1977-F0FE-A99EEC89CE5D}"/>
+              </a:ext>
+            </a:extLst>
+          </p:cNvPr>
+          <p:cNvPicPr>
+            <a:picLocks noChangeAspect="1"/>
+          </p:cNvPicPr>
+          <p:nvPr/>
+        </p:nvPicPr>
+        <p:blipFill>
+          <a:blip r:embed="rId6"/>
+          <a:stretch>
+            <a:fillRect/>
+          </a:stretch>
+        </p:blipFill>
+        <p:spPr>
+          <a:xfrm>
+            <a:off x="9839507" y="2543323"/>
+            <a:ext cx="1411589" cy="1411589"/>
+          </a:xfrm>
+          <a:prstGeom prst="rect">
+            <a:avLst/>
+          </a:prstGeom>
+        </p:spPr>
+      </p:pic>
+      <p:pic>
+        <p:nvPicPr>
+          <p:cNvPr id="7174" name="Picture 6" descr="Profile image">
+            <a:extLst>
+              <a:ext uri="{FF2B5EF4-FFF2-40B4-BE49-F238E27FC236}">
+                <a16:creationId xmlns:a16="http://schemas.microsoft.com/office/drawing/2014/main" id="{182F9BF4-F274-8F50-77FB-FC6F00E8397E}"/>
+              </a:ext>
+            </a:extLst>
+          </p:cNvPr>
+          <p:cNvPicPr>
+            <a:picLocks noChangeAspect="1" noChangeArrowheads="1"/>
+          </p:cNvPicPr>
+          <p:nvPr/>
+        </p:nvPicPr>
+        <p:blipFill>
+          <a:blip r:embed="rId7">
+            <a:extLst>
+              <a:ext uri="{28A0092B-C50C-407E-A947-70E740481C1C}">
+                <a14:useLocalDpi xmlns:a14="http://schemas.microsoft.com/office/drawing/2010/main" val="0"/>
+              </a:ext>
+            </a:extLst>
+          </a:blip>
+          <a:srcRect/>
+          <a:stretch>
+            <a:fillRect/>
+          </a:stretch>
+        </p:blipFill>
+        <p:spPr bwMode="auto">
+          <a:xfrm>
+            <a:off x="9752696" y="4291105"/>
+            <a:ext cx="1585210" cy="1585210"/>
           </a:xfrm>
           <a:prstGeom prst="rect">
             <a:avLst/>
@@ -14751,7 +15173,7 @@
             </a:pPr>
             <a:r>
               <a:rPr lang="pt-BR" sz="2000" b="1" dirty="0"/>
-              <a:t>Porque muitas analises focam na taxa de homicídio?</a:t>
+              <a:t>Porque muitas análises focam na taxa de homicídio?</a:t>
             </a:r>
           </a:p>
           <a:p>

--- a/DIA 2 - APRESENTACAO - VERSAO AMPLIADA FINAL.pptx
+++ b/DIA 2 - APRESENTACAO - VERSAO AMPLIADA FINAL.pptx
@@ -2717,7 +2717,7 @@
   <pc:docChgLst>
     <pc:chgData name="Renan Xavier Cortes" userId="d6af805853004405" providerId="LiveId" clId="{32CE5F03-9B31-4102-A03B-787EE1528540}"/>
     <pc:docChg chg="undo custSel addSld delSld modSld sldOrd">
-      <pc:chgData name="Renan Xavier Cortes" userId="d6af805853004405" providerId="LiveId" clId="{32CE5F03-9B31-4102-A03B-787EE1528540}" dt="2026-09-30T19:14:08.306" v="2548" actId="20577"/>
+      <pc:chgData name="Renan Xavier Cortes" userId="d6af805853004405" providerId="LiveId" clId="{32CE5F03-9B31-4102-A03B-787EE1528540}" dt="2026-10-01T14:54:51.567" v="2562" actId="1076"/>
       <pc:docMkLst>
         <pc:docMk/>
       </pc:docMkLst>
@@ -2777,7 +2777,7 @@
         </pc:picChg>
       </pc:sldChg>
       <pc:sldChg chg="addSp modSp mod">
-        <pc:chgData name="Renan Xavier Cortes" userId="d6af805853004405" providerId="LiveId" clId="{32CE5F03-9B31-4102-A03B-787EE1528540}" dt="2026-09-30T19:10:25.079" v="2546" actId="1076"/>
+        <pc:chgData name="Renan Xavier Cortes" userId="d6af805853004405" providerId="LiveId" clId="{32CE5F03-9B31-4102-A03B-787EE1528540}" dt="2026-10-01T14:54:51.567" v="2562" actId="1076"/>
         <pc:sldMkLst>
           <pc:docMk/>
           <pc:sldMk cId="3705900010" sldId="261"/>
@@ -2799,7 +2799,7 @@
           </ac:spMkLst>
         </pc:spChg>
         <pc:spChg chg="mod">
-          <ac:chgData name="Renan Xavier Cortes" userId="d6af805853004405" providerId="LiveId" clId="{32CE5F03-9B31-4102-A03B-787EE1528540}" dt="2026-09-30T19:07:00.425" v="2533" actId="20577"/>
+          <ac:chgData name="Renan Xavier Cortes" userId="d6af805853004405" providerId="LiveId" clId="{32CE5F03-9B31-4102-A03B-787EE1528540}" dt="2026-10-01T14:54:51.567" v="2562" actId="1076"/>
           <ac:spMkLst>
             <pc:docMk/>
             <pc:sldMk cId="3705900010" sldId="261"/>
@@ -3876,7 +3876,7 @@
           <a:p>
             <a:fld id="{9B3F8303-3E6A-4B9A-B114-90BC24763552}" type="datetimeFigureOut">
               <a:rPr lang="pt-BR" smtClean="0"/>
-              <a:t>29/09/2026</a:t>
+              <a:t>01/10/2026</a:t>
             </a:fld>
             <a:endParaRPr lang="pt-BR"/>
           </a:p>
@@ -5634,7 +5634,7 @@
           <a:p>
             <a:fld id="{6D1CE400-4242-4B09-9036-D13CC6199FDE}" type="datetimeFigureOut">
               <a:rPr lang="pt-BR" smtClean="0"/>
-              <a:t>29/09/2026</a:t>
+              <a:t>01/10/2026</a:t>
             </a:fld>
             <a:endParaRPr lang="pt-BR"/>
           </a:p>
@@ -5832,7 +5832,7 @@
           <a:p>
             <a:fld id="{6D1CE400-4242-4B09-9036-D13CC6199FDE}" type="datetimeFigureOut">
               <a:rPr lang="pt-BR" smtClean="0"/>
-              <a:t>29/09/2026</a:t>
+              <a:t>01/10/2026</a:t>
             </a:fld>
             <a:endParaRPr lang="pt-BR"/>
           </a:p>
@@ -6040,7 +6040,7 @@
           <a:p>
             <a:fld id="{6D1CE400-4242-4B09-9036-D13CC6199FDE}" type="datetimeFigureOut">
               <a:rPr lang="pt-BR" smtClean="0"/>
-              <a:t>29/09/2026</a:t>
+              <a:t>01/10/2026</a:t>
             </a:fld>
             <a:endParaRPr lang="pt-BR"/>
           </a:p>
@@ -6238,7 +6238,7 @@
           <a:p>
             <a:fld id="{6D1CE400-4242-4B09-9036-D13CC6199FDE}" type="datetimeFigureOut">
               <a:rPr lang="pt-BR" smtClean="0"/>
-              <a:t>29/09/2026</a:t>
+              <a:t>01/10/2026</a:t>
             </a:fld>
             <a:endParaRPr lang="pt-BR"/>
           </a:p>
@@ -6513,7 +6513,7 @@
           <a:p>
             <a:fld id="{6D1CE400-4242-4B09-9036-D13CC6199FDE}" type="datetimeFigureOut">
               <a:rPr lang="pt-BR" smtClean="0"/>
-              <a:t>29/09/2026</a:t>
+              <a:t>01/10/2026</a:t>
             </a:fld>
             <a:endParaRPr lang="pt-BR"/>
           </a:p>
@@ -6778,7 +6778,7 @@
           <a:p>
             <a:fld id="{6D1CE400-4242-4B09-9036-D13CC6199FDE}" type="datetimeFigureOut">
               <a:rPr lang="pt-BR" smtClean="0"/>
-              <a:t>29/09/2026</a:t>
+              <a:t>01/10/2026</a:t>
             </a:fld>
             <a:endParaRPr lang="pt-BR"/>
           </a:p>
@@ -7190,7 +7190,7 @@
           <a:p>
             <a:fld id="{6D1CE400-4242-4B09-9036-D13CC6199FDE}" type="datetimeFigureOut">
               <a:rPr lang="pt-BR" smtClean="0"/>
-              <a:t>29/09/2026</a:t>
+              <a:t>01/10/2026</a:t>
             </a:fld>
             <a:endParaRPr lang="pt-BR"/>
           </a:p>
@@ -7331,7 +7331,7 @@
           <a:p>
             <a:fld id="{6D1CE400-4242-4B09-9036-D13CC6199FDE}" type="datetimeFigureOut">
               <a:rPr lang="pt-BR" smtClean="0"/>
-              <a:t>29/09/2026</a:t>
+              <a:t>01/10/2026</a:t>
             </a:fld>
             <a:endParaRPr lang="pt-BR"/>
           </a:p>
@@ -7444,7 +7444,7 @@
           <a:p>
             <a:fld id="{6D1CE400-4242-4B09-9036-D13CC6199FDE}" type="datetimeFigureOut">
               <a:rPr lang="pt-BR" smtClean="0"/>
-              <a:t>29/09/2026</a:t>
+              <a:t>01/10/2026</a:t>
             </a:fld>
             <a:endParaRPr lang="pt-BR"/>
           </a:p>
@@ -7755,7 +7755,7 @@
           <a:p>
             <a:fld id="{6D1CE400-4242-4B09-9036-D13CC6199FDE}" type="datetimeFigureOut">
               <a:rPr lang="pt-BR" smtClean="0"/>
-              <a:t>29/09/2026</a:t>
+              <a:t>01/10/2026</a:t>
             </a:fld>
             <a:endParaRPr lang="pt-BR"/>
           </a:p>
@@ -8043,7 +8043,7 @@
           <a:p>
             <a:fld id="{6D1CE400-4242-4B09-9036-D13CC6199FDE}" type="datetimeFigureOut">
               <a:rPr lang="pt-BR" smtClean="0"/>
-              <a:t>29/09/2026</a:t>
+              <a:t>01/10/2026</a:t>
             </a:fld>
             <a:endParaRPr lang="pt-BR"/>
           </a:p>
@@ -8287,7 +8287,7 @@
           <a:p>
             <a:fld id="{6D1CE400-4242-4B09-9036-D13CC6199FDE}" type="datetimeFigureOut">
               <a:rPr lang="pt-BR" smtClean="0"/>
-              <a:t>29/09/2026</a:t>
+              <a:t>01/10/2026</a:t>
             </a:fld>
             <a:endParaRPr lang="pt-BR"/>
           </a:p>
@@ -12679,8 +12679,8 @@
         </p:nvSpPr>
         <p:spPr>
           <a:xfrm>
-            <a:off x="940904" y="1276323"/>
-            <a:ext cx="8621415" cy="4712572"/>
+            <a:off x="940904" y="1046282"/>
+            <a:ext cx="8621415" cy="5671040"/>
           </a:xfrm>
           <a:prstGeom prst="rect">
             <a:avLst/>
@@ -12704,22 +12704,21 @@
               <a:buChar char="Ø"/>
             </a:pPr>
             <a:r>
-              <a:rPr lang="pt-BR" sz="2000" b="1" dirty="0"/>
+              <a:rPr lang="pt-BR" sz="1600" b="1" dirty="0"/>
               <a:t>Henrique </a:t>
             </a:r>
             <a:r>
-              <a:rPr lang="pt-BR" sz="2000" b="1" dirty="0" err="1"/>
+              <a:rPr lang="pt-BR" sz="1600" b="1" dirty="0" err="1"/>
               <a:t>Joner</a:t>
             </a:r>
             <a:r>
-              <a:rPr lang="pt-BR" sz="2000" b="1" dirty="0"/>
+              <a:rPr lang="pt-BR" sz="1600" b="1" dirty="0"/>
               <a:t>: </a:t>
             </a:r>
             <a:r>
-              <a:rPr lang="pt-BR" sz="2000" dirty="0"/>
-              <a:t>Estatístico e Mestre em Economia pela UFRGS, estuda Economia do Crime, mais especificamente abordagens de inteligência artificial aplicadas a gestão da segurança pública.</a:t>
-            </a:r>
-            <a:endParaRPr lang="pt-BR" sz="2000" b="1" dirty="0"/>
+              <a:rPr lang="pt-BR" sz="1600" dirty="0"/>
+              <a:t>Estatístico e Mestre em Economia pela UFRGS, atua com ciência de dados e estatística espacial aplicadas à segurança pública, com foco no desenvolvimento de soluções analíticas geoespaciais para o Programa RS Seguro - Gabinete do Governador do RS.</a:t>
+            </a:r>
           </a:p>
           <a:p>
             <a:pPr marL="285750" indent="-285750">
@@ -12732,15 +12731,7 @@
               <a:buFont typeface="Wingdings" panose="05000000000000000000" pitchFamily="2" charset="2"/>
               <a:buChar char="Ø"/>
             </a:pPr>
-            <a:r>
-              <a:rPr lang="pt-BR" sz="2000" b="1" dirty="0"/>
-              <a:t>Rafael Bernardini dos Santos: </a:t>
-            </a:r>
-            <a:r>
-              <a:rPr lang="pt-BR" sz="2000" dirty="0"/>
-              <a:t>Estatístico formado pela UFRGS e atua atualmente com segurança pública no Departamento de Economia e Estatística.</a:t>
-            </a:r>
-            <a:endParaRPr lang="pt-BR" sz="2000" b="1" dirty="0"/>
+            <a:endParaRPr lang="pt-BR" sz="1600" b="1" dirty="0"/>
           </a:p>
           <a:p>
             <a:pPr marL="285750" indent="-285750">
@@ -12754,14 +12745,21 @@
               <a:buChar char="Ø"/>
             </a:pPr>
             <a:r>
-              <a:rPr lang="pt-BR" sz="2000" b="1" dirty="0"/>
-              <a:t>Gisele da Silva Ferreira: </a:t>
-            </a:r>
-            <a:r>
-              <a:rPr lang="pt-BR" sz="2000" dirty="0"/>
-              <a:t>Estatística formada pela UFRGS e atua atualmente com segurança pública no Departamento de Economia e Estatística.</a:t>
-            </a:r>
-            <a:endParaRPr lang="pt-BR" sz="2000" b="1" dirty="0"/>
+              <a:rPr lang="pt-BR" sz="1600" b="1" dirty="0"/>
+              <a:t>Rafael Bernardini dos Santos: </a:t>
+            </a:r>
+            <a:r>
+              <a:rPr lang="pt-BR" sz="1600" dirty="0"/>
+              <a:t>Estatístico pela UFRGS e mestre em Administração pela MUST </a:t>
+            </a:r>
+            <a:r>
+              <a:rPr lang="pt-BR" sz="1600" dirty="0" err="1"/>
+              <a:t>University</a:t>
+            </a:r>
+            <a:r>
+              <a:rPr lang="pt-BR" sz="1600" dirty="0"/>
+              <a:t>, atua com ciência de dados aplicada à segurança pública, com foco no desenvolvimento de modelos estatísticos e soluções de inteligência para apoio à gestão e à tomada de decisão no Programa RS Seguro - Gabinete do Governador do RS.</a:t>
+            </a:r>
           </a:p>
           <a:p>
             <a:pPr marL="285750" indent="-285750">
@@ -12774,7 +12772,7 @@
               <a:buFont typeface="Wingdings" panose="05000000000000000000" pitchFamily="2" charset="2"/>
               <a:buChar char="Ø"/>
             </a:pPr>
-            <a:endParaRPr lang="pt-BR" sz="2000" b="1" dirty="0"/>
+            <a:endParaRPr lang="pt-BR" sz="1600" b="1" dirty="0"/>
           </a:p>
           <a:p>
             <a:pPr marL="285750" indent="-285750">
@@ -12788,7 +12786,40 @@
               <a:buChar char="Ø"/>
             </a:pPr>
             <a:r>
-              <a:rPr lang="pt-BR" sz="2000" b="1" dirty="0"/>
+              <a:rPr lang="pt-BR" sz="1600" b="1" dirty="0"/>
+              <a:t>Gisele da Silva Ferreira: </a:t>
+            </a:r>
+            <a:r>
+              <a:rPr lang="pt-BR" sz="1600" dirty="0"/>
+              <a:t>Estatística e mestre em Economia pela UFRGS,  atua com ciência de dados aplicada à segurança pública, com foco no desenvolvimento de modelos estatísticos e soluções de inteligência para apoio à gestão e à tomada de decisão no Programa RS Seguro - Gabinete do Governador do RS.</a:t>
+            </a:r>
+          </a:p>
+          <a:p>
+            <a:pPr marL="285750" indent="-285750">
+              <a:lnSpc>
+                <a:spcPct val="150000"/>
+              </a:lnSpc>
+              <a:spcAft>
+                <a:spcPts val="110"/>
+              </a:spcAft>
+              <a:buFont typeface="Wingdings" panose="05000000000000000000" pitchFamily="2" charset="2"/>
+              <a:buChar char="Ø"/>
+            </a:pPr>
+            <a:endParaRPr lang="pt-BR" sz="1600" b="1" dirty="0"/>
+          </a:p>
+          <a:p>
+            <a:pPr marL="285750" indent="-285750">
+              <a:lnSpc>
+                <a:spcPct val="150000"/>
+              </a:lnSpc>
+              <a:spcAft>
+                <a:spcPts val="110"/>
+              </a:spcAft>
+              <a:buFont typeface="Wingdings" panose="05000000000000000000" pitchFamily="2" charset="2"/>
+              <a:buChar char="Ø"/>
+            </a:pPr>
+            <a:r>
+              <a:rPr lang="pt-BR" sz="1600" b="1" dirty="0"/>
               <a:t>Será uma manhã muito proveitosa. Aproveitem!</a:t>
             </a:r>
           </a:p>

--- a/DIA 2 - APRESENTACAO - VERSAO AMPLIADA FINAL.pptx
+++ b/DIA 2 - APRESENTACAO - VERSAO AMPLIADA FINAL.pptx
@@ -133,46 +133,6 @@
 
 <file path=ppt/changesInfos/changesInfo1.xml><?xml version="1.0" encoding="utf-8"?>
 <pc:chgInfo xmlns:a="http://schemas.openxmlformats.org/drawingml/2006/main" xmlns:r="http://schemas.openxmlformats.org/officeDocument/2006/relationships" xmlns:ac="http://schemas.microsoft.com/office/drawing/2013/main/command" xmlns:pc="http://schemas.microsoft.com/office/powerpoint/2013/main/command">
-  <pc:docChgLst>
-    <pc:chgData name="Renan Xavier Cortes" userId="d6af805853004405" providerId="LiveId" clId="{212BA557-4780-4474-BA67-C155C1354E75}"/>
-    <pc:docChg chg="custSel addSld modSld">
-      <pc:chgData name="Renan Xavier Cortes" userId="d6af805853004405" providerId="LiveId" clId="{212BA557-4780-4474-BA67-C155C1354E75}" dt="2026-01-26T15:01:38.670" v="181" actId="1076"/>
-      <pc:docMkLst>
-        <pc:docMk/>
-      </pc:docMkLst>
-      <pc:sldChg chg="delSp modSp add mod">
-        <pc:chgData name="Renan Xavier Cortes" userId="d6af805853004405" providerId="LiveId" clId="{212BA557-4780-4474-BA67-C155C1354E75}" dt="2026-01-26T15:01:38.670" v="181" actId="1076"/>
-        <pc:sldMkLst>
-          <pc:docMk/>
-          <pc:sldMk cId="1515360493" sldId="288"/>
-        </pc:sldMkLst>
-        <pc:spChg chg="mod">
-          <ac:chgData name="Renan Xavier Cortes" userId="d6af805853004405" providerId="LiveId" clId="{212BA557-4780-4474-BA67-C155C1354E75}" dt="2026-01-26T15:01:38.670" v="181" actId="1076"/>
-          <ac:spMkLst>
-            <pc:docMk/>
-            <pc:sldMk cId="1515360493" sldId="288"/>
-            <ac:spMk id="4" creationId="{4B84190D-BF19-CEFE-E86D-F0B0EBBA7C0B}"/>
-          </ac:spMkLst>
-        </pc:spChg>
-        <pc:spChg chg="mod">
-          <ac:chgData name="Renan Xavier Cortes" userId="d6af805853004405" providerId="LiveId" clId="{212BA557-4780-4474-BA67-C155C1354E75}" dt="2026-01-22T13:30:12.805" v="25" actId="20577"/>
-          <ac:spMkLst>
-            <pc:docMk/>
-            <pc:sldMk cId="1515360493" sldId="288"/>
-            <ac:spMk id="8" creationId="{39AE06C5-34BE-4D68-97C3-4C07702C2DF6}"/>
-          </ac:spMkLst>
-        </pc:spChg>
-        <pc:picChg chg="del">
-          <ac:chgData name="Renan Xavier Cortes" userId="d6af805853004405" providerId="LiveId" clId="{212BA557-4780-4474-BA67-C155C1354E75}" dt="2026-01-22T13:30:15.241" v="26" actId="478"/>
-          <ac:picMkLst>
-            <pc:docMk/>
-            <pc:sldMk cId="1515360493" sldId="288"/>
-            <ac:picMk id="6" creationId="{96B5210F-1605-9FC7-8E4A-D66BA6A8C835}"/>
-          </ac:picMkLst>
-        </pc:picChg>
-      </pc:sldChg>
-    </pc:docChg>
-  </pc:docChgLst>
   <pc:docChgLst>
     <pc:chgData name="Renan Xavier Cortes" userId="d6af805853004405" providerId="LiveId" clId="{47132E32-3CED-4551-B838-F075A1BEA901}"/>
     <pc:docChg chg="undo custSel addSld delSld modSld">
@@ -805,6 +765,2073 @@
     </pc:docChg>
   </pc:docChgLst>
   <pc:docChgLst>
+    <pc:chgData name="Renan Xavier Cortes" userId="d6af805853004405" providerId="LiveId" clId="{6CBA8CAD-390F-4A11-B907-BBB4B6E0B449}"/>
+    <pc:docChg chg="undo custSel addSld delSld modSld">
+      <pc:chgData name="Renan Xavier Cortes" userId="d6af805853004405" providerId="LiveId" clId="{6CBA8CAD-390F-4A11-B907-BBB4B6E0B449}" dt="2026-01-21T21:00:53.358" v="2269"/>
+      <pc:docMkLst>
+        <pc:docMk/>
+      </pc:docMkLst>
+      <pc:sldChg chg="modSp mod modAnim">
+        <pc:chgData name="Renan Xavier Cortes" userId="d6af805853004405" providerId="LiveId" clId="{6CBA8CAD-390F-4A11-B907-BBB4B6E0B449}" dt="2026-01-21T20:32:15.264" v="2075" actId="20577"/>
+        <pc:sldMkLst>
+          <pc:docMk/>
+          <pc:sldMk cId="1859719164" sldId="259"/>
+        </pc:sldMkLst>
+        <pc:spChg chg="mod">
+          <ac:chgData name="Renan Xavier Cortes" userId="d6af805853004405" providerId="LiveId" clId="{6CBA8CAD-390F-4A11-B907-BBB4B6E0B449}" dt="2026-01-21T18:21:08.433" v="1046" actId="1076"/>
+          <ac:spMkLst>
+            <pc:docMk/>
+            <pc:sldMk cId="1859719164" sldId="259"/>
+            <ac:spMk id="8" creationId="{39AE06C5-34BE-4D68-97C3-4C07702C2DF6}"/>
+          </ac:spMkLst>
+        </pc:spChg>
+        <pc:spChg chg="mod">
+          <ac:chgData name="Renan Xavier Cortes" userId="d6af805853004405" providerId="LiveId" clId="{6CBA8CAD-390F-4A11-B907-BBB4B6E0B449}" dt="2026-01-21T20:32:15.264" v="2075" actId="20577"/>
+          <ac:spMkLst>
+            <pc:docMk/>
+            <pc:sldMk cId="1859719164" sldId="259"/>
+            <ac:spMk id="14" creationId="{427DBFEB-81BF-4CC3-A411-FBF43D295C56}"/>
+          </ac:spMkLst>
+        </pc:spChg>
+      </pc:sldChg>
+      <pc:sldChg chg="modSp add mod setBg modAnim">
+        <pc:chgData name="Renan Xavier Cortes" userId="d6af805853004405" providerId="LiveId" clId="{6CBA8CAD-390F-4A11-B907-BBB4B6E0B449}" dt="2026-01-21T18:27:43.477" v="1241"/>
+        <pc:sldMkLst>
+          <pc:docMk/>
+          <pc:sldMk cId="2921823341" sldId="260"/>
+        </pc:sldMkLst>
+        <pc:spChg chg="mod">
+          <ac:chgData name="Renan Xavier Cortes" userId="d6af805853004405" providerId="LiveId" clId="{6CBA8CAD-390F-4A11-B907-BBB4B6E0B449}" dt="2026-01-21T18:21:08.116" v="1045" actId="1076"/>
+          <ac:spMkLst>
+            <pc:docMk/>
+            <pc:sldMk cId="2921823341" sldId="260"/>
+            <ac:spMk id="8" creationId="{39AE06C5-34BE-4D68-97C3-4C07702C2DF6}"/>
+          </ac:spMkLst>
+        </pc:spChg>
+        <pc:spChg chg="mod">
+          <ac:chgData name="Renan Xavier Cortes" userId="d6af805853004405" providerId="LiveId" clId="{6CBA8CAD-390F-4A11-B907-BBB4B6E0B449}" dt="2026-01-21T12:50:23.079" v="123" actId="1076"/>
+          <ac:spMkLst>
+            <pc:docMk/>
+            <pc:sldMk cId="2921823341" sldId="260"/>
+            <ac:spMk id="14" creationId="{427DBFEB-81BF-4CC3-A411-FBF43D295C56}"/>
+          </ac:spMkLst>
+        </pc:spChg>
+      </pc:sldChg>
+      <pc:sldChg chg="modSp add mod modAnim">
+        <pc:chgData name="Renan Xavier Cortes" userId="d6af805853004405" providerId="LiveId" clId="{6CBA8CAD-390F-4A11-B907-BBB4B6E0B449}" dt="2026-01-21T18:27:45.974" v="1242"/>
+        <pc:sldMkLst>
+          <pc:docMk/>
+          <pc:sldMk cId="2121898900" sldId="261"/>
+        </pc:sldMkLst>
+        <pc:spChg chg="mod">
+          <ac:chgData name="Renan Xavier Cortes" userId="d6af805853004405" providerId="LiveId" clId="{6CBA8CAD-390F-4A11-B907-BBB4B6E0B449}" dt="2026-01-21T18:21:07.798" v="1044" actId="1076"/>
+          <ac:spMkLst>
+            <pc:docMk/>
+            <pc:sldMk cId="2121898900" sldId="261"/>
+            <ac:spMk id="8" creationId="{39AE06C5-34BE-4D68-97C3-4C07702C2DF6}"/>
+          </ac:spMkLst>
+        </pc:spChg>
+        <pc:spChg chg="mod">
+          <ac:chgData name="Renan Xavier Cortes" userId="d6af805853004405" providerId="LiveId" clId="{6CBA8CAD-390F-4A11-B907-BBB4B6E0B449}" dt="2026-01-21T12:50:30.629" v="124" actId="1076"/>
+          <ac:spMkLst>
+            <pc:docMk/>
+            <pc:sldMk cId="2121898900" sldId="261"/>
+            <ac:spMk id="14" creationId="{427DBFEB-81BF-4CC3-A411-FBF43D295C56}"/>
+          </ac:spMkLst>
+        </pc:spChg>
+      </pc:sldChg>
+      <pc:sldChg chg="addSp delSp modSp add mod modAnim">
+        <pc:chgData name="Renan Xavier Cortes" userId="d6af805853004405" providerId="LiveId" clId="{6CBA8CAD-390F-4A11-B907-BBB4B6E0B449}" dt="2026-01-21T18:27:49.174" v="1243"/>
+        <pc:sldMkLst>
+          <pc:docMk/>
+          <pc:sldMk cId="2689213611" sldId="262"/>
+        </pc:sldMkLst>
+        <pc:spChg chg="mod">
+          <ac:chgData name="Renan Xavier Cortes" userId="d6af805853004405" providerId="LiveId" clId="{6CBA8CAD-390F-4A11-B907-BBB4B6E0B449}" dt="2026-01-21T18:21:07.566" v="1043" actId="1076"/>
+          <ac:spMkLst>
+            <pc:docMk/>
+            <pc:sldMk cId="2689213611" sldId="262"/>
+            <ac:spMk id="8" creationId="{39AE06C5-34BE-4D68-97C3-4C07702C2DF6}"/>
+          </ac:spMkLst>
+        </pc:spChg>
+        <pc:spChg chg="mod">
+          <ac:chgData name="Renan Xavier Cortes" userId="d6af805853004405" providerId="LiveId" clId="{6CBA8CAD-390F-4A11-B907-BBB4B6E0B449}" dt="2026-01-21T12:56:51.360" v="239" actId="1076"/>
+          <ac:spMkLst>
+            <pc:docMk/>
+            <pc:sldMk cId="2689213611" sldId="262"/>
+            <ac:spMk id="14" creationId="{427DBFEB-81BF-4CC3-A411-FBF43D295C56}"/>
+          </ac:spMkLst>
+        </pc:spChg>
+        <pc:picChg chg="add mod">
+          <ac:chgData name="Renan Xavier Cortes" userId="d6af805853004405" providerId="LiveId" clId="{6CBA8CAD-390F-4A11-B907-BBB4B6E0B449}" dt="2026-01-21T13:12:19.893" v="470" actId="1076"/>
+          <ac:picMkLst>
+            <pc:docMk/>
+            <pc:sldMk cId="2689213611" sldId="262"/>
+            <ac:picMk id="5" creationId="{B75BA797-89E6-A590-E6E0-1930AE23BE87}"/>
+          </ac:picMkLst>
+        </pc:picChg>
+        <pc:picChg chg="add mod">
+          <ac:chgData name="Renan Xavier Cortes" userId="d6af805853004405" providerId="LiveId" clId="{6CBA8CAD-390F-4A11-B907-BBB4B6E0B449}" dt="2026-01-21T12:52:15.476" v="224" actId="1076"/>
+          <ac:picMkLst>
+            <pc:docMk/>
+            <pc:sldMk cId="2689213611" sldId="262"/>
+            <ac:picMk id="1026" creationId="{3AF06A5C-D23B-2668-9192-9EBD3941659A}"/>
+          </ac:picMkLst>
+        </pc:picChg>
+        <pc:picChg chg="add del mod">
+          <ac:chgData name="Renan Xavier Cortes" userId="d6af805853004405" providerId="LiveId" clId="{6CBA8CAD-390F-4A11-B907-BBB4B6E0B449}" dt="2026-01-21T13:11:02.235" v="456" actId="478"/>
+          <ac:picMkLst>
+            <pc:docMk/>
+            <pc:sldMk cId="2689213611" sldId="262"/>
+            <ac:picMk id="1028" creationId="{DA3B7BDF-718D-955C-F889-8AC8A1DCBC20}"/>
+          </ac:picMkLst>
+        </pc:picChg>
+        <pc:picChg chg="add del mod">
+          <ac:chgData name="Renan Xavier Cortes" userId="d6af805853004405" providerId="LiveId" clId="{6CBA8CAD-390F-4A11-B907-BBB4B6E0B449}" dt="2026-01-21T13:11:38.475" v="462" actId="478"/>
+          <ac:picMkLst>
+            <pc:docMk/>
+            <pc:sldMk cId="2689213611" sldId="262"/>
+            <ac:picMk id="1030" creationId="{B3AD39F1-033B-7A4E-B6EE-FD3713D8D962}"/>
+          </ac:picMkLst>
+        </pc:picChg>
+        <pc:picChg chg="add del mod">
+          <ac:chgData name="Renan Xavier Cortes" userId="d6af805853004405" providerId="LiveId" clId="{6CBA8CAD-390F-4A11-B907-BBB4B6E0B449}" dt="2026-01-21T13:12:11.437" v="465" actId="478"/>
+          <ac:picMkLst>
+            <pc:docMk/>
+            <pc:sldMk cId="2689213611" sldId="262"/>
+            <ac:picMk id="1032" creationId="{FF87EAF8-5213-0FCC-8C98-B9AD5FF62219}"/>
+          </ac:picMkLst>
+        </pc:picChg>
+      </pc:sldChg>
+      <pc:sldChg chg="addSp delSp modSp add mod addAnim delAnim">
+        <pc:chgData name="Renan Xavier Cortes" userId="d6af805853004405" providerId="LiveId" clId="{6CBA8CAD-390F-4A11-B907-BBB4B6E0B449}" dt="2026-01-21T18:21:07.371" v="1042" actId="1076"/>
+        <pc:sldMkLst>
+          <pc:docMk/>
+          <pc:sldMk cId="1495373715" sldId="263"/>
+        </pc:sldMkLst>
+        <pc:spChg chg="add mod">
+          <ac:chgData name="Renan Xavier Cortes" userId="d6af805853004405" providerId="LiveId" clId="{6CBA8CAD-390F-4A11-B907-BBB4B6E0B449}" dt="2026-01-21T13:01:54.451" v="356" actId="1076"/>
+          <ac:spMkLst>
+            <pc:docMk/>
+            <pc:sldMk cId="1495373715" sldId="263"/>
+            <ac:spMk id="6" creationId="{E4A74DC5-A696-506E-884C-C89CEEA7D8F7}"/>
+          </ac:spMkLst>
+        </pc:spChg>
+        <pc:spChg chg="mod">
+          <ac:chgData name="Renan Xavier Cortes" userId="d6af805853004405" providerId="LiveId" clId="{6CBA8CAD-390F-4A11-B907-BBB4B6E0B449}" dt="2026-01-21T18:21:07.371" v="1042" actId="1076"/>
+          <ac:spMkLst>
+            <pc:docMk/>
+            <pc:sldMk cId="1495373715" sldId="263"/>
+            <ac:spMk id="8" creationId="{39AE06C5-34BE-4D68-97C3-4C07702C2DF6}"/>
+          </ac:spMkLst>
+        </pc:spChg>
+        <pc:spChg chg="add del mod">
+          <ac:chgData name="Renan Xavier Cortes" userId="d6af805853004405" providerId="LiveId" clId="{6CBA8CAD-390F-4A11-B907-BBB4B6E0B449}" dt="2026-01-21T13:00:39.412" v="323" actId="478"/>
+          <ac:spMkLst>
+            <pc:docMk/>
+            <pc:sldMk cId="1495373715" sldId="263"/>
+            <ac:spMk id="14" creationId="{427DBFEB-81BF-4CC3-A411-FBF43D295C56}"/>
+          </ac:spMkLst>
+        </pc:spChg>
+        <pc:picChg chg="add mod">
+          <ac:chgData name="Renan Xavier Cortes" userId="d6af805853004405" providerId="LiveId" clId="{6CBA8CAD-390F-4A11-B907-BBB4B6E0B449}" dt="2026-01-21T13:01:23.017" v="328" actId="1076"/>
+          <ac:picMkLst>
+            <pc:docMk/>
+            <pc:sldMk cId="1495373715" sldId="263"/>
+            <ac:picMk id="5" creationId="{99503125-E213-E8F6-DAF3-BEC6F775BCC7}"/>
+          </ac:picMkLst>
+        </pc:picChg>
+        <pc:picChg chg="del">
+          <ac:chgData name="Renan Xavier Cortes" userId="d6af805853004405" providerId="LiveId" clId="{6CBA8CAD-390F-4A11-B907-BBB4B6E0B449}" dt="2026-01-21T12:57:41.054" v="267" actId="478"/>
+          <ac:picMkLst>
+            <pc:docMk/>
+            <pc:sldMk cId="1495373715" sldId="263"/>
+            <ac:picMk id="1026" creationId="{3AF06A5C-D23B-2668-9192-9EBD3941659A}"/>
+          </ac:picMkLst>
+        </pc:picChg>
+      </pc:sldChg>
+      <pc:sldChg chg="addSp delSp modSp add mod delAnim modAnim">
+        <pc:chgData name="Renan Xavier Cortes" userId="d6af805853004405" providerId="LiveId" clId="{6CBA8CAD-390F-4A11-B907-BBB4B6E0B449}" dt="2026-01-21T18:27:56.296" v="1244"/>
+        <pc:sldMkLst>
+          <pc:docMk/>
+          <pc:sldMk cId="612877480" sldId="264"/>
+        </pc:sldMkLst>
+        <pc:spChg chg="add mod">
+          <ac:chgData name="Renan Xavier Cortes" userId="d6af805853004405" providerId="LiveId" clId="{6CBA8CAD-390F-4A11-B907-BBB4B6E0B449}" dt="2026-01-21T13:36:06.850" v="841" actId="1076"/>
+          <ac:spMkLst>
+            <pc:docMk/>
+            <pc:sldMk cId="612877480" sldId="264"/>
+            <ac:spMk id="4" creationId="{A3F14000-383F-850F-E6AA-F5007930D551}"/>
+          </ac:spMkLst>
+        </pc:spChg>
+        <pc:spChg chg="mod">
+          <ac:chgData name="Renan Xavier Cortes" userId="d6af805853004405" providerId="LiveId" clId="{6CBA8CAD-390F-4A11-B907-BBB4B6E0B449}" dt="2026-01-21T18:21:07.154" v="1041" actId="1076"/>
+          <ac:spMkLst>
+            <pc:docMk/>
+            <pc:sldMk cId="612877480" sldId="264"/>
+            <ac:spMk id="8" creationId="{39AE06C5-34BE-4D68-97C3-4C07702C2DF6}"/>
+          </ac:spMkLst>
+        </pc:spChg>
+        <pc:spChg chg="del mod">
+          <ac:chgData name="Renan Xavier Cortes" userId="d6af805853004405" providerId="LiveId" clId="{6CBA8CAD-390F-4A11-B907-BBB4B6E0B449}" dt="2026-01-21T13:14:12.001" v="508" actId="478"/>
+          <ac:spMkLst>
+            <pc:docMk/>
+            <pc:sldMk cId="612877480" sldId="264"/>
+            <ac:spMk id="14" creationId="{427DBFEB-81BF-4CC3-A411-FBF43D295C56}"/>
+          </ac:spMkLst>
+        </pc:spChg>
+        <pc:picChg chg="del">
+          <ac:chgData name="Renan Xavier Cortes" userId="d6af805853004405" providerId="LiveId" clId="{6CBA8CAD-390F-4A11-B907-BBB4B6E0B449}" dt="2026-01-21T13:00:47.167" v="326" actId="478"/>
+          <ac:picMkLst>
+            <pc:docMk/>
+            <pc:sldMk cId="612877480" sldId="264"/>
+            <ac:picMk id="5" creationId="{99503125-E213-E8F6-DAF3-BEC6F775BCC7}"/>
+          </ac:picMkLst>
+        </pc:picChg>
+        <pc:picChg chg="add del mod">
+          <ac:chgData name="Renan Xavier Cortes" userId="d6af805853004405" providerId="LiveId" clId="{6CBA8CAD-390F-4A11-B907-BBB4B6E0B449}" dt="2026-01-21T13:09:02.318" v="445" actId="478"/>
+          <ac:picMkLst>
+            <pc:docMk/>
+            <pc:sldMk cId="612877480" sldId="264"/>
+            <ac:picMk id="2050" creationId="{4E6A8334-909C-5345-FD38-6DE6C71617FE}"/>
+          </ac:picMkLst>
+        </pc:picChg>
+        <pc:picChg chg="add del mod">
+          <ac:chgData name="Renan Xavier Cortes" userId="d6af805853004405" providerId="LiveId" clId="{6CBA8CAD-390F-4A11-B907-BBB4B6E0B449}" dt="2026-01-21T13:09:02.823" v="446" actId="478"/>
+          <ac:picMkLst>
+            <pc:docMk/>
+            <pc:sldMk cId="612877480" sldId="264"/>
+            <ac:picMk id="2052" creationId="{A4619851-0E89-7971-65B8-8C06288BD402}"/>
+          </ac:picMkLst>
+        </pc:picChg>
+        <pc:picChg chg="add mod">
+          <ac:chgData name="Renan Xavier Cortes" userId="d6af805853004405" providerId="LiveId" clId="{6CBA8CAD-390F-4A11-B907-BBB4B6E0B449}" dt="2026-01-21T13:18:06.064" v="616" actId="1076"/>
+          <ac:picMkLst>
+            <pc:docMk/>
+            <pc:sldMk cId="612877480" sldId="264"/>
+            <ac:picMk id="2054" creationId="{9BBBB796-11B1-9E9B-9024-C023ED27709B}"/>
+          </ac:picMkLst>
+        </pc:picChg>
+        <pc:picChg chg="add mod">
+          <ac:chgData name="Renan Xavier Cortes" userId="d6af805853004405" providerId="LiveId" clId="{6CBA8CAD-390F-4A11-B907-BBB4B6E0B449}" dt="2026-01-21T13:35:54.165" v="840" actId="1076"/>
+          <ac:picMkLst>
+            <pc:docMk/>
+            <pc:sldMk cId="612877480" sldId="264"/>
+            <ac:picMk id="2056" creationId="{750C220B-DEEE-CE57-43CB-5AB737C5E7AC}"/>
+          </ac:picMkLst>
+        </pc:picChg>
+        <pc:picChg chg="add del mod">
+          <ac:chgData name="Renan Xavier Cortes" userId="d6af805853004405" providerId="LiveId" clId="{6CBA8CAD-390F-4A11-B907-BBB4B6E0B449}" dt="2026-01-21T13:34:49.369" v="767" actId="478"/>
+          <ac:picMkLst>
+            <pc:docMk/>
+            <pc:sldMk cId="612877480" sldId="264"/>
+            <ac:picMk id="2058" creationId="{04060264-FEF9-2D28-9DF9-52482BDA4C9B}"/>
+          </ac:picMkLst>
+        </pc:picChg>
+      </pc:sldChg>
+      <pc:sldChg chg="modSp add modAnim">
+        <pc:chgData name="Renan Xavier Cortes" userId="d6af805853004405" providerId="LiveId" clId="{6CBA8CAD-390F-4A11-B907-BBB4B6E0B449}" dt="2026-01-21T18:28:01.649" v="1246"/>
+        <pc:sldMkLst>
+          <pc:docMk/>
+          <pc:sldMk cId="607923279" sldId="265"/>
+        </pc:sldMkLst>
+        <pc:spChg chg="mod">
+          <ac:chgData name="Renan Xavier Cortes" userId="d6af805853004405" providerId="LiveId" clId="{6CBA8CAD-390F-4A11-B907-BBB4B6E0B449}" dt="2026-01-21T13:20:28.364" v="734" actId="5793"/>
+          <ac:spMkLst>
+            <pc:docMk/>
+            <pc:sldMk cId="607923279" sldId="265"/>
+            <ac:spMk id="14" creationId="{427DBFEB-81BF-4CC3-A411-FBF43D295C56}"/>
+          </ac:spMkLst>
+        </pc:spChg>
+        <pc:picChg chg="mod">
+          <ac:chgData name="Renan Xavier Cortes" userId="d6af805853004405" providerId="LiveId" clId="{6CBA8CAD-390F-4A11-B907-BBB4B6E0B449}" dt="2026-01-21T13:20:33.305" v="736" actId="1076"/>
+          <ac:picMkLst>
+            <pc:docMk/>
+            <pc:sldMk cId="607923279" sldId="265"/>
+            <ac:picMk id="2050" creationId="{4E6A8334-909C-5345-FD38-6DE6C71617FE}"/>
+          </ac:picMkLst>
+        </pc:picChg>
+        <pc:picChg chg="mod">
+          <ac:chgData name="Renan Xavier Cortes" userId="d6af805853004405" providerId="LiveId" clId="{6CBA8CAD-390F-4A11-B907-BBB4B6E0B449}" dt="2026-01-21T13:20:35.259" v="737" actId="14100"/>
+          <ac:picMkLst>
+            <pc:docMk/>
+            <pc:sldMk cId="607923279" sldId="265"/>
+            <ac:picMk id="2052" creationId="{A4619851-0E89-7971-65B8-8C06288BD402}"/>
+          </ac:picMkLst>
+        </pc:picChg>
+      </pc:sldChg>
+      <pc:sldChg chg="delSp add del">
+        <pc:chgData name="Renan Xavier Cortes" userId="d6af805853004405" providerId="LiveId" clId="{6CBA8CAD-390F-4A11-B907-BBB4B6E0B449}" dt="2026-01-21T13:31:31.518" v="744" actId="47"/>
+        <pc:sldMkLst>
+          <pc:docMk/>
+          <pc:sldMk cId="2167676923" sldId="266"/>
+        </pc:sldMkLst>
+        <pc:picChg chg="del">
+          <ac:chgData name="Renan Xavier Cortes" userId="d6af805853004405" providerId="LiveId" clId="{6CBA8CAD-390F-4A11-B907-BBB4B6E0B449}" dt="2026-01-21T13:30:49.800" v="741" actId="478"/>
+          <ac:picMkLst>
+            <pc:docMk/>
+            <pc:sldMk cId="2167676923" sldId="266"/>
+            <ac:picMk id="2054" creationId="{9BBBB796-11B1-9E9B-9024-C023ED27709B}"/>
+          </ac:picMkLst>
+        </pc:picChg>
+        <pc:picChg chg="del">
+          <ac:chgData name="Renan Xavier Cortes" userId="d6af805853004405" providerId="LiveId" clId="{6CBA8CAD-390F-4A11-B907-BBB4B6E0B449}" dt="2026-01-21T13:30:50.789" v="743" actId="478"/>
+          <ac:picMkLst>
+            <pc:docMk/>
+            <pc:sldMk cId="2167676923" sldId="266"/>
+            <ac:picMk id="2056" creationId="{750C220B-DEEE-CE57-43CB-5AB737C5E7AC}"/>
+          </ac:picMkLst>
+        </pc:picChg>
+        <pc:picChg chg="del">
+          <ac:chgData name="Renan Xavier Cortes" userId="d6af805853004405" providerId="LiveId" clId="{6CBA8CAD-390F-4A11-B907-BBB4B6E0B449}" dt="2026-01-21T13:30:50.246" v="742" actId="478"/>
+          <ac:picMkLst>
+            <pc:docMk/>
+            <pc:sldMk cId="2167676923" sldId="266"/>
+            <ac:picMk id="2058" creationId="{04060264-FEF9-2D28-9DF9-52482BDA4C9B}"/>
+          </ac:picMkLst>
+        </pc:picChg>
+      </pc:sldChg>
+      <pc:sldChg chg="delSp modSp add mod modAnim">
+        <pc:chgData name="Renan Xavier Cortes" userId="d6af805853004405" providerId="LiveId" clId="{6CBA8CAD-390F-4A11-B907-BBB4B6E0B449}" dt="2026-01-21T18:27:58.688" v="1245"/>
+        <pc:sldMkLst>
+          <pc:docMk/>
+          <pc:sldMk cId="3391640227" sldId="266"/>
+        </pc:sldMkLst>
+        <pc:spChg chg="mod">
+          <ac:chgData name="Renan Xavier Cortes" userId="d6af805853004405" providerId="LiveId" clId="{6CBA8CAD-390F-4A11-B907-BBB4B6E0B449}" dt="2026-01-21T13:42:03.435" v="944" actId="20577"/>
+          <ac:spMkLst>
+            <pc:docMk/>
+            <pc:sldMk cId="3391640227" sldId="266"/>
+            <ac:spMk id="4" creationId="{A3F14000-383F-850F-E6AA-F5007930D551}"/>
+          </ac:spMkLst>
+        </pc:spChg>
+        <pc:spChg chg="mod">
+          <ac:chgData name="Renan Xavier Cortes" userId="d6af805853004405" providerId="LiveId" clId="{6CBA8CAD-390F-4A11-B907-BBB4B6E0B449}" dt="2026-01-21T18:21:06.912" v="1040" actId="1076"/>
+          <ac:spMkLst>
+            <pc:docMk/>
+            <pc:sldMk cId="3391640227" sldId="266"/>
+            <ac:spMk id="8" creationId="{39AE06C5-34BE-4D68-97C3-4C07702C2DF6}"/>
+          </ac:spMkLst>
+        </pc:spChg>
+        <pc:picChg chg="del">
+          <ac:chgData name="Renan Xavier Cortes" userId="d6af805853004405" providerId="LiveId" clId="{6CBA8CAD-390F-4A11-B907-BBB4B6E0B449}" dt="2026-01-21T13:32:08.926" v="746" actId="478"/>
+          <ac:picMkLst>
+            <pc:docMk/>
+            <pc:sldMk cId="3391640227" sldId="266"/>
+            <ac:picMk id="2054" creationId="{9BBBB796-11B1-9E9B-9024-C023ED27709B}"/>
+          </ac:picMkLst>
+        </pc:picChg>
+        <pc:picChg chg="del">
+          <ac:chgData name="Renan Xavier Cortes" userId="d6af805853004405" providerId="LiveId" clId="{6CBA8CAD-390F-4A11-B907-BBB4B6E0B449}" dt="2026-01-21T13:32:10.004" v="748" actId="478"/>
+          <ac:picMkLst>
+            <pc:docMk/>
+            <pc:sldMk cId="3391640227" sldId="266"/>
+            <ac:picMk id="2056" creationId="{750C220B-DEEE-CE57-43CB-5AB737C5E7AC}"/>
+          </ac:picMkLst>
+        </pc:picChg>
+        <pc:picChg chg="del">
+          <ac:chgData name="Renan Xavier Cortes" userId="d6af805853004405" providerId="LiveId" clId="{6CBA8CAD-390F-4A11-B907-BBB4B6E0B449}" dt="2026-01-21T13:32:09.372" v="747" actId="478"/>
+          <ac:picMkLst>
+            <pc:docMk/>
+            <pc:sldMk cId="3391640227" sldId="266"/>
+            <ac:picMk id="2058" creationId="{04060264-FEF9-2D28-9DF9-52482BDA4C9B}"/>
+          </ac:picMkLst>
+        </pc:picChg>
+      </pc:sldChg>
+      <pc:sldChg chg="addSp delSp modSp add mod delAnim modAnim">
+        <pc:chgData name="Renan Xavier Cortes" userId="d6af805853004405" providerId="LiveId" clId="{6CBA8CAD-390F-4A11-B907-BBB4B6E0B449}" dt="2026-01-21T18:28:05.192" v="1247"/>
+        <pc:sldMkLst>
+          <pc:docMk/>
+          <pc:sldMk cId="1343228278" sldId="267"/>
+        </pc:sldMkLst>
+        <pc:spChg chg="add mod">
+          <ac:chgData name="Renan Xavier Cortes" userId="d6af805853004405" providerId="LiveId" clId="{6CBA8CAD-390F-4A11-B907-BBB4B6E0B449}" dt="2026-01-21T13:42:09.587" v="946" actId="20577"/>
+          <ac:spMkLst>
+            <pc:docMk/>
+            <pc:sldMk cId="1343228278" sldId="267"/>
+            <ac:spMk id="4" creationId="{4B84190D-BF19-CEFE-E86D-F0B0EBBA7C0B}"/>
+          </ac:spMkLst>
+        </pc:spChg>
+        <pc:spChg chg="add">
+          <ac:chgData name="Renan Xavier Cortes" userId="d6af805853004405" providerId="LiveId" clId="{6CBA8CAD-390F-4A11-B907-BBB4B6E0B449}" dt="2026-01-21T13:40:12.521" v="911"/>
+          <ac:spMkLst>
+            <pc:docMk/>
+            <pc:sldMk cId="1343228278" sldId="267"/>
+            <ac:spMk id="5" creationId="{761FBCEB-4A99-0E96-EB2F-126B5E2ADEDE}"/>
+          </ac:spMkLst>
+        </pc:spChg>
+        <pc:spChg chg="add">
+          <ac:chgData name="Renan Xavier Cortes" userId="d6af805853004405" providerId="LiveId" clId="{6CBA8CAD-390F-4A11-B907-BBB4B6E0B449}" dt="2026-01-21T13:40:28.193" v="916"/>
+          <ac:spMkLst>
+            <pc:docMk/>
+            <pc:sldMk cId="1343228278" sldId="267"/>
+            <ac:spMk id="6" creationId="{23BAF368-5B04-A6D4-F4BA-78FE4BDB80E1}"/>
+          </ac:spMkLst>
+        </pc:spChg>
+        <pc:spChg chg="del mod">
+          <ac:chgData name="Renan Xavier Cortes" userId="d6af805853004405" providerId="LiveId" clId="{6CBA8CAD-390F-4A11-B907-BBB4B6E0B449}" dt="2026-01-21T13:38:48.266" v="879" actId="478"/>
+          <ac:spMkLst>
+            <pc:docMk/>
+            <pc:sldMk cId="1343228278" sldId="267"/>
+            <ac:spMk id="14" creationId="{427DBFEB-81BF-4CC3-A411-FBF43D295C56}"/>
+          </ac:spMkLst>
+        </pc:spChg>
+        <pc:picChg chg="del">
+          <ac:chgData name="Renan Xavier Cortes" userId="d6af805853004405" providerId="LiveId" clId="{6CBA8CAD-390F-4A11-B907-BBB4B6E0B449}" dt="2026-01-21T13:37:26.842" v="850" actId="478"/>
+          <ac:picMkLst>
+            <pc:docMk/>
+            <pc:sldMk cId="1343228278" sldId="267"/>
+            <ac:picMk id="2050" creationId="{4E6A8334-909C-5345-FD38-6DE6C71617FE}"/>
+          </ac:picMkLst>
+        </pc:picChg>
+        <pc:picChg chg="del">
+          <ac:chgData name="Renan Xavier Cortes" userId="d6af805853004405" providerId="LiveId" clId="{6CBA8CAD-390F-4A11-B907-BBB4B6E0B449}" dt="2026-01-21T13:37:27.155" v="851" actId="478"/>
+          <ac:picMkLst>
+            <pc:docMk/>
+            <pc:sldMk cId="1343228278" sldId="267"/>
+            <ac:picMk id="2052" creationId="{A4619851-0E89-7971-65B8-8C06288BD402}"/>
+          </ac:picMkLst>
+        </pc:picChg>
+        <pc:picChg chg="add">
+          <ac:chgData name="Renan Xavier Cortes" userId="d6af805853004405" providerId="LiveId" clId="{6CBA8CAD-390F-4A11-B907-BBB4B6E0B449}" dt="2026-01-21T13:40:12.521" v="911"/>
+          <ac:picMkLst>
+            <pc:docMk/>
+            <pc:sldMk cId="1343228278" sldId="267"/>
+            <ac:picMk id="5122" creationId="{0EFA11CA-E7DF-AF44-7C52-1A7BCD0EF98A}"/>
+          </ac:picMkLst>
+        </pc:picChg>
+        <pc:picChg chg="add">
+          <ac:chgData name="Renan Xavier Cortes" userId="d6af805853004405" providerId="LiveId" clId="{6CBA8CAD-390F-4A11-B907-BBB4B6E0B449}" dt="2026-01-21T13:40:12.521" v="911"/>
+          <ac:picMkLst>
+            <pc:docMk/>
+            <pc:sldMk cId="1343228278" sldId="267"/>
+            <ac:picMk id="5123" creationId="{17A06DBE-F56F-D7CF-5D37-101F12487686}"/>
+          </ac:picMkLst>
+        </pc:picChg>
+        <pc:picChg chg="add">
+          <ac:chgData name="Renan Xavier Cortes" userId="d6af805853004405" providerId="LiveId" clId="{6CBA8CAD-390F-4A11-B907-BBB4B6E0B449}" dt="2026-01-21T13:40:12.521" v="911"/>
+          <ac:picMkLst>
+            <pc:docMk/>
+            <pc:sldMk cId="1343228278" sldId="267"/>
+            <ac:picMk id="5124" creationId="{D0F78DC5-EBA6-F8C1-B608-9845395822CB}"/>
+          </ac:picMkLst>
+        </pc:picChg>
+        <pc:picChg chg="add">
+          <ac:chgData name="Renan Xavier Cortes" userId="d6af805853004405" providerId="LiveId" clId="{6CBA8CAD-390F-4A11-B907-BBB4B6E0B449}" dt="2026-01-21T13:40:12.521" v="911"/>
+          <ac:picMkLst>
+            <pc:docMk/>
+            <pc:sldMk cId="1343228278" sldId="267"/>
+            <ac:picMk id="5125" creationId="{54E39B7E-F8EF-4086-9DF4-84532F950252}"/>
+          </ac:picMkLst>
+        </pc:picChg>
+        <pc:picChg chg="add">
+          <ac:chgData name="Renan Xavier Cortes" userId="d6af805853004405" providerId="LiveId" clId="{6CBA8CAD-390F-4A11-B907-BBB4B6E0B449}" dt="2026-01-21T13:40:12.521" v="911"/>
+          <ac:picMkLst>
+            <pc:docMk/>
+            <pc:sldMk cId="1343228278" sldId="267"/>
+            <ac:picMk id="5126" creationId="{5ADF0543-3E47-7B59-14CE-9E32F05955F4}"/>
+          </ac:picMkLst>
+        </pc:picChg>
+        <pc:picChg chg="add">
+          <ac:chgData name="Renan Xavier Cortes" userId="d6af805853004405" providerId="LiveId" clId="{6CBA8CAD-390F-4A11-B907-BBB4B6E0B449}" dt="2026-01-21T13:40:12.521" v="911"/>
+          <ac:picMkLst>
+            <pc:docMk/>
+            <pc:sldMk cId="1343228278" sldId="267"/>
+            <ac:picMk id="5127" creationId="{67FDB388-93D8-C347-BB8B-043340CBCCFC}"/>
+          </ac:picMkLst>
+        </pc:picChg>
+        <pc:picChg chg="add">
+          <ac:chgData name="Renan Xavier Cortes" userId="d6af805853004405" providerId="LiveId" clId="{6CBA8CAD-390F-4A11-B907-BBB4B6E0B449}" dt="2026-01-21T13:40:28.193" v="916"/>
+          <ac:picMkLst>
+            <pc:docMk/>
+            <pc:sldMk cId="1343228278" sldId="267"/>
+            <ac:picMk id="5129" creationId="{284947AA-7AA3-F62A-866F-6A1A3BEEABEF}"/>
+          </ac:picMkLst>
+        </pc:picChg>
+        <pc:picChg chg="add">
+          <ac:chgData name="Renan Xavier Cortes" userId="d6af805853004405" providerId="LiveId" clId="{6CBA8CAD-390F-4A11-B907-BBB4B6E0B449}" dt="2026-01-21T13:40:28.193" v="916"/>
+          <ac:picMkLst>
+            <pc:docMk/>
+            <pc:sldMk cId="1343228278" sldId="267"/>
+            <ac:picMk id="5130" creationId="{C98BC9A4-C207-F1E1-7341-3A1B70215058}"/>
+          </ac:picMkLst>
+        </pc:picChg>
+        <pc:picChg chg="add">
+          <ac:chgData name="Renan Xavier Cortes" userId="d6af805853004405" providerId="LiveId" clId="{6CBA8CAD-390F-4A11-B907-BBB4B6E0B449}" dt="2026-01-21T13:40:28.193" v="916"/>
+          <ac:picMkLst>
+            <pc:docMk/>
+            <pc:sldMk cId="1343228278" sldId="267"/>
+            <ac:picMk id="5131" creationId="{375CC78C-4981-2DA9-88E6-EFB2FD84677E}"/>
+          </ac:picMkLst>
+        </pc:picChg>
+        <pc:picChg chg="add">
+          <ac:chgData name="Renan Xavier Cortes" userId="d6af805853004405" providerId="LiveId" clId="{6CBA8CAD-390F-4A11-B907-BBB4B6E0B449}" dt="2026-01-21T13:40:28.193" v="916"/>
+          <ac:picMkLst>
+            <pc:docMk/>
+            <pc:sldMk cId="1343228278" sldId="267"/>
+            <ac:picMk id="5132" creationId="{5F0B81A0-9240-D916-E71A-E6D3F50B265A}"/>
+          </ac:picMkLst>
+        </pc:picChg>
+        <pc:picChg chg="add">
+          <ac:chgData name="Renan Xavier Cortes" userId="d6af805853004405" providerId="LiveId" clId="{6CBA8CAD-390F-4A11-B907-BBB4B6E0B449}" dt="2026-01-21T13:40:28.193" v="916"/>
+          <ac:picMkLst>
+            <pc:docMk/>
+            <pc:sldMk cId="1343228278" sldId="267"/>
+            <ac:picMk id="5133" creationId="{21770704-1681-BDE9-B7A7-EE6D8264F71A}"/>
+          </ac:picMkLst>
+        </pc:picChg>
+        <pc:picChg chg="add">
+          <ac:chgData name="Renan Xavier Cortes" userId="d6af805853004405" providerId="LiveId" clId="{6CBA8CAD-390F-4A11-B907-BBB4B6E0B449}" dt="2026-01-21T13:40:28.193" v="916"/>
+          <ac:picMkLst>
+            <pc:docMk/>
+            <pc:sldMk cId="1343228278" sldId="267"/>
+            <ac:picMk id="5134" creationId="{DD427550-CCC4-E20C-CF8C-A439F0C0E9D2}"/>
+          </ac:picMkLst>
+        </pc:picChg>
+      </pc:sldChg>
+      <pc:sldChg chg="addSp delSp modSp add mod addAnim delAnim modAnim">
+        <pc:chgData name="Renan Xavier Cortes" userId="d6af805853004405" providerId="LiveId" clId="{6CBA8CAD-390F-4A11-B907-BBB4B6E0B449}" dt="2026-01-21T20:59:32.449" v="2258" actId="1076"/>
+        <pc:sldMkLst>
+          <pc:docMk/>
+          <pc:sldMk cId="4060517312" sldId="268"/>
+        </pc:sldMkLst>
+        <pc:spChg chg="add del mod">
+          <ac:chgData name="Renan Xavier Cortes" userId="d6af805853004405" providerId="LiveId" clId="{6CBA8CAD-390F-4A11-B907-BBB4B6E0B449}" dt="2026-01-21T20:59:28.978" v="2257" actId="1076"/>
+          <ac:spMkLst>
+            <pc:docMk/>
+            <pc:sldMk cId="4060517312" sldId="268"/>
+            <ac:spMk id="4" creationId="{4B84190D-BF19-CEFE-E86D-F0B0EBBA7C0B}"/>
+          </ac:spMkLst>
+        </pc:spChg>
+        <pc:spChg chg="mod">
+          <ac:chgData name="Renan Xavier Cortes" userId="d6af805853004405" providerId="LiveId" clId="{6CBA8CAD-390F-4A11-B907-BBB4B6E0B449}" dt="2026-01-21T20:59:32.449" v="2258" actId="1076"/>
+          <ac:spMkLst>
+            <pc:docMk/>
+            <pc:sldMk cId="4060517312" sldId="268"/>
+            <ac:spMk id="8" creationId="{39AE06C5-34BE-4D68-97C3-4C07702C2DF6}"/>
+          </ac:spMkLst>
+        </pc:spChg>
+      </pc:sldChg>
+      <pc:sldChg chg="addSp delSp modSp add mod modAnim">
+        <pc:chgData name="Renan Xavier Cortes" userId="d6af805853004405" providerId="LiveId" clId="{6CBA8CAD-390F-4A11-B907-BBB4B6E0B449}" dt="2026-01-21T19:57:31.132" v="2031" actId="1076"/>
+        <pc:sldMkLst>
+          <pc:docMk/>
+          <pc:sldMk cId="2280539132" sldId="269"/>
+        </pc:sldMkLst>
+        <pc:spChg chg="mod">
+          <ac:chgData name="Renan Xavier Cortes" userId="d6af805853004405" providerId="LiveId" clId="{6CBA8CAD-390F-4A11-B907-BBB4B6E0B449}" dt="2026-01-21T19:29:34.350" v="1988" actId="20577"/>
+          <ac:spMkLst>
+            <pc:docMk/>
+            <pc:sldMk cId="2280539132" sldId="269"/>
+            <ac:spMk id="4" creationId="{4B84190D-BF19-CEFE-E86D-F0B0EBBA7C0B}"/>
+          </ac:spMkLst>
+        </pc:spChg>
+        <pc:spChg chg="mod">
+          <ac:chgData name="Renan Xavier Cortes" userId="d6af805853004405" providerId="LiveId" clId="{6CBA8CAD-390F-4A11-B907-BBB4B6E0B449}" dt="2026-01-21T19:28:38.900" v="1982" actId="20577"/>
+          <ac:spMkLst>
+            <pc:docMk/>
+            <pc:sldMk cId="2280539132" sldId="269"/>
+            <ac:spMk id="8" creationId="{39AE06C5-34BE-4D68-97C3-4C07702C2DF6}"/>
+          </ac:spMkLst>
+        </pc:spChg>
+        <pc:picChg chg="add del mod">
+          <ac:chgData name="Renan Xavier Cortes" userId="d6af805853004405" providerId="LiveId" clId="{6CBA8CAD-390F-4A11-B907-BBB4B6E0B449}" dt="2026-01-21T19:36:40.507" v="1993" actId="478"/>
+          <ac:picMkLst>
+            <pc:docMk/>
+            <pc:sldMk cId="2280539132" sldId="269"/>
+            <ac:picMk id="6" creationId="{1FF55C8A-24A1-2834-88D3-7F49B46E12DA}"/>
+          </ac:picMkLst>
+        </pc:picChg>
+        <pc:picChg chg="add del mod">
+          <ac:chgData name="Renan Xavier Cortes" userId="d6af805853004405" providerId="LiveId" clId="{6CBA8CAD-390F-4A11-B907-BBB4B6E0B449}" dt="2026-01-21T19:57:20.787" v="2028" actId="478"/>
+          <ac:picMkLst>
+            <pc:docMk/>
+            <pc:sldMk cId="2280539132" sldId="269"/>
+            <ac:picMk id="10" creationId="{DB7C7009-8D56-695C-4B6E-E9C1203D95EF}"/>
+          </ac:picMkLst>
+        </pc:picChg>
+        <pc:picChg chg="add mod">
+          <ac:chgData name="Renan Xavier Cortes" userId="d6af805853004405" providerId="LiveId" clId="{6CBA8CAD-390F-4A11-B907-BBB4B6E0B449}" dt="2026-01-21T19:57:31.132" v="2031" actId="1076"/>
+          <ac:picMkLst>
+            <pc:docMk/>
+            <pc:sldMk cId="2280539132" sldId="269"/>
+            <ac:picMk id="12" creationId="{387B2521-0873-2B44-23CB-06F158F17A95}"/>
+          </ac:picMkLst>
+        </pc:picChg>
+        <pc:picChg chg="add del">
+          <ac:chgData name="Renan Xavier Cortes" userId="d6af805853004405" providerId="LiveId" clId="{6CBA8CAD-390F-4A11-B907-BBB4B6E0B449}" dt="2026-01-21T19:34:39.537" v="1990" actId="478"/>
+          <ac:picMkLst>
+            <pc:docMk/>
+            <pc:sldMk cId="2280539132" sldId="269"/>
+            <ac:picMk id="14338" creationId="{6E12BE7A-2157-D78B-66BE-B4AFC6F10B8A}"/>
+          </ac:picMkLst>
+        </pc:picChg>
+      </pc:sldChg>
+      <pc:sldChg chg="addSp delSp modSp add mod modAnim">
+        <pc:chgData name="Renan Xavier Cortes" userId="d6af805853004405" providerId="LiveId" clId="{6CBA8CAD-390F-4A11-B907-BBB4B6E0B449}" dt="2026-01-21T21:00:27.912" v="2261"/>
+        <pc:sldMkLst>
+          <pc:docMk/>
+          <pc:sldMk cId="1218368481" sldId="270"/>
+        </pc:sldMkLst>
+        <pc:spChg chg="mod">
+          <ac:chgData name="Renan Xavier Cortes" userId="d6af805853004405" providerId="LiveId" clId="{6CBA8CAD-390F-4A11-B907-BBB4B6E0B449}" dt="2026-01-21T19:44:08.525" v="2021" actId="20577"/>
+          <ac:spMkLst>
+            <pc:docMk/>
+            <pc:sldMk cId="1218368481" sldId="270"/>
+            <ac:spMk id="4" creationId="{4B84190D-BF19-CEFE-E86D-F0B0EBBA7C0B}"/>
+          </ac:spMkLst>
+        </pc:spChg>
+        <pc:spChg chg="add mod">
+          <ac:chgData name="Renan Xavier Cortes" userId="d6af805853004405" providerId="LiveId" clId="{6CBA8CAD-390F-4A11-B907-BBB4B6E0B449}" dt="2026-01-21T19:44:20.030" v="2023"/>
+          <ac:spMkLst>
+            <pc:docMk/>
+            <pc:sldMk cId="1218368481" sldId="270"/>
+            <ac:spMk id="5" creationId="{F2A97601-E2DD-3BBC-74F4-2EA087A13F98}"/>
+          </ac:spMkLst>
+        </pc:spChg>
+        <pc:spChg chg="add del">
+          <ac:chgData name="Renan Xavier Cortes" userId="d6af805853004405" providerId="LiveId" clId="{6CBA8CAD-390F-4A11-B907-BBB4B6E0B449}" dt="2026-01-21T19:44:44.857" v="2025" actId="478"/>
+          <ac:spMkLst>
+            <pc:docMk/>
+            <pc:sldMk cId="1218368481" sldId="270"/>
+            <ac:spMk id="6" creationId="{5DA31ED7-3101-E188-86DD-5907439477B8}"/>
+          </ac:spMkLst>
+        </pc:spChg>
+        <pc:spChg chg="del">
+          <ac:chgData name="Renan Xavier Cortes" userId="d6af805853004405" providerId="LiveId" clId="{6CBA8CAD-390F-4A11-B907-BBB4B6E0B449}" dt="2026-01-21T19:44:19.710" v="2022" actId="478"/>
+          <ac:spMkLst>
+            <pc:docMk/>
+            <pc:sldMk cId="1218368481" sldId="270"/>
+            <ac:spMk id="8" creationId="{39AE06C5-34BE-4D68-97C3-4C07702C2DF6}"/>
+          </ac:spMkLst>
+        </pc:spChg>
+        <pc:spChg chg="add mod">
+          <ac:chgData name="Renan Xavier Cortes" userId="d6af805853004405" providerId="LiveId" clId="{6CBA8CAD-390F-4A11-B907-BBB4B6E0B449}" dt="2026-01-21T19:44:51.612" v="2027" actId="14100"/>
+          <ac:spMkLst>
+            <pc:docMk/>
+            <pc:sldMk cId="1218368481" sldId="270"/>
+            <ac:spMk id="9" creationId="{8D99C18C-4384-15B5-AE25-CA173BF5FF2A}"/>
+          </ac:spMkLst>
+        </pc:spChg>
+        <pc:picChg chg="add mod">
+          <ac:chgData name="Renan Xavier Cortes" userId="d6af805853004405" providerId="LiveId" clId="{6CBA8CAD-390F-4A11-B907-BBB4B6E0B449}" dt="2026-01-21T20:09:57.973" v="2038" actId="1076"/>
+          <ac:picMkLst>
+            <pc:docMk/>
+            <pc:sldMk cId="1218368481" sldId="270"/>
+            <ac:picMk id="11" creationId="{61149965-3367-6BC9-6804-26C7F2A938B0}"/>
+          </ac:picMkLst>
+        </pc:picChg>
+      </pc:sldChg>
+      <pc:sldChg chg="addSp modSp add mod modAnim">
+        <pc:chgData name="Renan Xavier Cortes" userId="d6af805853004405" providerId="LiveId" clId="{6CBA8CAD-390F-4A11-B907-BBB4B6E0B449}" dt="2026-01-21T21:00:44.298" v="2266"/>
+        <pc:sldMkLst>
+          <pc:docMk/>
+          <pc:sldMk cId="4045846075" sldId="271"/>
+        </pc:sldMkLst>
+        <pc:spChg chg="mod">
+          <ac:chgData name="Renan Xavier Cortes" userId="d6af805853004405" providerId="LiveId" clId="{6CBA8CAD-390F-4A11-B907-BBB4B6E0B449}" dt="2026-01-21T20:37:36.926" v="2124" actId="20577"/>
+          <ac:spMkLst>
+            <pc:docMk/>
+            <pc:sldMk cId="4045846075" sldId="271"/>
+            <ac:spMk id="4" creationId="{4B84190D-BF19-CEFE-E86D-F0B0EBBA7C0B}"/>
+          </ac:spMkLst>
+        </pc:spChg>
+        <pc:spChg chg="mod">
+          <ac:chgData name="Renan Xavier Cortes" userId="d6af805853004405" providerId="LiveId" clId="{6CBA8CAD-390F-4A11-B907-BBB4B6E0B449}" dt="2026-01-21T20:48:01.809" v="2132" actId="404"/>
+          <ac:spMkLst>
+            <pc:docMk/>
+            <pc:sldMk cId="4045846075" sldId="271"/>
+            <ac:spMk id="8" creationId="{39AE06C5-34BE-4D68-97C3-4C07702C2DF6}"/>
+          </ac:spMkLst>
+        </pc:spChg>
+        <pc:picChg chg="add mod">
+          <ac:chgData name="Renan Xavier Cortes" userId="d6af805853004405" providerId="LiveId" clId="{6CBA8CAD-390F-4A11-B907-BBB4B6E0B449}" dt="2026-01-21T20:47:25.028" v="2126" actId="1076"/>
+          <ac:picMkLst>
+            <pc:docMk/>
+            <pc:sldMk cId="4045846075" sldId="271"/>
+            <ac:picMk id="6" creationId="{CB9F02F1-AFED-6149-90A3-CE7F1933A876}"/>
+          </ac:picMkLst>
+        </pc:picChg>
+      </pc:sldChg>
+      <pc:sldChg chg="add del">
+        <pc:chgData name="Renan Xavier Cortes" userId="d6af805853004405" providerId="LiveId" clId="{6CBA8CAD-390F-4A11-B907-BBB4B6E0B449}" dt="2026-01-21T20:50:53.056" v="2195" actId="47"/>
+        <pc:sldMkLst>
+          <pc:docMk/>
+          <pc:sldMk cId="183140782" sldId="272"/>
+        </pc:sldMkLst>
+      </pc:sldChg>
+      <pc:sldChg chg="add del">
+        <pc:chgData name="Renan Xavier Cortes" userId="d6af805853004405" providerId="LiveId" clId="{6CBA8CAD-390F-4A11-B907-BBB4B6E0B449}" dt="2026-01-21T20:50:53.056" v="2195" actId="47"/>
+        <pc:sldMkLst>
+          <pc:docMk/>
+          <pc:sldMk cId="4037360461" sldId="273"/>
+        </pc:sldMkLst>
+      </pc:sldChg>
+      <pc:sldChg chg="addSp delSp modSp add mod modAnim">
+        <pc:chgData name="Renan Xavier Cortes" userId="d6af805853004405" providerId="LiveId" clId="{6CBA8CAD-390F-4A11-B907-BBB4B6E0B449}" dt="2026-01-21T20:59:49.591" v="2259" actId="1076"/>
+        <pc:sldMkLst>
+          <pc:docMk/>
+          <pc:sldMk cId="2090754589" sldId="274"/>
+        </pc:sldMkLst>
+        <pc:spChg chg="mod">
+          <ac:chgData name="Renan Xavier Cortes" userId="d6af805853004405" providerId="LiveId" clId="{6CBA8CAD-390F-4A11-B907-BBB4B6E0B449}" dt="2026-01-21T18:25:04.051" v="1202" actId="20577"/>
+          <ac:spMkLst>
+            <pc:docMk/>
+            <pc:sldMk cId="2090754589" sldId="274"/>
+            <ac:spMk id="4" creationId="{4B84190D-BF19-CEFE-E86D-F0B0EBBA7C0B}"/>
+          </ac:spMkLst>
+        </pc:spChg>
+        <pc:spChg chg="add mod">
+          <ac:chgData name="Renan Xavier Cortes" userId="d6af805853004405" providerId="LiveId" clId="{6CBA8CAD-390F-4A11-B907-BBB4B6E0B449}" dt="2026-01-21T18:25:36.776" v="1227" actId="1076"/>
+          <ac:spMkLst>
+            <pc:docMk/>
+            <pc:sldMk cId="2090754589" sldId="274"/>
+            <ac:spMk id="5" creationId="{958B68E6-C144-5060-CA7D-7C17FE22680B}"/>
+          </ac:spMkLst>
+        </pc:spChg>
+        <pc:spChg chg="mod">
+          <ac:chgData name="Renan Xavier Cortes" userId="d6af805853004405" providerId="LiveId" clId="{6CBA8CAD-390F-4A11-B907-BBB4B6E0B449}" dt="2026-01-21T20:59:49.591" v="2259" actId="1076"/>
+          <ac:spMkLst>
+            <pc:docMk/>
+            <pc:sldMk cId="2090754589" sldId="274"/>
+            <ac:spMk id="8" creationId="{39AE06C5-34BE-4D68-97C3-4C07702C2DF6}"/>
+          </ac:spMkLst>
+        </pc:spChg>
+        <pc:picChg chg="add mod">
+          <ac:chgData name="Renan Xavier Cortes" userId="d6af805853004405" providerId="LiveId" clId="{6CBA8CAD-390F-4A11-B907-BBB4B6E0B449}" dt="2026-01-21T18:27:25.221" v="1239" actId="1076"/>
+          <ac:picMkLst>
+            <pc:docMk/>
+            <pc:sldMk cId="2090754589" sldId="274"/>
+            <ac:picMk id="9" creationId="{71F18501-07D0-A985-61D0-917B8E1DCA38}"/>
+          </ac:picMkLst>
+        </pc:picChg>
+        <pc:picChg chg="add mod">
+          <ac:chgData name="Renan Xavier Cortes" userId="d6af805853004405" providerId="LiveId" clId="{6CBA8CAD-390F-4A11-B907-BBB4B6E0B449}" dt="2026-01-21T18:27:18.724" v="1236" actId="1076"/>
+          <ac:picMkLst>
+            <pc:docMk/>
+            <pc:sldMk cId="2090754589" sldId="274"/>
+            <ac:picMk id="11" creationId="{2D7DA205-FD4F-B71E-2F8B-352FF373538B}"/>
+          </ac:picMkLst>
+        </pc:picChg>
+        <pc:picChg chg="add del">
+          <ac:chgData name="Renan Xavier Cortes" userId="d6af805853004405" providerId="LiveId" clId="{6CBA8CAD-390F-4A11-B907-BBB4B6E0B449}" dt="2026-01-21T18:35:43.594" v="1254" actId="478"/>
+          <ac:picMkLst>
+            <pc:docMk/>
+            <pc:sldMk cId="2090754589" sldId="274"/>
+            <ac:picMk id="13" creationId="{3998EFE2-B89E-DC76-D434-88376055E068}"/>
+          </ac:picMkLst>
+        </pc:picChg>
+      </pc:sldChg>
+      <pc:sldChg chg="delSp modSp add mod">
+        <pc:chgData name="Renan Xavier Cortes" userId="d6af805853004405" providerId="LiveId" clId="{6CBA8CAD-390F-4A11-B907-BBB4B6E0B449}" dt="2026-01-21T20:59:53.464" v="2260" actId="1076"/>
+        <pc:sldMkLst>
+          <pc:docMk/>
+          <pc:sldMk cId="3791482239" sldId="275"/>
+        </pc:sldMkLst>
+        <pc:spChg chg="mod">
+          <ac:chgData name="Renan Xavier Cortes" userId="d6af805853004405" providerId="LiveId" clId="{6CBA8CAD-390F-4A11-B907-BBB4B6E0B449}" dt="2026-01-21T20:59:53.464" v="2260" actId="1076"/>
+          <ac:spMkLst>
+            <pc:docMk/>
+            <pc:sldMk cId="3791482239" sldId="275"/>
+            <ac:spMk id="8" creationId="{39AE06C5-34BE-4D68-97C3-4C07702C2DF6}"/>
+          </ac:spMkLst>
+        </pc:spChg>
+        <pc:picChg chg="del">
+          <ac:chgData name="Renan Xavier Cortes" userId="d6af805853004405" providerId="LiveId" clId="{6CBA8CAD-390F-4A11-B907-BBB4B6E0B449}" dt="2026-01-21T18:35:37.826" v="1252" actId="478"/>
+          <ac:picMkLst>
+            <pc:docMk/>
+            <pc:sldMk cId="3791482239" sldId="275"/>
+            <ac:picMk id="11" creationId="{2D7DA205-FD4F-B71E-2F8B-352FF373538B}"/>
+          </ac:picMkLst>
+        </pc:picChg>
+        <pc:picChg chg="mod">
+          <ac:chgData name="Renan Xavier Cortes" userId="d6af805853004405" providerId="LiveId" clId="{6CBA8CAD-390F-4A11-B907-BBB4B6E0B449}" dt="2026-01-21T18:35:40.892" v="1253" actId="1076"/>
+          <ac:picMkLst>
+            <pc:docMk/>
+            <pc:sldMk cId="3791482239" sldId="275"/>
+            <ac:picMk id="13" creationId="{3998EFE2-B89E-DC76-D434-88376055E068}"/>
+          </ac:picMkLst>
+        </pc:picChg>
+      </pc:sldChg>
+      <pc:sldChg chg="addSp modSp add mod modAnim">
+        <pc:chgData name="Renan Xavier Cortes" userId="d6af805853004405" providerId="LiveId" clId="{6CBA8CAD-390F-4A11-B907-BBB4B6E0B449}" dt="2026-01-21T20:58:56.682" v="2252" actId="1076"/>
+        <pc:sldMkLst>
+          <pc:docMk/>
+          <pc:sldMk cId="3446963972" sldId="276"/>
+        </pc:sldMkLst>
+        <pc:spChg chg="mod">
+          <ac:chgData name="Renan Xavier Cortes" userId="d6af805853004405" providerId="LiveId" clId="{6CBA8CAD-390F-4A11-B907-BBB4B6E0B449}" dt="2026-01-21T20:58:53.820" v="2251" actId="1076"/>
+          <ac:spMkLst>
+            <pc:docMk/>
+            <pc:sldMk cId="3446963972" sldId="276"/>
+            <ac:spMk id="4" creationId="{4B84190D-BF19-CEFE-E86D-F0B0EBBA7C0B}"/>
+          </ac:spMkLst>
+        </pc:spChg>
+        <pc:spChg chg="add">
+          <ac:chgData name="Renan Xavier Cortes" userId="d6af805853004405" providerId="LiveId" clId="{6CBA8CAD-390F-4A11-B907-BBB4B6E0B449}" dt="2026-01-21T18:46:47.975" v="1328"/>
+          <ac:spMkLst>
+            <pc:docMk/>
+            <pc:sldMk cId="3446963972" sldId="276"/>
+            <ac:spMk id="5" creationId="{7691A13F-E63A-E81C-7615-4E1B9C8F089B}"/>
+          </ac:spMkLst>
+        </pc:spChg>
+        <pc:spChg chg="add">
+          <ac:chgData name="Renan Xavier Cortes" userId="d6af805853004405" providerId="LiveId" clId="{6CBA8CAD-390F-4A11-B907-BBB4B6E0B449}" dt="2026-01-21T18:46:56.495" v="1331"/>
+          <ac:spMkLst>
+            <pc:docMk/>
+            <pc:sldMk cId="3446963972" sldId="276"/>
+            <ac:spMk id="6" creationId="{B9CD3EB6-CF63-45D7-8877-1B8884B44136}"/>
+          </ac:spMkLst>
+        </pc:spChg>
+        <pc:spChg chg="mod">
+          <ac:chgData name="Renan Xavier Cortes" userId="d6af805853004405" providerId="LiveId" clId="{6CBA8CAD-390F-4A11-B907-BBB4B6E0B449}" dt="2026-01-21T20:58:56.682" v="2252" actId="1076"/>
+          <ac:spMkLst>
+            <pc:docMk/>
+            <pc:sldMk cId="3446963972" sldId="276"/>
+            <ac:spMk id="8" creationId="{39AE06C5-34BE-4D68-97C3-4C07702C2DF6}"/>
+          </ac:spMkLst>
+        </pc:spChg>
+        <pc:spChg chg="add">
+          <ac:chgData name="Renan Xavier Cortes" userId="d6af805853004405" providerId="LiveId" clId="{6CBA8CAD-390F-4A11-B907-BBB4B6E0B449}" dt="2026-01-21T18:48:07.452" v="1348"/>
+          <ac:spMkLst>
+            <pc:docMk/>
+            <pc:sldMk cId="3446963972" sldId="276"/>
+            <ac:spMk id="9" creationId="{7BD61162-0455-46D7-6582-B08A63E293A9}"/>
+          </ac:spMkLst>
+        </pc:spChg>
+        <pc:spChg chg="add mod">
+          <ac:chgData name="Renan Xavier Cortes" userId="d6af805853004405" providerId="LiveId" clId="{6CBA8CAD-390F-4A11-B907-BBB4B6E0B449}" dt="2026-01-21T19:20:03.944" v="1876" actId="122"/>
+          <ac:spMkLst>
+            <pc:docMk/>
+            <pc:sldMk cId="3446963972" sldId="276"/>
+            <ac:spMk id="10" creationId="{5ED500D4-496C-7599-2503-D51C1F16CA97}"/>
+          </ac:spMkLst>
+        </pc:spChg>
+      </pc:sldChg>
+      <pc:sldChg chg="addSp delSp modSp add mod delAnim">
+        <pc:chgData name="Renan Xavier Cortes" userId="d6af805853004405" providerId="LiveId" clId="{6CBA8CAD-390F-4A11-B907-BBB4B6E0B449}" dt="2026-01-21T20:59:04.449" v="2254" actId="1076"/>
+        <pc:sldMkLst>
+          <pc:docMk/>
+          <pc:sldMk cId="3536810104" sldId="277"/>
+        </pc:sldMkLst>
+        <pc:spChg chg="mod">
+          <ac:chgData name="Renan Xavier Cortes" userId="d6af805853004405" providerId="LiveId" clId="{6CBA8CAD-390F-4A11-B907-BBB4B6E0B449}" dt="2026-01-21T20:59:01.719" v="2253" actId="1076"/>
+          <ac:spMkLst>
+            <pc:docMk/>
+            <pc:sldMk cId="3536810104" sldId="277"/>
+            <ac:spMk id="4" creationId="{4B84190D-BF19-CEFE-E86D-F0B0EBBA7C0B}"/>
+          </ac:spMkLst>
+        </pc:spChg>
+        <pc:spChg chg="add">
+          <ac:chgData name="Renan Xavier Cortes" userId="d6af805853004405" providerId="LiveId" clId="{6CBA8CAD-390F-4A11-B907-BBB4B6E0B449}" dt="2026-01-21T19:19:04.508" v="1845"/>
+          <ac:spMkLst>
+            <pc:docMk/>
+            <pc:sldMk cId="3536810104" sldId="277"/>
+            <ac:spMk id="5" creationId="{F614520D-A0CA-F6FB-739F-3A18BD793D0D}"/>
+          </ac:spMkLst>
+        </pc:spChg>
+        <pc:spChg chg="mod">
+          <ac:chgData name="Renan Xavier Cortes" userId="d6af805853004405" providerId="LiveId" clId="{6CBA8CAD-390F-4A11-B907-BBB4B6E0B449}" dt="2026-01-21T20:59:04.449" v="2254" actId="1076"/>
+          <ac:spMkLst>
+            <pc:docMk/>
+            <pc:sldMk cId="3536810104" sldId="277"/>
+            <ac:spMk id="8" creationId="{39AE06C5-34BE-4D68-97C3-4C07702C2DF6}"/>
+          </ac:spMkLst>
+        </pc:spChg>
+        <pc:spChg chg="del">
+          <ac:chgData name="Renan Xavier Cortes" userId="d6af805853004405" providerId="LiveId" clId="{6CBA8CAD-390F-4A11-B907-BBB4B6E0B449}" dt="2026-01-21T19:21:22.622" v="1907" actId="478"/>
+          <ac:spMkLst>
+            <pc:docMk/>
+            <pc:sldMk cId="3536810104" sldId="277"/>
+            <ac:spMk id="10" creationId="{5ED500D4-496C-7599-2503-D51C1F16CA97}"/>
+          </ac:spMkLst>
+        </pc:spChg>
+      </pc:sldChg>
+      <pc:sldChg chg="addSp delSp modSp add mod">
+        <pc:chgData name="Renan Xavier Cortes" userId="d6af805853004405" providerId="LiveId" clId="{6CBA8CAD-390F-4A11-B907-BBB4B6E0B449}" dt="2026-01-21T20:59:12.468" v="2255" actId="1076"/>
+        <pc:sldMkLst>
+          <pc:docMk/>
+          <pc:sldMk cId="3805335353" sldId="278"/>
+        </pc:sldMkLst>
+        <pc:spChg chg="del">
+          <ac:chgData name="Renan Xavier Cortes" userId="d6af805853004405" providerId="LiveId" clId="{6CBA8CAD-390F-4A11-B907-BBB4B6E0B449}" dt="2026-01-21T19:23:53.939" v="1927" actId="478"/>
+          <ac:spMkLst>
+            <pc:docMk/>
+            <pc:sldMk cId="3805335353" sldId="278"/>
+            <ac:spMk id="4" creationId="{4B84190D-BF19-CEFE-E86D-F0B0EBBA7C0B}"/>
+          </ac:spMkLst>
+        </pc:spChg>
+        <pc:spChg chg="mod">
+          <ac:chgData name="Renan Xavier Cortes" userId="d6af805853004405" providerId="LiveId" clId="{6CBA8CAD-390F-4A11-B907-BBB4B6E0B449}" dt="2026-01-21T20:59:12.468" v="2255" actId="1076"/>
+          <ac:spMkLst>
+            <pc:docMk/>
+            <pc:sldMk cId="3805335353" sldId="278"/>
+            <ac:spMk id="8" creationId="{39AE06C5-34BE-4D68-97C3-4C07702C2DF6}"/>
+          </ac:spMkLst>
+        </pc:spChg>
+        <pc:picChg chg="add del">
+          <ac:chgData name="Renan Xavier Cortes" userId="d6af805853004405" providerId="LiveId" clId="{6CBA8CAD-390F-4A11-B907-BBB4B6E0B449}" dt="2026-01-21T19:24:04.582" v="1929" actId="478"/>
+          <ac:picMkLst>
+            <pc:docMk/>
+            <pc:sldMk cId="3805335353" sldId="278"/>
+            <ac:picMk id="6" creationId="{921C0E59-AD89-ECC2-F222-142CFE50CC44}"/>
+          </ac:picMkLst>
+        </pc:picChg>
+        <pc:picChg chg="add del mod">
+          <ac:chgData name="Renan Xavier Cortes" userId="d6af805853004405" providerId="LiveId" clId="{6CBA8CAD-390F-4A11-B907-BBB4B6E0B449}" dt="2026-01-21T19:24:16.562" v="1932" actId="478"/>
+          <ac:picMkLst>
+            <pc:docMk/>
+            <pc:sldMk cId="3805335353" sldId="278"/>
+            <ac:picMk id="10" creationId="{6D158DB3-BBDB-4290-7B5E-041896ED57D7}"/>
+          </ac:picMkLst>
+        </pc:picChg>
+        <pc:picChg chg="add mod">
+          <ac:chgData name="Renan Xavier Cortes" userId="d6af805853004405" providerId="LiveId" clId="{6CBA8CAD-390F-4A11-B907-BBB4B6E0B449}" dt="2026-01-21T19:24:25.804" v="1936" actId="1076"/>
+          <ac:picMkLst>
+            <pc:docMk/>
+            <pc:sldMk cId="3805335353" sldId="278"/>
+            <ac:picMk id="12" creationId="{D1D61B3D-F04A-A328-6D7E-B6112CFC8500}"/>
+          </ac:picMkLst>
+        </pc:picChg>
+      </pc:sldChg>
+      <pc:sldChg chg="add del">
+        <pc:chgData name="Renan Xavier Cortes" userId="d6af805853004405" providerId="LiveId" clId="{6CBA8CAD-390F-4A11-B907-BBB4B6E0B449}" dt="2026-01-21T20:14:07.365" v="2065" actId="47"/>
+        <pc:sldMkLst>
+          <pc:docMk/>
+          <pc:sldMk cId="3848419073" sldId="279"/>
+        </pc:sldMkLst>
+      </pc:sldChg>
+      <pc:sldChg chg="addSp delSp modSp add mod modAnim">
+        <pc:chgData name="Renan Xavier Cortes" userId="d6af805853004405" providerId="LiveId" clId="{6CBA8CAD-390F-4A11-B907-BBB4B6E0B449}" dt="2026-01-21T21:00:32.127" v="2262"/>
+        <pc:sldMkLst>
+          <pc:docMk/>
+          <pc:sldMk cId="1732088967" sldId="280"/>
+        </pc:sldMkLst>
+        <pc:picChg chg="add mod">
+          <ac:chgData name="Renan Xavier Cortes" userId="d6af805853004405" providerId="LiveId" clId="{6CBA8CAD-390F-4A11-B907-BBB4B6E0B449}" dt="2026-01-21T20:10:30.304" v="2048" actId="1076"/>
+          <ac:picMkLst>
+            <pc:docMk/>
+            <pc:sldMk cId="1732088967" sldId="280"/>
+            <ac:picMk id="8" creationId="{AEF69BF5-D37C-4474-57A7-A57534FDD6C4}"/>
+          </ac:picMkLst>
+        </pc:picChg>
+        <pc:picChg chg="del">
+          <ac:chgData name="Renan Xavier Cortes" userId="d6af805853004405" providerId="LiveId" clId="{6CBA8CAD-390F-4A11-B907-BBB4B6E0B449}" dt="2026-01-21T20:10:25.088" v="2043" actId="478"/>
+          <ac:picMkLst>
+            <pc:docMk/>
+            <pc:sldMk cId="1732088967" sldId="280"/>
+            <ac:picMk id="11" creationId="{61149965-3367-6BC9-6804-26C7F2A938B0}"/>
+          </ac:picMkLst>
+        </pc:picChg>
+      </pc:sldChg>
+      <pc:sldChg chg="addSp delSp modSp add mod modAnim">
+        <pc:chgData name="Renan Xavier Cortes" userId="d6af805853004405" providerId="LiveId" clId="{6CBA8CAD-390F-4A11-B907-BBB4B6E0B449}" dt="2026-01-21T21:00:35.081" v="2263"/>
+        <pc:sldMkLst>
+          <pc:docMk/>
+          <pc:sldMk cId="1675466683" sldId="281"/>
+        </pc:sldMkLst>
+        <pc:picChg chg="add mod">
+          <ac:chgData name="Renan Xavier Cortes" userId="d6af805853004405" providerId="LiveId" clId="{6CBA8CAD-390F-4A11-B907-BBB4B6E0B449}" dt="2026-01-21T20:10:41.842" v="2053" actId="1076"/>
+          <ac:picMkLst>
+            <pc:docMk/>
+            <pc:sldMk cId="1675466683" sldId="281"/>
+            <ac:picMk id="8" creationId="{0CEA26AE-0683-B67F-BC37-373D3160DC2B}"/>
+          </ac:picMkLst>
+        </pc:picChg>
+        <pc:picChg chg="del">
+          <ac:chgData name="Renan Xavier Cortes" userId="d6af805853004405" providerId="LiveId" clId="{6CBA8CAD-390F-4A11-B907-BBB4B6E0B449}" dt="2026-01-21T20:10:39.109" v="2049" actId="478"/>
+          <ac:picMkLst>
+            <pc:docMk/>
+            <pc:sldMk cId="1675466683" sldId="281"/>
+            <ac:picMk id="11" creationId="{61149965-3367-6BC9-6804-26C7F2A938B0}"/>
+          </ac:picMkLst>
+        </pc:picChg>
+      </pc:sldChg>
+      <pc:sldChg chg="addSp delSp modSp add mod modAnim">
+        <pc:chgData name="Renan Xavier Cortes" userId="d6af805853004405" providerId="LiveId" clId="{6CBA8CAD-390F-4A11-B907-BBB4B6E0B449}" dt="2026-01-21T21:00:39.070" v="2264"/>
+        <pc:sldMkLst>
+          <pc:docMk/>
+          <pc:sldMk cId="394495569" sldId="282"/>
+        </pc:sldMkLst>
+        <pc:picChg chg="add mod">
+          <ac:chgData name="Renan Xavier Cortes" userId="d6af805853004405" providerId="LiveId" clId="{6CBA8CAD-390F-4A11-B907-BBB4B6E0B449}" dt="2026-01-21T20:10:49.139" v="2058" actId="1076"/>
+          <ac:picMkLst>
+            <pc:docMk/>
+            <pc:sldMk cId="394495569" sldId="282"/>
+            <ac:picMk id="8" creationId="{B1CCA7E3-218E-F179-62AE-8328EF43C48D}"/>
+          </ac:picMkLst>
+        </pc:picChg>
+        <pc:picChg chg="del">
+          <ac:chgData name="Renan Xavier Cortes" userId="d6af805853004405" providerId="LiveId" clId="{6CBA8CAD-390F-4A11-B907-BBB4B6E0B449}" dt="2026-01-21T20:10:46.609" v="2054" actId="478"/>
+          <ac:picMkLst>
+            <pc:docMk/>
+            <pc:sldMk cId="394495569" sldId="282"/>
+            <ac:picMk id="11" creationId="{61149965-3367-6BC9-6804-26C7F2A938B0}"/>
+          </ac:picMkLst>
+        </pc:picChg>
+      </pc:sldChg>
+      <pc:sldChg chg="addSp delSp modSp add mod modAnim">
+        <pc:chgData name="Renan Xavier Cortes" userId="d6af805853004405" providerId="LiveId" clId="{6CBA8CAD-390F-4A11-B907-BBB4B6E0B449}" dt="2026-01-21T21:00:41.723" v="2265"/>
+        <pc:sldMkLst>
+          <pc:docMk/>
+          <pc:sldMk cId="1551874195" sldId="283"/>
+        </pc:sldMkLst>
+        <pc:picChg chg="del">
+          <ac:chgData name="Renan Xavier Cortes" userId="d6af805853004405" providerId="LiveId" clId="{6CBA8CAD-390F-4A11-B907-BBB4B6E0B449}" dt="2026-01-21T20:11:11.233" v="2060" actId="478"/>
+          <ac:picMkLst>
+            <pc:docMk/>
+            <pc:sldMk cId="1551874195" sldId="283"/>
+            <ac:picMk id="8" creationId="{B1CCA7E3-218E-F179-62AE-8328EF43C48D}"/>
+          </ac:picMkLst>
+        </pc:picChg>
+        <pc:picChg chg="add del mod">
+          <ac:chgData name="Renan Xavier Cortes" userId="d6af805853004405" providerId="LiveId" clId="{6CBA8CAD-390F-4A11-B907-BBB4B6E0B449}" dt="2026-01-21T20:14:13.787" v="2066" actId="478"/>
+          <ac:picMkLst>
+            <pc:docMk/>
+            <pc:sldMk cId="1551874195" sldId="283"/>
+            <ac:picMk id="10" creationId="{F828494C-955A-760B-2AC4-9BAE7602E545}"/>
+          </ac:picMkLst>
+        </pc:picChg>
+        <pc:picChg chg="add mod">
+          <ac:chgData name="Renan Xavier Cortes" userId="d6af805853004405" providerId="LiveId" clId="{6CBA8CAD-390F-4A11-B907-BBB4B6E0B449}" dt="2026-01-21T20:14:23.924" v="2073" actId="1076"/>
+          <ac:picMkLst>
+            <pc:docMk/>
+            <pc:sldMk cId="1551874195" sldId="283"/>
+            <ac:picMk id="12" creationId="{65B2CA1E-D00D-E753-7DDF-737EC812D222}"/>
+          </ac:picMkLst>
+        </pc:picChg>
+      </pc:sldChg>
+      <pc:sldChg chg="addSp delSp modSp add mod modAnim">
+        <pc:chgData name="Renan Xavier Cortes" userId="d6af805853004405" providerId="LiveId" clId="{6CBA8CAD-390F-4A11-B907-BBB4B6E0B449}" dt="2026-01-21T21:00:47.027" v="2267"/>
+        <pc:sldMkLst>
+          <pc:docMk/>
+          <pc:sldMk cId="3855288861" sldId="284"/>
+        </pc:sldMkLst>
+        <pc:spChg chg="mod">
+          <ac:chgData name="Renan Xavier Cortes" userId="d6af805853004405" providerId="LiveId" clId="{6CBA8CAD-390F-4A11-B907-BBB4B6E0B449}" dt="2026-01-21T20:48:23.702" v="2145" actId="20577"/>
+          <ac:spMkLst>
+            <pc:docMk/>
+            <pc:sldMk cId="3855288861" sldId="284"/>
+            <ac:spMk id="4" creationId="{4B84190D-BF19-CEFE-E86D-F0B0EBBA7C0B}"/>
+          </ac:spMkLst>
+        </pc:spChg>
+        <pc:spChg chg="add mod">
+          <ac:chgData name="Renan Xavier Cortes" userId="d6af805853004405" providerId="LiveId" clId="{6CBA8CAD-390F-4A11-B907-BBB4B6E0B449}" dt="2026-01-21T20:48:43.266" v="2153" actId="1076"/>
+          <ac:spMkLst>
+            <pc:docMk/>
+            <pc:sldMk cId="3855288861" sldId="284"/>
+            <ac:spMk id="10" creationId="{2B1F81A8-3F77-3D25-0D91-989260BBD806}"/>
+          </ac:spMkLst>
+        </pc:spChg>
+        <pc:spChg chg="add mod">
+          <ac:chgData name="Renan Xavier Cortes" userId="d6af805853004405" providerId="LiveId" clId="{6CBA8CAD-390F-4A11-B907-BBB4B6E0B449}" dt="2026-01-21T20:49:00.147" v="2168" actId="1076"/>
+          <ac:spMkLst>
+            <pc:docMk/>
+            <pc:sldMk cId="3855288861" sldId="284"/>
+            <ac:spMk id="11" creationId="{ACBE2905-AC6C-0446-21C0-36CE2B864BA5}"/>
+          </ac:spMkLst>
+        </pc:spChg>
+        <pc:picChg chg="del">
+          <ac:chgData name="Renan Xavier Cortes" userId="d6af805853004405" providerId="LiveId" clId="{6CBA8CAD-390F-4A11-B907-BBB4B6E0B449}" dt="2026-01-21T20:48:26.070" v="2146" actId="478"/>
+          <ac:picMkLst>
+            <pc:docMk/>
+            <pc:sldMk cId="3855288861" sldId="284"/>
+            <ac:picMk id="6" creationId="{CB9F02F1-AFED-6149-90A3-CE7F1933A876}"/>
+          </ac:picMkLst>
+        </pc:picChg>
+        <pc:picChg chg="add mod">
+          <ac:chgData name="Renan Xavier Cortes" userId="d6af805853004405" providerId="LiveId" clId="{6CBA8CAD-390F-4A11-B907-BBB4B6E0B449}" dt="2026-01-21T20:48:57.395" v="2167" actId="1076"/>
+          <ac:picMkLst>
+            <pc:docMk/>
+            <pc:sldMk cId="3855288861" sldId="284"/>
+            <ac:picMk id="9" creationId="{61539A83-FA7C-7AD1-70FB-ECE4DD84D297}"/>
+          </ac:picMkLst>
+        </pc:picChg>
+        <pc:picChg chg="add mod">
+          <ac:chgData name="Renan Xavier Cortes" userId="d6af805853004405" providerId="LiveId" clId="{6CBA8CAD-390F-4A11-B907-BBB4B6E0B449}" dt="2026-01-21T20:49:27.109" v="2171" actId="1076"/>
+          <ac:picMkLst>
+            <pc:docMk/>
+            <pc:sldMk cId="3855288861" sldId="284"/>
+            <ac:picMk id="13" creationId="{40652A95-1D6F-2C91-CA10-BBD91EE6FCD5}"/>
+          </ac:picMkLst>
+        </pc:picChg>
+      </pc:sldChg>
+      <pc:sldChg chg="addSp delSp modSp add del mod">
+        <pc:chgData name="Renan Xavier Cortes" userId="d6af805853004405" providerId="LiveId" clId="{6CBA8CAD-390F-4A11-B907-BBB4B6E0B449}" dt="2026-01-21T20:52:43.441" v="2205" actId="47"/>
+        <pc:sldMkLst>
+          <pc:docMk/>
+          <pc:sldMk cId="675104871" sldId="285"/>
+        </pc:sldMkLst>
+        <pc:spChg chg="mod">
+          <ac:chgData name="Renan Xavier Cortes" userId="d6af805853004405" providerId="LiveId" clId="{6CBA8CAD-390F-4A11-B907-BBB4B6E0B449}" dt="2026-01-21T20:49:49.525" v="2189" actId="20577"/>
+          <ac:spMkLst>
+            <pc:docMk/>
+            <pc:sldMk cId="675104871" sldId="285"/>
+            <ac:spMk id="4" creationId="{4B84190D-BF19-CEFE-E86D-F0B0EBBA7C0B}"/>
+          </ac:spMkLst>
+        </pc:spChg>
+        <pc:spChg chg="del">
+          <ac:chgData name="Renan Xavier Cortes" userId="d6af805853004405" providerId="LiveId" clId="{6CBA8CAD-390F-4A11-B907-BBB4B6E0B449}" dt="2026-01-21T20:49:53.812" v="2192" actId="478"/>
+          <ac:spMkLst>
+            <pc:docMk/>
+            <pc:sldMk cId="675104871" sldId="285"/>
+            <ac:spMk id="10" creationId="{2B1F81A8-3F77-3D25-0D91-989260BBD806}"/>
+          </ac:spMkLst>
+        </pc:spChg>
+        <pc:spChg chg="del">
+          <ac:chgData name="Renan Xavier Cortes" userId="d6af805853004405" providerId="LiveId" clId="{6CBA8CAD-390F-4A11-B907-BBB4B6E0B449}" dt="2026-01-21T20:49:53.812" v="2192" actId="478"/>
+          <ac:spMkLst>
+            <pc:docMk/>
+            <pc:sldMk cId="675104871" sldId="285"/>
+            <ac:spMk id="11" creationId="{ACBE2905-AC6C-0446-21C0-36CE2B864BA5}"/>
+          </ac:spMkLst>
+        </pc:spChg>
+        <pc:picChg chg="add del mod">
+          <ac:chgData name="Renan Xavier Cortes" userId="d6af805853004405" providerId="LiveId" clId="{6CBA8CAD-390F-4A11-B907-BBB4B6E0B449}" dt="2026-01-21T20:52:20.405" v="2197" actId="478"/>
+          <ac:picMkLst>
+            <pc:docMk/>
+            <pc:sldMk cId="675104871" sldId="285"/>
+            <ac:picMk id="6" creationId="{96B5210F-1605-9FC7-8E4A-D66BA6A8C835}"/>
+          </ac:picMkLst>
+        </pc:picChg>
+        <pc:picChg chg="del">
+          <ac:chgData name="Renan Xavier Cortes" userId="d6af805853004405" providerId="LiveId" clId="{6CBA8CAD-390F-4A11-B907-BBB4B6E0B449}" dt="2026-01-21T20:49:51.683" v="2190" actId="478"/>
+          <ac:picMkLst>
+            <pc:docMk/>
+            <pc:sldMk cId="675104871" sldId="285"/>
+            <ac:picMk id="9" creationId="{61539A83-FA7C-7AD1-70FB-ECE4DD84D297}"/>
+          </ac:picMkLst>
+        </pc:picChg>
+        <pc:picChg chg="del">
+          <ac:chgData name="Renan Xavier Cortes" userId="d6af805853004405" providerId="LiveId" clId="{6CBA8CAD-390F-4A11-B907-BBB4B6E0B449}" dt="2026-01-21T20:49:52.623" v="2191" actId="478"/>
+          <ac:picMkLst>
+            <pc:docMk/>
+            <pc:sldMk cId="675104871" sldId="285"/>
+            <ac:picMk id="13" creationId="{40652A95-1D6F-2C91-CA10-BBD91EE6FCD5}"/>
+          </ac:picMkLst>
+        </pc:picChg>
+      </pc:sldChg>
+      <pc:sldChg chg="add modAnim">
+        <pc:chgData name="Renan Xavier Cortes" userId="d6af805853004405" providerId="LiveId" clId="{6CBA8CAD-390F-4A11-B907-BBB4B6E0B449}" dt="2026-01-21T21:00:53.358" v="2269"/>
+        <pc:sldMkLst>
+          <pc:docMk/>
+          <pc:sldMk cId="2773026186" sldId="286"/>
+        </pc:sldMkLst>
+      </pc:sldChg>
+      <pc:sldChg chg="addSp delSp modSp add mod modAnim">
+        <pc:chgData name="Renan Xavier Cortes" userId="d6af805853004405" providerId="LiveId" clId="{6CBA8CAD-390F-4A11-B907-BBB4B6E0B449}" dt="2026-01-21T21:00:49.455" v="2268"/>
+        <pc:sldMkLst>
+          <pc:docMk/>
+          <pc:sldMk cId="623748094" sldId="287"/>
+        </pc:sldMkLst>
+        <pc:spChg chg="add mod">
+          <ac:chgData name="Renan Xavier Cortes" userId="d6af805853004405" providerId="LiveId" clId="{6CBA8CAD-390F-4A11-B907-BBB4B6E0B449}" dt="2026-01-21T20:54:01.600" v="2250" actId="1076"/>
+          <ac:spMkLst>
+            <pc:docMk/>
+            <pc:sldMk cId="623748094" sldId="287"/>
+            <ac:spMk id="10" creationId="{0501C3D0-1DF0-41AE-C64F-7EABA969E7F3}"/>
+          </ac:spMkLst>
+        </pc:spChg>
+        <pc:picChg chg="del">
+          <ac:chgData name="Renan Xavier Cortes" userId="d6af805853004405" providerId="LiveId" clId="{6CBA8CAD-390F-4A11-B907-BBB4B6E0B449}" dt="2026-01-21T20:52:26.148" v="2199" actId="478"/>
+          <ac:picMkLst>
+            <pc:docMk/>
+            <pc:sldMk cId="623748094" sldId="287"/>
+            <ac:picMk id="6" creationId="{96B5210F-1605-9FC7-8E4A-D66BA6A8C835}"/>
+          </ac:picMkLst>
+        </pc:picChg>
+        <pc:picChg chg="add mod">
+          <ac:chgData name="Renan Xavier Cortes" userId="d6af805853004405" providerId="LiveId" clId="{6CBA8CAD-390F-4A11-B907-BBB4B6E0B449}" dt="2026-01-21T20:53:20.353" v="2208" actId="1076"/>
+          <ac:picMkLst>
+            <pc:docMk/>
+            <pc:sldMk cId="623748094" sldId="287"/>
+            <ac:picMk id="9" creationId="{F0AE4C95-B2E5-AD75-C8DB-CA9623F29141}"/>
+          </ac:picMkLst>
+        </pc:picChg>
+        <pc:picChg chg="add del mod">
+          <ac:chgData name="Renan Xavier Cortes" userId="d6af805853004405" providerId="LiveId" clId="{6CBA8CAD-390F-4A11-B907-BBB4B6E0B449}" dt="2026-01-21T20:53:15.846" v="2206" actId="478"/>
+          <ac:picMkLst>
+            <pc:docMk/>
+            <pc:sldMk cId="623748094" sldId="287"/>
+            <ac:picMk id="18434" creationId="{E52C266A-D0DB-93C1-2C72-A4F92F13BCD8}"/>
+          </ac:picMkLst>
+        </pc:picChg>
+      </pc:sldChg>
+    </pc:docChg>
+  </pc:docChgLst>
+  <pc:docChgLst>
+    <pc:chgData name="Renan Xavier Cortes" userId="d6af805853004405" providerId="LiveId" clId="{32CE5F03-9B31-4102-A03B-787EE1528540}"/>
+    <pc:docChg chg="undo custSel addSld delSld modSld sldOrd">
+      <pc:chgData name="Renan Xavier Cortes" userId="d6af805853004405" providerId="LiveId" clId="{32CE5F03-9B31-4102-A03B-787EE1528540}" dt="2026-10-01T14:54:51.567" v="2562" actId="1076"/>
+      <pc:docMkLst>
+        <pc:docMk/>
+      </pc:docMkLst>
+      <pc:sldChg chg="addSp delSp modSp mod">
+        <pc:chgData name="Renan Xavier Cortes" userId="d6af805853004405" providerId="LiveId" clId="{32CE5F03-9B31-4102-A03B-787EE1528540}" dt="2026-09-30T14:15:43.776" v="1256" actId="20577"/>
+        <pc:sldMkLst>
+          <pc:docMk/>
+          <pc:sldMk cId="3554767980" sldId="260"/>
+        </pc:sldMkLst>
+        <pc:spChg chg="add">
+          <ac:chgData name="Renan Xavier Cortes" userId="d6af805853004405" providerId="LiveId" clId="{32CE5F03-9B31-4102-A03B-787EE1528540}" dt="2026-09-30T13:56:14.886" v="829"/>
+          <ac:spMkLst>
+            <pc:docMk/>
+            <pc:sldMk cId="3554767980" sldId="260"/>
+            <ac:spMk id="4" creationId="{AF5919B4-CA74-37F8-4759-39BC1C4A8129}"/>
+          </ac:spMkLst>
+        </pc:spChg>
+        <pc:spChg chg="add mod">
+          <ac:chgData name="Renan Xavier Cortes" userId="d6af805853004405" providerId="LiveId" clId="{32CE5F03-9B31-4102-A03B-787EE1528540}" dt="2026-09-30T14:15:43.776" v="1256" actId="20577"/>
+          <ac:spMkLst>
+            <pc:docMk/>
+            <pc:sldMk cId="3554767980" sldId="260"/>
+            <ac:spMk id="5" creationId="{F8513A2C-EFAD-349F-ECA3-4EE11292D1C6}"/>
+          </ac:spMkLst>
+        </pc:spChg>
+        <pc:spChg chg="add mod">
+          <ac:chgData name="Renan Xavier Cortes" userId="d6af805853004405" providerId="LiveId" clId="{32CE5F03-9B31-4102-A03B-787EE1528540}" dt="2026-09-30T14:13:40.083" v="1226" actId="1076"/>
+          <ac:spMkLst>
+            <pc:docMk/>
+            <pc:sldMk cId="3554767980" sldId="260"/>
+            <ac:spMk id="9" creationId="{985D7B09-9BD8-C772-923A-E9C4FBA45B2B}"/>
+          </ac:spMkLst>
+        </pc:spChg>
+        <pc:spChg chg="mod">
+          <ac:chgData name="Renan Xavier Cortes" userId="d6af805853004405" providerId="LiveId" clId="{32CE5F03-9B31-4102-A03B-787EE1528540}" dt="2026-09-30T14:06:28.608" v="1164" actId="404"/>
+          <ac:spMkLst>
+            <pc:docMk/>
+            <pc:sldMk cId="3554767980" sldId="260"/>
+            <ac:spMk id="14" creationId="{427DBFEB-81BF-4CC3-A411-FBF43D295C56}"/>
+          </ac:spMkLst>
+        </pc:spChg>
+        <pc:picChg chg="add del mod">
+          <ac:chgData name="Renan Xavier Cortes" userId="d6af805853004405" providerId="LiveId" clId="{32CE5F03-9B31-4102-A03B-787EE1528540}" dt="2026-09-30T13:57:56.594" v="917" actId="478"/>
+          <ac:picMkLst>
+            <pc:docMk/>
+            <pc:sldMk cId="3554767980" sldId="260"/>
+            <ac:picMk id="1028" creationId="{EFF64496-3623-6156-1C45-72624FFD6A76}"/>
+          </ac:picMkLst>
+        </pc:picChg>
+        <pc:picChg chg="add mod">
+          <ac:chgData name="Renan Xavier Cortes" userId="d6af805853004405" providerId="LiveId" clId="{32CE5F03-9B31-4102-A03B-787EE1528540}" dt="2026-09-30T13:58:01.937" v="920" actId="1076"/>
+          <ac:picMkLst>
+            <pc:docMk/>
+            <pc:sldMk cId="3554767980" sldId="260"/>
+            <ac:picMk id="1030" creationId="{BAA8555A-A9C9-35F7-8A61-79165A878D49}"/>
+          </ac:picMkLst>
+        </pc:picChg>
+      </pc:sldChg>
+      <pc:sldChg chg="addSp modSp mod">
+        <pc:chgData name="Renan Xavier Cortes" userId="d6af805853004405" providerId="LiveId" clId="{32CE5F03-9B31-4102-A03B-787EE1528540}" dt="2026-10-01T14:54:51.567" v="2562" actId="1076"/>
+        <pc:sldMkLst>
+          <pc:docMk/>
+          <pc:sldMk cId="3705900010" sldId="261"/>
+        </pc:sldMkLst>
+        <pc:spChg chg="add">
+          <ac:chgData name="Renan Xavier Cortes" userId="d6af805853004405" providerId="LiveId" clId="{32CE5F03-9B31-4102-A03B-787EE1528540}" dt="2026-09-30T19:08:49.415" v="2535"/>
+          <ac:spMkLst>
+            <pc:docMk/>
+            <pc:sldMk cId="3705900010" sldId="261"/>
+            <ac:spMk id="4" creationId="{26CF9A97-1C8F-3603-527C-B47CCD37E1EF}"/>
+          </ac:spMkLst>
+        </pc:spChg>
+        <pc:spChg chg="mod">
+          <ac:chgData name="Renan Xavier Cortes" userId="d6af805853004405" providerId="LiveId" clId="{32CE5F03-9B31-4102-A03B-787EE1528540}" dt="2026-09-30T19:02:35.833" v="2239" actId="20577"/>
+          <ac:spMkLst>
+            <pc:docMk/>
+            <pc:sldMk cId="3705900010" sldId="261"/>
+            <ac:spMk id="8" creationId="{39AE06C5-34BE-4D68-97C3-4C07702C2DF6}"/>
+          </ac:spMkLst>
+        </pc:spChg>
+        <pc:spChg chg="mod">
+          <ac:chgData name="Renan Xavier Cortes" userId="d6af805853004405" providerId="LiveId" clId="{32CE5F03-9B31-4102-A03B-787EE1528540}" dt="2026-10-01T14:54:51.567" v="2562" actId="1076"/>
+          <ac:spMkLst>
+            <pc:docMk/>
+            <pc:sldMk cId="3705900010" sldId="261"/>
+            <ac:spMk id="14" creationId="{427DBFEB-81BF-4CC3-A411-FBF43D295C56}"/>
+          </ac:spMkLst>
+        </pc:spChg>
+        <pc:picChg chg="add mod">
+          <ac:chgData name="Renan Xavier Cortes" userId="d6af805853004405" providerId="LiveId" clId="{32CE5F03-9B31-4102-A03B-787EE1528540}" dt="2026-09-30T19:09:13.712" v="2543" actId="1076"/>
+          <ac:picMkLst>
+            <pc:docMk/>
+            <pc:sldMk cId="3705900010" sldId="261"/>
+            <ac:picMk id="6" creationId="{794762C9-B5D3-1977-F0FE-A99EEC89CE5D}"/>
+          </ac:picMkLst>
+        </pc:picChg>
+        <pc:picChg chg="add mod">
+          <ac:chgData name="Renan Xavier Cortes" userId="d6af805853004405" providerId="LiveId" clId="{32CE5F03-9B31-4102-A03B-787EE1528540}" dt="2026-09-30T19:09:09.950" v="2541" actId="1076"/>
+          <ac:picMkLst>
+            <pc:docMk/>
+            <pc:sldMk cId="3705900010" sldId="261"/>
+            <ac:picMk id="7170" creationId="{1A22D7E4-EFBD-340A-BBAC-D01BB1295755}"/>
+          </ac:picMkLst>
+        </pc:picChg>
+        <pc:picChg chg="add mod">
+          <ac:chgData name="Renan Xavier Cortes" userId="d6af805853004405" providerId="LiveId" clId="{32CE5F03-9B31-4102-A03B-787EE1528540}" dt="2026-09-30T19:10:25.079" v="2546" actId="1076"/>
+          <ac:picMkLst>
+            <pc:docMk/>
+            <pc:sldMk cId="3705900010" sldId="261"/>
+            <ac:picMk id="7174" creationId="{182F9BF4-F274-8F50-77FB-FC6F00E8397E}"/>
+          </ac:picMkLst>
+        </pc:picChg>
+      </pc:sldChg>
+      <pc:sldChg chg="addSp modSp mod">
+        <pc:chgData name="Renan Xavier Cortes" userId="d6af805853004405" providerId="LiveId" clId="{32CE5F03-9B31-4102-A03B-787EE1528540}" dt="2026-09-30T14:46:07.940" v="1417" actId="1076"/>
+        <pc:sldMkLst>
+          <pc:docMk/>
+          <pc:sldMk cId="1536836101" sldId="262"/>
+        </pc:sldMkLst>
+        <pc:spChg chg="add mod">
+          <ac:chgData name="Renan Xavier Cortes" userId="d6af805853004405" providerId="LiveId" clId="{32CE5F03-9B31-4102-A03B-787EE1528540}" dt="2026-09-30T14:46:03.045" v="1415" actId="403"/>
+          <ac:spMkLst>
+            <pc:docMk/>
+            <pc:sldMk cId="1536836101" sldId="262"/>
+            <ac:spMk id="5" creationId="{E0FCEFC3-016C-BECB-5C9F-C81ABE58A50B}"/>
+          </ac:spMkLst>
+        </pc:spChg>
+        <pc:spChg chg="mod">
+          <ac:chgData name="Renan Xavier Cortes" userId="d6af805853004405" providerId="LiveId" clId="{32CE5F03-9B31-4102-A03B-787EE1528540}" dt="2026-09-30T14:46:07.940" v="1417" actId="1076"/>
+          <ac:spMkLst>
+            <pc:docMk/>
+            <pc:sldMk cId="1536836101" sldId="262"/>
+            <ac:spMk id="14" creationId="{427DBFEB-81BF-4CC3-A411-FBF43D295C56}"/>
+          </ac:spMkLst>
+        </pc:spChg>
+        <pc:picChg chg="add mod">
+          <ac:chgData name="Renan Xavier Cortes" userId="d6af805853004405" providerId="LiveId" clId="{32CE5F03-9B31-4102-A03B-787EE1528540}" dt="2026-09-30T14:17:13.559" v="1259" actId="1076"/>
+          <ac:picMkLst>
+            <pc:docMk/>
+            <pc:sldMk cId="1536836101" sldId="262"/>
+            <ac:picMk id="2050" creationId="{D5753060-8B2D-376B-A341-C1A929AB6692}"/>
+          </ac:picMkLst>
+        </pc:picChg>
+      </pc:sldChg>
+      <pc:sldChg chg="addSp modSp mod">
+        <pc:chgData name="Renan Xavier Cortes" userId="d6af805853004405" providerId="LiveId" clId="{32CE5F03-9B31-4102-A03B-787EE1528540}" dt="2026-09-30T18:57:45.323" v="2169" actId="255"/>
+        <pc:sldMkLst>
+          <pc:docMk/>
+          <pc:sldMk cId="1070033144" sldId="263"/>
+        </pc:sldMkLst>
+        <pc:spChg chg="mod">
+          <ac:chgData name="Renan Xavier Cortes" userId="d6af805853004405" providerId="LiveId" clId="{32CE5F03-9B31-4102-A03B-787EE1528540}" dt="2026-09-30T18:43:50.078" v="2046" actId="1076"/>
+          <ac:spMkLst>
+            <pc:docMk/>
+            <pc:sldMk cId="1070033144" sldId="263"/>
+            <ac:spMk id="8" creationId="{39AE06C5-34BE-4D68-97C3-4C07702C2DF6}"/>
+          </ac:spMkLst>
+        </pc:spChg>
+        <pc:spChg chg="mod">
+          <ac:chgData name="Renan Xavier Cortes" userId="d6af805853004405" providerId="LiveId" clId="{32CE5F03-9B31-4102-A03B-787EE1528540}" dt="2026-09-30T18:57:45.323" v="2169" actId="255"/>
+          <ac:spMkLst>
+            <pc:docMk/>
+            <pc:sldMk cId="1070033144" sldId="263"/>
+            <ac:spMk id="14" creationId="{427DBFEB-81BF-4CC3-A411-FBF43D295C56}"/>
+          </ac:spMkLst>
+        </pc:spChg>
+        <pc:picChg chg="add mod">
+          <ac:chgData name="Renan Xavier Cortes" userId="d6af805853004405" providerId="LiveId" clId="{32CE5F03-9B31-4102-A03B-787EE1528540}" dt="2026-09-30T18:43:53.470" v="2048" actId="14100"/>
+          <ac:picMkLst>
+            <pc:docMk/>
+            <pc:sldMk cId="1070033144" sldId="263"/>
+            <ac:picMk id="6146" creationId="{54608EC3-B8E2-2804-8729-CF81BB847823}"/>
+          </ac:picMkLst>
+        </pc:picChg>
+      </pc:sldChg>
+      <pc:sldChg chg="addSp delSp modSp mod ord">
+        <pc:chgData name="Renan Xavier Cortes" userId="d6af805853004405" providerId="LiveId" clId="{32CE5F03-9B31-4102-A03B-787EE1528540}" dt="2026-09-30T18:19:19.635" v="1857" actId="1076"/>
+        <pc:sldMkLst>
+          <pc:docMk/>
+          <pc:sldMk cId="4218870347" sldId="264"/>
+        </pc:sldMkLst>
+        <pc:spChg chg="add del mod">
+          <ac:chgData name="Renan Xavier Cortes" userId="d6af805853004405" providerId="LiveId" clId="{32CE5F03-9B31-4102-A03B-787EE1528540}" dt="2026-09-30T17:55:06.674" v="1686" actId="478"/>
+          <ac:spMkLst>
+            <pc:docMk/>
+            <pc:sldMk cId="4218870347" sldId="264"/>
+            <ac:spMk id="5" creationId="{7BB93A7C-F866-CC39-8292-7BD5B8DA7A0B}"/>
+          </ac:spMkLst>
+        </pc:spChg>
+        <pc:spChg chg="add mod">
+          <ac:chgData name="Renan Xavier Cortes" userId="d6af805853004405" providerId="LiveId" clId="{32CE5F03-9B31-4102-A03B-787EE1528540}" dt="2026-09-30T17:55:15.430" v="1688" actId="403"/>
+          <ac:spMkLst>
+            <pc:docMk/>
+            <pc:sldMk cId="4218870347" sldId="264"/>
+            <ac:spMk id="9" creationId="{F3D738E0-9802-84AC-D1D0-0F6C3997DA9A}"/>
+          </ac:spMkLst>
+        </pc:spChg>
+        <pc:spChg chg="add mod">
+          <ac:chgData name="Renan Xavier Cortes" userId="d6af805853004405" providerId="LiveId" clId="{32CE5F03-9B31-4102-A03B-787EE1528540}" dt="2026-09-30T17:55:15.430" v="1688" actId="403"/>
+          <ac:spMkLst>
+            <pc:docMk/>
+            <pc:sldMk cId="4218870347" sldId="264"/>
+            <ac:spMk id="10" creationId="{472D680D-5A60-F84E-BF35-612417316049}"/>
+          </ac:spMkLst>
+        </pc:spChg>
+        <pc:spChg chg="add mod">
+          <ac:chgData name="Renan Xavier Cortes" userId="d6af805853004405" providerId="LiveId" clId="{32CE5F03-9B31-4102-A03B-787EE1528540}" dt="2026-09-30T17:54:59.157" v="1685"/>
+          <ac:spMkLst>
+            <pc:docMk/>
+            <pc:sldMk cId="4218870347" sldId="264"/>
+            <ac:spMk id="11" creationId="{463AE348-FF9C-094B-31C9-092F747FF823}"/>
+          </ac:spMkLst>
+        </pc:spChg>
+        <pc:spChg chg="add mod">
+          <ac:chgData name="Renan Xavier Cortes" userId="d6af805853004405" providerId="LiveId" clId="{32CE5F03-9B31-4102-A03B-787EE1528540}" dt="2026-09-30T18:19:19.635" v="1857" actId="1076"/>
+          <ac:spMkLst>
+            <pc:docMk/>
+            <pc:sldMk cId="4218870347" sldId="264"/>
+            <ac:spMk id="12" creationId="{E8C7AD1B-2FCE-2932-CAB2-FFF8012D7F25}"/>
+          </ac:spMkLst>
+        </pc:spChg>
+        <pc:spChg chg="add mod">
+          <ac:chgData name="Renan Xavier Cortes" userId="d6af805853004405" providerId="LiveId" clId="{32CE5F03-9B31-4102-A03B-787EE1528540}" dt="2026-09-30T17:55:10.744" v="1687" actId="1076"/>
+          <ac:spMkLst>
+            <pc:docMk/>
+            <pc:sldMk cId="4218870347" sldId="264"/>
+            <ac:spMk id="13" creationId="{188B4642-779A-5D9F-A48A-05401DD39358}"/>
+          </ac:spMkLst>
+        </pc:spChg>
+        <pc:spChg chg="mod">
+          <ac:chgData name="Renan Xavier Cortes" userId="d6af805853004405" providerId="LiveId" clId="{32CE5F03-9B31-4102-A03B-787EE1528540}" dt="2026-09-30T17:54:00.655" v="1682" actId="20577"/>
+          <ac:spMkLst>
+            <pc:docMk/>
+            <pc:sldMk cId="4218870347" sldId="264"/>
+            <ac:spMk id="14" creationId="{427DBFEB-81BF-4CC3-A411-FBF43D295C56}"/>
+          </ac:spMkLst>
+        </pc:spChg>
+        <pc:graphicFrameChg chg="add del mod">
+          <ac:chgData name="Renan Xavier Cortes" userId="d6af805853004405" providerId="LiveId" clId="{32CE5F03-9B31-4102-A03B-787EE1528540}" dt="2026-09-30T17:54:58.285" v="1684" actId="478"/>
+          <ac:graphicFrameMkLst>
+            <pc:docMk/>
+            <pc:sldMk cId="4218870347" sldId="264"/>
+            <ac:graphicFrameMk id="4" creationId="{459144C7-4703-52CE-DB4F-17FF275B5461}"/>
+          </ac:graphicFrameMkLst>
+        </pc:graphicFrameChg>
+        <pc:graphicFrameChg chg="add mod">
+          <ac:chgData name="Renan Xavier Cortes" userId="d6af805853004405" providerId="LiveId" clId="{32CE5F03-9B31-4102-A03B-787EE1528540}" dt="2026-09-30T17:54:59.157" v="1685"/>
+          <ac:graphicFrameMkLst>
+            <pc:docMk/>
+            <pc:sldMk cId="4218870347" sldId="264"/>
+            <ac:graphicFrameMk id="6" creationId="{58EE9A4A-D221-8BD1-EC89-B091240DADA6}"/>
+          </ac:graphicFrameMkLst>
+        </pc:graphicFrameChg>
+      </pc:sldChg>
+      <pc:sldChg chg="del">
+        <pc:chgData name="Renan Xavier Cortes" userId="d6af805853004405" providerId="LiveId" clId="{32CE5F03-9B31-4102-A03B-787EE1528540}" dt="2026-09-30T13:55:26.918" v="828" actId="47"/>
+        <pc:sldMkLst>
+          <pc:docMk/>
+          <pc:sldMk cId="1600642753" sldId="265"/>
+        </pc:sldMkLst>
+      </pc:sldChg>
+      <pc:sldChg chg="addSp modSp mod ord modAnim">
+        <pc:chgData name="Renan Xavier Cortes" userId="d6af805853004405" providerId="LiveId" clId="{32CE5F03-9B31-4102-A03B-787EE1528540}" dt="2026-09-30T18:35:29.770" v="2016"/>
+        <pc:sldMkLst>
+          <pc:docMk/>
+          <pc:sldMk cId="204840894" sldId="267"/>
+        </pc:sldMkLst>
+        <pc:spChg chg="mod">
+          <ac:chgData name="Renan Xavier Cortes" userId="d6af805853004405" providerId="LiveId" clId="{32CE5F03-9B31-4102-A03B-787EE1528540}" dt="2026-09-30T18:32:38.713" v="1913" actId="403"/>
+          <ac:spMkLst>
+            <pc:docMk/>
+            <pc:sldMk cId="204840894" sldId="267"/>
+            <ac:spMk id="4" creationId="{F9B44222-0FEB-DD8A-E65A-F10683C06A0F}"/>
+          </ac:spMkLst>
+        </pc:spChg>
+        <pc:spChg chg="add mod">
+          <ac:chgData name="Renan Xavier Cortes" userId="d6af805853004405" providerId="LiveId" clId="{32CE5F03-9B31-4102-A03B-787EE1528540}" dt="2026-09-30T18:31:23.069" v="1866" actId="1076"/>
+          <ac:spMkLst>
+            <pc:docMk/>
+            <pc:sldMk cId="204840894" sldId="267"/>
+            <ac:spMk id="9" creationId="{A7924BE9-722D-AE8C-355C-9C9926B6843C}"/>
+          </ac:spMkLst>
+        </pc:spChg>
+        <pc:spChg chg="add mod">
+          <ac:chgData name="Renan Xavier Cortes" userId="d6af805853004405" providerId="LiveId" clId="{32CE5F03-9B31-4102-A03B-787EE1528540}" dt="2026-09-30T18:32:45.513" v="1915" actId="1076"/>
+          <ac:spMkLst>
+            <pc:docMk/>
+            <pc:sldMk cId="204840894" sldId="267"/>
+            <ac:spMk id="10" creationId="{3DB70E76-2C85-16FB-C8CC-53EB3AEECE7B}"/>
+          </ac:spMkLst>
+        </pc:spChg>
+        <pc:spChg chg="add mod">
+          <ac:chgData name="Renan Xavier Cortes" userId="d6af805853004405" providerId="LiveId" clId="{32CE5F03-9B31-4102-A03B-787EE1528540}" dt="2026-09-30T18:33:31.583" v="1950" actId="1076"/>
+          <ac:spMkLst>
+            <pc:docMk/>
+            <pc:sldMk cId="204840894" sldId="267"/>
+            <ac:spMk id="11" creationId="{CB184BE6-0BE2-BA18-029A-52DD351FDF0B}"/>
+          </ac:spMkLst>
+        </pc:spChg>
+        <pc:spChg chg="add mod">
+          <ac:chgData name="Renan Xavier Cortes" userId="d6af805853004405" providerId="LiveId" clId="{32CE5F03-9B31-4102-A03B-787EE1528540}" dt="2026-09-30T18:34:11.379" v="1981" actId="1076"/>
+          <ac:spMkLst>
+            <pc:docMk/>
+            <pc:sldMk cId="204840894" sldId="267"/>
+            <ac:spMk id="12" creationId="{2393E99D-8654-6736-563B-90241C78B105}"/>
+          </ac:spMkLst>
+        </pc:spChg>
+        <pc:spChg chg="add mod">
+          <ac:chgData name="Renan Xavier Cortes" userId="d6af805853004405" providerId="LiveId" clId="{32CE5F03-9B31-4102-A03B-787EE1528540}" dt="2026-09-30T18:34:08.750" v="1980" actId="1076"/>
+          <ac:spMkLst>
+            <pc:docMk/>
+            <pc:sldMk cId="204840894" sldId="267"/>
+            <ac:spMk id="13" creationId="{36618367-6AF6-11AD-D1D8-E58D6B826BC7}"/>
+          </ac:spMkLst>
+        </pc:spChg>
+        <pc:spChg chg="add mod">
+          <ac:chgData name="Renan Xavier Cortes" userId="d6af805853004405" providerId="LiveId" clId="{32CE5F03-9B31-4102-A03B-787EE1528540}" dt="2026-09-30T18:33:35.489" v="1952" actId="1076"/>
+          <ac:spMkLst>
+            <pc:docMk/>
+            <pc:sldMk cId="204840894" sldId="267"/>
+            <ac:spMk id="14" creationId="{8D019ECB-738C-DA5C-6576-C6F980D41762}"/>
+          </ac:spMkLst>
+        </pc:spChg>
+        <pc:spChg chg="add mod">
+          <ac:chgData name="Renan Xavier Cortes" userId="d6af805853004405" providerId="LiveId" clId="{32CE5F03-9B31-4102-A03B-787EE1528540}" dt="2026-09-30T18:35:13.497" v="2015" actId="1076"/>
+          <ac:spMkLst>
+            <pc:docMk/>
+            <pc:sldMk cId="204840894" sldId="267"/>
+            <ac:spMk id="15" creationId="{574D6D9C-D93C-E743-92A2-746B8DEBF90F}"/>
+          </ac:spMkLst>
+        </pc:spChg>
+        <pc:spChg chg="add mod">
+          <ac:chgData name="Renan Xavier Cortes" userId="d6af805853004405" providerId="LiveId" clId="{32CE5F03-9B31-4102-A03B-787EE1528540}" dt="2026-09-30T18:34:33.281" v="1995" actId="1076"/>
+          <ac:spMkLst>
+            <pc:docMk/>
+            <pc:sldMk cId="204840894" sldId="267"/>
+            <ac:spMk id="16" creationId="{48E74E98-E9A5-2B69-D05B-BE0099A83A98}"/>
+          </ac:spMkLst>
+        </pc:spChg>
+        <pc:spChg chg="add mod">
+          <ac:chgData name="Renan Xavier Cortes" userId="d6af805853004405" providerId="LiveId" clId="{32CE5F03-9B31-4102-A03B-787EE1528540}" dt="2026-09-30T18:34:52.895" v="2000" actId="1076"/>
+          <ac:spMkLst>
+            <pc:docMk/>
+            <pc:sldMk cId="204840894" sldId="267"/>
+            <ac:spMk id="17" creationId="{FACE062B-6F3D-8D21-21CB-ECA3E8074E2F}"/>
+          </ac:spMkLst>
+        </pc:spChg>
+        <pc:spChg chg="add mod">
+          <ac:chgData name="Renan Xavier Cortes" userId="d6af805853004405" providerId="LiveId" clId="{32CE5F03-9B31-4102-A03B-787EE1528540}" dt="2026-09-30T18:35:09.419" v="2014" actId="1076"/>
+          <ac:spMkLst>
+            <pc:docMk/>
+            <pc:sldMk cId="204840894" sldId="267"/>
+            <ac:spMk id="18" creationId="{F1F8C814-56E9-CAB5-BF4F-0B98EEFB341E}"/>
+          </ac:spMkLst>
+        </pc:spChg>
+        <pc:picChg chg="add mod">
+          <ac:chgData name="Renan Xavier Cortes" userId="d6af805853004405" providerId="LiveId" clId="{32CE5F03-9B31-4102-A03B-787EE1528540}" dt="2026-09-30T18:33:46.611" v="1965" actId="1076"/>
+          <ac:picMkLst>
+            <pc:docMk/>
+            <pc:sldMk cId="204840894" sldId="267"/>
+            <ac:picMk id="6" creationId="{A9B172CF-DDA4-9000-FC49-49E50601E3A1}"/>
+          </ac:picMkLst>
+        </pc:picChg>
+      </pc:sldChg>
+      <pc:sldChg chg="del">
+        <pc:chgData name="Renan Xavier Cortes" userId="d6af805853004405" providerId="LiveId" clId="{32CE5F03-9B31-4102-A03B-787EE1528540}" dt="2026-09-29T18:53:06.902" v="89" actId="47"/>
+        <pc:sldMkLst>
+          <pc:docMk/>
+          <pc:sldMk cId="1465096313" sldId="268"/>
+        </pc:sldMkLst>
+      </pc:sldChg>
+      <pc:sldChg chg="addSp delSp modSp add mod delAnim modAnim">
+        <pc:chgData name="Renan Xavier Cortes" userId="d6af805853004405" providerId="LiveId" clId="{32CE5F03-9B31-4102-A03B-787EE1528540}" dt="2026-09-29T18:45:51.497" v="87" actId="1076"/>
+        <pc:sldMkLst>
+          <pc:docMk/>
+          <pc:sldMk cId="1268954086" sldId="270"/>
+        </pc:sldMkLst>
+        <pc:spChg chg="del">
+          <ac:chgData name="Renan Xavier Cortes" userId="d6af805853004405" providerId="LiveId" clId="{32CE5F03-9B31-4102-A03B-787EE1528540}" dt="2026-09-29T18:44:29.944" v="7" actId="478"/>
+          <ac:spMkLst>
+            <pc:docMk/>
+            <pc:sldMk cId="1268954086" sldId="270"/>
+            <ac:spMk id="9" creationId="{4ADC85D4-4D6F-B41F-8D19-0C37EEA6532F}"/>
+          </ac:spMkLst>
+        </pc:spChg>
+        <pc:spChg chg="add mod">
+          <ac:chgData name="Renan Xavier Cortes" userId="d6af805853004405" providerId="LiveId" clId="{32CE5F03-9B31-4102-A03B-787EE1528540}" dt="2026-09-29T18:45:51.497" v="87" actId="1076"/>
+          <ac:spMkLst>
+            <pc:docMk/>
+            <pc:sldMk cId="1268954086" sldId="270"/>
+            <ac:spMk id="10" creationId="{439966E0-F76D-F319-6141-19CB38DC8D8B}"/>
+          </ac:spMkLst>
+        </pc:spChg>
+        <pc:spChg chg="del">
+          <ac:chgData name="Renan Xavier Cortes" userId="d6af805853004405" providerId="LiveId" clId="{32CE5F03-9B31-4102-A03B-787EE1528540}" dt="2026-09-29T18:44:29.348" v="6" actId="478"/>
+          <ac:spMkLst>
+            <pc:docMk/>
+            <pc:sldMk cId="1268954086" sldId="270"/>
+            <ac:spMk id="11" creationId="{2618659E-1058-1132-89D4-6B86F32FC853}"/>
+          </ac:spMkLst>
+        </pc:spChg>
+        <pc:spChg chg="del">
+          <ac:chgData name="Renan Xavier Cortes" userId="d6af805853004405" providerId="LiveId" clId="{32CE5F03-9B31-4102-A03B-787EE1528540}" dt="2026-09-29T18:44:27.800" v="5" actId="478"/>
+          <ac:spMkLst>
+            <pc:docMk/>
+            <pc:sldMk cId="1268954086" sldId="270"/>
+            <ac:spMk id="12" creationId="{0A11E838-7A28-D1BE-5FDC-461C62B8169E}"/>
+          </ac:spMkLst>
+        </pc:spChg>
+        <pc:spChg chg="del">
+          <ac:chgData name="Renan Xavier Cortes" userId="d6af805853004405" providerId="LiveId" clId="{32CE5F03-9B31-4102-A03B-787EE1528540}" dt="2026-09-29T18:44:26.959" v="4" actId="478"/>
+          <ac:spMkLst>
+            <pc:docMk/>
+            <pc:sldMk cId="1268954086" sldId="270"/>
+            <ac:spMk id="13" creationId="{D1F1D044-C509-E859-2F17-4F37728104EB}"/>
+          </ac:spMkLst>
+        </pc:spChg>
+        <pc:spChg chg="add mod">
+          <ac:chgData name="Renan Xavier Cortes" userId="d6af805853004405" providerId="LiveId" clId="{32CE5F03-9B31-4102-A03B-787EE1528540}" dt="2026-09-29T18:45:51.497" v="87" actId="1076"/>
+          <ac:spMkLst>
+            <pc:docMk/>
+            <pc:sldMk cId="1268954086" sldId="270"/>
+            <ac:spMk id="14" creationId="{09C2AF41-9EBC-A93B-F400-326DED611B2C}"/>
+          </ac:spMkLst>
+        </pc:spChg>
+        <pc:picChg chg="del">
+          <ac:chgData name="Renan Xavier Cortes" userId="d6af805853004405" providerId="LiveId" clId="{32CE5F03-9B31-4102-A03B-787EE1528540}" dt="2026-09-29T18:44:25.537" v="3" actId="478"/>
+          <ac:picMkLst>
+            <pc:docMk/>
+            <pc:sldMk cId="1268954086" sldId="270"/>
+            <ac:picMk id="5" creationId="{4318DFD3-3634-EC8F-4CA2-B0EB8093C36F}"/>
+          </ac:picMkLst>
+        </pc:picChg>
+        <pc:picChg chg="add mod">
+          <ac:chgData name="Renan Xavier Cortes" userId="d6af805853004405" providerId="LiveId" clId="{32CE5F03-9B31-4102-A03B-787EE1528540}" dt="2026-09-29T18:44:36.329" v="11" actId="1076"/>
+          <ac:picMkLst>
+            <pc:docMk/>
+            <pc:sldMk cId="1268954086" sldId="270"/>
+            <ac:picMk id="6" creationId="{C7CB915E-012D-A5FC-3321-870B91EF401C}"/>
+          </ac:picMkLst>
+        </pc:picChg>
+      </pc:sldChg>
+      <pc:sldChg chg="addSp delSp modSp add mod delAnim modAnim">
+        <pc:chgData name="Renan Xavier Cortes" userId="d6af805853004405" providerId="LiveId" clId="{32CE5F03-9B31-4102-A03B-787EE1528540}" dt="2026-09-30T13:53:37.307" v="805" actId="20577"/>
+        <pc:sldMkLst>
+          <pc:docMk/>
+          <pc:sldMk cId="3832149468" sldId="271"/>
+        </pc:sldMkLst>
+        <pc:spChg chg="del">
+          <ac:chgData name="Renan Xavier Cortes" userId="d6af805853004405" providerId="LiveId" clId="{32CE5F03-9B31-4102-A03B-787EE1528540}" dt="2026-09-29T18:59:53.562" v="201" actId="478"/>
+          <ac:spMkLst>
+            <pc:docMk/>
+            <pc:sldMk cId="3832149468" sldId="271"/>
+            <ac:spMk id="9" creationId="{4ADC85D4-4D6F-B41F-8D19-0C37EEA6532F}"/>
+          </ac:spMkLst>
+        </pc:spChg>
+        <pc:spChg chg="del">
+          <ac:chgData name="Renan Xavier Cortes" userId="d6af805853004405" providerId="LiveId" clId="{32CE5F03-9B31-4102-A03B-787EE1528540}" dt="2026-09-29T18:59:48.511" v="197" actId="478"/>
+          <ac:spMkLst>
+            <pc:docMk/>
+            <pc:sldMk cId="3832149468" sldId="271"/>
+            <ac:spMk id="11" creationId="{2618659E-1058-1132-89D4-6B86F32FC853}"/>
+          </ac:spMkLst>
+        </pc:spChg>
+        <pc:spChg chg="del">
+          <ac:chgData name="Renan Xavier Cortes" userId="d6af805853004405" providerId="LiveId" clId="{32CE5F03-9B31-4102-A03B-787EE1528540}" dt="2026-09-29T18:59:50.995" v="199" actId="478"/>
+          <ac:spMkLst>
+            <pc:docMk/>
+            <pc:sldMk cId="3832149468" sldId="271"/>
+            <ac:spMk id="12" creationId="{0A11E838-7A28-D1BE-5FDC-461C62B8169E}"/>
+          </ac:spMkLst>
+        </pc:spChg>
+        <pc:spChg chg="del">
+          <ac:chgData name="Renan Xavier Cortes" userId="d6af805853004405" providerId="LiveId" clId="{32CE5F03-9B31-4102-A03B-787EE1528540}" dt="2026-09-29T18:59:49.889" v="198" actId="478"/>
+          <ac:spMkLst>
+            <pc:docMk/>
+            <pc:sldMk cId="3832149468" sldId="271"/>
+            <ac:spMk id="13" creationId="{D1F1D044-C509-E859-2F17-4F37728104EB}"/>
+          </ac:spMkLst>
+        </pc:spChg>
+        <pc:spChg chg="add mod">
+          <ac:chgData name="Renan Xavier Cortes" userId="d6af805853004405" providerId="LiveId" clId="{32CE5F03-9B31-4102-A03B-787EE1528540}" dt="2026-09-30T13:51:57.320" v="780" actId="1076"/>
+          <ac:spMkLst>
+            <pc:docMk/>
+            <pc:sldMk cId="3832149468" sldId="271"/>
+            <ac:spMk id="14" creationId="{2D353D8D-8D89-B5D0-0B0D-DBD360319F04}"/>
+          </ac:spMkLst>
+        </pc:spChg>
+        <pc:spChg chg="add mod">
+          <ac:chgData name="Renan Xavier Cortes" userId="d6af805853004405" providerId="LiveId" clId="{32CE5F03-9B31-4102-A03B-787EE1528540}" dt="2026-09-30T13:51:54.199" v="779" actId="1076"/>
+          <ac:spMkLst>
+            <pc:docMk/>
+            <pc:sldMk cId="3832149468" sldId="271"/>
+            <ac:spMk id="16" creationId="{E59EF19D-2CB3-BEA7-2B76-4879D130E732}"/>
+          </ac:spMkLst>
+        </pc:spChg>
+        <pc:spChg chg="add mod">
+          <ac:chgData name="Renan Xavier Cortes" userId="d6af805853004405" providerId="LiveId" clId="{32CE5F03-9B31-4102-A03B-787EE1528540}" dt="2026-09-30T13:53:37.307" v="805" actId="20577"/>
+          <ac:spMkLst>
+            <pc:docMk/>
+            <pc:sldMk cId="3832149468" sldId="271"/>
+            <ac:spMk id="19" creationId="{F649D27E-B466-1E84-67F4-B04DF87AFE85}"/>
+          </ac:spMkLst>
+        </pc:spChg>
+        <pc:picChg chg="del">
+          <ac:chgData name="Renan Xavier Cortes" userId="d6af805853004405" providerId="LiveId" clId="{32CE5F03-9B31-4102-A03B-787EE1528540}" dt="2026-09-30T13:51:50.239" v="777" actId="478"/>
+          <ac:picMkLst>
+            <pc:docMk/>
+            <pc:sldMk cId="3832149468" sldId="271"/>
+            <ac:picMk id="2" creationId="{567C8E3D-C535-EC50-849C-270CEB4B8A04}"/>
+          </ac:picMkLst>
+        </pc:picChg>
+        <pc:picChg chg="del">
+          <ac:chgData name="Renan Xavier Cortes" userId="d6af805853004405" providerId="LiveId" clId="{32CE5F03-9B31-4102-A03B-787EE1528540}" dt="2026-09-30T13:51:47.039" v="775" actId="478"/>
+          <ac:picMkLst>
+            <pc:docMk/>
+            <pc:sldMk cId="3832149468" sldId="271"/>
+            <ac:picMk id="3" creationId="{C9663204-9A6C-C5D7-7C9B-AAF5653911D6}"/>
+          </ac:picMkLst>
+        </pc:picChg>
+        <pc:picChg chg="del">
+          <ac:chgData name="Renan Xavier Cortes" userId="d6af805853004405" providerId="LiveId" clId="{32CE5F03-9B31-4102-A03B-787EE1528540}" dt="2026-09-29T18:59:51.795" v="200" actId="478"/>
+          <ac:picMkLst>
+            <pc:docMk/>
+            <pc:sldMk cId="3832149468" sldId="271"/>
+            <ac:picMk id="5" creationId="{4318DFD3-3634-EC8F-4CA2-B0EB8093C36F}"/>
+          </ac:picMkLst>
+        </pc:picChg>
+        <pc:picChg chg="add mod">
+          <ac:chgData name="Renan Xavier Cortes" userId="d6af805853004405" providerId="LiveId" clId="{32CE5F03-9B31-4102-A03B-787EE1528540}" dt="2026-09-30T13:50:30.558" v="647" actId="1076"/>
+          <ac:picMkLst>
+            <pc:docMk/>
+            <pc:sldMk cId="3832149468" sldId="271"/>
+            <ac:picMk id="6" creationId="{9FA44AA4-873C-9384-BBCC-5F18798D8247}"/>
+          </ac:picMkLst>
+        </pc:picChg>
+        <pc:picChg chg="add mod">
+          <ac:chgData name="Renan Xavier Cortes" userId="d6af805853004405" providerId="LiveId" clId="{32CE5F03-9B31-4102-A03B-787EE1528540}" dt="2026-09-30T13:52:01.367" v="782" actId="1076"/>
+          <ac:picMkLst>
+            <pc:docMk/>
+            <pc:sldMk cId="3832149468" sldId="271"/>
+            <ac:picMk id="18" creationId="{E7C5C5E8-BDC7-6A56-284B-4BA81B6ED2B4}"/>
+          </ac:picMkLst>
+        </pc:picChg>
+      </pc:sldChg>
+      <pc:sldChg chg="add del">
+        <pc:chgData name="Renan Xavier Cortes" userId="d6af805853004405" providerId="LiveId" clId="{32CE5F03-9B31-4102-A03B-787EE1528540}" dt="2026-09-30T18:31:57.931" v="1868" actId="47"/>
+        <pc:sldMkLst>
+          <pc:docMk/>
+          <pc:sldMk cId="1290076" sldId="272"/>
+        </pc:sldMkLst>
+      </pc:sldChg>
+      <pc:sldChg chg="add">
+        <pc:chgData name="Renan Xavier Cortes" userId="d6af805853004405" providerId="LiveId" clId="{32CE5F03-9B31-4102-A03B-787EE1528540}" dt="2026-09-29T18:52:42.033" v="88"/>
+        <pc:sldMkLst>
+          <pc:docMk/>
+          <pc:sldMk cId="587472357" sldId="273"/>
+        </pc:sldMkLst>
+      </pc:sldChg>
+      <pc:sldChg chg="modSp add mod">
+        <pc:chgData name="Renan Xavier Cortes" userId="d6af805853004405" providerId="LiveId" clId="{32CE5F03-9B31-4102-A03B-787EE1528540}" dt="2026-09-30T19:14:08.306" v="2548" actId="20577"/>
+        <pc:sldMkLst>
+          <pc:docMk/>
+          <pc:sldMk cId="2697758197" sldId="274"/>
+        </pc:sldMkLst>
+        <pc:spChg chg="mod">
+          <ac:chgData name="Renan Xavier Cortes" userId="d6af805853004405" providerId="LiveId" clId="{32CE5F03-9B31-4102-A03B-787EE1528540}" dt="2026-09-30T19:14:08.306" v="2548" actId="20577"/>
+          <ac:spMkLst>
+            <pc:docMk/>
+            <pc:sldMk cId="2697758197" sldId="274"/>
+            <ac:spMk id="4" creationId="{F9B44222-0FEB-DD8A-E65A-F10683C06A0F}"/>
+          </ac:spMkLst>
+        </pc:spChg>
+      </pc:sldChg>
+      <pc:sldChg chg="addSp delSp modSp add mod ord modAnim">
+        <pc:chgData name="Renan Xavier Cortes" userId="d6af805853004405" providerId="LiveId" clId="{32CE5F03-9B31-4102-A03B-787EE1528540}" dt="2026-09-30T13:15:15.035" v="536" actId="20577"/>
+        <pc:sldMkLst>
+          <pc:docMk/>
+          <pc:sldMk cId="2071889659" sldId="275"/>
+        </pc:sldMkLst>
+        <pc:spChg chg="mod">
+          <ac:chgData name="Renan Xavier Cortes" userId="d6af805853004405" providerId="LiveId" clId="{32CE5F03-9B31-4102-A03B-787EE1528540}" dt="2026-09-29T19:00:23.343" v="313" actId="20577"/>
+          <ac:spMkLst>
+            <pc:docMk/>
+            <pc:sldMk cId="2071889659" sldId="275"/>
+            <ac:spMk id="4" creationId="{F9B44222-0FEB-DD8A-E65A-F10683C06A0F}"/>
+          </ac:spMkLst>
+        </pc:spChg>
+        <pc:spChg chg="add del">
+          <ac:chgData name="Renan Xavier Cortes" userId="d6af805853004405" providerId="LiveId" clId="{32CE5F03-9B31-4102-A03B-787EE1528540}" dt="2026-09-29T19:02:05.280" v="333" actId="11529"/>
+          <ac:spMkLst>
+            <pc:docMk/>
+            <pc:sldMk cId="2071889659" sldId="275"/>
+            <ac:spMk id="11" creationId="{8BEE410F-77B2-4534-4D33-ACC5D248E82D}"/>
+          </ac:spMkLst>
+        </pc:spChg>
+        <pc:spChg chg="add mod">
+          <ac:chgData name="Renan Xavier Cortes" userId="d6af805853004405" providerId="LiveId" clId="{32CE5F03-9B31-4102-A03B-787EE1528540}" dt="2026-09-29T19:02:32.496" v="350" actId="692"/>
+          <ac:spMkLst>
+            <pc:docMk/>
+            <pc:sldMk cId="2071889659" sldId="275"/>
+            <ac:spMk id="12" creationId="{0B40F988-AD4C-F7F7-CE31-F2CDDF82E91A}"/>
+          </ac:spMkLst>
+        </pc:spChg>
+        <pc:spChg chg="add mod">
+          <ac:chgData name="Renan Xavier Cortes" userId="d6af805853004405" providerId="LiveId" clId="{32CE5F03-9B31-4102-A03B-787EE1528540}" dt="2026-09-29T19:02:49.280" v="354" actId="14100"/>
+          <ac:spMkLst>
+            <pc:docMk/>
+            <pc:sldMk cId="2071889659" sldId="275"/>
+            <ac:spMk id="13" creationId="{D34651EC-928C-45A9-FB4A-89294682FE03}"/>
+          </ac:spMkLst>
+        </pc:spChg>
+        <pc:spChg chg="add mod">
+          <ac:chgData name="Renan Xavier Cortes" userId="d6af805853004405" providerId="LiveId" clId="{32CE5F03-9B31-4102-A03B-787EE1528540}" dt="2026-09-30T13:15:15.035" v="536" actId="20577"/>
+          <ac:spMkLst>
+            <pc:docMk/>
+            <pc:sldMk cId="2071889659" sldId="275"/>
+            <ac:spMk id="16" creationId="{B5C85418-58C3-73C3-56E1-05082A43A7EA}"/>
+          </ac:spMkLst>
+        </pc:spChg>
+        <pc:picChg chg="add mod">
+          <ac:chgData name="Renan Xavier Cortes" userId="d6af805853004405" providerId="LiveId" clId="{32CE5F03-9B31-4102-A03B-787EE1528540}" dt="2026-09-29T19:01:30.373" v="321" actId="1076"/>
+          <ac:picMkLst>
+            <pc:docMk/>
+            <pc:sldMk cId="2071889659" sldId="275"/>
+            <ac:picMk id="6" creationId="{E0B70768-61C8-F85A-E614-A9F14CEAD950}"/>
+          </ac:picMkLst>
+        </pc:picChg>
+        <pc:picChg chg="add del mod">
+          <ac:chgData name="Renan Xavier Cortes" userId="d6af805853004405" providerId="LiveId" clId="{32CE5F03-9B31-4102-A03B-787EE1528540}" dt="2026-09-29T19:03:10.356" v="355" actId="478"/>
+          <ac:picMkLst>
+            <pc:docMk/>
+            <pc:sldMk cId="2071889659" sldId="275"/>
+            <ac:picMk id="10" creationId="{918C452C-A393-6CAA-7A87-EA606435045A}"/>
+          </ac:picMkLst>
+        </pc:picChg>
+        <pc:picChg chg="add mod">
+          <ac:chgData name="Renan Xavier Cortes" userId="d6af805853004405" providerId="LiveId" clId="{32CE5F03-9B31-4102-A03B-787EE1528540}" dt="2026-09-29T19:03:40.045" v="359" actId="1076"/>
+          <ac:picMkLst>
+            <pc:docMk/>
+            <pc:sldMk cId="2071889659" sldId="275"/>
+            <ac:picMk id="15" creationId="{AD23F083-ACAE-F3BE-99C5-AC59D9D5284D}"/>
+          </ac:picMkLst>
+        </pc:picChg>
+      </pc:sldChg>
+      <pc:sldChg chg="addSp delSp modSp add mod">
+        <pc:chgData name="Renan Xavier Cortes" userId="d6af805853004405" providerId="LiveId" clId="{32CE5F03-9B31-4102-A03B-787EE1528540}" dt="2026-09-30T14:53:19.890" v="1625" actId="20577"/>
+        <pc:sldMkLst>
+          <pc:docMk/>
+          <pc:sldMk cId="2069633465" sldId="276"/>
+        </pc:sldMkLst>
+        <pc:spChg chg="del">
+          <ac:chgData name="Renan Xavier Cortes" userId="d6af805853004405" providerId="LiveId" clId="{32CE5F03-9B31-4102-A03B-787EE1528540}" dt="2026-09-30T14:50:33.587" v="1421" actId="478"/>
+          <ac:spMkLst>
+            <pc:docMk/>
+            <pc:sldMk cId="2069633465" sldId="276"/>
+            <ac:spMk id="5" creationId="{E0FCEFC3-016C-BECB-5C9F-C81ABE58A50B}"/>
+          </ac:spMkLst>
+        </pc:spChg>
+        <pc:spChg chg="add mod">
+          <ac:chgData name="Renan Xavier Cortes" userId="d6af805853004405" providerId="LiveId" clId="{32CE5F03-9B31-4102-A03B-787EE1528540}" dt="2026-09-30T14:53:19.890" v="1625" actId="20577"/>
+          <ac:spMkLst>
+            <pc:docMk/>
+            <pc:sldMk cId="2069633465" sldId="276"/>
+            <ac:spMk id="9" creationId="{4D79014A-3A45-CFD7-AE17-E00E6FC5D783}"/>
+          </ac:spMkLst>
+        </pc:spChg>
+        <pc:spChg chg="del">
+          <ac:chgData name="Renan Xavier Cortes" userId="d6af805853004405" providerId="LiveId" clId="{32CE5F03-9B31-4102-A03B-787EE1528540}" dt="2026-09-30T14:50:31.662" v="1420" actId="478"/>
+          <ac:spMkLst>
+            <pc:docMk/>
+            <pc:sldMk cId="2069633465" sldId="276"/>
+            <ac:spMk id="14" creationId="{427DBFEB-81BF-4CC3-A411-FBF43D295C56}"/>
+          </ac:spMkLst>
+        </pc:spChg>
+        <pc:picChg chg="add mod">
+          <ac:chgData name="Renan Xavier Cortes" userId="d6af805853004405" providerId="LiveId" clId="{32CE5F03-9B31-4102-A03B-787EE1528540}" dt="2026-09-30T14:51:59.113" v="1580" actId="1076"/>
+          <ac:picMkLst>
+            <pc:docMk/>
+            <pc:sldMk cId="2069633465" sldId="276"/>
+            <ac:picMk id="6" creationId="{64DDF3AB-FF5B-BF09-85E6-30B0D1CEF6F4}"/>
+          </ac:picMkLst>
+        </pc:picChg>
+        <pc:picChg chg="del">
+          <ac:chgData name="Renan Xavier Cortes" userId="d6af805853004405" providerId="LiveId" clId="{32CE5F03-9B31-4102-A03B-787EE1528540}" dt="2026-09-30T14:50:30.343" v="1419" actId="478"/>
+          <ac:picMkLst>
+            <pc:docMk/>
+            <pc:sldMk cId="2069633465" sldId="276"/>
+            <ac:picMk id="2050" creationId="{D5753060-8B2D-376B-A341-C1A929AB6692}"/>
+          </ac:picMkLst>
+        </pc:picChg>
+      </pc:sldChg>
+      <pc:sldChg chg="addSp delSp modSp add mod">
+        <pc:chgData name="Renan Xavier Cortes" userId="d6af805853004405" providerId="LiveId" clId="{32CE5F03-9B31-4102-A03B-787EE1528540}" dt="2026-09-30T14:59:07.206" v="1677" actId="1076"/>
+        <pc:sldMkLst>
+          <pc:docMk/>
+          <pc:sldMk cId="1019914244" sldId="277"/>
+        </pc:sldMkLst>
+        <pc:spChg chg="mod">
+          <ac:chgData name="Renan Xavier Cortes" userId="d6af805853004405" providerId="LiveId" clId="{32CE5F03-9B31-4102-A03B-787EE1528540}" dt="2026-09-30T14:55:27.039" v="1664" actId="20577"/>
+          <ac:spMkLst>
+            <pc:docMk/>
+            <pc:sldMk cId="1019914244" sldId="277"/>
+            <ac:spMk id="9" creationId="{4D79014A-3A45-CFD7-AE17-E00E6FC5D783}"/>
+          </ac:spMkLst>
+        </pc:spChg>
+        <pc:picChg chg="del">
+          <ac:chgData name="Renan Xavier Cortes" userId="d6af805853004405" providerId="LiveId" clId="{32CE5F03-9B31-4102-A03B-787EE1528540}" dt="2026-09-30T14:56:11.182" v="1669" actId="478"/>
+          <ac:picMkLst>
+            <pc:docMk/>
+            <pc:sldMk cId="1019914244" sldId="277"/>
+            <ac:picMk id="2" creationId="{567C8E3D-C535-EC50-849C-270CEB4B8A04}"/>
+          </ac:picMkLst>
+        </pc:picChg>
+        <pc:picChg chg="del">
+          <ac:chgData name="Renan Xavier Cortes" userId="d6af805853004405" providerId="LiveId" clId="{32CE5F03-9B31-4102-A03B-787EE1528540}" dt="2026-09-30T14:58:58.389" v="1672" actId="478"/>
+          <ac:picMkLst>
+            <pc:docMk/>
+            <pc:sldMk cId="1019914244" sldId="277"/>
+            <ac:picMk id="3" creationId="{C9663204-9A6C-C5D7-7C9B-AAF5653911D6}"/>
+          </ac:picMkLst>
+        </pc:picChg>
+        <pc:picChg chg="add mod">
+          <ac:chgData name="Renan Xavier Cortes" userId="d6af805853004405" providerId="LiveId" clId="{32CE5F03-9B31-4102-A03B-787EE1528540}" dt="2026-09-30T14:56:13.020" v="1670" actId="1076"/>
+          <ac:picMkLst>
+            <pc:docMk/>
+            <pc:sldMk cId="1019914244" sldId="277"/>
+            <ac:picMk id="5" creationId="{ECE5EC1F-14C5-843E-05EF-98FE5A646D9D}"/>
+          </ac:picMkLst>
+        </pc:picChg>
+        <pc:picChg chg="del">
+          <ac:chgData name="Renan Xavier Cortes" userId="d6af805853004405" providerId="LiveId" clId="{32CE5F03-9B31-4102-A03B-787EE1528540}" dt="2026-09-30T14:56:07.050" v="1665" actId="478"/>
+          <ac:picMkLst>
+            <pc:docMk/>
+            <pc:sldMk cId="1019914244" sldId="277"/>
+            <ac:picMk id="6" creationId="{64DDF3AB-FF5B-BF09-85E6-30B0D1CEF6F4}"/>
+          </ac:picMkLst>
+        </pc:picChg>
+        <pc:picChg chg="add mod">
+          <ac:chgData name="Renan Xavier Cortes" userId="d6af805853004405" providerId="LiveId" clId="{32CE5F03-9B31-4102-A03B-787EE1528540}" dt="2026-09-30T14:59:07.206" v="1677" actId="1076"/>
+          <ac:picMkLst>
+            <pc:docMk/>
+            <pc:sldMk cId="1019914244" sldId="277"/>
+            <ac:picMk id="11" creationId="{7D2F9AF2-3B27-E6C1-5DA5-DAD401A60DEC}"/>
+          </ac:picMkLst>
+        </pc:picChg>
+      </pc:sldChg>
+      <pc:sldChg chg="addSp delSp modSp add mod">
+        <pc:chgData name="Renan Xavier Cortes" userId="d6af805853004405" providerId="LiveId" clId="{32CE5F03-9B31-4102-A03B-787EE1528540}" dt="2026-09-30T18:14:47.213" v="1846" actId="122"/>
+        <pc:sldMkLst>
+          <pc:docMk/>
+          <pc:sldMk cId="1921800444" sldId="278"/>
+        </pc:sldMkLst>
+        <pc:spChg chg="add mod">
+          <ac:chgData name="Renan Xavier Cortes" userId="d6af805853004405" providerId="LiveId" clId="{32CE5F03-9B31-4102-A03B-787EE1528540}" dt="2026-09-30T18:12:49.389" v="1724" actId="1076"/>
+          <ac:spMkLst>
+            <pc:docMk/>
+            <pc:sldMk cId="1921800444" sldId="278"/>
+            <ac:spMk id="5" creationId="{8B10989E-6495-BA93-F912-8AAFEB296936}"/>
+          </ac:spMkLst>
+        </pc:spChg>
+        <pc:spChg chg="del">
+          <ac:chgData name="Renan Xavier Cortes" userId="d6af805853004405" providerId="LiveId" clId="{32CE5F03-9B31-4102-A03B-787EE1528540}" dt="2026-09-30T18:11:28.032" v="1706" actId="478"/>
+          <ac:spMkLst>
+            <pc:docMk/>
+            <pc:sldMk cId="1921800444" sldId="278"/>
+            <ac:spMk id="9" creationId="{F3D738E0-9802-84AC-D1D0-0F6C3997DA9A}"/>
+          </ac:spMkLst>
+        </pc:spChg>
+        <pc:spChg chg="del">
+          <ac:chgData name="Renan Xavier Cortes" userId="d6af805853004405" providerId="LiveId" clId="{32CE5F03-9B31-4102-A03B-787EE1528540}" dt="2026-09-30T18:11:28.882" v="1707" actId="478"/>
+          <ac:spMkLst>
+            <pc:docMk/>
+            <pc:sldMk cId="1921800444" sldId="278"/>
+            <ac:spMk id="10" creationId="{472D680D-5A60-F84E-BF35-612417316049}"/>
+          </ac:spMkLst>
+        </pc:spChg>
+        <pc:spChg chg="del">
+          <ac:chgData name="Renan Xavier Cortes" userId="d6af805853004405" providerId="LiveId" clId="{32CE5F03-9B31-4102-A03B-787EE1528540}" dt="2026-09-30T18:11:29.817" v="1708" actId="478"/>
+          <ac:spMkLst>
+            <pc:docMk/>
+            <pc:sldMk cId="1921800444" sldId="278"/>
+            <ac:spMk id="11" creationId="{463AE348-FF9C-094B-31C9-092F747FF823}"/>
+          </ac:spMkLst>
+        </pc:spChg>
+        <pc:spChg chg="del">
+          <ac:chgData name="Renan Xavier Cortes" userId="d6af805853004405" providerId="LiveId" clId="{32CE5F03-9B31-4102-A03B-787EE1528540}" dt="2026-09-30T18:11:32.786" v="1709" actId="478"/>
+          <ac:spMkLst>
+            <pc:docMk/>
+            <pc:sldMk cId="1921800444" sldId="278"/>
+            <ac:spMk id="12" creationId="{E8C7AD1B-2FCE-2932-CAB2-FFF8012D7F25}"/>
+          </ac:spMkLst>
+        </pc:spChg>
+        <pc:spChg chg="del">
+          <ac:chgData name="Renan Xavier Cortes" userId="d6af805853004405" providerId="LiveId" clId="{32CE5F03-9B31-4102-A03B-787EE1528540}" dt="2026-09-30T18:11:40.294" v="1712" actId="478"/>
+          <ac:spMkLst>
+            <pc:docMk/>
+            <pc:sldMk cId="1921800444" sldId="278"/>
+            <ac:spMk id="13" creationId="{188B4642-779A-5D9F-A48A-05401DD39358}"/>
+          </ac:spMkLst>
+        </pc:spChg>
+        <pc:spChg chg="add mod">
+          <ac:chgData name="Renan Xavier Cortes" userId="d6af805853004405" providerId="LiveId" clId="{32CE5F03-9B31-4102-A03B-787EE1528540}" dt="2026-09-30T18:14:47.213" v="1846" actId="122"/>
+          <ac:spMkLst>
+            <pc:docMk/>
+            <pc:sldMk cId="1921800444" sldId="278"/>
+            <ac:spMk id="15" creationId="{F866C2C7-F83C-0C53-9473-159DD068B21A}"/>
+          </ac:spMkLst>
+        </pc:spChg>
+        <pc:graphicFrameChg chg="del">
+          <ac:chgData name="Renan Xavier Cortes" userId="d6af805853004405" providerId="LiveId" clId="{32CE5F03-9B31-4102-A03B-787EE1528540}" dt="2026-09-30T18:11:26.899" v="1705" actId="478"/>
+          <ac:graphicFrameMkLst>
+            <pc:docMk/>
+            <pc:sldMk cId="1921800444" sldId="278"/>
+            <ac:graphicFrameMk id="6" creationId="{58EE9A4A-D221-8BD1-EC89-B091240DADA6}"/>
+          </ac:graphicFrameMkLst>
+        </pc:graphicFrameChg>
+        <pc:picChg chg="add mod">
+          <ac:chgData name="Renan Xavier Cortes" userId="d6af805853004405" providerId="LiveId" clId="{32CE5F03-9B31-4102-A03B-787EE1528540}" dt="2026-09-30T18:14:17.047" v="1842" actId="1076"/>
+          <ac:picMkLst>
+            <pc:docMk/>
+            <pc:sldMk cId="1921800444" sldId="278"/>
+            <ac:picMk id="3074" creationId="{496D2546-4354-68C6-EAA2-03111C34F4D9}"/>
+          </ac:picMkLst>
+        </pc:picChg>
+      </pc:sldChg>
+    </pc:docChg>
+  </pc:docChgLst>
+  <pc:docChgLst>
+    <pc:chgData name="Renan Xavier Cortes" userId="d6af805853004405" providerId="LiveId" clId="{212BA557-4780-4474-BA67-C155C1354E75}"/>
+    <pc:docChg chg="custSel addSld modSld">
+      <pc:chgData name="Renan Xavier Cortes" userId="d6af805853004405" providerId="LiveId" clId="{212BA557-4780-4474-BA67-C155C1354E75}" dt="2026-01-26T15:01:38.670" v="181" actId="1076"/>
+      <pc:docMkLst>
+        <pc:docMk/>
+      </pc:docMkLst>
+      <pc:sldChg chg="delSp modSp add mod">
+        <pc:chgData name="Renan Xavier Cortes" userId="d6af805853004405" providerId="LiveId" clId="{212BA557-4780-4474-BA67-C155C1354E75}" dt="2026-01-26T15:01:38.670" v="181" actId="1076"/>
+        <pc:sldMkLst>
+          <pc:docMk/>
+          <pc:sldMk cId="1515360493" sldId="288"/>
+        </pc:sldMkLst>
+        <pc:spChg chg="mod">
+          <ac:chgData name="Renan Xavier Cortes" userId="d6af805853004405" providerId="LiveId" clId="{212BA557-4780-4474-BA67-C155C1354E75}" dt="2026-01-26T15:01:38.670" v="181" actId="1076"/>
+          <ac:spMkLst>
+            <pc:docMk/>
+            <pc:sldMk cId="1515360493" sldId="288"/>
+            <ac:spMk id="4" creationId="{4B84190D-BF19-CEFE-E86D-F0B0EBBA7C0B}"/>
+          </ac:spMkLst>
+        </pc:spChg>
+        <pc:spChg chg="mod">
+          <ac:chgData name="Renan Xavier Cortes" userId="d6af805853004405" providerId="LiveId" clId="{212BA557-4780-4474-BA67-C155C1354E75}" dt="2026-01-22T13:30:12.805" v="25" actId="20577"/>
+          <ac:spMkLst>
+            <pc:docMk/>
+            <pc:sldMk cId="1515360493" sldId="288"/>
+            <ac:spMk id="8" creationId="{39AE06C5-34BE-4D68-97C3-4C07702C2DF6}"/>
+          </ac:spMkLst>
+        </pc:spChg>
+        <pc:picChg chg="del">
+          <ac:chgData name="Renan Xavier Cortes" userId="d6af805853004405" providerId="LiveId" clId="{212BA557-4780-4474-BA67-C155C1354E75}" dt="2026-01-22T13:30:15.241" v="26" actId="478"/>
+          <ac:picMkLst>
+            <pc:docMk/>
+            <pc:sldMk cId="1515360493" sldId="288"/>
+            <ac:picMk id="6" creationId="{96B5210F-1605-9FC7-8E4A-D66BA6A8C835}"/>
+          </ac:picMkLst>
+        </pc:picChg>
+      </pc:sldChg>
+    </pc:docChg>
+  </pc:docChgLst>
+  <pc:docChgLst>
     <pc:chgData name="Renan Xavier Cortes" userId="d6af805853004405" providerId="LiveId" clId="{DD4EF9CF-6574-4471-A21D-3BB24D0401B4}"/>
     <pc:docChg chg="undo custSel addSld delSld modSld sldOrd">
       <pc:chgData name="Renan Xavier Cortes" userId="d6af805853004405" providerId="LiveId" clId="{DD4EF9CF-6574-4471-A21D-3BB24D0401B4}" dt="2026-03-03T17:07:11.099" v="1533" actId="108"/>
@@ -1516,2033 +3543,6 @@
             <ac:spMk id="8" creationId="{39AE06C5-34BE-4D68-97C3-4C07702C2DF6}"/>
           </ac:spMkLst>
         </pc:spChg>
-      </pc:sldChg>
-    </pc:docChg>
-  </pc:docChgLst>
-  <pc:docChgLst>
-    <pc:chgData name="Renan Xavier Cortes" userId="d6af805853004405" providerId="LiveId" clId="{6CBA8CAD-390F-4A11-B907-BBB4B6E0B449}"/>
-    <pc:docChg chg="undo custSel addSld delSld modSld">
-      <pc:chgData name="Renan Xavier Cortes" userId="d6af805853004405" providerId="LiveId" clId="{6CBA8CAD-390F-4A11-B907-BBB4B6E0B449}" dt="2026-01-21T21:00:53.358" v="2269"/>
-      <pc:docMkLst>
-        <pc:docMk/>
-      </pc:docMkLst>
-      <pc:sldChg chg="modSp mod modAnim">
-        <pc:chgData name="Renan Xavier Cortes" userId="d6af805853004405" providerId="LiveId" clId="{6CBA8CAD-390F-4A11-B907-BBB4B6E0B449}" dt="2026-01-21T20:32:15.264" v="2075" actId="20577"/>
-        <pc:sldMkLst>
-          <pc:docMk/>
-          <pc:sldMk cId="1859719164" sldId="259"/>
-        </pc:sldMkLst>
-        <pc:spChg chg="mod">
-          <ac:chgData name="Renan Xavier Cortes" userId="d6af805853004405" providerId="LiveId" clId="{6CBA8CAD-390F-4A11-B907-BBB4B6E0B449}" dt="2026-01-21T18:21:08.433" v="1046" actId="1076"/>
-          <ac:spMkLst>
-            <pc:docMk/>
-            <pc:sldMk cId="1859719164" sldId="259"/>
-            <ac:spMk id="8" creationId="{39AE06C5-34BE-4D68-97C3-4C07702C2DF6}"/>
-          </ac:spMkLst>
-        </pc:spChg>
-        <pc:spChg chg="mod">
-          <ac:chgData name="Renan Xavier Cortes" userId="d6af805853004405" providerId="LiveId" clId="{6CBA8CAD-390F-4A11-B907-BBB4B6E0B449}" dt="2026-01-21T20:32:15.264" v="2075" actId="20577"/>
-          <ac:spMkLst>
-            <pc:docMk/>
-            <pc:sldMk cId="1859719164" sldId="259"/>
-            <ac:spMk id="14" creationId="{427DBFEB-81BF-4CC3-A411-FBF43D295C56}"/>
-          </ac:spMkLst>
-        </pc:spChg>
-      </pc:sldChg>
-      <pc:sldChg chg="modSp add mod setBg modAnim">
-        <pc:chgData name="Renan Xavier Cortes" userId="d6af805853004405" providerId="LiveId" clId="{6CBA8CAD-390F-4A11-B907-BBB4B6E0B449}" dt="2026-01-21T18:27:43.477" v="1241"/>
-        <pc:sldMkLst>
-          <pc:docMk/>
-          <pc:sldMk cId="2921823341" sldId="260"/>
-        </pc:sldMkLst>
-        <pc:spChg chg="mod">
-          <ac:chgData name="Renan Xavier Cortes" userId="d6af805853004405" providerId="LiveId" clId="{6CBA8CAD-390F-4A11-B907-BBB4B6E0B449}" dt="2026-01-21T18:21:08.116" v="1045" actId="1076"/>
-          <ac:spMkLst>
-            <pc:docMk/>
-            <pc:sldMk cId="2921823341" sldId="260"/>
-            <ac:spMk id="8" creationId="{39AE06C5-34BE-4D68-97C3-4C07702C2DF6}"/>
-          </ac:spMkLst>
-        </pc:spChg>
-        <pc:spChg chg="mod">
-          <ac:chgData name="Renan Xavier Cortes" userId="d6af805853004405" providerId="LiveId" clId="{6CBA8CAD-390F-4A11-B907-BBB4B6E0B449}" dt="2026-01-21T12:50:23.079" v="123" actId="1076"/>
-          <ac:spMkLst>
-            <pc:docMk/>
-            <pc:sldMk cId="2921823341" sldId="260"/>
-            <ac:spMk id="14" creationId="{427DBFEB-81BF-4CC3-A411-FBF43D295C56}"/>
-          </ac:spMkLst>
-        </pc:spChg>
-      </pc:sldChg>
-      <pc:sldChg chg="modSp add mod modAnim">
-        <pc:chgData name="Renan Xavier Cortes" userId="d6af805853004405" providerId="LiveId" clId="{6CBA8CAD-390F-4A11-B907-BBB4B6E0B449}" dt="2026-01-21T18:27:45.974" v="1242"/>
-        <pc:sldMkLst>
-          <pc:docMk/>
-          <pc:sldMk cId="2121898900" sldId="261"/>
-        </pc:sldMkLst>
-        <pc:spChg chg="mod">
-          <ac:chgData name="Renan Xavier Cortes" userId="d6af805853004405" providerId="LiveId" clId="{6CBA8CAD-390F-4A11-B907-BBB4B6E0B449}" dt="2026-01-21T18:21:07.798" v="1044" actId="1076"/>
-          <ac:spMkLst>
-            <pc:docMk/>
-            <pc:sldMk cId="2121898900" sldId="261"/>
-            <ac:spMk id="8" creationId="{39AE06C5-34BE-4D68-97C3-4C07702C2DF6}"/>
-          </ac:spMkLst>
-        </pc:spChg>
-        <pc:spChg chg="mod">
-          <ac:chgData name="Renan Xavier Cortes" userId="d6af805853004405" providerId="LiveId" clId="{6CBA8CAD-390F-4A11-B907-BBB4B6E0B449}" dt="2026-01-21T12:50:30.629" v="124" actId="1076"/>
-          <ac:spMkLst>
-            <pc:docMk/>
-            <pc:sldMk cId="2121898900" sldId="261"/>
-            <ac:spMk id="14" creationId="{427DBFEB-81BF-4CC3-A411-FBF43D295C56}"/>
-          </ac:spMkLst>
-        </pc:spChg>
-      </pc:sldChg>
-      <pc:sldChg chg="addSp delSp modSp add mod modAnim">
-        <pc:chgData name="Renan Xavier Cortes" userId="d6af805853004405" providerId="LiveId" clId="{6CBA8CAD-390F-4A11-B907-BBB4B6E0B449}" dt="2026-01-21T18:27:49.174" v="1243"/>
-        <pc:sldMkLst>
-          <pc:docMk/>
-          <pc:sldMk cId="2689213611" sldId="262"/>
-        </pc:sldMkLst>
-        <pc:spChg chg="mod">
-          <ac:chgData name="Renan Xavier Cortes" userId="d6af805853004405" providerId="LiveId" clId="{6CBA8CAD-390F-4A11-B907-BBB4B6E0B449}" dt="2026-01-21T18:21:07.566" v="1043" actId="1076"/>
-          <ac:spMkLst>
-            <pc:docMk/>
-            <pc:sldMk cId="2689213611" sldId="262"/>
-            <ac:spMk id="8" creationId="{39AE06C5-34BE-4D68-97C3-4C07702C2DF6}"/>
-          </ac:spMkLst>
-        </pc:spChg>
-        <pc:spChg chg="mod">
-          <ac:chgData name="Renan Xavier Cortes" userId="d6af805853004405" providerId="LiveId" clId="{6CBA8CAD-390F-4A11-B907-BBB4B6E0B449}" dt="2026-01-21T12:56:51.360" v="239" actId="1076"/>
-          <ac:spMkLst>
-            <pc:docMk/>
-            <pc:sldMk cId="2689213611" sldId="262"/>
-            <ac:spMk id="14" creationId="{427DBFEB-81BF-4CC3-A411-FBF43D295C56}"/>
-          </ac:spMkLst>
-        </pc:spChg>
-        <pc:picChg chg="add mod">
-          <ac:chgData name="Renan Xavier Cortes" userId="d6af805853004405" providerId="LiveId" clId="{6CBA8CAD-390F-4A11-B907-BBB4B6E0B449}" dt="2026-01-21T13:12:19.893" v="470" actId="1076"/>
-          <ac:picMkLst>
-            <pc:docMk/>
-            <pc:sldMk cId="2689213611" sldId="262"/>
-            <ac:picMk id="5" creationId="{B75BA797-89E6-A590-E6E0-1930AE23BE87}"/>
-          </ac:picMkLst>
-        </pc:picChg>
-        <pc:picChg chg="add mod">
-          <ac:chgData name="Renan Xavier Cortes" userId="d6af805853004405" providerId="LiveId" clId="{6CBA8CAD-390F-4A11-B907-BBB4B6E0B449}" dt="2026-01-21T12:52:15.476" v="224" actId="1076"/>
-          <ac:picMkLst>
-            <pc:docMk/>
-            <pc:sldMk cId="2689213611" sldId="262"/>
-            <ac:picMk id="1026" creationId="{3AF06A5C-D23B-2668-9192-9EBD3941659A}"/>
-          </ac:picMkLst>
-        </pc:picChg>
-        <pc:picChg chg="add del mod">
-          <ac:chgData name="Renan Xavier Cortes" userId="d6af805853004405" providerId="LiveId" clId="{6CBA8CAD-390F-4A11-B907-BBB4B6E0B449}" dt="2026-01-21T13:11:02.235" v="456" actId="478"/>
-          <ac:picMkLst>
-            <pc:docMk/>
-            <pc:sldMk cId="2689213611" sldId="262"/>
-            <ac:picMk id="1028" creationId="{DA3B7BDF-718D-955C-F889-8AC8A1DCBC20}"/>
-          </ac:picMkLst>
-        </pc:picChg>
-        <pc:picChg chg="add del mod">
-          <ac:chgData name="Renan Xavier Cortes" userId="d6af805853004405" providerId="LiveId" clId="{6CBA8CAD-390F-4A11-B907-BBB4B6E0B449}" dt="2026-01-21T13:11:38.475" v="462" actId="478"/>
-          <ac:picMkLst>
-            <pc:docMk/>
-            <pc:sldMk cId="2689213611" sldId="262"/>
-            <ac:picMk id="1030" creationId="{B3AD39F1-033B-7A4E-B6EE-FD3713D8D962}"/>
-          </ac:picMkLst>
-        </pc:picChg>
-        <pc:picChg chg="add del mod">
-          <ac:chgData name="Renan Xavier Cortes" userId="d6af805853004405" providerId="LiveId" clId="{6CBA8CAD-390F-4A11-B907-BBB4B6E0B449}" dt="2026-01-21T13:12:11.437" v="465" actId="478"/>
-          <ac:picMkLst>
-            <pc:docMk/>
-            <pc:sldMk cId="2689213611" sldId="262"/>
-            <ac:picMk id="1032" creationId="{FF87EAF8-5213-0FCC-8C98-B9AD5FF62219}"/>
-          </ac:picMkLst>
-        </pc:picChg>
-      </pc:sldChg>
-      <pc:sldChg chg="addSp delSp modSp add mod addAnim delAnim">
-        <pc:chgData name="Renan Xavier Cortes" userId="d6af805853004405" providerId="LiveId" clId="{6CBA8CAD-390F-4A11-B907-BBB4B6E0B449}" dt="2026-01-21T18:21:07.371" v="1042" actId="1076"/>
-        <pc:sldMkLst>
-          <pc:docMk/>
-          <pc:sldMk cId="1495373715" sldId="263"/>
-        </pc:sldMkLst>
-        <pc:spChg chg="add mod">
-          <ac:chgData name="Renan Xavier Cortes" userId="d6af805853004405" providerId="LiveId" clId="{6CBA8CAD-390F-4A11-B907-BBB4B6E0B449}" dt="2026-01-21T13:01:54.451" v="356" actId="1076"/>
-          <ac:spMkLst>
-            <pc:docMk/>
-            <pc:sldMk cId="1495373715" sldId="263"/>
-            <ac:spMk id="6" creationId="{E4A74DC5-A696-506E-884C-C89CEEA7D8F7}"/>
-          </ac:spMkLst>
-        </pc:spChg>
-        <pc:spChg chg="mod">
-          <ac:chgData name="Renan Xavier Cortes" userId="d6af805853004405" providerId="LiveId" clId="{6CBA8CAD-390F-4A11-B907-BBB4B6E0B449}" dt="2026-01-21T18:21:07.371" v="1042" actId="1076"/>
-          <ac:spMkLst>
-            <pc:docMk/>
-            <pc:sldMk cId="1495373715" sldId="263"/>
-            <ac:spMk id="8" creationId="{39AE06C5-34BE-4D68-97C3-4C07702C2DF6}"/>
-          </ac:spMkLst>
-        </pc:spChg>
-        <pc:spChg chg="add del mod">
-          <ac:chgData name="Renan Xavier Cortes" userId="d6af805853004405" providerId="LiveId" clId="{6CBA8CAD-390F-4A11-B907-BBB4B6E0B449}" dt="2026-01-21T13:00:39.412" v="323" actId="478"/>
-          <ac:spMkLst>
-            <pc:docMk/>
-            <pc:sldMk cId="1495373715" sldId="263"/>
-            <ac:spMk id="14" creationId="{427DBFEB-81BF-4CC3-A411-FBF43D295C56}"/>
-          </ac:spMkLst>
-        </pc:spChg>
-        <pc:picChg chg="add mod">
-          <ac:chgData name="Renan Xavier Cortes" userId="d6af805853004405" providerId="LiveId" clId="{6CBA8CAD-390F-4A11-B907-BBB4B6E0B449}" dt="2026-01-21T13:01:23.017" v="328" actId="1076"/>
-          <ac:picMkLst>
-            <pc:docMk/>
-            <pc:sldMk cId="1495373715" sldId="263"/>
-            <ac:picMk id="5" creationId="{99503125-E213-E8F6-DAF3-BEC6F775BCC7}"/>
-          </ac:picMkLst>
-        </pc:picChg>
-        <pc:picChg chg="del">
-          <ac:chgData name="Renan Xavier Cortes" userId="d6af805853004405" providerId="LiveId" clId="{6CBA8CAD-390F-4A11-B907-BBB4B6E0B449}" dt="2026-01-21T12:57:41.054" v="267" actId="478"/>
-          <ac:picMkLst>
-            <pc:docMk/>
-            <pc:sldMk cId="1495373715" sldId="263"/>
-            <ac:picMk id="1026" creationId="{3AF06A5C-D23B-2668-9192-9EBD3941659A}"/>
-          </ac:picMkLst>
-        </pc:picChg>
-      </pc:sldChg>
-      <pc:sldChg chg="addSp delSp modSp add mod delAnim modAnim">
-        <pc:chgData name="Renan Xavier Cortes" userId="d6af805853004405" providerId="LiveId" clId="{6CBA8CAD-390F-4A11-B907-BBB4B6E0B449}" dt="2026-01-21T18:27:56.296" v="1244"/>
-        <pc:sldMkLst>
-          <pc:docMk/>
-          <pc:sldMk cId="612877480" sldId="264"/>
-        </pc:sldMkLst>
-        <pc:spChg chg="add mod">
-          <ac:chgData name="Renan Xavier Cortes" userId="d6af805853004405" providerId="LiveId" clId="{6CBA8CAD-390F-4A11-B907-BBB4B6E0B449}" dt="2026-01-21T13:36:06.850" v="841" actId="1076"/>
-          <ac:spMkLst>
-            <pc:docMk/>
-            <pc:sldMk cId="612877480" sldId="264"/>
-            <ac:spMk id="4" creationId="{A3F14000-383F-850F-E6AA-F5007930D551}"/>
-          </ac:spMkLst>
-        </pc:spChg>
-        <pc:spChg chg="mod">
-          <ac:chgData name="Renan Xavier Cortes" userId="d6af805853004405" providerId="LiveId" clId="{6CBA8CAD-390F-4A11-B907-BBB4B6E0B449}" dt="2026-01-21T18:21:07.154" v="1041" actId="1076"/>
-          <ac:spMkLst>
-            <pc:docMk/>
-            <pc:sldMk cId="612877480" sldId="264"/>
-            <ac:spMk id="8" creationId="{39AE06C5-34BE-4D68-97C3-4C07702C2DF6}"/>
-          </ac:spMkLst>
-        </pc:spChg>
-        <pc:spChg chg="del mod">
-          <ac:chgData name="Renan Xavier Cortes" userId="d6af805853004405" providerId="LiveId" clId="{6CBA8CAD-390F-4A11-B907-BBB4B6E0B449}" dt="2026-01-21T13:14:12.001" v="508" actId="478"/>
-          <ac:spMkLst>
-            <pc:docMk/>
-            <pc:sldMk cId="612877480" sldId="264"/>
-            <ac:spMk id="14" creationId="{427DBFEB-81BF-4CC3-A411-FBF43D295C56}"/>
-          </ac:spMkLst>
-        </pc:spChg>
-        <pc:picChg chg="del">
-          <ac:chgData name="Renan Xavier Cortes" userId="d6af805853004405" providerId="LiveId" clId="{6CBA8CAD-390F-4A11-B907-BBB4B6E0B449}" dt="2026-01-21T13:00:47.167" v="326" actId="478"/>
-          <ac:picMkLst>
-            <pc:docMk/>
-            <pc:sldMk cId="612877480" sldId="264"/>
-            <ac:picMk id="5" creationId="{99503125-E213-E8F6-DAF3-BEC6F775BCC7}"/>
-          </ac:picMkLst>
-        </pc:picChg>
-        <pc:picChg chg="add del mod">
-          <ac:chgData name="Renan Xavier Cortes" userId="d6af805853004405" providerId="LiveId" clId="{6CBA8CAD-390F-4A11-B907-BBB4B6E0B449}" dt="2026-01-21T13:09:02.318" v="445" actId="478"/>
-          <ac:picMkLst>
-            <pc:docMk/>
-            <pc:sldMk cId="612877480" sldId="264"/>
-            <ac:picMk id="2050" creationId="{4E6A8334-909C-5345-FD38-6DE6C71617FE}"/>
-          </ac:picMkLst>
-        </pc:picChg>
-        <pc:picChg chg="add del mod">
-          <ac:chgData name="Renan Xavier Cortes" userId="d6af805853004405" providerId="LiveId" clId="{6CBA8CAD-390F-4A11-B907-BBB4B6E0B449}" dt="2026-01-21T13:09:02.823" v="446" actId="478"/>
-          <ac:picMkLst>
-            <pc:docMk/>
-            <pc:sldMk cId="612877480" sldId="264"/>
-            <ac:picMk id="2052" creationId="{A4619851-0E89-7971-65B8-8C06288BD402}"/>
-          </ac:picMkLst>
-        </pc:picChg>
-        <pc:picChg chg="add mod">
-          <ac:chgData name="Renan Xavier Cortes" userId="d6af805853004405" providerId="LiveId" clId="{6CBA8CAD-390F-4A11-B907-BBB4B6E0B449}" dt="2026-01-21T13:18:06.064" v="616" actId="1076"/>
-          <ac:picMkLst>
-            <pc:docMk/>
-            <pc:sldMk cId="612877480" sldId="264"/>
-            <ac:picMk id="2054" creationId="{9BBBB796-11B1-9E9B-9024-C023ED27709B}"/>
-          </ac:picMkLst>
-        </pc:picChg>
-        <pc:picChg chg="add mod">
-          <ac:chgData name="Renan Xavier Cortes" userId="d6af805853004405" providerId="LiveId" clId="{6CBA8CAD-390F-4A11-B907-BBB4B6E0B449}" dt="2026-01-21T13:35:54.165" v="840" actId="1076"/>
-          <ac:picMkLst>
-            <pc:docMk/>
-            <pc:sldMk cId="612877480" sldId="264"/>
-            <ac:picMk id="2056" creationId="{750C220B-DEEE-CE57-43CB-5AB737C5E7AC}"/>
-          </ac:picMkLst>
-        </pc:picChg>
-        <pc:picChg chg="add del mod">
-          <ac:chgData name="Renan Xavier Cortes" userId="d6af805853004405" providerId="LiveId" clId="{6CBA8CAD-390F-4A11-B907-BBB4B6E0B449}" dt="2026-01-21T13:34:49.369" v="767" actId="478"/>
-          <ac:picMkLst>
-            <pc:docMk/>
-            <pc:sldMk cId="612877480" sldId="264"/>
-            <ac:picMk id="2058" creationId="{04060264-FEF9-2D28-9DF9-52482BDA4C9B}"/>
-          </ac:picMkLst>
-        </pc:picChg>
-      </pc:sldChg>
-      <pc:sldChg chg="modSp add modAnim">
-        <pc:chgData name="Renan Xavier Cortes" userId="d6af805853004405" providerId="LiveId" clId="{6CBA8CAD-390F-4A11-B907-BBB4B6E0B449}" dt="2026-01-21T18:28:01.649" v="1246"/>
-        <pc:sldMkLst>
-          <pc:docMk/>
-          <pc:sldMk cId="607923279" sldId="265"/>
-        </pc:sldMkLst>
-        <pc:spChg chg="mod">
-          <ac:chgData name="Renan Xavier Cortes" userId="d6af805853004405" providerId="LiveId" clId="{6CBA8CAD-390F-4A11-B907-BBB4B6E0B449}" dt="2026-01-21T13:20:28.364" v="734" actId="5793"/>
-          <ac:spMkLst>
-            <pc:docMk/>
-            <pc:sldMk cId="607923279" sldId="265"/>
-            <ac:spMk id="14" creationId="{427DBFEB-81BF-4CC3-A411-FBF43D295C56}"/>
-          </ac:spMkLst>
-        </pc:spChg>
-        <pc:picChg chg="mod">
-          <ac:chgData name="Renan Xavier Cortes" userId="d6af805853004405" providerId="LiveId" clId="{6CBA8CAD-390F-4A11-B907-BBB4B6E0B449}" dt="2026-01-21T13:20:33.305" v="736" actId="1076"/>
-          <ac:picMkLst>
-            <pc:docMk/>
-            <pc:sldMk cId="607923279" sldId="265"/>
-            <ac:picMk id="2050" creationId="{4E6A8334-909C-5345-FD38-6DE6C71617FE}"/>
-          </ac:picMkLst>
-        </pc:picChg>
-        <pc:picChg chg="mod">
-          <ac:chgData name="Renan Xavier Cortes" userId="d6af805853004405" providerId="LiveId" clId="{6CBA8CAD-390F-4A11-B907-BBB4B6E0B449}" dt="2026-01-21T13:20:35.259" v="737" actId="14100"/>
-          <ac:picMkLst>
-            <pc:docMk/>
-            <pc:sldMk cId="607923279" sldId="265"/>
-            <ac:picMk id="2052" creationId="{A4619851-0E89-7971-65B8-8C06288BD402}"/>
-          </ac:picMkLst>
-        </pc:picChg>
-      </pc:sldChg>
-      <pc:sldChg chg="delSp add del">
-        <pc:chgData name="Renan Xavier Cortes" userId="d6af805853004405" providerId="LiveId" clId="{6CBA8CAD-390F-4A11-B907-BBB4B6E0B449}" dt="2026-01-21T13:31:31.518" v="744" actId="47"/>
-        <pc:sldMkLst>
-          <pc:docMk/>
-          <pc:sldMk cId="2167676923" sldId="266"/>
-        </pc:sldMkLst>
-        <pc:picChg chg="del">
-          <ac:chgData name="Renan Xavier Cortes" userId="d6af805853004405" providerId="LiveId" clId="{6CBA8CAD-390F-4A11-B907-BBB4B6E0B449}" dt="2026-01-21T13:30:49.800" v="741" actId="478"/>
-          <ac:picMkLst>
-            <pc:docMk/>
-            <pc:sldMk cId="2167676923" sldId="266"/>
-            <ac:picMk id="2054" creationId="{9BBBB796-11B1-9E9B-9024-C023ED27709B}"/>
-          </ac:picMkLst>
-        </pc:picChg>
-        <pc:picChg chg="del">
-          <ac:chgData name="Renan Xavier Cortes" userId="d6af805853004405" providerId="LiveId" clId="{6CBA8CAD-390F-4A11-B907-BBB4B6E0B449}" dt="2026-01-21T13:30:50.789" v="743" actId="478"/>
-          <ac:picMkLst>
-            <pc:docMk/>
-            <pc:sldMk cId="2167676923" sldId="266"/>
-            <ac:picMk id="2056" creationId="{750C220B-DEEE-CE57-43CB-5AB737C5E7AC}"/>
-          </ac:picMkLst>
-        </pc:picChg>
-        <pc:picChg chg="del">
-          <ac:chgData name="Renan Xavier Cortes" userId="d6af805853004405" providerId="LiveId" clId="{6CBA8CAD-390F-4A11-B907-BBB4B6E0B449}" dt="2026-01-21T13:30:50.246" v="742" actId="478"/>
-          <ac:picMkLst>
-            <pc:docMk/>
-            <pc:sldMk cId="2167676923" sldId="266"/>
-            <ac:picMk id="2058" creationId="{04060264-FEF9-2D28-9DF9-52482BDA4C9B}"/>
-          </ac:picMkLst>
-        </pc:picChg>
-      </pc:sldChg>
-      <pc:sldChg chg="delSp modSp add mod modAnim">
-        <pc:chgData name="Renan Xavier Cortes" userId="d6af805853004405" providerId="LiveId" clId="{6CBA8CAD-390F-4A11-B907-BBB4B6E0B449}" dt="2026-01-21T18:27:58.688" v="1245"/>
-        <pc:sldMkLst>
-          <pc:docMk/>
-          <pc:sldMk cId="3391640227" sldId="266"/>
-        </pc:sldMkLst>
-        <pc:spChg chg="mod">
-          <ac:chgData name="Renan Xavier Cortes" userId="d6af805853004405" providerId="LiveId" clId="{6CBA8CAD-390F-4A11-B907-BBB4B6E0B449}" dt="2026-01-21T13:42:03.435" v="944" actId="20577"/>
-          <ac:spMkLst>
-            <pc:docMk/>
-            <pc:sldMk cId="3391640227" sldId="266"/>
-            <ac:spMk id="4" creationId="{A3F14000-383F-850F-E6AA-F5007930D551}"/>
-          </ac:spMkLst>
-        </pc:spChg>
-        <pc:spChg chg="mod">
-          <ac:chgData name="Renan Xavier Cortes" userId="d6af805853004405" providerId="LiveId" clId="{6CBA8CAD-390F-4A11-B907-BBB4B6E0B449}" dt="2026-01-21T18:21:06.912" v="1040" actId="1076"/>
-          <ac:spMkLst>
-            <pc:docMk/>
-            <pc:sldMk cId="3391640227" sldId="266"/>
-            <ac:spMk id="8" creationId="{39AE06C5-34BE-4D68-97C3-4C07702C2DF6}"/>
-          </ac:spMkLst>
-        </pc:spChg>
-        <pc:picChg chg="del">
-          <ac:chgData name="Renan Xavier Cortes" userId="d6af805853004405" providerId="LiveId" clId="{6CBA8CAD-390F-4A11-B907-BBB4B6E0B449}" dt="2026-01-21T13:32:08.926" v="746" actId="478"/>
-          <ac:picMkLst>
-            <pc:docMk/>
-            <pc:sldMk cId="3391640227" sldId="266"/>
-            <ac:picMk id="2054" creationId="{9BBBB796-11B1-9E9B-9024-C023ED27709B}"/>
-          </ac:picMkLst>
-        </pc:picChg>
-        <pc:picChg chg="del">
-          <ac:chgData name="Renan Xavier Cortes" userId="d6af805853004405" providerId="LiveId" clId="{6CBA8CAD-390F-4A11-B907-BBB4B6E0B449}" dt="2026-01-21T13:32:10.004" v="748" actId="478"/>
-          <ac:picMkLst>
-            <pc:docMk/>
-            <pc:sldMk cId="3391640227" sldId="266"/>
-            <ac:picMk id="2056" creationId="{750C220B-DEEE-CE57-43CB-5AB737C5E7AC}"/>
-          </ac:picMkLst>
-        </pc:picChg>
-        <pc:picChg chg="del">
-          <ac:chgData name="Renan Xavier Cortes" userId="d6af805853004405" providerId="LiveId" clId="{6CBA8CAD-390F-4A11-B907-BBB4B6E0B449}" dt="2026-01-21T13:32:09.372" v="747" actId="478"/>
-          <ac:picMkLst>
-            <pc:docMk/>
-            <pc:sldMk cId="3391640227" sldId="266"/>
-            <ac:picMk id="2058" creationId="{04060264-FEF9-2D28-9DF9-52482BDA4C9B}"/>
-          </ac:picMkLst>
-        </pc:picChg>
-      </pc:sldChg>
-      <pc:sldChg chg="addSp delSp modSp add mod delAnim modAnim">
-        <pc:chgData name="Renan Xavier Cortes" userId="d6af805853004405" providerId="LiveId" clId="{6CBA8CAD-390F-4A11-B907-BBB4B6E0B449}" dt="2026-01-21T18:28:05.192" v="1247"/>
-        <pc:sldMkLst>
-          <pc:docMk/>
-          <pc:sldMk cId="1343228278" sldId="267"/>
-        </pc:sldMkLst>
-        <pc:spChg chg="add mod">
-          <ac:chgData name="Renan Xavier Cortes" userId="d6af805853004405" providerId="LiveId" clId="{6CBA8CAD-390F-4A11-B907-BBB4B6E0B449}" dt="2026-01-21T13:42:09.587" v="946" actId="20577"/>
-          <ac:spMkLst>
-            <pc:docMk/>
-            <pc:sldMk cId="1343228278" sldId="267"/>
-            <ac:spMk id="4" creationId="{4B84190D-BF19-CEFE-E86D-F0B0EBBA7C0B}"/>
-          </ac:spMkLst>
-        </pc:spChg>
-        <pc:spChg chg="add">
-          <ac:chgData name="Renan Xavier Cortes" userId="d6af805853004405" providerId="LiveId" clId="{6CBA8CAD-390F-4A11-B907-BBB4B6E0B449}" dt="2026-01-21T13:40:12.521" v="911"/>
-          <ac:spMkLst>
-            <pc:docMk/>
-            <pc:sldMk cId="1343228278" sldId="267"/>
-            <ac:spMk id="5" creationId="{761FBCEB-4A99-0E96-EB2F-126B5E2ADEDE}"/>
-          </ac:spMkLst>
-        </pc:spChg>
-        <pc:spChg chg="add">
-          <ac:chgData name="Renan Xavier Cortes" userId="d6af805853004405" providerId="LiveId" clId="{6CBA8CAD-390F-4A11-B907-BBB4B6E0B449}" dt="2026-01-21T13:40:28.193" v="916"/>
-          <ac:spMkLst>
-            <pc:docMk/>
-            <pc:sldMk cId="1343228278" sldId="267"/>
-            <ac:spMk id="6" creationId="{23BAF368-5B04-A6D4-F4BA-78FE4BDB80E1}"/>
-          </ac:spMkLst>
-        </pc:spChg>
-        <pc:spChg chg="del mod">
-          <ac:chgData name="Renan Xavier Cortes" userId="d6af805853004405" providerId="LiveId" clId="{6CBA8CAD-390F-4A11-B907-BBB4B6E0B449}" dt="2026-01-21T13:38:48.266" v="879" actId="478"/>
-          <ac:spMkLst>
-            <pc:docMk/>
-            <pc:sldMk cId="1343228278" sldId="267"/>
-            <ac:spMk id="14" creationId="{427DBFEB-81BF-4CC3-A411-FBF43D295C56}"/>
-          </ac:spMkLst>
-        </pc:spChg>
-        <pc:picChg chg="del">
-          <ac:chgData name="Renan Xavier Cortes" userId="d6af805853004405" providerId="LiveId" clId="{6CBA8CAD-390F-4A11-B907-BBB4B6E0B449}" dt="2026-01-21T13:37:26.842" v="850" actId="478"/>
-          <ac:picMkLst>
-            <pc:docMk/>
-            <pc:sldMk cId="1343228278" sldId="267"/>
-            <ac:picMk id="2050" creationId="{4E6A8334-909C-5345-FD38-6DE6C71617FE}"/>
-          </ac:picMkLst>
-        </pc:picChg>
-        <pc:picChg chg="del">
-          <ac:chgData name="Renan Xavier Cortes" userId="d6af805853004405" providerId="LiveId" clId="{6CBA8CAD-390F-4A11-B907-BBB4B6E0B449}" dt="2026-01-21T13:37:27.155" v="851" actId="478"/>
-          <ac:picMkLst>
-            <pc:docMk/>
-            <pc:sldMk cId="1343228278" sldId="267"/>
-            <ac:picMk id="2052" creationId="{A4619851-0E89-7971-65B8-8C06288BD402}"/>
-          </ac:picMkLst>
-        </pc:picChg>
-        <pc:picChg chg="add">
-          <ac:chgData name="Renan Xavier Cortes" userId="d6af805853004405" providerId="LiveId" clId="{6CBA8CAD-390F-4A11-B907-BBB4B6E0B449}" dt="2026-01-21T13:40:12.521" v="911"/>
-          <ac:picMkLst>
-            <pc:docMk/>
-            <pc:sldMk cId="1343228278" sldId="267"/>
-            <ac:picMk id="5122" creationId="{0EFA11CA-E7DF-AF44-7C52-1A7BCD0EF98A}"/>
-          </ac:picMkLst>
-        </pc:picChg>
-        <pc:picChg chg="add">
-          <ac:chgData name="Renan Xavier Cortes" userId="d6af805853004405" providerId="LiveId" clId="{6CBA8CAD-390F-4A11-B907-BBB4B6E0B449}" dt="2026-01-21T13:40:12.521" v="911"/>
-          <ac:picMkLst>
-            <pc:docMk/>
-            <pc:sldMk cId="1343228278" sldId="267"/>
-            <ac:picMk id="5123" creationId="{17A06DBE-F56F-D7CF-5D37-101F12487686}"/>
-          </ac:picMkLst>
-        </pc:picChg>
-        <pc:picChg chg="add">
-          <ac:chgData name="Renan Xavier Cortes" userId="d6af805853004405" providerId="LiveId" clId="{6CBA8CAD-390F-4A11-B907-BBB4B6E0B449}" dt="2026-01-21T13:40:12.521" v="911"/>
-          <ac:picMkLst>
-            <pc:docMk/>
-            <pc:sldMk cId="1343228278" sldId="267"/>
-            <ac:picMk id="5124" creationId="{D0F78DC5-EBA6-F8C1-B608-9845395822CB}"/>
-          </ac:picMkLst>
-        </pc:picChg>
-        <pc:picChg chg="add">
-          <ac:chgData name="Renan Xavier Cortes" userId="d6af805853004405" providerId="LiveId" clId="{6CBA8CAD-390F-4A11-B907-BBB4B6E0B449}" dt="2026-01-21T13:40:12.521" v="911"/>
-          <ac:picMkLst>
-            <pc:docMk/>
-            <pc:sldMk cId="1343228278" sldId="267"/>
-            <ac:picMk id="5125" creationId="{54E39B7E-F8EF-4086-9DF4-84532F950252}"/>
-          </ac:picMkLst>
-        </pc:picChg>
-        <pc:picChg chg="add">
-          <ac:chgData name="Renan Xavier Cortes" userId="d6af805853004405" providerId="LiveId" clId="{6CBA8CAD-390F-4A11-B907-BBB4B6E0B449}" dt="2026-01-21T13:40:12.521" v="911"/>
-          <ac:picMkLst>
-            <pc:docMk/>
-            <pc:sldMk cId="1343228278" sldId="267"/>
-            <ac:picMk id="5126" creationId="{5ADF0543-3E47-7B59-14CE-9E32F05955F4}"/>
-          </ac:picMkLst>
-        </pc:picChg>
-        <pc:picChg chg="add">
-          <ac:chgData name="Renan Xavier Cortes" userId="d6af805853004405" providerId="LiveId" clId="{6CBA8CAD-390F-4A11-B907-BBB4B6E0B449}" dt="2026-01-21T13:40:12.521" v="911"/>
-          <ac:picMkLst>
-            <pc:docMk/>
-            <pc:sldMk cId="1343228278" sldId="267"/>
-            <ac:picMk id="5127" creationId="{67FDB388-93D8-C347-BB8B-043340CBCCFC}"/>
-          </ac:picMkLst>
-        </pc:picChg>
-        <pc:picChg chg="add">
-          <ac:chgData name="Renan Xavier Cortes" userId="d6af805853004405" providerId="LiveId" clId="{6CBA8CAD-390F-4A11-B907-BBB4B6E0B449}" dt="2026-01-21T13:40:28.193" v="916"/>
-          <ac:picMkLst>
-            <pc:docMk/>
-            <pc:sldMk cId="1343228278" sldId="267"/>
-            <ac:picMk id="5129" creationId="{284947AA-7AA3-F62A-866F-6A1A3BEEABEF}"/>
-          </ac:picMkLst>
-        </pc:picChg>
-        <pc:picChg chg="add">
-          <ac:chgData name="Renan Xavier Cortes" userId="d6af805853004405" providerId="LiveId" clId="{6CBA8CAD-390F-4A11-B907-BBB4B6E0B449}" dt="2026-01-21T13:40:28.193" v="916"/>
-          <ac:picMkLst>
-            <pc:docMk/>
-            <pc:sldMk cId="1343228278" sldId="267"/>
-            <ac:picMk id="5130" creationId="{C98BC9A4-C207-F1E1-7341-3A1B70215058}"/>
-          </ac:picMkLst>
-        </pc:picChg>
-        <pc:picChg chg="add">
-          <ac:chgData name="Renan Xavier Cortes" userId="d6af805853004405" providerId="LiveId" clId="{6CBA8CAD-390F-4A11-B907-BBB4B6E0B449}" dt="2026-01-21T13:40:28.193" v="916"/>
-          <ac:picMkLst>
-            <pc:docMk/>
-            <pc:sldMk cId="1343228278" sldId="267"/>
-            <ac:picMk id="5131" creationId="{375CC78C-4981-2DA9-88E6-EFB2FD84677E}"/>
-          </ac:picMkLst>
-        </pc:picChg>
-        <pc:picChg chg="add">
-          <ac:chgData name="Renan Xavier Cortes" userId="d6af805853004405" providerId="LiveId" clId="{6CBA8CAD-390F-4A11-B907-BBB4B6E0B449}" dt="2026-01-21T13:40:28.193" v="916"/>
-          <ac:picMkLst>
-            <pc:docMk/>
-            <pc:sldMk cId="1343228278" sldId="267"/>
-            <ac:picMk id="5132" creationId="{5F0B81A0-9240-D916-E71A-E6D3F50B265A}"/>
-          </ac:picMkLst>
-        </pc:picChg>
-        <pc:picChg chg="add">
-          <ac:chgData name="Renan Xavier Cortes" userId="d6af805853004405" providerId="LiveId" clId="{6CBA8CAD-390F-4A11-B907-BBB4B6E0B449}" dt="2026-01-21T13:40:28.193" v="916"/>
-          <ac:picMkLst>
-            <pc:docMk/>
-            <pc:sldMk cId="1343228278" sldId="267"/>
-            <ac:picMk id="5133" creationId="{21770704-1681-BDE9-B7A7-EE6D8264F71A}"/>
-          </ac:picMkLst>
-        </pc:picChg>
-        <pc:picChg chg="add">
-          <ac:chgData name="Renan Xavier Cortes" userId="d6af805853004405" providerId="LiveId" clId="{6CBA8CAD-390F-4A11-B907-BBB4B6E0B449}" dt="2026-01-21T13:40:28.193" v="916"/>
-          <ac:picMkLst>
-            <pc:docMk/>
-            <pc:sldMk cId="1343228278" sldId="267"/>
-            <ac:picMk id="5134" creationId="{DD427550-CCC4-E20C-CF8C-A439F0C0E9D2}"/>
-          </ac:picMkLst>
-        </pc:picChg>
-      </pc:sldChg>
-      <pc:sldChg chg="addSp delSp modSp add mod addAnim delAnim modAnim">
-        <pc:chgData name="Renan Xavier Cortes" userId="d6af805853004405" providerId="LiveId" clId="{6CBA8CAD-390F-4A11-B907-BBB4B6E0B449}" dt="2026-01-21T20:59:32.449" v="2258" actId="1076"/>
-        <pc:sldMkLst>
-          <pc:docMk/>
-          <pc:sldMk cId="4060517312" sldId="268"/>
-        </pc:sldMkLst>
-        <pc:spChg chg="add del mod">
-          <ac:chgData name="Renan Xavier Cortes" userId="d6af805853004405" providerId="LiveId" clId="{6CBA8CAD-390F-4A11-B907-BBB4B6E0B449}" dt="2026-01-21T20:59:28.978" v="2257" actId="1076"/>
-          <ac:spMkLst>
-            <pc:docMk/>
-            <pc:sldMk cId="4060517312" sldId="268"/>
-            <ac:spMk id="4" creationId="{4B84190D-BF19-CEFE-E86D-F0B0EBBA7C0B}"/>
-          </ac:spMkLst>
-        </pc:spChg>
-        <pc:spChg chg="mod">
-          <ac:chgData name="Renan Xavier Cortes" userId="d6af805853004405" providerId="LiveId" clId="{6CBA8CAD-390F-4A11-B907-BBB4B6E0B449}" dt="2026-01-21T20:59:32.449" v="2258" actId="1076"/>
-          <ac:spMkLst>
-            <pc:docMk/>
-            <pc:sldMk cId="4060517312" sldId="268"/>
-            <ac:spMk id="8" creationId="{39AE06C5-34BE-4D68-97C3-4C07702C2DF6}"/>
-          </ac:spMkLst>
-        </pc:spChg>
-      </pc:sldChg>
-      <pc:sldChg chg="addSp delSp modSp add mod modAnim">
-        <pc:chgData name="Renan Xavier Cortes" userId="d6af805853004405" providerId="LiveId" clId="{6CBA8CAD-390F-4A11-B907-BBB4B6E0B449}" dt="2026-01-21T19:57:31.132" v="2031" actId="1076"/>
-        <pc:sldMkLst>
-          <pc:docMk/>
-          <pc:sldMk cId="2280539132" sldId="269"/>
-        </pc:sldMkLst>
-        <pc:spChg chg="mod">
-          <ac:chgData name="Renan Xavier Cortes" userId="d6af805853004405" providerId="LiveId" clId="{6CBA8CAD-390F-4A11-B907-BBB4B6E0B449}" dt="2026-01-21T19:29:34.350" v="1988" actId="20577"/>
-          <ac:spMkLst>
-            <pc:docMk/>
-            <pc:sldMk cId="2280539132" sldId="269"/>
-            <ac:spMk id="4" creationId="{4B84190D-BF19-CEFE-E86D-F0B0EBBA7C0B}"/>
-          </ac:spMkLst>
-        </pc:spChg>
-        <pc:spChg chg="mod">
-          <ac:chgData name="Renan Xavier Cortes" userId="d6af805853004405" providerId="LiveId" clId="{6CBA8CAD-390F-4A11-B907-BBB4B6E0B449}" dt="2026-01-21T19:28:38.900" v="1982" actId="20577"/>
-          <ac:spMkLst>
-            <pc:docMk/>
-            <pc:sldMk cId="2280539132" sldId="269"/>
-            <ac:spMk id="8" creationId="{39AE06C5-34BE-4D68-97C3-4C07702C2DF6}"/>
-          </ac:spMkLst>
-        </pc:spChg>
-        <pc:picChg chg="add del mod">
-          <ac:chgData name="Renan Xavier Cortes" userId="d6af805853004405" providerId="LiveId" clId="{6CBA8CAD-390F-4A11-B907-BBB4B6E0B449}" dt="2026-01-21T19:36:40.507" v="1993" actId="478"/>
-          <ac:picMkLst>
-            <pc:docMk/>
-            <pc:sldMk cId="2280539132" sldId="269"/>
-            <ac:picMk id="6" creationId="{1FF55C8A-24A1-2834-88D3-7F49B46E12DA}"/>
-          </ac:picMkLst>
-        </pc:picChg>
-        <pc:picChg chg="add del mod">
-          <ac:chgData name="Renan Xavier Cortes" userId="d6af805853004405" providerId="LiveId" clId="{6CBA8CAD-390F-4A11-B907-BBB4B6E0B449}" dt="2026-01-21T19:57:20.787" v="2028" actId="478"/>
-          <ac:picMkLst>
-            <pc:docMk/>
-            <pc:sldMk cId="2280539132" sldId="269"/>
-            <ac:picMk id="10" creationId="{DB7C7009-8D56-695C-4B6E-E9C1203D95EF}"/>
-          </ac:picMkLst>
-        </pc:picChg>
-        <pc:picChg chg="add mod">
-          <ac:chgData name="Renan Xavier Cortes" userId="d6af805853004405" providerId="LiveId" clId="{6CBA8CAD-390F-4A11-B907-BBB4B6E0B449}" dt="2026-01-21T19:57:31.132" v="2031" actId="1076"/>
-          <ac:picMkLst>
-            <pc:docMk/>
-            <pc:sldMk cId="2280539132" sldId="269"/>
-            <ac:picMk id="12" creationId="{387B2521-0873-2B44-23CB-06F158F17A95}"/>
-          </ac:picMkLst>
-        </pc:picChg>
-        <pc:picChg chg="add del">
-          <ac:chgData name="Renan Xavier Cortes" userId="d6af805853004405" providerId="LiveId" clId="{6CBA8CAD-390F-4A11-B907-BBB4B6E0B449}" dt="2026-01-21T19:34:39.537" v="1990" actId="478"/>
-          <ac:picMkLst>
-            <pc:docMk/>
-            <pc:sldMk cId="2280539132" sldId="269"/>
-            <ac:picMk id="14338" creationId="{6E12BE7A-2157-D78B-66BE-B4AFC6F10B8A}"/>
-          </ac:picMkLst>
-        </pc:picChg>
-      </pc:sldChg>
-      <pc:sldChg chg="addSp delSp modSp add mod modAnim">
-        <pc:chgData name="Renan Xavier Cortes" userId="d6af805853004405" providerId="LiveId" clId="{6CBA8CAD-390F-4A11-B907-BBB4B6E0B449}" dt="2026-01-21T21:00:27.912" v="2261"/>
-        <pc:sldMkLst>
-          <pc:docMk/>
-          <pc:sldMk cId="1218368481" sldId="270"/>
-        </pc:sldMkLst>
-        <pc:spChg chg="mod">
-          <ac:chgData name="Renan Xavier Cortes" userId="d6af805853004405" providerId="LiveId" clId="{6CBA8CAD-390F-4A11-B907-BBB4B6E0B449}" dt="2026-01-21T19:44:08.525" v="2021" actId="20577"/>
-          <ac:spMkLst>
-            <pc:docMk/>
-            <pc:sldMk cId="1218368481" sldId="270"/>
-            <ac:spMk id="4" creationId="{4B84190D-BF19-CEFE-E86D-F0B0EBBA7C0B}"/>
-          </ac:spMkLst>
-        </pc:spChg>
-        <pc:spChg chg="add mod">
-          <ac:chgData name="Renan Xavier Cortes" userId="d6af805853004405" providerId="LiveId" clId="{6CBA8CAD-390F-4A11-B907-BBB4B6E0B449}" dt="2026-01-21T19:44:20.030" v="2023"/>
-          <ac:spMkLst>
-            <pc:docMk/>
-            <pc:sldMk cId="1218368481" sldId="270"/>
-            <ac:spMk id="5" creationId="{F2A97601-E2DD-3BBC-74F4-2EA087A13F98}"/>
-          </ac:spMkLst>
-        </pc:spChg>
-        <pc:spChg chg="add del">
-          <ac:chgData name="Renan Xavier Cortes" userId="d6af805853004405" providerId="LiveId" clId="{6CBA8CAD-390F-4A11-B907-BBB4B6E0B449}" dt="2026-01-21T19:44:44.857" v="2025" actId="478"/>
-          <ac:spMkLst>
-            <pc:docMk/>
-            <pc:sldMk cId="1218368481" sldId="270"/>
-            <ac:spMk id="6" creationId="{5DA31ED7-3101-E188-86DD-5907439477B8}"/>
-          </ac:spMkLst>
-        </pc:spChg>
-        <pc:spChg chg="del">
-          <ac:chgData name="Renan Xavier Cortes" userId="d6af805853004405" providerId="LiveId" clId="{6CBA8CAD-390F-4A11-B907-BBB4B6E0B449}" dt="2026-01-21T19:44:19.710" v="2022" actId="478"/>
-          <ac:spMkLst>
-            <pc:docMk/>
-            <pc:sldMk cId="1218368481" sldId="270"/>
-            <ac:spMk id="8" creationId="{39AE06C5-34BE-4D68-97C3-4C07702C2DF6}"/>
-          </ac:spMkLst>
-        </pc:spChg>
-        <pc:spChg chg="add mod">
-          <ac:chgData name="Renan Xavier Cortes" userId="d6af805853004405" providerId="LiveId" clId="{6CBA8CAD-390F-4A11-B907-BBB4B6E0B449}" dt="2026-01-21T19:44:51.612" v="2027" actId="14100"/>
-          <ac:spMkLst>
-            <pc:docMk/>
-            <pc:sldMk cId="1218368481" sldId="270"/>
-            <ac:spMk id="9" creationId="{8D99C18C-4384-15B5-AE25-CA173BF5FF2A}"/>
-          </ac:spMkLst>
-        </pc:spChg>
-        <pc:picChg chg="add mod">
-          <ac:chgData name="Renan Xavier Cortes" userId="d6af805853004405" providerId="LiveId" clId="{6CBA8CAD-390F-4A11-B907-BBB4B6E0B449}" dt="2026-01-21T20:09:57.973" v="2038" actId="1076"/>
-          <ac:picMkLst>
-            <pc:docMk/>
-            <pc:sldMk cId="1218368481" sldId="270"/>
-            <ac:picMk id="11" creationId="{61149965-3367-6BC9-6804-26C7F2A938B0}"/>
-          </ac:picMkLst>
-        </pc:picChg>
-      </pc:sldChg>
-      <pc:sldChg chg="addSp modSp add mod modAnim">
-        <pc:chgData name="Renan Xavier Cortes" userId="d6af805853004405" providerId="LiveId" clId="{6CBA8CAD-390F-4A11-B907-BBB4B6E0B449}" dt="2026-01-21T21:00:44.298" v="2266"/>
-        <pc:sldMkLst>
-          <pc:docMk/>
-          <pc:sldMk cId="4045846075" sldId="271"/>
-        </pc:sldMkLst>
-        <pc:spChg chg="mod">
-          <ac:chgData name="Renan Xavier Cortes" userId="d6af805853004405" providerId="LiveId" clId="{6CBA8CAD-390F-4A11-B907-BBB4B6E0B449}" dt="2026-01-21T20:37:36.926" v="2124" actId="20577"/>
-          <ac:spMkLst>
-            <pc:docMk/>
-            <pc:sldMk cId="4045846075" sldId="271"/>
-            <ac:spMk id="4" creationId="{4B84190D-BF19-CEFE-E86D-F0B0EBBA7C0B}"/>
-          </ac:spMkLst>
-        </pc:spChg>
-        <pc:spChg chg="mod">
-          <ac:chgData name="Renan Xavier Cortes" userId="d6af805853004405" providerId="LiveId" clId="{6CBA8CAD-390F-4A11-B907-BBB4B6E0B449}" dt="2026-01-21T20:48:01.809" v="2132" actId="404"/>
-          <ac:spMkLst>
-            <pc:docMk/>
-            <pc:sldMk cId="4045846075" sldId="271"/>
-            <ac:spMk id="8" creationId="{39AE06C5-34BE-4D68-97C3-4C07702C2DF6}"/>
-          </ac:spMkLst>
-        </pc:spChg>
-        <pc:picChg chg="add mod">
-          <ac:chgData name="Renan Xavier Cortes" userId="d6af805853004405" providerId="LiveId" clId="{6CBA8CAD-390F-4A11-B907-BBB4B6E0B449}" dt="2026-01-21T20:47:25.028" v="2126" actId="1076"/>
-          <ac:picMkLst>
-            <pc:docMk/>
-            <pc:sldMk cId="4045846075" sldId="271"/>
-            <ac:picMk id="6" creationId="{CB9F02F1-AFED-6149-90A3-CE7F1933A876}"/>
-          </ac:picMkLst>
-        </pc:picChg>
-      </pc:sldChg>
-      <pc:sldChg chg="add del">
-        <pc:chgData name="Renan Xavier Cortes" userId="d6af805853004405" providerId="LiveId" clId="{6CBA8CAD-390F-4A11-B907-BBB4B6E0B449}" dt="2026-01-21T20:50:53.056" v="2195" actId="47"/>
-        <pc:sldMkLst>
-          <pc:docMk/>
-          <pc:sldMk cId="183140782" sldId="272"/>
-        </pc:sldMkLst>
-      </pc:sldChg>
-      <pc:sldChg chg="add del">
-        <pc:chgData name="Renan Xavier Cortes" userId="d6af805853004405" providerId="LiveId" clId="{6CBA8CAD-390F-4A11-B907-BBB4B6E0B449}" dt="2026-01-21T20:50:53.056" v="2195" actId="47"/>
-        <pc:sldMkLst>
-          <pc:docMk/>
-          <pc:sldMk cId="4037360461" sldId="273"/>
-        </pc:sldMkLst>
-      </pc:sldChg>
-      <pc:sldChg chg="addSp delSp modSp add mod modAnim">
-        <pc:chgData name="Renan Xavier Cortes" userId="d6af805853004405" providerId="LiveId" clId="{6CBA8CAD-390F-4A11-B907-BBB4B6E0B449}" dt="2026-01-21T20:59:49.591" v="2259" actId="1076"/>
-        <pc:sldMkLst>
-          <pc:docMk/>
-          <pc:sldMk cId="2090754589" sldId="274"/>
-        </pc:sldMkLst>
-        <pc:spChg chg="mod">
-          <ac:chgData name="Renan Xavier Cortes" userId="d6af805853004405" providerId="LiveId" clId="{6CBA8CAD-390F-4A11-B907-BBB4B6E0B449}" dt="2026-01-21T18:25:04.051" v="1202" actId="20577"/>
-          <ac:spMkLst>
-            <pc:docMk/>
-            <pc:sldMk cId="2090754589" sldId="274"/>
-            <ac:spMk id="4" creationId="{4B84190D-BF19-CEFE-E86D-F0B0EBBA7C0B}"/>
-          </ac:spMkLst>
-        </pc:spChg>
-        <pc:spChg chg="add mod">
-          <ac:chgData name="Renan Xavier Cortes" userId="d6af805853004405" providerId="LiveId" clId="{6CBA8CAD-390F-4A11-B907-BBB4B6E0B449}" dt="2026-01-21T18:25:36.776" v="1227" actId="1076"/>
-          <ac:spMkLst>
-            <pc:docMk/>
-            <pc:sldMk cId="2090754589" sldId="274"/>
-            <ac:spMk id="5" creationId="{958B68E6-C144-5060-CA7D-7C17FE22680B}"/>
-          </ac:spMkLst>
-        </pc:spChg>
-        <pc:spChg chg="mod">
-          <ac:chgData name="Renan Xavier Cortes" userId="d6af805853004405" providerId="LiveId" clId="{6CBA8CAD-390F-4A11-B907-BBB4B6E0B449}" dt="2026-01-21T20:59:49.591" v="2259" actId="1076"/>
-          <ac:spMkLst>
-            <pc:docMk/>
-            <pc:sldMk cId="2090754589" sldId="274"/>
-            <ac:spMk id="8" creationId="{39AE06C5-34BE-4D68-97C3-4C07702C2DF6}"/>
-          </ac:spMkLst>
-        </pc:spChg>
-        <pc:picChg chg="add mod">
-          <ac:chgData name="Renan Xavier Cortes" userId="d6af805853004405" providerId="LiveId" clId="{6CBA8CAD-390F-4A11-B907-BBB4B6E0B449}" dt="2026-01-21T18:27:25.221" v="1239" actId="1076"/>
-          <ac:picMkLst>
-            <pc:docMk/>
-            <pc:sldMk cId="2090754589" sldId="274"/>
-            <ac:picMk id="9" creationId="{71F18501-07D0-A985-61D0-917B8E1DCA38}"/>
-          </ac:picMkLst>
-        </pc:picChg>
-        <pc:picChg chg="add mod">
-          <ac:chgData name="Renan Xavier Cortes" userId="d6af805853004405" providerId="LiveId" clId="{6CBA8CAD-390F-4A11-B907-BBB4B6E0B449}" dt="2026-01-21T18:27:18.724" v="1236" actId="1076"/>
-          <ac:picMkLst>
-            <pc:docMk/>
-            <pc:sldMk cId="2090754589" sldId="274"/>
-            <ac:picMk id="11" creationId="{2D7DA205-FD4F-B71E-2F8B-352FF373538B}"/>
-          </ac:picMkLst>
-        </pc:picChg>
-        <pc:picChg chg="add del">
-          <ac:chgData name="Renan Xavier Cortes" userId="d6af805853004405" providerId="LiveId" clId="{6CBA8CAD-390F-4A11-B907-BBB4B6E0B449}" dt="2026-01-21T18:35:43.594" v="1254" actId="478"/>
-          <ac:picMkLst>
-            <pc:docMk/>
-            <pc:sldMk cId="2090754589" sldId="274"/>
-            <ac:picMk id="13" creationId="{3998EFE2-B89E-DC76-D434-88376055E068}"/>
-          </ac:picMkLst>
-        </pc:picChg>
-      </pc:sldChg>
-      <pc:sldChg chg="delSp modSp add mod">
-        <pc:chgData name="Renan Xavier Cortes" userId="d6af805853004405" providerId="LiveId" clId="{6CBA8CAD-390F-4A11-B907-BBB4B6E0B449}" dt="2026-01-21T20:59:53.464" v="2260" actId="1076"/>
-        <pc:sldMkLst>
-          <pc:docMk/>
-          <pc:sldMk cId="3791482239" sldId="275"/>
-        </pc:sldMkLst>
-        <pc:spChg chg="mod">
-          <ac:chgData name="Renan Xavier Cortes" userId="d6af805853004405" providerId="LiveId" clId="{6CBA8CAD-390F-4A11-B907-BBB4B6E0B449}" dt="2026-01-21T20:59:53.464" v="2260" actId="1076"/>
-          <ac:spMkLst>
-            <pc:docMk/>
-            <pc:sldMk cId="3791482239" sldId="275"/>
-            <ac:spMk id="8" creationId="{39AE06C5-34BE-4D68-97C3-4C07702C2DF6}"/>
-          </ac:spMkLst>
-        </pc:spChg>
-        <pc:picChg chg="del">
-          <ac:chgData name="Renan Xavier Cortes" userId="d6af805853004405" providerId="LiveId" clId="{6CBA8CAD-390F-4A11-B907-BBB4B6E0B449}" dt="2026-01-21T18:35:37.826" v="1252" actId="478"/>
-          <ac:picMkLst>
-            <pc:docMk/>
-            <pc:sldMk cId="3791482239" sldId="275"/>
-            <ac:picMk id="11" creationId="{2D7DA205-FD4F-B71E-2F8B-352FF373538B}"/>
-          </ac:picMkLst>
-        </pc:picChg>
-        <pc:picChg chg="mod">
-          <ac:chgData name="Renan Xavier Cortes" userId="d6af805853004405" providerId="LiveId" clId="{6CBA8CAD-390F-4A11-B907-BBB4B6E0B449}" dt="2026-01-21T18:35:40.892" v="1253" actId="1076"/>
-          <ac:picMkLst>
-            <pc:docMk/>
-            <pc:sldMk cId="3791482239" sldId="275"/>
-            <ac:picMk id="13" creationId="{3998EFE2-B89E-DC76-D434-88376055E068}"/>
-          </ac:picMkLst>
-        </pc:picChg>
-      </pc:sldChg>
-      <pc:sldChg chg="addSp modSp add mod modAnim">
-        <pc:chgData name="Renan Xavier Cortes" userId="d6af805853004405" providerId="LiveId" clId="{6CBA8CAD-390F-4A11-B907-BBB4B6E0B449}" dt="2026-01-21T20:58:56.682" v="2252" actId="1076"/>
-        <pc:sldMkLst>
-          <pc:docMk/>
-          <pc:sldMk cId="3446963972" sldId="276"/>
-        </pc:sldMkLst>
-        <pc:spChg chg="mod">
-          <ac:chgData name="Renan Xavier Cortes" userId="d6af805853004405" providerId="LiveId" clId="{6CBA8CAD-390F-4A11-B907-BBB4B6E0B449}" dt="2026-01-21T20:58:53.820" v="2251" actId="1076"/>
-          <ac:spMkLst>
-            <pc:docMk/>
-            <pc:sldMk cId="3446963972" sldId="276"/>
-            <ac:spMk id="4" creationId="{4B84190D-BF19-CEFE-E86D-F0B0EBBA7C0B}"/>
-          </ac:spMkLst>
-        </pc:spChg>
-        <pc:spChg chg="add">
-          <ac:chgData name="Renan Xavier Cortes" userId="d6af805853004405" providerId="LiveId" clId="{6CBA8CAD-390F-4A11-B907-BBB4B6E0B449}" dt="2026-01-21T18:46:47.975" v="1328"/>
-          <ac:spMkLst>
-            <pc:docMk/>
-            <pc:sldMk cId="3446963972" sldId="276"/>
-            <ac:spMk id="5" creationId="{7691A13F-E63A-E81C-7615-4E1B9C8F089B}"/>
-          </ac:spMkLst>
-        </pc:spChg>
-        <pc:spChg chg="add">
-          <ac:chgData name="Renan Xavier Cortes" userId="d6af805853004405" providerId="LiveId" clId="{6CBA8CAD-390F-4A11-B907-BBB4B6E0B449}" dt="2026-01-21T18:46:56.495" v="1331"/>
-          <ac:spMkLst>
-            <pc:docMk/>
-            <pc:sldMk cId="3446963972" sldId="276"/>
-            <ac:spMk id="6" creationId="{B9CD3EB6-CF63-45D7-8877-1B8884B44136}"/>
-          </ac:spMkLst>
-        </pc:spChg>
-        <pc:spChg chg="mod">
-          <ac:chgData name="Renan Xavier Cortes" userId="d6af805853004405" providerId="LiveId" clId="{6CBA8CAD-390F-4A11-B907-BBB4B6E0B449}" dt="2026-01-21T20:58:56.682" v="2252" actId="1076"/>
-          <ac:spMkLst>
-            <pc:docMk/>
-            <pc:sldMk cId="3446963972" sldId="276"/>
-            <ac:spMk id="8" creationId="{39AE06C5-34BE-4D68-97C3-4C07702C2DF6}"/>
-          </ac:spMkLst>
-        </pc:spChg>
-        <pc:spChg chg="add">
-          <ac:chgData name="Renan Xavier Cortes" userId="d6af805853004405" providerId="LiveId" clId="{6CBA8CAD-390F-4A11-B907-BBB4B6E0B449}" dt="2026-01-21T18:48:07.452" v="1348"/>
-          <ac:spMkLst>
-            <pc:docMk/>
-            <pc:sldMk cId="3446963972" sldId="276"/>
-            <ac:spMk id="9" creationId="{7BD61162-0455-46D7-6582-B08A63E293A9}"/>
-          </ac:spMkLst>
-        </pc:spChg>
-        <pc:spChg chg="add mod">
-          <ac:chgData name="Renan Xavier Cortes" userId="d6af805853004405" providerId="LiveId" clId="{6CBA8CAD-390F-4A11-B907-BBB4B6E0B449}" dt="2026-01-21T19:20:03.944" v="1876" actId="122"/>
-          <ac:spMkLst>
-            <pc:docMk/>
-            <pc:sldMk cId="3446963972" sldId="276"/>
-            <ac:spMk id="10" creationId="{5ED500D4-496C-7599-2503-D51C1F16CA97}"/>
-          </ac:spMkLst>
-        </pc:spChg>
-      </pc:sldChg>
-      <pc:sldChg chg="addSp delSp modSp add mod delAnim">
-        <pc:chgData name="Renan Xavier Cortes" userId="d6af805853004405" providerId="LiveId" clId="{6CBA8CAD-390F-4A11-B907-BBB4B6E0B449}" dt="2026-01-21T20:59:04.449" v="2254" actId="1076"/>
-        <pc:sldMkLst>
-          <pc:docMk/>
-          <pc:sldMk cId="3536810104" sldId="277"/>
-        </pc:sldMkLst>
-        <pc:spChg chg="mod">
-          <ac:chgData name="Renan Xavier Cortes" userId="d6af805853004405" providerId="LiveId" clId="{6CBA8CAD-390F-4A11-B907-BBB4B6E0B449}" dt="2026-01-21T20:59:01.719" v="2253" actId="1076"/>
-          <ac:spMkLst>
-            <pc:docMk/>
-            <pc:sldMk cId="3536810104" sldId="277"/>
-            <ac:spMk id="4" creationId="{4B84190D-BF19-CEFE-E86D-F0B0EBBA7C0B}"/>
-          </ac:spMkLst>
-        </pc:spChg>
-        <pc:spChg chg="add">
-          <ac:chgData name="Renan Xavier Cortes" userId="d6af805853004405" providerId="LiveId" clId="{6CBA8CAD-390F-4A11-B907-BBB4B6E0B449}" dt="2026-01-21T19:19:04.508" v="1845"/>
-          <ac:spMkLst>
-            <pc:docMk/>
-            <pc:sldMk cId="3536810104" sldId="277"/>
-            <ac:spMk id="5" creationId="{F614520D-A0CA-F6FB-739F-3A18BD793D0D}"/>
-          </ac:spMkLst>
-        </pc:spChg>
-        <pc:spChg chg="mod">
-          <ac:chgData name="Renan Xavier Cortes" userId="d6af805853004405" providerId="LiveId" clId="{6CBA8CAD-390F-4A11-B907-BBB4B6E0B449}" dt="2026-01-21T20:59:04.449" v="2254" actId="1076"/>
-          <ac:spMkLst>
-            <pc:docMk/>
-            <pc:sldMk cId="3536810104" sldId="277"/>
-            <ac:spMk id="8" creationId="{39AE06C5-34BE-4D68-97C3-4C07702C2DF6}"/>
-          </ac:spMkLst>
-        </pc:spChg>
-        <pc:spChg chg="del">
-          <ac:chgData name="Renan Xavier Cortes" userId="d6af805853004405" providerId="LiveId" clId="{6CBA8CAD-390F-4A11-B907-BBB4B6E0B449}" dt="2026-01-21T19:21:22.622" v="1907" actId="478"/>
-          <ac:spMkLst>
-            <pc:docMk/>
-            <pc:sldMk cId="3536810104" sldId="277"/>
-            <ac:spMk id="10" creationId="{5ED500D4-496C-7599-2503-D51C1F16CA97}"/>
-          </ac:spMkLst>
-        </pc:spChg>
-      </pc:sldChg>
-      <pc:sldChg chg="addSp delSp modSp add mod">
-        <pc:chgData name="Renan Xavier Cortes" userId="d6af805853004405" providerId="LiveId" clId="{6CBA8CAD-390F-4A11-B907-BBB4B6E0B449}" dt="2026-01-21T20:59:12.468" v="2255" actId="1076"/>
-        <pc:sldMkLst>
-          <pc:docMk/>
-          <pc:sldMk cId="3805335353" sldId="278"/>
-        </pc:sldMkLst>
-        <pc:spChg chg="del">
-          <ac:chgData name="Renan Xavier Cortes" userId="d6af805853004405" providerId="LiveId" clId="{6CBA8CAD-390F-4A11-B907-BBB4B6E0B449}" dt="2026-01-21T19:23:53.939" v="1927" actId="478"/>
-          <ac:spMkLst>
-            <pc:docMk/>
-            <pc:sldMk cId="3805335353" sldId="278"/>
-            <ac:spMk id="4" creationId="{4B84190D-BF19-CEFE-E86D-F0B0EBBA7C0B}"/>
-          </ac:spMkLst>
-        </pc:spChg>
-        <pc:spChg chg="mod">
-          <ac:chgData name="Renan Xavier Cortes" userId="d6af805853004405" providerId="LiveId" clId="{6CBA8CAD-390F-4A11-B907-BBB4B6E0B449}" dt="2026-01-21T20:59:12.468" v="2255" actId="1076"/>
-          <ac:spMkLst>
-            <pc:docMk/>
-            <pc:sldMk cId="3805335353" sldId="278"/>
-            <ac:spMk id="8" creationId="{39AE06C5-34BE-4D68-97C3-4C07702C2DF6}"/>
-          </ac:spMkLst>
-        </pc:spChg>
-        <pc:picChg chg="add del">
-          <ac:chgData name="Renan Xavier Cortes" userId="d6af805853004405" providerId="LiveId" clId="{6CBA8CAD-390F-4A11-B907-BBB4B6E0B449}" dt="2026-01-21T19:24:04.582" v="1929" actId="478"/>
-          <ac:picMkLst>
-            <pc:docMk/>
-            <pc:sldMk cId="3805335353" sldId="278"/>
-            <ac:picMk id="6" creationId="{921C0E59-AD89-ECC2-F222-142CFE50CC44}"/>
-          </ac:picMkLst>
-        </pc:picChg>
-        <pc:picChg chg="add del mod">
-          <ac:chgData name="Renan Xavier Cortes" userId="d6af805853004405" providerId="LiveId" clId="{6CBA8CAD-390F-4A11-B907-BBB4B6E0B449}" dt="2026-01-21T19:24:16.562" v="1932" actId="478"/>
-          <ac:picMkLst>
-            <pc:docMk/>
-            <pc:sldMk cId="3805335353" sldId="278"/>
-            <ac:picMk id="10" creationId="{6D158DB3-BBDB-4290-7B5E-041896ED57D7}"/>
-          </ac:picMkLst>
-        </pc:picChg>
-        <pc:picChg chg="add mod">
-          <ac:chgData name="Renan Xavier Cortes" userId="d6af805853004405" providerId="LiveId" clId="{6CBA8CAD-390F-4A11-B907-BBB4B6E0B449}" dt="2026-01-21T19:24:25.804" v="1936" actId="1076"/>
-          <ac:picMkLst>
-            <pc:docMk/>
-            <pc:sldMk cId="3805335353" sldId="278"/>
-            <ac:picMk id="12" creationId="{D1D61B3D-F04A-A328-6D7E-B6112CFC8500}"/>
-          </ac:picMkLst>
-        </pc:picChg>
-      </pc:sldChg>
-      <pc:sldChg chg="add del">
-        <pc:chgData name="Renan Xavier Cortes" userId="d6af805853004405" providerId="LiveId" clId="{6CBA8CAD-390F-4A11-B907-BBB4B6E0B449}" dt="2026-01-21T20:14:07.365" v="2065" actId="47"/>
-        <pc:sldMkLst>
-          <pc:docMk/>
-          <pc:sldMk cId="3848419073" sldId="279"/>
-        </pc:sldMkLst>
-      </pc:sldChg>
-      <pc:sldChg chg="addSp delSp modSp add mod modAnim">
-        <pc:chgData name="Renan Xavier Cortes" userId="d6af805853004405" providerId="LiveId" clId="{6CBA8CAD-390F-4A11-B907-BBB4B6E0B449}" dt="2026-01-21T21:00:32.127" v="2262"/>
-        <pc:sldMkLst>
-          <pc:docMk/>
-          <pc:sldMk cId="1732088967" sldId="280"/>
-        </pc:sldMkLst>
-        <pc:picChg chg="add mod">
-          <ac:chgData name="Renan Xavier Cortes" userId="d6af805853004405" providerId="LiveId" clId="{6CBA8CAD-390F-4A11-B907-BBB4B6E0B449}" dt="2026-01-21T20:10:30.304" v="2048" actId="1076"/>
-          <ac:picMkLst>
-            <pc:docMk/>
-            <pc:sldMk cId="1732088967" sldId="280"/>
-            <ac:picMk id="8" creationId="{AEF69BF5-D37C-4474-57A7-A57534FDD6C4}"/>
-          </ac:picMkLst>
-        </pc:picChg>
-        <pc:picChg chg="del">
-          <ac:chgData name="Renan Xavier Cortes" userId="d6af805853004405" providerId="LiveId" clId="{6CBA8CAD-390F-4A11-B907-BBB4B6E0B449}" dt="2026-01-21T20:10:25.088" v="2043" actId="478"/>
-          <ac:picMkLst>
-            <pc:docMk/>
-            <pc:sldMk cId="1732088967" sldId="280"/>
-            <ac:picMk id="11" creationId="{61149965-3367-6BC9-6804-26C7F2A938B0}"/>
-          </ac:picMkLst>
-        </pc:picChg>
-      </pc:sldChg>
-      <pc:sldChg chg="addSp delSp modSp add mod modAnim">
-        <pc:chgData name="Renan Xavier Cortes" userId="d6af805853004405" providerId="LiveId" clId="{6CBA8CAD-390F-4A11-B907-BBB4B6E0B449}" dt="2026-01-21T21:00:35.081" v="2263"/>
-        <pc:sldMkLst>
-          <pc:docMk/>
-          <pc:sldMk cId="1675466683" sldId="281"/>
-        </pc:sldMkLst>
-        <pc:picChg chg="add mod">
-          <ac:chgData name="Renan Xavier Cortes" userId="d6af805853004405" providerId="LiveId" clId="{6CBA8CAD-390F-4A11-B907-BBB4B6E0B449}" dt="2026-01-21T20:10:41.842" v="2053" actId="1076"/>
-          <ac:picMkLst>
-            <pc:docMk/>
-            <pc:sldMk cId="1675466683" sldId="281"/>
-            <ac:picMk id="8" creationId="{0CEA26AE-0683-B67F-BC37-373D3160DC2B}"/>
-          </ac:picMkLst>
-        </pc:picChg>
-        <pc:picChg chg="del">
-          <ac:chgData name="Renan Xavier Cortes" userId="d6af805853004405" providerId="LiveId" clId="{6CBA8CAD-390F-4A11-B907-BBB4B6E0B449}" dt="2026-01-21T20:10:39.109" v="2049" actId="478"/>
-          <ac:picMkLst>
-            <pc:docMk/>
-            <pc:sldMk cId="1675466683" sldId="281"/>
-            <ac:picMk id="11" creationId="{61149965-3367-6BC9-6804-26C7F2A938B0}"/>
-          </ac:picMkLst>
-        </pc:picChg>
-      </pc:sldChg>
-      <pc:sldChg chg="addSp delSp modSp add mod modAnim">
-        <pc:chgData name="Renan Xavier Cortes" userId="d6af805853004405" providerId="LiveId" clId="{6CBA8CAD-390F-4A11-B907-BBB4B6E0B449}" dt="2026-01-21T21:00:39.070" v="2264"/>
-        <pc:sldMkLst>
-          <pc:docMk/>
-          <pc:sldMk cId="394495569" sldId="282"/>
-        </pc:sldMkLst>
-        <pc:picChg chg="add mod">
-          <ac:chgData name="Renan Xavier Cortes" userId="d6af805853004405" providerId="LiveId" clId="{6CBA8CAD-390F-4A11-B907-BBB4B6E0B449}" dt="2026-01-21T20:10:49.139" v="2058" actId="1076"/>
-          <ac:picMkLst>
-            <pc:docMk/>
-            <pc:sldMk cId="394495569" sldId="282"/>
-            <ac:picMk id="8" creationId="{B1CCA7E3-218E-F179-62AE-8328EF43C48D}"/>
-          </ac:picMkLst>
-        </pc:picChg>
-        <pc:picChg chg="del">
-          <ac:chgData name="Renan Xavier Cortes" userId="d6af805853004405" providerId="LiveId" clId="{6CBA8CAD-390F-4A11-B907-BBB4B6E0B449}" dt="2026-01-21T20:10:46.609" v="2054" actId="478"/>
-          <ac:picMkLst>
-            <pc:docMk/>
-            <pc:sldMk cId="394495569" sldId="282"/>
-            <ac:picMk id="11" creationId="{61149965-3367-6BC9-6804-26C7F2A938B0}"/>
-          </ac:picMkLst>
-        </pc:picChg>
-      </pc:sldChg>
-      <pc:sldChg chg="addSp delSp modSp add mod modAnim">
-        <pc:chgData name="Renan Xavier Cortes" userId="d6af805853004405" providerId="LiveId" clId="{6CBA8CAD-390F-4A11-B907-BBB4B6E0B449}" dt="2026-01-21T21:00:41.723" v="2265"/>
-        <pc:sldMkLst>
-          <pc:docMk/>
-          <pc:sldMk cId="1551874195" sldId="283"/>
-        </pc:sldMkLst>
-        <pc:picChg chg="del">
-          <ac:chgData name="Renan Xavier Cortes" userId="d6af805853004405" providerId="LiveId" clId="{6CBA8CAD-390F-4A11-B907-BBB4B6E0B449}" dt="2026-01-21T20:11:11.233" v="2060" actId="478"/>
-          <ac:picMkLst>
-            <pc:docMk/>
-            <pc:sldMk cId="1551874195" sldId="283"/>
-            <ac:picMk id="8" creationId="{B1CCA7E3-218E-F179-62AE-8328EF43C48D}"/>
-          </ac:picMkLst>
-        </pc:picChg>
-        <pc:picChg chg="add del mod">
-          <ac:chgData name="Renan Xavier Cortes" userId="d6af805853004405" providerId="LiveId" clId="{6CBA8CAD-390F-4A11-B907-BBB4B6E0B449}" dt="2026-01-21T20:14:13.787" v="2066" actId="478"/>
-          <ac:picMkLst>
-            <pc:docMk/>
-            <pc:sldMk cId="1551874195" sldId="283"/>
-            <ac:picMk id="10" creationId="{F828494C-955A-760B-2AC4-9BAE7602E545}"/>
-          </ac:picMkLst>
-        </pc:picChg>
-        <pc:picChg chg="add mod">
-          <ac:chgData name="Renan Xavier Cortes" userId="d6af805853004405" providerId="LiveId" clId="{6CBA8CAD-390F-4A11-B907-BBB4B6E0B449}" dt="2026-01-21T20:14:23.924" v="2073" actId="1076"/>
-          <ac:picMkLst>
-            <pc:docMk/>
-            <pc:sldMk cId="1551874195" sldId="283"/>
-            <ac:picMk id="12" creationId="{65B2CA1E-D00D-E753-7DDF-737EC812D222}"/>
-          </ac:picMkLst>
-        </pc:picChg>
-      </pc:sldChg>
-      <pc:sldChg chg="addSp delSp modSp add mod modAnim">
-        <pc:chgData name="Renan Xavier Cortes" userId="d6af805853004405" providerId="LiveId" clId="{6CBA8CAD-390F-4A11-B907-BBB4B6E0B449}" dt="2026-01-21T21:00:47.027" v="2267"/>
-        <pc:sldMkLst>
-          <pc:docMk/>
-          <pc:sldMk cId="3855288861" sldId="284"/>
-        </pc:sldMkLst>
-        <pc:spChg chg="mod">
-          <ac:chgData name="Renan Xavier Cortes" userId="d6af805853004405" providerId="LiveId" clId="{6CBA8CAD-390F-4A11-B907-BBB4B6E0B449}" dt="2026-01-21T20:48:23.702" v="2145" actId="20577"/>
-          <ac:spMkLst>
-            <pc:docMk/>
-            <pc:sldMk cId="3855288861" sldId="284"/>
-            <ac:spMk id="4" creationId="{4B84190D-BF19-CEFE-E86D-F0B0EBBA7C0B}"/>
-          </ac:spMkLst>
-        </pc:spChg>
-        <pc:spChg chg="add mod">
-          <ac:chgData name="Renan Xavier Cortes" userId="d6af805853004405" providerId="LiveId" clId="{6CBA8CAD-390F-4A11-B907-BBB4B6E0B449}" dt="2026-01-21T20:48:43.266" v="2153" actId="1076"/>
-          <ac:spMkLst>
-            <pc:docMk/>
-            <pc:sldMk cId="3855288861" sldId="284"/>
-            <ac:spMk id="10" creationId="{2B1F81A8-3F77-3D25-0D91-989260BBD806}"/>
-          </ac:spMkLst>
-        </pc:spChg>
-        <pc:spChg chg="add mod">
-          <ac:chgData name="Renan Xavier Cortes" userId="d6af805853004405" providerId="LiveId" clId="{6CBA8CAD-390F-4A11-B907-BBB4B6E0B449}" dt="2026-01-21T20:49:00.147" v="2168" actId="1076"/>
-          <ac:spMkLst>
-            <pc:docMk/>
-            <pc:sldMk cId="3855288861" sldId="284"/>
-            <ac:spMk id="11" creationId="{ACBE2905-AC6C-0446-21C0-36CE2B864BA5}"/>
-          </ac:spMkLst>
-        </pc:spChg>
-        <pc:picChg chg="del">
-          <ac:chgData name="Renan Xavier Cortes" userId="d6af805853004405" providerId="LiveId" clId="{6CBA8CAD-390F-4A11-B907-BBB4B6E0B449}" dt="2026-01-21T20:48:26.070" v="2146" actId="478"/>
-          <ac:picMkLst>
-            <pc:docMk/>
-            <pc:sldMk cId="3855288861" sldId="284"/>
-            <ac:picMk id="6" creationId="{CB9F02F1-AFED-6149-90A3-CE7F1933A876}"/>
-          </ac:picMkLst>
-        </pc:picChg>
-        <pc:picChg chg="add mod">
-          <ac:chgData name="Renan Xavier Cortes" userId="d6af805853004405" providerId="LiveId" clId="{6CBA8CAD-390F-4A11-B907-BBB4B6E0B449}" dt="2026-01-21T20:48:57.395" v="2167" actId="1076"/>
-          <ac:picMkLst>
-            <pc:docMk/>
-            <pc:sldMk cId="3855288861" sldId="284"/>
-            <ac:picMk id="9" creationId="{61539A83-FA7C-7AD1-70FB-ECE4DD84D297}"/>
-          </ac:picMkLst>
-        </pc:picChg>
-        <pc:picChg chg="add mod">
-          <ac:chgData name="Renan Xavier Cortes" userId="d6af805853004405" providerId="LiveId" clId="{6CBA8CAD-390F-4A11-B907-BBB4B6E0B449}" dt="2026-01-21T20:49:27.109" v="2171" actId="1076"/>
-          <ac:picMkLst>
-            <pc:docMk/>
-            <pc:sldMk cId="3855288861" sldId="284"/>
-            <ac:picMk id="13" creationId="{40652A95-1D6F-2C91-CA10-BBD91EE6FCD5}"/>
-          </ac:picMkLst>
-        </pc:picChg>
-      </pc:sldChg>
-      <pc:sldChg chg="addSp delSp modSp add del mod">
-        <pc:chgData name="Renan Xavier Cortes" userId="d6af805853004405" providerId="LiveId" clId="{6CBA8CAD-390F-4A11-B907-BBB4B6E0B449}" dt="2026-01-21T20:52:43.441" v="2205" actId="47"/>
-        <pc:sldMkLst>
-          <pc:docMk/>
-          <pc:sldMk cId="675104871" sldId="285"/>
-        </pc:sldMkLst>
-        <pc:spChg chg="mod">
-          <ac:chgData name="Renan Xavier Cortes" userId="d6af805853004405" providerId="LiveId" clId="{6CBA8CAD-390F-4A11-B907-BBB4B6E0B449}" dt="2026-01-21T20:49:49.525" v="2189" actId="20577"/>
-          <ac:spMkLst>
-            <pc:docMk/>
-            <pc:sldMk cId="675104871" sldId="285"/>
-            <ac:spMk id="4" creationId="{4B84190D-BF19-CEFE-E86D-F0B0EBBA7C0B}"/>
-          </ac:spMkLst>
-        </pc:spChg>
-        <pc:spChg chg="del">
-          <ac:chgData name="Renan Xavier Cortes" userId="d6af805853004405" providerId="LiveId" clId="{6CBA8CAD-390F-4A11-B907-BBB4B6E0B449}" dt="2026-01-21T20:49:53.812" v="2192" actId="478"/>
-          <ac:spMkLst>
-            <pc:docMk/>
-            <pc:sldMk cId="675104871" sldId="285"/>
-            <ac:spMk id="10" creationId="{2B1F81A8-3F77-3D25-0D91-989260BBD806}"/>
-          </ac:spMkLst>
-        </pc:spChg>
-        <pc:spChg chg="del">
-          <ac:chgData name="Renan Xavier Cortes" userId="d6af805853004405" providerId="LiveId" clId="{6CBA8CAD-390F-4A11-B907-BBB4B6E0B449}" dt="2026-01-21T20:49:53.812" v="2192" actId="478"/>
-          <ac:spMkLst>
-            <pc:docMk/>
-            <pc:sldMk cId="675104871" sldId="285"/>
-            <ac:spMk id="11" creationId="{ACBE2905-AC6C-0446-21C0-36CE2B864BA5}"/>
-          </ac:spMkLst>
-        </pc:spChg>
-        <pc:picChg chg="add del mod">
-          <ac:chgData name="Renan Xavier Cortes" userId="d6af805853004405" providerId="LiveId" clId="{6CBA8CAD-390F-4A11-B907-BBB4B6E0B449}" dt="2026-01-21T20:52:20.405" v="2197" actId="478"/>
-          <ac:picMkLst>
-            <pc:docMk/>
-            <pc:sldMk cId="675104871" sldId="285"/>
-            <ac:picMk id="6" creationId="{96B5210F-1605-9FC7-8E4A-D66BA6A8C835}"/>
-          </ac:picMkLst>
-        </pc:picChg>
-        <pc:picChg chg="del">
-          <ac:chgData name="Renan Xavier Cortes" userId="d6af805853004405" providerId="LiveId" clId="{6CBA8CAD-390F-4A11-B907-BBB4B6E0B449}" dt="2026-01-21T20:49:51.683" v="2190" actId="478"/>
-          <ac:picMkLst>
-            <pc:docMk/>
-            <pc:sldMk cId="675104871" sldId="285"/>
-            <ac:picMk id="9" creationId="{61539A83-FA7C-7AD1-70FB-ECE4DD84D297}"/>
-          </ac:picMkLst>
-        </pc:picChg>
-        <pc:picChg chg="del">
-          <ac:chgData name="Renan Xavier Cortes" userId="d6af805853004405" providerId="LiveId" clId="{6CBA8CAD-390F-4A11-B907-BBB4B6E0B449}" dt="2026-01-21T20:49:52.623" v="2191" actId="478"/>
-          <ac:picMkLst>
-            <pc:docMk/>
-            <pc:sldMk cId="675104871" sldId="285"/>
-            <ac:picMk id="13" creationId="{40652A95-1D6F-2C91-CA10-BBD91EE6FCD5}"/>
-          </ac:picMkLst>
-        </pc:picChg>
-      </pc:sldChg>
-      <pc:sldChg chg="add modAnim">
-        <pc:chgData name="Renan Xavier Cortes" userId="d6af805853004405" providerId="LiveId" clId="{6CBA8CAD-390F-4A11-B907-BBB4B6E0B449}" dt="2026-01-21T21:00:53.358" v="2269"/>
-        <pc:sldMkLst>
-          <pc:docMk/>
-          <pc:sldMk cId="2773026186" sldId="286"/>
-        </pc:sldMkLst>
-      </pc:sldChg>
-      <pc:sldChg chg="addSp delSp modSp add mod modAnim">
-        <pc:chgData name="Renan Xavier Cortes" userId="d6af805853004405" providerId="LiveId" clId="{6CBA8CAD-390F-4A11-B907-BBB4B6E0B449}" dt="2026-01-21T21:00:49.455" v="2268"/>
-        <pc:sldMkLst>
-          <pc:docMk/>
-          <pc:sldMk cId="623748094" sldId="287"/>
-        </pc:sldMkLst>
-        <pc:spChg chg="add mod">
-          <ac:chgData name="Renan Xavier Cortes" userId="d6af805853004405" providerId="LiveId" clId="{6CBA8CAD-390F-4A11-B907-BBB4B6E0B449}" dt="2026-01-21T20:54:01.600" v="2250" actId="1076"/>
-          <ac:spMkLst>
-            <pc:docMk/>
-            <pc:sldMk cId="623748094" sldId="287"/>
-            <ac:spMk id="10" creationId="{0501C3D0-1DF0-41AE-C64F-7EABA969E7F3}"/>
-          </ac:spMkLst>
-        </pc:spChg>
-        <pc:picChg chg="del">
-          <ac:chgData name="Renan Xavier Cortes" userId="d6af805853004405" providerId="LiveId" clId="{6CBA8CAD-390F-4A11-B907-BBB4B6E0B449}" dt="2026-01-21T20:52:26.148" v="2199" actId="478"/>
-          <ac:picMkLst>
-            <pc:docMk/>
-            <pc:sldMk cId="623748094" sldId="287"/>
-            <ac:picMk id="6" creationId="{96B5210F-1605-9FC7-8E4A-D66BA6A8C835}"/>
-          </ac:picMkLst>
-        </pc:picChg>
-        <pc:picChg chg="add mod">
-          <ac:chgData name="Renan Xavier Cortes" userId="d6af805853004405" providerId="LiveId" clId="{6CBA8CAD-390F-4A11-B907-BBB4B6E0B449}" dt="2026-01-21T20:53:20.353" v="2208" actId="1076"/>
-          <ac:picMkLst>
-            <pc:docMk/>
-            <pc:sldMk cId="623748094" sldId="287"/>
-            <ac:picMk id="9" creationId="{F0AE4C95-B2E5-AD75-C8DB-CA9623F29141}"/>
-          </ac:picMkLst>
-        </pc:picChg>
-        <pc:picChg chg="add del mod">
-          <ac:chgData name="Renan Xavier Cortes" userId="d6af805853004405" providerId="LiveId" clId="{6CBA8CAD-390F-4A11-B907-BBB4B6E0B449}" dt="2026-01-21T20:53:15.846" v="2206" actId="478"/>
-          <ac:picMkLst>
-            <pc:docMk/>
-            <pc:sldMk cId="623748094" sldId="287"/>
-            <ac:picMk id="18434" creationId="{E52C266A-D0DB-93C1-2C72-A4F92F13BCD8}"/>
-          </ac:picMkLst>
-        </pc:picChg>
-      </pc:sldChg>
-    </pc:docChg>
-  </pc:docChgLst>
-  <pc:docChgLst>
-    <pc:chgData name="Renan Xavier Cortes" userId="d6af805853004405" providerId="LiveId" clId="{32CE5F03-9B31-4102-A03B-787EE1528540}"/>
-    <pc:docChg chg="undo custSel addSld delSld modSld sldOrd">
-      <pc:chgData name="Renan Xavier Cortes" userId="d6af805853004405" providerId="LiveId" clId="{32CE5F03-9B31-4102-A03B-787EE1528540}" dt="2026-10-01T14:54:51.567" v="2562" actId="1076"/>
-      <pc:docMkLst>
-        <pc:docMk/>
-      </pc:docMkLst>
-      <pc:sldChg chg="addSp delSp modSp mod">
-        <pc:chgData name="Renan Xavier Cortes" userId="d6af805853004405" providerId="LiveId" clId="{32CE5F03-9B31-4102-A03B-787EE1528540}" dt="2026-09-30T14:15:43.776" v="1256" actId="20577"/>
-        <pc:sldMkLst>
-          <pc:docMk/>
-          <pc:sldMk cId="3554767980" sldId="260"/>
-        </pc:sldMkLst>
-        <pc:spChg chg="add">
-          <ac:chgData name="Renan Xavier Cortes" userId="d6af805853004405" providerId="LiveId" clId="{32CE5F03-9B31-4102-A03B-787EE1528540}" dt="2026-09-30T13:56:14.886" v="829"/>
-          <ac:spMkLst>
-            <pc:docMk/>
-            <pc:sldMk cId="3554767980" sldId="260"/>
-            <ac:spMk id="4" creationId="{AF5919B4-CA74-37F8-4759-39BC1C4A8129}"/>
-          </ac:spMkLst>
-        </pc:spChg>
-        <pc:spChg chg="add mod">
-          <ac:chgData name="Renan Xavier Cortes" userId="d6af805853004405" providerId="LiveId" clId="{32CE5F03-9B31-4102-A03B-787EE1528540}" dt="2026-09-30T14:15:43.776" v="1256" actId="20577"/>
-          <ac:spMkLst>
-            <pc:docMk/>
-            <pc:sldMk cId="3554767980" sldId="260"/>
-            <ac:spMk id="5" creationId="{F8513A2C-EFAD-349F-ECA3-4EE11292D1C6}"/>
-          </ac:spMkLst>
-        </pc:spChg>
-        <pc:spChg chg="add mod">
-          <ac:chgData name="Renan Xavier Cortes" userId="d6af805853004405" providerId="LiveId" clId="{32CE5F03-9B31-4102-A03B-787EE1528540}" dt="2026-09-30T14:13:40.083" v="1226" actId="1076"/>
-          <ac:spMkLst>
-            <pc:docMk/>
-            <pc:sldMk cId="3554767980" sldId="260"/>
-            <ac:spMk id="9" creationId="{985D7B09-9BD8-C772-923A-E9C4FBA45B2B}"/>
-          </ac:spMkLst>
-        </pc:spChg>
-        <pc:spChg chg="mod">
-          <ac:chgData name="Renan Xavier Cortes" userId="d6af805853004405" providerId="LiveId" clId="{32CE5F03-9B31-4102-A03B-787EE1528540}" dt="2026-09-30T14:06:28.608" v="1164" actId="404"/>
-          <ac:spMkLst>
-            <pc:docMk/>
-            <pc:sldMk cId="3554767980" sldId="260"/>
-            <ac:spMk id="14" creationId="{427DBFEB-81BF-4CC3-A411-FBF43D295C56}"/>
-          </ac:spMkLst>
-        </pc:spChg>
-        <pc:picChg chg="add del mod">
-          <ac:chgData name="Renan Xavier Cortes" userId="d6af805853004405" providerId="LiveId" clId="{32CE5F03-9B31-4102-A03B-787EE1528540}" dt="2026-09-30T13:57:56.594" v="917" actId="478"/>
-          <ac:picMkLst>
-            <pc:docMk/>
-            <pc:sldMk cId="3554767980" sldId="260"/>
-            <ac:picMk id="1028" creationId="{EFF64496-3623-6156-1C45-72624FFD6A76}"/>
-          </ac:picMkLst>
-        </pc:picChg>
-        <pc:picChg chg="add mod">
-          <ac:chgData name="Renan Xavier Cortes" userId="d6af805853004405" providerId="LiveId" clId="{32CE5F03-9B31-4102-A03B-787EE1528540}" dt="2026-09-30T13:58:01.937" v="920" actId="1076"/>
-          <ac:picMkLst>
-            <pc:docMk/>
-            <pc:sldMk cId="3554767980" sldId="260"/>
-            <ac:picMk id="1030" creationId="{BAA8555A-A9C9-35F7-8A61-79165A878D49}"/>
-          </ac:picMkLst>
-        </pc:picChg>
-      </pc:sldChg>
-      <pc:sldChg chg="addSp modSp mod">
-        <pc:chgData name="Renan Xavier Cortes" userId="d6af805853004405" providerId="LiveId" clId="{32CE5F03-9B31-4102-A03B-787EE1528540}" dt="2026-10-01T14:54:51.567" v="2562" actId="1076"/>
-        <pc:sldMkLst>
-          <pc:docMk/>
-          <pc:sldMk cId="3705900010" sldId="261"/>
-        </pc:sldMkLst>
-        <pc:spChg chg="add">
-          <ac:chgData name="Renan Xavier Cortes" userId="d6af805853004405" providerId="LiveId" clId="{32CE5F03-9B31-4102-A03B-787EE1528540}" dt="2026-09-30T19:08:49.415" v="2535"/>
-          <ac:spMkLst>
-            <pc:docMk/>
-            <pc:sldMk cId="3705900010" sldId="261"/>
-            <ac:spMk id="4" creationId="{26CF9A97-1C8F-3603-527C-B47CCD37E1EF}"/>
-          </ac:spMkLst>
-        </pc:spChg>
-        <pc:spChg chg="mod">
-          <ac:chgData name="Renan Xavier Cortes" userId="d6af805853004405" providerId="LiveId" clId="{32CE5F03-9B31-4102-A03B-787EE1528540}" dt="2026-09-30T19:02:35.833" v="2239" actId="20577"/>
-          <ac:spMkLst>
-            <pc:docMk/>
-            <pc:sldMk cId="3705900010" sldId="261"/>
-            <ac:spMk id="8" creationId="{39AE06C5-34BE-4D68-97C3-4C07702C2DF6}"/>
-          </ac:spMkLst>
-        </pc:spChg>
-        <pc:spChg chg="mod">
-          <ac:chgData name="Renan Xavier Cortes" userId="d6af805853004405" providerId="LiveId" clId="{32CE5F03-9B31-4102-A03B-787EE1528540}" dt="2026-10-01T14:54:51.567" v="2562" actId="1076"/>
-          <ac:spMkLst>
-            <pc:docMk/>
-            <pc:sldMk cId="3705900010" sldId="261"/>
-            <ac:spMk id="14" creationId="{427DBFEB-81BF-4CC3-A411-FBF43D295C56}"/>
-          </ac:spMkLst>
-        </pc:spChg>
-        <pc:picChg chg="add mod">
-          <ac:chgData name="Renan Xavier Cortes" userId="d6af805853004405" providerId="LiveId" clId="{32CE5F03-9B31-4102-A03B-787EE1528540}" dt="2026-09-30T19:09:13.712" v="2543" actId="1076"/>
-          <ac:picMkLst>
-            <pc:docMk/>
-            <pc:sldMk cId="3705900010" sldId="261"/>
-            <ac:picMk id="6" creationId="{794762C9-B5D3-1977-F0FE-A99EEC89CE5D}"/>
-          </ac:picMkLst>
-        </pc:picChg>
-        <pc:picChg chg="add mod">
-          <ac:chgData name="Renan Xavier Cortes" userId="d6af805853004405" providerId="LiveId" clId="{32CE5F03-9B31-4102-A03B-787EE1528540}" dt="2026-09-30T19:09:09.950" v="2541" actId="1076"/>
-          <ac:picMkLst>
-            <pc:docMk/>
-            <pc:sldMk cId="3705900010" sldId="261"/>
-            <ac:picMk id="7170" creationId="{1A22D7E4-EFBD-340A-BBAC-D01BB1295755}"/>
-          </ac:picMkLst>
-        </pc:picChg>
-        <pc:picChg chg="add mod">
-          <ac:chgData name="Renan Xavier Cortes" userId="d6af805853004405" providerId="LiveId" clId="{32CE5F03-9B31-4102-A03B-787EE1528540}" dt="2026-09-30T19:10:25.079" v="2546" actId="1076"/>
-          <ac:picMkLst>
-            <pc:docMk/>
-            <pc:sldMk cId="3705900010" sldId="261"/>
-            <ac:picMk id="7174" creationId="{182F9BF4-F274-8F50-77FB-FC6F00E8397E}"/>
-          </ac:picMkLst>
-        </pc:picChg>
-      </pc:sldChg>
-      <pc:sldChg chg="addSp modSp mod">
-        <pc:chgData name="Renan Xavier Cortes" userId="d6af805853004405" providerId="LiveId" clId="{32CE5F03-9B31-4102-A03B-787EE1528540}" dt="2026-09-30T14:46:07.940" v="1417" actId="1076"/>
-        <pc:sldMkLst>
-          <pc:docMk/>
-          <pc:sldMk cId="1536836101" sldId="262"/>
-        </pc:sldMkLst>
-        <pc:spChg chg="add mod">
-          <ac:chgData name="Renan Xavier Cortes" userId="d6af805853004405" providerId="LiveId" clId="{32CE5F03-9B31-4102-A03B-787EE1528540}" dt="2026-09-30T14:46:03.045" v="1415" actId="403"/>
-          <ac:spMkLst>
-            <pc:docMk/>
-            <pc:sldMk cId="1536836101" sldId="262"/>
-            <ac:spMk id="5" creationId="{E0FCEFC3-016C-BECB-5C9F-C81ABE58A50B}"/>
-          </ac:spMkLst>
-        </pc:spChg>
-        <pc:spChg chg="mod">
-          <ac:chgData name="Renan Xavier Cortes" userId="d6af805853004405" providerId="LiveId" clId="{32CE5F03-9B31-4102-A03B-787EE1528540}" dt="2026-09-30T14:46:07.940" v="1417" actId="1076"/>
-          <ac:spMkLst>
-            <pc:docMk/>
-            <pc:sldMk cId="1536836101" sldId="262"/>
-            <ac:spMk id="14" creationId="{427DBFEB-81BF-4CC3-A411-FBF43D295C56}"/>
-          </ac:spMkLst>
-        </pc:spChg>
-        <pc:picChg chg="add mod">
-          <ac:chgData name="Renan Xavier Cortes" userId="d6af805853004405" providerId="LiveId" clId="{32CE5F03-9B31-4102-A03B-787EE1528540}" dt="2026-09-30T14:17:13.559" v="1259" actId="1076"/>
-          <ac:picMkLst>
-            <pc:docMk/>
-            <pc:sldMk cId="1536836101" sldId="262"/>
-            <ac:picMk id="2050" creationId="{D5753060-8B2D-376B-A341-C1A929AB6692}"/>
-          </ac:picMkLst>
-        </pc:picChg>
-      </pc:sldChg>
-      <pc:sldChg chg="addSp modSp mod">
-        <pc:chgData name="Renan Xavier Cortes" userId="d6af805853004405" providerId="LiveId" clId="{32CE5F03-9B31-4102-A03B-787EE1528540}" dt="2026-09-30T18:57:45.323" v="2169" actId="255"/>
-        <pc:sldMkLst>
-          <pc:docMk/>
-          <pc:sldMk cId="1070033144" sldId="263"/>
-        </pc:sldMkLst>
-        <pc:spChg chg="mod">
-          <ac:chgData name="Renan Xavier Cortes" userId="d6af805853004405" providerId="LiveId" clId="{32CE5F03-9B31-4102-A03B-787EE1528540}" dt="2026-09-30T18:43:50.078" v="2046" actId="1076"/>
-          <ac:spMkLst>
-            <pc:docMk/>
-            <pc:sldMk cId="1070033144" sldId="263"/>
-            <ac:spMk id="8" creationId="{39AE06C5-34BE-4D68-97C3-4C07702C2DF6}"/>
-          </ac:spMkLst>
-        </pc:spChg>
-        <pc:spChg chg="mod">
-          <ac:chgData name="Renan Xavier Cortes" userId="d6af805853004405" providerId="LiveId" clId="{32CE5F03-9B31-4102-A03B-787EE1528540}" dt="2026-09-30T18:57:45.323" v="2169" actId="255"/>
-          <ac:spMkLst>
-            <pc:docMk/>
-            <pc:sldMk cId="1070033144" sldId="263"/>
-            <ac:spMk id="14" creationId="{427DBFEB-81BF-4CC3-A411-FBF43D295C56}"/>
-          </ac:spMkLst>
-        </pc:spChg>
-        <pc:picChg chg="add mod">
-          <ac:chgData name="Renan Xavier Cortes" userId="d6af805853004405" providerId="LiveId" clId="{32CE5F03-9B31-4102-A03B-787EE1528540}" dt="2026-09-30T18:43:53.470" v="2048" actId="14100"/>
-          <ac:picMkLst>
-            <pc:docMk/>
-            <pc:sldMk cId="1070033144" sldId="263"/>
-            <ac:picMk id="6146" creationId="{54608EC3-B8E2-2804-8729-CF81BB847823}"/>
-          </ac:picMkLst>
-        </pc:picChg>
-      </pc:sldChg>
-      <pc:sldChg chg="addSp delSp modSp mod ord">
-        <pc:chgData name="Renan Xavier Cortes" userId="d6af805853004405" providerId="LiveId" clId="{32CE5F03-9B31-4102-A03B-787EE1528540}" dt="2026-09-30T18:19:19.635" v="1857" actId="1076"/>
-        <pc:sldMkLst>
-          <pc:docMk/>
-          <pc:sldMk cId="4218870347" sldId="264"/>
-        </pc:sldMkLst>
-        <pc:spChg chg="add del mod">
-          <ac:chgData name="Renan Xavier Cortes" userId="d6af805853004405" providerId="LiveId" clId="{32CE5F03-9B31-4102-A03B-787EE1528540}" dt="2026-09-30T17:55:06.674" v="1686" actId="478"/>
-          <ac:spMkLst>
-            <pc:docMk/>
-            <pc:sldMk cId="4218870347" sldId="264"/>
-            <ac:spMk id="5" creationId="{7BB93A7C-F866-CC39-8292-7BD5B8DA7A0B}"/>
-          </ac:spMkLst>
-        </pc:spChg>
-        <pc:spChg chg="add mod">
-          <ac:chgData name="Renan Xavier Cortes" userId="d6af805853004405" providerId="LiveId" clId="{32CE5F03-9B31-4102-A03B-787EE1528540}" dt="2026-09-30T17:55:15.430" v="1688" actId="403"/>
-          <ac:spMkLst>
-            <pc:docMk/>
-            <pc:sldMk cId="4218870347" sldId="264"/>
-            <ac:spMk id="9" creationId="{F3D738E0-9802-84AC-D1D0-0F6C3997DA9A}"/>
-          </ac:spMkLst>
-        </pc:spChg>
-        <pc:spChg chg="add mod">
-          <ac:chgData name="Renan Xavier Cortes" userId="d6af805853004405" providerId="LiveId" clId="{32CE5F03-9B31-4102-A03B-787EE1528540}" dt="2026-09-30T17:55:15.430" v="1688" actId="403"/>
-          <ac:spMkLst>
-            <pc:docMk/>
-            <pc:sldMk cId="4218870347" sldId="264"/>
-            <ac:spMk id="10" creationId="{472D680D-5A60-F84E-BF35-612417316049}"/>
-          </ac:spMkLst>
-        </pc:spChg>
-        <pc:spChg chg="add mod">
-          <ac:chgData name="Renan Xavier Cortes" userId="d6af805853004405" providerId="LiveId" clId="{32CE5F03-9B31-4102-A03B-787EE1528540}" dt="2026-09-30T17:54:59.157" v="1685"/>
-          <ac:spMkLst>
-            <pc:docMk/>
-            <pc:sldMk cId="4218870347" sldId="264"/>
-            <ac:spMk id="11" creationId="{463AE348-FF9C-094B-31C9-092F747FF823}"/>
-          </ac:spMkLst>
-        </pc:spChg>
-        <pc:spChg chg="add mod">
-          <ac:chgData name="Renan Xavier Cortes" userId="d6af805853004405" providerId="LiveId" clId="{32CE5F03-9B31-4102-A03B-787EE1528540}" dt="2026-09-30T18:19:19.635" v="1857" actId="1076"/>
-          <ac:spMkLst>
-            <pc:docMk/>
-            <pc:sldMk cId="4218870347" sldId="264"/>
-            <ac:spMk id="12" creationId="{E8C7AD1B-2FCE-2932-CAB2-FFF8012D7F25}"/>
-          </ac:spMkLst>
-        </pc:spChg>
-        <pc:spChg chg="add mod">
-          <ac:chgData name="Renan Xavier Cortes" userId="d6af805853004405" providerId="LiveId" clId="{32CE5F03-9B31-4102-A03B-787EE1528540}" dt="2026-09-30T17:55:10.744" v="1687" actId="1076"/>
-          <ac:spMkLst>
-            <pc:docMk/>
-            <pc:sldMk cId="4218870347" sldId="264"/>
-            <ac:spMk id="13" creationId="{188B4642-779A-5D9F-A48A-05401DD39358}"/>
-          </ac:spMkLst>
-        </pc:spChg>
-        <pc:spChg chg="mod">
-          <ac:chgData name="Renan Xavier Cortes" userId="d6af805853004405" providerId="LiveId" clId="{32CE5F03-9B31-4102-A03B-787EE1528540}" dt="2026-09-30T17:54:00.655" v="1682" actId="20577"/>
-          <ac:spMkLst>
-            <pc:docMk/>
-            <pc:sldMk cId="4218870347" sldId="264"/>
-            <ac:spMk id="14" creationId="{427DBFEB-81BF-4CC3-A411-FBF43D295C56}"/>
-          </ac:spMkLst>
-        </pc:spChg>
-        <pc:graphicFrameChg chg="add del mod">
-          <ac:chgData name="Renan Xavier Cortes" userId="d6af805853004405" providerId="LiveId" clId="{32CE5F03-9B31-4102-A03B-787EE1528540}" dt="2026-09-30T17:54:58.285" v="1684" actId="478"/>
-          <ac:graphicFrameMkLst>
-            <pc:docMk/>
-            <pc:sldMk cId="4218870347" sldId="264"/>
-            <ac:graphicFrameMk id="4" creationId="{459144C7-4703-52CE-DB4F-17FF275B5461}"/>
-          </ac:graphicFrameMkLst>
-        </pc:graphicFrameChg>
-        <pc:graphicFrameChg chg="add mod">
-          <ac:chgData name="Renan Xavier Cortes" userId="d6af805853004405" providerId="LiveId" clId="{32CE5F03-9B31-4102-A03B-787EE1528540}" dt="2026-09-30T17:54:59.157" v="1685"/>
-          <ac:graphicFrameMkLst>
-            <pc:docMk/>
-            <pc:sldMk cId="4218870347" sldId="264"/>
-            <ac:graphicFrameMk id="6" creationId="{58EE9A4A-D221-8BD1-EC89-B091240DADA6}"/>
-          </ac:graphicFrameMkLst>
-        </pc:graphicFrameChg>
-      </pc:sldChg>
-      <pc:sldChg chg="del">
-        <pc:chgData name="Renan Xavier Cortes" userId="d6af805853004405" providerId="LiveId" clId="{32CE5F03-9B31-4102-A03B-787EE1528540}" dt="2026-09-30T13:55:26.918" v="828" actId="47"/>
-        <pc:sldMkLst>
-          <pc:docMk/>
-          <pc:sldMk cId="1600642753" sldId="265"/>
-        </pc:sldMkLst>
-      </pc:sldChg>
-      <pc:sldChg chg="addSp modSp mod ord modAnim">
-        <pc:chgData name="Renan Xavier Cortes" userId="d6af805853004405" providerId="LiveId" clId="{32CE5F03-9B31-4102-A03B-787EE1528540}" dt="2026-09-30T18:35:29.770" v="2016"/>
-        <pc:sldMkLst>
-          <pc:docMk/>
-          <pc:sldMk cId="204840894" sldId="267"/>
-        </pc:sldMkLst>
-        <pc:spChg chg="mod">
-          <ac:chgData name="Renan Xavier Cortes" userId="d6af805853004405" providerId="LiveId" clId="{32CE5F03-9B31-4102-A03B-787EE1528540}" dt="2026-09-30T18:32:38.713" v="1913" actId="403"/>
-          <ac:spMkLst>
-            <pc:docMk/>
-            <pc:sldMk cId="204840894" sldId="267"/>
-            <ac:spMk id="4" creationId="{F9B44222-0FEB-DD8A-E65A-F10683C06A0F}"/>
-          </ac:spMkLst>
-        </pc:spChg>
-        <pc:spChg chg="add mod">
-          <ac:chgData name="Renan Xavier Cortes" userId="d6af805853004405" providerId="LiveId" clId="{32CE5F03-9B31-4102-A03B-787EE1528540}" dt="2026-09-30T18:31:23.069" v="1866" actId="1076"/>
-          <ac:spMkLst>
-            <pc:docMk/>
-            <pc:sldMk cId="204840894" sldId="267"/>
-            <ac:spMk id="9" creationId="{A7924BE9-722D-AE8C-355C-9C9926B6843C}"/>
-          </ac:spMkLst>
-        </pc:spChg>
-        <pc:spChg chg="add mod">
-          <ac:chgData name="Renan Xavier Cortes" userId="d6af805853004405" providerId="LiveId" clId="{32CE5F03-9B31-4102-A03B-787EE1528540}" dt="2026-09-30T18:32:45.513" v="1915" actId="1076"/>
-          <ac:spMkLst>
-            <pc:docMk/>
-            <pc:sldMk cId="204840894" sldId="267"/>
-            <ac:spMk id="10" creationId="{3DB70E76-2C85-16FB-C8CC-53EB3AEECE7B}"/>
-          </ac:spMkLst>
-        </pc:spChg>
-        <pc:spChg chg="add mod">
-          <ac:chgData name="Renan Xavier Cortes" userId="d6af805853004405" providerId="LiveId" clId="{32CE5F03-9B31-4102-A03B-787EE1528540}" dt="2026-09-30T18:33:31.583" v="1950" actId="1076"/>
-          <ac:spMkLst>
-            <pc:docMk/>
-            <pc:sldMk cId="204840894" sldId="267"/>
-            <ac:spMk id="11" creationId="{CB184BE6-0BE2-BA18-029A-52DD351FDF0B}"/>
-          </ac:spMkLst>
-        </pc:spChg>
-        <pc:spChg chg="add mod">
-          <ac:chgData name="Renan Xavier Cortes" userId="d6af805853004405" providerId="LiveId" clId="{32CE5F03-9B31-4102-A03B-787EE1528540}" dt="2026-09-30T18:34:11.379" v="1981" actId="1076"/>
-          <ac:spMkLst>
-            <pc:docMk/>
-            <pc:sldMk cId="204840894" sldId="267"/>
-            <ac:spMk id="12" creationId="{2393E99D-8654-6736-563B-90241C78B105}"/>
-          </ac:spMkLst>
-        </pc:spChg>
-        <pc:spChg chg="add mod">
-          <ac:chgData name="Renan Xavier Cortes" userId="d6af805853004405" providerId="LiveId" clId="{32CE5F03-9B31-4102-A03B-787EE1528540}" dt="2026-09-30T18:34:08.750" v="1980" actId="1076"/>
-          <ac:spMkLst>
-            <pc:docMk/>
-            <pc:sldMk cId="204840894" sldId="267"/>
-            <ac:spMk id="13" creationId="{36618367-6AF6-11AD-D1D8-E58D6B826BC7}"/>
-          </ac:spMkLst>
-        </pc:spChg>
-        <pc:spChg chg="add mod">
-          <ac:chgData name="Renan Xavier Cortes" userId="d6af805853004405" providerId="LiveId" clId="{32CE5F03-9B31-4102-A03B-787EE1528540}" dt="2026-09-30T18:33:35.489" v="1952" actId="1076"/>
-          <ac:spMkLst>
-            <pc:docMk/>
-            <pc:sldMk cId="204840894" sldId="267"/>
-            <ac:spMk id="14" creationId="{8D019ECB-738C-DA5C-6576-C6F980D41762}"/>
-          </ac:spMkLst>
-        </pc:spChg>
-        <pc:spChg chg="add mod">
-          <ac:chgData name="Renan Xavier Cortes" userId="d6af805853004405" providerId="LiveId" clId="{32CE5F03-9B31-4102-A03B-787EE1528540}" dt="2026-09-30T18:35:13.497" v="2015" actId="1076"/>
-          <ac:spMkLst>
-            <pc:docMk/>
-            <pc:sldMk cId="204840894" sldId="267"/>
-            <ac:spMk id="15" creationId="{574D6D9C-D93C-E743-92A2-746B8DEBF90F}"/>
-          </ac:spMkLst>
-        </pc:spChg>
-        <pc:spChg chg="add mod">
-          <ac:chgData name="Renan Xavier Cortes" userId="d6af805853004405" providerId="LiveId" clId="{32CE5F03-9B31-4102-A03B-787EE1528540}" dt="2026-09-30T18:34:33.281" v="1995" actId="1076"/>
-          <ac:spMkLst>
-            <pc:docMk/>
-            <pc:sldMk cId="204840894" sldId="267"/>
-            <ac:spMk id="16" creationId="{48E74E98-E9A5-2B69-D05B-BE0099A83A98}"/>
-          </ac:spMkLst>
-        </pc:spChg>
-        <pc:spChg chg="add mod">
-          <ac:chgData name="Renan Xavier Cortes" userId="d6af805853004405" providerId="LiveId" clId="{32CE5F03-9B31-4102-A03B-787EE1528540}" dt="2026-09-30T18:34:52.895" v="2000" actId="1076"/>
-          <ac:spMkLst>
-            <pc:docMk/>
-            <pc:sldMk cId="204840894" sldId="267"/>
-            <ac:spMk id="17" creationId="{FACE062B-6F3D-8D21-21CB-ECA3E8074E2F}"/>
-          </ac:spMkLst>
-        </pc:spChg>
-        <pc:spChg chg="add mod">
-          <ac:chgData name="Renan Xavier Cortes" userId="d6af805853004405" providerId="LiveId" clId="{32CE5F03-9B31-4102-A03B-787EE1528540}" dt="2026-09-30T18:35:09.419" v="2014" actId="1076"/>
-          <ac:spMkLst>
-            <pc:docMk/>
-            <pc:sldMk cId="204840894" sldId="267"/>
-            <ac:spMk id="18" creationId="{F1F8C814-56E9-CAB5-BF4F-0B98EEFB341E}"/>
-          </ac:spMkLst>
-        </pc:spChg>
-        <pc:picChg chg="add mod">
-          <ac:chgData name="Renan Xavier Cortes" userId="d6af805853004405" providerId="LiveId" clId="{32CE5F03-9B31-4102-A03B-787EE1528540}" dt="2026-09-30T18:33:46.611" v="1965" actId="1076"/>
-          <ac:picMkLst>
-            <pc:docMk/>
-            <pc:sldMk cId="204840894" sldId="267"/>
-            <ac:picMk id="6" creationId="{A9B172CF-DDA4-9000-FC49-49E50601E3A1}"/>
-          </ac:picMkLst>
-        </pc:picChg>
-      </pc:sldChg>
-      <pc:sldChg chg="del">
-        <pc:chgData name="Renan Xavier Cortes" userId="d6af805853004405" providerId="LiveId" clId="{32CE5F03-9B31-4102-A03B-787EE1528540}" dt="2026-09-29T18:53:06.902" v="89" actId="47"/>
-        <pc:sldMkLst>
-          <pc:docMk/>
-          <pc:sldMk cId="1465096313" sldId="268"/>
-        </pc:sldMkLst>
-      </pc:sldChg>
-      <pc:sldChg chg="addSp delSp modSp add mod delAnim modAnim">
-        <pc:chgData name="Renan Xavier Cortes" userId="d6af805853004405" providerId="LiveId" clId="{32CE5F03-9B31-4102-A03B-787EE1528540}" dt="2026-09-29T18:45:51.497" v="87" actId="1076"/>
-        <pc:sldMkLst>
-          <pc:docMk/>
-          <pc:sldMk cId="1268954086" sldId="270"/>
-        </pc:sldMkLst>
-        <pc:spChg chg="del">
-          <ac:chgData name="Renan Xavier Cortes" userId="d6af805853004405" providerId="LiveId" clId="{32CE5F03-9B31-4102-A03B-787EE1528540}" dt="2026-09-29T18:44:29.944" v="7" actId="478"/>
-          <ac:spMkLst>
-            <pc:docMk/>
-            <pc:sldMk cId="1268954086" sldId="270"/>
-            <ac:spMk id="9" creationId="{4ADC85D4-4D6F-B41F-8D19-0C37EEA6532F}"/>
-          </ac:spMkLst>
-        </pc:spChg>
-        <pc:spChg chg="add mod">
-          <ac:chgData name="Renan Xavier Cortes" userId="d6af805853004405" providerId="LiveId" clId="{32CE5F03-9B31-4102-A03B-787EE1528540}" dt="2026-09-29T18:45:51.497" v="87" actId="1076"/>
-          <ac:spMkLst>
-            <pc:docMk/>
-            <pc:sldMk cId="1268954086" sldId="270"/>
-            <ac:spMk id="10" creationId="{439966E0-F76D-F319-6141-19CB38DC8D8B}"/>
-          </ac:spMkLst>
-        </pc:spChg>
-        <pc:spChg chg="del">
-          <ac:chgData name="Renan Xavier Cortes" userId="d6af805853004405" providerId="LiveId" clId="{32CE5F03-9B31-4102-A03B-787EE1528540}" dt="2026-09-29T18:44:29.348" v="6" actId="478"/>
-          <ac:spMkLst>
-            <pc:docMk/>
-            <pc:sldMk cId="1268954086" sldId="270"/>
-            <ac:spMk id="11" creationId="{2618659E-1058-1132-89D4-6B86F32FC853}"/>
-          </ac:spMkLst>
-        </pc:spChg>
-        <pc:spChg chg="del">
-          <ac:chgData name="Renan Xavier Cortes" userId="d6af805853004405" providerId="LiveId" clId="{32CE5F03-9B31-4102-A03B-787EE1528540}" dt="2026-09-29T18:44:27.800" v="5" actId="478"/>
-          <ac:spMkLst>
-            <pc:docMk/>
-            <pc:sldMk cId="1268954086" sldId="270"/>
-            <ac:spMk id="12" creationId="{0A11E838-7A28-D1BE-5FDC-461C62B8169E}"/>
-          </ac:spMkLst>
-        </pc:spChg>
-        <pc:spChg chg="del">
-          <ac:chgData name="Renan Xavier Cortes" userId="d6af805853004405" providerId="LiveId" clId="{32CE5F03-9B31-4102-A03B-787EE1528540}" dt="2026-09-29T18:44:26.959" v="4" actId="478"/>
-          <ac:spMkLst>
-            <pc:docMk/>
-            <pc:sldMk cId="1268954086" sldId="270"/>
-            <ac:spMk id="13" creationId="{D1F1D044-C509-E859-2F17-4F37728104EB}"/>
-          </ac:spMkLst>
-        </pc:spChg>
-        <pc:spChg chg="add mod">
-          <ac:chgData name="Renan Xavier Cortes" userId="d6af805853004405" providerId="LiveId" clId="{32CE5F03-9B31-4102-A03B-787EE1528540}" dt="2026-09-29T18:45:51.497" v="87" actId="1076"/>
-          <ac:spMkLst>
-            <pc:docMk/>
-            <pc:sldMk cId="1268954086" sldId="270"/>
-            <ac:spMk id="14" creationId="{09C2AF41-9EBC-A93B-F400-326DED611B2C}"/>
-          </ac:spMkLst>
-        </pc:spChg>
-        <pc:picChg chg="del">
-          <ac:chgData name="Renan Xavier Cortes" userId="d6af805853004405" providerId="LiveId" clId="{32CE5F03-9B31-4102-A03B-787EE1528540}" dt="2026-09-29T18:44:25.537" v="3" actId="478"/>
-          <ac:picMkLst>
-            <pc:docMk/>
-            <pc:sldMk cId="1268954086" sldId="270"/>
-            <ac:picMk id="5" creationId="{4318DFD3-3634-EC8F-4CA2-B0EB8093C36F}"/>
-          </ac:picMkLst>
-        </pc:picChg>
-        <pc:picChg chg="add mod">
-          <ac:chgData name="Renan Xavier Cortes" userId="d6af805853004405" providerId="LiveId" clId="{32CE5F03-9B31-4102-A03B-787EE1528540}" dt="2026-09-29T18:44:36.329" v="11" actId="1076"/>
-          <ac:picMkLst>
-            <pc:docMk/>
-            <pc:sldMk cId="1268954086" sldId="270"/>
-            <ac:picMk id="6" creationId="{C7CB915E-012D-A5FC-3321-870B91EF401C}"/>
-          </ac:picMkLst>
-        </pc:picChg>
-      </pc:sldChg>
-      <pc:sldChg chg="addSp delSp modSp add mod delAnim modAnim">
-        <pc:chgData name="Renan Xavier Cortes" userId="d6af805853004405" providerId="LiveId" clId="{32CE5F03-9B31-4102-A03B-787EE1528540}" dt="2026-09-30T13:53:37.307" v="805" actId="20577"/>
-        <pc:sldMkLst>
-          <pc:docMk/>
-          <pc:sldMk cId="3832149468" sldId="271"/>
-        </pc:sldMkLst>
-        <pc:spChg chg="del">
-          <ac:chgData name="Renan Xavier Cortes" userId="d6af805853004405" providerId="LiveId" clId="{32CE5F03-9B31-4102-A03B-787EE1528540}" dt="2026-09-29T18:59:53.562" v="201" actId="478"/>
-          <ac:spMkLst>
-            <pc:docMk/>
-            <pc:sldMk cId="3832149468" sldId="271"/>
-            <ac:spMk id="9" creationId="{4ADC85D4-4D6F-B41F-8D19-0C37EEA6532F}"/>
-          </ac:spMkLst>
-        </pc:spChg>
-        <pc:spChg chg="del">
-          <ac:chgData name="Renan Xavier Cortes" userId="d6af805853004405" providerId="LiveId" clId="{32CE5F03-9B31-4102-A03B-787EE1528540}" dt="2026-09-29T18:59:48.511" v="197" actId="478"/>
-          <ac:spMkLst>
-            <pc:docMk/>
-            <pc:sldMk cId="3832149468" sldId="271"/>
-            <ac:spMk id="11" creationId="{2618659E-1058-1132-89D4-6B86F32FC853}"/>
-          </ac:spMkLst>
-        </pc:spChg>
-        <pc:spChg chg="del">
-          <ac:chgData name="Renan Xavier Cortes" userId="d6af805853004405" providerId="LiveId" clId="{32CE5F03-9B31-4102-A03B-787EE1528540}" dt="2026-09-29T18:59:50.995" v="199" actId="478"/>
-          <ac:spMkLst>
-            <pc:docMk/>
-            <pc:sldMk cId="3832149468" sldId="271"/>
-            <ac:spMk id="12" creationId="{0A11E838-7A28-D1BE-5FDC-461C62B8169E}"/>
-          </ac:spMkLst>
-        </pc:spChg>
-        <pc:spChg chg="del">
-          <ac:chgData name="Renan Xavier Cortes" userId="d6af805853004405" providerId="LiveId" clId="{32CE5F03-9B31-4102-A03B-787EE1528540}" dt="2026-09-29T18:59:49.889" v="198" actId="478"/>
-          <ac:spMkLst>
-            <pc:docMk/>
-            <pc:sldMk cId="3832149468" sldId="271"/>
-            <ac:spMk id="13" creationId="{D1F1D044-C509-E859-2F17-4F37728104EB}"/>
-          </ac:spMkLst>
-        </pc:spChg>
-        <pc:spChg chg="add mod">
-          <ac:chgData name="Renan Xavier Cortes" userId="d6af805853004405" providerId="LiveId" clId="{32CE5F03-9B31-4102-A03B-787EE1528540}" dt="2026-09-30T13:51:57.320" v="780" actId="1076"/>
-          <ac:spMkLst>
-            <pc:docMk/>
-            <pc:sldMk cId="3832149468" sldId="271"/>
-            <ac:spMk id="14" creationId="{2D353D8D-8D89-B5D0-0B0D-DBD360319F04}"/>
-          </ac:spMkLst>
-        </pc:spChg>
-        <pc:spChg chg="add mod">
-          <ac:chgData name="Renan Xavier Cortes" userId="d6af805853004405" providerId="LiveId" clId="{32CE5F03-9B31-4102-A03B-787EE1528540}" dt="2026-09-30T13:51:54.199" v="779" actId="1076"/>
-          <ac:spMkLst>
-            <pc:docMk/>
-            <pc:sldMk cId="3832149468" sldId="271"/>
-            <ac:spMk id="16" creationId="{E59EF19D-2CB3-BEA7-2B76-4879D130E732}"/>
-          </ac:spMkLst>
-        </pc:spChg>
-        <pc:spChg chg="add mod">
-          <ac:chgData name="Renan Xavier Cortes" userId="d6af805853004405" providerId="LiveId" clId="{32CE5F03-9B31-4102-A03B-787EE1528540}" dt="2026-09-30T13:53:37.307" v="805" actId="20577"/>
-          <ac:spMkLst>
-            <pc:docMk/>
-            <pc:sldMk cId="3832149468" sldId="271"/>
-            <ac:spMk id="19" creationId="{F649D27E-B466-1E84-67F4-B04DF87AFE85}"/>
-          </ac:spMkLst>
-        </pc:spChg>
-        <pc:picChg chg="del">
-          <ac:chgData name="Renan Xavier Cortes" userId="d6af805853004405" providerId="LiveId" clId="{32CE5F03-9B31-4102-A03B-787EE1528540}" dt="2026-09-30T13:51:50.239" v="777" actId="478"/>
-          <ac:picMkLst>
-            <pc:docMk/>
-            <pc:sldMk cId="3832149468" sldId="271"/>
-            <ac:picMk id="2" creationId="{567C8E3D-C535-EC50-849C-270CEB4B8A04}"/>
-          </ac:picMkLst>
-        </pc:picChg>
-        <pc:picChg chg="del">
-          <ac:chgData name="Renan Xavier Cortes" userId="d6af805853004405" providerId="LiveId" clId="{32CE5F03-9B31-4102-A03B-787EE1528540}" dt="2026-09-30T13:51:47.039" v="775" actId="478"/>
-          <ac:picMkLst>
-            <pc:docMk/>
-            <pc:sldMk cId="3832149468" sldId="271"/>
-            <ac:picMk id="3" creationId="{C9663204-9A6C-C5D7-7C9B-AAF5653911D6}"/>
-          </ac:picMkLst>
-        </pc:picChg>
-        <pc:picChg chg="del">
-          <ac:chgData name="Renan Xavier Cortes" userId="d6af805853004405" providerId="LiveId" clId="{32CE5F03-9B31-4102-A03B-787EE1528540}" dt="2026-09-29T18:59:51.795" v="200" actId="478"/>
-          <ac:picMkLst>
-            <pc:docMk/>
-            <pc:sldMk cId="3832149468" sldId="271"/>
-            <ac:picMk id="5" creationId="{4318DFD3-3634-EC8F-4CA2-B0EB8093C36F}"/>
-          </ac:picMkLst>
-        </pc:picChg>
-        <pc:picChg chg="add mod">
-          <ac:chgData name="Renan Xavier Cortes" userId="d6af805853004405" providerId="LiveId" clId="{32CE5F03-9B31-4102-A03B-787EE1528540}" dt="2026-09-30T13:50:30.558" v="647" actId="1076"/>
-          <ac:picMkLst>
-            <pc:docMk/>
-            <pc:sldMk cId="3832149468" sldId="271"/>
-            <ac:picMk id="6" creationId="{9FA44AA4-873C-9384-BBCC-5F18798D8247}"/>
-          </ac:picMkLst>
-        </pc:picChg>
-        <pc:picChg chg="add mod">
-          <ac:chgData name="Renan Xavier Cortes" userId="d6af805853004405" providerId="LiveId" clId="{32CE5F03-9B31-4102-A03B-787EE1528540}" dt="2026-09-30T13:52:01.367" v="782" actId="1076"/>
-          <ac:picMkLst>
-            <pc:docMk/>
-            <pc:sldMk cId="3832149468" sldId="271"/>
-            <ac:picMk id="18" creationId="{E7C5C5E8-BDC7-6A56-284B-4BA81B6ED2B4}"/>
-          </ac:picMkLst>
-        </pc:picChg>
-      </pc:sldChg>
-      <pc:sldChg chg="add del">
-        <pc:chgData name="Renan Xavier Cortes" userId="d6af805853004405" providerId="LiveId" clId="{32CE5F03-9B31-4102-A03B-787EE1528540}" dt="2026-09-30T18:31:57.931" v="1868" actId="47"/>
-        <pc:sldMkLst>
-          <pc:docMk/>
-          <pc:sldMk cId="1290076" sldId="272"/>
-        </pc:sldMkLst>
-      </pc:sldChg>
-      <pc:sldChg chg="add">
-        <pc:chgData name="Renan Xavier Cortes" userId="d6af805853004405" providerId="LiveId" clId="{32CE5F03-9B31-4102-A03B-787EE1528540}" dt="2026-09-29T18:52:42.033" v="88"/>
-        <pc:sldMkLst>
-          <pc:docMk/>
-          <pc:sldMk cId="587472357" sldId="273"/>
-        </pc:sldMkLst>
-      </pc:sldChg>
-      <pc:sldChg chg="modSp add mod">
-        <pc:chgData name="Renan Xavier Cortes" userId="d6af805853004405" providerId="LiveId" clId="{32CE5F03-9B31-4102-A03B-787EE1528540}" dt="2026-09-30T19:14:08.306" v="2548" actId="20577"/>
-        <pc:sldMkLst>
-          <pc:docMk/>
-          <pc:sldMk cId="2697758197" sldId="274"/>
-        </pc:sldMkLst>
-        <pc:spChg chg="mod">
-          <ac:chgData name="Renan Xavier Cortes" userId="d6af805853004405" providerId="LiveId" clId="{32CE5F03-9B31-4102-A03B-787EE1528540}" dt="2026-09-30T19:14:08.306" v="2548" actId="20577"/>
-          <ac:spMkLst>
-            <pc:docMk/>
-            <pc:sldMk cId="2697758197" sldId="274"/>
-            <ac:spMk id="4" creationId="{F9B44222-0FEB-DD8A-E65A-F10683C06A0F}"/>
-          </ac:spMkLst>
-        </pc:spChg>
-      </pc:sldChg>
-      <pc:sldChg chg="addSp delSp modSp add mod ord modAnim">
-        <pc:chgData name="Renan Xavier Cortes" userId="d6af805853004405" providerId="LiveId" clId="{32CE5F03-9B31-4102-A03B-787EE1528540}" dt="2026-09-30T13:15:15.035" v="536" actId="20577"/>
-        <pc:sldMkLst>
-          <pc:docMk/>
-          <pc:sldMk cId="2071889659" sldId="275"/>
-        </pc:sldMkLst>
-        <pc:spChg chg="mod">
-          <ac:chgData name="Renan Xavier Cortes" userId="d6af805853004405" providerId="LiveId" clId="{32CE5F03-9B31-4102-A03B-787EE1528540}" dt="2026-09-29T19:00:23.343" v="313" actId="20577"/>
-          <ac:spMkLst>
-            <pc:docMk/>
-            <pc:sldMk cId="2071889659" sldId="275"/>
-            <ac:spMk id="4" creationId="{F9B44222-0FEB-DD8A-E65A-F10683C06A0F}"/>
-          </ac:spMkLst>
-        </pc:spChg>
-        <pc:spChg chg="add del">
-          <ac:chgData name="Renan Xavier Cortes" userId="d6af805853004405" providerId="LiveId" clId="{32CE5F03-9B31-4102-A03B-787EE1528540}" dt="2026-09-29T19:02:05.280" v="333" actId="11529"/>
-          <ac:spMkLst>
-            <pc:docMk/>
-            <pc:sldMk cId="2071889659" sldId="275"/>
-            <ac:spMk id="11" creationId="{8BEE410F-77B2-4534-4D33-ACC5D248E82D}"/>
-          </ac:spMkLst>
-        </pc:spChg>
-        <pc:spChg chg="add mod">
-          <ac:chgData name="Renan Xavier Cortes" userId="d6af805853004405" providerId="LiveId" clId="{32CE5F03-9B31-4102-A03B-787EE1528540}" dt="2026-09-29T19:02:32.496" v="350" actId="692"/>
-          <ac:spMkLst>
-            <pc:docMk/>
-            <pc:sldMk cId="2071889659" sldId="275"/>
-            <ac:spMk id="12" creationId="{0B40F988-AD4C-F7F7-CE31-F2CDDF82E91A}"/>
-          </ac:spMkLst>
-        </pc:spChg>
-        <pc:spChg chg="add mod">
-          <ac:chgData name="Renan Xavier Cortes" userId="d6af805853004405" providerId="LiveId" clId="{32CE5F03-9B31-4102-A03B-787EE1528540}" dt="2026-09-29T19:02:49.280" v="354" actId="14100"/>
-          <ac:spMkLst>
-            <pc:docMk/>
-            <pc:sldMk cId="2071889659" sldId="275"/>
-            <ac:spMk id="13" creationId="{D34651EC-928C-45A9-FB4A-89294682FE03}"/>
-          </ac:spMkLst>
-        </pc:spChg>
-        <pc:spChg chg="add mod">
-          <ac:chgData name="Renan Xavier Cortes" userId="d6af805853004405" providerId="LiveId" clId="{32CE5F03-9B31-4102-A03B-787EE1528540}" dt="2026-09-30T13:15:15.035" v="536" actId="20577"/>
-          <ac:spMkLst>
-            <pc:docMk/>
-            <pc:sldMk cId="2071889659" sldId="275"/>
-            <ac:spMk id="16" creationId="{B5C85418-58C3-73C3-56E1-05082A43A7EA}"/>
-          </ac:spMkLst>
-        </pc:spChg>
-        <pc:picChg chg="add mod">
-          <ac:chgData name="Renan Xavier Cortes" userId="d6af805853004405" providerId="LiveId" clId="{32CE5F03-9B31-4102-A03B-787EE1528540}" dt="2026-09-29T19:01:30.373" v="321" actId="1076"/>
-          <ac:picMkLst>
-            <pc:docMk/>
-            <pc:sldMk cId="2071889659" sldId="275"/>
-            <ac:picMk id="6" creationId="{E0B70768-61C8-F85A-E614-A9F14CEAD950}"/>
-          </ac:picMkLst>
-        </pc:picChg>
-        <pc:picChg chg="add del mod">
-          <ac:chgData name="Renan Xavier Cortes" userId="d6af805853004405" providerId="LiveId" clId="{32CE5F03-9B31-4102-A03B-787EE1528540}" dt="2026-09-29T19:03:10.356" v="355" actId="478"/>
-          <ac:picMkLst>
-            <pc:docMk/>
-            <pc:sldMk cId="2071889659" sldId="275"/>
-            <ac:picMk id="10" creationId="{918C452C-A393-6CAA-7A87-EA606435045A}"/>
-          </ac:picMkLst>
-        </pc:picChg>
-        <pc:picChg chg="add mod">
-          <ac:chgData name="Renan Xavier Cortes" userId="d6af805853004405" providerId="LiveId" clId="{32CE5F03-9B31-4102-A03B-787EE1528540}" dt="2026-09-29T19:03:40.045" v="359" actId="1076"/>
-          <ac:picMkLst>
-            <pc:docMk/>
-            <pc:sldMk cId="2071889659" sldId="275"/>
-            <ac:picMk id="15" creationId="{AD23F083-ACAE-F3BE-99C5-AC59D9D5284D}"/>
-          </ac:picMkLst>
-        </pc:picChg>
-      </pc:sldChg>
-      <pc:sldChg chg="addSp delSp modSp add mod">
-        <pc:chgData name="Renan Xavier Cortes" userId="d6af805853004405" providerId="LiveId" clId="{32CE5F03-9B31-4102-A03B-787EE1528540}" dt="2026-09-30T14:53:19.890" v="1625" actId="20577"/>
-        <pc:sldMkLst>
-          <pc:docMk/>
-          <pc:sldMk cId="2069633465" sldId="276"/>
-        </pc:sldMkLst>
-        <pc:spChg chg="del">
-          <ac:chgData name="Renan Xavier Cortes" userId="d6af805853004405" providerId="LiveId" clId="{32CE5F03-9B31-4102-A03B-787EE1528540}" dt="2026-09-30T14:50:33.587" v="1421" actId="478"/>
-          <ac:spMkLst>
-            <pc:docMk/>
-            <pc:sldMk cId="2069633465" sldId="276"/>
-            <ac:spMk id="5" creationId="{E0FCEFC3-016C-BECB-5C9F-C81ABE58A50B}"/>
-          </ac:spMkLst>
-        </pc:spChg>
-        <pc:spChg chg="add mod">
-          <ac:chgData name="Renan Xavier Cortes" userId="d6af805853004405" providerId="LiveId" clId="{32CE5F03-9B31-4102-A03B-787EE1528540}" dt="2026-09-30T14:53:19.890" v="1625" actId="20577"/>
-          <ac:spMkLst>
-            <pc:docMk/>
-            <pc:sldMk cId="2069633465" sldId="276"/>
-            <ac:spMk id="9" creationId="{4D79014A-3A45-CFD7-AE17-E00E6FC5D783}"/>
-          </ac:spMkLst>
-        </pc:spChg>
-        <pc:spChg chg="del">
-          <ac:chgData name="Renan Xavier Cortes" userId="d6af805853004405" providerId="LiveId" clId="{32CE5F03-9B31-4102-A03B-787EE1528540}" dt="2026-09-30T14:50:31.662" v="1420" actId="478"/>
-          <ac:spMkLst>
-            <pc:docMk/>
-            <pc:sldMk cId="2069633465" sldId="276"/>
-            <ac:spMk id="14" creationId="{427DBFEB-81BF-4CC3-A411-FBF43D295C56}"/>
-          </ac:spMkLst>
-        </pc:spChg>
-        <pc:picChg chg="add mod">
-          <ac:chgData name="Renan Xavier Cortes" userId="d6af805853004405" providerId="LiveId" clId="{32CE5F03-9B31-4102-A03B-787EE1528540}" dt="2026-09-30T14:51:59.113" v="1580" actId="1076"/>
-          <ac:picMkLst>
-            <pc:docMk/>
-            <pc:sldMk cId="2069633465" sldId="276"/>
-            <ac:picMk id="6" creationId="{64DDF3AB-FF5B-BF09-85E6-30B0D1CEF6F4}"/>
-          </ac:picMkLst>
-        </pc:picChg>
-        <pc:picChg chg="del">
-          <ac:chgData name="Renan Xavier Cortes" userId="d6af805853004405" providerId="LiveId" clId="{32CE5F03-9B31-4102-A03B-787EE1528540}" dt="2026-09-30T14:50:30.343" v="1419" actId="478"/>
-          <ac:picMkLst>
-            <pc:docMk/>
-            <pc:sldMk cId="2069633465" sldId="276"/>
-            <ac:picMk id="2050" creationId="{D5753060-8B2D-376B-A341-C1A929AB6692}"/>
-          </ac:picMkLst>
-        </pc:picChg>
-      </pc:sldChg>
-      <pc:sldChg chg="addSp delSp modSp add mod">
-        <pc:chgData name="Renan Xavier Cortes" userId="d6af805853004405" providerId="LiveId" clId="{32CE5F03-9B31-4102-A03B-787EE1528540}" dt="2026-09-30T14:59:07.206" v="1677" actId="1076"/>
-        <pc:sldMkLst>
-          <pc:docMk/>
-          <pc:sldMk cId="1019914244" sldId="277"/>
-        </pc:sldMkLst>
-        <pc:spChg chg="mod">
-          <ac:chgData name="Renan Xavier Cortes" userId="d6af805853004405" providerId="LiveId" clId="{32CE5F03-9B31-4102-A03B-787EE1528540}" dt="2026-09-30T14:55:27.039" v="1664" actId="20577"/>
-          <ac:spMkLst>
-            <pc:docMk/>
-            <pc:sldMk cId="1019914244" sldId="277"/>
-            <ac:spMk id="9" creationId="{4D79014A-3A45-CFD7-AE17-E00E6FC5D783}"/>
-          </ac:spMkLst>
-        </pc:spChg>
-        <pc:picChg chg="del">
-          <ac:chgData name="Renan Xavier Cortes" userId="d6af805853004405" providerId="LiveId" clId="{32CE5F03-9B31-4102-A03B-787EE1528540}" dt="2026-09-30T14:56:11.182" v="1669" actId="478"/>
-          <ac:picMkLst>
-            <pc:docMk/>
-            <pc:sldMk cId="1019914244" sldId="277"/>
-            <ac:picMk id="2" creationId="{567C8E3D-C535-EC50-849C-270CEB4B8A04}"/>
-          </ac:picMkLst>
-        </pc:picChg>
-        <pc:picChg chg="del">
-          <ac:chgData name="Renan Xavier Cortes" userId="d6af805853004405" providerId="LiveId" clId="{32CE5F03-9B31-4102-A03B-787EE1528540}" dt="2026-09-30T14:58:58.389" v="1672" actId="478"/>
-          <ac:picMkLst>
-            <pc:docMk/>
-            <pc:sldMk cId="1019914244" sldId="277"/>
-            <ac:picMk id="3" creationId="{C9663204-9A6C-C5D7-7C9B-AAF5653911D6}"/>
-          </ac:picMkLst>
-        </pc:picChg>
-        <pc:picChg chg="add mod">
-          <ac:chgData name="Renan Xavier Cortes" userId="d6af805853004405" providerId="LiveId" clId="{32CE5F03-9B31-4102-A03B-787EE1528540}" dt="2026-09-30T14:56:13.020" v="1670" actId="1076"/>
-          <ac:picMkLst>
-            <pc:docMk/>
-            <pc:sldMk cId="1019914244" sldId="277"/>
-            <ac:picMk id="5" creationId="{ECE5EC1F-14C5-843E-05EF-98FE5A646D9D}"/>
-          </ac:picMkLst>
-        </pc:picChg>
-        <pc:picChg chg="del">
-          <ac:chgData name="Renan Xavier Cortes" userId="d6af805853004405" providerId="LiveId" clId="{32CE5F03-9B31-4102-A03B-787EE1528540}" dt="2026-09-30T14:56:07.050" v="1665" actId="478"/>
-          <ac:picMkLst>
-            <pc:docMk/>
-            <pc:sldMk cId="1019914244" sldId="277"/>
-            <ac:picMk id="6" creationId="{64DDF3AB-FF5B-BF09-85E6-30B0D1CEF6F4}"/>
-          </ac:picMkLst>
-        </pc:picChg>
-        <pc:picChg chg="add mod">
-          <ac:chgData name="Renan Xavier Cortes" userId="d6af805853004405" providerId="LiveId" clId="{32CE5F03-9B31-4102-A03B-787EE1528540}" dt="2026-09-30T14:59:07.206" v="1677" actId="1076"/>
-          <ac:picMkLst>
-            <pc:docMk/>
-            <pc:sldMk cId="1019914244" sldId="277"/>
-            <ac:picMk id="11" creationId="{7D2F9AF2-3B27-E6C1-5DA5-DAD401A60DEC}"/>
-          </ac:picMkLst>
-        </pc:picChg>
-      </pc:sldChg>
-      <pc:sldChg chg="addSp delSp modSp add mod">
-        <pc:chgData name="Renan Xavier Cortes" userId="d6af805853004405" providerId="LiveId" clId="{32CE5F03-9B31-4102-A03B-787EE1528540}" dt="2026-09-30T18:14:47.213" v="1846" actId="122"/>
-        <pc:sldMkLst>
-          <pc:docMk/>
-          <pc:sldMk cId="1921800444" sldId="278"/>
-        </pc:sldMkLst>
-        <pc:spChg chg="add mod">
-          <ac:chgData name="Renan Xavier Cortes" userId="d6af805853004405" providerId="LiveId" clId="{32CE5F03-9B31-4102-A03B-787EE1528540}" dt="2026-09-30T18:12:49.389" v="1724" actId="1076"/>
-          <ac:spMkLst>
-            <pc:docMk/>
-            <pc:sldMk cId="1921800444" sldId="278"/>
-            <ac:spMk id="5" creationId="{8B10989E-6495-BA93-F912-8AAFEB296936}"/>
-          </ac:spMkLst>
-        </pc:spChg>
-        <pc:spChg chg="del">
-          <ac:chgData name="Renan Xavier Cortes" userId="d6af805853004405" providerId="LiveId" clId="{32CE5F03-9B31-4102-A03B-787EE1528540}" dt="2026-09-30T18:11:28.032" v="1706" actId="478"/>
-          <ac:spMkLst>
-            <pc:docMk/>
-            <pc:sldMk cId="1921800444" sldId="278"/>
-            <ac:spMk id="9" creationId="{F3D738E0-9802-84AC-D1D0-0F6C3997DA9A}"/>
-          </ac:spMkLst>
-        </pc:spChg>
-        <pc:spChg chg="del">
-          <ac:chgData name="Renan Xavier Cortes" userId="d6af805853004405" providerId="LiveId" clId="{32CE5F03-9B31-4102-A03B-787EE1528540}" dt="2026-09-30T18:11:28.882" v="1707" actId="478"/>
-          <ac:spMkLst>
-            <pc:docMk/>
-            <pc:sldMk cId="1921800444" sldId="278"/>
-            <ac:spMk id="10" creationId="{472D680D-5A60-F84E-BF35-612417316049}"/>
-          </ac:spMkLst>
-        </pc:spChg>
-        <pc:spChg chg="del">
-          <ac:chgData name="Renan Xavier Cortes" userId="d6af805853004405" providerId="LiveId" clId="{32CE5F03-9B31-4102-A03B-787EE1528540}" dt="2026-09-30T18:11:29.817" v="1708" actId="478"/>
-          <ac:spMkLst>
-            <pc:docMk/>
-            <pc:sldMk cId="1921800444" sldId="278"/>
-            <ac:spMk id="11" creationId="{463AE348-FF9C-094B-31C9-092F747FF823}"/>
-          </ac:spMkLst>
-        </pc:spChg>
-        <pc:spChg chg="del">
-          <ac:chgData name="Renan Xavier Cortes" userId="d6af805853004405" providerId="LiveId" clId="{32CE5F03-9B31-4102-A03B-787EE1528540}" dt="2026-09-30T18:11:32.786" v="1709" actId="478"/>
-          <ac:spMkLst>
-            <pc:docMk/>
-            <pc:sldMk cId="1921800444" sldId="278"/>
-            <ac:spMk id="12" creationId="{E8C7AD1B-2FCE-2932-CAB2-FFF8012D7F25}"/>
-          </ac:spMkLst>
-        </pc:spChg>
-        <pc:spChg chg="del">
-          <ac:chgData name="Renan Xavier Cortes" userId="d6af805853004405" providerId="LiveId" clId="{32CE5F03-9B31-4102-A03B-787EE1528540}" dt="2026-09-30T18:11:40.294" v="1712" actId="478"/>
-          <ac:spMkLst>
-            <pc:docMk/>
-            <pc:sldMk cId="1921800444" sldId="278"/>
-            <ac:spMk id="13" creationId="{188B4642-779A-5D9F-A48A-05401DD39358}"/>
-          </ac:spMkLst>
-        </pc:spChg>
-        <pc:spChg chg="add mod">
-          <ac:chgData name="Renan Xavier Cortes" userId="d6af805853004405" providerId="LiveId" clId="{32CE5F03-9B31-4102-A03B-787EE1528540}" dt="2026-09-30T18:14:47.213" v="1846" actId="122"/>
-          <ac:spMkLst>
-            <pc:docMk/>
-            <pc:sldMk cId="1921800444" sldId="278"/>
-            <ac:spMk id="15" creationId="{F866C2C7-F83C-0C53-9473-159DD068B21A}"/>
-          </ac:spMkLst>
-        </pc:spChg>
-        <pc:graphicFrameChg chg="del">
-          <ac:chgData name="Renan Xavier Cortes" userId="d6af805853004405" providerId="LiveId" clId="{32CE5F03-9B31-4102-A03B-787EE1528540}" dt="2026-09-30T18:11:26.899" v="1705" actId="478"/>
-          <ac:graphicFrameMkLst>
-            <pc:docMk/>
-            <pc:sldMk cId="1921800444" sldId="278"/>
-            <ac:graphicFrameMk id="6" creationId="{58EE9A4A-D221-8BD1-EC89-B091240DADA6}"/>
-          </ac:graphicFrameMkLst>
-        </pc:graphicFrameChg>
-        <pc:picChg chg="add mod">
-          <ac:chgData name="Renan Xavier Cortes" userId="d6af805853004405" providerId="LiveId" clId="{32CE5F03-9B31-4102-A03B-787EE1528540}" dt="2026-09-30T18:14:17.047" v="1842" actId="1076"/>
-          <ac:picMkLst>
-            <pc:docMk/>
-            <pc:sldMk cId="1921800444" sldId="278"/>
-            <ac:picMk id="3074" creationId="{496D2546-4354-68C6-EAA2-03111C34F4D9}"/>
-          </ac:picMkLst>
-        </pc:picChg>
       </pc:sldChg>
     </pc:docChg>
   </pc:docChgLst>
@@ -3876,7 +3876,7 @@
           <a:p>
             <a:fld id="{9B3F8303-3E6A-4B9A-B114-90BC24763552}" type="datetimeFigureOut">
               <a:rPr lang="pt-BR" smtClean="0"/>
-              <a:t>01/10/2026</a:t>
+              <a:t>06/10/2026</a:t>
             </a:fld>
             <a:endParaRPr lang="pt-BR"/>
           </a:p>
@@ -5634,7 +5634,7 @@
           <a:p>
             <a:fld id="{6D1CE400-4242-4B09-9036-D13CC6199FDE}" type="datetimeFigureOut">
               <a:rPr lang="pt-BR" smtClean="0"/>
-              <a:t>01/10/2026</a:t>
+              <a:t>06/10/2026</a:t>
             </a:fld>
             <a:endParaRPr lang="pt-BR"/>
           </a:p>
@@ -5832,7 +5832,7 @@
           <a:p>
             <a:fld id="{6D1CE400-4242-4B09-9036-D13CC6199FDE}" type="datetimeFigureOut">
               <a:rPr lang="pt-BR" smtClean="0"/>
-              <a:t>01/10/2026</a:t>
+              <a:t>06/10/2026</a:t>
             </a:fld>
             <a:endParaRPr lang="pt-BR"/>
           </a:p>
@@ -6040,7 +6040,7 @@
           <a:p>
             <a:fld id="{6D1CE400-4242-4B09-9036-D13CC6199FDE}" type="datetimeFigureOut">
               <a:rPr lang="pt-BR" smtClean="0"/>
-              <a:t>01/10/2026</a:t>
+              <a:t>06/10/2026</a:t>
             </a:fld>
             <a:endParaRPr lang="pt-BR"/>
           </a:p>
@@ -6238,7 +6238,7 @@
           <a:p>
             <a:fld id="{6D1CE400-4242-4B09-9036-D13CC6199FDE}" type="datetimeFigureOut">
               <a:rPr lang="pt-BR" smtClean="0"/>
-              <a:t>01/10/2026</a:t>
+              <a:t>06/10/2026</a:t>
             </a:fld>
             <a:endParaRPr lang="pt-BR"/>
           </a:p>
@@ -6513,7 +6513,7 @@
           <a:p>
             <a:fld id="{6D1CE400-4242-4B09-9036-D13CC6199FDE}" type="datetimeFigureOut">
               <a:rPr lang="pt-BR" smtClean="0"/>
-              <a:t>01/10/2026</a:t>
+              <a:t>06/10/2026</a:t>
             </a:fld>
             <a:endParaRPr lang="pt-BR"/>
           </a:p>
@@ -6778,7 +6778,7 @@
           <a:p>
             <a:fld id="{6D1CE400-4242-4B09-9036-D13CC6199FDE}" type="datetimeFigureOut">
               <a:rPr lang="pt-BR" smtClean="0"/>
-              <a:t>01/10/2026</a:t>
+              <a:t>06/10/2026</a:t>
             </a:fld>
             <a:endParaRPr lang="pt-BR"/>
           </a:p>
@@ -7190,7 +7190,7 @@
           <a:p>
             <a:fld id="{6D1CE400-4242-4B09-9036-D13CC6199FDE}" type="datetimeFigureOut">
               <a:rPr lang="pt-BR" smtClean="0"/>
-              <a:t>01/10/2026</a:t>
+              <a:t>06/10/2026</a:t>
             </a:fld>
             <a:endParaRPr lang="pt-BR"/>
           </a:p>
@@ -7331,7 +7331,7 @@
           <a:p>
             <a:fld id="{6D1CE400-4242-4B09-9036-D13CC6199FDE}" type="datetimeFigureOut">
               <a:rPr lang="pt-BR" smtClean="0"/>
-              <a:t>01/10/2026</a:t>
+              <a:t>06/10/2026</a:t>
             </a:fld>
             <a:endParaRPr lang="pt-BR"/>
           </a:p>
@@ -7444,7 +7444,7 @@
           <a:p>
             <a:fld id="{6D1CE400-4242-4B09-9036-D13CC6199FDE}" type="datetimeFigureOut">
               <a:rPr lang="pt-BR" smtClean="0"/>
-              <a:t>01/10/2026</a:t>
+              <a:t>06/10/2026</a:t>
             </a:fld>
             <a:endParaRPr lang="pt-BR"/>
           </a:p>
@@ -7755,7 +7755,7 @@
           <a:p>
             <a:fld id="{6D1CE400-4242-4B09-9036-D13CC6199FDE}" type="datetimeFigureOut">
               <a:rPr lang="pt-BR" smtClean="0"/>
-              <a:t>01/10/2026</a:t>
+              <a:t>06/10/2026</a:t>
             </a:fld>
             <a:endParaRPr lang="pt-BR"/>
           </a:p>
@@ -8043,7 +8043,7 @@
           <a:p>
             <a:fld id="{6D1CE400-4242-4B09-9036-D13CC6199FDE}" type="datetimeFigureOut">
               <a:rPr lang="pt-BR" smtClean="0"/>
-              <a:t>01/10/2026</a:t>
+              <a:t>06/10/2026</a:t>
             </a:fld>
             <a:endParaRPr lang="pt-BR"/>
           </a:p>
@@ -8287,7 +8287,7 @@
           <a:p>
             <a:fld id="{6D1CE400-4242-4B09-9036-D13CC6199FDE}" type="datetimeFigureOut">
               <a:rPr lang="pt-BR" smtClean="0"/>
-              <a:t>01/10/2026</a:t>
+              <a:t>06/10/2026</a:t>
             </a:fld>
             <a:endParaRPr lang="pt-BR"/>
           </a:p>
@@ -9269,7 +9269,7 @@
         </p:nvSpPr>
         <p:spPr>
           <a:xfrm>
-            <a:off x="940903" y="2305953"/>
+            <a:off x="940904" y="2387418"/>
             <a:ext cx="11050446" cy="3789242"/>
           </a:xfrm>
           <a:prstGeom prst="rect">
@@ -9295,7 +9295,7 @@
             </a:pPr>
             <a:r>
               <a:rPr lang="pt-BR" sz="2000" b="1" dirty="0"/>
-              <a:t>Problemas: violência é um fenômeno complexo e de multifatorial e estimar a quantidade de armas em circulação é desafiador.</a:t>
+              <a:t>Problemas: violência é um fenômeno complexo e multifatorial e, além disso, estimar a quantidade de armas em circulação é desafiador.</a:t>
             </a:r>
           </a:p>
           <a:p>
@@ -9324,7 +9324,7 @@
             </a:pPr>
             <a:r>
               <a:rPr lang="pt-BR" sz="2000" b="1" dirty="0"/>
-              <a:t>No Brasil, a obra de Daniel Cerqueira (“Menos Armas, Menos Crimes”) se destaca, defendendo que a redução na circulação de armas de fogo esteve associada a uma queda nos homicídios no período pós-Estatuto.</a:t>
+              <a:t>No Brasil, a obra de Daniel Cerqueira (“Menos Armas, Menos Crimes”) se destaca, defendendo que a redução na circulação de armas de fogo esteve associada a uma queda nos homicídios no período pós-Estatuto no estado de São Paulo.</a:t>
             </a:r>
           </a:p>
           <a:p>
@@ -12256,8 +12256,8 @@
         </p:nvSpPr>
         <p:spPr>
           <a:xfrm>
-            <a:off x="660325" y="1261333"/>
-            <a:ext cx="10871345" cy="5249642"/>
+            <a:off x="660327" y="1553178"/>
+            <a:ext cx="10871345" cy="4395562"/>
           </a:xfrm>
           <a:prstGeom prst="rect">
             <a:avLst/>
@@ -12310,7 +12310,7 @@
             </a:r>
             <a:r>
               <a:rPr lang="pt-BR" sz="1850" b="1" dirty="0"/>
-              <a:t>: desenho experimental elegante: ela enviou candidatos com perfis idênticos de escolaridade e experiência, alguns com antecedentes criminais fictícios e outros sem, para vagas reais de emprego em Milwaukee. O resultado: candidatos com antecedentes receberam menos da metade dos retornos dos candidatos sem antecedentes — e, entre homens negros, ter antecedentes reduzia as chances a um patamar em que eles se saíam pior do que homens brancos recém-saídos da prisão.</a:t>
+              <a:t>: desenho experimental elegante: ela enviou candidatos com perfis idênticos de escolaridade e experiência, alguns com antecedentes criminais fictícios e outros sem, para vagas reais de emprego em Milwaukee. O resultado: candidatos com antecedentes receberam menos da metade dos retornos dos candidatos sem antecedentes.</a:t>
             </a:r>
           </a:p>
           <a:p>
@@ -13281,8 +13281,8 @@
         </p:blipFill>
         <p:spPr>
           <a:xfrm>
-            <a:off x="936884" y="1275227"/>
-            <a:ext cx="10318230" cy="4395796"/>
+            <a:off x="6731717" y="2028311"/>
+            <a:ext cx="5210446" cy="2219766"/>
           </a:xfrm>
           <a:prstGeom prst="rect">
             <a:avLst/>
@@ -13303,7 +13303,7 @@
         </p:nvSpPr>
         <p:spPr>
           <a:xfrm>
-            <a:off x="3019268" y="6317190"/>
+            <a:off x="6260209" y="5290339"/>
             <a:ext cx="6153462" cy="369332"/>
           </a:xfrm>
           <a:prstGeom prst="rect">
@@ -13329,6 +13329,80 @@
                 </a:solidFill>
               </a:rPr>
               <a:t>https://renanxcortes.shinyapps.io/visualizacrimers/</a:t>
+            </a:r>
+          </a:p>
+        </p:txBody>
+      </p:sp>
+      <p:pic>
+        <p:nvPicPr>
+          <p:cNvPr id="5" name="Imagem 4">
+            <a:extLst>
+              <a:ext uri="{FF2B5EF4-FFF2-40B4-BE49-F238E27FC236}">
+                <a16:creationId xmlns:a16="http://schemas.microsoft.com/office/drawing/2014/main" id="{4A4BF769-AF6B-902A-57E5-6BC969C817FF}"/>
+              </a:ext>
+            </a:extLst>
+          </p:cNvPr>
+          <p:cNvPicPr>
+            <a:picLocks noChangeAspect="1"/>
+          </p:cNvPicPr>
+          <p:nvPr/>
+        </p:nvPicPr>
+        <p:blipFill>
+          <a:blip r:embed="rId6"/>
+          <a:stretch>
+            <a:fillRect/>
+          </a:stretch>
+        </p:blipFill>
+        <p:spPr>
+          <a:xfrm>
+            <a:off x="363793" y="1108533"/>
+            <a:ext cx="6243257" cy="4059322"/>
+          </a:xfrm>
+          <a:prstGeom prst="rect">
+            <a:avLst/>
+          </a:prstGeom>
+        </p:spPr>
+      </p:pic>
+      <p:sp>
+        <p:nvSpPr>
+          <p:cNvPr id="9" name="CaixaDeTexto 8">
+            <a:extLst>
+              <a:ext uri="{FF2B5EF4-FFF2-40B4-BE49-F238E27FC236}">
+                <a16:creationId xmlns:a16="http://schemas.microsoft.com/office/drawing/2014/main" id="{A346D2A7-A369-2D2E-AF98-83AE7AD1FD98}"/>
+              </a:ext>
+            </a:extLst>
+          </p:cNvPr>
+          <p:cNvSpPr txBox="1"/>
+          <p:nvPr/>
+        </p:nvSpPr>
+        <p:spPr>
+          <a:xfrm>
+            <a:off x="408690" y="5231823"/>
+            <a:ext cx="6153462" cy="369332"/>
+          </a:xfrm>
+          <a:prstGeom prst="rect">
+            <a:avLst/>
+          </a:prstGeom>
+          <a:noFill/>
+        </p:spPr>
+        <p:txBody>
+          <a:bodyPr wrap="square">
+            <a:spAutoFit/>
+          </a:bodyPr>
+          <a:lstStyle/>
+          <a:p>
+            <a:pPr algn="ctr"/>
+            <a:r>
+              <a:rPr lang="pt-BR" b="1" dirty="0"/>
+              <a:t>Link: </a:t>
+            </a:r>
+            <a:r>
+              <a:rPr lang="pt-BR" b="1" dirty="0">
+                <a:solidFill>
+                  <a:srgbClr val="0070C0"/>
+                </a:solidFill>
+              </a:rPr>
+              <a:t>https://www.ssp.rs.gov.br/indicadores-criminais</a:t>
             </a:r>
           </a:p>
         </p:txBody>
@@ -13355,6 +13429,219 @@
       </p:transition>
     </mc:Fallback>
   </mc:AlternateContent>
+  <p:timing>
+    <p:tnLst>
+      <p:par>
+        <p:cTn id="1" dur="indefinite" restart="never" nodeType="tmRoot">
+          <p:childTnLst>
+            <p:seq concurrent="1" nextAc="seek">
+              <p:cTn id="2" dur="indefinite" nodeType="mainSeq">
+                <p:childTnLst>
+                  <p:par>
+                    <p:cTn id="3" fill="hold">
+                      <p:stCondLst>
+                        <p:cond delay="indefinite"/>
+                      </p:stCondLst>
+                      <p:childTnLst>
+                        <p:par>
+                          <p:cTn id="4" fill="hold">
+                            <p:stCondLst>
+                              <p:cond delay="0"/>
+                            </p:stCondLst>
+                            <p:childTnLst>
+                              <p:par>
+                                <p:cTn id="5" presetID="42" presetClass="entr" presetSubtype="0" fill="hold" nodeType="clickEffect">
+                                  <p:stCondLst>
+                                    <p:cond delay="0"/>
+                                  </p:stCondLst>
+                                  <p:childTnLst>
+                                    <p:set>
+                                      <p:cBhvr>
+                                        <p:cTn id="6" dur="1" fill="hold">
+                                          <p:stCondLst>
+                                            <p:cond delay="0"/>
+                                          </p:stCondLst>
+                                        </p:cTn>
+                                        <p:tgtEl>
+                                          <p:spTgt spid="6"/>
+                                        </p:tgtEl>
+                                        <p:attrNameLst>
+                                          <p:attrName>style.visibility</p:attrName>
+                                        </p:attrNameLst>
+                                      </p:cBhvr>
+                                      <p:to>
+                                        <p:strVal val="visible"/>
+                                      </p:to>
+                                    </p:set>
+                                    <p:animEffect transition="in" filter="fade">
+                                      <p:cBhvr>
+                                        <p:cTn id="7" dur="1000"/>
+                                        <p:tgtEl>
+                                          <p:spTgt spid="6"/>
+                                        </p:tgtEl>
+                                      </p:cBhvr>
+                                    </p:animEffect>
+                                    <p:anim calcmode="lin" valueType="num">
+                                      <p:cBhvr>
+                                        <p:cTn id="8" dur="1000" fill="hold"/>
+                                        <p:tgtEl>
+                                          <p:spTgt spid="6"/>
+                                        </p:tgtEl>
+                                        <p:attrNameLst>
+                                          <p:attrName>ppt_x</p:attrName>
+                                        </p:attrNameLst>
+                                      </p:cBhvr>
+                                      <p:tavLst>
+                                        <p:tav tm="0">
+                                          <p:val>
+                                            <p:strVal val="#ppt_x"/>
+                                          </p:val>
+                                        </p:tav>
+                                        <p:tav tm="100000">
+                                          <p:val>
+                                            <p:strVal val="#ppt_x"/>
+                                          </p:val>
+                                        </p:tav>
+                                      </p:tavLst>
+                                    </p:anim>
+                                    <p:anim calcmode="lin" valueType="num">
+                                      <p:cBhvr>
+                                        <p:cTn id="9" dur="1000" fill="hold"/>
+                                        <p:tgtEl>
+                                          <p:spTgt spid="6"/>
+                                        </p:tgtEl>
+                                        <p:attrNameLst>
+                                          <p:attrName>ppt_y</p:attrName>
+                                        </p:attrNameLst>
+                                      </p:cBhvr>
+                                      <p:tavLst>
+                                        <p:tav tm="0">
+                                          <p:val>
+                                            <p:strVal val="#ppt_y+.1"/>
+                                          </p:val>
+                                        </p:tav>
+                                        <p:tav tm="100000">
+                                          <p:val>
+                                            <p:strVal val="#ppt_y"/>
+                                          </p:val>
+                                        </p:tav>
+                                      </p:tavLst>
+                                    </p:anim>
+                                  </p:childTnLst>
+                                </p:cTn>
+                              </p:par>
+                              <p:par>
+                                <p:cTn id="10" presetID="42" presetClass="entr" presetSubtype="0" fill="hold" grpId="0" nodeType="withEffect">
+                                  <p:stCondLst>
+                                    <p:cond delay="0"/>
+                                  </p:stCondLst>
+                                  <p:childTnLst>
+                                    <p:set>
+                                      <p:cBhvr>
+                                        <p:cTn id="11" dur="1" fill="hold">
+                                          <p:stCondLst>
+                                            <p:cond delay="0"/>
+                                          </p:stCondLst>
+                                        </p:cTn>
+                                        <p:tgtEl>
+                                          <p:spTgt spid="10"/>
+                                        </p:tgtEl>
+                                        <p:attrNameLst>
+                                          <p:attrName>style.visibility</p:attrName>
+                                        </p:attrNameLst>
+                                      </p:cBhvr>
+                                      <p:to>
+                                        <p:strVal val="visible"/>
+                                      </p:to>
+                                    </p:set>
+                                    <p:animEffect transition="in" filter="fade">
+                                      <p:cBhvr>
+                                        <p:cTn id="12" dur="1000"/>
+                                        <p:tgtEl>
+                                          <p:spTgt spid="10"/>
+                                        </p:tgtEl>
+                                      </p:cBhvr>
+                                    </p:animEffect>
+                                    <p:anim calcmode="lin" valueType="num">
+                                      <p:cBhvr>
+                                        <p:cTn id="13" dur="1000" fill="hold"/>
+                                        <p:tgtEl>
+                                          <p:spTgt spid="10"/>
+                                        </p:tgtEl>
+                                        <p:attrNameLst>
+                                          <p:attrName>ppt_x</p:attrName>
+                                        </p:attrNameLst>
+                                      </p:cBhvr>
+                                      <p:tavLst>
+                                        <p:tav tm="0">
+                                          <p:val>
+                                            <p:strVal val="#ppt_x"/>
+                                          </p:val>
+                                        </p:tav>
+                                        <p:tav tm="100000">
+                                          <p:val>
+                                            <p:strVal val="#ppt_x"/>
+                                          </p:val>
+                                        </p:tav>
+                                      </p:tavLst>
+                                    </p:anim>
+                                    <p:anim calcmode="lin" valueType="num">
+                                      <p:cBhvr>
+                                        <p:cTn id="14" dur="1000" fill="hold"/>
+                                        <p:tgtEl>
+                                          <p:spTgt spid="10"/>
+                                        </p:tgtEl>
+                                        <p:attrNameLst>
+                                          <p:attrName>ppt_y</p:attrName>
+                                        </p:attrNameLst>
+                                      </p:cBhvr>
+                                      <p:tavLst>
+                                        <p:tav tm="0">
+                                          <p:val>
+                                            <p:strVal val="#ppt_y+.1"/>
+                                          </p:val>
+                                        </p:tav>
+                                        <p:tav tm="100000">
+                                          <p:val>
+                                            <p:strVal val="#ppt_y"/>
+                                          </p:val>
+                                        </p:tav>
+                                      </p:tavLst>
+                                    </p:anim>
+                                  </p:childTnLst>
+                                </p:cTn>
+                              </p:par>
+                            </p:childTnLst>
+                          </p:cTn>
+                        </p:par>
+                      </p:childTnLst>
+                    </p:cTn>
+                  </p:par>
+                </p:childTnLst>
+              </p:cTn>
+              <p:prevCondLst>
+                <p:cond evt="onPrev" delay="0">
+                  <p:tgtEl>
+                    <p:sldTgt/>
+                  </p:tgtEl>
+                </p:cond>
+              </p:prevCondLst>
+              <p:nextCondLst>
+                <p:cond evt="onNext" delay="0">
+                  <p:tgtEl>
+                    <p:sldTgt/>
+                  </p:tgtEl>
+                </p:cond>
+              </p:nextCondLst>
+            </p:seq>
+          </p:childTnLst>
+        </p:cTn>
+      </p:par>
+    </p:tnLst>
+    <p:bldLst>
+      <p:bldP spid="10" grpId="0"/>
+    </p:bldLst>
+  </p:timing>
 </p:sld>
 </file>
 
@@ -15364,6 +15651,442 @@
       </p:transition>
     </mc:Fallback>
   </mc:AlternateContent>
+  <p:timing>
+    <p:tnLst>
+      <p:par>
+        <p:cTn id="1" dur="indefinite" restart="never" nodeType="tmRoot">
+          <p:childTnLst>
+            <p:seq concurrent="1" nextAc="seek">
+              <p:cTn id="2" dur="indefinite" nodeType="mainSeq">
+                <p:childTnLst>
+                  <p:par>
+                    <p:cTn id="3" fill="hold">
+                      <p:stCondLst>
+                        <p:cond delay="indefinite"/>
+                      </p:stCondLst>
+                      <p:childTnLst>
+                        <p:par>
+                          <p:cTn id="4" fill="hold">
+                            <p:stCondLst>
+                              <p:cond delay="0"/>
+                            </p:stCondLst>
+                            <p:childTnLst>
+                              <p:par>
+                                <p:cTn id="5" presetID="42" presetClass="entr" presetSubtype="0" fill="hold" nodeType="clickEffect">
+                                  <p:stCondLst>
+                                    <p:cond delay="0"/>
+                                  </p:stCondLst>
+                                  <p:childTnLst>
+                                    <p:set>
+                                      <p:cBhvr>
+                                        <p:cTn id="6" dur="1" fill="hold">
+                                          <p:stCondLst>
+                                            <p:cond delay="0"/>
+                                          </p:stCondLst>
+                                        </p:cTn>
+                                        <p:tgtEl>
+                                          <p:spTgt spid="4">
+                                            <p:txEl>
+                                              <p:pRg st="2" end="2"/>
+                                            </p:txEl>
+                                          </p:spTgt>
+                                        </p:tgtEl>
+                                        <p:attrNameLst>
+                                          <p:attrName>style.visibility</p:attrName>
+                                        </p:attrNameLst>
+                                      </p:cBhvr>
+                                      <p:to>
+                                        <p:strVal val="visible"/>
+                                      </p:to>
+                                    </p:set>
+                                    <p:animEffect transition="in" filter="fade">
+                                      <p:cBhvr>
+                                        <p:cTn id="7" dur="1000"/>
+                                        <p:tgtEl>
+                                          <p:spTgt spid="4">
+                                            <p:txEl>
+                                              <p:pRg st="2" end="2"/>
+                                            </p:txEl>
+                                          </p:spTgt>
+                                        </p:tgtEl>
+                                      </p:cBhvr>
+                                    </p:animEffect>
+                                    <p:anim calcmode="lin" valueType="num">
+                                      <p:cBhvr>
+                                        <p:cTn id="8" dur="1000" fill="hold"/>
+                                        <p:tgtEl>
+                                          <p:spTgt spid="4">
+                                            <p:txEl>
+                                              <p:pRg st="2" end="2"/>
+                                            </p:txEl>
+                                          </p:spTgt>
+                                        </p:tgtEl>
+                                        <p:attrNameLst>
+                                          <p:attrName>ppt_x</p:attrName>
+                                        </p:attrNameLst>
+                                      </p:cBhvr>
+                                      <p:tavLst>
+                                        <p:tav tm="0">
+                                          <p:val>
+                                            <p:strVal val="#ppt_x"/>
+                                          </p:val>
+                                        </p:tav>
+                                        <p:tav tm="100000">
+                                          <p:val>
+                                            <p:strVal val="#ppt_x"/>
+                                          </p:val>
+                                        </p:tav>
+                                      </p:tavLst>
+                                    </p:anim>
+                                    <p:anim calcmode="lin" valueType="num">
+                                      <p:cBhvr>
+                                        <p:cTn id="9" dur="1000" fill="hold"/>
+                                        <p:tgtEl>
+                                          <p:spTgt spid="4">
+                                            <p:txEl>
+                                              <p:pRg st="2" end="2"/>
+                                            </p:txEl>
+                                          </p:spTgt>
+                                        </p:tgtEl>
+                                        <p:attrNameLst>
+                                          <p:attrName>ppt_y</p:attrName>
+                                        </p:attrNameLst>
+                                      </p:cBhvr>
+                                      <p:tavLst>
+                                        <p:tav tm="0">
+                                          <p:val>
+                                            <p:strVal val="#ppt_y+.1"/>
+                                          </p:val>
+                                        </p:tav>
+                                        <p:tav tm="100000">
+                                          <p:val>
+                                            <p:strVal val="#ppt_y"/>
+                                          </p:val>
+                                        </p:tav>
+                                      </p:tavLst>
+                                    </p:anim>
+                                  </p:childTnLst>
+                                </p:cTn>
+                              </p:par>
+                              <p:par>
+                                <p:cTn id="10" presetID="42" presetClass="entr" presetSubtype="0" fill="hold" nodeType="withEffect">
+                                  <p:stCondLst>
+                                    <p:cond delay="0"/>
+                                  </p:stCondLst>
+                                  <p:childTnLst>
+                                    <p:set>
+                                      <p:cBhvr>
+                                        <p:cTn id="11" dur="1" fill="hold">
+                                          <p:stCondLst>
+                                            <p:cond delay="0"/>
+                                          </p:stCondLst>
+                                        </p:cTn>
+                                        <p:tgtEl>
+                                          <p:spTgt spid="4">
+                                            <p:txEl>
+                                              <p:pRg st="4" end="4"/>
+                                            </p:txEl>
+                                          </p:spTgt>
+                                        </p:tgtEl>
+                                        <p:attrNameLst>
+                                          <p:attrName>style.visibility</p:attrName>
+                                        </p:attrNameLst>
+                                      </p:cBhvr>
+                                      <p:to>
+                                        <p:strVal val="visible"/>
+                                      </p:to>
+                                    </p:set>
+                                    <p:animEffect transition="in" filter="fade">
+                                      <p:cBhvr>
+                                        <p:cTn id="12" dur="1000"/>
+                                        <p:tgtEl>
+                                          <p:spTgt spid="4">
+                                            <p:txEl>
+                                              <p:pRg st="4" end="4"/>
+                                            </p:txEl>
+                                          </p:spTgt>
+                                        </p:tgtEl>
+                                      </p:cBhvr>
+                                    </p:animEffect>
+                                    <p:anim calcmode="lin" valueType="num">
+                                      <p:cBhvr>
+                                        <p:cTn id="13" dur="1000" fill="hold"/>
+                                        <p:tgtEl>
+                                          <p:spTgt spid="4">
+                                            <p:txEl>
+                                              <p:pRg st="4" end="4"/>
+                                            </p:txEl>
+                                          </p:spTgt>
+                                        </p:tgtEl>
+                                        <p:attrNameLst>
+                                          <p:attrName>ppt_x</p:attrName>
+                                        </p:attrNameLst>
+                                      </p:cBhvr>
+                                      <p:tavLst>
+                                        <p:tav tm="0">
+                                          <p:val>
+                                            <p:strVal val="#ppt_x"/>
+                                          </p:val>
+                                        </p:tav>
+                                        <p:tav tm="100000">
+                                          <p:val>
+                                            <p:strVal val="#ppt_x"/>
+                                          </p:val>
+                                        </p:tav>
+                                      </p:tavLst>
+                                    </p:anim>
+                                    <p:anim calcmode="lin" valueType="num">
+                                      <p:cBhvr>
+                                        <p:cTn id="14" dur="1000" fill="hold"/>
+                                        <p:tgtEl>
+                                          <p:spTgt spid="4">
+                                            <p:txEl>
+                                              <p:pRg st="4" end="4"/>
+                                            </p:txEl>
+                                          </p:spTgt>
+                                        </p:tgtEl>
+                                        <p:attrNameLst>
+                                          <p:attrName>ppt_y</p:attrName>
+                                        </p:attrNameLst>
+                                      </p:cBhvr>
+                                      <p:tavLst>
+                                        <p:tav tm="0">
+                                          <p:val>
+                                            <p:strVal val="#ppt_y+.1"/>
+                                          </p:val>
+                                        </p:tav>
+                                        <p:tav tm="100000">
+                                          <p:val>
+                                            <p:strVal val="#ppt_y"/>
+                                          </p:val>
+                                        </p:tav>
+                                      </p:tavLst>
+                                    </p:anim>
+                                  </p:childTnLst>
+                                </p:cTn>
+                              </p:par>
+                              <p:par>
+                                <p:cTn id="15" presetID="42" presetClass="entr" presetSubtype="0" fill="hold" nodeType="withEffect">
+                                  <p:stCondLst>
+                                    <p:cond delay="0"/>
+                                  </p:stCondLst>
+                                  <p:childTnLst>
+                                    <p:set>
+                                      <p:cBhvr>
+                                        <p:cTn id="16" dur="1" fill="hold">
+                                          <p:stCondLst>
+                                            <p:cond delay="0"/>
+                                          </p:stCondLst>
+                                        </p:cTn>
+                                        <p:tgtEl>
+                                          <p:spTgt spid="4">
+                                            <p:txEl>
+                                              <p:pRg st="6" end="6"/>
+                                            </p:txEl>
+                                          </p:spTgt>
+                                        </p:tgtEl>
+                                        <p:attrNameLst>
+                                          <p:attrName>style.visibility</p:attrName>
+                                        </p:attrNameLst>
+                                      </p:cBhvr>
+                                      <p:to>
+                                        <p:strVal val="visible"/>
+                                      </p:to>
+                                    </p:set>
+                                    <p:animEffect transition="in" filter="fade">
+                                      <p:cBhvr>
+                                        <p:cTn id="17" dur="1000"/>
+                                        <p:tgtEl>
+                                          <p:spTgt spid="4">
+                                            <p:txEl>
+                                              <p:pRg st="6" end="6"/>
+                                            </p:txEl>
+                                          </p:spTgt>
+                                        </p:tgtEl>
+                                      </p:cBhvr>
+                                    </p:animEffect>
+                                    <p:anim calcmode="lin" valueType="num">
+                                      <p:cBhvr>
+                                        <p:cTn id="18" dur="1000" fill="hold"/>
+                                        <p:tgtEl>
+                                          <p:spTgt spid="4">
+                                            <p:txEl>
+                                              <p:pRg st="6" end="6"/>
+                                            </p:txEl>
+                                          </p:spTgt>
+                                        </p:tgtEl>
+                                        <p:attrNameLst>
+                                          <p:attrName>ppt_x</p:attrName>
+                                        </p:attrNameLst>
+                                      </p:cBhvr>
+                                      <p:tavLst>
+                                        <p:tav tm="0">
+                                          <p:val>
+                                            <p:strVal val="#ppt_x"/>
+                                          </p:val>
+                                        </p:tav>
+                                        <p:tav tm="100000">
+                                          <p:val>
+                                            <p:strVal val="#ppt_x"/>
+                                          </p:val>
+                                        </p:tav>
+                                      </p:tavLst>
+                                    </p:anim>
+                                    <p:anim calcmode="lin" valueType="num">
+                                      <p:cBhvr>
+                                        <p:cTn id="19" dur="1000" fill="hold"/>
+                                        <p:tgtEl>
+                                          <p:spTgt spid="4">
+                                            <p:txEl>
+                                              <p:pRg st="6" end="6"/>
+                                            </p:txEl>
+                                          </p:spTgt>
+                                        </p:tgtEl>
+                                        <p:attrNameLst>
+                                          <p:attrName>ppt_y</p:attrName>
+                                        </p:attrNameLst>
+                                      </p:cBhvr>
+                                      <p:tavLst>
+                                        <p:tav tm="0">
+                                          <p:val>
+                                            <p:strVal val="#ppt_y+.1"/>
+                                          </p:val>
+                                        </p:tav>
+                                        <p:tav tm="100000">
+                                          <p:val>
+                                            <p:strVal val="#ppt_y"/>
+                                          </p:val>
+                                        </p:tav>
+                                      </p:tavLst>
+                                    </p:anim>
+                                  </p:childTnLst>
+                                </p:cTn>
+                              </p:par>
+                              <p:par>
+                                <p:cTn id="20" presetID="42" presetClass="entr" presetSubtype="0" fill="hold" nodeType="withEffect">
+                                  <p:stCondLst>
+                                    <p:cond delay="0"/>
+                                  </p:stCondLst>
+                                  <p:childTnLst>
+                                    <p:set>
+                                      <p:cBhvr>
+                                        <p:cTn id="21" dur="1" fill="hold">
+                                          <p:stCondLst>
+                                            <p:cond delay="0"/>
+                                          </p:stCondLst>
+                                        </p:cTn>
+                                        <p:tgtEl>
+                                          <p:spTgt spid="4">
+                                            <p:txEl>
+                                              <p:pRg st="8" end="8"/>
+                                            </p:txEl>
+                                          </p:spTgt>
+                                        </p:tgtEl>
+                                        <p:attrNameLst>
+                                          <p:attrName>style.visibility</p:attrName>
+                                        </p:attrNameLst>
+                                      </p:cBhvr>
+                                      <p:to>
+                                        <p:strVal val="visible"/>
+                                      </p:to>
+                                    </p:set>
+                                    <p:animEffect transition="in" filter="fade">
+                                      <p:cBhvr>
+                                        <p:cTn id="22" dur="1000"/>
+                                        <p:tgtEl>
+                                          <p:spTgt spid="4">
+                                            <p:txEl>
+                                              <p:pRg st="8" end="8"/>
+                                            </p:txEl>
+                                          </p:spTgt>
+                                        </p:tgtEl>
+                                      </p:cBhvr>
+                                    </p:animEffect>
+                                    <p:anim calcmode="lin" valueType="num">
+                                      <p:cBhvr>
+                                        <p:cTn id="23" dur="1000" fill="hold"/>
+                                        <p:tgtEl>
+                                          <p:spTgt spid="4">
+                                            <p:txEl>
+                                              <p:pRg st="8" end="8"/>
+                                            </p:txEl>
+                                          </p:spTgt>
+                                        </p:tgtEl>
+                                        <p:attrNameLst>
+                                          <p:attrName>ppt_x</p:attrName>
+                                        </p:attrNameLst>
+                                      </p:cBhvr>
+                                      <p:tavLst>
+                                        <p:tav tm="0">
+                                          <p:val>
+                                            <p:strVal val="#ppt_x"/>
+                                          </p:val>
+                                        </p:tav>
+                                        <p:tav tm="100000">
+                                          <p:val>
+                                            <p:strVal val="#ppt_x"/>
+                                          </p:val>
+                                        </p:tav>
+                                      </p:tavLst>
+                                    </p:anim>
+                                    <p:anim calcmode="lin" valueType="num">
+                                      <p:cBhvr>
+                                        <p:cTn id="24" dur="1000" fill="hold"/>
+                                        <p:tgtEl>
+                                          <p:spTgt spid="4">
+                                            <p:txEl>
+                                              <p:pRg st="8" end="8"/>
+                                            </p:txEl>
+                                          </p:spTgt>
+                                        </p:tgtEl>
+                                        <p:attrNameLst>
+                                          <p:attrName>ppt_y</p:attrName>
+                                        </p:attrNameLst>
+                                      </p:cBhvr>
+                                      <p:tavLst>
+                                        <p:tav tm="0">
+                                          <p:val>
+                                            <p:strVal val="#ppt_y+.1"/>
+                                          </p:val>
+                                        </p:tav>
+                                        <p:tav tm="100000">
+                                          <p:val>
+                                            <p:strVal val="#ppt_y"/>
+                                          </p:val>
+                                        </p:tav>
+                                      </p:tavLst>
+                                    </p:anim>
+                                  </p:childTnLst>
+                                </p:cTn>
+                              </p:par>
+                            </p:childTnLst>
+                          </p:cTn>
+                        </p:par>
+                      </p:childTnLst>
+                    </p:cTn>
+                  </p:par>
+                </p:childTnLst>
+              </p:cTn>
+              <p:prevCondLst>
+                <p:cond evt="onPrev" delay="0">
+                  <p:tgtEl>
+                    <p:sldTgt/>
+                  </p:tgtEl>
+                </p:cond>
+              </p:prevCondLst>
+              <p:nextCondLst>
+                <p:cond evt="onNext" delay="0">
+                  <p:tgtEl>
+                    <p:sldTgt/>
+                  </p:tgtEl>
+                </p:cond>
+              </p:nextCondLst>
+            </p:seq>
+          </p:childTnLst>
+        </p:cTn>
+      </p:par>
+    </p:tnLst>
+  </p:timing>
 </p:sld>
 </file>
 
@@ -16362,6 +17085,42 @@
           </a:p>
         </p:txBody>
       </p:sp>
+      <p:sp>
+        <p:nvSpPr>
+          <p:cNvPr id="5" name="CaixaDeTexto 4">
+            <a:extLst>
+              <a:ext uri="{FF2B5EF4-FFF2-40B4-BE49-F238E27FC236}">
+                <a16:creationId xmlns:a16="http://schemas.microsoft.com/office/drawing/2014/main" id="{B00FFC93-643C-21DD-3711-191F1721F5CC}"/>
+              </a:ext>
+            </a:extLst>
+          </p:cNvPr>
+          <p:cNvSpPr txBox="1"/>
+          <p:nvPr/>
+        </p:nvSpPr>
+        <p:spPr>
+          <a:xfrm>
+            <a:off x="-112541" y="5435898"/>
+            <a:ext cx="6225483" cy="307777"/>
+          </a:xfrm>
+          <a:prstGeom prst="rect">
+            <a:avLst/>
+          </a:prstGeom>
+          <a:noFill/>
+        </p:spPr>
+        <p:txBody>
+          <a:bodyPr wrap="square" rtlCol="0">
+            <a:spAutoFit/>
+          </a:bodyPr>
+          <a:lstStyle/>
+          <a:p>
+            <a:pPr algn="ctr"/>
+            <a:r>
+              <a:rPr lang="pt-BR" sz="1400" b="1" i="1" dirty="0"/>
+              <a:t>Taxa de Homicídio Doloso por 100.000 habitantes em 2025 por municípios no RS</a:t>
+            </a:r>
+          </a:p>
+        </p:txBody>
+      </p:sp>
     </p:spTree>
     <p:extLst>
       <p:ext uri="{BB962C8B-B14F-4D97-AF65-F5344CB8AC3E}">
@@ -16485,6 +17244,87 @@
                                   </p:childTnLst>
                                 </p:cTn>
                               </p:par>
+                              <p:par>
+                                <p:cTn id="10" presetID="42" presetClass="entr" presetSubtype="0" fill="hold" grpId="0" nodeType="withEffect">
+                                  <p:stCondLst>
+                                    <p:cond delay="0"/>
+                                  </p:stCondLst>
+                                  <p:childTnLst>
+                                    <p:set>
+                                      <p:cBhvr>
+                                        <p:cTn id="11" dur="1" fill="hold">
+                                          <p:stCondLst>
+                                            <p:cond delay="0"/>
+                                          </p:stCondLst>
+                                        </p:cTn>
+                                        <p:tgtEl>
+                                          <p:spTgt spid="5"/>
+                                        </p:tgtEl>
+                                        <p:attrNameLst>
+                                          <p:attrName>style.visibility</p:attrName>
+                                        </p:attrNameLst>
+                                      </p:cBhvr>
+                                      <p:to>
+                                        <p:strVal val="visible"/>
+                                      </p:to>
+                                    </p:set>
+                                    <p:animEffect transition="in" filter="fade">
+                                      <p:cBhvr>
+                                        <p:cTn id="12" dur="1000"/>
+                                        <p:tgtEl>
+                                          <p:spTgt spid="5"/>
+                                        </p:tgtEl>
+                                      </p:cBhvr>
+                                    </p:animEffect>
+                                    <p:anim calcmode="lin" valueType="num">
+                                      <p:cBhvr>
+                                        <p:cTn id="13" dur="1000" fill="hold"/>
+                                        <p:tgtEl>
+                                          <p:spTgt spid="5"/>
+                                        </p:tgtEl>
+                                        <p:attrNameLst>
+                                          <p:attrName>ppt_x</p:attrName>
+                                        </p:attrNameLst>
+                                      </p:cBhvr>
+                                      <p:tavLst>
+                                        <p:tav tm="0">
+                                          <p:val>
+                                            <p:strVal val="#ppt_x"/>
+                                          </p:val>
+                                        </p:tav>
+                                        <p:tav tm="100000">
+                                          <p:val>
+                                            <p:strVal val="#ppt_x"/>
+                                          </p:val>
+                                        </p:tav>
+                                      </p:tavLst>
+                                    </p:anim>
+                                    <p:anim calcmode="lin" valueType="num">
+                                      <p:cBhvr>
+                                        <p:cTn id="14" dur="1000" fill="hold"/>
+                                        <p:tgtEl>
+                                          <p:spTgt spid="5"/>
+                                        </p:tgtEl>
+                                        <p:attrNameLst>
+                                          <p:attrName>ppt_y</p:attrName>
+                                        </p:attrNameLst>
+                                      </p:cBhvr>
+                                      <p:tavLst>
+                                        <p:tav tm="0">
+                                          <p:val>
+                                            <p:strVal val="#ppt_y+.1"/>
+                                          </p:val>
+                                        </p:tav>
+                                        <p:tav tm="100000">
+                                          <p:val>
+                                            <p:strVal val="#ppt_y"/>
+                                          </p:val>
+                                        </p:tav>
+                                      </p:tavLst>
+                                    </p:anim>
+                                  </p:childTnLst>
+                                </p:cTn>
+                              </p:par>
                             </p:childTnLst>
                           </p:cTn>
                         </p:par>
@@ -16492,26 +17332,26 @@
                     </p:cTn>
                   </p:par>
                   <p:par>
-                    <p:cTn id="10" fill="hold">
+                    <p:cTn id="15" fill="hold">
                       <p:stCondLst>
                         <p:cond delay="indefinite"/>
                       </p:stCondLst>
                       <p:childTnLst>
                         <p:par>
-                          <p:cTn id="11" fill="hold">
+                          <p:cTn id="16" fill="hold">
                             <p:stCondLst>
                               <p:cond delay="0"/>
                             </p:stCondLst>
                             <p:childTnLst>
                               <p:par>
-                                <p:cTn id="12" presetID="42" presetClass="entr" presetSubtype="0" fill="hold" grpId="0" nodeType="clickEffect">
+                                <p:cTn id="17" presetID="42" presetClass="entr" presetSubtype="0" fill="hold" grpId="0" nodeType="clickEffect">
                                   <p:stCondLst>
                                     <p:cond delay="0"/>
                                   </p:stCondLst>
                                   <p:childTnLst>
                                     <p:set>
                                       <p:cBhvr>
-                                        <p:cTn id="13" dur="1" fill="hold">
+                                        <p:cTn id="18" dur="1" fill="hold">
                                           <p:stCondLst>
                                             <p:cond delay="0"/>
                                           </p:stCondLst>
@@ -16529,7 +17369,7 @@
                                     </p:set>
                                     <p:animEffect transition="in" filter="fade">
                                       <p:cBhvr>
-                                        <p:cTn id="14" dur="1000"/>
+                                        <p:cTn id="19" dur="1000"/>
                                         <p:tgtEl>
                                           <p:spTgt spid="12"/>
                                         </p:tgtEl>
@@ -16537,7 +17377,7 @@
                                     </p:animEffect>
                                     <p:anim calcmode="lin" valueType="num">
                                       <p:cBhvr>
-                                        <p:cTn id="15" dur="1000" fill="hold"/>
+                                        <p:cTn id="20" dur="1000" fill="hold"/>
                                         <p:tgtEl>
                                           <p:spTgt spid="12"/>
                                         </p:tgtEl>
@@ -16560,7 +17400,7 @@
                                     </p:anim>
                                     <p:anim calcmode="lin" valueType="num">
                                       <p:cBhvr>
-                                        <p:cTn id="16" dur="1000" fill="hold"/>
+                                        <p:cTn id="21" dur="1000" fill="hold"/>
                                         <p:tgtEl>
                                           <p:spTgt spid="12"/>
                                         </p:tgtEl>
@@ -16585,14 +17425,14 @@
                                 </p:cTn>
                               </p:par>
                               <p:par>
-                                <p:cTn id="17" presetID="42" presetClass="entr" presetSubtype="0" fill="hold" grpId="0" nodeType="withEffect">
+                                <p:cTn id="22" presetID="42" presetClass="entr" presetSubtype="0" fill="hold" grpId="0" nodeType="withEffect">
                                   <p:stCondLst>
                                     <p:cond delay="0"/>
                                   </p:stCondLst>
                                   <p:childTnLst>
                                     <p:set>
                                       <p:cBhvr>
-                                        <p:cTn id="18" dur="1" fill="hold">
+                                        <p:cTn id="23" dur="1" fill="hold">
                                           <p:stCondLst>
                                             <p:cond delay="0"/>
                                           </p:stCondLst>
@@ -16610,7 +17450,7 @@
                                     </p:set>
                                     <p:animEffect transition="in" filter="fade">
                                       <p:cBhvr>
-                                        <p:cTn id="19" dur="1000"/>
+                                        <p:cTn id="24" dur="1000"/>
                                         <p:tgtEl>
                                           <p:spTgt spid="13"/>
                                         </p:tgtEl>
@@ -16618,7 +17458,7 @@
                                     </p:animEffect>
                                     <p:anim calcmode="lin" valueType="num">
                                       <p:cBhvr>
-                                        <p:cTn id="20" dur="1000" fill="hold"/>
+                                        <p:cTn id="25" dur="1000" fill="hold"/>
                                         <p:tgtEl>
                                           <p:spTgt spid="13"/>
                                         </p:tgtEl>
@@ -16641,7 +17481,7 @@
                                     </p:anim>
                                     <p:anim calcmode="lin" valueType="num">
                                       <p:cBhvr>
-                                        <p:cTn id="21" dur="1000" fill="hold"/>
+                                        <p:cTn id="26" dur="1000" fill="hold"/>
                                         <p:tgtEl>
                                           <p:spTgt spid="13"/>
                                         </p:tgtEl>
@@ -16666,14 +17506,14 @@
                                 </p:cTn>
                               </p:par>
                               <p:par>
-                                <p:cTn id="22" presetID="42" presetClass="entr" presetSubtype="0" fill="hold" nodeType="withEffect">
+                                <p:cTn id="27" presetID="42" presetClass="entr" presetSubtype="0" fill="hold" nodeType="withEffect">
                                   <p:stCondLst>
                                     <p:cond delay="0"/>
                                   </p:stCondLst>
                                   <p:childTnLst>
                                     <p:set>
                                       <p:cBhvr>
-                                        <p:cTn id="23" dur="1" fill="hold">
+                                        <p:cTn id="28" dur="1" fill="hold">
                                           <p:stCondLst>
                                             <p:cond delay="0"/>
                                           </p:stCondLst>
@@ -16691,7 +17531,7 @@
                                     </p:set>
                                     <p:animEffect transition="in" filter="fade">
                                       <p:cBhvr>
-                                        <p:cTn id="24" dur="1000"/>
+                                        <p:cTn id="29" dur="1000"/>
                                         <p:tgtEl>
                                           <p:spTgt spid="15"/>
                                         </p:tgtEl>
@@ -16699,7 +17539,7 @@
                                     </p:animEffect>
                                     <p:anim calcmode="lin" valueType="num">
                                       <p:cBhvr>
-                                        <p:cTn id="25" dur="1000" fill="hold"/>
+                                        <p:cTn id="30" dur="1000" fill="hold"/>
                                         <p:tgtEl>
                                           <p:spTgt spid="15"/>
                                         </p:tgtEl>
@@ -16722,7 +17562,7 @@
                                     </p:anim>
                                     <p:anim calcmode="lin" valueType="num">
                                       <p:cBhvr>
-                                        <p:cTn id="26" dur="1000" fill="hold"/>
+                                        <p:cTn id="31" dur="1000" fill="hold"/>
                                         <p:tgtEl>
                                           <p:spTgt spid="15"/>
                                         </p:tgtEl>
@@ -16753,26 +17593,26 @@
                     </p:cTn>
                   </p:par>
                   <p:par>
-                    <p:cTn id="27" fill="hold">
+                    <p:cTn id="32" fill="hold">
                       <p:stCondLst>
                         <p:cond delay="indefinite"/>
                       </p:stCondLst>
                       <p:childTnLst>
                         <p:par>
-                          <p:cTn id="28" fill="hold">
+                          <p:cTn id="33" fill="hold">
                             <p:stCondLst>
                               <p:cond delay="0"/>
                             </p:stCondLst>
                             <p:childTnLst>
                               <p:par>
-                                <p:cTn id="29" presetID="42" presetClass="entr" presetSubtype="0" fill="hold" grpId="0" nodeType="clickEffect">
+                                <p:cTn id="34" presetID="42" presetClass="entr" presetSubtype="0" fill="hold" grpId="0" nodeType="clickEffect">
                                   <p:stCondLst>
                                     <p:cond delay="0"/>
                                   </p:stCondLst>
                                   <p:childTnLst>
                                     <p:set>
                                       <p:cBhvr>
-                                        <p:cTn id="30" dur="1" fill="hold">
+                                        <p:cTn id="35" dur="1" fill="hold">
                                           <p:stCondLst>
                                             <p:cond delay="0"/>
                                           </p:stCondLst>
@@ -16790,7 +17630,7 @@
                                     </p:set>
                                     <p:animEffect transition="in" filter="fade">
                                       <p:cBhvr>
-                                        <p:cTn id="31" dur="1000"/>
+                                        <p:cTn id="36" dur="1000"/>
                                         <p:tgtEl>
                                           <p:spTgt spid="16"/>
                                         </p:tgtEl>
@@ -16798,7 +17638,7 @@
                                     </p:animEffect>
                                     <p:anim calcmode="lin" valueType="num">
                                       <p:cBhvr>
-                                        <p:cTn id="32" dur="1000" fill="hold"/>
+                                        <p:cTn id="37" dur="1000" fill="hold"/>
                                         <p:tgtEl>
                                           <p:spTgt spid="16"/>
                                         </p:tgtEl>
@@ -16821,7 +17661,7 @@
                                     </p:anim>
                                     <p:anim calcmode="lin" valueType="num">
                                       <p:cBhvr>
-                                        <p:cTn id="33" dur="1000" fill="hold"/>
+                                        <p:cTn id="38" dur="1000" fill="hold"/>
                                         <p:tgtEl>
                                           <p:spTgt spid="16"/>
                                         </p:tgtEl>
@@ -16876,6 +17716,7 @@
       <p:bldP spid="12" grpId="0" animBg="1"/>
       <p:bldP spid="13" grpId="0" animBg="1"/>
       <p:bldP spid="16" grpId="0"/>
+      <p:bldP spid="5" grpId="0"/>
     </p:bldLst>
   </p:timing>
 </p:sld>

--- a/DIA 2 - APRESENTACAO - VERSAO AMPLIADA FINAL.pptx
+++ b/DIA 2 - APRESENTACAO - VERSAO AMPLIADA FINAL.pptx
@@ -3876,7 +3876,7 @@
           <a:p>
             <a:fld id="{9B3F8303-3E6A-4B9A-B114-90BC24763552}" type="datetimeFigureOut">
               <a:rPr lang="pt-BR" smtClean="0"/>
-              <a:t>06/10/2026</a:t>
+              <a:t>15/10/2026</a:t>
             </a:fld>
             <a:endParaRPr lang="pt-BR"/>
           </a:p>
@@ -5634,7 +5634,7 @@
           <a:p>
             <a:fld id="{6D1CE400-4242-4B09-9036-D13CC6199FDE}" type="datetimeFigureOut">
               <a:rPr lang="pt-BR" smtClean="0"/>
-              <a:t>06/10/2026</a:t>
+              <a:t>15/10/2026</a:t>
             </a:fld>
             <a:endParaRPr lang="pt-BR"/>
           </a:p>
@@ -5832,7 +5832,7 @@
           <a:p>
             <a:fld id="{6D1CE400-4242-4B09-9036-D13CC6199FDE}" type="datetimeFigureOut">
               <a:rPr lang="pt-BR" smtClean="0"/>
-              <a:t>06/10/2026</a:t>
+              <a:t>15/10/2026</a:t>
             </a:fld>
             <a:endParaRPr lang="pt-BR"/>
           </a:p>
@@ -6040,7 +6040,7 @@
           <a:p>
             <a:fld id="{6D1CE400-4242-4B09-9036-D13CC6199FDE}" type="datetimeFigureOut">
               <a:rPr lang="pt-BR" smtClean="0"/>
-              <a:t>06/10/2026</a:t>
+              <a:t>15/10/2026</a:t>
             </a:fld>
             <a:endParaRPr lang="pt-BR"/>
           </a:p>
@@ -6238,7 +6238,7 @@
           <a:p>
             <a:fld id="{6D1CE400-4242-4B09-9036-D13CC6199FDE}" type="datetimeFigureOut">
               <a:rPr lang="pt-BR" smtClean="0"/>
-              <a:t>06/10/2026</a:t>
+              <a:t>15/10/2026</a:t>
             </a:fld>
             <a:endParaRPr lang="pt-BR"/>
           </a:p>
@@ -6513,7 +6513,7 @@
           <a:p>
             <a:fld id="{6D1CE400-4242-4B09-9036-D13CC6199FDE}" type="datetimeFigureOut">
               <a:rPr lang="pt-BR" smtClean="0"/>
-              <a:t>06/10/2026</a:t>
+              <a:t>15/10/2026</a:t>
             </a:fld>
             <a:endParaRPr lang="pt-BR"/>
           </a:p>
@@ -6778,7 +6778,7 @@
           <a:p>
             <a:fld id="{6D1CE400-4242-4B09-9036-D13CC6199FDE}" type="datetimeFigureOut">
               <a:rPr lang="pt-BR" smtClean="0"/>
-              <a:t>06/10/2026</a:t>
+              <a:t>15/10/2026</a:t>
             </a:fld>
             <a:endParaRPr lang="pt-BR"/>
           </a:p>
@@ -7190,7 +7190,7 @@
           <a:p>
             <a:fld id="{6D1CE400-4242-4B09-9036-D13CC6199FDE}" type="datetimeFigureOut">
               <a:rPr lang="pt-BR" smtClean="0"/>
-              <a:t>06/10/2026</a:t>
+              <a:t>15/10/2026</a:t>
             </a:fld>
             <a:endParaRPr lang="pt-BR"/>
           </a:p>
@@ -7331,7 +7331,7 @@
           <a:p>
             <a:fld id="{6D1CE400-4242-4B09-9036-D13CC6199FDE}" type="datetimeFigureOut">
               <a:rPr lang="pt-BR" smtClean="0"/>
-              <a:t>06/10/2026</a:t>
+              <a:t>15/10/2026</a:t>
             </a:fld>
             <a:endParaRPr lang="pt-BR"/>
           </a:p>
@@ -7444,7 +7444,7 @@
           <a:p>
             <a:fld id="{6D1CE400-4242-4B09-9036-D13CC6199FDE}" type="datetimeFigureOut">
               <a:rPr lang="pt-BR" smtClean="0"/>
-              <a:t>06/10/2026</a:t>
+              <a:t>15/10/2026</a:t>
             </a:fld>
             <a:endParaRPr lang="pt-BR"/>
           </a:p>
@@ -7755,7 +7755,7 @@
           <a:p>
             <a:fld id="{6D1CE400-4242-4B09-9036-D13CC6199FDE}" type="datetimeFigureOut">
               <a:rPr lang="pt-BR" smtClean="0"/>
-              <a:t>06/10/2026</a:t>
+              <a:t>15/10/2026</a:t>
             </a:fld>
             <a:endParaRPr lang="pt-BR"/>
           </a:p>
@@ -8043,7 +8043,7 @@
           <a:p>
             <a:fld id="{6D1CE400-4242-4B09-9036-D13CC6199FDE}" type="datetimeFigureOut">
               <a:rPr lang="pt-BR" smtClean="0"/>
-              <a:t>06/10/2026</a:t>
+              <a:t>15/10/2026</a:t>
             </a:fld>
             <a:endParaRPr lang="pt-BR"/>
           </a:p>
@@ -8287,7 +8287,7 @@
           <a:p>
             <a:fld id="{6D1CE400-4242-4B09-9036-D13CC6199FDE}" type="datetimeFigureOut">
               <a:rPr lang="pt-BR" smtClean="0"/>
-              <a:t>06/10/2026</a:t>
+              <a:t>15/10/2026</a:t>
             </a:fld>
             <a:endParaRPr lang="pt-BR"/>
           </a:p>
@@ -9504,6 +9504,447 @@
       </p:transition>
     </mc:Fallback>
   </mc:AlternateContent>
+  <p:timing>
+    <p:tnLst>
+      <p:par>
+        <p:cTn id="1" dur="indefinite" restart="never" nodeType="tmRoot">
+          <p:childTnLst>
+            <p:seq concurrent="1" nextAc="seek">
+              <p:cTn id="2" dur="indefinite" nodeType="mainSeq">
+                <p:childTnLst>
+                  <p:par>
+                    <p:cTn id="3" fill="hold">
+                      <p:stCondLst>
+                        <p:cond delay="indefinite"/>
+                      </p:stCondLst>
+                      <p:childTnLst>
+                        <p:par>
+                          <p:cTn id="4" fill="hold">
+                            <p:stCondLst>
+                              <p:cond delay="0"/>
+                            </p:stCondLst>
+                            <p:childTnLst>
+                              <p:par>
+                                <p:cTn id="5" presetID="42" presetClass="entr" presetSubtype="0" fill="hold" nodeType="clickEffect">
+                                  <p:stCondLst>
+                                    <p:cond delay="0"/>
+                                  </p:stCondLst>
+                                  <p:childTnLst>
+                                    <p:set>
+                                      <p:cBhvr>
+                                        <p:cTn id="6" dur="1" fill="hold">
+                                          <p:stCondLst>
+                                            <p:cond delay="0"/>
+                                          </p:stCondLst>
+                                        </p:cTn>
+                                        <p:tgtEl>
+                                          <p:spTgt spid="5">
+                                            <p:txEl>
+                                              <p:pRg st="0" end="0"/>
+                                            </p:txEl>
+                                          </p:spTgt>
+                                        </p:tgtEl>
+                                        <p:attrNameLst>
+                                          <p:attrName>style.visibility</p:attrName>
+                                        </p:attrNameLst>
+                                      </p:cBhvr>
+                                      <p:to>
+                                        <p:strVal val="visible"/>
+                                      </p:to>
+                                    </p:set>
+                                    <p:animEffect transition="in" filter="fade">
+                                      <p:cBhvr>
+                                        <p:cTn id="7" dur="1000"/>
+                                        <p:tgtEl>
+                                          <p:spTgt spid="5">
+                                            <p:txEl>
+                                              <p:pRg st="0" end="0"/>
+                                            </p:txEl>
+                                          </p:spTgt>
+                                        </p:tgtEl>
+                                      </p:cBhvr>
+                                    </p:animEffect>
+                                    <p:anim calcmode="lin" valueType="num">
+                                      <p:cBhvr>
+                                        <p:cTn id="8" dur="1000" fill="hold"/>
+                                        <p:tgtEl>
+                                          <p:spTgt spid="5">
+                                            <p:txEl>
+                                              <p:pRg st="0" end="0"/>
+                                            </p:txEl>
+                                          </p:spTgt>
+                                        </p:tgtEl>
+                                        <p:attrNameLst>
+                                          <p:attrName>ppt_x</p:attrName>
+                                        </p:attrNameLst>
+                                      </p:cBhvr>
+                                      <p:tavLst>
+                                        <p:tav tm="0">
+                                          <p:val>
+                                            <p:strVal val="#ppt_x"/>
+                                          </p:val>
+                                        </p:tav>
+                                        <p:tav tm="100000">
+                                          <p:val>
+                                            <p:strVal val="#ppt_x"/>
+                                          </p:val>
+                                        </p:tav>
+                                      </p:tavLst>
+                                    </p:anim>
+                                    <p:anim calcmode="lin" valueType="num">
+                                      <p:cBhvr>
+                                        <p:cTn id="9" dur="1000" fill="hold"/>
+                                        <p:tgtEl>
+                                          <p:spTgt spid="5">
+                                            <p:txEl>
+                                              <p:pRg st="0" end="0"/>
+                                            </p:txEl>
+                                          </p:spTgt>
+                                        </p:tgtEl>
+                                        <p:attrNameLst>
+                                          <p:attrName>ppt_y</p:attrName>
+                                        </p:attrNameLst>
+                                      </p:cBhvr>
+                                      <p:tavLst>
+                                        <p:tav tm="0">
+                                          <p:val>
+                                            <p:strVal val="#ppt_y+.1"/>
+                                          </p:val>
+                                        </p:tav>
+                                        <p:tav tm="100000">
+                                          <p:val>
+                                            <p:strVal val="#ppt_y"/>
+                                          </p:val>
+                                        </p:tav>
+                                      </p:tavLst>
+                                    </p:anim>
+                                  </p:childTnLst>
+                                </p:cTn>
+                              </p:par>
+                            </p:childTnLst>
+                          </p:cTn>
+                        </p:par>
+                      </p:childTnLst>
+                    </p:cTn>
+                  </p:par>
+                  <p:par>
+                    <p:cTn id="10" fill="hold">
+                      <p:stCondLst>
+                        <p:cond delay="indefinite"/>
+                      </p:stCondLst>
+                      <p:childTnLst>
+                        <p:par>
+                          <p:cTn id="11" fill="hold">
+                            <p:stCondLst>
+                              <p:cond delay="0"/>
+                            </p:stCondLst>
+                            <p:childTnLst>
+                              <p:par>
+                                <p:cTn id="12" presetID="42" presetClass="entr" presetSubtype="0" fill="hold" nodeType="clickEffect">
+                                  <p:stCondLst>
+                                    <p:cond delay="0"/>
+                                  </p:stCondLst>
+                                  <p:childTnLst>
+                                    <p:set>
+                                      <p:cBhvr>
+                                        <p:cTn id="13" dur="1" fill="hold">
+                                          <p:stCondLst>
+                                            <p:cond delay="0"/>
+                                          </p:stCondLst>
+                                        </p:cTn>
+                                        <p:tgtEl>
+                                          <p:spTgt spid="5">
+                                            <p:txEl>
+                                              <p:pRg st="2" end="2"/>
+                                            </p:txEl>
+                                          </p:spTgt>
+                                        </p:tgtEl>
+                                        <p:attrNameLst>
+                                          <p:attrName>style.visibility</p:attrName>
+                                        </p:attrNameLst>
+                                      </p:cBhvr>
+                                      <p:to>
+                                        <p:strVal val="visible"/>
+                                      </p:to>
+                                    </p:set>
+                                    <p:animEffect transition="in" filter="fade">
+                                      <p:cBhvr>
+                                        <p:cTn id="14" dur="1000"/>
+                                        <p:tgtEl>
+                                          <p:spTgt spid="5">
+                                            <p:txEl>
+                                              <p:pRg st="2" end="2"/>
+                                            </p:txEl>
+                                          </p:spTgt>
+                                        </p:tgtEl>
+                                      </p:cBhvr>
+                                    </p:animEffect>
+                                    <p:anim calcmode="lin" valueType="num">
+                                      <p:cBhvr>
+                                        <p:cTn id="15" dur="1000" fill="hold"/>
+                                        <p:tgtEl>
+                                          <p:spTgt spid="5">
+                                            <p:txEl>
+                                              <p:pRg st="2" end="2"/>
+                                            </p:txEl>
+                                          </p:spTgt>
+                                        </p:tgtEl>
+                                        <p:attrNameLst>
+                                          <p:attrName>ppt_x</p:attrName>
+                                        </p:attrNameLst>
+                                      </p:cBhvr>
+                                      <p:tavLst>
+                                        <p:tav tm="0">
+                                          <p:val>
+                                            <p:strVal val="#ppt_x"/>
+                                          </p:val>
+                                        </p:tav>
+                                        <p:tav tm="100000">
+                                          <p:val>
+                                            <p:strVal val="#ppt_x"/>
+                                          </p:val>
+                                        </p:tav>
+                                      </p:tavLst>
+                                    </p:anim>
+                                    <p:anim calcmode="lin" valueType="num">
+                                      <p:cBhvr>
+                                        <p:cTn id="16" dur="1000" fill="hold"/>
+                                        <p:tgtEl>
+                                          <p:spTgt spid="5">
+                                            <p:txEl>
+                                              <p:pRg st="2" end="2"/>
+                                            </p:txEl>
+                                          </p:spTgt>
+                                        </p:tgtEl>
+                                        <p:attrNameLst>
+                                          <p:attrName>ppt_y</p:attrName>
+                                        </p:attrNameLst>
+                                      </p:cBhvr>
+                                      <p:tavLst>
+                                        <p:tav tm="0">
+                                          <p:val>
+                                            <p:strVal val="#ppt_y+.1"/>
+                                          </p:val>
+                                        </p:tav>
+                                        <p:tav tm="100000">
+                                          <p:val>
+                                            <p:strVal val="#ppt_y"/>
+                                          </p:val>
+                                        </p:tav>
+                                      </p:tavLst>
+                                    </p:anim>
+                                  </p:childTnLst>
+                                </p:cTn>
+                              </p:par>
+                              <p:par>
+                                <p:cTn id="17" presetID="42" presetClass="entr" presetSubtype="0" fill="hold" nodeType="withEffect">
+                                  <p:stCondLst>
+                                    <p:cond delay="0"/>
+                                  </p:stCondLst>
+                                  <p:childTnLst>
+                                    <p:set>
+                                      <p:cBhvr>
+                                        <p:cTn id="18" dur="1" fill="hold">
+                                          <p:stCondLst>
+                                            <p:cond delay="0"/>
+                                          </p:stCondLst>
+                                        </p:cTn>
+                                        <p:tgtEl>
+                                          <p:spTgt spid="5">
+                                            <p:txEl>
+                                              <p:pRg st="4" end="4"/>
+                                            </p:txEl>
+                                          </p:spTgt>
+                                        </p:tgtEl>
+                                        <p:attrNameLst>
+                                          <p:attrName>style.visibility</p:attrName>
+                                        </p:attrNameLst>
+                                      </p:cBhvr>
+                                      <p:to>
+                                        <p:strVal val="visible"/>
+                                      </p:to>
+                                    </p:set>
+                                    <p:animEffect transition="in" filter="fade">
+                                      <p:cBhvr>
+                                        <p:cTn id="19" dur="1000"/>
+                                        <p:tgtEl>
+                                          <p:spTgt spid="5">
+                                            <p:txEl>
+                                              <p:pRg st="4" end="4"/>
+                                            </p:txEl>
+                                          </p:spTgt>
+                                        </p:tgtEl>
+                                      </p:cBhvr>
+                                    </p:animEffect>
+                                    <p:anim calcmode="lin" valueType="num">
+                                      <p:cBhvr>
+                                        <p:cTn id="20" dur="1000" fill="hold"/>
+                                        <p:tgtEl>
+                                          <p:spTgt spid="5">
+                                            <p:txEl>
+                                              <p:pRg st="4" end="4"/>
+                                            </p:txEl>
+                                          </p:spTgt>
+                                        </p:tgtEl>
+                                        <p:attrNameLst>
+                                          <p:attrName>ppt_x</p:attrName>
+                                        </p:attrNameLst>
+                                      </p:cBhvr>
+                                      <p:tavLst>
+                                        <p:tav tm="0">
+                                          <p:val>
+                                            <p:strVal val="#ppt_x"/>
+                                          </p:val>
+                                        </p:tav>
+                                        <p:tav tm="100000">
+                                          <p:val>
+                                            <p:strVal val="#ppt_x"/>
+                                          </p:val>
+                                        </p:tav>
+                                      </p:tavLst>
+                                    </p:anim>
+                                    <p:anim calcmode="lin" valueType="num">
+                                      <p:cBhvr>
+                                        <p:cTn id="21" dur="1000" fill="hold"/>
+                                        <p:tgtEl>
+                                          <p:spTgt spid="5">
+                                            <p:txEl>
+                                              <p:pRg st="4" end="4"/>
+                                            </p:txEl>
+                                          </p:spTgt>
+                                        </p:tgtEl>
+                                        <p:attrNameLst>
+                                          <p:attrName>ppt_y</p:attrName>
+                                        </p:attrNameLst>
+                                      </p:cBhvr>
+                                      <p:tavLst>
+                                        <p:tav tm="0">
+                                          <p:val>
+                                            <p:strVal val="#ppt_y+.1"/>
+                                          </p:val>
+                                        </p:tav>
+                                        <p:tav tm="100000">
+                                          <p:val>
+                                            <p:strVal val="#ppt_y"/>
+                                          </p:val>
+                                        </p:tav>
+                                      </p:tavLst>
+                                    </p:anim>
+                                  </p:childTnLst>
+                                </p:cTn>
+                              </p:par>
+                              <p:par>
+                                <p:cTn id="22" presetID="42" presetClass="entr" presetSubtype="0" fill="hold" grpId="0" nodeType="withEffect">
+                                  <p:stCondLst>
+                                    <p:cond delay="0"/>
+                                  </p:stCondLst>
+                                  <p:childTnLst>
+                                    <p:set>
+                                      <p:cBhvr>
+                                        <p:cTn id="23" dur="1" fill="hold">
+                                          <p:stCondLst>
+                                            <p:cond delay="0"/>
+                                          </p:stCondLst>
+                                        </p:cTn>
+                                        <p:tgtEl>
+                                          <p:spTgt spid="9"/>
+                                        </p:tgtEl>
+                                        <p:attrNameLst>
+                                          <p:attrName>style.visibility</p:attrName>
+                                        </p:attrNameLst>
+                                      </p:cBhvr>
+                                      <p:to>
+                                        <p:strVal val="visible"/>
+                                      </p:to>
+                                    </p:set>
+                                    <p:animEffect transition="in" filter="fade">
+                                      <p:cBhvr>
+                                        <p:cTn id="24" dur="1000"/>
+                                        <p:tgtEl>
+                                          <p:spTgt spid="9"/>
+                                        </p:tgtEl>
+                                      </p:cBhvr>
+                                    </p:animEffect>
+                                    <p:anim calcmode="lin" valueType="num">
+                                      <p:cBhvr>
+                                        <p:cTn id="25" dur="1000" fill="hold"/>
+                                        <p:tgtEl>
+                                          <p:spTgt spid="9"/>
+                                        </p:tgtEl>
+                                        <p:attrNameLst>
+                                          <p:attrName>ppt_x</p:attrName>
+                                        </p:attrNameLst>
+                                      </p:cBhvr>
+                                      <p:tavLst>
+                                        <p:tav tm="0">
+                                          <p:val>
+                                            <p:strVal val="#ppt_x"/>
+                                          </p:val>
+                                        </p:tav>
+                                        <p:tav tm="100000">
+                                          <p:val>
+                                            <p:strVal val="#ppt_x"/>
+                                          </p:val>
+                                        </p:tav>
+                                      </p:tavLst>
+                                    </p:anim>
+                                    <p:anim calcmode="lin" valueType="num">
+                                      <p:cBhvr>
+                                        <p:cTn id="26" dur="1000" fill="hold"/>
+                                        <p:tgtEl>
+                                          <p:spTgt spid="9"/>
+                                        </p:tgtEl>
+                                        <p:attrNameLst>
+                                          <p:attrName>ppt_y</p:attrName>
+                                        </p:attrNameLst>
+                                      </p:cBhvr>
+                                      <p:tavLst>
+                                        <p:tav tm="0">
+                                          <p:val>
+                                            <p:strVal val="#ppt_y+.1"/>
+                                          </p:val>
+                                        </p:tav>
+                                        <p:tav tm="100000">
+                                          <p:val>
+                                            <p:strVal val="#ppt_y"/>
+                                          </p:val>
+                                        </p:tav>
+                                      </p:tavLst>
+                                    </p:anim>
+                                  </p:childTnLst>
+                                </p:cTn>
+                              </p:par>
+                            </p:childTnLst>
+                          </p:cTn>
+                        </p:par>
+                      </p:childTnLst>
+                    </p:cTn>
+                  </p:par>
+                </p:childTnLst>
+              </p:cTn>
+              <p:prevCondLst>
+                <p:cond evt="onPrev" delay="0">
+                  <p:tgtEl>
+                    <p:sldTgt/>
+                  </p:tgtEl>
+                </p:cond>
+              </p:prevCondLst>
+              <p:nextCondLst>
+                <p:cond evt="onNext" delay="0">
+                  <p:tgtEl>
+                    <p:sldTgt/>
+                  </p:tgtEl>
+                </p:cond>
+              </p:nextCondLst>
+            </p:seq>
+          </p:childTnLst>
+        </p:cTn>
+      </p:par>
+    </p:tnLst>
+    <p:bldLst>
+      <p:bldP spid="9" grpId="0"/>
+    </p:bldLst>
+  </p:timing>
 </p:sld>
 </file>
 
@@ -10482,7 +10923,7 @@
 </file>
 
 <file path=ppt/slides/slide14.xml><?xml version="1.0" encoding="utf-8"?>
-<p:sld xmlns:a="http://schemas.openxmlformats.org/drawingml/2006/main" xmlns:r="http://schemas.openxmlformats.org/officeDocument/2006/relationships" xmlns:p="http://schemas.openxmlformats.org/presentationml/2006/main">
+<p:sld xmlns:a="http://schemas.openxmlformats.org/drawingml/2006/main" xmlns:r="http://schemas.openxmlformats.org/officeDocument/2006/relationships" xmlns:p="http://schemas.openxmlformats.org/presentationml/2006/main" show="0">
   <p:cSld>
     <p:spTree>
       <p:nvGrpSpPr>
@@ -11600,13 +12041,13 @@
   <p:clrMapOvr>
     <a:masterClrMapping/>
   </p:clrMapOvr>
-  <mc:AlternateContent xmlns:mc="http://schemas.openxmlformats.org/markup-compatibility/2006" xmlns:p159="http://schemas.microsoft.com/office/powerpoint/2015/09/main">
-    <mc:Choice Requires="p159">
+  <mc:AlternateContent xmlns:mc="http://schemas.openxmlformats.org/markup-compatibility/2006">
+    <mc:Choice xmlns:p159="http://schemas.microsoft.com/office/powerpoint/2015/09/main" Requires="p159">
       <p:transition xmlns:p14="http://schemas.microsoft.com/office/powerpoint/2010/main" spd="slow" p14:dur="1250">
         <p159:morph option="byObject"/>
       </p:transition>
     </mc:Choice>
-    <mc:Fallback xmlns="">
+    <mc:Fallback>
       <p:transition spd="slow">
         <p:fade/>
       </p:transition>
@@ -14068,6 +14509,42 @@
             <a:r>
               <a:rPr lang="pt-BR" dirty="0"/>
               <a:t>Homicídio Doloso</a:t>
+            </a:r>
+          </a:p>
+        </p:txBody>
+      </p:sp>
+      <p:sp>
+        <p:nvSpPr>
+          <p:cNvPr id="4" name="CaixaDeTexto 3">
+            <a:extLst>
+              <a:ext uri="{FF2B5EF4-FFF2-40B4-BE49-F238E27FC236}">
+                <a16:creationId xmlns:a16="http://schemas.microsoft.com/office/drawing/2014/main" id="{A99C661F-9D50-CD91-A721-A8B43B2331B0}"/>
+              </a:ext>
+            </a:extLst>
+          </p:cNvPr>
+          <p:cNvSpPr txBox="1"/>
+          <p:nvPr/>
+        </p:nvSpPr>
+        <p:spPr>
+          <a:xfrm>
+            <a:off x="119922" y="1096835"/>
+            <a:ext cx="3480684" cy="769441"/>
+          </a:xfrm>
+          <a:prstGeom prst="rect">
+            <a:avLst/>
+          </a:prstGeom>
+          <a:noFill/>
+        </p:spPr>
+        <p:txBody>
+          <a:bodyPr wrap="square" rtlCol="0">
+            <a:spAutoFit/>
+          </a:bodyPr>
+          <a:lstStyle/>
+          <a:p>
+            <a:pPr algn="ctr"/>
+            <a:r>
+              <a:rPr lang="pt-BR" sz="2200" b="1" dirty="0"/>
+              <a:t>A queda recente da taxa de homicídios dolosos no RS</a:t>
             </a:r>
           </a:p>
         </p:txBody>
